--- a/workshop-aba-tea-lacc/apresentacao/Apresentacao_Workshop_ABA_TEA.pptx
+++ b/workshop-aba-tea-lacc/apresentacao/Apresentacao_Workshop_ABA_TEA.pptx
@@ -7904,16 +7904,40 @@
           </a:p>
         </p:txBody>
       </p:sp>
-      <p:sp>
-        <p:nvSpPr>
-          <p:cNvPr id="3" name="TextBox 2"/>
+      <p:pic>
+        <p:nvPicPr>
+          <p:cNvPr id="3" name="Picture 2" descr="foto_circulo_pptx.png"/>
+          <p:cNvPicPr>
+            <a:picLocks noChangeAspect="1"/>
+          </p:cNvPicPr>
+          <p:nvPr/>
+        </p:nvPicPr>
+        <p:blipFill>
+          <a:blip r:embed="rId2"/>
+          <a:stretch>
+            <a:fillRect/>
+          </a:stretch>
+        </p:blipFill>
+        <p:spPr>
+          <a:xfrm>
+            <a:off x="8445500" y="1905000"/>
+            <a:ext cx="2794000" cy="2794000"/>
+          </a:xfrm>
+          <a:prstGeom prst="rect">
+            <a:avLst/>
+          </a:prstGeom>
+        </p:spPr>
+      </p:pic>
+      <p:sp>
+        <p:nvSpPr>
+          <p:cNvPr id="4" name="TextBox 3"/>
           <p:cNvSpPr txBox="1"/>
           <p:nvPr/>
         </p:nvSpPr>
         <p:spPr>
           <a:xfrm>
             <a:off x="1016000" y="1723430"/>
-            <a:ext cx="10464800" cy="247650"/>
+            <a:ext cx="7456170" cy="247650"/>
           </a:xfrm>
           <a:prstGeom prst="rect">
             <a:avLst/>
@@ -7945,14 +7969,14 @@
       </p:sp>
       <p:sp>
         <p:nvSpPr>
-          <p:cNvPr id="4" name="TextBox 3"/>
+          <p:cNvPr id="5" name="TextBox 4"/>
           <p:cNvSpPr txBox="1"/>
           <p:nvPr/>
         </p:nvSpPr>
         <p:spPr>
           <a:xfrm>
             <a:off x="1016000" y="2148880"/>
-            <a:ext cx="10464800" cy="889000"/>
+            <a:ext cx="7456170" cy="889000"/>
           </a:xfrm>
           <a:prstGeom prst="rect">
             <a:avLst/>
@@ -7984,14 +8008,14 @@
       </p:sp>
       <p:sp>
         <p:nvSpPr>
-          <p:cNvPr id="5" name="TextBox 4"/>
+          <p:cNvPr id="6" name="TextBox 5"/>
           <p:cNvSpPr txBox="1"/>
           <p:nvPr/>
         </p:nvSpPr>
         <p:spPr>
           <a:xfrm>
             <a:off x="1016000" y="3215680"/>
-            <a:ext cx="10464800" cy="426641"/>
+            <a:ext cx="7456170" cy="426641"/>
           </a:xfrm>
           <a:prstGeom prst="rect">
             <a:avLst/>
@@ -8023,14 +8047,14 @@
       </p:sp>
       <p:sp>
         <p:nvSpPr>
-          <p:cNvPr id="6" name="TextBox 5"/>
+          <p:cNvPr id="7" name="TextBox 6"/>
           <p:cNvSpPr txBox="1"/>
           <p:nvPr/>
         </p:nvSpPr>
         <p:spPr>
           <a:xfrm>
             <a:off x="1016000" y="4378920"/>
-            <a:ext cx="10464800" cy="330200"/>
+            <a:ext cx="7456170" cy="330200"/>
           </a:xfrm>
           <a:prstGeom prst="rect">
             <a:avLst/>
@@ -8062,14 +8086,14 @@
       </p:sp>
       <p:sp>
         <p:nvSpPr>
-          <p:cNvPr id="7" name="TextBox 6"/>
+          <p:cNvPr id="8" name="TextBox 7"/>
           <p:cNvSpPr txBox="1"/>
           <p:nvPr/>
         </p:nvSpPr>
         <p:spPr>
           <a:xfrm>
             <a:off x="1016000" y="4886920"/>
-            <a:ext cx="10464800" cy="247650"/>
+            <a:ext cx="7456170" cy="247650"/>
           </a:xfrm>
           <a:prstGeom prst="rect">
             <a:avLst/>
@@ -11904,8 +11928,8 @@
         </p:nvSpPr>
         <p:spPr>
           <a:xfrm>
-            <a:off x="1168400" y="1702792"/>
-            <a:ext cx="10307828" cy="481905"/>
+            <a:off x="1168400" y="1159867"/>
+            <a:ext cx="6592824" cy="481905"/>
           </a:xfrm>
           <a:prstGeom prst="rect">
             <a:avLst/>
@@ -11943,8 +11967,8 @@
         </p:nvSpPr>
         <p:spPr>
           <a:xfrm>
-            <a:off x="1168400" y="2438698"/>
-            <a:ext cx="10307828" cy="462260"/>
+            <a:off x="1168400" y="1895773"/>
+            <a:ext cx="6592824" cy="462260"/>
           </a:xfrm>
           <a:prstGeom prst="rect">
             <a:avLst/>
@@ -11982,8 +12006,8 @@
         </p:nvSpPr>
         <p:spPr>
           <a:xfrm>
-            <a:off x="1168400" y="3154958"/>
-            <a:ext cx="10307828" cy="1809750"/>
+            <a:off x="1168400" y="2612033"/>
+            <a:ext cx="6592824" cy="2895600"/>
           </a:xfrm>
           <a:prstGeom prst="rect">
             <a:avLst/>
@@ -12082,9 +12106,33 @@
           </a:p>
         </p:txBody>
       </p:sp>
-      <p:sp>
-        <p:nvSpPr>
-          <p:cNvPr id="6" name="TextBox 5"/>
+      <p:pic>
+        <p:nvPicPr>
+          <p:cNvPr id="6" name="Picture 5" descr="foto_retrato.jpg"/>
+          <p:cNvPicPr>
+            <a:picLocks noChangeAspect="1"/>
+          </p:cNvPicPr>
+          <p:nvPr/>
+        </p:nvPicPr>
+        <p:blipFill>
+          <a:blip r:embed="rId2"/>
+          <a:stretch>
+            <a:fillRect/>
+          </a:stretch>
+        </p:blipFill>
+        <p:spPr>
+          <a:xfrm>
+            <a:off x="8128000" y="1428750"/>
+            <a:ext cx="3048000" cy="3810000"/>
+          </a:xfrm>
+          <a:prstGeom prst="rect">
+            <a:avLst/>
+          </a:prstGeom>
+        </p:spPr>
+      </p:pic>
+      <p:sp>
+        <p:nvSpPr>
+          <p:cNvPr id="7" name="TextBox 6"/>
           <p:cNvSpPr txBox="1"/>
           <p:nvPr/>
         </p:nvSpPr>
@@ -18796,7 +18844,7 @@
         </p:nvSpPr>
         <p:spPr>
           <a:xfrm>
-            <a:off x="1168400" y="1105892"/>
+            <a:off x="1168400" y="1093192"/>
             <a:ext cx="10569448" cy="452735"/>
           </a:xfrm>
           <a:prstGeom prst="rect">
@@ -18965,7 +19013,7 @@
         </p:blipFill>
         <p:spPr>
           <a:xfrm>
-            <a:off x="5537200" y="1787227"/>
+            <a:off x="5537200" y="1774527"/>
             <a:ext cx="5892800" cy="3314700"/>
           </a:xfrm>
           <a:prstGeom prst="rect">
@@ -18981,7 +19029,7 @@
         </p:nvSpPr>
         <p:spPr>
           <a:xfrm>
-            <a:off x="1168400" y="5330527"/>
+            <a:off x="1168400" y="5343227"/>
             <a:ext cx="10569448" cy="231080"/>
           </a:xfrm>
           <a:prstGeom prst="rect">
@@ -24470,15 +24518,39 @@
         <p:nvPr/>
       </p:nvGrpSpPr>
       <p:grpSpPr/>
-      <p:sp>
-        <p:nvSpPr>
-          <p:cNvPr id="2" name="TextBox 1"/>
-          <p:cNvSpPr txBox="1"/>
-          <p:nvPr/>
-        </p:nvSpPr>
-        <p:spPr>
-          <a:xfrm>
-            <a:off x="5217517" y="2290762"/>
+      <p:pic>
+        <p:nvPicPr>
+          <p:cNvPr id="2" name="Picture 1" descr="foto_circulo_pptx.png"/>
+          <p:cNvPicPr>
+            <a:picLocks noChangeAspect="1"/>
+          </p:cNvPicPr>
+          <p:nvPr/>
+        </p:nvPicPr>
+        <p:blipFill>
+          <a:blip r:embed="rId2"/>
+          <a:stretch>
+            <a:fillRect/>
+          </a:stretch>
+        </p:blipFill>
+        <p:spPr>
+          <a:xfrm>
+            <a:off x="5270500" y="1401762"/>
+            <a:ext cx="1651000" cy="1651000"/>
+          </a:xfrm>
+          <a:prstGeom prst="rect">
+            <a:avLst/>
+          </a:prstGeom>
+        </p:spPr>
+      </p:pic>
+      <p:sp>
+        <p:nvSpPr>
+          <p:cNvPr id="3" name="TextBox 2"/>
+          <p:cNvSpPr txBox="1"/>
+          <p:nvPr/>
+        </p:nvSpPr>
+        <p:spPr>
+          <a:xfrm>
+            <a:off x="5217517" y="3281362"/>
             <a:ext cx="1809675" cy="355600"/>
           </a:xfrm>
           <a:prstGeom prst="rect">
@@ -24511,13 +24583,13 @@
       </p:sp>
       <p:sp>
         <p:nvSpPr>
-          <p:cNvPr id="3" name="TextBox 2"/>
-          <p:cNvSpPr txBox="1"/>
-          <p:nvPr/>
-        </p:nvSpPr>
-        <p:spPr>
-          <a:xfrm>
-            <a:off x="3589933" y="2925762"/>
+          <p:cNvPr id="4" name="TextBox 3"/>
+          <p:cNvSpPr txBox="1"/>
+          <p:nvPr/>
+        </p:nvSpPr>
+        <p:spPr>
+          <a:xfrm>
+            <a:off x="3589933" y="3865562"/>
             <a:ext cx="5162498" cy="1095375"/>
           </a:xfrm>
           <a:prstGeom prst="rect">
@@ -24550,13 +24622,13 @@
       </p:sp>
       <p:sp>
         <p:nvSpPr>
-          <p:cNvPr id="4" name="TextBox 3"/>
-          <p:cNvSpPr txBox="1"/>
-          <p:nvPr/>
-        </p:nvSpPr>
-        <p:spPr>
-          <a:xfrm>
-            <a:off x="3269655" y="4300538"/>
+          <p:cNvPr id="5" name="TextBox 4"/>
+          <p:cNvSpPr txBox="1"/>
+          <p:nvPr/>
+        </p:nvSpPr>
+        <p:spPr>
+          <a:xfrm>
+            <a:off x="3269655" y="5189538"/>
             <a:ext cx="5822271" cy="266700"/>
           </a:xfrm>
           <a:prstGeom prst="rect">
@@ -24589,7 +24661,7 @@
       </p:sp>
       <p:sp>
         <p:nvSpPr>
-          <p:cNvPr id="5" name="TextBox 4"/>
+          <p:cNvPr id="6" name="TextBox 5"/>
           <p:cNvSpPr txBox="1"/>
           <p:nvPr/>
         </p:nvSpPr>
@@ -24704,7 +24776,7 @@
         </p:nvSpPr>
         <p:spPr>
           <a:xfrm>
-            <a:off x="1168400" y="1105892"/>
+            <a:off x="1168400" y="1093192"/>
             <a:ext cx="10569448" cy="452735"/>
           </a:xfrm>
           <a:prstGeom prst="rect">
@@ -24873,7 +24945,7 @@
         </p:blipFill>
         <p:spPr>
           <a:xfrm>
-            <a:off x="5537200" y="1787227"/>
+            <a:off x="5537200" y="1774527"/>
             <a:ext cx="5892800" cy="3314700"/>
           </a:xfrm>
           <a:prstGeom prst="rect">
@@ -24889,7 +24961,7 @@
         </p:nvSpPr>
         <p:spPr>
           <a:xfrm>
-            <a:off x="1168400" y="5330527"/>
+            <a:off x="1168400" y="5343227"/>
             <a:ext cx="10569448" cy="231080"/>
           </a:xfrm>
           <a:prstGeom prst="rect">

--- a/workshop-aba-tea-lacc/apresentacao/Apresentacao_Workshop_ABA_TEA.pptx
+++ b/workshop-aba-tea-lacc/apresentacao/Apresentacao_Workshop_ABA_TEA.pptx
@@ -7904,30 +7904,45 @@
           </a:p>
         </p:txBody>
       </p:sp>
-      <p:pic>
-        <p:nvPicPr>
-          <p:cNvPr id="3" name="Picture 2" descr="foto_circulo_pptx.png"/>
-          <p:cNvPicPr>
-            <a:picLocks noChangeAspect="1"/>
-          </p:cNvPicPr>
-          <p:nvPr/>
-        </p:nvPicPr>
-        <p:blipFill>
-          <a:blip r:embed="rId2"/>
-          <a:stretch>
-            <a:fillRect/>
-          </a:stretch>
-        </p:blipFill>
-        <p:spPr>
-          <a:xfrm>
-            <a:off x="8445500" y="1905000"/>
-            <a:ext cx="2794000" cy="2794000"/>
-          </a:xfrm>
-          <a:prstGeom prst="rect">
-            <a:avLst/>
-          </a:prstGeom>
-        </p:spPr>
-      </p:pic>
+      <p:sp>
+        <p:nvSpPr>
+          <p:cNvPr id="3" name="TextBox 2"/>
+          <p:cNvSpPr txBox="1"/>
+          <p:nvPr/>
+        </p:nvSpPr>
+        <p:spPr>
+          <a:xfrm>
+            <a:off x="1016000" y="1723430"/>
+            <a:ext cx="10464800" cy="247650"/>
+          </a:xfrm>
+          <a:prstGeom prst="rect">
+            <a:avLst/>
+          </a:prstGeom>
+          <a:noFill/>
+        </p:spPr>
+        <p:txBody>
+          <a:bodyPr wrap="square" lIns="0" rIns="0" tIns="0" bIns="0" anchor="t">
+            <a:noAutofit/>
+          </a:bodyPr>
+          <a:lstStyle/>
+          <a:p>
+            <a:pPr algn="l">
+              <a:lnSpc>
+                <a:spcPct val="98000"/>
+              </a:lnSpc>
+            </a:pPr>
+            <a:r>
+              <a:rPr sz="1600" b="0" i="0">
+                <a:solidFill>
+                  <a:srgbClr val="9FD3D8"/>
+                </a:solidFill>
+                <a:latin typeface="Montserrat"/>
+              </a:rPr>
+              <a:t>Liga Acadêmica Cognitivo-Comportamental (LACC)</a:t>
+            </a:r>
+          </a:p>
+        </p:txBody>
+      </p:sp>
       <p:sp>
         <p:nvSpPr>
           <p:cNvPr id="4" name="TextBox 3"/>
@@ -7936,8 +7951,8 @@
         </p:nvSpPr>
         <p:spPr>
           <a:xfrm>
-            <a:off x="1016000" y="1723430"/>
-            <a:ext cx="7456170" cy="247650"/>
+            <a:off x="1016000" y="2148880"/>
+            <a:ext cx="10464800" cy="889000"/>
           </a:xfrm>
           <a:prstGeom prst="rect">
             <a:avLst/>
@@ -7952,31 +7967,70 @@
           <a:p>
             <a:pPr algn="l">
               <a:lnSpc>
+                <a:spcPct val="82000"/>
+              </a:lnSpc>
+            </a:pPr>
+            <a:r>
+              <a:rPr sz="7000" b="1" i="0">
+                <a:solidFill>
+                  <a:srgbClr val="FFFFFF"/>
+                </a:solidFill>
+                <a:latin typeface="Montserrat"/>
+              </a:rPr>
+              <a:t>ABA e TEA</a:t>
+            </a:r>
+          </a:p>
+        </p:txBody>
+      </p:sp>
+      <p:sp>
+        <p:nvSpPr>
+          <p:cNvPr id="5" name="TextBox 4"/>
+          <p:cNvSpPr txBox="1"/>
+          <p:nvPr/>
+        </p:nvSpPr>
+        <p:spPr>
+          <a:xfrm>
+            <a:off x="1016000" y="3215680"/>
+            <a:ext cx="10464800" cy="426641"/>
+          </a:xfrm>
+          <a:prstGeom prst="rect">
+            <a:avLst/>
+          </a:prstGeom>
+          <a:noFill/>
+        </p:spPr>
+        <p:txBody>
+          <a:bodyPr wrap="square" lIns="0" rIns="0" tIns="0" bIns="0" anchor="t">
+            <a:noAutofit/>
+          </a:bodyPr>
+          <a:lstStyle/>
+          <a:p>
+            <a:pPr algn="l">
+              <a:lnSpc>
                 <a:spcPct val="98000"/>
               </a:lnSpc>
             </a:pPr>
             <a:r>
-              <a:rPr sz="1600" b="0" i="0">
-                <a:solidFill>
-                  <a:srgbClr val="9FD3D8"/>
-                </a:solidFill>
-                <a:latin typeface="Montserrat"/>
-              </a:rPr>
-              <a:t>Liga Acadêmica Cognitivo-Comportamental (LACC)</a:t>
-            </a:r>
-          </a:p>
-        </p:txBody>
-      </p:sp>
-      <p:sp>
-        <p:nvSpPr>
-          <p:cNvPr id="5" name="TextBox 4"/>
-          <p:cNvSpPr txBox="1"/>
-          <p:nvPr/>
-        </p:nvSpPr>
-        <p:spPr>
-          <a:xfrm>
-            <a:off x="1016000" y="2148880"/>
-            <a:ext cx="7456170" cy="889000"/>
+              <a:rPr sz="2800" b="0" i="0">
+                <a:solidFill>
+                  <a:srgbClr val="E6ECF2"/>
+                </a:solidFill>
+                <a:latin typeface="Montserrat"/>
+              </a:rPr>
+              <a:t>da análise funcional à decisão clínica</a:t>
+            </a:r>
+          </a:p>
+        </p:txBody>
+      </p:sp>
+      <p:sp>
+        <p:nvSpPr>
+          <p:cNvPr id="6" name="TextBox 5"/>
+          <p:cNvSpPr txBox="1"/>
+          <p:nvPr/>
+        </p:nvSpPr>
+        <p:spPr>
+          <a:xfrm>
+            <a:off x="1016000" y="4378920"/>
+            <a:ext cx="10464800" cy="330200"/>
           </a:xfrm>
           <a:prstGeom prst="rect">
             <a:avLst/>
@@ -7991,56 +8045,17 @@
           <a:p>
             <a:pPr algn="l">
               <a:lnSpc>
-                <a:spcPct val="82000"/>
-              </a:lnSpc>
-            </a:pPr>
-            <a:r>
-              <a:rPr sz="7000" b="1" i="0">
+                <a:spcPct val="98000"/>
+              </a:lnSpc>
+            </a:pPr>
+            <a:r>
+              <a:rPr sz="2100" b="1" i="0">
                 <a:solidFill>
                   <a:srgbClr val="FFFFFF"/>
                 </a:solidFill>
                 <a:latin typeface="Montserrat"/>
               </a:rPr>
-              <a:t>ABA e TEA</a:t>
-            </a:r>
-          </a:p>
-        </p:txBody>
-      </p:sp>
-      <p:sp>
-        <p:nvSpPr>
-          <p:cNvPr id="6" name="TextBox 5"/>
-          <p:cNvSpPr txBox="1"/>
-          <p:nvPr/>
-        </p:nvSpPr>
-        <p:spPr>
-          <a:xfrm>
-            <a:off x="1016000" y="3215680"/>
-            <a:ext cx="7456170" cy="426641"/>
-          </a:xfrm>
-          <a:prstGeom prst="rect">
-            <a:avLst/>
-          </a:prstGeom>
-          <a:noFill/>
-        </p:spPr>
-        <p:txBody>
-          <a:bodyPr wrap="square" lIns="0" rIns="0" tIns="0" bIns="0" anchor="t">
-            <a:noAutofit/>
-          </a:bodyPr>
-          <a:lstStyle/>
-          <a:p>
-            <a:pPr algn="l">
-              <a:lnSpc>
-                <a:spcPct val="98000"/>
-              </a:lnSpc>
-            </a:pPr>
-            <a:r>
-              <a:rPr sz="2800" b="0" i="0">
-                <a:solidFill>
-                  <a:srgbClr val="E6ECF2"/>
-                </a:solidFill>
-                <a:latin typeface="Montserrat"/>
-              </a:rPr>
-              <a:t>da análise funcional à decisão clínica</a:t>
+              <a:t>Betina Binatti</a:t>
             </a:r>
           </a:p>
         </p:txBody>
@@ -8053,47 +8068,8 @@
         </p:nvSpPr>
         <p:spPr>
           <a:xfrm>
-            <a:off x="1016000" y="4378920"/>
-            <a:ext cx="7456170" cy="330200"/>
-          </a:xfrm>
-          <a:prstGeom prst="rect">
-            <a:avLst/>
-          </a:prstGeom>
-          <a:noFill/>
-        </p:spPr>
-        <p:txBody>
-          <a:bodyPr wrap="square" lIns="0" rIns="0" tIns="0" bIns="0" anchor="t">
-            <a:noAutofit/>
-          </a:bodyPr>
-          <a:lstStyle/>
-          <a:p>
-            <a:pPr algn="l">
-              <a:lnSpc>
-                <a:spcPct val="98000"/>
-              </a:lnSpc>
-            </a:pPr>
-            <a:r>
-              <a:rPr sz="2100" b="1" i="0">
-                <a:solidFill>
-                  <a:srgbClr val="FFFFFF"/>
-                </a:solidFill>
-                <a:latin typeface="Montserrat"/>
-              </a:rPr>
-              <a:t>Betina Binatti</a:t>
-            </a:r>
-          </a:p>
-        </p:txBody>
-      </p:sp>
-      <p:sp>
-        <p:nvSpPr>
-          <p:cNvPr id="8" name="TextBox 7"/>
-          <p:cNvSpPr txBox="1"/>
-          <p:nvPr/>
-        </p:nvSpPr>
-        <p:spPr>
-          <a:xfrm>
             <a:off x="1016000" y="4886920"/>
-            <a:ext cx="7456170" cy="247650"/>
+            <a:ext cx="10464800" cy="247650"/>
           </a:xfrm>
           <a:prstGeom prst="rect">
             <a:avLst/>
@@ -24518,30 +24494,45 @@
         <p:nvPr/>
       </p:nvGrpSpPr>
       <p:grpSpPr/>
-      <p:pic>
-        <p:nvPicPr>
-          <p:cNvPr id="2" name="Picture 1" descr="foto_circulo_pptx.png"/>
-          <p:cNvPicPr>
-            <a:picLocks noChangeAspect="1"/>
-          </p:cNvPicPr>
-          <p:nvPr/>
-        </p:nvPicPr>
-        <p:blipFill>
-          <a:blip r:embed="rId2"/>
-          <a:stretch>
-            <a:fillRect/>
-          </a:stretch>
-        </p:blipFill>
-        <p:spPr>
-          <a:xfrm>
-            <a:off x="5270500" y="1401762"/>
-            <a:ext cx="1651000" cy="1651000"/>
-          </a:xfrm>
-          <a:prstGeom prst="rect">
-            <a:avLst/>
-          </a:prstGeom>
-        </p:spPr>
-      </p:pic>
+      <p:sp>
+        <p:nvSpPr>
+          <p:cNvPr id="2" name="TextBox 1"/>
+          <p:cNvSpPr txBox="1"/>
+          <p:nvPr/>
+        </p:nvSpPr>
+        <p:spPr>
+          <a:xfrm>
+            <a:off x="5217517" y="2290762"/>
+            <a:ext cx="1809675" cy="355600"/>
+          </a:xfrm>
+          <a:prstGeom prst="rect">
+            <a:avLst/>
+          </a:prstGeom>
+          <a:noFill/>
+        </p:spPr>
+        <p:txBody>
+          <a:bodyPr wrap="square" lIns="0" rIns="0" tIns="0" bIns="0" anchor="t">
+            <a:noAutofit/>
+          </a:bodyPr>
+          <a:lstStyle/>
+          <a:p>
+            <a:pPr algn="ctr">
+              <a:lnSpc>
+                <a:spcPct val="115000"/>
+              </a:lnSpc>
+            </a:pPr>
+            <a:r>
+              <a:rPr sz="2000" b="0" i="0">
+                <a:solidFill>
+                  <a:srgbClr val="D8E1EA"/>
+                </a:solidFill>
+                <a:latin typeface="Montserrat"/>
+              </a:rPr>
+              <a:t>Betina Binatti</a:t>
+            </a:r>
+          </a:p>
+        </p:txBody>
+      </p:sp>
       <p:sp>
         <p:nvSpPr>
           <p:cNvPr id="3" name="TextBox 2"/>
@@ -24550,8 +24541,8 @@
         </p:nvSpPr>
         <p:spPr>
           <a:xfrm>
-            <a:off x="5217517" y="3281362"/>
-            <a:ext cx="1809675" cy="355600"/>
+            <a:off x="3589933" y="2925762"/>
+            <a:ext cx="5162498" cy="1095375"/>
           </a:xfrm>
           <a:prstGeom prst="rect">
             <a:avLst/>
@@ -24566,56 +24557,56 @@
           <a:p>
             <a:pPr algn="ctr">
               <a:lnSpc>
+                <a:spcPct val="94000"/>
+              </a:lnSpc>
+            </a:pPr>
+            <a:r>
+              <a:rPr sz="7500" b="1" i="0">
+                <a:solidFill>
+                  <a:srgbClr val="FFFFFF"/>
+                </a:solidFill>
+                <a:latin typeface="Montserrat"/>
+              </a:rPr>
+              <a:t>Obrigada!</a:t>
+            </a:r>
+          </a:p>
+        </p:txBody>
+      </p:sp>
+      <p:sp>
+        <p:nvSpPr>
+          <p:cNvPr id="4" name="TextBox 3"/>
+          <p:cNvSpPr txBox="1"/>
+          <p:nvPr/>
+        </p:nvSpPr>
+        <p:spPr>
+          <a:xfrm>
+            <a:off x="3269655" y="4300538"/>
+            <a:ext cx="5822271" cy="266700"/>
+          </a:xfrm>
+          <a:prstGeom prst="rect">
+            <a:avLst/>
+          </a:prstGeom>
+          <a:noFill/>
+        </p:spPr>
+        <p:txBody>
+          <a:bodyPr wrap="square" lIns="0" rIns="0" tIns="0" bIns="0" anchor="t">
+            <a:noAutofit/>
+          </a:bodyPr>
+          <a:lstStyle/>
+          <a:p>
+            <a:pPr algn="ctr">
+              <a:lnSpc>
                 <a:spcPct val="115000"/>
               </a:lnSpc>
             </a:pPr>
             <a:r>
-              <a:rPr sz="2000" b="0" i="0">
-                <a:solidFill>
-                  <a:srgbClr val="D8E1EA"/>
-                </a:solidFill>
-                <a:latin typeface="Montserrat"/>
-              </a:rPr>
-              <a:t>Betina Binatti</a:t>
-            </a:r>
-          </a:p>
-        </p:txBody>
-      </p:sp>
-      <p:sp>
-        <p:nvSpPr>
-          <p:cNvPr id="4" name="TextBox 3"/>
-          <p:cNvSpPr txBox="1"/>
-          <p:nvPr/>
-        </p:nvSpPr>
-        <p:spPr>
-          <a:xfrm>
-            <a:off x="3589933" y="3865562"/>
-            <a:ext cx="5162498" cy="1095375"/>
-          </a:xfrm>
-          <a:prstGeom prst="rect">
-            <a:avLst/>
-          </a:prstGeom>
-          <a:noFill/>
-        </p:spPr>
-        <p:txBody>
-          <a:bodyPr wrap="square" lIns="0" rIns="0" tIns="0" bIns="0" anchor="t">
-            <a:noAutofit/>
-          </a:bodyPr>
-          <a:lstStyle/>
-          <a:p>
-            <a:pPr algn="ctr">
-              <a:lnSpc>
-                <a:spcPct val="94000"/>
-              </a:lnSpc>
-            </a:pPr>
-            <a:r>
-              <a:rPr sz="7500" b="1" i="0">
-                <a:solidFill>
-                  <a:srgbClr val="FFFFFF"/>
-                </a:solidFill>
-                <a:latin typeface="Montserrat"/>
-              </a:rPr>
-              <a:t>Obrigada!</a:t>
+              <a:rPr sz="1500" b="0" i="1">
+                <a:solidFill>
+                  <a:srgbClr val="9FD3D8"/>
+                </a:solidFill>
+                <a:latin typeface="Montserrat"/>
+              </a:rPr>
+              <a:t>Workshop ABA e TEA, LACC, PUCRS, 24 de outubro de 2026</a:t>
             </a:r>
           </a:p>
         </p:txBody>
@@ -24623,45 +24614,6 @@
       <p:sp>
         <p:nvSpPr>
           <p:cNvPr id="5" name="TextBox 4"/>
-          <p:cNvSpPr txBox="1"/>
-          <p:nvPr/>
-        </p:nvSpPr>
-        <p:spPr>
-          <a:xfrm>
-            <a:off x="3269655" y="5189538"/>
-            <a:ext cx="5822271" cy="266700"/>
-          </a:xfrm>
-          <a:prstGeom prst="rect">
-            <a:avLst/>
-          </a:prstGeom>
-          <a:noFill/>
-        </p:spPr>
-        <p:txBody>
-          <a:bodyPr wrap="square" lIns="0" rIns="0" tIns="0" bIns="0" anchor="t">
-            <a:noAutofit/>
-          </a:bodyPr>
-          <a:lstStyle/>
-          <a:p>
-            <a:pPr algn="ctr">
-              <a:lnSpc>
-                <a:spcPct val="115000"/>
-              </a:lnSpc>
-            </a:pPr>
-            <a:r>
-              <a:rPr sz="1500" b="0" i="1">
-                <a:solidFill>
-                  <a:srgbClr val="9FD3D8"/>
-                </a:solidFill>
-                <a:latin typeface="Montserrat"/>
-              </a:rPr>
-              <a:t>Workshop ABA e TEA, LACC, PUCRS, 24 de outubro de 2026</a:t>
-            </a:r>
-          </a:p>
-        </p:txBody>
-      </p:sp>
-      <p:sp>
-        <p:nvSpPr>
-          <p:cNvPr id="6" name="TextBox 5"/>
           <p:cNvSpPr txBox="1"/>
           <p:nvPr/>
         </p:nvSpPr>

--- a/workshop-aba-tea-lacc/apresentacao/Apresentacao_Workshop_ABA_TEA.pptx
+++ b/workshop-aba-tea-lacc/apresentacao/Apresentacao_Workshop_ABA_TEA.pptx
@@ -65,7 +65,6 @@
     <p:sldId id="313" r:id="rId65"/>
     <p:sldId id="314" r:id="rId66"/>
     <p:sldId id="315" r:id="rId67"/>
-    <p:sldId id="316" r:id="rId68"/>
   </p:sldIdLst>
   <p:sldSz cx="12192000" cy="6858000" type="screen4x3"/>
   <p:notesSz cx="6858000" cy="9144000"/>
@@ -778,7 +777,7 @@
           <a:p/>
           <a:p>
             <a:r>
-              <a:t>RESPOSTAS: intervir se justifica quando há ganho real para a vida da pessoa: comunicação (pedir, recusar, se expressar), aprendizagem e participação (escola, casa, comunidade), autonomia, segurança (comportamento que machuca a pessoa ou outros) e qualidade de vida. Objetivos definidos com a família e, sempre que possível, com a pessoa. Características autistas inofensivas (estereotipias sem dano, interesses intensos) não são alvo por si só.</a:t>
+              <a:t>RESPOSTAS: intervir se justifica quando há ganho real para a vida da pessoa: comunicação (pedir, recusar, se expressar), aprendizagem e participação (escola, casa, comunidade), autonomia, segurança (comportamento que machuca a pessoa ou outros) e qualidade de vida. Objetivos definidos com a família e, sempre que possível, com a pessoa. Características autistas que não causam prejuízo (estereotipias sem dano, interesses intensos) não são alvo por si só.</a:t>
             </a:r>
           </a:p>
         </p:txBody>
@@ -2692,7 +2691,7 @@
           <a:lstStyle/>
           <a:p>
             <a:r>
-              <a:t>Numerar os grupos em voz alta antes de projetar a vinheta. Se houver só 1 ou 2 grupos, cada um responde P1 a P4 mais as perguntas 5 e 6. Tempo: 2 min (início do Bloco 5, 11h03).</a:t>
+              <a:t>Numerar os grupos em voz alta antes do vídeo. Explicar a sequência: vídeo, história, perguntas. As respostas só aparecem na plenária, depois que os grupos responderem. Se houver só 1 ou 2 grupos, cada um responde as perguntas 1 a 4 e também a 5 e a 6. Tempo: 2 min (início do Bloco 5, 11h03).</a:t>
             </a:r>
           </a:p>
         </p:txBody>
@@ -2762,13 +2761,13 @@
           <a:lstStyle/>
           <a:p>
             <a:r>
-              <a:t>O vídeo tem som (música e efeitos): conferir caixa de som antes. No artefato, o vídeo está no próprio slide: clique nele para começar (toca com som). No PDF não há vídeo: usar o arquivo Video_Theo_animacao.mp4 (pasta apresentacao) à parte. Exibir uma vez, dentro dos 2 minutos de instruções. Depois do vídeo: "Vocês viram UM episódio. Agora vejam o que a equipe registrou em quatro semanas" e projetar a vinheta. Na plenária, pergunta opcional: "O que mantém o comportamento da terapeuta?" (devolver os trilhos encerra o grito e alivia o adulto). Se o vídeo não estiver disponível ou não funcionar, pular este slide: a atividade funciona só com o texto.</a:t>
+              <a:t>O vídeo tem som (música e efeitos): conferir caixa de som antes. No artefato, o vídeo está no próprio slide: clique nele para começar (toca com som). No PDF não há vídeo: usar o arquivo Video_Theo_animacao.mp4 (pasta apresentacao) à parte. Exibir uma vez, dentro dos 2 minutos de instruções. Depois do vídeo: "Vocês viram UM episódio. Agora vejam o que a equipe registrou em quatro semanas" e projetar a vinheta. Na plenária, pergunta opcional: "O que mantém o comportamento da terapeuta?" (devolver os trilhos encerra o grito e alivia o adulto). Se o vídeo não estiver disponível ou não funcionar, pular este slide: a atividade funciona só com o texto. Não mostrar respostas agora: as perguntas do vídeo são respondidas pelos grupos e corrigidas na plenária (slide 36a).</a:t>
             </a:r>
           </a:p>
           <a:p/>
           <a:p>
             <a:r>
-              <a:t>RESPOSTAS DO VÍDEO: Antes = a terapeuta guarda os trilhos na caixa e aponta a mesa ('Agora acabou. Vamos para a mesa.'). O que ele faz = grita, se joga no chão e chuta o ar. Depois = a terapeuta fica sem saber o que fazer e devolve os trilhos; ele volta a brincar. Pergunta extra: devolver os trilhos faz o grito parar e alivia a terapeuta; esse alívio pode reforçar o ato de devolver (reforçamento negativo do adulto) e manter o ciclo.</a:t>
+              <a:t>RESPOSTAS DO VÍDEO (para a plenária): Antes = a terapeuta guarda os trilhos na caixa e aponta a mesa ('Agora acabou. Vamos para a mesa.'). O que ele faz = grita, se joga no chão e chuta o ar. Depois = a terapeuta fica sem saber o que fazer e devolve os trilhos; ele volta a brincar. Pergunta extra: devolver os trilhos faz o grito parar e alivia a terapeuta; esse alívio pode reforçar o ato de devolver (reforçamento negativo do adulto) e manter o ciclo.</a:t>
             </a:r>
           </a:p>
         </p:txBody>
@@ -2838,7 +2837,13 @@
           <a:lstStyle/>
           <a:p>
             <a:r>
-              <a:t>Slide de respostas: mostrar depois que a turma responder.</a:t>
+              <a:t>Ler em voz alta uma vez (cerca de 1,5 min, com o slide seguinte). Circular entre os grupos. Avisar aos 5 min ("passem para a pergunta do rodízio") e quando faltar 1 min. Os slides 35, 35b e 36 ficam alternados durante os 10 min de trabalho em grupo.</a:t>
+            </a:r>
+          </a:p>
+          <a:p/>
+          <a:p>
+            <a:r>
+              <a:t>RESPOSTAS P1 e P2: P1 = grita, se joga no chão e chuta o ar, por 3 a 8 minutos, em 11 de 12 sessões. Evitar 'birra', 'crise', 'surto', 'manha', 'desregulado' (supõem intenção ou estado que não observamos). P2 = antecedentes: 'agora acabou, vamos para a mesa', retirada dos trilhos, apresentação da mesa. Contexto: sono ruim, troca de terapeuta, previsibilidade (cartão e aviso: só 3 sessões, é indício). Sono e troca de terapeuta NÃO são funções.</a:t>
             </a:r>
           </a:p>
         </p:txBody>
@@ -2978,13 +2983,13 @@
           <a:lstStyle/>
           <a:p>
             <a:r>
-              <a:t>Ler em voz alta uma vez (cerca de 1,5 min, com o slide seguinte). Circular entre os grupos. Avisar aos 5 min ("passem para a pergunta do rodízio") e quando faltar 1 min. Os slides 35, 35b e 36 ficam alternados durante os 10 min de trabalho em grupo.</a:t>
+              <a:t>Continuação da vinheta. O cartão "primeiro → depois" foi registrado em só 3 sessões: é indício, não conclusão.</a:t>
             </a:r>
           </a:p>
           <a:p/>
           <a:p>
             <a:r>
-              <a:t>RESPOSTAS P1 e P2: P1 = grita, se joga no chão e chuta o ar, por 3 a 8 minutos, em 11 de 12 sessões. Evitar 'birra', 'crise', 'surto', 'manha', 'desregulado' (supõem intenção ou estado que não observamos). P2 = antecedentes: 'agora acabou, vamos para a mesa', retirada dos trilhos, apresentação da mesa. Contexto: sono ruim, troca de terapeuta, previsibilidade (cartão e aviso: só 3 sessões, é indício). Sono e troca de terapeuta NÃO são funções.</a:t>
+              <a:t>RESPOSTAS P3: trilhos devolvidos 'por mais cinco minutos'; mesa adiada; em algumas sessões a mesa foi mantida; possível atenção durante o episódio. Como o comportamento às vezes 'funciona' e às vezes não, tende a ser mais persistente.</a:t>
             </a:r>
           </a:p>
         </p:txBody>
@@ -3054,13 +3059,13 @@
           <a:lstStyle/>
           <a:p>
             <a:r>
-              <a:t>Continuação da vinheta. O cartão "primeiro → depois" foi registrado em só 3 sessões: é indício, não conclusão.</a:t>
+              <a:t>Alternar com os slides da vinheta. Ao circular: grupos que listam hipóteses sem dados estão reconhecendo categorias; pergunte "que trecho da vinheta sustenta isso?". Para grupos que terminarem antes: slide R2 (dado novo) ou R1 (Lara). A antiga pergunta 5 (como distinguir as hipóteses) foi retirada; as perguntas 5 e 6 de agora são a estratégia e o dilema.</a:t>
             </a:r>
           </a:p>
           <a:p/>
           <a:p>
             <a:r>
-              <a:t>RESPOSTAS P3: trilhos devolvidos 'por mais cinco minutos'; mesa adiada; em algumas sessões a mesa foi mantida; possível atenção durante o episódio. Como o comportamento às vezes 'funciona' e às vezes não, tende a ser mais persistente.</a:t>
+              <a:t>RESPOSTAS 4 (dado que ajuda / dado que atrapalha): H1 acesso aos trilhos: a favor = acontece quando os trilhos são guardados, às vezes voltam, em casa ao desligar a TV; contra = no lanche os trilhos também foram guardados e não houve episódio. H2 fuga da mesa: a favor = não acontece quando o próximo é o lanche, às vezes a mesa é adiada; contra = em casa o antecedente é o banho. H3 as duas juntas: os antecedentes acontecem juntos e as consequências se alternam. H4 atenção: pouco apoio nos dados. O LANCHE é a pista principal: enfraquece H1, fortalece H2/H3, mas não descarta H1.</a:t>
             </a:r>
           </a:p>
         </p:txBody>
@@ -3130,13 +3135,7 @@
           <a:lstStyle/>
           <a:p>
             <a:r>
-              <a:t>Alternar com os slides da vinheta. Ao circular: grupos que listam hipóteses sem dados estão reconhecendo categorias; pergunte "que trecho da vinheta sustenta isso?". Para grupos que terminarem antes: slide R2 (dado novo) ou R1 (Lara). A antiga pergunta 5 (como distinguir as hipóteses) foi retirada; as perguntas 5 e 6 de agora são a estratégia e o dilema.</a:t>
-            </a:r>
-          </a:p>
-          <a:p/>
-          <a:p>
-            <a:r>
-              <a:t>RESPOSTAS 4 (dado que ajuda / dado que atrapalha): H1 acesso aos trilhos: a favor = acontece quando os trilhos são guardados, às vezes voltam, em casa ao desligar a TV; contra = no lanche os trilhos também foram guardados e não houve episódio. H2 fuga da mesa: a favor = não acontece quando o próximo é o lanche, às vezes a mesa é adiada; contra = em casa o antecedente é o banho. H3 as duas juntas: os antecedentes acontecem juntos e as consequências se alternam. H4 atenção: pouco apoio nos dados. O LANCHE é a pista principal: enfraquece H1, fortalece H2/H3, mas não descarta H1.</a:t>
+              <a:t>Slide de respostas: mostrar depois que a turma responder.</a:t>
             </a:r>
           </a:p>
         </p:txBody>
@@ -3416,7 +3415,13 @@
           <a:lstStyle/>
           <a:p>
             <a:r>
-              <a:t>Slide de respostas: mostrar depois que a turma responder.</a:t>
+              <a:t>Seguir a ordem: comportamento (1 min, turma) · antes e depois (1 min) · explicações possíveis com dado que ajuda e dado que atrapalha (2 min, dois grupos; destacar o lanche) · o que fazer e o risco de errar a explicação (2 min, grupos da pergunta 5) · dilema dos trilhos (1,5 min, grupos da pergunta 6) · fechamento relendo o aviso (0,5 min). Mostrar os slides de respostas 36a a 36d conforme cada pergunta for discutida. Tempo: 8 min (até 11h23).</a:t>
+            </a:r>
+          </a:p>
+          <a:p/>
+          <a:p>
+            <a:r>
+              <a:t>RESPOSTAS 5: estratégia para a explicação 'trilhos' ('primeiro mesa, depois trem'; ensinar a pedir 'mais trem' e a esperar) tem pouco efeito se a explicação real for fugir da mesa; estratégia para 'fugir da mesa' (tarefa curta, tema de trem; ensinar a pedir 'pausa') não resolve se for 'trilhos'; adiar a mesa quando ele grita FORTALECE o comportamento. Errar a explicação pode ensinar o contrário. RESPOSTAS 6: acolher a mãe e argumentar: o interesse não é o problema e pode ser recurso de ensino; tirar os trilhos não ensina a pedir 'mais' ou 'pausa'; pode não resolver se a função for fugir da mesa; reduz bem-estar e engajamento; decidir junto, com plano para casa e supervisão.</a:t>
             </a:r>
           </a:p>
         </p:txBody>
@@ -3486,13 +3491,13 @@
           <a:lstStyle/>
           <a:p>
             <a:r>
-              <a:t>Seguir a ordem: comportamento (1 min, turma) · antes e depois (1 min) · explicações possíveis com dado que ajuda e dado que atrapalha (2 min, dois grupos; destacar o lanche) · o que fazer e o risco de errar a explicação (2 min, grupos da pergunta 5) · dilema dos trilhos (1,5 min, grupos da pergunta 6) · fechamento relendo o aviso (0,5 min). Mostrar os slides de respostas 36a a 36d conforme cada pergunta for discutida. Tempo: 8 min (até 11h23).</a:t>
+              <a:t>Pergunta de checagem antes de avançar: "O que vocês NÃO podem concluir a partir da vinheta?" (objetivo 7). Tempo: 3 min (início da síntese, 11h23).</a:t>
             </a:r>
           </a:p>
           <a:p/>
           <a:p>
             <a:r>
-              <a:t>RESPOSTAS 5: estratégia para a explicação 'trilhos' ('primeiro mesa, depois trem'; ensinar a pedir 'mais trem' e a esperar) tem pouco efeito se a explicação real for fugir da mesa; estratégia para 'fugir da mesa' (tarefa curta, tema de trem; ensinar a pedir 'pausa') não resolve se for 'trilhos'; adiar a mesa quando ele grita FORTALECE o comportamento. Errar a explicação pode ensinar o contrário. RESPOSTAS 6: acolher a mãe e argumentar: o interesse não é o problema e pode ser recurso de ensino; tirar os trilhos não ensina a pedir 'mais' ou 'pausa'; pode não resolver se a função for fugir da mesa; reduz bem-estar e engajamento; decidir junto, com plano para casa e supervisão.</a:t>
+              <a:t>RESPOSTA DA CHECAGEM: não podemos concluir a FUNÇÃO do comportamento. A vinheta só permite levantar hipóteses; concluir exige avaliação, mais dados e supervisão. Também não dá para garantir que uma estratégia vai funcionar antes de testá-la com dados.</a:t>
             </a:r>
           </a:p>
         </p:txBody>
@@ -3562,13 +3567,7 @@
           <a:lstStyle/>
           <a:p>
             <a:r>
-              <a:t>Pergunta de checagem antes de avançar: "O que vocês NÃO podem concluir a partir da vinheta?" (objetivo 7). Tempo: 3 min (início da síntese, 11h23).</a:t>
-            </a:r>
-          </a:p>
-          <a:p/>
-          <a:p>
-            <a:r>
-              <a:t>RESPOSTA DA CHECAGEM: não podemos concluir a FUNÇÃO do comportamento. A vinheta só permite levantar hipóteses; concluir exige avaliação, mais dados e supervisão. Também não dá para garantir que uma estratégia vai funcionar antes de testá-la com dados.</a:t>
+              <a:t>3 minutos. Se não houver perguntas, retomar a pergunta disparadora do início.</a:t>
             </a:r>
           </a:p>
         </p:txBody>
@@ -3638,7 +3637,7 @@
           <a:lstStyle/>
           <a:p>
             <a:r>
-              <a:t>3 minutos. Se não houver perguntas, retomar a pergunta disparadora do início.</a:t>
+              <a:t>Baer et al., Hanley (2012), Tiger et al. e Schreibman et al. estão disponíveis em texto completo no PubMed Central. Tempo: 1 min.</a:t>
             </a:r>
           </a:p>
         </p:txBody>
@@ -3778,7 +3777,7 @@
           <a:lstStyle/>
           <a:p>
             <a:r>
-              <a:t>Baer et al., Hanley (2012), Tiger et al. e Schreibman et al. estão disponíveis em texto completo no PubMed Central. Tempo: 1 min.</a:t>
+              <a:t>Não incluir contato ou registro profissional que não tenham sido informados. Encerramento às 11h30.</a:t>
             </a:r>
           </a:p>
         </p:txBody>
@@ -3848,7 +3847,13 @@
           <a:lstStyle/>
           <a:p>
             <a:r>
-              <a:t>Não incluir contato ou registro profissional que não tenham sido informados. Encerramento às 11h30.</a:t>
+              <a:t>Vídeo com som (música, conversa de fundo dos colegas, passos e porta): conferir caixa de som. No artefato, clicar no vídeo para começar. No PDF não há vídeo: usar o arquivo Video_Lara_animacao.mp4 (pasta apresentacao) à parte. Depois do vídeo: "Vocês viram UM episódio. Agora vejam o que a escola registrou em dois meses" e mostrar a história.</a:t>
+            </a:r>
+          </a:p>
+          <a:p/>
+          <a:p>
+            <a:r>
+              <a:t>RESPOSTAS DO VÍDEO: Antes = a professora propõe trabalho em grupo; os colegas se juntam e a sala fica barulhenta. O que ela faz = coloca o capuz, abaixa a cabeça, levanta e sai da sala sem avisar. Depois = fica sozinha e tranquila na biblioteca, desenhando (o barulho e o grupo acabam para ela).</a:t>
             </a:r>
           </a:p>
         </p:txBody>
@@ -3918,13 +3923,13 @@
           <a:lstStyle/>
           <a:p>
             <a:r>
-              <a:t>Vídeo com som (música, conversa de fundo dos colegas, passos e porta): conferir caixa de som. No artefato, clicar no vídeo para começar. No PDF não há vídeo: usar o arquivo Video_Lara_animacao.mp4 (pasta apresentacao) à parte. Depois do vídeo: "Vocês viram UM episódio. Agora vejam o que a escola registrou em dois meses" e mostrar a história.</a:t>
+              <a:t>Só para grupos que terminarem antes, ou como estudo posterior. Não entra no tempo. A comparação ABA × TCC com este caso já foi feita no slide 26.</a:t>
             </a:r>
           </a:p>
           <a:p/>
           <a:p>
             <a:r>
-              <a:t>RESPOSTAS DO VÍDEO: Antes = a professora propõe trabalho em grupo; os colegas se juntam e a sala fica barulhenta. O que ela faz = coloca o capuz, abaixa a cabeça, levanta e sai da sala sem avisar. Depois = fica sozinha e tranquila na biblioteca, desenhando (o barulho e o grupo acabam para ela).</a:t>
+              <a:t>RESPOSTAS: 1. Coloca o capuz, abaixa a cabeça e sai da sala sem avisar. 2. Antes: trabalho em grupo, sala barulhenta. Depois: sai e vai para a biblioteca. 3. Fugir do barulho, fugir da interação (medo de errar) ou as duas; ir para a biblioteca pode reforçar a saída. 4. Trabalhar sempre sozinha alivia agora, mas pode reforçar a fuga e tirar chances de participar; só como algo temporário, combinado com ela. No lugar: lugar mais silencioso ou protetor de ouvido (se ela quiser), grupo menor, papel definido, jeito combinado de pedir pausa. O capuz não é alvo.</a:t>
             </a:r>
           </a:p>
         </p:txBody>
@@ -3994,13 +3999,7 @@
           <a:lstStyle/>
           <a:p>
             <a:r>
-              <a:t>Só para grupos que terminarem antes, ou como estudo posterior. Não entra no tempo. A comparação ABA × TCC com este caso já foi feita no slide 26.</a:t>
-            </a:r>
-          </a:p>
-          <a:p/>
-          <a:p>
-            <a:r>
-              <a:t>RESPOSTAS: 1. Coloca o capuz, abaixa a cabeça e sai da sala sem avisar. 2. Antes: trabalho em grupo, sala barulhenta. Depois: sai e vai para a biblioteca. 3. Fugir do barulho, fugir da interação (medo de errar) ou as duas; ir para a biblioteca pode reforçar a saída. 4. Trabalhar sempre sozinha alivia agora, mas pode reforçar a fuga e tirar chances de participar; só como algo temporário, combinado com ela. No lugar: lugar mais silencioso ou protetor de ouvido (se ela quiser), grupo menor, papel definido, jeito combinado de pedir pausa. O capuz não é alvo.</a:t>
+              <a:t>Slide de respostas: mostrar depois que a turma responder.</a:t>
             </a:r>
           </a:p>
         </p:txBody>
@@ -4070,7 +4069,7 @@
           <a:lstStyle/>
           <a:p>
             <a:r>
-              <a:t>Slide de respostas: mostrar depois que a turma responder.</a:t>
+              <a:t>Raciocínio esperado: o dado fortalece 'quer os trilhos' (ou as duas juntas) e enfraquece 'foge da mesa'. Mas são 4 sessões, sem controle de outras variáveis: é mais uma pista, não uma conclusão. Próximo passo: avaliação organizada, com supervisão.</a:t>
             </a:r>
           </a:p>
         </p:txBody>
@@ -4140,7 +4139,7 @@
           <a:lstStyle/>
           <a:p>
             <a:r>
-              <a:t>Raciocínio esperado: o dado fortalece 'quer os trilhos' (ou as duas juntas) e enfraquece 'foge da mesa'. Mas são 4 sessões, sem controle de outras variáveis: é mais uma pista, não uma conclusão. Próximo passo: avaliação organizada, com supervisão.</a:t>
+              <a:t>Slide de respostas: mostrar depois que a turma responder.</a:t>
             </a:r>
           </a:p>
         </p:txBody>
@@ -4210,7 +4209,7 @@
           <a:lstStyle/>
           <a:p>
             <a:r>
-              <a:t>Slide de respostas: mostrar depois que a turma responder.</a:t>
+              <a:t>Lista completa de autores em REFERENCIAS.md.</a:t>
             </a:r>
           </a:p>
         </p:txBody>
@@ -4280,7 +4279,7 @@
           <a:lstStyle/>
           <a:p>
             <a:r>
-              <a:t>Lista completa de autores em REFERENCIAS.md.</a:t>
+              <a:t>Lista completa em REFERENCIAS.md.</a:t>
             </a:r>
           </a:p>
         </p:txBody>
@@ -4522,76 +4521,6 @@
 </file>
 
 <file path=ppt/notesSlides/notesSlide60.xml><?xml version="1.0" encoding="utf-8"?>
-<p:notes xmlns:a="http://schemas.openxmlformats.org/drawingml/2006/main" xmlns:p="http://schemas.openxmlformats.org/presentationml/2006/main" xmlns:r="http://schemas.openxmlformats.org/officeDocument/2006/relationships">
-  <p:cSld>
-    <p:spTree>
-      <p:nvGrpSpPr>
-        <p:cNvPr id="1" name=""/>
-        <p:cNvGrpSpPr/>
-        <p:nvPr/>
-      </p:nvGrpSpPr>
-      <p:grpSpPr>
-        <a:xfrm>
-          <a:off x="0" y="0"/>
-          <a:ext cx="0" cy="0"/>
-          <a:chOff x="0" y="0"/>
-          <a:chExt cx="0" cy="0"/>
-        </a:xfrm>
-      </p:grpSpPr>
-      <p:sp>
-        <p:nvSpPr>
-          <p:cNvPr id="2" name="Slide Image Placeholder 1"/>
-          <p:cNvSpPr>
-            <a:spLocks noGrp="1"/>
-          </p:cNvSpPr>
-          <p:nvPr>
-            <p:ph type="sldImg" idx="2"/>
-          </p:nvPr>
-        </p:nvSpPr>
-        <p:spPr/>
-      </p:sp>
-      <p:sp>
-        <p:nvSpPr>
-          <p:cNvPr id="3" name="Notes Placeholder 2"/>
-          <p:cNvSpPr>
-            <a:spLocks noGrp="1"/>
-          </p:cNvSpPr>
-          <p:nvPr>
-            <p:ph type="body" idx="3" sz="quarter"/>
-          </p:nvPr>
-        </p:nvSpPr>
-        <p:spPr/>
-        <p:txBody>
-          <a:bodyPr/>
-          <a:lstStyle/>
-          <a:p>
-            <a:r>
-              <a:t>Lista completa em REFERENCIAS.md.</a:t>
-            </a:r>
-          </a:p>
-        </p:txBody>
-      </p:sp>
-      <p:sp>
-        <p:nvSpPr>
-          <p:cNvPr id="4" name="Slide Number Placeholder 3"/>
-          <p:cNvSpPr>
-            <a:spLocks noGrp="1"/>
-          </p:cNvSpPr>
-          <p:nvPr>
-            <p:ph type="sldNum" idx="5" sz="quarter"/>
-          </p:nvPr>
-        </p:nvSpPr>
-        <p:spPr/>
-      </p:sp>
-    </p:spTree>
-  </p:cSld>
-  <p:clrMapOvr>
-    <a:masterClrMapping/>
-  </p:clrMapOvr>
-</p:notes>
-</file>
-
-<file path=ppt/notesSlides/notesSlide61.xml><?xml version="1.0" encoding="utf-8"?>
 <p:notes xmlns:a="http://schemas.openxmlformats.org/drawingml/2006/main" xmlns:p="http://schemas.openxmlformats.org/presentationml/2006/main" xmlns:r="http://schemas.openxmlformats.org/officeDocument/2006/relationships">
   <p:cSld>
     <p:spTree>
@@ -8924,7 +8853,7 @@
         </p:nvSpPr>
         <p:spPr>
           <a:xfrm>
-            <a:off x="1168400" y="926207"/>
+            <a:off x="1168400" y="769342"/>
             <a:ext cx="10307828" cy="481905"/>
           </a:xfrm>
           <a:prstGeom prst="rect">
@@ -8964,7 +8893,7 @@
           <p:nvPr/>
         </p:nvGraphicFramePr>
         <p:xfrm>
-          <a:off x="1168400" y="1624012"/>
+          <a:off x="1168400" y="1467148"/>
           <a:ext cx="10007600" cy="3105150"/>
         </p:xfrm>
         <a:graphic>
@@ -9325,8 +9254,8 @@
         </p:nvSpPr>
         <p:spPr>
           <a:xfrm>
-            <a:off x="1168400" y="4945062"/>
-            <a:ext cx="10307828" cy="313630"/>
+            <a:off x="1168400" y="4788198"/>
+            <a:ext cx="10307828" cy="627261"/>
           </a:xfrm>
           <a:prstGeom prst="rect">
             <a:avLst/>
@@ -9351,7 +9280,7 @@
                 </a:solidFill>
                 <a:latin typeface="Montserrat"/>
               </a:rPr>
-              <a:t>Características autistas inofensivas não são alvo por si só.</a:t>
+              <a:t>Características autistas que não causam prejuízo (ex.: interesses intensos, estereotipias sem risco) não são alvo por si só.</a:t>
             </a:r>
           </a:p>
         </p:txBody>
@@ -9364,7 +9293,7 @@
         </p:nvSpPr>
         <p:spPr>
           <a:xfrm>
-            <a:off x="1168400" y="5474593"/>
+            <a:off x="1168400" y="5631359"/>
             <a:ext cx="10307828" cy="266700"/>
           </a:xfrm>
           <a:prstGeom prst="rect">
@@ -9512,7 +9441,7 @@
         </p:nvSpPr>
         <p:spPr>
           <a:xfrm>
-            <a:off x="1168400" y="1658045"/>
+            <a:off x="1168400" y="809030"/>
             <a:ext cx="10307828" cy="963811"/>
           </a:xfrm>
           <a:prstGeom prst="rect">
@@ -9551,8 +9480,8 @@
         </p:nvSpPr>
         <p:spPr>
           <a:xfrm>
-            <a:off x="1168400" y="2875855"/>
-            <a:ext cx="10307828" cy="355600"/>
+            <a:off x="1168400" y="1976041"/>
+            <a:ext cx="10307828" cy="319980"/>
           </a:xfrm>
           <a:prstGeom prst="rect">
             <a:avLst/>
@@ -9571,7 +9500,7 @@
               </a:lnSpc>
             </a:pPr>
             <a:r>
-              <a:rPr sz="2000" b="0" i="0">
+              <a:rPr sz="1800" b="0" i="0">
                 <a:solidFill>
                   <a:srgbClr val="2E3A4A"/>
                 </a:solidFill>
@@ -9582,174 +9511,483 @@
           </a:p>
         </p:txBody>
       </p:sp>
-      <p:sp>
-        <p:nvSpPr>
-          <p:cNvPr id="5" name="TextBox 4"/>
-          <p:cNvSpPr txBox="1"/>
-          <p:nvPr/>
-        </p:nvSpPr>
-        <p:spPr>
-          <a:xfrm>
-            <a:off x="1168400" y="3485455"/>
-            <a:ext cx="2526575" cy="1524000"/>
-          </a:xfrm>
-          <a:prstGeom prst="rect">
-            <a:avLst/>
-          </a:prstGeom>
-          <a:noFill/>
-        </p:spPr>
-        <p:txBody>
-          <a:bodyPr wrap="square" lIns="0" rIns="0" tIns="0" bIns="0" anchor="t">
-            <a:noAutofit/>
-          </a:bodyPr>
-          <a:lstStyle/>
-          <a:p>
-            <a:pPr algn="l" marL="279400" indent="-279400">
-              <a:lnSpc>
-                <a:spcPct val="123000"/>
-              </a:lnSpc>
-              <a:buChar char="•"/>
-            </a:pPr>
-            <a:r>
-              <a:rPr sz="2000" b="0" i="0">
-                <a:solidFill>
-                  <a:srgbClr val="2E3A4A"/>
-                </a:solidFill>
-                <a:latin typeface="Montserrat"/>
-              </a:rPr>
-              <a:t>Aplicada</a:t>
-            </a:r>
-          </a:p>
-          <a:p>
-            <a:pPr algn="l" marL="279400" indent="-279400">
-              <a:lnSpc>
-                <a:spcPct val="123000"/>
-              </a:lnSpc>
-              <a:buChar char="•"/>
-            </a:pPr>
-            <a:r>
-              <a:rPr sz="2000" b="0" i="0">
-                <a:solidFill>
-                  <a:srgbClr val="2E3A4A"/>
-                </a:solidFill>
-                <a:latin typeface="Montserrat"/>
-              </a:rPr>
-              <a:t>Comportamental</a:t>
-            </a:r>
-          </a:p>
-          <a:p>
-            <a:pPr algn="l" marL="279400" indent="-279400">
-              <a:lnSpc>
-                <a:spcPct val="123000"/>
-              </a:lnSpc>
-              <a:buChar char="•"/>
-            </a:pPr>
-            <a:r>
-              <a:rPr sz="2000" b="0" i="0">
-                <a:solidFill>
-                  <a:srgbClr val="2E3A4A"/>
-                </a:solidFill>
-                <a:latin typeface="Montserrat"/>
-              </a:rPr>
-              <a:t>Analítica</a:t>
-            </a:r>
-          </a:p>
-          <a:p>
-            <a:pPr algn="l" marL="279400" indent="-279400">
-              <a:lnSpc>
-                <a:spcPct val="123000"/>
-              </a:lnSpc>
-              <a:buChar char="•"/>
-            </a:pPr>
-            <a:r>
-              <a:rPr sz="2000" b="0" i="0">
-                <a:solidFill>
-                  <a:srgbClr val="2E3A4A"/>
-                </a:solidFill>
-                <a:latin typeface="Montserrat"/>
-              </a:rPr>
-              <a:t>Tecnológica</a:t>
-            </a:r>
-          </a:p>
-        </p:txBody>
-      </p:sp>
+      <p:graphicFrame>
+        <p:nvGraphicFramePr>
+          <p:cNvPr id="5" name="Table 4"/>
+          <p:cNvGraphicFramePr>
+            <a:graphicFrameLocks noGrp="1"/>
+          </p:cNvGraphicFramePr>
+          <p:nvPr/>
+        </p:nvGraphicFramePr>
+        <p:xfrm>
+          <a:off x="1168400" y="2499221"/>
+          <a:ext cx="10007600" cy="3359150"/>
+        </p:xfrm>
+        <a:graphic>
+          <a:graphicData uri="http://schemas.openxmlformats.org/drawingml/2006/table">
+            <a:tbl>
+              <a:tblPr firstRow="0" bandRow="0">
+                <a:tableStyleId>{2D5ABB26-0587-4C30-8999-92F81FD0307C}</a:tableStyleId>
+              </a:tblPr>
+              <a:tblGrid>
+                <a:gridCol w="3202384"/>
+                <a:gridCol w="6805216"/>
+              </a:tblGrid>
+              <a:tr h="412750">
+                <a:tc>
+                  <a:txBody>
+                    <a:bodyPr wrap="square"/>
+                    <a:lstStyle/>
+                    <a:p>
+                      <a:pPr>
+                        <a:lnSpc>
+                          <a:spcPct val="100000"/>
+                        </a:lnSpc>
+                      </a:pPr>
+                      <a:r>
+                        <a:rPr sz="1500" b="1" i="0">
+                          <a:solidFill>
+                            <a:srgbClr val="FFFFFF"/>
+                          </a:solidFill>
+                          <a:latin typeface="Montserrat"/>
+                        </a:rPr>
+                        <a:t>Dimensão</a:t>
+                      </a:r>
+                    </a:p>
+                  </a:txBody>
+                  <a:tcPr marL="114300" marR="114300" marT="68580" marB="68580" anchor="ctr">
+                    <a:solidFill>
+                      <a:srgbClr val="1B2F4B"/>
+                    </a:solidFill>
+                  </a:tcPr>
+                </a:tc>
+                <a:tc>
+                  <a:txBody>
+                    <a:bodyPr wrap="square"/>
+                    <a:lstStyle/>
+                    <a:p>
+                      <a:pPr>
+                        <a:lnSpc>
+                          <a:spcPct val="100000"/>
+                        </a:lnSpc>
+                      </a:pPr>
+                      <a:r>
+                        <a:rPr sz="1500" b="1" i="0">
+                          <a:solidFill>
+                            <a:srgbClr val="FFFFFF"/>
+                          </a:solidFill>
+                          <a:latin typeface="Montserrat"/>
+                        </a:rPr>
+                        <a:t>O que significa</a:t>
+                      </a:r>
+                    </a:p>
+                  </a:txBody>
+                  <a:tcPr marL="114300" marR="114300" marT="68580" marB="68580" anchor="ctr">
+                    <a:solidFill>
+                      <a:srgbClr val="1B2F4B"/>
+                    </a:solidFill>
+                  </a:tcPr>
+                </a:tc>
+              </a:tr>
+              <a:tr h="387350">
+                <a:tc>
+                  <a:txBody>
+                    <a:bodyPr wrap="square"/>
+                    <a:lstStyle/>
+                    <a:p>
+                      <a:pPr>
+                        <a:lnSpc>
+                          <a:spcPct val="100000"/>
+                        </a:lnSpc>
+                      </a:pPr>
+                      <a:r>
+                        <a:rPr sz="1500" b="1" i="0">
+                          <a:solidFill>
+                            <a:srgbClr val="2E3A4A"/>
+                          </a:solidFill>
+                          <a:latin typeface="Montserrat"/>
+                        </a:rPr>
+                        <a:t>Aplicada</a:t>
+                      </a:r>
+                    </a:p>
+                  </a:txBody>
+                  <a:tcPr marL="114300" marR="114300" marT="68580" marB="68580" anchor="ctr">
+                    <a:solidFill>
+                      <a:srgbClr val="FFFFFF"/>
+                    </a:solidFill>
+                  </a:tcPr>
+                </a:tc>
+                <a:tc>
+                  <a:txBody>
+                    <a:bodyPr wrap="square"/>
+                    <a:lstStyle/>
+                    <a:p>
+                      <a:pPr>
+                        <a:lnSpc>
+                          <a:spcPct val="100000"/>
+                        </a:lnSpc>
+                      </a:pPr>
+                      <a:r>
+                        <a:rPr sz="1500" b="0" i="0">
+                          <a:solidFill>
+                            <a:srgbClr val="2E3A4A"/>
+                          </a:solidFill>
+                          <a:latin typeface="Montserrat"/>
+                        </a:rPr>
+                        <a:t>Trata de comportamentos importantes para a vida da pessoa</a:t>
+                      </a:r>
+                    </a:p>
+                  </a:txBody>
+                  <a:tcPr marL="114300" marR="114300" marT="68580" marB="68580" anchor="ctr">
+                    <a:solidFill>
+                      <a:srgbClr val="FFFFFF"/>
+                    </a:solidFill>
+                  </a:tcPr>
+                </a:tc>
+              </a:tr>
+              <a:tr h="387350">
+                <a:tc>
+                  <a:txBody>
+                    <a:bodyPr wrap="square"/>
+                    <a:lstStyle/>
+                    <a:p>
+                      <a:pPr>
+                        <a:lnSpc>
+                          <a:spcPct val="100000"/>
+                        </a:lnSpc>
+                      </a:pPr>
+                      <a:r>
+                        <a:rPr sz="1500" b="1" i="0">
+                          <a:solidFill>
+                            <a:srgbClr val="2E3A4A"/>
+                          </a:solidFill>
+                          <a:latin typeface="Montserrat"/>
+                        </a:rPr>
+                        <a:t>Comportamental</a:t>
+                      </a:r>
+                    </a:p>
+                  </a:txBody>
+                  <a:tcPr marL="114300" marR="114300" marT="68580" marB="68580" anchor="ctr">
+                    <a:solidFill>
+                      <a:srgbClr val="F1F4F6"/>
+                    </a:solidFill>
+                  </a:tcPr>
+                </a:tc>
+                <a:tc>
+                  <a:txBody>
+                    <a:bodyPr wrap="square"/>
+                    <a:lstStyle/>
+                    <a:p>
+                      <a:pPr>
+                        <a:lnSpc>
+                          <a:spcPct val="100000"/>
+                        </a:lnSpc>
+                      </a:pPr>
+                      <a:r>
+                        <a:rPr sz="1500" b="0" i="0">
+                          <a:solidFill>
+                            <a:srgbClr val="2E3A4A"/>
+                          </a:solidFill>
+                          <a:latin typeface="Montserrat"/>
+                        </a:rPr>
+                        <a:t>Estuda o que a pessoa faz, de forma observável e mensurável</a:t>
+                      </a:r>
+                    </a:p>
+                  </a:txBody>
+                  <a:tcPr marL="114300" marR="114300" marT="68580" marB="68580" anchor="ctr">
+                    <a:solidFill>
+                      <a:srgbClr val="F1F4F6"/>
+                    </a:solidFill>
+                  </a:tcPr>
+                </a:tc>
+              </a:tr>
+              <a:tr h="387350">
+                <a:tc>
+                  <a:txBody>
+                    <a:bodyPr wrap="square"/>
+                    <a:lstStyle/>
+                    <a:p>
+                      <a:pPr>
+                        <a:lnSpc>
+                          <a:spcPct val="100000"/>
+                        </a:lnSpc>
+                      </a:pPr>
+                      <a:r>
+                        <a:rPr sz="1500" b="1" i="0">
+                          <a:solidFill>
+                            <a:srgbClr val="2E3A4A"/>
+                          </a:solidFill>
+                          <a:latin typeface="Montserrat"/>
+                        </a:rPr>
+                        <a:t>Analítica</a:t>
+                      </a:r>
+                    </a:p>
+                  </a:txBody>
+                  <a:tcPr marL="114300" marR="114300" marT="68580" marB="68580" anchor="ctr">
+                    <a:solidFill>
+                      <a:srgbClr val="FFFFFF"/>
+                    </a:solidFill>
+                  </a:tcPr>
+                </a:tc>
+                <a:tc>
+                  <a:txBody>
+                    <a:bodyPr wrap="square"/>
+                    <a:lstStyle/>
+                    <a:p>
+                      <a:pPr>
+                        <a:lnSpc>
+                          <a:spcPct val="100000"/>
+                        </a:lnSpc>
+                      </a:pPr>
+                      <a:r>
+                        <a:rPr sz="1500" b="0" i="0">
+                          <a:solidFill>
+                            <a:srgbClr val="2E3A4A"/>
+                          </a:solidFill>
+                          <a:latin typeface="Montserrat"/>
+                        </a:rPr>
+                        <a:t>Mostra que a mudança veio da intervenção</a:t>
+                      </a:r>
+                    </a:p>
+                  </a:txBody>
+                  <a:tcPr marL="114300" marR="114300" marT="68580" marB="68580" anchor="ctr">
+                    <a:solidFill>
+                      <a:srgbClr val="FFFFFF"/>
+                    </a:solidFill>
+                  </a:tcPr>
+                </a:tc>
+              </a:tr>
+              <a:tr h="387350">
+                <a:tc>
+                  <a:txBody>
+                    <a:bodyPr wrap="square"/>
+                    <a:lstStyle/>
+                    <a:p>
+                      <a:pPr>
+                        <a:lnSpc>
+                          <a:spcPct val="100000"/>
+                        </a:lnSpc>
+                      </a:pPr>
+                      <a:r>
+                        <a:rPr sz="1500" b="1" i="0">
+                          <a:solidFill>
+                            <a:srgbClr val="2E3A4A"/>
+                          </a:solidFill>
+                          <a:latin typeface="Montserrat"/>
+                        </a:rPr>
+                        <a:t>Tecnológica</a:t>
+                      </a:r>
+                    </a:p>
+                  </a:txBody>
+                  <a:tcPr marL="114300" marR="114300" marT="68580" marB="68580" anchor="ctr">
+                    <a:solidFill>
+                      <a:srgbClr val="F1F4F6"/>
+                    </a:solidFill>
+                  </a:tcPr>
+                </a:tc>
+                <a:tc>
+                  <a:txBody>
+                    <a:bodyPr wrap="square"/>
+                    <a:lstStyle/>
+                    <a:p>
+                      <a:pPr>
+                        <a:lnSpc>
+                          <a:spcPct val="100000"/>
+                        </a:lnSpc>
+                      </a:pPr>
+                      <a:r>
+                        <a:rPr sz="1500" b="0" i="0">
+                          <a:solidFill>
+                            <a:srgbClr val="2E3A4A"/>
+                          </a:solidFill>
+                          <a:latin typeface="Montserrat"/>
+                        </a:rPr>
+                        <a:t>Descreve os procedimentos com clareza para que outros repitam</a:t>
+                      </a:r>
+                    </a:p>
+                  </a:txBody>
+                  <a:tcPr marL="114300" marR="114300" marT="68580" marB="68580" anchor="ctr">
+                    <a:solidFill>
+                      <a:srgbClr val="F1F4F6"/>
+                    </a:solidFill>
+                  </a:tcPr>
+                </a:tc>
+              </a:tr>
+              <a:tr h="387350">
+                <a:tc>
+                  <a:txBody>
+                    <a:bodyPr wrap="square"/>
+                    <a:lstStyle/>
+                    <a:p>
+                      <a:pPr>
+                        <a:lnSpc>
+                          <a:spcPct val="100000"/>
+                        </a:lnSpc>
+                      </a:pPr>
+                      <a:r>
+                        <a:rPr sz="1500" b="1" i="0">
+                          <a:solidFill>
+                            <a:srgbClr val="2E3A4A"/>
+                          </a:solidFill>
+                          <a:latin typeface="Montserrat"/>
+                        </a:rPr>
+                        <a:t>Conceitualmente sistemática</a:t>
+                      </a:r>
+                    </a:p>
+                  </a:txBody>
+                  <a:tcPr marL="114300" marR="114300" marT="68580" marB="68580" anchor="ctr">
+                    <a:solidFill>
+                      <a:srgbClr val="FFFFFF"/>
+                    </a:solidFill>
+                  </a:tcPr>
+                </a:tc>
+                <a:tc>
+                  <a:txBody>
+                    <a:bodyPr wrap="square"/>
+                    <a:lstStyle/>
+                    <a:p>
+                      <a:pPr>
+                        <a:lnSpc>
+                          <a:spcPct val="100000"/>
+                        </a:lnSpc>
+                      </a:pPr>
+                      <a:r>
+                        <a:rPr sz="1500" b="0" i="0">
+                          <a:solidFill>
+                            <a:srgbClr val="2E3A4A"/>
+                          </a:solidFill>
+                          <a:latin typeface="Montserrat"/>
+                        </a:rPr>
+                        <a:t>Liga os procedimentos aos princípios do comportamento</a:t>
+                      </a:r>
+                    </a:p>
+                  </a:txBody>
+                  <a:tcPr marL="114300" marR="114300" marT="68580" marB="68580" anchor="ctr">
+                    <a:solidFill>
+                      <a:srgbClr val="FFFFFF"/>
+                    </a:solidFill>
+                  </a:tcPr>
+                </a:tc>
+              </a:tr>
+              <a:tr h="387350">
+                <a:tc>
+                  <a:txBody>
+                    <a:bodyPr wrap="square"/>
+                    <a:lstStyle/>
+                    <a:p>
+                      <a:pPr>
+                        <a:lnSpc>
+                          <a:spcPct val="100000"/>
+                        </a:lnSpc>
+                      </a:pPr>
+                      <a:r>
+                        <a:rPr sz="1500" b="1" i="0">
+                          <a:solidFill>
+                            <a:srgbClr val="2E3A4A"/>
+                          </a:solidFill>
+                          <a:latin typeface="Montserrat"/>
+                        </a:rPr>
+                        <a:t>Efetiva</a:t>
+                      </a:r>
+                    </a:p>
+                  </a:txBody>
+                  <a:tcPr marL="114300" marR="114300" marT="68580" marB="68580" anchor="ctr">
+                    <a:solidFill>
+                      <a:srgbClr val="F1F4F6"/>
+                    </a:solidFill>
+                  </a:tcPr>
+                </a:tc>
+                <a:tc>
+                  <a:txBody>
+                    <a:bodyPr wrap="square"/>
+                    <a:lstStyle/>
+                    <a:p>
+                      <a:pPr>
+                        <a:lnSpc>
+                          <a:spcPct val="100000"/>
+                        </a:lnSpc>
+                      </a:pPr>
+                      <a:r>
+                        <a:rPr sz="1500" b="0" i="0">
+                          <a:solidFill>
+                            <a:srgbClr val="2E3A4A"/>
+                          </a:solidFill>
+                          <a:latin typeface="Montserrat"/>
+                        </a:rPr>
+                        <a:t>Produz mudanças que fazem diferença no dia a dia</a:t>
+                      </a:r>
+                    </a:p>
+                  </a:txBody>
+                  <a:tcPr marL="114300" marR="114300" marT="68580" marB="68580" anchor="ctr">
+                    <a:solidFill>
+                      <a:srgbClr val="F1F4F6"/>
+                    </a:solidFill>
+                  </a:tcPr>
+                </a:tc>
+              </a:tr>
+              <a:tr h="622300">
+                <a:tc>
+                  <a:txBody>
+                    <a:bodyPr wrap="square"/>
+                    <a:lstStyle/>
+                    <a:p>
+                      <a:pPr>
+                        <a:lnSpc>
+                          <a:spcPct val="100000"/>
+                        </a:lnSpc>
+                      </a:pPr>
+                      <a:r>
+                        <a:rPr sz="1500" b="1" i="0">
+                          <a:solidFill>
+                            <a:srgbClr val="2E3A4A"/>
+                          </a:solidFill>
+                          <a:latin typeface="Montserrat"/>
+                        </a:rPr>
+                        <a:t>Generalidade</a:t>
+                      </a:r>
+                    </a:p>
+                  </a:txBody>
+                  <a:tcPr marL="114300" marR="114300" marT="68580" marB="68580" anchor="ctr">
+                    <a:solidFill>
+                      <a:srgbClr val="FFFFFF"/>
+                    </a:solidFill>
+                  </a:tcPr>
+                </a:tc>
+                <a:tc>
+                  <a:txBody>
+                    <a:bodyPr wrap="square"/>
+                    <a:lstStyle/>
+                    <a:p>
+                      <a:pPr>
+                        <a:lnSpc>
+                          <a:spcPct val="100000"/>
+                        </a:lnSpc>
+                      </a:pPr>
+                      <a:r>
+                        <a:rPr sz="1500" b="0" i="0">
+                          <a:solidFill>
+                            <a:srgbClr val="2E3A4A"/>
+                          </a:solidFill>
+                          <a:latin typeface="Montserrat"/>
+                        </a:rPr>
+                        <a:t>A mudança se mantém e aparece em outros lugares e com outras pessoas</a:t>
+                      </a:r>
+                    </a:p>
+                  </a:txBody>
+                  <a:tcPr marL="114300" marR="114300" marT="68580" marB="68580" anchor="ctr">
+                    <a:solidFill>
+                      <a:srgbClr val="FFFFFF"/>
+                    </a:solidFill>
+                  </a:tcPr>
+                </a:tc>
+              </a:tr>
+            </a:tbl>
+          </a:graphicData>
+        </a:graphic>
+      </p:graphicFrame>
       <p:sp>
         <p:nvSpPr>
           <p:cNvPr id="6" name="TextBox 5"/>
-          <p:cNvSpPr txBox="1"/>
-          <p:nvPr/>
-        </p:nvSpPr>
-        <p:spPr>
-          <a:xfrm>
-            <a:off x="4230985" y="3485455"/>
-            <a:ext cx="4095477" cy="1524000"/>
-          </a:xfrm>
-          <a:prstGeom prst="rect">
-            <a:avLst/>
-          </a:prstGeom>
-          <a:noFill/>
-        </p:spPr>
-        <p:txBody>
-          <a:bodyPr wrap="square" lIns="0" rIns="0" tIns="0" bIns="0" anchor="t">
-            <a:noAutofit/>
-          </a:bodyPr>
-          <a:lstStyle/>
-          <a:p>
-            <a:pPr algn="l" marL="279400" indent="-279400">
-              <a:lnSpc>
-                <a:spcPct val="123000"/>
-              </a:lnSpc>
-              <a:buChar char="•"/>
-            </a:pPr>
-            <a:r>
-              <a:rPr sz="2000" b="0" i="0">
-                <a:solidFill>
-                  <a:srgbClr val="2E3A4A"/>
-                </a:solidFill>
-                <a:latin typeface="Montserrat"/>
-              </a:rPr>
-              <a:t>Conceitualmente sistemática</a:t>
-            </a:r>
-          </a:p>
-          <a:p>
-            <a:pPr algn="l" marL="279400" indent="-279400">
-              <a:lnSpc>
-                <a:spcPct val="123000"/>
-              </a:lnSpc>
-              <a:buChar char="•"/>
-            </a:pPr>
-            <a:r>
-              <a:rPr sz="2000" b="0" i="0">
-                <a:solidFill>
-                  <a:srgbClr val="2E3A4A"/>
-                </a:solidFill>
-                <a:latin typeface="Montserrat"/>
-              </a:rPr>
-              <a:t>Efetiva</a:t>
-            </a:r>
-          </a:p>
-          <a:p>
-            <a:pPr algn="l" marL="279400" indent="-279400">
-              <a:lnSpc>
-                <a:spcPct val="123000"/>
-              </a:lnSpc>
-              <a:buChar char="•"/>
-            </a:pPr>
-            <a:r>
-              <a:rPr sz="2000" b="0" i="0">
-                <a:solidFill>
-                  <a:srgbClr val="2E3A4A"/>
-                </a:solidFill>
-                <a:latin typeface="Montserrat"/>
-              </a:rPr>
-              <a:t>Generalidade</a:t>
-            </a:r>
-          </a:p>
-        </p:txBody>
-      </p:sp>
-      <p:sp>
-        <p:nvSpPr>
-          <p:cNvPr id="7" name="TextBox 6"/>
           <p:cNvSpPr txBox="1"/>
           <p:nvPr/>
         </p:nvSpPr>
@@ -9788,7 +10026,7 @@
       </p:sp>
       <p:sp>
         <p:nvSpPr>
-          <p:cNvPr id="8" name="TextBox 7"/>
+          <p:cNvPr id="7" name="TextBox 6"/>
           <p:cNvSpPr txBox="1"/>
           <p:nvPr/>
         </p:nvSpPr>
@@ -11005,7 +11243,7 @@
                 </a:solidFill>
                 <a:latin typeface="Montserrat"/>
               </a:rPr>
-              <a:t>Exemplo fictício: depois de uma noite mal dormida, uma tarefa difícil fica mais aversiva, e escapar dela passa a “valer mais”.</a:t>
+              <a:t>Exemplo fictício: depois de uma noite mal dormida, uma tarefa difícil fica mais aversiva (desagradável, algo que a pessoa tende a evitar), e escapar dela passa a “valer mais”.</a:t>
             </a:r>
           </a:p>
         </p:txBody>
@@ -11166,7 +11404,7 @@
         </p:nvSpPr>
         <p:spPr>
           <a:xfrm>
-            <a:off x="1168400" y="1361579"/>
+            <a:off x="1168400" y="1188244"/>
             <a:ext cx="10307828" cy="963811"/>
           </a:xfrm>
           <a:prstGeom prst="rect">
@@ -11205,7 +11443,7 @@
         </p:nvSpPr>
         <p:spPr>
           <a:xfrm>
-            <a:off x="1168400" y="2604790"/>
+            <a:off x="1168400" y="2431455"/>
             <a:ext cx="10307828" cy="711200"/>
           </a:xfrm>
           <a:prstGeom prst="rect">
@@ -11244,7 +11482,7 @@
         </p:nvSpPr>
         <p:spPr>
           <a:xfrm>
-            <a:off x="1168400" y="3595390"/>
+            <a:off x="1168400" y="3422055"/>
             <a:ext cx="4839970" cy="319980"/>
           </a:xfrm>
           <a:prstGeom prst="rect">
@@ -11283,7 +11521,7 @@
         </p:nvSpPr>
         <p:spPr>
           <a:xfrm>
-            <a:off x="1168400" y="4004270"/>
+            <a:off x="1168400" y="3830935"/>
             <a:ext cx="4839970" cy="675481"/>
           </a:xfrm>
           <a:prstGeom prst="rect">
@@ -11322,7 +11560,7 @@
         </p:nvSpPr>
         <p:spPr>
           <a:xfrm>
-            <a:off x="6477000" y="3595390"/>
+            <a:off x="6477000" y="3422055"/>
             <a:ext cx="4839970" cy="319980"/>
           </a:xfrm>
           <a:prstGeom prst="rect">
@@ -11361,7 +11599,7 @@
         </p:nvSpPr>
         <p:spPr>
           <a:xfrm>
-            <a:off x="6477000" y="4004270"/>
+            <a:off x="6477000" y="3830935"/>
             <a:ext cx="4839970" cy="675481"/>
           </a:xfrm>
           <a:prstGeom prst="rect">
@@ -11400,8 +11638,8 @@
         </p:nvSpPr>
         <p:spPr>
           <a:xfrm>
-            <a:off x="1168400" y="4959152"/>
-            <a:ext cx="10307828" cy="346670"/>
+            <a:off x="1168400" y="4785816"/>
+            <a:ext cx="10307828" cy="693341"/>
           </a:xfrm>
           <a:prstGeom prst="rect">
             <a:avLst/>
@@ -11426,7 +11664,7 @@
                 </a:solidFill>
                 <a:latin typeface="Montserrat"/>
               </a:rPr>
-              <a:t>“Negativo” não é punição.</a:t>
+              <a:t>“Negativo” não é punição (consequência que diminui o comportamento).</a:t>
             </a:r>
           </a:p>
         </p:txBody>
@@ -11587,7 +11825,7 @@
         </p:nvSpPr>
         <p:spPr>
           <a:xfrm>
-            <a:off x="1168400" y="1653282"/>
+            <a:off x="1168400" y="1149152"/>
             <a:ext cx="10307828" cy="481905"/>
           </a:xfrm>
           <a:prstGeom prst="rect">
@@ -11626,8 +11864,8 @@
         </p:nvSpPr>
         <p:spPr>
           <a:xfrm>
-            <a:off x="1168400" y="2465388"/>
-            <a:ext cx="10307828" cy="1905000"/>
+            <a:off x="1168400" y="1961257"/>
+            <a:ext cx="10307828" cy="2286000"/>
           </a:xfrm>
           <a:prstGeom prst="rect">
             <a:avLst/>
@@ -11687,7 +11925,7 @@
                 </a:solidFill>
                 <a:latin typeface="Montserrat"/>
               </a:rPr>
-              <a:t>Fuga ou esquiva de demandas ou estímulos</a:t>
+              <a:t>Fuga (sair de algo) ou esquiva (evitar que comece) de demandas (pedidos e tarefas) ou estímulos</a:t>
             </a:r>
           </a:p>
           <a:p>
@@ -11717,8 +11955,8 @@
         </p:nvSpPr>
         <p:spPr>
           <a:xfrm>
-            <a:off x="1168400" y="4700588"/>
-            <a:ext cx="10307828" cy="313630"/>
+            <a:off x="1168400" y="4577457"/>
+            <a:ext cx="10307828" cy="940891"/>
           </a:xfrm>
           <a:prstGeom prst="rect">
             <a:avLst/>
@@ -11743,7 +11981,7 @@
                 </a:solidFill>
                 <a:latin typeface="Montserrat"/>
               </a:rPr>
-              <a:t>São hipóteses a testar, não rótulos. Podem ser múltiplas ou combinadas.</a:t>
+              <a:t>São hipóteses funcionais (explicações possíveis sobre para que o comportamento serve) a testar, não rótulos. Podem ser múltiplas ou combinadas.</a:t>
             </a:r>
           </a:p>
         </p:txBody>
@@ -12354,7 +12592,7 @@
                 </a:solidFill>
                 <a:latin typeface="Montserrat"/>
               </a:rPr>
-              <a:t>Que hipótese funcional isso sugere?</a:t>
+              <a:t>Que hipótese funcional (para que o comportamento serve) isso sugere?</a:t>
             </a:r>
           </a:p>
           <a:p>
@@ -12828,7 +13066,7 @@
                 </a:solidFill>
                 <a:latin typeface="Montserrat"/>
               </a:rPr>
-              <a:t>Mesma topografia, três hipóteses</a:t>
+              <a:t>Mesma topografia (forma), três hipóteses</a:t>
             </a:r>
           </a:p>
         </p:txBody>
@@ -13094,7 +13332,7 @@
                           </a:solidFill>
                           <a:latin typeface="Montserrat"/>
                         </a:rPr>
-                        <a:t>Fuga da demanda</a:t>
+                        <a:t>Fuga da demanda (sair da tarefa)</a:t>
                       </a:r>
                     </a:p>
                   </a:txBody>
@@ -13833,8 +14071,8 @@
         </p:nvSpPr>
         <p:spPr>
           <a:xfrm>
-            <a:off x="2221012" y="2487910"/>
-            <a:ext cx="7982374" cy="355600"/>
+            <a:off x="1270000" y="2310110"/>
+            <a:ext cx="9941560" cy="711200"/>
           </a:xfrm>
           <a:prstGeom prst="rect">
             <a:avLst/>
@@ -13859,7 +14097,7 @@
                 </a:solidFill>
                 <a:latin typeface="Montserrat"/>
               </a:rPr>
-              <a:t>Cada resposta do início era uma hipótese funcional diferente.</a:t>
+              <a:t>Cada resposta do início era uma hipótese funcional (explicação sobre para que o comportamento serve) diferente.</a:t>
             </a:r>
           </a:p>
         </p:txBody>
@@ -13872,7 +14110,7 @@
         </p:nvSpPr>
         <p:spPr>
           <a:xfrm>
-            <a:off x="1337965" y="3122910"/>
+            <a:off x="1337965" y="3300710"/>
             <a:ext cx="9801450" cy="700980"/>
           </a:xfrm>
           <a:prstGeom prst="rect">
@@ -13911,7 +14149,7 @@
         </p:nvSpPr>
         <p:spPr>
           <a:xfrm>
-            <a:off x="4090293" y="4103291"/>
+            <a:off x="4090293" y="4281091"/>
             <a:ext cx="4131654" cy="266700"/>
           </a:xfrm>
           <a:prstGeom prst="rect">
@@ -14059,7 +14297,7 @@
         </p:nvSpPr>
         <p:spPr>
           <a:xfrm>
-            <a:off x="1168400" y="1435795"/>
+            <a:off x="1168400" y="864295"/>
             <a:ext cx="10307828" cy="963811"/>
           </a:xfrm>
           <a:prstGeom prst="rect">
@@ -14098,8 +14336,8 @@
         </p:nvSpPr>
         <p:spPr>
           <a:xfrm>
-            <a:off x="1168400" y="2729805"/>
-            <a:ext cx="10307828" cy="1905000"/>
+            <a:off x="1168400" y="2158305"/>
+            <a:ext cx="10307828" cy="3048000"/>
           </a:xfrm>
           <a:prstGeom prst="rect">
             <a:avLst/>
@@ -14142,7 +14380,7 @@
                 </a:solidFill>
                 <a:latin typeface="Montserrat"/>
               </a:rPr>
-              <a:t>Alvos definidos de forma operacional</a:t>
+              <a:t>Alvos definidos de forma operacional (descritos de modo observável e mensurável)</a:t>
             </a:r>
           </a:p>
           <a:p>
@@ -14176,7 +14414,7 @@
                 </a:solidFill>
                 <a:latin typeface="Montserrat"/>
               </a:rPr>
-              <a:t>Procedimentos baseados em princípios de aprendizagem, como reforçamento, exposição, modelação e treino de habilidades</a:t>
+              <a:t>Procedimentos baseados em princípios de aprendizagem, como reforçamento (consequência que aumenta o comportamento), exposição (contato gradual com o que se teme), modelação (aprender observando um modelo) e treino de habilidades</a:t>
             </a:r>
           </a:p>
         </p:txBody>
@@ -14189,7 +14427,7 @@
         </p:nvSpPr>
         <p:spPr>
           <a:xfrm>
-            <a:off x="1168400" y="4965005"/>
+            <a:off x="1168400" y="5536505"/>
             <a:ext cx="10307828" cy="266700"/>
           </a:xfrm>
           <a:prstGeom prst="rect">
@@ -14337,7 +14575,7 @@
         </p:nvSpPr>
         <p:spPr>
           <a:xfrm>
-            <a:off x="1168400" y="1248470"/>
+            <a:off x="1168400" y="1000820"/>
             <a:ext cx="10307828" cy="963811"/>
           </a:xfrm>
           <a:prstGeom prst="rect">
@@ -14377,8 +14615,8 @@
           <p:nvPr/>
         </p:nvGraphicFramePr>
         <p:xfrm>
-          <a:off x="1168400" y="2542480"/>
-          <a:ext cx="10007600" cy="2876550"/>
+          <a:off x="1168400" y="2294830"/>
+          <a:ext cx="10007600" cy="3371850"/>
         </p:xfrm>
         <a:graphic>
           <a:graphicData uri="http://schemas.openxmlformats.org/drawingml/2006/table">
@@ -14465,7 +14703,7 @@
                   </a:tcPr>
                 </a:tc>
               </a:tr>
-              <a:tr h="476250">
+              <a:tr h="723900">
                 <a:tc>
                   <a:txBody>
                     <a:bodyPr wrap="square"/>
@@ -14510,7 +14748,7 @@
                           </a:solidFill>
                           <a:latin typeface="Montserrat"/>
                         </a:rPr>
-                        <a:t>Behaviorismo radical</a:t>
+                        <a:t>Behaviorismo radical (filosofia de Skinner que fundamenta a ABA)</a:t>
                       </a:r>
                     </a:p>
                   </a:txBody>
@@ -14714,7 +14952,7 @@
                   </a:tcPr>
                 </a:tc>
               </a:tr>
-              <a:tr h="476250">
+              <a:tr h="723900">
                 <a:tc>
                   <a:txBody>
                     <a:bodyPr wrap="square"/>
@@ -14759,7 +14997,7 @@
                           </a:solidFill>
                           <a:latin typeface="Montserrat"/>
                         </a:rPr>
-                        <a:t>Análise funcional</a:t>
+                        <a:t>Análise funcional (identificar o que mantém o comportamento)</a:t>
                       </a:r>
                     </a:p>
                   </a:txBody>
@@ -14957,7 +15195,7 @@
         </p:nvSpPr>
         <p:spPr>
           <a:xfrm>
-            <a:off x="1168400" y="1682353"/>
+            <a:off x="1168400" y="1202333"/>
             <a:ext cx="10307828" cy="963811"/>
           </a:xfrm>
           <a:prstGeom prst="rect">
@@ -14996,7 +15234,7 @@
         </p:nvSpPr>
         <p:spPr>
           <a:xfrm>
-            <a:off x="1168400" y="2976364"/>
+            <a:off x="1168400" y="2496344"/>
             <a:ext cx="4839970" cy="639961"/>
           </a:xfrm>
           <a:prstGeom prst="rect">
@@ -15035,8 +15273,8 @@
         </p:nvSpPr>
         <p:spPr>
           <a:xfrm>
-            <a:off x="1168400" y="3705225"/>
-            <a:ext cx="4839970" cy="1279922"/>
+            <a:off x="1168400" y="3225205"/>
+            <a:ext cx="4839970" cy="2239863"/>
           </a:xfrm>
           <a:prstGeom prst="rect">
             <a:avLst/>
@@ -15061,7 +15299,7 @@
                 </a:solidFill>
                 <a:latin typeface="Montserrat"/>
               </a:rPr>
-              <a:t>Têm critério de evidência: FCT, intervenções antecedentes, reforçamento diferencial, intervenção naturalística, entre outras.</a:t>
+              <a:t>Têm critério de evidência: FCT (Treino de Comunicação Funcional), intervenções antecedentes (mudanças no que vem antes), reforçamento diferencial (reforçar um comportamento e não outro), intervenção naturalística (ensino em situações do dia a dia), entre outras.</a:t>
             </a:r>
           </a:p>
         </p:txBody>
@@ -15074,7 +15312,7 @@
         </p:nvSpPr>
         <p:spPr>
           <a:xfrm>
-            <a:off x="6477000" y="2976364"/>
+            <a:off x="6477000" y="2496344"/>
             <a:ext cx="4839970" cy="319980"/>
           </a:xfrm>
           <a:prstGeom prst="rect">
@@ -15113,7 +15351,7 @@
         </p:nvSpPr>
         <p:spPr>
           <a:xfrm>
-            <a:off x="6477000" y="3385245"/>
+            <a:off x="6477000" y="2905224"/>
             <a:ext cx="4839970" cy="959941"/>
           </a:xfrm>
           <a:prstGeom prst="rect">
@@ -15664,7 +15902,7 @@
                 </a:solidFill>
                 <a:latin typeface="Montserrat"/>
               </a:rPr>
-              <a:t>Que pensamentos e crenças ela tem sobre falar em grupo (“vou falar algo errado”)? Como eles influenciam a ansiedade e a esquiva?</a:t>
+              <a:t>Que pensamentos e crenças ela tem sobre falar em grupo (“vou falar algo errado”)? Como eles influenciam a ansiedade e a esquiva (evitar a situação)?</a:t>
             </a:r>
           </a:p>
         </p:txBody>
@@ -15825,7 +16063,7 @@
         </p:nvSpPr>
         <p:spPr>
           <a:xfrm>
-            <a:off x="1168400" y="1765598"/>
+            <a:off x="1168400" y="1594148"/>
             <a:ext cx="10307828" cy="481905"/>
           </a:xfrm>
           <a:prstGeom prst="rect">
@@ -15864,8 +16102,8 @@
         </p:nvSpPr>
         <p:spPr>
           <a:xfrm>
-            <a:off x="1168400" y="2501503"/>
-            <a:ext cx="10307828" cy="2400300"/>
+            <a:off x="1168400" y="2330053"/>
+            <a:ext cx="10307828" cy="2743200"/>
           </a:xfrm>
           <a:prstGeom prst="rect">
             <a:avLst/>
@@ -15908,7 +16146,7 @@
                 </a:solidFill>
                 <a:latin typeface="Montserrat"/>
               </a:rPr>
-              <a:t>Diferenciar topografia e função</a:t>
+              <a:t>Diferenciar topografia (a forma do comportamento) e função (para que ele serve)</a:t>
             </a:r>
           </a:p>
           <a:p>
@@ -15925,7 +16163,7 @@
                 </a:solidFill>
                 <a:latin typeface="Montserrat"/>
               </a:rPr>
-              <a:t>Identificar antecedentes, consequências e contexto</a:t>
+              <a:t>Identificar antecedentes (o que vem antes), consequências (o que vem depois) e contexto</a:t>
             </a:r>
           </a:p>
           <a:p>
@@ -16297,7 +16535,7 @@
         </p:nvSpPr>
         <p:spPr>
           <a:xfrm>
-            <a:off x="1168400" y="1610420"/>
+            <a:off x="1168400" y="1115120"/>
             <a:ext cx="10307828" cy="963811"/>
           </a:xfrm>
           <a:prstGeom prst="rect">
@@ -16337,8 +16575,8 @@
           <p:nvPr/>
         </p:nvGraphicFramePr>
         <p:xfrm>
-          <a:off x="1168400" y="2904430"/>
-          <a:ext cx="10007600" cy="2152650"/>
+          <a:off x="1168400" y="2409130"/>
+          <a:ext cx="10007600" cy="3143250"/>
         </p:xfrm>
         <a:graphic>
           <a:graphicData uri="http://schemas.openxmlformats.org/drawingml/2006/table">
@@ -16517,7 +16755,7 @@
                   </a:tcPr>
                 </a:tc>
               </a:tr>
-              <a:tr h="476250">
+              <a:tr h="971550">
                 <a:tc>
                   <a:txBody>
                     <a:bodyPr wrap="square"/>
@@ -16562,7 +16800,7 @@
                           </a:solidFill>
                           <a:latin typeface="Montserrat"/>
                         </a:rPr>
-                        <a:t>Observação direta A–B–C</a:t>
+                        <a:t>Observação direta A–B–C (antes, comportamento, depois)</a:t>
                       </a:r>
                     </a:p>
                   </a:txBody>
@@ -16600,7 +16838,7 @@
                   </a:tcPr>
                 </a:tc>
               </a:tr>
-              <a:tr h="723900">
+              <a:tr h="1219200">
                 <a:tc>
                   <a:txBody>
                     <a:bodyPr wrap="square"/>
@@ -16645,7 +16883,7 @@
                           </a:solidFill>
                           <a:latin typeface="Montserrat"/>
                         </a:rPr>
-                        <a:t>Teste sistemático de condições</a:t>
+                        <a:t>Teste sistemático de condições (situações planejadas para ver o que mantém o comportamento)</a:t>
                       </a:r>
                     </a:p>
                   </a:txBody>
@@ -16843,7 +17081,7 @@
         </p:nvSpPr>
         <p:spPr>
           <a:xfrm>
-            <a:off x="1168400" y="1898948"/>
+            <a:off x="1168400" y="1721148"/>
             <a:ext cx="10307828" cy="481905"/>
           </a:xfrm>
           <a:prstGeom prst="rect">
@@ -16882,8 +17120,8 @@
         </p:nvSpPr>
         <p:spPr>
           <a:xfrm>
-            <a:off x="1168400" y="2634853"/>
-            <a:ext cx="10307828" cy="355600"/>
+            <a:off x="1168400" y="2457053"/>
+            <a:ext cx="10307828" cy="711200"/>
           </a:xfrm>
           <a:prstGeom prst="rect">
             <a:avLst/>
@@ -16908,7 +17146,7 @@
                 </a:solidFill>
                 <a:latin typeface="Montserrat"/>
               </a:rPr>
-              <a:t>Estratégias antecedentes, escolhidas a partir da hipótese:</a:t>
+              <a:t>Estratégias antecedentes (mudanças no que vem antes do comportamento), escolhidas a partir da hipótese:</a:t>
             </a:r>
           </a:p>
         </p:txBody>
@@ -16921,7 +17159,7 @@
         </p:nvSpPr>
         <p:spPr>
           <a:xfrm>
-            <a:off x="1168400" y="3244453"/>
+            <a:off x="1168400" y="3422253"/>
             <a:ext cx="10307828" cy="1524000"/>
           </a:xfrm>
           <a:prstGeom prst="rect">
@@ -17196,8 +17434,8 @@
         </p:nvSpPr>
         <p:spPr>
           <a:xfrm>
-            <a:off x="1168400" y="1491754"/>
-            <a:ext cx="10307828" cy="963811"/>
+            <a:off x="1168400" y="1250752"/>
+            <a:ext cx="10307828" cy="1445716"/>
           </a:xfrm>
           <a:prstGeom prst="rect">
             <a:avLst/>
@@ -17222,7 +17460,7 @@
                 </a:solidFill>
                 <a:latin typeface="Montserrat"/>
               </a:rPr>
-              <a:t>FCT: ensinar a pedir o que o comportamento conseguia</a:t>
+              <a:t>FCT (Treino de Comunicação Funcional): ensinar a pedir o que o comportamento conseguia</a:t>
             </a:r>
           </a:p>
         </p:txBody>
@@ -17235,7 +17473,7 @@
         </p:nvSpPr>
         <p:spPr>
           <a:xfrm>
-            <a:off x="1168400" y="2709565"/>
+            <a:off x="1168400" y="2950468"/>
             <a:ext cx="10307828" cy="1714500"/>
           </a:xfrm>
           <a:prstGeom prst="rect">
@@ -17326,7 +17564,7 @@
         </p:nvSpPr>
         <p:spPr>
           <a:xfrm>
-            <a:off x="1168400" y="4678065"/>
+            <a:off x="1168400" y="4918968"/>
             <a:ext cx="10307828" cy="497681"/>
           </a:xfrm>
           <a:prstGeom prst="rect">
@@ -17635,7 +17873,7 @@
                 </a:solidFill>
                 <a:latin typeface="Montserrat"/>
               </a:rPr>
-              <a:t>Controle compartilhado entre criança e adulto</a:t>
+              <a:t>Controle compartilhado entre criança e adulto (os dois escolhem e conduzem)</a:t>
             </a:r>
           </a:p>
           <a:p>
@@ -17652,7 +17890,7 @@
                 </a:solidFill>
                 <a:latin typeface="Montserrat"/>
               </a:rPr>
-              <a:t>Consequências naturais</a:t>
+              <a:t>Consequências naturais (a recompensa vem da própria atividade)</a:t>
             </a:r>
           </a:p>
           <a:p>
@@ -17830,7 +18068,7 @@
         </p:nvSpPr>
         <p:spPr>
           <a:xfrm>
-            <a:off x="1168400" y="1721148"/>
+            <a:off x="1168400" y="1543348"/>
             <a:ext cx="10307828" cy="481905"/>
           </a:xfrm>
           <a:prstGeom prst="rect">
@@ -17869,8 +18107,8 @@
         </p:nvSpPr>
         <p:spPr>
           <a:xfrm>
-            <a:off x="1168400" y="2482453"/>
-            <a:ext cx="10307828" cy="711200"/>
+            <a:off x="1168400" y="2304653"/>
+            <a:ext cx="10307828" cy="1066800"/>
           </a:xfrm>
           <a:prstGeom prst="rect">
             <a:avLst/>
@@ -17895,7 +18133,7 @@
                 </a:solidFill>
                 <a:latin typeface="Montserrat"/>
               </a:rPr>
-              <a:t>Aprender na clínica não garante usar em casa, na escola ou com outras pessoas.</a:t>
+              <a:t>Generalização é usar o que aprendeu em outros lugares, com outras pessoas e materiais. Aprender na clínica não garante usar em casa, na escola ou com outras pessoas.</a:t>
             </a:r>
           </a:p>
         </p:txBody>
@@ -17908,7 +18146,7 @@
         </p:nvSpPr>
         <p:spPr>
           <a:xfrm>
-            <a:off x="1168400" y="3473053"/>
+            <a:off x="1168400" y="3650853"/>
             <a:ext cx="10307828" cy="660400"/>
           </a:xfrm>
           <a:prstGeom prst="rect">
@@ -17947,7 +18185,7 @@
         </p:nvSpPr>
         <p:spPr>
           <a:xfrm>
-            <a:off x="1168400" y="4412853"/>
+            <a:off x="1168400" y="4590653"/>
             <a:ext cx="10307828" cy="533400"/>
           </a:xfrm>
           <a:prstGeom prst="rect">
@@ -18243,7 +18481,7 @@
                 </a:solidFill>
                 <a:latin typeface="Montserrat"/>
               </a:rPr>
-              <a:t>Não ter como alvo características autistas inofensivas</a:t>
+              <a:t>Não ter como alvo características autistas que não causam prejuízo</a:t>
             </a:r>
           </a:p>
           <a:p>
@@ -18260,7 +18498,7 @@
                 </a:solidFill>
                 <a:latin typeface="Montserrat"/>
               </a:rPr>
-              <a:t>Revisar por dados, incluindo possíveis efeitos adversos</a:t>
+              <a:t>Revisar por dados, incluindo possíveis efeitos adversos (efeitos indesejados)</a:t>
             </a:r>
           </a:p>
           <a:p>
@@ -18438,7 +18676,7 @@
         </p:nvSpPr>
         <p:spPr>
           <a:xfrm>
-            <a:off x="1168400" y="1806377"/>
+            <a:off x="1168400" y="1573907"/>
             <a:ext cx="10307828" cy="481905"/>
           </a:xfrm>
           <a:prstGeom prst="rect">
@@ -18477,8 +18715,118 @@
         </p:nvSpPr>
         <p:spPr>
           <a:xfrm>
-            <a:off x="1168400" y="2567682"/>
-            <a:ext cx="4839970" cy="319980"/>
+            <a:off x="1168400" y="2335212"/>
+            <a:ext cx="10307828" cy="1219200"/>
+          </a:xfrm>
+          <a:prstGeom prst="rect">
+            <a:avLst/>
+          </a:prstGeom>
+          <a:noFill/>
+        </p:spPr>
+        <p:txBody>
+          <a:bodyPr wrap="square" lIns="0" rIns="0" tIns="0" bIns="0" anchor="t">
+            <a:noAutofit/>
+          </a:bodyPr>
+          <a:lstStyle/>
+          <a:p>
+            <a:pPr algn="l" marL="279400" indent="-279400">
+              <a:lnSpc>
+                <a:spcPct val="131000"/>
+              </a:lnSpc>
+              <a:buAutoNum type="arabicPeriod" startAt="1"/>
+            </a:pPr>
+            <a:r>
+              <a:rPr sz="2000" b="0" i="0">
+                <a:solidFill>
+                  <a:srgbClr val="2E3A4A"/>
+                </a:solidFill>
+                <a:latin typeface="Montserrat"/>
+              </a:rPr>
+              <a:t>Assistam ao vídeo: </a:t>
+            </a:r>
+            <a:r>
+              <a:rPr sz="2000" b="1" i="0">
+                <a:solidFill>
+                  <a:srgbClr val="2E3A4A"/>
+                </a:solidFill>
+                <a:latin typeface="Montserrat"/>
+              </a:rPr>
+              <a:t>um episódio</a:t>
+            </a:r>
+            <a:r>
+              <a:rPr sz="2000" b="0" i="0">
+                <a:solidFill>
+                  <a:srgbClr val="2E3A4A"/>
+                </a:solidFill>
+                <a:latin typeface="Montserrat"/>
+              </a:rPr>
+              <a:t> com o Theo</a:t>
+            </a:r>
+          </a:p>
+          <a:p>
+            <a:pPr algn="l" marL="279400" indent="-279400">
+              <a:lnSpc>
+                <a:spcPct val="131000"/>
+              </a:lnSpc>
+              <a:buAutoNum type="arabicPeriod" startAt="1"/>
+            </a:pPr>
+            <a:r>
+              <a:rPr sz="2000" b="0" i="0">
+                <a:solidFill>
+                  <a:srgbClr val="2E3A4A"/>
+                </a:solidFill>
+                <a:latin typeface="Montserrat"/>
+              </a:rPr>
+              <a:t>Leiam a história: </a:t>
+            </a:r>
+            <a:r>
+              <a:rPr sz="2000" b="1" i="0">
+                <a:solidFill>
+                  <a:srgbClr val="2E3A4A"/>
+                </a:solidFill>
+                <a:latin typeface="Montserrat"/>
+              </a:rPr>
+              <a:t>quatro semanas</a:t>
+            </a:r>
+            <a:r>
+              <a:rPr sz="2000" b="0" i="0">
+                <a:solidFill>
+                  <a:srgbClr val="2E3A4A"/>
+                </a:solidFill>
+                <a:latin typeface="Montserrat"/>
+              </a:rPr>
+              <a:t> de registros</a:t>
+            </a:r>
+          </a:p>
+          <a:p>
+            <a:pPr algn="l" marL="279400" indent="-279400">
+              <a:lnSpc>
+                <a:spcPct val="131000"/>
+              </a:lnSpc>
+              <a:buAutoNum type="arabicPeriod" startAt="1"/>
+            </a:pPr>
+            <a:r>
+              <a:rPr sz="2000" b="0" i="0">
+                <a:solidFill>
+                  <a:srgbClr val="2E3A4A"/>
+                </a:solidFill>
+                <a:latin typeface="Montserrat"/>
+              </a:rPr>
+              <a:t>Em grupo, respondam às perguntas</a:t>
+            </a:r>
+          </a:p>
+        </p:txBody>
+      </p:sp>
+      <p:sp>
+        <p:nvSpPr>
+          <p:cNvPr id="5" name="TextBox 4"/>
+          <p:cNvSpPr txBox="1"/>
+          <p:nvPr/>
+        </p:nvSpPr>
+        <p:spPr>
+          <a:xfrm>
+            <a:off x="1168400" y="3833812"/>
+            <a:ext cx="10307828" cy="319980"/>
           </a:xfrm>
           <a:prstGeom prst="rect">
             <a:avLst/>
@@ -18493,95 +18841,56 @@
           <a:p>
             <a:pPr algn="l">
               <a:lnSpc>
-                <a:spcPct val="98000"/>
-              </a:lnSpc>
-            </a:pPr>
-            <a:r>
-              <a:rPr sz="2100" b="1" i="0">
+                <a:spcPct val="115000"/>
+              </a:lnSpc>
+            </a:pPr>
+            <a:r>
+              <a:rPr sz="1800" b="0" i="0">
+                <a:solidFill>
+                  <a:srgbClr val="2E3A4A"/>
+                </a:solidFill>
+                <a:latin typeface="Montserrat"/>
+              </a:rPr>
+              <a:t>Escolham quem anota e quem apresenta.</a:t>
+            </a:r>
+          </a:p>
+        </p:txBody>
+      </p:sp>
+      <p:sp>
+        <p:nvSpPr>
+          <p:cNvPr id="6" name="TextBox 5"/>
+          <p:cNvSpPr txBox="1"/>
+          <p:nvPr/>
+        </p:nvSpPr>
+        <p:spPr>
+          <a:xfrm>
+            <a:off x="1168400" y="4433193"/>
+            <a:ext cx="10307828" cy="660400"/>
+          </a:xfrm>
+          <a:prstGeom prst="rect">
+            <a:avLst/>
+          </a:prstGeom>
+          <a:noFill/>
+        </p:spPr>
+        <p:txBody>
+          <a:bodyPr wrap="square" lIns="0" rIns="0" tIns="0" bIns="0" anchor="t">
+            <a:noAutofit/>
+          </a:bodyPr>
+          <a:lstStyle/>
+          <a:p>
+            <a:pPr algn="l">
+              <a:lnSpc>
+                <a:spcPct val="107000"/>
+              </a:lnSpc>
+            </a:pPr>
+            <a:r>
+              <a:rPr sz="2000" b="1" i="0">
                 <a:solidFill>
                   <a:srgbClr val="0F7C86"/>
                 </a:solidFill>
                 <a:latin typeface="Montserrat"/>
               </a:rPr>
-              <a:t>Todos os grupos</a:t>
-            </a:r>
-          </a:p>
-        </p:txBody>
-      </p:sp>
-      <p:sp>
-        <p:nvSpPr>
-          <p:cNvPr id="5" name="TextBox 4"/>
-          <p:cNvSpPr txBox="1"/>
-          <p:nvPr/>
-        </p:nvSpPr>
-        <p:spPr>
-          <a:xfrm>
-            <a:off x="1168400" y="2976562"/>
-            <a:ext cx="4839970" cy="337741"/>
-          </a:xfrm>
-          <a:prstGeom prst="rect">
-            <a:avLst/>
-          </a:prstGeom>
-          <a:noFill/>
-        </p:spPr>
-        <p:txBody>
-          <a:bodyPr wrap="square" lIns="0" rIns="0" tIns="0" bIns="0" anchor="t">
-            <a:noAutofit/>
-          </a:bodyPr>
-          <a:lstStyle/>
-          <a:p>
-            <a:pPr algn="l">
-              <a:lnSpc>
-                <a:spcPct val="115000"/>
-              </a:lnSpc>
-            </a:pPr>
-            <a:r>
-              <a:rPr sz="1900" b="0" i="0">
-                <a:solidFill>
-                  <a:srgbClr val="2E3A4A"/>
-                </a:solidFill>
-                <a:latin typeface="Montserrat"/>
-              </a:rPr>
-              <a:t>Perguntas 1 a 4</a:t>
-            </a:r>
-          </a:p>
-        </p:txBody>
-      </p:sp>
-      <p:sp>
-        <p:nvSpPr>
-          <p:cNvPr id="6" name="TextBox 5"/>
-          <p:cNvSpPr txBox="1"/>
-          <p:nvPr/>
-        </p:nvSpPr>
-        <p:spPr>
-          <a:xfrm>
-            <a:off x="6477000" y="2567682"/>
-            <a:ext cx="4839970" cy="319980"/>
-          </a:xfrm>
-          <a:prstGeom prst="rect">
-            <a:avLst/>
-          </a:prstGeom>
-          <a:noFill/>
-        </p:spPr>
-        <p:txBody>
-          <a:bodyPr wrap="square" lIns="0" rIns="0" tIns="0" bIns="0" anchor="t">
-            <a:noAutofit/>
-          </a:bodyPr>
-          <a:lstStyle/>
-          <a:p>
-            <a:pPr algn="l">
-              <a:lnSpc>
-                <a:spcPct val="98000"/>
-              </a:lnSpc>
-            </a:pPr>
-            <a:r>
-              <a:rPr sz="2100" b="1" i="0">
-                <a:solidFill>
-                  <a:srgbClr val="0F7C86"/>
-                </a:solidFill>
-                <a:latin typeface="Montserrat"/>
-              </a:rPr>
-              <a:t>Cada grupo, mais uma</a:t>
+              <a:t>A história permite levantar hipóteses, não concluir a função (para que o comportamento serve).</a:t>
             </a:r>
           </a:p>
         </p:txBody>
@@ -18589,123 +18898,6 @@
       <p:sp>
         <p:nvSpPr>
           <p:cNvPr id="7" name="TextBox 6"/>
-          <p:cNvSpPr txBox="1"/>
-          <p:nvPr/>
-        </p:nvSpPr>
-        <p:spPr>
-          <a:xfrm>
-            <a:off x="6477000" y="2976562"/>
-            <a:ext cx="4839970" cy="675481"/>
-          </a:xfrm>
-          <a:prstGeom prst="rect">
-            <a:avLst/>
-          </a:prstGeom>
-          <a:noFill/>
-        </p:spPr>
-        <p:txBody>
-          <a:bodyPr wrap="square" lIns="0" rIns="0" tIns="0" bIns="0" anchor="t">
-            <a:noAutofit/>
-          </a:bodyPr>
-          <a:lstStyle/>
-          <a:p>
-            <a:pPr algn="l">
-              <a:lnSpc>
-                <a:spcPct val="115000"/>
-              </a:lnSpc>
-            </a:pPr>
-            <a:r>
-              <a:rPr sz="1900" b="0" i="0">
-                <a:solidFill>
-                  <a:srgbClr val="2E3A4A"/>
-                </a:solidFill>
-                <a:latin typeface="Montserrat"/>
-              </a:rPr>
-              <a:t>Grupos 1, 3, 5…: pergunta 5. Grupos 2, 4, 6…: pergunta 6.</a:t>
-            </a:r>
-          </a:p>
-        </p:txBody>
-      </p:sp>
-      <p:sp>
-        <p:nvSpPr>
-          <p:cNvPr id="8" name="TextBox 7"/>
-          <p:cNvSpPr txBox="1"/>
-          <p:nvPr/>
-        </p:nvSpPr>
-        <p:spPr>
-          <a:xfrm>
-            <a:off x="1168400" y="3931444"/>
-            <a:ext cx="10307828" cy="319980"/>
-          </a:xfrm>
-          <a:prstGeom prst="rect">
-            <a:avLst/>
-          </a:prstGeom>
-          <a:noFill/>
-        </p:spPr>
-        <p:txBody>
-          <a:bodyPr wrap="square" lIns="0" rIns="0" tIns="0" bIns="0" anchor="t">
-            <a:noAutofit/>
-          </a:bodyPr>
-          <a:lstStyle/>
-          <a:p>
-            <a:pPr algn="l">
-              <a:lnSpc>
-                <a:spcPct val="115000"/>
-              </a:lnSpc>
-            </a:pPr>
-            <a:r>
-              <a:rPr sz="1800" b="0" i="0">
-                <a:solidFill>
-                  <a:srgbClr val="2E3A4A"/>
-                </a:solidFill>
-                <a:latin typeface="Montserrat"/>
-              </a:rPr>
-              <a:t>Escolham quem anota e quem apresenta.</a:t>
-            </a:r>
-          </a:p>
-        </p:txBody>
-      </p:sp>
-      <p:sp>
-        <p:nvSpPr>
-          <p:cNvPr id="9" name="TextBox 8"/>
-          <p:cNvSpPr txBox="1"/>
-          <p:nvPr/>
-        </p:nvSpPr>
-        <p:spPr>
-          <a:xfrm>
-            <a:off x="1168400" y="4530824"/>
-            <a:ext cx="10307828" cy="330200"/>
-          </a:xfrm>
-          <a:prstGeom prst="rect">
-            <a:avLst/>
-          </a:prstGeom>
-          <a:noFill/>
-        </p:spPr>
-        <p:txBody>
-          <a:bodyPr wrap="square" lIns="0" rIns="0" tIns="0" bIns="0" anchor="t">
-            <a:noAutofit/>
-          </a:bodyPr>
-          <a:lstStyle/>
-          <a:p>
-            <a:pPr algn="l">
-              <a:lnSpc>
-                <a:spcPct val="107000"/>
-              </a:lnSpc>
-            </a:pPr>
-            <a:r>
-              <a:rPr sz="2000" b="1" i="0">
-                <a:solidFill>
-                  <a:srgbClr val="0F7C86"/>
-                </a:solidFill>
-                <a:latin typeface="Montserrat"/>
-              </a:rPr>
-              <a:t>A história permite levantar hipóteses, não concluir a função.</a:t>
-            </a:r>
-          </a:p>
-        </p:txBody>
-      </p:sp>
-      <p:sp>
-        <p:nvSpPr>
-          <p:cNvPr id="10" name="TextBox 9"/>
           <p:cNvSpPr txBox="1"/>
           <p:nvPr/>
         </p:nvSpPr>
@@ -18820,7 +19012,7 @@
         </p:nvSpPr>
         <p:spPr>
           <a:xfrm>
-            <a:off x="1168400" y="1093192"/>
+            <a:off x="1168400" y="977602"/>
             <a:ext cx="10569448" cy="452735"/>
           </a:xfrm>
           <a:prstGeom prst="rect">
@@ -18859,7 +19051,7 @@
         </p:nvSpPr>
         <p:spPr>
           <a:xfrm>
-            <a:off x="1168400" y="2407642"/>
+            <a:off x="1168400" y="2292052"/>
             <a:ext cx="4133596" cy="302220"/>
           </a:xfrm>
           <a:prstGeom prst="rect">
@@ -18898,7 +19090,7 @@
         </p:nvSpPr>
         <p:spPr>
           <a:xfrm>
-            <a:off x="1168400" y="2862262"/>
+            <a:off x="1168400" y="2746673"/>
             <a:ext cx="4133596" cy="1619250"/>
           </a:xfrm>
           <a:prstGeom prst="rect">
@@ -18989,7 +19181,7 @@
         </p:blipFill>
         <p:spPr>
           <a:xfrm>
-            <a:off x="5537200" y="1774527"/>
+            <a:off x="5537200" y="1658938"/>
             <a:ext cx="5892800" cy="3314700"/>
           </a:xfrm>
           <a:prstGeom prst="rect">
@@ -19005,8 +19197,8 @@
         </p:nvSpPr>
         <p:spPr>
           <a:xfrm>
-            <a:off x="1168400" y="5343227"/>
-            <a:ext cx="10569448" cy="231080"/>
+            <a:off x="1168400" y="5227638"/>
+            <a:ext cx="10569448" cy="462161"/>
           </a:xfrm>
           <a:prstGeom prst="rect">
             <a:avLst/>
@@ -19031,7 +19223,7 @@
                 </a:solidFill>
                 <a:latin typeface="Montserrat"/>
               </a:rPr>
-              <a:t>Animação, exemplo fictício. Não representa uma criança real. O vídeo mostra um episódio; o padrão está na vinheta a seguir.</a:t>
+              <a:t>Animação, exemplo fictício. Não representa uma criança real. O vídeo mostra um episódio; a história a seguir traz o registro de quatro semanas. As respostas vêm depois, em grupo.</a:t>
             </a:r>
           </a:p>
         </p:txBody>
@@ -19175,8 +19367,8 @@
         </p:nvSpPr>
         <p:spPr>
           <a:xfrm>
-            <a:off x="1168400" y="1474887"/>
-            <a:ext cx="10307828" cy="481905"/>
+            <a:off x="1168400" y="1532037"/>
+            <a:ext cx="10307828" cy="423466"/>
           </a:xfrm>
           <a:prstGeom prst="rect">
             <a:avLst/>
@@ -19195,13 +19387,13 @@
               </a:lnSpc>
             </a:pPr>
             <a:r>
-              <a:rPr sz="3300" b="1" i="0">
+              <a:rPr sz="2900" b="1" i="0">
                 <a:solidFill>
                   <a:srgbClr val="1B2F4B"/>
                 </a:solidFill>
                 <a:latin typeface="Montserrat"/>
               </a:rPr>
-              <a:t>Respostas do vídeo</a:t>
+              <a:t>Vinheta: Theo</a:t>
             </a:r>
           </a:p>
         </p:txBody>
@@ -19214,8 +19406,8 @@
         </p:nvSpPr>
         <p:spPr>
           <a:xfrm>
-            <a:off x="1168400" y="2210792"/>
-            <a:ext cx="3156915" cy="304800"/>
+            <a:off x="1168400" y="2146002"/>
+            <a:ext cx="10307828" cy="853380"/>
           </a:xfrm>
           <a:prstGeom prst="rect">
             <a:avLst/>
@@ -19230,17 +19422,17 @@
           <a:p>
             <a:pPr algn="l">
               <a:lnSpc>
-                <a:spcPct val="98000"/>
-              </a:lnSpc>
-            </a:pPr>
-            <a:r>
-              <a:rPr sz="2000" b="1" i="0">
-                <a:solidFill>
-                  <a:srgbClr val="0F7C86"/>
-                </a:solidFill>
-                <a:latin typeface="Montserrat"/>
-              </a:rPr>
-              <a:t>Antes</a:t>
+                <a:spcPct val="115000"/>
+              </a:lnSpc>
+            </a:pPr>
+            <a:r>
+              <a:rPr sz="1600" b="0" i="0">
+                <a:solidFill>
+                  <a:srgbClr val="2E3A4A"/>
+                </a:solidFill>
+                <a:latin typeface="Montserrat"/>
+              </a:rPr>
+              <a:t>Theo tem 6 anos e é autista. Comunica-se principalmente por palavras isoladas e por gestos (puxa o adulto pela mão, aponta). Gosta muito de montar trilhos de trem. Frequenta atendimento clínico três vezes por semana. Nas últimas quatro semanas, a equipe registrou:</a:t>
             </a:r>
           </a:p>
         </p:txBody>
@@ -19253,8 +19445,155 @@
         </p:nvSpPr>
         <p:spPr>
           <a:xfrm>
-            <a:off x="1168400" y="2604492"/>
-            <a:ext cx="3156915" cy="1208881"/>
+            <a:off x="1168400" y="3189883"/>
+            <a:ext cx="10307828" cy="1524000"/>
+          </a:xfrm>
+          <a:prstGeom prst="rect">
+            <a:avLst/>
+          </a:prstGeom>
+          <a:noFill/>
+        </p:spPr>
+        <p:txBody>
+          <a:bodyPr wrap="square" lIns="0" rIns="0" tIns="0" bIns="0" anchor="t">
+            <a:noAutofit/>
+          </a:bodyPr>
+          <a:lstStyle/>
+          <a:p>
+            <a:pPr algn="l" marL="279400" indent="-279400">
+              <a:lnSpc>
+                <a:spcPct val="123000"/>
+              </a:lnSpc>
+              <a:buChar char="•"/>
+            </a:pPr>
+            <a:r>
+              <a:rPr sz="1600" b="0" i="0">
+                <a:solidFill>
+                  <a:srgbClr val="2E3A4A"/>
+                </a:solidFill>
+                <a:latin typeface="Montserrat"/>
+              </a:rPr>
+              <a:t>Quando a terapeuta diz “agora acabou, vamos para a mesa”, Theo </a:t>
+            </a:r>
+            <a:r>
+              <a:rPr sz="1600" b="1" i="0">
+                <a:solidFill>
+                  <a:srgbClr val="2E3A4A"/>
+                </a:solidFill>
+                <a:latin typeface="Montserrat"/>
+              </a:rPr>
+              <a:t>grita, se joga no chão e chuta o ar</a:t>
+            </a:r>
+            <a:r>
+              <a:rPr sz="1600" b="0" i="0">
+                <a:solidFill>
+                  <a:srgbClr val="2E3A4A"/>
+                </a:solidFill>
+                <a:latin typeface="Montserrat"/>
+              </a:rPr>
+              <a:t>, por cerca de 3 a 8 minutos. Isso aconteceu em </a:t>
+            </a:r>
+            <a:r>
+              <a:rPr sz="1600" b="1" i="0">
+                <a:solidFill>
+                  <a:srgbClr val="2E3A4A"/>
+                </a:solidFill>
+                <a:latin typeface="Montserrat"/>
+              </a:rPr>
+              <a:t>11 de 12 sessões</a:t>
+            </a:r>
+            <a:r>
+              <a:rPr sz="1600" b="0" i="0">
+                <a:solidFill>
+                  <a:srgbClr val="2E3A4A"/>
+                </a:solidFill>
+                <a:latin typeface="Montserrat"/>
+              </a:rPr>
+              <a:t>, quase sempre na passagem dos trilhos para a atividade de mesa (traçar letras e encaixes).</a:t>
+            </a:r>
+          </a:p>
+          <a:p>
+            <a:pPr algn="l" marL="279400" indent="-279400">
+              <a:lnSpc>
+                <a:spcPct val="123000"/>
+              </a:lnSpc>
+              <a:buChar char="•"/>
+            </a:pPr>
+            <a:r>
+              <a:rPr sz="1600" b="0" i="0">
+                <a:solidFill>
+                  <a:srgbClr val="2E3A4A"/>
+                </a:solidFill>
+                <a:latin typeface="Montserrat"/>
+              </a:rPr>
+              <a:t>Em </a:t>
+            </a:r>
+            <a:r>
+              <a:rPr sz="1600" b="1" i="0">
+                <a:solidFill>
+                  <a:srgbClr val="2E3A4A"/>
+                </a:solidFill>
+                <a:latin typeface="Montserrat"/>
+              </a:rPr>
+              <a:t>duas sessões</a:t>
+            </a:r>
+            <a:r>
+              <a:rPr sz="1600" b="0" i="0">
+                <a:solidFill>
+                  <a:srgbClr val="2E3A4A"/>
+                </a:solidFill>
+                <a:latin typeface="Montserrat"/>
+              </a:rPr>
+              <a:t> em que a terapeuta também guardou os trilhos, mas a atividade seguinte foi o </a:t>
+            </a:r>
+            <a:r>
+              <a:rPr sz="1600" b="1" i="0">
+                <a:solidFill>
+                  <a:srgbClr val="2E3A4A"/>
+                </a:solidFill>
+                <a:latin typeface="Montserrat"/>
+              </a:rPr>
+              <a:t>lanche</a:t>
+            </a:r>
+            <a:r>
+              <a:rPr sz="1600" b="0" i="0">
+                <a:solidFill>
+                  <a:srgbClr val="2E3A4A"/>
+                </a:solidFill>
+                <a:latin typeface="Montserrat"/>
+              </a:rPr>
+              <a:t>, Theo </a:t>
+            </a:r>
+            <a:r>
+              <a:rPr sz="1600" b="1" i="0">
+                <a:solidFill>
+                  <a:srgbClr val="2E3A4A"/>
+                </a:solidFill>
+                <a:latin typeface="Montserrat"/>
+              </a:rPr>
+              <a:t>não</a:t>
+            </a:r>
+            <a:r>
+              <a:rPr sz="1600" b="0" i="0">
+                <a:solidFill>
+                  <a:srgbClr val="2E3A4A"/>
+                </a:solidFill>
+                <a:latin typeface="Montserrat"/>
+              </a:rPr>
+              <a:t> apresentou o comportamento.</a:t>
+            </a:r>
+          </a:p>
+        </p:txBody>
+      </p:sp>
+      <p:sp>
+        <p:nvSpPr>
+          <p:cNvPr id="6" name="TextBox 5"/>
+          <p:cNvSpPr txBox="1"/>
+          <p:nvPr/>
+        </p:nvSpPr>
+        <p:spPr>
+          <a:xfrm>
+            <a:off x="1168400" y="4904383"/>
+            <a:ext cx="10307828" cy="231080"/>
           </a:xfrm>
           <a:prstGeom prst="rect">
             <a:avLst/>
@@ -19273,52 +19612,13 @@
               </a:lnSpc>
             </a:pPr>
             <a:r>
-              <a:rPr sz="1700" b="0" i="0">
-                <a:solidFill>
-                  <a:srgbClr val="2E3A4A"/>
-                </a:solidFill>
-                <a:latin typeface="Montserrat"/>
-              </a:rPr>
-              <a:t>A terapeuta guarda os trilhos e aponta a mesa: “Agora acabou. Vamos para a mesa.”</a:t>
-            </a:r>
-          </a:p>
-        </p:txBody>
-      </p:sp>
-      <p:sp>
-        <p:nvSpPr>
-          <p:cNvPr id="6" name="TextBox 5"/>
-          <p:cNvSpPr txBox="1"/>
-          <p:nvPr/>
-        </p:nvSpPr>
-        <p:spPr>
-          <a:xfrm>
-            <a:off x="4639766" y="2210792"/>
-            <a:ext cx="3156915" cy="304800"/>
-          </a:xfrm>
-          <a:prstGeom prst="rect">
-            <a:avLst/>
-          </a:prstGeom>
-          <a:noFill/>
-        </p:spPr>
-        <p:txBody>
-          <a:bodyPr wrap="square" lIns="0" rIns="0" tIns="0" bIns="0" anchor="t">
-            <a:noAutofit/>
-          </a:bodyPr>
-          <a:lstStyle/>
-          <a:p>
-            <a:pPr algn="l">
-              <a:lnSpc>
-                <a:spcPct val="98000"/>
-              </a:lnSpc>
-            </a:pPr>
-            <a:r>
-              <a:rPr sz="2000" b="1" i="0">
-                <a:solidFill>
-                  <a:srgbClr val="0F7C86"/>
-                </a:solidFill>
-                <a:latin typeface="Montserrat"/>
-              </a:rPr>
-              <a:t>O que ele faz</a:t>
+              <a:rPr sz="1300" b="0" i="1">
+                <a:solidFill>
+                  <a:srgbClr val="66717F"/>
+                </a:solidFill>
+                <a:latin typeface="Montserrat"/>
+              </a:rPr>
+              <a:t>Exemplo fictício, parte 1 de 2</a:t>
             </a:r>
           </a:p>
         </p:txBody>
@@ -19326,210 +19626,6 @@
       <p:sp>
         <p:nvSpPr>
           <p:cNvPr id="7" name="TextBox 6"/>
-          <p:cNvSpPr txBox="1"/>
-          <p:nvPr/>
-        </p:nvSpPr>
-        <p:spPr>
-          <a:xfrm>
-            <a:off x="4639766" y="2604492"/>
-            <a:ext cx="3156915" cy="604441"/>
-          </a:xfrm>
-          <a:prstGeom prst="rect">
-            <a:avLst/>
-          </a:prstGeom>
-          <a:noFill/>
-        </p:spPr>
-        <p:txBody>
-          <a:bodyPr wrap="square" lIns="0" rIns="0" tIns="0" bIns="0" anchor="t">
-            <a:noAutofit/>
-          </a:bodyPr>
-          <a:lstStyle/>
-          <a:p>
-            <a:pPr algn="l">
-              <a:lnSpc>
-                <a:spcPct val="115000"/>
-              </a:lnSpc>
-            </a:pPr>
-            <a:r>
-              <a:rPr sz="1700" b="0" i="0">
-                <a:solidFill>
-                  <a:srgbClr val="2E3A4A"/>
-                </a:solidFill>
-                <a:latin typeface="Montserrat"/>
-              </a:rPr>
-              <a:t>Grita, se joga no chão e chuta o ar.</a:t>
-            </a:r>
-          </a:p>
-        </p:txBody>
-      </p:sp>
-      <p:sp>
-        <p:nvSpPr>
-          <p:cNvPr id="8" name="TextBox 7"/>
-          <p:cNvSpPr txBox="1"/>
-          <p:nvPr/>
-        </p:nvSpPr>
-        <p:spPr>
-          <a:xfrm>
-            <a:off x="8111133" y="2210792"/>
-            <a:ext cx="3156915" cy="304800"/>
-          </a:xfrm>
-          <a:prstGeom prst="rect">
-            <a:avLst/>
-          </a:prstGeom>
-          <a:noFill/>
-        </p:spPr>
-        <p:txBody>
-          <a:bodyPr wrap="square" lIns="0" rIns="0" tIns="0" bIns="0" anchor="t">
-            <a:noAutofit/>
-          </a:bodyPr>
-          <a:lstStyle/>
-          <a:p>
-            <a:pPr algn="l">
-              <a:lnSpc>
-                <a:spcPct val="98000"/>
-              </a:lnSpc>
-            </a:pPr>
-            <a:r>
-              <a:rPr sz="2000" b="1" i="0">
-                <a:solidFill>
-                  <a:srgbClr val="0F7C86"/>
-                </a:solidFill>
-                <a:latin typeface="Montserrat"/>
-              </a:rPr>
-              <a:t>Depois</a:t>
-            </a:r>
-          </a:p>
-        </p:txBody>
-      </p:sp>
-      <p:sp>
-        <p:nvSpPr>
-          <p:cNvPr id="9" name="TextBox 8"/>
-          <p:cNvSpPr txBox="1"/>
-          <p:nvPr/>
-        </p:nvSpPr>
-        <p:spPr>
-          <a:xfrm>
-            <a:off x="8111133" y="2604492"/>
-            <a:ext cx="3156915" cy="906661"/>
-          </a:xfrm>
-          <a:prstGeom prst="rect">
-            <a:avLst/>
-          </a:prstGeom>
-          <a:noFill/>
-        </p:spPr>
-        <p:txBody>
-          <a:bodyPr wrap="square" lIns="0" rIns="0" tIns="0" bIns="0" anchor="t">
-            <a:noAutofit/>
-          </a:bodyPr>
-          <a:lstStyle/>
-          <a:p>
-            <a:pPr algn="l">
-              <a:lnSpc>
-                <a:spcPct val="115000"/>
-              </a:lnSpc>
-            </a:pPr>
-            <a:r>
-              <a:rPr sz="1700" b="0" i="0">
-                <a:solidFill>
-                  <a:srgbClr val="2E3A4A"/>
-                </a:solidFill>
-                <a:latin typeface="Montserrat"/>
-              </a:rPr>
-              <a:t>A terapeuta não sabe o que fazer e devolve os trilhos. Ele volta a brincar.</a:t>
-            </a:r>
-          </a:p>
-        </p:txBody>
-      </p:sp>
-      <p:sp>
-        <p:nvSpPr>
-          <p:cNvPr id="10" name="TextBox 9"/>
-          <p:cNvSpPr txBox="1"/>
-          <p:nvPr/>
-        </p:nvSpPr>
-        <p:spPr>
-          <a:xfrm>
-            <a:off x="1168400" y="4067373"/>
-            <a:ext cx="10307828" cy="604441"/>
-          </a:xfrm>
-          <a:prstGeom prst="rect">
-            <a:avLst/>
-          </a:prstGeom>
-          <a:noFill/>
-        </p:spPr>
-        <p:txBody>
-          <a:bodyPr wrap="square" lIns="0" rIns="0" tIns="0" bIns="0" anchor="t">
-            <a:noAutofit/>
-          </a:bodyPr>
-          <a:lstStyle/>
-          <a:p>
-            <a:pPr algn="l">
-              <a:lnSpc>
-                <a:spcPct val="115000"/>
-              </a:lnSpc>
-            </a:pPr>
-            <a:r>
-              <a:rPr sz="1700" b="1" i="0">
-                <a:solidFill>
-                  <a:srgbClr val="2E3A4A"/>
-                </a:solidFill>
-                <a:latin typeface="Montserrat"/>
-              </a:rPr>
-              <a:t>E a terapeuta?</a:t>
-            </a:r>
-            <a:r>
-              <a:rPr sz="1700" b="0" i="0">
-                <a:solidFill>
-                  <a:srgbClr val="2E3A4A"/>
-                </a:solidFill>
-                <a:latin typeface="Montserrat"/>
-              </a:rPr>
-              <a:t> Devolver os trilhos faz o grito parar e alivia quem está com ele. Esse alívio também pode reforçar o comportamento do adulto, e o ciclo continua.</a:t>
-            </a:r>
-          </a:p>
-        </p:txBody>
-      </p:sp>
-      <p:sp>
-        <p:nvSpPr>
-          <p:cNvPr id="11" name="TextBox 10"/>
-          <p:cNvSpPr txBox="1"/>
-          <p:nvPr/>
-        </p:nvSpPr>
-        <p:spPr>
-          <a:xfrm>
-            <a:off x="1168400" y="4925814"/>
-            <a:ext cx="10307828" cy="266700"/>
-          </a:xfrm>
-          <a:prstGeom prst="rect">
-            <a:avLst/>
-          </a:prstGeom>
-          <a:noFill/>
-        </p:spPr>
-        <p:txBody>
-          <a:bodyPr wrap="square" lIns="0" rIns="0" tIns="0" bIns="0" anchor="t">
-            <a:noAutofit/>
-          </a:bodyPr>
-          <a:lstStyle/>
-          <a:p>
-            <a:pPr algn="l">
-              <a:lnSpc>
-                <a:spcPct val="115000"/>
-              </a:lnSpc>
-            </a:pPr>
-            <a:r>
-              <a:rPr sz="1500" b="0" i="1">
-                <a:solidFill>
-                  <a:srgbClr val="66717F"/>
-                </a:solidFill>
-                <a:latin typeface="Montserrat"/>
-              </a:rPr>
-              <a:t>Vocês viram um episódio. Os registros de quatro semanas, na vinheta, mudam essa leitura.</a:t>
-            </a:r>
-          </a:p>
-        </p:txBody>
-      </p:sp>
-      <p:sp>
-        <p:nvSpPr>
-          <p:cNvPr id="12" name="TextBox 11"/>
           <p:cNvSpPr txBox="1"/>
           <p:nvPr/>
         </p:nvSpPr>
@@ -19561,7 +19657,7 @@
                 </a:solidFill>
                 <a:latin typeface="Montserrat"/>
               </a:rPr>
-              <a:t>34b</a:t>
+              <a:t>35</a:t>
             </a:r>
           </a:p>
         </p:txBody>
@@ -19644,7 +19740,7 @@
         </p:nvSpPr>
         <p:spPr>
           <a:xfrm>
-            <a:off x="1168400" y="2189857"/>
+            <a:off x="1168400" y="1834257"/>
             <a:ext cx="10307828" cy="481905"/>
           </a:xfrm>
           <a:prstGeom prst="rect">
@@ -19683,7 +19779,7 @@
         </p:nvSpPr>
         <p:spPr>
           <a:xfrm>
-            <a:off x="1168400" y="3001962"/>
+            <a:off x="1168400" y="2646362"/>
             <a:ext cx="4839970" cy="319980"/>
           </a:xfrm>
           <a:prstGeom prst="rect">
@@ -19722,8 +19818,8 @@
         </p:nvSpPr>
         <p:spPr>
           <a:xfrm>
-            <a:off x="1168400" y="3410843"/>
-            <a:ext cx="4839970" cy="1066800"/>
+            <a:off x="1168400" y="3055243"/>
+            <a:ext cx="4839970" cy="1422400"/>
           </a:xfrm>
           <a:prstGeom prst="rect">
             <a:avLst/>
@@ -19748,7 +19844,7 @@
                 </a:solidFill>
                 <a:latin typeface="Montserrat"/>
               </a:rPr>
-              <a:t>Uma introdução ao raciocínio analítico-comportamental aplicado ao TEA.</a:t>
+              <a:t>Uma introdução ao raciocínio analítico-comportamental (da Análise do Comportamento) aplicado ao TEA.</a:t>
             </a:r>
           </a:p>
         </p:txBody>
@@ -19761,7 +19857,7 @@
         </p:nvSpPr>
         <p:spPr>
           <a:xfrm>
-            <a:off x="6477000" y="3001962"/>
+            <a:off x="6477000" y="2646362"/>
             <a:ext cx="4839970" cy="319980"/>
           </a:xfrm>
           <a:prstGeom prst="rect">
@@ -19800,8 +19896,8 @@
         </p:nvSpPr>
         <p:spPr>
           <a:xfrm>
-            <a:off x="6477000" y="3410843"/>
-            <a:ext cx="4839970" cy="1066800"/>
+            <a:off x="6477000" y="3055243"/>
+            <a:ext cx="4839970" cy="1778000"/>
           </a:xfrm>
           <a:prstGeom prst="rect">
             <a:avLst/>
@@ -19826,7 +19922,7 @@
                 </a:solidFill>
                 <a:latin typeface="Montserrat"/>
               </a:rPr>
-              <a:t>Um curso de formação em ABA. Ele não habilita ninguém a avaliar ou intervir sem formação e supervisão.</a:t>
+              <a:t>Um curso de formação em ABA (Análise do Comportamento Aplicada). Ele não habilita ninguém a avaliar ou intervir sem formação e supervisão.</a:t>
             </a:r>
           </a:p>
         </p:txBody>
@@ -19948,7 +20044,7 @@
         </p:nvSpPr>
         <p:spPr>
           <a:xfrm>
-            <a:off x="1168400" y="1532037"/>
+            <a:off x="1168400" y="1444327"/>
             <a:ext cx="10307828" cy="423466"/>
           </a:xfrm>
           <a:prstGeom prst="rect">
@@ -19974,7 +20070,7 @@
                 </a:solidFill>
                 <a:latin typeface="Montserrat"/>
               </a:rPr>
-              <a:t>Vinheta: Theo</a:t>
+              <a:t>Vinheta: Theo (continuação)</a:t>
             </a:r>
           </a:p>
         </p:txBody>
@@ -19987,8 +20083,261 @@
         </p:nvSpPr>
         <p:spPr>
           <a:xfrm>
-            <a:off x="1168400" y="2146002"/>
-            <a:ext cx="10307828" cy="853380"/>
+            <a:off x="1168400" y="2058293"/>
+            <a:ext cx="10307828" cy="2743200"/>
+          </a:xfrm>
+          <a:prstGeom prst="rect">
+            <a:avLst/>
+          </a:prstGeom>
+          <a:noFill/>
+        </p:spPr>
+        <p:txBody>
+          <a:bodyPr wrap="square" lIns="0" rIns="0" tIns="0" bIns="0" anchor="t">
+            <a:noAutofit/>
+          </a:bodyPr>
+          <a:lstStyle/>
+          <a:p>
+            <a:pPr algn="l" marL="279400" indent="-279400">
+              <a:lnSpc>
+                <a:spcPct val="123000"/>
+              </a:lnSpc>
+              <a:buChar char="•"/>
+            </a:pPr>
+            <a:r>
+              <a:rPr sz="1600" b="0" i="0">
+                <a:solidFill>
+                  <a:srgbClr val="2E3A4A"/>
+                </a:solidFill>
+                <a:latin typeface="Montserrat"/>
+              </a:rPr>
+              <a:t>As reações dos adultos variaram: em algumas sessões, a terapeuta esperou e depois </a:t>
+            </a:r>
+            <a:r>
+              <a:rPr sz="1600" b="1" i="0">
+                <a:solidFill>
+                  <a:srgbClr val="2E3A4A"/>
+                </a:solidFill>
+                <a:latin typeface="Montserrat"/>
+              </a:rPr>
+              <a:t>devolveu os trilhos “por mais cinco minutos”</a:t>
+            </a:r>
+            <a:r>
+              <a:rPr sz="1600" b="0" i="0">
+                <a:solidFill>
+                  <a:srgbClr val="2E3A4A"/>
+                </a:solidFill>
+                <a:latin typeface="Montserrat"/>
+              </a:rPr>
+              <a:t>; em outras, </a:t>
+            </a:r>
+            <a:r>
+              <a:rPr sz="1600" b="1" i="0">
+                <a:solidFill>
+                  <a:srgbClr val="2E3A4A"/>
+                </a:solidFill>
+                <a:latin typeface="Montserrat"/>
+              </a:rPr>
+              <a:t>adiou a atividade de mesa</a:t>
+            </a:r>
+            <a:r>
+              <a:rPr sz="1600" b="0" i="0">
+                <a:solidFill>
+                  <a:srgbClr val="2E3A4A"/>
+                </a:solidFill>
+                <a:latin typeface="Montserrat"/>
+              </a:rPr>
+              <a:t> para o fim da sessão; em outras, </a:t>
+            </a:r>
+            <a:r>
+              <a:rPr sz="1600" b="1" i="0">
+                <a:solidFill>
+                  <a:srgbClr val="2E3A4A"/>
+                </a:solidFill>
+                <a:latin typeface="Montserrat"/>
+              </a:rPr>
+              <a:t>manteve a atividade</a:t>
+            </a:r>
+            <a:r>
+              <a:rPr sz="1600" b="0" i="0">
+                <a:solidFill>
+                  <a:srgbClr val="2E3A4A"/>
+                </a:solidFill>
+                <a:latin typeface="Montserrat"/>
+              </a:rPr>
+              <a:t> e conduziu Theo até a mesa.</a:t>
+            </a:r>
+          </a:p>
+          <a:p>
+            <a:pPr algn="l" marL="279400" indent="-279400">
+              <a:lnSpc>
+                <a:spcPct val="123000"/>
+              </a:lnSpc>
+              <a:buChar char="•"/>
+            </a:pPr>
+            <a:r>
+              <a:rPr sz="1600" b="0" i="0">
+                <a:solidFill>
+                  <a:srgbClr val="2E3A4A"/>
+                </a:solidFill>
+                <a:latin typeface="Montserrat"/>
+              </a:rPr>
+              <a:t>A mãe relata que, em casa, Theo reage de forma parecida quando precisa </a:t>
+            </a:r>
+            <a:r>
+              <a:rPr sz="1600" b="1" i="0">
+                <a:solidFill>
+                  <a:srgbClr val="2E3A4A"/>
+                </a:solidFill>
+                <a:latin typeface="Montserrat"/>
+              </a:rPr>
+              <a:t>desligar a televisão para tomar banho</a:t>
+            </a:r>
+            <a:r>
+              <a:rPr sz="1600" b="0" i="0">
+                <a:solidFill>
+                  <a:srgbClr val="2E3A4A"/>
+                </a:solidFill>
+                <a:latin typeface="Montserrat"/>
+              </a:rPr>
+              <a:t>.</a:t>
+            </a:r>
+          </a:p>
+          <a:p>
+            <a:pPr algn="l" marL="279400" indent="-279400">
+              <a:lnSpc>
+                <a:spcPct val="123000"/>
+              </a:lnSpc>
+              <a:buChar char="•"/>
+            </a:pPr>
+            <a:r>
+              <a:rPr sz="1600" b="0" i="0">
+                <a:solidFill>
+                  <a:srgbClr val="2E3A4A"/>
+                </a:solidFill>
+                <a:latin typeface="Montserrat"/>
+              </a:rPr>
+              <a:t>A mãe também conta que, nas semanas em que os episódios foram </a:t>
+            </a:r>
+            <a:r>
+              <a:rPr sz="1600" b="1" i="0">
+                <a:solidFill>
+                  <a:srgbClr val="2E3A4A"/>
+                </a:solidFill>
+                <a:latin typeface="Montserrat"/>
+              </a:rPr>
+              <a:t>mais longos</a:t>
+            </a:r>
+            <a:r>
+              <a:rPr sz="1600" b="0" i="0">
+                <a:solidFill>
+                  <a:srgbClr val="2E3A4A"/>
+                </a:solidFill>
+                <a:latin typeface="Montserrat"/>
+              </a:rPr>
+              <a:t>, Theo </a:t>
+            </a:r>
+            <a:r>
+              <a:rPr sz="1600" b="1" i="0">
+                <a:solidFill>
+                  <a:srgbClr val="2E3A4A"/>
+                </a:solidFill>
+                <a:latin typeface="Montserrat"/>
+              </a:rPr>
+              <a:t>dormiu mal</a:t>
+            </a:r>
+            <a:r>
+              <a:rPr sz="1600" b="0" i="0">
+                <a:solidFill>
+                  <a:srgbClr val="2E3A4A"/>
+                </a:solidFill>
+                <a:latin typeface="Montserrat"/>
+              </a:rPr>
+              <a:t> e houve </a:t>
+            </a:r>
+            <a:r>
+              <a:rPr sz="1600" b="1" i="0">
+                <a:solidFill>
+                  <a:srgbClr val="2E3A4A"/>
+                </a:solidFill>
+                <a:latin typeface="Montserrat"/>
+              </a:rPr>
+              <a:t>troca da terapeuta</a:t>
+            </a:r>
+            <a:r>
+              <a:rPr sz="1600" b="0" i="0">
+                <a:solidFill>
+                  <a:srgbClr val="2E3A4A"/>
+                </a:solidFill>
+                <a:latin typeface="Montserrat"/>
+              </a:rPr>
+              <a:t> que o atendia.</a:t>
+            </a:r>
+          </a:p>
+          <a:p>
+            <a:pPr algn="l" marL="279400" indent="-279400">
+              <a:lnSpc>
+                <a:spcPct val="123000"/>
+              </a:lnSpc>
+              <a:buChar char="•"/>
+            </a:pPr>
+            <a:r>
+              <a:rPr sz="1600" b="0" i="0">
+                <a:solidFill>
+                  <a:srgbClr val="2E3A4A"/>
+                </a:solidFill>
+                <a:latin typeface="Montserrat"/>
+              </a:rPr>
+              <a:t>Nas sessões em que a terapeuta </a:t>
+            </a:r>
+            <a:r>
+              <a:rPr sz="1600" b="1" i="0">
+                <a:solidFill>
+                  <a:srgbClr val="2E3A4A"/>
+                </a:solidFill>
+                <a:latin typeface="Montserrat"/>
+              </a:rPr>
+              <a:t>mostrou um cartão “primeiro trilhos, depois mesa” e avisou dois minutos antes</a:t>
+            </a:r>
+            <a:r>
+              <a:rPr sz="1600" b="0" i="0">
+                <a:solidFill>
+                  <a:srgbClr val="2E3A4A"/>
+                </a:solidFill>
+                <a:latin typeface="Montserrat"/>
+              </a:rPr>
+              <a:t>, os episódios foram </a:t>
+            </a:r>
+            <a:r>
+              <a:rPr sz="1600" b="1" i="0">
+                <a:solidFill>
+                  <a:srgbClr val="2E3A4A"/>
+                </a:solidFill>
+                <a:latin typeface="Montserrat"/>
+              </a:rPr>
+              <a:t>mais curtos</a:t>
+            </a:r>
+            <a:r>
+              <a:rPr sz="1600" b="0" i="0">
+                <a:solidFill>
+                  <a:srgbClr val="2E3A4A"/>
+                </a:solidFill>
+                <a:latin typeface="Montserrat"/>
+              </a:rPr>
+              <a:t> (registro em 3 sessões).</a:t>
+            </a:r>
+          </a:p>
+        </p:txBody>
+      </p:sp>
+      <p:sp>
+        <p:nvSpPr>
+          <p:cNvPr id="5" name="TextBox 4"/>
+          <p:cNvSpPr txBox="1"/>
+          <p:nvPr/>
+        </p:nvSpPr>
+        <p:spPr>
+          <a:xfrm>
+            <a:off x="1168400" y="4991993"/>
+            <a:ext cx="10307828" cy="231080"/>
           </a:xfrm>
           <a:prstGeom prst="rect">
             <a:avLst/>
@@ -20007,160 +20356,13 @@
               </a:lnSpc>
             </a:pPr>
             <a:r>
-              <a:rPr sz="1600" b="0" i="0">
-                <a:solidFill>
-                  <a:srgbClr val="2E3A4A"/>
-                </a:solidFill>
-                <a:latin typeface="Montserrat"/>
-              </a:rPr>
-              <a:t>Theo tem 6 anos e é autista. Comunica-se principalmente por palavras isoladas e por gestos (puxa o adulto pela mão, aponta). Gosta muito de montar trilhos de trem. Frequenta atendimento clínico três vezes por semana. Nas últimas quatro semanas, a equipe registrou:</a:t>
-            </a:r>
-          </a:p>
-        </p:txBody>
-      </p:sp>
-      <p:sp>
-        <p:nvSpPr>
-          <p:cNvPr id="5" name="TextBox 4"/>
-          <p:cNvSpPr txBox="1"/>
-          <p:nvPr/>
-        </p:nvSpPr>
-        <p:spPr>
-          <a:xfrm>
-            <a:off x="1168400" y="3189883"/>
-            <a:ext cx="10307828" cy="1524000"/>
-          </a:xfrm>
-          <a:prstGeom prst="rect">
-            <a:avLst/>
-          </a:prstGeom>
-          <a:noFill/>
-        </p:spPr>
-        <p:txBody>
-          <a:bodyPr wrap="square" lIns="0" rIns="0" tIns="0" bIns="0" anchor="t">
-            <a:noAutofit/>
-          </a:bodyPr>
-          <a:lstStyle/>
-          <a:p>
-            <a:pPr algn="l" marL="279400" indent="-279400">
-              <a:lnSpc>
-                <a:spcPct val="123000"/>
-              </a:lnSpc>
-              <a:buChar char="•"/>
-            </a:pPr>
-            <a:r>
-              <a:rPr sz="1600" b="0" i="0">
-                <a:solidFill>
-                  <a:srgbClr val="2E3A4A"/>
-                </a:solidFill>
-                <a:latin typeface="Montserrat"/>
-              </a:rPr>
-              <a:t>Quando a terapeuta diz “agora acabou, vamos para a mesa”, Theo </a:t>
-            </a:r>
-            <a:r>
-              <a:rPr sz="1600" b="1" i="0">
-                <a:solidFill>
-                  <a:srgbClr val="2E3A4A"/>
-                </a:solidFill>
-                <a:latin typeface="Montserrat"/>
-              </a:rPr>
-              <a:t>grita, se joga no chão e chuta o ar</a:t>
-            </a:r>
-            <a:r>
-              <a:rPr sz="1600" b="0" i="0">
-                <a:solidFill>
-                  <a:srgbClr val="2E3A4A"/>
-                </a:solidFill>
-                <a:latin typeface="Montserrat"/>
-              </a:rPr>
-              <a:t>, por cerca de 3 a 8 minutos. Isso aconteceu em </a:t>
-            </a:r>
-            <a:r>
-              <a:rPr sz="1600" b="1" i="0">
-                <a:solidFill>
-                  <a:srgbClr val="2E3A4A"/>
-                </a:solidFill>
-                <a:latin typeface="Montserrat"/>
-              </a:rPr>
-              <a:t>11 de 12 sessões</a:t>
-            </a:r>
-            <a:r>
-              <a:rPr sz="1600" b="0" i="0">
-                <a:solidFill>
-                  <a:srgbClr val="2E3A4A"/>
-                </a:solidFill>
-                <a:latin typeface="Montserrat"/>
-              </a:rPr>
-              <a:t>, quase sempre na passagem dos trilhos para a atividade de mesa (traçar letras e encaixes).</a:t>
-            </a:r>
-          </a:p>
-          <a:p>
-            <a:pPr algn="l" marL="279400" indent="-279400">
-              <a:lnSpc>
-                <a:spcPct val="123000"/>
-              </a:lnSpc>
-              <a:buChar char="•"/>
-            </a:pPr>
-            <a:r>
-              <a:rPr sz="1600" b="0" i="0">
-                <a:solidFill>
-                  <a:srgbClr val="2E3A4A"/>
-                </a:solidFill>
-                <a:latin typeface="Montserrat"/>
-              </a:rPr>
-              <a:t>Em </a:t>
-            </a:r>
-            <a:r>
-              <a:rPr sz="1600" b="1" i="0">
-                <a:solidFill>
-                  <a:srgbClr val="2E3A4A"/>
-                </a:solidFill>
-                <a:latin typeface="Montserrat"/>
-              </a:rPr>
-              <a:t>duas sessões</a:t>
-            </a:r>
-            <a:r>
-              <a:rPr sz="1600" b="0" i="0">
-                <a:solidFill>
-                  <a:srgbClr val="2E3A4A"/>
-                </a:solidFill>
-                <a:latin typeface="Montserrat"/>
-              </a:rPr>
-              <a:t> em que a terapeuta também guardou os trilhos, mas a atividade seguinte foi o </a:t>
-            </a:r>
-            <a:r>
-              <a:rPr sz="1600" b="1" i="0">
-                <a:solidFill>
-                  <a:srgbClr val="2E3A4A"/>
-                </a:solidFill>
-                <a:latin typeface="Montserrat"/>
-              </a:rPr>
-              <a:t>lanche</a:t>
-            </a:r>
-            <a:r>
-              <a:rPr sz="1600" b="0" i="0">
-                <a:solidFill>
-                  <a:srgbClr val="2E3A4A"/>
-                </a:solidFill>
-                <a:latin typeface="Montserrat"/>
-              </a:rPr>
-              <a:t>, Theo </a:t>
-            </a:r>
-            <a:r>
-              <a:rPr sz="1600" b="1" i="0">
-                <a:solidFill>
-                  <a:srgbClr val="2E3A4A"/>
-                </a:solidFill>
-                <a:latin typeface="Montserrat"/>
-              </a:rPr>
-              <a:t>não</a:t>
-            </a:r>
-            <a:r>
-              <a:rPr sz="1600" b="0" i="0">
-                <a:solidFill>
-                  <a:srgbClr val="2E3A4A"/>
-                </a:solidFill>
-                <a:latin typeface="Montserrat"/>
-              </a:rPr>
-              <a:t> apresentou o comportamento.</a:t>
+              <a:rPr sz="1300" b="0" i="1">
+                <a:solidFill>
+                  <a:srgbClr val="66717F"/>
+                </a:solidFill>
+                <a:latin typeface="Montserrat"/>
+              </a:rPr>
+              <a:t>Exemplo fictício, parte 2 de 2</a:t>
             </a:r>
           </a:p>
         </p:txBody>
@@ -20168,45 +20370,6 @@
       <p:sp>
         <p:nvSpPr>
           <p:cNvPr id="6" name="TextBox 5"/>
-          <p:cNvSpPr txBox="1"/>
-          <p:nvPr/>
-        </p:nvSpPr>
-        <p:spPr>
-          <a:xfrm>
-            <a:off x="1168400" y="4904383"/>
-            <a:ext cx="10307828" cy="231080"/>
-          </a:xfrm>
-          <a:prstGeom prst="rect">
-            <a:avLst/>
-          </a:prstGeom>
-          <a:noFill/>
-        </p:spPr>
-        <p:txBody>
-          <a:bodyPr wrap="square" lIns="0" rIns="0" tIns="0" bIns="0" anchor="t">
-            <a:noAutofit/>
-          </a:bodyPr>
-          <a:lstStyle/>
-          <a:p>
-            <a:pPr algn="l">
-              <a:lnSpc>
-                <a:spcPct val="115000"/>
-              </a:lnSpc>
-            </a:pPr>
-            <a:r>
-              <a:rPr sz="1300" b="0" i="1">
-                <a:solidFill>
-                  <a:srgbClr val="66717F"/>
-                </a:solidFill>
-                <a:latin typeface="Montserrat"/>
-              </a:rPr>
-              <a:t>Exemplo fictício, parte 1 de 2</a:t>
-            </a:r>
-          </a:p>
-        </p:txBody>
-      </p:sp>
-      <p:sp>
-        <p:nvSpPr>
-          <p:cNvPr id="7" name="TextBox 6"/>
           <p:cNvSpPr txBox="1"/>
           <p:nvPr/>
         </p:nvSpPr>
@@ -20238,7 +20401,7 @@
                 </a:solidFill>
                 <a:latin typeface="Montserrat"/>
               </a:rPr>
-              <a:t>35</a:t>
+              <a:t>35b</a:t>
             </a:r>
           </a:p>
         </p:txBody>
@@ -20252,6 +20415,419 @@
 </file>
 
 <file path=ppt/slides/slide41.xml><?xml version="1.0" encoding="utf-8"?>
+<p:sld xmlns:a="http://schemas.openxmlformats.org/drawingml/2006/main" xmlns:p="http://schemas.openxmlformats.org/presentationml/2006/main" xmlns:r="http://schemas.openxmlformats.org/officeDocument/2006/relationships">
+  <p:cSld>
+    <p:bg>
+      <p:bgPr>
+        <a:solidFill>
+          <a:srgbClr val="EEF4F5"/>
+        </a:solidFill>
+        <a:effectLst/>
+      </p:bgPr>
+    </p:bg>
+    <p:spTree>
+      <p:nvGrpSpPr>
+        <p:cNvPr id="1" name=""/>
+        <p:cNvGrpSpPr/>
+        <p:nvPr/>
+      </p:nvGrpSpPr>
+      <p:grpSpPr/>
+      <p:sp>
+        <p:nvSpPr>
+          <p:cNvPr id="2" name="Rectangle 1"/>
+          <p:cNvSpPr/>
+          <p:nvPr/>
+        </p:nvSpPr>
+        <p:spPr>
+          <a:xfrm>
+            <a:off x="0" y="0"/>
+            <a:ext cx="177800" cy="6858000"/>
+          </a:xfrm>
+          <a:prstGeom prst="rect">
+            <a:avLst/>
+          </a:prstGeom>
+          <a:solidFill>
+            <a:srgbClr val="0F7C86"/>
+          </a:solidFill>
+          <a:ln>
+            <a:noFill/>
+          </a:ln>
+          <a:effectLst/>
+        </p:spPr>
+        <p:style>
+          <a:lnRef idx="1">
+            <a:schemeClr val="accent1"/>
+          </a:lnRef>
+          <a:fillRef idx="3">
+            <a:schemeClr val="accent1"/>
+          </a:fillRef>
+          <a:effectRef idx="2">
+            <a:schemeClr val="accent1"/>
+          </a:effectRef>
+          <a:fontRef idx="minor">
+            <a:schemeClr val="lt1"/>
+          </a:fontRef>
+        </p:style>
+        <p:txBody>
+          <a:bodyPr rtlCol="0" anchor="ctr"/>
+          <a:lstStyle/>
+          <a:p>
+            <a:pPr algn="ctr"/>
+          </a:p>
+        </p:txBody>
+      </p:sp>
+      <p:sp>
+        <p:nvSpPr>
+          <p:cNvPr id="3" name="TextBox 2"/>
+          <p:cNvSpPr txBox="1"/>
+          <p:nvPr/>
+        </p:nvSpPr>
+        <p:spPr>
+          <a:xfrm>
+            <a:off x="1168400" y="1206302"/>
+            <a:ext cx="10307828" cy="408880"/>
+          </a:xfrm>
+          <a:prstGeom prst="rect">
+            <a:avLst/>
+          </a:prstGeom>
+          <a:noFill/>
+        </p:spPr>
+        <p:txBody>
+          <a:bodyPr wrap="square" lIns="0" rIns="0" tIns="0" bIns="0" anchor="t">
+            <a:noAutofit/>
+          </a:bodyPr>
+          <a:lstStyle/>
+          <a:p>
+            <a:pPr algn="l">
+              <a:lnSpc>
+                <a:spcPct val="94000"/>
+              </a:lnSpc>
+            </a:pPr>
+            <a:r>
+              <a:rPr sz="2800" b="1" i="0">
+                <a:solidFill>
+                  <a:srgbClr val="1B2F4B"/>
+                </a:solidFill>
+                <a:latin typeface="Montserrat"/>
+              </a:rPr>
+              <a:t>Perguntas para o grupo</a:t>
+            </a:r>
+          </a:p>
+        </p:txBody>
+      </p:sp>
+      <p:sp>
+        <p:nvSpPr>
+          <p:cNvPr id="4" name="TextBox 3"/>
+          <p:cNvSpPr txBox="1"/>
+          <p:nvPr/>
+        </p:nvSpPr>
+        <p:spPr>
+          <a:xfrm>
+            <a:off x="1168400" y="1754882"/>
+            <a:ext cx="10307828" cy="284460"/>
+          </a:xfrm>
+          <a:prstGeom prst="rect">
+            <a:avLst/>
+          </a:prstGeom>
+          <a:noFill/>
+        </p:spPr>
+        <p:txBody>
+          <a:bodyPr wrap="square" lIns="0" rIns="0" tIns="0" bIns="0" anchor="t">
+            <a:noAutofit/>
+          </a:bodyPr>
+          <a:lstStyle/>
+          <a:p>
+            <a:pPr algn="l">
+              <a:lnSpc>
+                <a:spcPct val="115000"/>
+              </a:lnSpc>
+            </a:pPr>
+            <a:r>
+              <a:rPr sz="1600" b="1" i="0">
+                <a:solidFill>
+                  <a:srgbClr val="0F7C86"/>
+                </a:solidFill>
+                <a:latin typeface="Montserrat"/>
+              </a:rPr>
+              <a:t>Todos os grupos (cerca de 6 min)</a:t>
+            </a:r>
+          </a:p>
+        </p:txBody>
+      </p:sp>
+      <p:sp>
+        <p:nvSpPr>
+          <p:cNvPr id="5" name="TextBox 4"/>
+          <p:cNvSpPr txBox="1"/>
+          <p:nvPr/>
+        </p:nvSpPr>
+        <p:spPr>
+          <a:xfrm>
+            <a:off x="1168400" y="2179042"/>
+            <a:ext cx="10307828" cy="1476375"/>
+          </a:xfrm>
+          <a:prstGeom prst="rect">
+            <a:avLst/>
+          </a:prstGeom>
+          <a:noFill/>
+        </p:spPr>
+        <p:txBody>
+          <a:bodyPr wrap="square" lIns="0" rIns="0" tIns="0" bIns="0" anchor="t">
+            <a:noAutofit/>
+          </a:bodyPr>
+          <a:lstStyle/>
+          <a:p>
+            <a:pPr algn="l" marL="279400" indent="-279400">
+              <a:lnSpc>
+                <a:spcPct val="123000"/>
+              </a:lnSpc>
+              <a:buAutoNum type="arabicPeriod" startAt="1"/>
+            </a:pPr>
+            <a:r>
+              <a:rPr sz="1550" b="0" i="0">
+                <a:solidFill>
+                  <a:srgbClr val="2E3A4A"/>
+                </a:solidFill>
+                <a:latin typeface="Montserrat"/>
+              </a:rPr>
+              <a:t>O que o Theo faz? Descrevam só o que dá para ver e ouvir, sem palavras como “birra” ou “crise”.</a:t>
+            </a:r>
+          </a:p>
+          <a:p>
+            <a:pPr algn="l" marL="279400" indent="-279400">
+              <a:lnSpc>
+                <a:spcPct val="123000"/>
+              </a:lnSpc>
+              <a:buAutoNum type="arabicPeriod" startAt="1"/>
+            </a:pPr>
+            <a:r>
+              <a:rPr sz="1550" b="0" i="0">
+                <a:solidFill>
+                  <a:srgbClr val="2E3A4A"/>
+                </a:solidFill>
+                <a:latin typeface="Montserrat"/>
+              </a:rPr>
+              <a:t>O que acontece logo antes?</a:t>
+            </a:r>
+          </a:p>
+          <a:p>
+            <a:pPr algn="l" marL="279400" indent="-279400">
+              <a:lnSpc>
+                <a:spcPct val="123000"/>
+              </a:lnSpc>
+              <a:buAutoNum type="arabicPeriod" startAt="1"/>
+            </a:pPr>
+            <a:r>
+              <a:rPr sz="1550" b="0" i="0">
+                <a:solidFill>
+                  <a:srgbClr val="2E3A4A"/>
+                </a:solidFill>
+                <a:latin typeface="Montserrat"/>
+              </a:rPr>
+              <a:t>O que acontece logo depois?</a:t>
+            </a:r>
+          </a:p>
+          <a:p>
+            <a:pPr algn="l" marL="279400" indent="-279400">
+              <a:lnSpc>
+                <a:spcPct val="123000"/>
+              </a:lnSpc>
+              <a:buAutoNum type="arabicPeriod" startAt="1"/>
+            </a:pPr>
+            <a:r>
+              <a:rPr sz="1550" b="0" i="0">
+                <a:solidFill>
+                  <a:srgbClr val="2E3A4A"/>
+                </a:solidFill>
+                <a:latin typeface="Montserrat"/>
+              </a:rPr>
+              <a:t>Por que isso pode estar acontecendo? Deem duas explicações possíveis e, para cada uma, um dado da história que ajuda e um que atrapalha.</a:t>
+            </a:r>
+          </a:p>
+        </p:txBody>
+      </p:sp>
+      <p:sp>
+        <p:nvSpPr>
+          <p:cNvPr id="6" name="TextBox 5"/>
+          <p:cNvSpPr txBox="1"/>
+          <p:nvPr/>
+        </p:nvSpPr>
+        <p:spPr>
+          <a:xfrm>
+            <a:off x="1168400" y="3795117"/>
+            <a:ext cx="10307828" cy="284460"/>
+          </a:xfrm>
+          <a:prstGeom prst="rect">
+            <a:avLst/>
+          </a:prstGeom>
+          <a:noFill/>
+        </p:spPr>
+        <p:txBody>
+          <a:bodyPr wrap="square" lIns="0" rIns="0" tIns="0" bIns="0" anchor="t">
+            <a:noAutofit/>
+          </a:bodyPr>
+          <a:lstStyle/>
+          <a:p>
+            <a:pPr algn="l">
+              <a:lnSpc>
+                <a:spcPct val="115000"/>
+              </a:lnSpc>
+            </a:pPr>
+            <a:r>
+              <a:rPr sz="1600" b="1" i="0">
+                <a:solidFill>
+                  <a:srgbClr val="0F7C86"/>
+                </a:solidFill>
+                <a:latin typeface="Montserrat"/>
+              </a:rPr>
+              <a:t>Cada grupo, mais uma (cerca de 4 min)</a:t>
+            </a:r>
+          </a:p>
+        </p:txBody>
+      </p:sp>
+      <p:sp>
+        <p:nvSpPr>
+          <p:cNvPr id="7" name="TextBox 6"/>
+          <p:cNvSpPr txBox="1"/>
+          <p:nvPr/>
+        </p:nvSpPr>
+        <p:spPr>
+          <a:xfrm>
+            <a:off x="1168400" y="4219277"/>
+            <a:ext cx="10307828" cy="551061"/>
+          </a:xfrm>
+          <a:prstGeom prst="rect">
+            <a:avLst/>
+          </a:prstGeom>
+          <a:noFill/>
+        </p:spPr>
+        <p:txBody>
+          <a:bodyPr wrap="square" lIns="0" rIns="0" tIns="0" bIns="0" anchor="t">
+            <a:noAutofit/>
+          </a:bodyPr>
+          <a:lstStyle/>
+          <a:p>
+            <a:pPr algn="l">
+              <a:lnSpc>
+                <a:spcPct val="115000"/>
+              </a:lnSpc>
+            </a:pPr>
+            <a:r>
+              <a:rPr sz="1550" b="1" i="0">
+                <a:solidFill>
+                  <a:srgbClr val="2E3A4A"/>
+                </a:solidFill>
+                <a:latin typeface="Montserrat"/>
+              </a:rPr>
+              <a:t>5. (grupos 1, 3, 5…)</a:t>
+            </a:r>
+            <a:r>
+              <a:rPr sz="1550" b="0" i="0">
+                <a:solidFill>
+                  <a:srgbClr val="2E3A4A"/>
+                </a:solidFill>
+                <a:latin typeface="Montserrat"/>
+              </a:rPr>
+              <a:t> Escolham uma das explicações. O que vocês fariam para ajudar o Theo? E se essa explicação estiver errada, o que pode dar errado?</a:t>
+            </a:r>
+          </a:p>
+        </p:txBody>
+      </p:sp>
+      <p:sp>
+        <p:nvSpPr>
+          <p:cNvPr id="8" name="TextBox 7"/>
+          <p:cNvSpPr txBox="1"/>
+          <p:nvPr/>
+        </p:nvSpPr>
+        <p:spPr>
+          <a:xfrm>
+            <a:off x="1168400" y="4910038"/>
+            <a:ext cx="10307828" cy="551061"/>
+          </a:xfrm>
+          <a:prstGeom prst="rect">
+            <a:avLst/>
+          </a:prstGeom>
+          <a:noFill/>
+        </p:spPr>
+        <p:txBody>
+          <a:bodyPr wrap="square" lIns="0" rIns="0" tIns="0" bIns="0" anchor="t">
+            <a:noAutofit/>
+          </a:bodyPr>
+          <a:lstStyle/>
+          <a:p>
+            <a:pPr algn="l">
+              <a:lnSpc>
+                <a:spcPct val="115000"/>
+              </a:lnSpc>
+            </a:pPr>
+            <a:r>
+              <a:rPr sz="1550" b="1" i="0">
+                <a:solidFill>
+                  <a:srgbClr val="2E3A4A"/>
+                </a:solidFill>
+                <a:latin typeface="Montserrat"/>
+              </a:rPr>
+              <a:t>6. (grupos 2, 4, 6…)</a:t>
+            </a:r>
+            <a:r>
+              <a:rPr sz="1550" b="0" i="0">
+                <a:solidFill>
+                  <a:srgbClr val="2E3A4A"/>
+                </a:solidFill>
+                <a:latin typeface="Montserrat"/>
+              </a:rPr>
+              <a:t> A mãe pergunta: “Não é melhor tirar os trilhos de vez?”. O que vocês responderiam?</a:t>
+            </a:r>
+          </a:p>
+        </p:txBody>
+      </p:sp>
+      <p:sp>
+        <p:nvSpPr>
+          <p:cNvPr id="9" name="TextBox 8"/>
+          <p:cNvSpPr txBox="1"/>
+          <p:nvPr/>
+        </p:nvSpPr>
+        <p:spPr>
+          <a:xfrm>
+            <a:off x="10820400" y="6343650"/>
+            <a:ext cx="784860" cy="184150"/>
+          </a:xfrm>
+          <a:prstGeom prst="rect">
+            <a:avLst/>
+          </a:prstGeom>
+          <a:noFill/>
+        </p:spPr>
+        <p:txBody>
+          <a:bodyPr wrap="square" lIns="0" rIns="0" tIns="0" bIns="0" anchor="t">
+            <a:noAutofit/>
+          </a:bodyPr>
+          <a:lstStyle/>
+          <a:p>
+            <a:pPr algn="r">
+              <a:lnSpc>
+                <a:spcPct val="98000"/>
+              </a:lnSpc>
+            </a:pPr>
+            <a:r>
+              <a:rPr sz="1200" b="0" i="0">
+                <a:solidFill>
+                  <a:srgbClr val="66717F"/>
+                </a:solidFill>
+                <a:latin typeface="Montserrat"/>
+              </a:rPr>
+              <a:t>36</a:t>
+            </a:r>
+          </a:p>
+        </p:txBody>
+      </p:sp>
+    </p:spTree>
+  </p:cSld>
+  <p:clrMapOvr>
+    <a:masterClrMapping/>
+  </p:clrMapOvr>
+</p:sld>
+</file>
+
+<file path=ppt/slides/slide42.xml><?xml version="1.0" encoding="utf-8"?>
 <p:sld xmlns:a="http://schemas.openxmlformats.org/drawingml/2006/main" xmlns:p="http://schemas.openxmlformats.org/presentationml/2006/main" xmlns:r="http://schemas.openxmlformats.org/officeDocument/2006/relationships">
   <p:cSld>
     <p:bg>
@@ -20321,8 +20897,8 @@
         </p:nvSpPr>
         <p:spPr>
           <a:xfrm>
-            <a:off x="1168400" y="1444327"/>
-            <a:ext cx="10307828" cy="423466"/>
+            <a:off x="1168400" y="1455936"/>
+            <a:ext cx="10307828" cy="481905"/>
           </a:xfrm>
           <a:prstGeom prst="rect">
             <a:avLst/>
@@ -20341,13 +20917,13 @@
               </a:lnSpc>
             </a:pPr>
             <a:r>
-              <a:rPr sz="2900" b="1" i="0">
+              <a:rPr sz="3300" b="1" i="0">
                 <a:solidFill>
                   <a:srgbClr val="1B2F4B"/>
                 </a:solidFill>
                 <a:latin typeface="Montserrat"/>
               </a:rPr>
-              <a:t>Vinheta: Theo (continuação)</a:t>
+              <a:t>Respostas 1 a 3: o que aconteceu</a:t>
             </a:r>
           </a:p>
         </p:txBody>
@@ -20360,293 +20936,322 @@
         </p:nvSpPr>
         <p:spPr>
           <a:xfrm>
-            <a:off x="1168400" y="2058293"/>
-            <a:ext cx="10307828" cy="2743200"/>
-          </a:xfrm>
-          <a:prstGeom prst="rect">
-            <a:avLst/>
-          </a:prstGeom>
-          <a:noFill/>
-        </p:spPr>
-        <p:txBody>
-          <a:bodyPr wrap="square" lIns="0" rIns="0" tIns="0" bIns="0" anchor="t">
-            <a:noAutofit/>
-          </a:bodyPr>
-          <a:lstStyle/>
-          <a:p>
-            <a:pPr algn="l" marL="279400" indent="-279400">
-              <a:lnSpc>
-                <a:spcPct val="123000"/>
-              </a:lnSpc>
-              <a:buChar char="•"/>
-            </a:pPr>
-            <a:r>
-              <a:rPr sz="1600" b="0" i="0">
+            <a:off x="1168400" y="2153741"/>
+            <a:ext cx="3191764" cy="274241"/>
+          </a:xfrm>
+          <a:prstGeom prst="rect">
+            <a:avLst/>
+          </a:prstGeom>
+          <a:noFill/>
+        </p:spPr>
+        <p:txBody>
+          <a:bodyPr wrap="square" lIns="0" rIns="0" tIns="0" bIns="0" anchor="t">
+            <a:noAutofit/>
+          </a:bodyPr>
+          <a:lstStyle/>
+          <a:p>
+            <a:pPr algn="l">
+              <a:lnSpc>
+                <a:spcPct val="98000"/>
+              </a:lnSpc>
+            </a:pPr>
+            <a:r>
+              <a:rPr sz="1800" b="1" i="0">
+                <a:solidFill>
+                  <a:srgbClr val="0F7C86"/>
+                </a:solidFill>
+                <a:latin typeface="Montserrat"/>
+              </a:rPr>
+              <a:t>1. O que ele faz</a:t>
+            </a:r>
+          </a:p>
+        </p:txBody>
+      </p:sp>
+      <p:sp>
+        <p:nvSpPr>
+          <p:cNvPr id="5" name="TextBox 4"/>
+          <p:cNvSpPr txBox="1"/>
+          <p:nvPr/>
+        </p:nvSpPr>
+        <p:spPr>
+          <a:xfrm>
+            <a:off x="1168400" y="2516882"/>
+            <a:ext cx="3191764" cy="1102122"/>
+          </a:xfrm>
+          <a:prstGeom prst="rect">
+            <a:avLst/>
+          </a:prstGeom>
+          <a:noFill/>
+        </p:spPr>
+        <p:txBody>
+          <a:bodyPr wrap="square" lIns="0" rIns="0" tIns="0" bIns="0" anchor="t">
+            <a:noAutofit/>
+          </a:bodyPr>
+          <a:lstStyle/>
+          <a:p>
+            <a:pPr algn="l">
+              <a:lnSpc>
+                <a:spcPct val="115000"/>
+              </a:lnSpc>
+            </a:pPr>
+            <a:r>
+              <a:rPr sz="1550" b="0" i="0">
                 <a:solidFill>
                   <a:srgbClr val="2E3A4A"/>
                 </a:solidFill>
                 <a:latin typeface="Montserrat"/>
               </a:rPr>
-              <a:t>As reações dos adultos variaram: em algumas sessões, a terapeuta esperou e depois </a:t>
-            </a:r>
-            <a:r>
-              <a:rPr sz="1600" b="1" i="0">
+              <a:t>Grita, se joga no chão e chuta o ar, por 3 a 8 minutos, em 11 de 12 sessões. Sem “birra” ou “crise”: são interpretações.</a:t>
+            </a:r>
+          </a:p>
+        </p:txBody>
+      </p:sp>
+      <p:sp>
+        <p:nvSpPr>
+          <p:cNvPr id="6" name="TextBox 5"/>
+          <p:cNvSpPr txBox="1"/>
+          <p:nvPr/>
+        </p:nvSpPr>
+        <p:spPr>
+          <a:xfrm>
+            <a:off x="4622800" y="2153741"/>
+            <a:ext cx="3191764" cy="274241"/>
+          </a:xfrm>
+          <a:prstGeom prst="rect">
+            <a:avLst/>
+          </a:prstGeom>
+          <a:noFill/>
+        </p:spPr>
+        <p:txBody>
+          <a:bodyPr wrap="square" lIns="0" rIns="0" tIns="0" bIns="0" anchor="t">
+            <a:noAutofit/>
+          </a:bodyPr>
+          <a:lstStyle/>
+          <a:p>
+            <a:pPr algn="l">
+              <a:lnSpc>
+                <a:spcPct val="98000"/>
+              </a:lnSpc>
+            </a:pPr>
+            <a:r>
+              <a:rPr sz="1800" b="1" i="0">
+                <a:solidFill>
+                  <a:srgbClr val="0F7C86"/>
+                </a:solidFill>
+                <a:latin typeface="Montserrat"/>
+              </a:rPr>
+              <a:t>2. Antes</a:t>
+            </a:r>
+          </a:p>
+        </p:txBody>
+      </p:sp>
+      <p:sp>
+        <p:nvSpPr>
+          <p:cNvPr id="7" name="TextBox 6"/>
+          <p:cNvSpPr txBox="1"/>
+          <p:nvPr/>
+        </p:nvSpPr>
+        <p:spPr>
+          <a:xfrm>
+            <a:off x="4622800" y="2516882"/>
+            <a:ext cx="3191764" cy="1102122"/>
+          </a:xfrm>
+          <a:prstGeom prst="rect">
+            <a:avLst/>
+          </a:prstGeom>
+          <a:noFill/>
+        </p:spPr>
+        <p:txBody>
+          <a:bodyPr wrap="square" lIns="0" rIns="0" tIns="0" bIns="0" anchor="t">
+            <a:noAutofit/>
+          </a:bodyPr>
+          <a:lstStyle/>
+          <a:p>
+            <a:pPr algn="l">
+              <a:lnSpc>
+                <a:spcPct val="115000"/>
+              </a:lnSpc>
+            </a:pPr>
+            <a:r>
+              <a:rPr sz="1550" b="0" i="0">
                 <a:solidFill>
                   <a:srgbClr val="2E3A4A"/>
                 </a:solidFill>
                 <a:latin typeface="Montserrat"/>
               </a:rPr>
-              <a:t>devolveu os trilhos “por mais cinco minutos”</a:t>
-            </a:r>
-            <a:r>
-              <a:rPr sz="1600" b="0" i="0">
+              <a:t>“Agora acabou, vamos para a mesa”; trilhos guardados; atividade de mesa. Contexto: sono ruim, troca de terapeuta.</a:t>
+            </a:r>
+          </a:p>
+        </p:txBody>
+      </p:sp>
+      <p:sp>
+        <p:nvSpPr>
+          <p:cNvPr id="8" name="TextBox 7"/>
+          <p:cNvSpPr txBox="1"/>
+          <p:nvPr/>
+        </p:nvSpPr>
+        <p:spPr>
+          <a:xfrm>
+            <a:off x="8077200" y="2153741"/>
+            <a:ext cx="3191764" cy="274241"/>
+          </a:xfrm>
+          <a:prstGeom prst="rect">
+            <a:avLst/>
+          </a:prstGeom>
+          <a:noFill/>
+        </p:spPr>
+        <p:txBody>
+          <a:bodyPr wrap="square" lIns="0" rIns="0" tIns="0" bIns="0" anchor="t">
+            <a:noAutofit/>
+          </a:bodyPr>
+          <a:lstStyle/>
+          <a:p>
+            <a:pPr algn="l">
+              <a:lnSpc>
+                <a:spcPct val="98000"/>
+              </a:lnSpc>
+            </a:pPr>
+            <a:r>
+              <a:rPr sz="1800" b="1" i="0">
+                <a:solidFill>
+                  <a:srgbClr val="0F7C86"/>
+                </a:solidFill>
+                <a:latin typeface="Montserrat"/>
+              </a:rPr>
+              <a:t>3. Depois</a:t>
+            </a:r>
+          </a:p>
+        </p:txBody>
+      </p:sp>
+      <p:sp>
+        <p:nvSpPr>
+          <p:cNvPr id="9" name="TextBox 8"/>
+          <p:cNvSpPr txBox="1"/>
+          <p:nvPr/>
+        </p:nvSpPr>
+        <p:spPr>
+          <a:xfrm>
+            <a:off x="8077200" y="2516882"/>
+            <a:ext cx="3191764" cy="826591"/>
+          </a:xfrm>
+          <a:prstGeom prst="rect">
+            <a:avLst/>
+          </a:prstGeom>
+          <a:noFill/>
+        </p:spPr>
+        <p:txBody>
+          <a:bodyPr wrap="square" lIns="0" rIns="0" tIns="0" bIns="0" anchor="t">
+            <a:noAutofit/>
+          </a:bodyPr>
+          <a:lstStyle/>
+          <a:p>
+            <a:pPr algn="l">
+              <a:lnSpc>
+                <a:spcPct val="115000"/>
+              </a:lnSpc>
+            </a:pPr>
+            <a:r>
+              <a:rPr sz="1550" b="0" i="0">
                 <a:solidFill>
                   <a:srgbClr val="2E3A4A"/>
                 </a:solidFill>
                 <a:latin typeface="Montserrat"/>
               </a:rPr>
-              <a:t>; em outras, </a:t>
-            </a:r>
-            <a:r>
-              <a:rPr sz="1600" b="1" i="0">
+              <a:t>Às vezes os trilhos voltam, às vezes a mesa é adiada, às vezes a mesa é mantida.</a:t>
+            </a:r>
+          </a:p>
+        </p:txBody>
+      </p:sp>
+      <p:sp>
+        <p:nvSpPr>
+          <p:cNvPr id="10" name="TextBox 9"/>
+          <p:cNvSpPr txBox="1"/>
+          <p:nvPr/>
+        </p:nvSpPr>
+        <p:spPr>
+          <a:xfrm>
+            <a:off x="1168400" y="3834904"/>
+            <a:ext cx="10307828" cy="627261"/>
+          </a:xfrm>
+          <a:prstGeom prst="rect">
+            <a:avLst/>
+          </a:prstGeom>
+          <a:noFill/>
+        </p:spPr>
+        <p:txBody>
+          <a:bodyPr wrap="square" lIns="0" rIns="0" tIns="0" bIns="0" anchor="t">
+            <a:noAutofit/>
+          </a:bodyPr>
+          <a:lstStyle/>
+          <a:p>
+            <a:pPr algn="l">
+              <a:lnSpc>
+                <a:spcPct val="107000"/>
+              </a:lnSpc>
+            </a:pPr>
+            <a:r>
+              <a:rPr sz="1900" b="1" i="0">
+                <a:solidFill>
+                  <a:srgbClr val="0F7C86"/>
+                </a:solidFill>
+                <a:latin typeface="Montserrat"/>
+              </a:rPr>
+              <a:t>Sono e troca de terapeuta são contexto, não função (o que mantém o comportamento).</a:t>
+            </a:r>
+          </a:p>
+        </p:txBody>
+      </p:sp>
+      <p:sp>
+        <p:nvSpPr>
+          <p:cNvPr id="11" name="TextBox 10"/>
+          <p:cNvSpPr txBox="1"/>
+          <p:nvPr/>
+        </p:nvSpPr>
+        <p:spPr>
+          <a:xfrm>
+            <a:off x="1168400" y="4678065"/>
+            <a:ext cx="10307828" cy="533400"/>
+          </a:xfrm>
+          <a:prstGeom prst="rect">
+            <a:avLst/>
+          </a:prstGeom>
+          <a:noFill/>
+        </p:spPr>
+        <p:txBody>
+          <a:bodyPr wrap="square" lIns="0" rIns="0" tIns="0" bIns="0" anchor="t">
+            <a:noAutofit/>
+          </a:bodyPr>
+          <a:lstStyle/>
+          <a:p>
+            <a:pPr algn="l">
+              <a:lnSpc>
+                <a:spcPct val="115000"/>
+              </a:lnSpc>
+            </a:pPr>
+            <a:r>
+              <a:rPr sz="1500" b="1" i="0">
                 <a:solidFill>
                   <a:srgbClr val="2E3A4A"/>
                 </a:solidFill>
                 <a:latin typeface="Montserrat"/>
               </a:rPr>
-              <a:t>adiou a atividade de mesa</a:t>
-            </a:r>
-            <a:r>
-              <a:rPr sz="1600" b="0" i="0">
+              <a:t>E a terapeuta do vídeo?</a:t>
+            </a:r>
+            <a:r>
+              <a:rPr sz="1500" b="0" i="0">
                 <a:solidFill>
                   <a:srgbClr val="2E3A4A"/>
                 </a:solidFill>
                 <a:latin typeface="Montserrat"/>
               </a:rPr>
-              <a:t> para o fim da sessão; em outras, </a:t>
-            </a:r>
-            <a:r>
-              <a:rPr sz="1600" b="1" i="0">
-                <a:solidFill>
-                  <a:srgbClr val="2E3A4A"/>
-                </a:solidFill>
-                <a:latin typeface="Montserrat"/>
-              </a:rPr>
-              <a:t>manteve a atividade</a:t>
-            </a:r>
-            <a:r>
-              <a:rPr sz="1600" b="0" i="0">
-                <a:solidFill>
-                  <a:srgbClr val="2E3A4A"/>
-                </a:solidFill>
-                <a:latin typeface="Montserrat"/>
-              </a:rPr>
-              <a:t> e conduziu Theo até a mesa.</a:t>
-            </a:r>
-          </a:p>
-          <a:p>
-            <a:pPr algn="l" marL="279400" indent="-279400">
-              <a:lnSpc>
-                <a:spcPct val="123000"/>
-              </a:lnSpc>
-              <a:buChar char="•"/>
-            </a:pPr>
-            <a:r>
-              <a:rPr sz="1600" b="0" i="0">
-                <a:solidFill>
-                  <a:srgbClr val="2E3A4A"/>
-                </a:solidFill>
-                <a:latin typeface="Montserrat"/>
-              </a:rPr>
-              <a:t>A mãe relata que, em casa, Theo reage de forma parecida quando precisa </a:t>
-            </a:r>
-            <a:r>
-              <a:rPr sz="1600" b="1" i="0">
-                <a:solidFill>
-                  <a:srgbClr val="2E3A4A"/>
-                </a:solidFill>
-                <a:latin typeface="Montserrat"/>
-              </a:rPr>
-              <a:t>desligar a televisão para tomar banho</a:t>
-            </a:r>
-            <a:r>
-              <a:rPr sz="1600" b="0" i="0">
-                <a:solidFill>
-                  <a:srgbClr val="2E3A4A"/>
-                </a:solidFill>
-                <a:latin typeface="Montserrat"/>
-              </a:rPr>
-              <a:t>.</a:t>
-            </a:r>
-          </a:p>
-          <a:p>
-            <a:pPr algn="l" marL="279400" indent="-279400">
-              <a:lnSpc>
-                <a:spcPct val="123000"/>
-              </a:lnSpc>
-              <a:buChar char="•"/>
-            </a:pPr>
-            <a:r>
-              <a:rPr sz="1600" b="0" i="0">
-                <a:solidFill>
-                  <a:srgbClr val="2E3A4A"/>
-                </a:solidFill>
-                <a:latin typeface="Montserrat"/>
-              </a:rPr>
-              <a:t>A mãe também conta que, nas semanas em que os episódios foram </a:t>
-            </a:r>
-            <a:r>
-              <a:rPr sz="1600" b="1" i="0">
-                <a:solidFill>
-                  <a:srgbClr val="2E3A4A"/>
-                </a:solidFill>
-                <a:latin typeface="Montserrat"/>
-              </a:rPr>
-              <a:t>mais longos</a:t>
-            </a:r>
-            <a:r>
-              <a:rPr sz="1600" b="0" i="0">
-                <a:solidFill>
-                  <a:srgbClr val="2E3A4A"/>
-                </a:solidFill>
-                <a:latin typeface="Montserrat"/>
-              </a:rPr>
-              <a:t>, Theo </a:t>
-            </a:r>
-            <a:r>
-              <a:rPr sz="1600" b="1" i="0">
-                <a:solidFill>
-                  <a:srgbClr val="2E3A4A"/>
-                </a:solidFill>
-                <a:latin typeface="Montserrat"/>
-              </a:rPr>
-              <a:t>dormiu mal</a:t>
-            </a:r>
-            <a:r>
-              <a:rPr sz="1600" b="0" i="0">
-                <a:solidFill>
-                  <a:srgbClr val="2E3A4A"/>
-                </a:solidFill>
-                <a:latin typeface="Montserrat"/>
-              </a:rPr>
-              <a:t> e houve </a:t>
-            </a:r>
-            <a:r>
-              <a:rPr sz="1600" b="1" i="0">
-                <a:solidFill>
-                  <a:srgbClr val="2E3A4A"/>
-                </a:solidFill>
-                <a:latin typeface="Montserrat"/>
-              </a:rPr>
-              <a:t>troca da terapeuta</a:t>
-            </a:r>
-            <a:r>
-              <a:rPr sz="1600" b="0" i="0">
-                <a:solidFill>
-                  <a:srgbClr val="2E3A4A"/>
-                </a:solidFill>
-                <a:latin typeface="Montserrat"/>
-              </a:rPr>
-              <a:t> que o atendia.</a:t>
-            </a:r>
-          </a:p>
-          <a:p>
-            <a:pPr algn="l" marL="279400" indent="-279400">
-              <a:lnSpc>
-                <a:spcPct val="123000"/>
-              </a:lnSpc>
-              <a:buChar char="•"/>
-            </a:pPr>
-            <a:r>
-              <a:rPr sz="1600" b="0" i="0">
-                <a:solidFill>
-                  <a:srgbClr val="2E3A4A"/>
-                </a:solidFill>
-                <a:latin typeface="Montserrat"/>
-              </a:rPr>
-              <a:t>Nas sessões em que a terapeuta </a:t>
-            </a:r>
-            <a:r>
-              <a:rPr sz="1600" b="1" i="0">
-                <a:solidFill>
-                  <a:srgbClr val="2E3A4A"/>
-                </a:solidFill>
-                <a:latin typeface="Montserrat"/>
-              </a:rPr>
-              <a:t>mostrou um cartão “primeiro trilhos, depois mesa” e avisou dois minutos antes</a:t>
-            </a:r>
-            <a:r>
-              <a:rPr sz="1600" b="0" i="0">
-                <a:solidFill>
-                  <a:srgbClr val="2E3A4A"/>
-                </a:solidFill>
-                <a:latin typeface="Montserrat"/>
-              </a:rPr>
-              <a:t>, os episódios foram </a:t>
-            </a:r>
-            <a:r>
-              <a:rPr sz="1600" b="1" i="0">
-                <a:solidFill>
-                  <a:srgbClr val="2E3A4A"/>
-                </a:solidFill>
-                <a:latin typeface="Montserrat"/>
-              </a:rPr>
-              <a:t>mais curtos</a:t>
-            </a:r>
-            <a:r>
-              <a:rPr sz="1600" b="0" i="0">
-                <a:solidFill>
-                  <a:srgbClr val="2E3A4A"/>
-                </a:solidFill>
-                <a:latin typeface="Montserrat"/>
-              </a:rPr>
-              <a:t> (registro em 3 sessões).</a:t>
-            </a:r>
-          </a:p>
-        </p:txBody>
-      </p:sp>
-      <p:sp>
-        <p:nvSpPr>
-          <p:cNvPr id="5" name="TextBox 4"/>
-          <p:cNvSpPr txBox="1"/>
-          <p:nvPr/>
-        </p:nvSpPr>
-        <p:spPr>
-          <a:xfrm>
-            <a:off x="1168400" y="4991993"/>
-            <a:ext cx="10307828" cy="231080"/>
-          </a:xfrm>
-          <a:prstGeom prst="rect">
-            <a:avLst/>
-          </a:prstGeom>
-          <a:noFill/>
-        </p:spPr>
-        <p:txBody>
-          <a:bodyPr wrap="square" lIns="0" rIns="0" tIns="0" bIns="0" anchor="t">
-            <a:noAutofit/>
-          </a:bodyPr>
-          <a:lstStyle/>
-          <a:p>
-            <a:pPr algn="l">
-              <a:lnSpc>
-                <a:spcPct val="115000"/>
-              </a:lnSpc>
-            </a:pPr>
-            <a:r>
-              <a:rPr sz="1300" b="0" i="1">
-                <a:solidFill>
-                  <a:srgbClr val="66717F"/>
-                </a:solidFill>
-                <a:latin typeface="Montserrat"/>
-              </a:rPr>
-              <a:t>Exemplo fictício, parte 2 de 2</a:t>
-            </a:r>
-          </a:p>
-        </p:txBody>
-      </p:sp>
-      <p:sp>
-        <p:nvSpPr>
-          <p:cNvPr id="6" name="TextBox 5"/>
+              <a:t> Devolver os trilhos faz o grito parar e alivia quem está com ele. Esse alívio pode reforçar (tornar mais provável) o comportamento do adulto, e o ciclo continua.</a:t>
+            </a:r>
+          </a:p>
+        </p:txBody>
+      </p:sp>
+      <p:sp>
+        <p:nvSpPr>
+          <p:cNvPr id="12" name="TextBox 11"/>
           <p:cNvSpPr txBox="1"/>
           <p:nvPr/>
         </p:nvSpPr>
@@ -20678,420 +21283,7 @@
                 </a:solidFill>
                 <a:latin typeface="Montserrat"/>
               </a:rPr>
-              <a:t>35b</a:t>
-            </a:r>
-          </a:p>
-        </p:txBody>
-      </p:sp>
-    </p:spTree>
-  </p:cSld>
-  <p:clrMapOvr>
-    <a:masterClrMapping/>
-  </p:clrMapOvr>
-</p:sld>
-</file>
-
-<file path=ppt/slides/slide42.xml><?xml version="1.0" encoding="utf-8"?>
-<p:sld xmlns:a="http://schemas.openxmlformats.org/drawingml/2006/main" xmlns:p="http://schemas.openxmlformats.org/presentationml/2006/main" xmlns:r="http://schemas.openxmlformats.org/officeDocument/2006/relationships">
-  <p:cSld>
-    <p:bg>
-      <p:bgPr>
-        <a:solidFill>
-          <a:srgbClr val="EEF4F5"/>
-        </a:solidFill>
-        <a:effectLst/>
-      </p:bgPr>
-    </p:bg>
-    <p:spTree>
-      <p:nvGrpSpPr>
-        <p:cNvPr id="1" name=""/>
-        <p:cNvGrpSpPr/>
-        <p:nvPr/>
-      </p:nvGrpSpPr>
-      <p:grpSpPr/>
-      <p:sp>
-        <p:nvSpPr>
-          <p:cNvPr id="2" name="Rectangle 1"/>
-          <p:cNvSpPr/>
-          <p:nvPr/>
-        </p:nvSpPr>
-        <p:spPr>
-          <a:xfrm>
-            <a:off x="0" y="0"/>
-            <a:ext cx="177800" cy="6858000"/>
-          </a:xfrm>
-          <a:prstGeom prst="rect">
-            <a:avLst/>
-          </a:prstGeom>
-          <a:solidFill>
-            <a:srgbClr val="0F7C86"/>
-          </a:solidFill>
-          <a:ln>
-            <a:noFill/>
-          </a:ln>
-          <a:effectLst/>
-        </p:spPr>
-        <p:style>
-          <a:lnRef idx="1">
-            <a:schemeClr val="accent1"/>
-          </a:lnRef>
-          <a:fillRef idx="3">
-            <a:schemeClr val="accent1"/>
-          </a:fillRef>
-          <a:effectRef idx="2">
-            <a:schemeClr val="accent1"/>
-          </a:effectRef>
-          <a:fontRef idx="minor">
-            <a:schemeClr val="lt1"/>
-          </a:fontRef>
-        </p:style>
-        <p:txBody>
-          <a:bodyPr rtlCol="0" anchor="ctr"/>
-          <a:lstStyle/>
-          <a:p>
-            <a:pPr algn="ctr"/>
-          </a:p>
-        </p:txBody>
-      </p:sp>
-      <p:sp>
-        <p:nvSpPr>
-          <p:cNvPr id="3" name="TextBox 2"/>
-          <p:cNvSpPr txBox="1"/>
-          <p:nvPr/>
-        </p:nvSpPr>
-        <p:spPr>
-          <a:xfrm>
-            <a:off x="1168400" y="1344116"/>
-            <a:ext cx="10307828" cy="408880"/>
-          </a:xfrm>
-          <a:prstGeom prst="rect">
-            <a:avLst/>
-          </a:prstGeom>
-          <a:noFill/>
-        </p:spPr>
-        <p:txBody>
-          <a:bodyPr wrap="square" lIns="0" rIns="0" tIns="0" bIns="0" anchor="t">
-            <a:noAutofit/>
-          </a:bodyPr>
-          <a:lstStyle/>
-          <a:p>
-            <a:pPr algn="l">
-              <a:lnSpc>
-                <a:spcPct val="94000"/>
-              </a:lnSpc>
-            </a:pPr>
-            <a:r>
-              <a:rPr sz="2800" b="1" i="0">
-                <a:solidFill>
-                  <a:srgbClr val="1B2F4B"/>
-                </a:solidFill>
-                <a:latin typeface="Montserrat"/>
-              </a:rPr>
-              <a:t>Perguntas para o grupo</a:t>
-            </a:r>
-          </a:p>
-        </p:txBody>
-      </p:sp>
-      <p:sp>
-        <p:nvSpPr>
-          <p:cNvPr id="4" name="TextBox 3"/>
-          <p:cNvSpPr txBox="1"/>
-          <p:nvPr/>
-        </p:nvSpPr>
-        <p:spPr>
-          <a:xfrm>
-            <a:off x="1168400" y="1892697"/>
-            <a:ext cx="10307828" cy="284460"/>
-          </a:xfrm>
-          <a:prstGeom prst="rect">
-            <a:avLst/>
-          </a:prstGeom>
-          <a:noFill/>
-        </p:spPr>
-        <p:txBody>
-          <a:bodyPr wrap="square" lIns="0" rIns="0" tIns="0" bIns="0" anchor="t">
-            <a:noAutofit/>
-          </a:bodyPr>
-          <a:lstStyle/>
-          <a:p>
-            <a:pPr algn="l">
-              <a:lnSpc>
-                <a:spcPct val="115000"/>
-              </a:lnSpc>
-            </a:pPr>
-            <a:r>
-              <a:rPr sz="1600" b="1" i="0">
-                <a:solidFill>
-                  <a:srgbClr val="0F7C86"/>
-                </a:solidFill>
-                <a:latin typeface="Montserrat"/>
-              </a:rPr>
-              <a:t>Todos os grupos (cerca de 6 min)</a:t>
-            </a:r>
-          </a:p>
-        </p:txBody>
-      </p:sp>
-      <p:sp>
-        <p:nvSpPr>
-          <p:cNvPr id="5" name="TextBox 4"/>
-          <p:cNvSpPr txBox="1"/>
-          <p:nvPr/>
-        </p:nvSpPr>
-        <p:spPr>
-          <a:xfrm>
-            <a:off x="1168400" y="2316857"/>
-            <a:ext cx="10307828" cy="1476375"/>
-          </a:xfrm>
-          <a:prstGeom prst="rect">
-            <a:avLst/>
-          </a:prstGeom>
-          <a:noFill/>
-        </p:spPr>
-        <p:txBody>
-          <a:bodyPr wrap="square" lIns="0" rIns="0" tIns="0" bIns="0" anchor="t">
-            <a:noAutofit/>
-          </a:bodyPr>
-          <a:lstStyle/>
-          <a:p>
-            <a:pPr algn="l" marL="279400" indent="-279400">
-              <a:lnSpc>
-                <a:spcPct val="123000"/>
-              </a:lnSpc>
-              <a:buAutoNum type="arabicPeriod" startAt="1"/>
-            </a:pPr>
-            <a:r>
-              <a:rPr sz="1550" b="0" i="0">
-                <a:solidFill>
-                  <a:srgbClr val="2E3A4A"/>
-                </a:solidFill>
-                <a:latin typeface="Montserrat"/>
-              </a:rPr>
-              <a:t>O que o Theo faz? Descrevam só o que dá para ver e ouvir, sem palavras como “birra” ou “crise”.</a:t>
-            </a:r>
-          </a:p>
-          <a:p>
-            <a:pPr algn="l" marL="279400" indent="-279400">
-              <a:lnSpc>
-                <a:spcPct val="123000"/>
-              </a:lnSpc>
-              <a:buAutoNum type="arabicPeriod" startAt="1"/>
-            </a:pPr>
-            <a:r>
-              <a:rPr sz="1550" b="0" i="0">
-                <a:solidFill>
-                  <a:srgbClr val="2E3A4A"/>
-                </a:solidFill>
-                <a:latin typeface="Montserrat"/>
-              </a:rPr>
-              <a:t>O que acontece logo antes?</a:t>
-            </a:r>
-          </a:p>
-          <a:p>
-            <a:pPr algn="l" marL="279400" indent="-279400">
-              <a:lnSpc>
-                <a:spcPct val="123000"/>
-              </a:lnSpc>
-              <a:buAutoNum type="arabicPeriod" startAt="1"/>
-            </a:pPr>
-            <a:r>
-              <a:rPr sz="1550" b="0" i="0">
-                <a:solidFill>
-                  <a:srgbClr val="2E3A4A"/>
-                </a:solidFill>
-                <a:latin typeface="Montserrat"/>
-              </a:rPr>
-              <a:t>O que acontece logo depois?</a:t>
-            </a:r>
-          </a:p>
-          <a:p>
-            <a:pPr algn="l" marL="279400" indent="-279400">
-              <a:lnSpc>
-                <a:spcPct val="123000"/>
-              </a:lnSpc>
-              <a:buAutoNum type="arabicPeriod" startAt="1"/>
-            </a:pPr>
-            <a:r>
-              <a:rPr sz="1550" b="0" i="0">
-                <a:solidFill>
-                  <a:srgbClr val="2E3A4A"/>
-                </a:solidFill>
-                <a:latin typeface="Montserrat"/>
-              </a:rPr>
-              <a:t>Por que isso pode estar acontecendo? Deem duas explicações possíveis e, para cada uma, um dado da história que ajuda e um que atrapalha.</a:t>
-            </a:r>
-          </a:p>
-        </p:txBody>
-      </p:sp>
-      <p:sp>
-        <p:nvSpPr>
-          <p:cNvPr id="6" name="TextBox 5"/>
-          <p:cNvSpPr txBox="1"/>
-          <p:nvPr/>
-        </p:nvSpPr>
-        <p:spPr>
-          <a:xfrm>
-            <a:off x="1168400" y="3932932"/>
-            <a:ext cx="10307828" cy="284460"/>
-          </a:xfrm>
-          <a:prstGeom prst="rect">
-            <a:avLst/>
-          </a:prstGeom>
-          <a:noFill/>
-        </p:spPr>
-        <p:txBody>
-          <a:bodyPr wrap="square" lIns="0" rIns="0" tIns="0" bIns="0" anchor="t">
-            <a:noAutofit/>
-          </a:bodyPr>
-          <a:lstStyle/>
-          <a:p>
-            <a:pPr algn="l">
-              <a:lnSpc>
-                <a:spcPct val="115000"/>
-              </a:lnSpc>
-            </a:pPr>
-            <a:r>
-              <a:rPr sz="1600" b="1" i="0">
-                <a:solidFill>
-                  <a:srgbClr val="0F7C86"/>
-                </a:solidFill>
-                <a:latin typeface="Montserrat"/>
-              </a:rPr>
-              <a:t>Cada grupo, mais uma (cerca de 4 min)</a:t>
-            </a:r>
-          </a:p>
-        </p:txBody>
-      </p:sp>
-      <p:sp>
-        <p:nvSpPr>
-          <p:cNvPr id="7" name="TextBox 6"/>
-          <p:cNvSpPr txBox="1"/>
-          <p:nvPr/>
-        </p:nvSpPr>
-        <p:spPr>
-          <a:xfrm>
-            <a:off x="1168400" y="4357092"/>
-            <a:ext cx="10307828" cy="551061"/>
-          </a:xfrm>
-          <a:prstGeom prst="rect">
-            <a:avLst/>
-          </a:prstGeom>
-          <a:noFill/>
-        </p:spPr>
-        <p:txBody>
-          <a:bodyPr wrap="square" lIns="0" rIns="0" tIns="0" bIns="0" anchor="t">
-            <a:noAutofit/>
-          </a:bodyPr>
-          <a:lstStyle/>
-          <a:p>
-            <a:pPr algn="l">
-              <a:lnSpc>
-                <a:spcPct val="115000"/>
-              </a:lnSpc>
-            </a:pPr>
-            <a:r>
-              <a:rPr sz="1550" b="1" i="0">
-                <a:solidFill>
-                  <a:srgbClr val="2E3A4A"/>
-                </a:solidFill>
-                <a:latin typeface="Montserrat"/>
-              </a:rPr>
-              <a:t>5.</a:t>
-            </a:r>
-            <a:r>
-              <a:rPr sz="1550" b="0" i="0">
-                <a:solidFill>
-                  <a:srgbClr val="2E3A4A"/>
-                </a:solidFill>
-                <a:latin typeface="Montserrat"/>
-              </a:rPr>
-              <a:t> Escolham uma das explicações. O que vocês fariam para ajudar o Theo? E se essa explicação estiver errada, o que pode dar errado?</a:t>
-            </a:r>
-          </a:p>
-        </p:txBody>
-      </p:sp>
-      <p:sp>
-        <p:nvSpPr>
-          <p:cNvPr id="8" name="TextBox 7"/>
-          <p:cNvSpPr txBox="1"/>
-          <p:nvPr/>
-        </p:nvSpPr>
-        <p:spPr>
-          <a:xfrm>
-            <a:off x="1168400" y="5047853"/>
-            <a:ext cx="10307828" cy="275530"/>
-          </a:xfrm>
-          <a:prstGeom prst="rect">
-            <a:avLst/>
-          </a:prstGeom>
-          <a:noFill/>
-        </p:spPr>
-        <p:txBody>
-          <a:bodyPr wrap="square" lIns="0" rIns="0" tIns="0" bIns="0" anchor="t">
-            <a:noAutofit/>
-          </a:bodyPr>
-          <a:lstStyle/>
-          <a:p>
-            <a:pPr algn="l">
-              <a:lnSpc>
-                <a:spcPct val="115000"/>
-              </a:lnSpc>
-            </a:pPr>
-            <a:r>
-              <a:rPr sz="1550" b="1" i="0">
-                <a:solidFill>
-                  <a:srgbClr val="2E3A4A"/>
-                </a:solidFill>
-                <a:latin typeface="Montserrat"/>
-              </a:rPr>
-              <a:t>6.</a:t>
-            </a:r>
-            <a:r>
-              <a:rPr sz="1550" b="0" i="0">
-                <a:solidFill>
-                  <a:srgbClr val="2E3A4A"/>
-                </a:solidFill>
-                <a:latin typeface="Montserrat"/>
-              </a:rPr>
-              <a:t> A mãe pergunta: “Não é melhor tirar os trilhos de vez?”. O que vocês responderiam?</a:t>
-            </a:r>
-          </a:p>
-        </p:txBody>
-      </p:sp>
-      <p:sp>
-        <p:nvSpPr>
-          <p:cNvPr id="9" name="TextBox 8"/>
-          <p:cNvSpPr txBox="1"/>
-          <p:nvPr/>
-        </p:nvSpPr>
-        <p:spPr>
-          <a:xfrm>
-            <a:off x="10820400" y="6343650"/>
-            <a:ext cx="784860" cy="184150"/>
-          </a:xfrm>
-          <a:prstGeom prst="rect">
-            <a:avLst/>
-          </a:prstGeom>
-          <a:noFill/>
-        </p:spPr>
-        <p:txBody>
-          <a:bodyPr wrap="square" lIns="0" rIns="0" tIns="0" bIns="0" anchor="t">
-            <a:noAutofit/>
-          </a:bodyPr>
-          <a:lstStyle/>
-          <a:p>
-            <a:pPr algn="r">
-              <a:lnSpc>
-                <a:spcPct val="98000"/>
-              </a:lnSpc>
-            </a:pPr>
-            <a:r>
-              <a:rPr sz="1200" b="0" i="0">
-                <a:solidFill>
-                  <a:srgbClr val="66717F"/>
-                </a:solidFill>
-                <a:latin typeface="Montserrat"/>
-              </a:rPr>
-              <a:t>36</a:t>
+              <a:t>36a</a:t>
             </a:r>
           </a:p>
         </p:txBody>
@@ -21105,427 +21297,6 @@
 </file>
 
 <file path=ppt/slides/slide43.xml><?xml version="1.0" encoding="utf-8"?>
-<p:sld xmlns:a="http://schemas.openxmlformats.org/drawingml/2006/main" xmlns:p="http://schemas.openxmlformats.org/presentationml/2006/main" xmlns:r="http://schemas.openxmlformats.org/officeDocument/2006/relationships">
-  <p:cSld>
-    <p:bg>
-      <p:bgPr>
-        <a:solidFill>
-          <a:srgbClr val="FFFFFF"/>
-        </a:solidFill>
-        <a:effectLst/>
-      </p:bgPr>
-    </p:bg>
-    <p:spTree>
-      <p:nvGrpSpPr>
-        <p:cNvPr id="1" name=""/>
-        <p:cNvGrpSpPr/>
-        <p:nvPr/>
-      </p:nvGrpSpPr>
-      <p:grpSpPr/>
-      <p:sp>
-        <p:nvSpPr>
-          <p:cNvPr id="2" name="Rectangle 1"/>
-          <p:cNvSpPr/>
-          <p:nvPr/>
-        </p:nvSpPr>
-        <p:spPr>
-          <a:xfrm>
-            <a:off x="0" y="0"/>
-            <a:ext cx="177800" cy="6858000"/>
-          </a:xfrm>
-          <a:prstGeom prst="rect">
-            <a:avLst/>
-          </a:prstGeom>
-          <a:solidFill>
-            <a:srgbClr val="0F7C86"/>
-          </a:solidFill>
-          <a:ln>
-            <a:noFill/>
-          </a:ln>
-          <a:effectLst/>
-        </p:spPr>
-        <p:style>
-          <a:lnRef idx="1">
-            <a:schemeClr val="accent1"/>
-          </a:lnRef>
-          <a:fillRef idx="3">
-            <a:schemeClr val="accent1"/>
-          </a:fillRef>
-          <a:effectRef idx="2">
-            <a:schemeClr val="accent1"/>
-          </a:effectRef>
-          <a:fontRef idx="minor">
-            <a:schemeClr val="lt1"/>
-          </a:fontRef>
-        </p:style>
-        <p:txBody>
-          <a:bodyPr rtlCol="0" anchor="ctr"/>
-          <a:lstStyle/>
-          <a:p>
-            <a:pPr algn="ctr"/>
-          </a:p>
-        </p:txBody>
-      </p:sp>
-      <p:sp>
-        <p:nvSpPr>
-          <p:cNvPr id="3" name="TextBox 2"/>
-          <p:cNvSpPr txBox="1"/>
-          <p:nvPr/>
-        </p:nvSpPr>
-        <p:spPr>
-          <a:xfrm>
-            <a:off x="1168400" y="1949351"/>
-            <a:ext cx="10307828" cy="481905"/>
-          </a:xfrm>
-          <a:prstGeom prst="rect">
-            <a:avLst/>
-          </a:prstGeom>
-          <a:noFill/>
-        </p:spPr>
-        <p:txBody>
-          <a:bodyPr wrap="square" lIns="0" rIns="0" tIns="0" bIns="0" anchor="t">
-            <a:noAutofit/>
-          </a:bodyPr>
-          <a:lstStyle/>
-          <a:p>
-            <a:pPr algn="l">
-              <a:lnSpc>
-                <a:spcPct val="94000"/>
-              </a:lnSpc>
-            </a:pPr>
-            <a:r>
-              <a:rPr sz="3300" b="1" i="0">
-                <a:solidFill>
-                  <a:srgbClr val="1B2F4B"/>
-                </a:solidFill>
-                <a:latin typeface="Montserrat"/>
-              </a:rPr>
-              <a:t>Respostas 1 a 3: o que aconteceu</a:t>
-            </a:r>
-          </a:p>
-        </p:txBody>
-      </p:sp>
-      <p:sp>
-        <p:nvSpPr>
-          <p:cNvPr id="4" name="TextBox 3"/>
-          <p:cNvSpPr txBox="1"/>
-          <p:nvPr/>
-        </p:nvSpPr>
-        <p:spPr>
-          <a:xfrm>
-            <a:off x="1168400" y="2685256"/>
-            <a:ext cx="3191764" cy="274241"/>
-          </a:xfrm>
-          <a:prstGeom prst="rect">
-            <a:avLst/>
-          </a:prstGeom>
-          <a:noFill/>
-        </p:spPr>
-        <p:txBody>
-          <a:bodyPr wrap="square" lIns="0" rIns="0" tIns="0" bIns="0" anchor="t">
-            <a:noAutofit/>
-          </a:bodyPr>
-          <a:lstStyle/>
-          <a:p>
-            <a:pPr algn="l">
-              <a:lnSpc>
-                <a:spcPct val="98000"/>
-              </a:lnSpc>
-            </a:pPr>
-            <a:r>
-              <a:rPr sz="1800" b="1" i="0">
-                <a:solidFill>
-                  <a:srgbClr val="0F7C86"/>
-                </a:solidFill>
-                <a:latin typeface="Montserrat"/>
-              </a:rPr>
-              <a:t>1. O que ele faz</a:t>
-            </a:r>
-          </a:p>
-        </p:txBody>
-      </p:sp>
-      <p:sp>
-        <p:nvSpPr>
-          <p:cNvPr id="5" name="TextBox 4"/>
-          <p:cNvSpPr txBox="1"/>
-          <p:nvPr/>
-        </p:nvSpPr>
-        <p:spPr>
-          <a:xfrm>
-            <a:off x="1168400" y="3048397"/>
-            <a:ext cx="3191764" cy="1102122"/>
-          </a:xfrm>
-          <a:prstGeom prst="rect">
-            <a:avLst/>
-          </a:prstGeom>
-          <a:noFill/>
-        </p:spPr>
-        <p:txBody>
-          <a:bodyPr wrap="square" lIns="0" rIns="0" tIns="0" bIns="0" anchor="t">
-            <a:noAutofit/>
-          </a:bodyPr>
-          <a:lstStyle/>
-          <a:p>
-            <a:pPr algn="l">
-              <a:lnSpc>
-                <a:spcPct val="115000"/>
-              </a:lnSpc>
-            </a:pPr>
-            <a:r>
-              <a:rPr sz="1550" b="0" i="0">
-                <a:solidFill>
-                  <a:srgbClr val="2E3A4A"/>
-                </a:solidFill>
-                <a:latin typeface="Montserrat"/>
-              </a:rPr>
-              <a:t>Grita, se joga no chão e chuta o ar, por 3 a 8 minutos, em 11 de 12 sessões. Sem “birra” ou “crise”: são interpretações.</a:t>
-            </a:r>
-          </a:p>
-        </p:txBody>
-      </p:sp>
-      <p:sp>
-        <p:nvSpPr>
-          <p:cNvPr id="6" name="TextBox 5"/>
-          <p:cNvSpPr txBox="1"/>
-          <p:nvPr/>
-        </p:nvSpPr>
-        <p:spPr>
-          <a:xfrm>
-            <a:off x="4622800" y="2685256"/>
-            <a:ext cx="3191764" cy="274241"/>
-          </a:xfrm>
-          <a:prstGeom prst="rect">
-            <a:avLst/>
-          </a:prstGeom>
-          <a:noFill/>
-        </p:spPr>
-        <p:txBody>
-          <a:bodyPr wrap="square" lIns="0" rIns="0" tIns="0" bIns="0" anchor="t">
-            <a:noAutofit/>
-          </a:bodyPr>
-          <a:lstStyle/>
-          <a:p>
-            <a:pPr algn="l">
-              <a:lnSpc>
-                <a:spcPct val="98000"/>
-              </a:lnSpc>
-            </a:pPr>
-            <a:r>
-              <a:rPr sz="1800" b="1" i="0">
-                <a:solidFill>
-                  <a:srgbClr val="0F7C86"/>
-                </a:solidFill>
-                <a:latin typeface="Montserrat"/>
-              </a:rPr>
-              <a:t>2. Antes</a:t>
-            </a:r>
-          </a:p>
-        </p:txBody>
-      </p:sp>
-      <p:sp>
-        <p:nvSpPr>
-          <p:cNvPr id="7" name="TextBox 6"/>
-          <p:cNvSpPr txBox="1"/>
-          <p:nvPr/>
-        </p:nvSpPr>
-        <p:spPr>
-          <a:xfrm>
-            <a:off x="4622800" y="3048397"/>
-            <a:ext cx="3191764" cy="1102122"/>
-          </a:xfrm>
-          <a:prstGeom prst="rect">
-            <a:avLst/>
-          </a:prstGeom>
-          <a:noFill/>
-        </p:spPr>
-        <p:txBody>
-          <a:bodyPr wrap="square" lIns="0" rIns="0" tIns="0" bIns="0" anchor="t">
-            <a:noAutofit/>
-          </a:bodyPr>
-          <a:lstStyle/>
-          <a:p>
-            <a:pPr algn="l">
-              <a:lnSpc>
-                <a:spcPct val="115000"/>
-              </a:lnSpc>
-            </a:pPr>
-            <a:r>
-              <a:rPr sz="1550" b="0" i="0">
-                <a:solidFill>
-                  <a:srgbClr val="2E3A4A"/>
-                </a:solidFill>
-                <a:latin typeface="Montserrat"/>
-              </a:rPr>
-              <a:t>“Agora acabou, vamos para a mesa”; trilhos guardados; atividade de mesa. Contexto: sono ruim, troca de terapeuta.</a:t>
-            </a:r>
-          </a:p>
-        </p:txBody>
-      </p:sp>
-      <p:sp>
-        <p:nvSpPr>
-          <p:cNvPr id="8" name="TextBox 7"/>
-          <p:cNvSpPr txBox="1"/>
-          <p:nvPr/>
-        </p:nvSpPr>
-        <p:spPr>
-          <a:xfrm>
-            <a:off x="8077200" y="2685256"/>
-            <a:ext cx="3191764" cy="274241"/>
-          </a:xfrm>
-          <a:prstGeom prst="rect">
-            <a:avLst/>
-          </a:prstGeom>
-          <a:noFill/>
-        </p:spPr>
-        <p:txBody>
-          <a:bodyPr wrap="square" lIns="0" rIns="0" tIns="0" bIns="0" anchor="t">
-            <a:noAutofit/>
-          </a:bodyPr>
-          <a:lstStyle/>
-          <a:p>
-            <a:pPr algn="l">
-              <a:lnSpc>
-                <a:spcPct val="98000"/>
-              </a:lnSpc>
-            </a:pPr>
-            <a:r>
-              <a:rPr sz="1800" b="1" i="0">
-                <a:solidFill>
-                  <a:srgbClr val="0F7C86"/>
-                </a:solidFill>
-                <a:latin typeface="Montserrat"/>
-              </a:rPr>
-              <a:t>3. Depois</a:t>
-            </a:r>
-          </a:p>
-        </p:txBody>
-      </p:sp>
-      <p:sp>
-        <p:nvSpPr>
-          <p:cNvPr id="9" name="TextBox 8"/>
-          <p:cNvSpPr txBox="1"/>
-          <p:nvPr/>
-        </p:nvSpPr>
-        <p:spPr>
-          <a:xfrm>
-            <a:off x="8077200" y="3048397"/>
-            <a:ext cx="3191764" cy="826591"/>
-          </a:xfrm>
-          <a:prstGeom prst="rect">
-            <a:avLst/>
-          </a:prstGeom>
-          <a:noFill/>
-        </p:spPr>
-        <p:txBody>
-          <a:bodyPr wrap="square" lIns="0" rIns="0" tIns="0" bIns="0" anchor="t">
-            <a:noAutofit/>
-          </a:bodyPr>
-          <a:lstStyle/>
-          <a:p>
-            <a:pPr algn="l">
-              <a:lnSpc>
-                <a:spcPct val="115000"/>
-              </a:lnSpc>
-            </a:pPr>
-            <a:r>
-              <a:rPr sz="1550" b="0" i="0">
-                <a:solidFill>
-                  <a:srgbClr val="2E3A4A"/>
-                </a:solidFill>
-                <a:latin typeface="Montserrat"/>
-              </a:rPr>
-              <a:t>Às vezes os trilhos voltam, às vezes a mesa é adiada, às vezes a mesa é mantida.</a:t>
-            </a:r>
-          </a:p>
-        </p:txBody>
-      </p:sp>
-      <p:sp>
-        <p:nvSpPr>
-          <p:cNvPr id="10" name="TextBox 9"/>
-          <p:cNvSpPr txBox="1"/>
-          <p:nvPr/>
-        </p:nvSpPr>
-        <p:spPr>
-          <a:xfrm>
-            <a:off x="1168400" y="4404519"/>
-            <a:ext cx="10307828" cy="313630"/>
-          </a:xfrm>
-          <a:prstGeom prst="rect">
-            <a:avLst/>
-          </a:prstGeom>
-          <a:noFill/>
-        </p:spPr>
-        <p:txBody>
-          <a:bodyPr wrap="square" lIns="0" rIns="0" tIns="0" bIns="0" anchor="t">
-            <a:noAutofit/>
-          </a:bodyPr>
-          <a:lstStyle/>
-          <a:p>
-            <a:pPr algn="l">
-              <a:lnSpc>
-                <a:spcPct val="107000"/>
-              </a:lnSpc>
-            </a:pPr>
-            <a:r>
-              <a:rPr sz="1900" b="1" i="0">
-                <a:solidFill>
-                  <a:srgbClr val="0F7C86"/>
-                </a:solidFill>
-                <a:latin typeface="Montserrat"/>
-              </a:rPr>
-              <a:t>Sono e troca de terapeuta são contexto, não função.</a:t>
-            </a:r>
-          </a:p>
-        </p:txBody>
-      </p:sp>
-      <p:sp>
-        <p:nvSpPr>
-          <p:cNvPr id="11" name="TextBox 10"/>
-          <p:cNvSpPr txBox="1"/>
-          <p:nvPr/>
-        </p:nvSpPr>
-        <p:spPr>
-          <a:xfrm>
-            <a:off x="10820400" y="6343650"/>
-            <a:ext cx="784860" cy="184150"/>
-          </a:xfrm>
-          <a:prstGeom prst="rect">
-            <a:avLst/>
-          </a:prstGeom>
-          <a:noFill/>
-        </p:spPr>
-        <p:txBody>
-          <a:bodyPr wrap="square" lIns="0" rIns="0" tIns="0" bIns="0" anchor="t">
-            <a:noAutofit/>
-          </a:bodyPr>
-          <a:lstStyle/>
-          <a:p>
-            <a:pPr algn="r">
-              <a:lnSpc>
-                <a:spcPct val="98000"/>
-              </a:lnSpc>
-            </a:pPr>
-            <a:r>
-              <a:rPr sz="1200" b="0" i="0">
-                <a:solidFill>
-                  <a:srgbClr val="66717F"/>
-                </a:solidFill>
-                <a:latin typeface="Montserrat"/>
-              </a:rPr>
-              <a:t>36a</a:t>
-            </a:r>
-          </a:p>
-        </p:txBody>
-      </p:sp>
-    </p:spTree>
-  </p:cSld>
-  <p:clrMapOvr>
-    <a:masterClrMapping/>
-  </p:clrMapOvr>
-</p:sld>
-</file>
-
-<file path=ppt/slides/slide44.xml><?xml version="1.0" encoding="utf-8"?>
 <p:sld xmlns:a="http://schemas.openxmlformats.org/drawingml/2006/main" xmlns:p="http://schemas.openxmlformats.org/presentationml/2006/main" xmlns:r="http://schemas.openxmlformats.org/officeDocument/2006/relationships">
   <p:cSld>
     <p:bg>
@@ -21887,7 +21658,7 @@
                           </a:solidFill>
                           <a:latin typeface="Montserrat"/>
                         </a:rPr>
-                        <a:t>Em casa, o antecedente é o banho</a:t>
+                        <a:t>Em casa, o antecedente (o que vem antes) é o banho</a:t>
                       </a:r>
                     </a:p>
                   </a:txBody>
@@ -22154,7 +21925,7 @@
 </p:sld>
 </file>
 
-<file path=ppt/slides/slide45.xml><?xml version="1.0" encoding="utf-8"?>
+<file path=ppt/slides/slide44.xml><?xml version="1.0" encoding="utf-8"?>
 <p:sld xmlns:a="http://schemas.openxmlformats.org/drawingml/2006/main" xmlns:p="http://schemas.openxmlformats.org/presentationml/2006/main" xmlns:r="http://schemas.openxmlformats.org/officeDocument/2006/relationships">
   <p:cSld>
     <p:bg>
@@ -22618,7 +22389,7 @@
 </p:sld>
 </file>
 
-<file path=ppt/slides/slide46.xml><?xml version="1.0" encoding="utf-8"?>
+<file path=ppt/slides/slide45.xml><?xml version="1.0" encoding="utf-8"?>
 <p:sld xmlns:a="http://schemas.openxmlformats.org/drawingml/2006/main" xmlns:p="http://schemas.openxmlformats.org/presentationml/2006/main" xmlns:r="http://schemas.openxmlformats.org/officeDocument/2006/relationships">
   <p:cSld>
     <p:bg>
@@ -22920,6 +22691,289 @@
                 <a:latin typeface="Montserrat"/>
               </a:rPr>
               <a:t>36d</a:t>
+            </a:r>
+          </a:p>
+        </p:txBody>
+      </p:sp>
+    </p:spTree>
+  </p:cSld>
+  <p:clrMapOvr>
+    <a:masterClrMapping/>
+  </p:clrMapOvr>
+</p:sld>
+</file>
+
+<file path=ppt/slides/slide46.xml><?xml version="1.0" encoding="utf-8"?>
+<p:sld xmlns:a="http://schemas.openxmlformats.org/drawingml/2006/main" xmlns:p="http://schemas.openxmlformats.org/presentationml/2006/main" xmlns:r="http://schemas.openxmlformats.org/officeDocument/2006/relationships">
+  <p:cSld>
+    <p:bg>
+      <p:bgPr>
+        <a:solidFill>
+          <a:srgbClr val="FCFCFB"/>
+        </a:solidFill>
+        <a:effectLst/>
+      </p:bgPr>
+    </p:bg>
+    <p:spTree>
+      <p:nvGrpSpPr>
+        <p:cNvPr id="1" name=""/>
+        <p:cNvGrpSpPr/>
+        <p:nvPr/>
+      </p:nvGrpSpPr>
+      <p:grpSpPr/>
+      <p:sp>
+        <p:nvSpPr>
+          <p:cNvPr id="2" name="Rectangle 1"/>
+          <p:cNvSpPr/>
+          <p:nvPr/>
+        </p:nvSpPr>
+        <p:spPr>
+          <a:xfrm>
+            <a:off x="0" y="0"/>
+            <a:ext cx="177800" cy="6858000"/>
+          </a:xfrm>
+          <a:prstGeom prst="rect">
+            <a:avLst/>
+          </a:prstGeom>
+          <a:solidFill>
+            <a:srgbClr val="0F7C86"/>
+          </a:solidFill>
+          <a:ln>
+            <a:noFill/>
+          </a:ln>
+          <a:effectLst/>
+        </p:spPr>
+        <p:style>
+          <a:lnRef idx="1">
+            <a:schemeClr val="accent1"/>
+          </a:lnRef>
+          <a:fillRef idx="3">
+            <a:schemeClr val="accent1"/>
+          </a:fillRef>
+          <a:effectRef idx="2">
+            <a:schemeClr val="accent1"/>
+          </a:effectRef>
+          <a:fontRef idx="minor">
+            <a:schemeClr val="lt1"/>
+          </a:fontRef>
+        </p:style>
+        <p:txBody>
+          <a:bodyPr rtlCol="0" anchor="ctr"/>
+          <a:lstStyle/>
+          <a:p>
+            <a:pPr algn="ctr"/>
+          </a:p>
+        </p:txBody>
+      </p:sp>
+      <p:sp>
+        <p:nvSpPr>
+          <p:cNvPr id="3" name="TextBox 2"/>
+          <p:cNvSpPr txBox="1"/>
+          <p:nvPr/>
+        </p:nvSpPr>
+        <p:spPr>
+          <a:xfrm>
+            <a:off x="1168400" y="2094607"/>
+            <a:ext cx="10307828" cy="481905"/>
+          </a:xfrm>
+          <a:prstGeom prst="rect">
+            <a:avLst/>
+          </a:prstGeom>
+          <a:noFill/>
+        </p:spPr>
+        <p:txBody>
+          <a:bodyPr wrap="square" lIns="0" rIns="0" tIns="0" bIns="0" anchor="t">
+            <a:noAutofit/>
+          </a:bodyPr>
+          <a:lstStyle/>
+          <a:p>
+            <a:pPr algn="l">
+              <a:lnSpc>
+                <a:spcPct val="94000"/>
+              </a:lnSpc>
+            </a:pPr>
+            <a:r>
+              <a:rPr sz="3300" b="1" i="0">
+                <a:solidFill>
+                  <a:srgbClr val="1B2F4B"/>
+                </a:solidFill>
+                <a:latin typeface="Montserrat"/>
+              </a:rPr>
+              <a:t>Plenária: do comportamento à decisão</a:t>
+            </a:r>
+          </a:p>
+        </p:txBody>
+      </p:sp>
+      <p:sp>
+        <p:nvSpPr>
+          <p:cNvPr id="4" name="TextBox 3"/>
+          <p:cNvSpPr txBox="1"/>
+          <p:nvPr/>
+        </p:nvSpPr>
+        <p:spPr>
+          <a:xfrm>
+            <a:off x="1168400" y="2906712"/>
+            <a:ext cx="10307828" cy="660400"/>
+          </a:xfrm>
+          <a:prstGeom prst="rect">
+            <a:avLst/>
+          </a:prstGeom>
+          <a:noFill/>
+        </p:spPr>
+        <p:txBody>
+          <a:bodyPr wrap="square" lIns="0" rIns="0" tIns="0" bIns="0" anchor="t">
+            <a:noAutofit/>
+          </a:bodyPr>
+          <a:lstStyle/>
+          <a:p>
+            <a:pPr algn="l">
+              <a:lnSpc>
+                <a:spcPct val="107000"/>
+              </a:lnSpc>
+            </a:pPr>
+            <a:r>
+              <a:rPr sz="2000" b="1" i="0">
+                <a:solidFill>
+                  <a:srgbClr val="0F7C86"/>
+                </a:solidFill>
+                <a:latin typeface="Montserrat"/>
+              </a:rPr>
+              <a:t>Comportamento → Antes e depois → Explicações possíveis → O que fazer → Cuidados éticos</a:t>
+            </a:r>
+          </a:p>
+        </p:txBody>
+      </p:sp>
+      <p:sp>
+        <p:nvSpPr>
+          <p:cNvPr id="5" name="TextBox 4"/>
+          <p:cNvSpPr txBox="1"/>
+          <p:nvPr/>
+        </p:nvSpPr>
+        <p:spPr>
+          <a:xfrm>
+            <a:off x="1168400" y="3897312"/>
+            <a:ext cx="10307828" cy="675481"/>
+          </a:xfrm>
+          <a:prstGeom prst="rect">
+            <a:avLst/>
+          </a:prstGeom>
+          <a:noFill/>
+        </p:spPr>
+        <p:txBody>
+          <a:bodyPr wrap="square" lIns="0" rIns="0" tIns="0" bIns="0" anchor="t">
+            <a:noAutofit/>
+          </a:bodyPr>
+          <a:lstStyle/>
+          <a:p>
+            <a:pPr algn="l">
+              <a:lnSpc>
+                <a:spcPct val="115000"/>
+              </a:lnSpc>
+            </a:pPr>
+            <a:r>
+              <a:rPr sz="1900" b="0" i="0">
+                <a:solidFill>
+                  <a:srgbClr val="2E3A4A"/>
+                </a:solidFill>
+                <a:latin typeface="Montserrat"/>
+              </a:rPr>
+              <a:t>Uma história </a:t>
+            </a:r>
+            <a:r>
+              <a:rPr sz="1900" b="1" i="0">
+                <a:solidFill>
+                  <a:srgbClr val="2E3A4A"/>
+                </a:solidFill>
+                <a:latin typeface="Montserrat"/>
+              </a:rPr>
+              <a:t>não permite concluir a função (para que o comportamento serve)</a:t>
+            </a:r>
+            <a:r>
+              <a:rPr sz="1900" b="0" i="0">
+                <a:solidFill>
+                  <a:srgbClr val="2E3A4A"/>
+                </a:solidFill>
+                <a:latin typeface="Montserrat"/>
+              </a:rPr>
+              <a:t>. Ela permite levantar hipóteses que precisam de avaliação.</a:t>
+            </a:r>
+          </a:p>
+        </p:txBody>
+      </p:sp>
+      <p:sp>
+        <p:nvSpPr>
+          <p:cNvPr id="6" name="TextBox 5"/>
+          <p:cNvSpPr txBox="1"/>
+          <p:nvPr/>
+        </p:nvSpPr>
+        <p:spPr>
+          <a:xfrm>
+            <a:off x="1168400" y="6343650"/>
+            <a:ext cx="9156700" cy="184150"/>
+          </a:xfrm>
+          <a:prstGeom prst="rect">
+            <a:avLst/>
+          </a:prstGeom>
+          <a:noFill/>
+        </p:spPr>
+        <p:txBody>
+          <a:bodyPr wrap="square" lIns="0" rIns="0" tIns="0" bIns="0" anchor="t">
+            <a:noAutofit/>
+          </a:bodyPr>
+          <a:lstStyle/>
+          <a:p>
+            <a:pPr algn="l">
+              <a:lnSpc>
+                <a:spcPct val="98000"/>
+              </a:lnSpc>
+            </a:pPr>
+            <a:r>
+              <a:rPr sz="1200" b="0" i="0">
+                <a:solidFill>
+                  <a:srgbClr val="66717F"/>
+                </a:solidFill>
+                <a:latin typeface="Montserrat"/>
+              </a:rPr>
+              <a:t>Hanley et al. (2014)</a:t>
+            </a:r>
+          </a:p>
+        </p:txBody>
+      </p:sp>
+      <p:sp>
+        <p:nvSpPr>
+          <p:cNvPr id="7" name="TextBox 6"/>
+          <p:cNvSpPr txBox="1"/>
+          <p:nvPr/>
+        </p:nvSpPr>
+        <p:spPr>
+          <a:xfrm>
+            <a:off x="10820400" y="6343650"/>
+            <a:ext cx="784860" cy="184150"/>
+          </a:xfrm>
+          <a:prstGeom prst="rect">
+            <a:avLst/>
+          </a:prstGeom>
+          <a:noFill/>
+        </p:spPr>
+        <p:txBody>
+          <a:bodyPr wrap="square" lIns="0" rIns="0" tIns="0" bIns="0" anchor="t">
+            <a:noAutofit/>
+          </a:bodyPr>
+          <a:lstStyle/>
+          <a:p>
+            <a:pPr algn="r">
+              <a:lnSpc>
+                <a:spcPct val="98000"/>
+              </a:lnSpc>
+            </a:pPr>
+            <a:r>
+              <a:rPr sz="1200" b="0" i="0">
+                <a:solidFill>
+                  <a:srgbClr val="66717F"/>
+                </a:solidFill>
+                <a:latin typeface="Montserrat"/>
+              </a:rPr>
+              <a:t>37</a:t>
             </a:r>
           </a:p>
         </p:txBody>
@@ -23002,7 +23056,7 @@
         </p:nvSpPr>
         <p:spPr>
           <a:xfrm>
-            <a:off x="1168400" y="2094607"/>
+            <a:off x="1168400" y="1867198"/>
             <a:ext cx="10307828" cy="481905"/>
           </a:xfrm>
           <a:prstGeom prst="rect">
@@ -23028,7 +23082,7 @@
                 </a:solidFill>
                 <a:latin typeface="Montserrat"/>
               </a:rPr>
-              <a:t>Plenária: do comportamento à decisão</a:t>
+              <a:t>Cinco mensagens para levar</a:t>
             </a:r>
           </a:p>
         </p:txBody>
@@ -23041,33 +23095,120 @@
         </p:nvSpPr>
         <p:spPr>
           <a:xfrm>
-            <a:off x="1168400" y="2906712"/>
-            <a:ext cx="10307828" cy="660400"/>
-          </a:xfrm>
-          <a:prstGeom prst="rect">
-            <a:avLst/>
-          </a:prstGeom>
-          <a:noFill/>
-        </p:spPr>
-        <p:txBody>
-          <a:bodyPr wrap="square" lIns="0" rIns="0" tIns="0" bIns="0" anchor="t">
-            <a:noAutofit/>
-          </a:bodyPr>
-          <a:lstStyle/>
-          <a:p>
-            <a:pPr algn="l">
-              <a:lnSpc>
-                <a:spcPct val="107000"/>
-              </a:lnSpc>
-            </a:pPr>
-            <a:r>
-              <a:rPr sz="2000" b="1" i="0">
-                <a:solidFill>
-                  <a:srgbClr val="0F7C86"/>
-                </a:solidFill>
-                <a:latin typeface="Montserrat"/>
-              </a:rPr>
-              <a:t>Comportamento → Antes e depois → Explicações possíveis → O que fazer → Cuidados éticos</a:t>
+            <a:off x="1168400" y="2628503"/>
+            <a:ext cx="10307828" cy="2171700"/>
+          </a:xfrm>
+          <a:prstGeom prst="rect">
+            <a:avLst/>
+          </a:prstGeom>
+          <a:noFill/>
+        </p:spPr>
+        <p:txBody>
+          <a:bodyPr wrap="square" lIns="0" rIns="0" tIns="0" bIns="0" anchor="t">
+            <a:noAutofit/>
+          </a:bodyPr>
+          <a:lstStyle/>
+          <a:p>
+            <a:pPr algn="l" marL="279400" indent="-279400">
+              <a:lnSpc>
+                <a:spcPct val="123000"/>
+              </a:lnSpc>
+              <a:buAutoNum type="arabicPeriod" startAt="1"/>
+            </a:pPr>
+            <a:r>
+              <a:rPr sz="1900" b="0" i="0">
+                <a:solidFill>
+                  <a:srgbClr val="2E3A4A"/>
+                </a:solidFill>
+                <a:latin typeface="Montserrat"/>
+              </a:rPr>
+              <a:t>TEA é heterogêneo: </a:t>
+            </a:r>
+            <a:r>
+              <a:rPr sz="1900" b="1" i="0">
+                <a:solidFill>
+                  <a:srgbClr val="2E3A4A"/>
+                </a:solidFill>
+                <a:latin typeface="Montserrat"/>
+              </a:rPr>
+              <a:t>o diagnóstico não define o plano</a:t>
+            </a:r>
+          </a:p>
+          <a:p>
+            <a:pPr algn="l" marL="279400" indent="-279400">
+              <a:lnSpc>
+                <a:spcPct val="123000"/>
+              </a:lnSpc>
+              <a:buAutoNum type="arabicPeriod" startAt="1"/>
+            </a:pPr>
+            <a:r>
+              <a:rPr sz="1900" b="1" i="0">
+                <a:solidFill>
+                  <a:srgbClr val="2E3A4A"/>
+                </a:solidFill>
+                <a:latin typeface="Montserrat"/>
+              </a:rPr>
+              <a:t>Topografia (forma) descreve; função (para que serve) explica</a:t>
+            </a:r>
+          </a:p>
+          <a:p>
+            <a:pPr algn="l" marL="279400" indent="-279400">
+              <a:lnSpc>
+                <a:spcPct val="123000"/>
+              </a:lnSpc>
+              <a:buAutoNum type="arabicPeriod" startAt="1"/>
+            </a:pPr>
+            <a:r>
+              <a:rPr sz="1900" b="1" i="0">
+                <a:solidFill>
+                  <a:srgbClr val="2E3A4A"/>
+                </a:solidFill>
+                <a:latin typeface="Montserrat"/>
+              </a:rPr>
+              <a:t>Avaliar vem antes de intervir</a:t>
+            </a:r>
+          </a:p>
+          <a:p>
+            <a:pPr algn="l" marL="279400" indent="-279400">
+              <a:lnSpc>
+                <a:spcPct val="123000"/>
+              </a:lnSpc>
+              <a:buAutoNum type="arabicPeriod" startAt="1"/>
+            </a:pPr>
+            <a:r>
+              <a:rPr sz="1900" b="0" i="0">
+                <a:solidFill>
+                  <a:srgbClr val="2E3A4A"/>
+                </a:solidFill>
+                <a:latin typeface="Montserrat"/>
+              </a:rPr>
+              <a:t>Bons objetivos ampliam comunicação, participação, autonomia e qualidade de vida</a:t>
+            </a:r>
+          </a:p>
+          <a:p>
+            <a:pPr algn="l" marL="279400" indent="-279400">
+              <a:lnSpc>
+                <a:spcPct val="123000"/>
+              </a:lnSpc>
+              <a:buAutoNum type="arabicPeriod" startAt="1"/>
+            </a:pPr>
+            <a:r>
+              <a:rPr sz="1900" b="0" i="0">
+                <a:solidFill>
+                  <a:srgbClr val="2E3A4A"/>
+                </a:solidFill>
+                <a:latin typeface="Montserrat"/>
+              </a:rPr>
+              <a:t>Raciocínio clínico exige </a:t>
+            </a:r>
+            <a:r>
+              <a:rPr sz="1900" b="1" i="0">
+                <a:solidFill>
+                  <a:srgbClr val="2E3A4A"/>
+                </a:solidFill>
+                <a:latin typeface="Montserrat"/>
+              </a:rPr>
+              <a:t>evidência, individualização, ética e supervisão</a:t>
             </a:r>
           </a:p>
         </p:txBody>
@@ -23075,102 +23216,6 @@
       <p:sp>
         <p:nvSpPr>
           <p:cNvPr id="5" name="TextBox 4"/>
-          <p:cNvSpPr txBox="1"/>
-          <p:nvPr/>
-        </p:nvSpPr>
-        <p:spPr>
-          <a:xfrm>
-            <a:off x="1168400" y="3897312"/>
-            <a:ext cx="10307828" cy="675481"/>
-          </a:xfrm>
-          <a:prstGeom prst="rect">
-            <a:avLst/>
-          </a:prstGeom>
-          <a:noFill/>
-        </p:spPr>
-        <p:txBody>
-          <a:bodyPr wrap="square" lIns="0" rIns="0" tIns="0" bIns="0" anchor="t">
-            <a:noAutofit/>
-          </a:bodyPr>
-          <a:lstStyle/>
-          <a:p>
-            <a:pPr algn="l">
-              <a:lnSpc>
-                <a:spcPct val="115000"/>
-              </a:lnSpc>
-            </a:pPr>
-            <a:r>
-              <a:rPr sz="1900" b="0" i="0">
-                <a:solidFill>
-                  <a:srgbClr val="2E3A4A"/>
-                </a:solidFill>
-                <a:latin typeface="Montserrat"/>
-              </a:rPr>
-              <a:t>Uma história </a:t>
-            </a:r>
-            <a:r>
-              <a:rPr sz="1900" b="1" i="0">
-                <a:solidFill>
-                  <a:srgbClr val="2E3A4A"/>
-                </a:solidFill>
-                <a:latin typeface="Montserrat"/>
-              </a:rPr>
-              <a:t>não permite concluir a função</a:t>
-            </a:r>
-            <a:r>
-              <a:rPr sz="1900" b="0" i="0">
-                <a:solidFill>
-                  <a:srgbClr val="2E3A4A"/>
-                </a:solidFill>
-                <a:latin typeface="Montserrat"/>
-              </a:rPr>
-              <a:t>. Ela permite levantar hipóteses que precisam de avaliação.</a:t>
-            </a:r>
-          </a:p>
-        </p:txBody>
-      </p:sp>
-      <p:sp>
-        <p:nvSpPr>
-          <p:cNvPr id="6" name="TextBox 5"/>
-          <p:cNvSpPr txBox="1"/>
-          <p:nvPr/>
-        </p:nvSpPr>
-        <p:spPr>
-          <a:xfrm>
-            <a:off x="1168400" y="6343650"/>
-            <a:ext cx="9156700" cy="184150"/>
-          </a:xfrm>
-          <a:prstGeom prst="rect">
-            <a:avLst/>
-          </a:prstGeom>
-          <a:noFill/>
-        </p:spPr>
-        <p:txBody>
-          <a:bodyPr wrap="square" lIns="0" rIns="0" tIns="0" bIns="0" anchor="t">
-            <a:noAutofit/>
-          </a:bodyPr>
-          <a:lstStyle/>
-          <a:p>
-            <a:pPr algn="l">
-              <a:lnSpc>
-                <a:spcPct val="98000"/>
-              </a:lnSpc>
-            </a:pPr>
-            <a:r>
-              <a:rPr sz="1200" b="0" i="0">
-                <a:solidFill>
-                  <a:srgbClr val="66717F"/>
-                </a:solidFill>
-                <a:latin typeface="Montserrat"/>
-              </a:rPr>
-              <a:t>Hanley et al. (2014)</a:t>
-            </a:r>
-          </a:p>
-        </p:txBody>
-      </p:sp>
-      <p:sp>
-        <p:nvSpPr>
-          <p:cNvPr id="7" name="TextBox 6"/>
           <p:cNvSpPr txBox="1"/>
           <p:nvPr/>
         </p:nvSpPr>
@@ -23202,7 +23247,7 @@
                 </a:solidFill>
                 <a:latin typeface="Montserrat"/>
               </a:rPr>
-              <a:t>37</a:t>
+              <a:t>38</a:t>
             </a:r>
           </a:p>
         </p:txBody>
@@ -23216,280 +23261,6 @@
 </file>
 
 <file path=ppt/slides/slide48.xml><?xml version="1.0" encoding="utf-8"?>
-<p:sld xmlns:a="http://schemas.openxmlformats.org/drawingml/2006/main" xmlns:p="http://schemas.openxmlformats.org/presentationml/2006/main" xmlns:r="http://schemas.openxmlformats.org/officeDocument/2006/relationships">
-  <p:cSld>
-    <p:bg>
-      <p:bgPr>
-        <a:solidFill>
-          <a:srgbClr val="FCFCFB"/>
-        </a:solidFill>
-        <a:effectLst/>
-      </p:bgPr>
-    </p:bg>
-    <p:spTree>
-      <p:nvGrpSpPr>
-        <p:cNvPr id="1" name=""/>
-        <p:cNvGrpSpPr/>
-        <p:nvPr/>
-      </p:nvGrpSpPr>
-      <p:grpSpPr/>
-      <p:sp>
-        <p:nvSpPr>
-          <p:cNvPr id="2" name="Rectangle 1"/>
-          <p:cNvSpPr/>
-          <p:nvPr/>
-        </p:nvSpPr>
-        <p:spPr>
-          <a:xfrm>
-            <a:off x="0" y="0"/>
-            <a:ext cx="177800" cy="6858000"/>
-          </a:xfrm>
-          <a:prstGeom prst="rect">
-            <a:avLst/>
-          </a:prstGeom>
-          <a:solidFill>
-            <a:srgbClr val="0F7C86"/>
-          </a:solidFill>
-          <a:ln>
-            <a:noFill/>
-          </a:ln>
-          <a:effectLst/>
-        </p:spPr>
-        <p:style>
-          <a:lnRef idx="1">
-            <a:schemeClr val="accent1"/>
-          </a:lnRef>
-          <a:fillRef idx="3">
-            <a:schemeClr val="accent1"/>
-          </a:fillRef>
-          <a:effectRef idx="2">
-            <a:schemeClr val="accent1"/>
-          </a:effectRef>
-          <a:fontRef idx="minor">
-            <a:schemeClr val="lt1"/>
-          </a:fontRef>
-        </p:style>
-        <p:txBody>
-          <a:bodyPr rtlCol="0" anchor="ctr"/>
-          <a:lstStyle/>
-          <a:p>
-            <a:pPr algn="ctr"/>
-          </a:p>
-        </p:txBody>
-      </p:sp>
-      <p:sp>
-        <p:nvSpPr>
-          <p:cNvPr id="3" name="TextBox 2"/>
-          <p:cNvSpPr txBox="1"/>
-          <p:nvPr/>
-        </p:nvSpPr>
-        <p:spPr>
-          <a:xfrm>
-            <a:off x="1168400" y="1867198"/>
-            <a:ext cx="10307828" cy="481905"/>
-          </a:xfrm>
-          <a:prstGeom prst="rect">
-            <a:avLst/>
-          </a:prstGeom>
-          <a:noFill/>
-        </p:spPr>
-        <p:txBody>
-          <a:bodyPr wrap="square" lIns="0" rIns="0" tIns="0" bIns="0" anchor="t">
-            <a:noAutofit/>
-          </a:bodyPr>
-          <a:lstStyle/>
-          <a:p>
-            <a:pPr algn="l">
-              <a:lnSpc>
-                <a:spcPct val="94000"/>
-              </a:lnSpc>
-            </a:pPr>
-            <a:r>
-              <a:rPr sz="3300" b="1" i="0">
-                <a:solidFill>
-                  <a:srgbClr val="1B2F4B"/>
-                </a:solidFill>
-                <a:latin typeface="Montserrat"/>
-              </a:rPr>
-              <a:t>Cinco mensagens para levar</a:t>
-            </a:r>
-          </a:p>
-        </p:txBody>
-      </p:sp>
-      <p:sp>
-        <p:nvSpPr>
-          <p:cNvPr id="4" name="TextBox 3"/>
-          <p:cNvSpPr txBox="1"/>
-          <p:nvPr/>
-        </p:nvSpPr>
-        <p:spPr>
-          <a:xfrm>
-            <a:off x="1168400" y="2628503"/>
-            <a:ext cx="10307828" cy="2171700"/>
-          </a:xfrm>
-          <a:prstGeom prst="rect">
-            <a:avLst/>
-          </a:prstGeom>
-          <a:noFill/>
-        </p:spPr>
-        <p:txBody>
-          <a:bodyPr wrap="square" lIns="0" rIns="0" tIns="0" bIns="0" anchor="t">
-            <a:noAutofit/>
-          </a:bodyPr>
-          <a:lstStyle/>
-          <a:p>
-            <a:pPr algn="l" marL="279400" indent="-279400">
-              <a:lnSpc>
-                <a:spcPct val="123000"/>
-              </a:lnSpc>
-              <a:buAutoNum type="arabicPeriod" startAt="1"/>
-            </a:pPr>
-            <a:r>
-              <a:rPr sz="1900" b="0" i="0">
-                <a:solidFill>
-                  <a:srgbClr val="2E3A4A"/>
-                </a:solidFill>
-                <a:latin typeface="Montserrat"/>
-              </a:rPr>
-              <a:t>TEA é heterogêneo: </a:t>
-            </a:r>
-            <a:r>
-              <a:rPr sz="1900" b="1" i="0">
-                <a:solidFill>
-                  <a:srgbClr val="2E3A4A"/>
-                </a:solidFill>
-                <a:latin typeface="Montserrat"/>
-              </a:rPr>
-              <a:t>o diagnóstico não define o plano</a:t>
-            </a:r>
-          </a:p>
-          <a:p>
-            <a:pPr algn="l" marL="279400" indent="-279400">
-              <a:lnSpc>
-                <a:spcPct val="123000"/>
-              </a:lnSpc>
-              <a:buAutoNum type="arabicPeriod" startAt="1"/>
-            </a:pPr>
-            <a:r>
-              <a:rPr sz="1900" b="1" i="0">
-                <a:solidFill>
-                  <a:srgbClr val="2E3A4A"/>
-                </a:solidFill>
-                <a:latin typeface="Montserrat"/>
-              </a:rPr>
-              <a:t>Topografia descreve; função explica</a:t>
-            </a:r>
-          </a:p>
-          <a:p>
-            <a:pPr algn="l" marL="279400" indent="-279400">
-              <a:lnSpc>
-                <a:spcPct val="123000"/>
-              </a:lnSpc>
-              <a:buAutoNum type="arabicPeriod" startAt="1"/>
-            </a:pPr>
-            <a:r>
-              <a:rPr sz="1900" b="1" i="0">
-                <a:solidFill>
-                  <a:srgbClr val="2E3A4A"/>
-                </a:solidFill>
-                <a:latin typeface="Montserrat"/>
-              </a:rPr>
-              <a:t>Avaliar vem antes de intervir</a:t>
-            </a:r>
-          </a:p>
-          <a:p>
-            <a:pPr algn="l" marL="279400" indent="-279400">
-              <a:lnSpc>
-                <a:spcPct val="123000"/>
-              </a:lnSpc>
-              <a:buAutoNum type="arabicPeriod" startAt="1"/>
-            </a:pPr>
-            <a:r>
-              <a:rPr sz="1900" b="0" i="0">
-                <a:solidFill>
-                  <a:srgbClr val="2E3A4A"/>
-                </a:solidFill>
-                <a:latin typeface="Montserrat"/>
-              </a:rPr>
-              <a:t>Bons objetivos ampliam comunicação, participação, autonomia e qualidade de vida</a:t>
-            </a:r>
-          </a:p>
-          <a:p>
-            <a:pPr algn="l" marL="279400" indent="-279400">
-              <a:lnSpc>
-                <a:spcPct val="123000"/>
-              </a:lnSpc>
-              <a:buAutoNum type="arabicPeriod" startAt="1"/>
-            </a:pPr>
-            <a:r>
-              <a:rPr sz="1900" b="0" i="0">
-                <a:solidFill>
-                  <a:srgbClr val="2E3A4A"/>
-                </a:solidFill>
-                <a:latin typeface="Montserrat"/>
-              </a:rPr>
-              <a:t>Raciocínio clínico exige </a:t>
-            </a:r>
-            <a:r>
-              <a:rPr sz="1900" b="1" i="0">
-                <a:solidFill>
-                  <a:srgbClr val="2E3A4A"/>
-                </a:solidFill>
-                <a:latin typeface="Montserrat"/>
-              </a:rPr>
-              <a:t>evidência, individualização, ética e supervisão</a:t>
-            </a:r>
-          </a:p>
-        </p:txBody>
-      </p:sp>
-      <p:sp>
-        <p:nvSpPr>
-          <p:cNvPr id="5" name="TextBox 4"/>
-          <p:cNvSpPr txBox="1"/>
-          <p:nvPr/>
-        </p:nvSpPr>
-        <p:spPr>
-          <a:xfrm>
-            <a:off x="10820400" y="6343650"/>
-            <a:ext cx="784860" cy="184150"/>
-          </a:xfrm>
-          <a:prstGeom prst="rect">
-            <a:avLst/>
-          </a:prstGeom>
-          <a:noFill/>
-        </p:spPr>
-        <p:txBody>
-          <a:bodyPr wrap="square" lIns="0" rIns="0" tIns="0" bIns="0" anchor="t">
-            <a:noAutofit/>
-          </a:bodyPr>
-          <a:lstStyle/>
-          <a:p>
-            <a:pPr algn="r">
-              <a:lnSpc>
-                <a:spcPct val="98000"/>
-              </a:lnSpc>
-            </a:pPr>
-            <a:r>
-              <a:rPr sz="1200" b="0" i="0">
-                <a:solidFill>
-                  <a:srgbClr val="66717F"/>
-                </a:solidFill>
-                <a:latin typeface="Montserrat"/>
-              </a:rPr>
-              <a:t>38</a:t>
-            </a:r>
-          </a:p>
-        </p:txBody>
-      </p:sp>
-    </p:spTree>
-  </p:cSld>
-  <p:clrMapOvr>
-    <a:masterClrMapping/>
-  </p:clrMapOvr>
-</p:sld>
-</file>
-
-<file path=ppt/slides/slide49.xml><?xml version="1.0" encoding="utf-8"?>
 <p:sld xmlns:a="http://schemas.openxmlformats.org/drawingml/2006/main" xmlns:p="http://schemas.openxmlformats.org/presentationml/2006/main" xmlns:r="http://schemas.openxmlformats.org/officeDocument/2006/relationships">
   <p:cSld>
     <p:bg>
@@ -23593,285 +23364,7 @@
 </p:sld>
 </file>
 
-<file path=ppt/slides/slide5.xml><?xml version="1.0" encoding="utf-8"?>
-<p:sld xmlns:a="http://schemas.openxmlformats.org/drawingml/2006/main" xmlns:p="http://schemas.openxmlformats.org/presentationml/2006/main" xmlns:r="http://schemas.openxmlformats.org/officeDocument/2006/relationships">
-  <p:cSld>
-    <p:bg>
-      <p:bgPr>
-        <a:solidFill>
-          <a:srgbClr val="FCFCFB"/>
-        </a:solidFill>
-        <a:effectLst/>
-      </p:bgPr>
-    </p:bg>
-    <p:spTree>
-      <p:nvGrpSpPr>
-        <p:cNvPr id="1" name=""/>
-        <p:cNvGrpSpPr/>
-        <p:nvPr/>
-      </p:nvGrpSpPr>
-      <p:grpSpPr/>
-      <p:sp>
-        <p:nvSpPr>
-          <p:cNvPr id="2" name="Rectangle 1"/>
-          <p:cNvSpPr/>
-          <p:nvPr/>
-        </p:nvSpPr>
-        <p:spPr>
-          <a:xfrm>
-            <a:off x="0" y="0"/>
-            <a:ext cx="177800" cy="6858000"/>
-          </a:xfrm>
-          <a:prstGeom prst="rect">
-            <a:avLst/>
-          </a:prstGeom>
-          <a:solidFill>
-            <a:srgbClr val="0F7C86"/>
-          </a:solidFill>
-          <a:ln>
-            <a:noFill/>
-          </a:ln>
-          <a:effectLst/>
-        </p:spPr>
-        <p:style>
-          <a:lnRef idx="1">
-            <a:schemeClr val="accent1"/>
-          </a:lnRef>
-          <a:fillRef idx="3">
-            <a:schemeClr val="accent1"/>
-          </a:fillRef>
-          <a:effectRef idx="2">
-            <a:schemeClr val="accent1"/>
-          </a:effectRef>
-          <a:fontRef idx="minor">
-            <a:schemeClr val="lt1"/>
-          </a:fontRef>
-        </p:style>
-        <p:txBody>
-          <a:bodyPr rtlCol="0" anchor="ctr"/>
-          <a:lstStyle/>
-          <a:p>
-            <a:pPr algn="ctr"/>
-          </a:p>
-        </p:txBody>
-      </p:sp>
-      <p:sp>
-        <p:nvSpPr>
-          <p:cNvPr id="3" name="TextBox 2"/>
-          <p:cNvSpPr txBox="1"/>
-          <p:nvPr/>
-        </p:nvSpPr>
-        <p:spPr>
-          <a:xfrm>
-            <a:off x="1168400" y="2165648"/>
-            <a:ext cx="10307828" cy="481905"/>
-          </a:xfrm>
-          <a:prstGeom prst="rect">
-            <a:avLst/>
-          </a:prstGeom>
-          <a:noFill/>
-        </p:spPr>
-        <p:txBody>
-          <a:bodyPr wrap="square" lIns="0" rIns="0" tIns="0" bIns="0" anchor="t">
-            <a:noAutofit/>
-          </a:bodyPr>
-          <a:lstStyle/>
-          <a:p>
-            <a:pPr algn="l">
-              <a:lnSpc>
-                <a:spcPct val="94000"/>
-              </a:lnSpc>
-            </a:pPr>
-            <a:r>
-              <a:rPr sz="3300" b="1" i="0">
-                <a:solidFill>
-                  <a:srgbClr val="1B2F4B"/>
-                </a:solidFill>
-                <a:latin typeface="Montserrat"/>
-              </a:rPr>
-              <a:t>Combinados</a:t>
-            </a:r>
-          </a:p>
-        </p:txBody>
-      </p:sp>
-      <p:sp>
-        <p:nvSpPr>
-          <p:cNvPr id="4" name="TextBox 3"/>
-          <p:cNvSpPr txBox="1"/>
-          <p:nvPr/>
-        </p:nvSpPr>
-        <p:spPr>
-          <a:xfrm>
-            <a:off x="1168400" y="2977753"/>
-            <a:ext cx="10307828" cy="1524000"/>
-          </a:xfrm>
-          <a:prstGeom prst="rect">
-            <a:avLst/>
-          </a:prstGeom>
-          <a:noFill/>
-        </p:spPr>
-        <p:txBody>
-          <a:bodyPr wrap="square" lIns="0" rIns="0" tIns="0" bIns="0" anchor="t">
-            <a:noAutofit/>
-          </a:bodyPr>
-          <a:lstStyle/>
-          <a:p>
-            <a:pPr algn="l" marL="279400" indent="-279400">
-              <a:lnSpc>
-                <a:spcPct val="123000"/>
-              </a:lnSpc>
-              <a:buChar char="•"/>
-            </a:pPr>
-            <a:r>
-              <a:rPr sz="2000" b="0" i="0">
-                <a:solidFill>
-                  <a:srgbClr val="2E3A4A"/>
-                </a:solidFill>
-                <a:latin typeface="Montserrat"/>
-              </a:rPr>
-              <a:t>Perguntas são bem-vindas a qualquer momento</a:t>
-            </a:r>
-          </a:p>
-          <a:p>
-            <a:pPr algn="l" marL="279400" indent="-279400">
-              <a:lnSpc>
-                <a:spcPct val="123000"/>
-              </a:lnSpc>
-              <a:buChar char="•"/>
-            </a:pPr>
-            <a:r>
-              <a:rPr sz="2000" b="0" i="0">
-                <a:solidFill>
-                  <a:srgbClr val="2E3A4A"/>
-                </a:solidFill>
-                <a:latin typeface="Montserrat"/>
-              </a:rPr>
-              <a:t>Todos os casos são fictícios</a:t>
-            </a:r>
-          </a:p>
-          <a:p>
-            <a:pPr algn="l" marL="279400" indent="-279400">
-              <a:lnSpc>
-                <a:spcPct val="123000"/>
-              </a:lnSpc>
-              <a:buChar char="•"/>
-            </a:pPr>
-            <a:r>
-              <a:rPr sz="2000" b="0" i="0">
-                <a:solidFill>
-                  <a:srgbClr val="2E3A4A"/>
-                </a:solidFill>
-                <a:latin typeface="Montserrat"/>
-              </a:rPr>
-              <a:t>Não vamos discutir casos reais</a:t>
-            </a:r>
-          </a:p>
-          <a:p>
-            <a:pPr algn="l" marL="279400" indent="-279400">
-              <a:lnSpc>
-                <a:spcPct val="123000"/>
-              </a:lnSpc>
-              <a:buChar char="•"/>
-            </a:pPr>
-            <a:r>
-              <a:rPr sz="2000" b="0" i="0">
-                <a:solidFill>
-                  <a:srgbClr val="2E3A4A"/>
-                </a:solidFill>
-                <a:latin typeface="Montserrat"/>
-              </a:rPr>
-              <a:t>Vamos usar “pessoa autista”, respeitando preferências individuais</a:t>
-            </a:r>
-          </a:p>
-        </p:txBody>
-      </p:sp>
-      <p:sp>
-        <p:nvSpPr>
-          <p:cNvPr id="5" name="TextBox 4"/>
-          <p:cNvSpPr txBox="1"/>
-          <p:nvPr/>
-        </p:nvSpPr>
-        <p:spPr>
-          <a:xfrm>
-            <a:off x="1168400" y="6343650"/>
-            <a:ext cx="9156700" cy="184150"/>
-          </a:xfrm>
-          <a:prstGeom prst="rect">
-            <a:avLst/>
-          </a:prstGeom>
-          <a:noFill/>
-        </p:spPr>
-        <p:txBody>
-          <a:bodyPr wrap="square" lIns="0" rIns="0" tIns="0" bIns="0" anchor="t">
-            <a:noAutofit/>
-          </a:bodyPr>
-          <a:lstStyle/>
-          <a:p>
-            <a:pPr algn="l">
-              <a:lnSpc>
-                <a:spcPct val="98000"/>
-              </a:lnSpc>
-            </a:pPr>
-            <a:r>
-              <a:rPr sz="1200" b="0" i="0">
-                <a:solidFill>
-                  <a:srgbClr val="66717F"/>
-                </a:solidFill>
-                <a:latin typeface="Montserrat"/>
-              </a:rPr>
-              <a:t>Bottema-Beutel et al. (2021)</a:t>
-            </a:r>
-          </a:p>
-        </p:txBody>
-      </p:sp>
-      <p:sp>
-        <p:nvSpPr>
-          <p:cNvPr id="6" name="TextBox 5"/>
-          <p:cNvSpPr txBox="1"/>
-          <p:nvPr/>
-        </p:nvSpPr>
-        <p:spPr>
-          <a:xfrm>
-            <a:off x="10820400" y="6343650"/>
-            <a:ext cx="784860" cy="184150"/>
-          </a:xfrm>
-          <a:prstGeom prst="rect">
-            <a:avLst/>
-          </a:prstGeom>
-          <a:noFill/>
-        </p:spPr>
-        <p:txBody>
-          <a:bodyPr wrap="square" lIns="0" rIns="0" tIns="0" bIns="0" anchor="t">
-            <a:noAutofit/>
-          </a:bodyPr>
-          <a:lstStyle/>
-          <a:p>
-            <a:pPr algn="r">
-              <a:lnSpc>
-                <a:spcPct val="98000"/>
-              </a:lnSpc>
-            </a:pPr>
-            <a:r>
-              <a:rPr sz="1200" b="0" i="0">
-                <a:solidFill>
-                  <a:srgbClr val="66717F"/>
-                </a:solidFill>
-                <a:latin typeface="Montserrat"/>
-              </a:rPr>
-              <a:t>5</a:t>
-            </a:r>
-          </a:p>
-        </p:txBody>
-      </p:sp>
-    </p:spTree>
-  </p:cSld>
-  <p:clrMapOvr>
-    <a:masterClrMapping/>
-  </p:clrMapOvr>
-</p:sld>
-</file>
-
-<file path=ppt/slides/slide50.xml><?xml version="1.0" encoding="utf-8"?>
+<file path=ppt/slides/slide49.xml><?xml version="1.0" encoding="utf-8"?>
 <p:sld xmlns:a="http://schemas.openxmlformats.org/drawingml/2006/main" xmlns:p="http://schemas.openxmlformats.org/presentationml/2006/main" xmlns:r="http://schemas.openxmlformats.org/officeDocument/2006/relationships">
   <p:cSld>
     <p:bg>
@@ -24476,7 +23969,285 @@
 </p:sld>
 </file>
 
-<file path=ppt/slides/slide51.xml><?xml version="1.0" encoding="utf-8"?>
+<file path=ppt/slides/slide5.xml><?xml version="1.0" encoding="utf-8"?>
+<p:sld xmlns:a="http://schemas.openxmlformats.org/drawingml/2006/main" xmlns:p="http://schemas.openxmlformats.org/presentationml/2006/main" xmlns:r="http://schemas.openxmlformats.org/officeDocument/2006/relationships">
+  <p:cSld>
+    <p:bg>
+      <p:bgPr>
+        <a:solidFill>
+          <a:srgbClr val="FCFCFB"/>
+        </a:solidFill>
+        <a:effectLst/>
+      </p:bgPr>
+    </p:bg>
+    <p:spTree>
+      <p:nvGrpSpPr>
+        <p:cNvPr id="1" name=""/>
+        <p:cNvGrpSpPr/>
+        <p:nvPr/>
+      </p:nvGrpSpPr>
+      <p:grpSpPr/>
+      <p:sp>
+        <p:nvSpPr>
+          <p:cNvPr id="2" name="Rectangle 1"/>
+          <p:cNvSpPr/>
+          <p:nvPr/>
+        </p:nvSpPr>
+        <p:spPr>
+          <a:xfrm>
+            <a:off x="0" y="0"/>
+            <a:ext cx="177800" cy="6858000"/>
+          </a:xfrm>
+          <a:prstGeom prst="rect">
+            <a:avLst/>
+          </a:prstGeom>
+          <a:solidFill>
+            <a:srgbClr val="0F7C86"/>
+          </a:solidFill>
+          <a:ln>
+            <a:noFill/>
+          </a:ln>
+          <a:effectLst/>
+        </p:spPr>
+        <p:style>
+          <a:lnRef idx="1">
+            <a:schemeClr val="accent1"/>
+          </a:lnRef>
+          <a:fillRef idx="3">
+            <a:schemeClr val="accent1"/>
+          </a:fillRef>
+          <a:effectRef idx="2">
+            <a:schemeClr val="accent1"/>
+          </a:effectRef>
+          <a:fontRef idx="minor">
+            <a:schemeClr val="lt1"/>
+          </a:fontRef>
+        </p:style>
+        <p:txBody>
+          <a:bodyPr rtlCol="0" anchor="ctr"/>
+          <a:lstStyle/>
+          <a:p>
+            <a:pPr algn="ctr"/>
+          </a:p>
+        </p:txBody>
+      </p:sp>
+      <p:sp>
+        <p:nvSpPr>
+          <p:cNvPr id="3" name="TextBox 2"/>
+          <p:cNvSpPr txBox="1"/>
+          <p:nvPr/>
+        </p:nvSpPr>
+        <p:spPr>
+          <a:xfrm>
+            <a:off x="1168400" y="2165648"/>
+            <a:ext cx="10307828" cy="481905"/>
+          </a:xfrm>
+          <a:prstGeom prst="rect">
+            <a:avLst/>
+          </a:prstGeom>
+          <a:noFill/>
+        </p:spPr>
+        <p:txBody>
+          <a:bodyPr wrap="square" lIns="0" rIns="0" tIns="0" bIns="0" anchor="t">
+            <a:noAutofit/>
+          </a:bodyPr>
+          <a:lstStyle/>
+          <a:p>
+            <a:pPr algn="l">
+              <a:lnSpc>
+                <a:spcPct val="94000"/>
+              </a:lnSpc>
+            </a:pPr>
+            <a:r>
+              <a:rPr sz="3300" b="1" i="0">
+                <a:solidFill>
+                  <a:srgbClr val="1B2F4B"/>
+                </a:solidFill>
+                <a:latin typeface="Montserrat"/>
+              </a:rPr>
+              <a:t>Combinados</a:t>
+            </a:r>
+          </a:p>
+        </p:txBody>
+      </p:sp>
+      <p:sp>
+        <p:nvSpPr>
+          <p:cNvPr id="4" name="TextBox 3"/>
+          <p:cNvSpPr txBox="1"/>
+          <p:nvPr/>
+        </p:nvSpPr>
+        <p:spPr>
+          <a:xfrm>
+            <a:off x="1168400" y="2977753"/>
+            <a:ext cx="10307828" cy="1524000"/>
+          </a:xfrm>
+          <a:prstGeom prst="rect">
+            <a:avLst/>
+          </a:prstGeom>
+          <a:noFill/>
+        </p:spPr>
+        <p:txBody>
+          <a:bodyPr wrap="square" lIns="0" rIns="0" tIns="0" bIns="0" anchor="t">
+            <a:noAutofit/>
+          </a:bodyPr>
+          <a:lstStyle/>
+          <a:p>
+            <a:pPr algn="l" marL="279400" indent="-279400">
+              <a:lnSpc>
+                <a:spcPct val="123000"/>
+              </a:lnSpc>
+              <a:buChar char="•"/>
+            </a:pPr>
+            <a:r>
+              <a:rPr sz="2000" b="0" i="0">
+                <a:solidFill>
+                  <a:srgbClr val="2E3A4A"/>
+                </a:solidFill>
+                <a:latin typeface="Montserrat"/>
+              </a:rPr>
+              <a:t>Perguntas são bem-vindas a qualquer momento</a:t>
+            </a:r>
+          </a:p>
+          <a:p>
+            <a:pPr algn="l" marL="279400" indent="-279400">
+              <a:lnSpc>
+                <a:spcPct val="123000"/>
+              </a:lnSpc>
+              <a:buChar char="•"/>
+            </a:pPr>
+            <a:r>
+              <a:rPr sz="2000" b="0" i="0">
+                <a:solidFill>
+                  <a:srgbClr val="2E3A4A"/>
+                </a:solidFill>
+                <a:latin typeface="Montserrat"/>
+              </a:rPr>
+              <a:t>Todos os casos são fictícios</a:t>
+            </a:r>
+          </a:p>
+          <a:p>
+            <a:pPr algn="l" marL="279400" indent="-279400">
+              <a:lnSpc>
+                <a:spcPct val="123000"/>
+              </a:lnSpc>
+              <a:buChar char="•"/>
+            </a:pPr>
+            <a:r>
+              <a:rPr sz="2000" b="0" i="0">
+                <a:solidFill>
+                  <a:srgbClr val="2E3A4A"/>
+                </a:solidFill>
+                <a:latin typeface="Montserrat"/>
+              </a:rPr>
+              <a:t>Não vamos discutir casos reais</a:t>
+            </a:r>
+          </a:p>
+          <a:p>
+            <a:pPr algn="l" marL="279400" indent="-279400">
+              <a:lnSpc>
+                <a:spcPct val="123000"/>
+              </a:lnSpc>
+              <a:buChar char="•"/>
+            </a:pPr>
+            <a:r>
+              <a:rPr sz="2000" b="0" i="0">
+                <a:solidFill>
+                  <a:srgbClr val="2E3A4A"/>
+                </a:solidFill>
+                <a:latin typeface="Montserrat"/>
+              </a:rPr>
+              <a:t>Vamos usar “pessoa autista”, respeitando preferências individuais</a:t>
+            </a:r>
+          </a:p>
+        </p:txBody>
+      </p:sp>
+      <p:sp>
+        <p:nvSpPr>
+          <p:cNvPr id="5" name="TextBox 4"/>
+          <p:cNvSpPr txBox="1"/>
+          <p:nvPr/>
+        </p:nvSpPr>
+        <p:spPr>
+          <a:xfrm>
+            <a:off x="1168400" y="6343650"/>
+            <a:ext cx="9156700" cy="184150"/>
+          </a:xfrm>
+          <a:prstGeom prst="rect">
+            <a:avLst/>
+          </a:prstGeom>
+          <a:noFill/>
+        </p:spPr>
+        <p:txBody>
+          <a:bodyPr wrap="square" lIns="0" rIns="0" tIns="0" bIns="0" anchor="t">
+            <a:noAutofit/>
+          </a:bodyPr>
+          <a:lstStyle/>
+          <a:p>
+            <a:pPr algn="l">
+              <a:lnSpc>
+                <a:spcPct val="98000"/>
+              </a:lnSpc>
+            </a:pPr>
+            <a:r>
+              <a:rPr sz="1200" b="0" i="0">
+                <a:solidFill>
+                  <a:srgbClr val="66717F"/>
+                </a:solidFill>
+                <a:latin typeface="Montserrat"/>
+              </a:rPr>
+              <a:t>Bottema-Beutel et al. (2021)</a:t>
+            </a:r>
+          </a:p>
+        </p:txBody>
+      </p:sp>
+      <p:sp>
+        <p:nvSpPr>
+          <p:cNvPr id="6" name="TextBox 5"/>
+          <p:cNvSpPr txBox="1"/>
+          <p:nvPr/>
+        </p:nvSpPr>
+        <p:spPr>
+          <a:xfrm>
+            <a:off x="10820400" y="6343650"/>
+            <a:ext cx="784860" cy="184150"/>
+          </a:xfrm>
+          <a:prstGeom prst="rect">
+            <a:avLst/>
+          </a:prstGeom>
+          <a:noFill/>
+        </p:spPr>
+        <p:txBody>
+          <a:bodyPr wrap="square" lIns="0" rIns="0" tIns="0" bIns="0" anchor="t">
+            <a:noAutofit/>
+          </a:bodyPr>
+          <a:lstStyle/>
+          <a:p>
+            <a:pPr algn="r">
+              <a:lnSpc>
+                <a:spcPct val="98000"/>
+              </a:lnSpc>
+            </a:pPr>
+            <a:r>
+              <a:rPr sz="1200" b="0" i="0">
+                <a:solidFill>
+                  <a:srgbClr val="66717F"/>
+                </a:solidFill>
+                <a:latin typeface="Montserrat"/>
+              </a:rPr>
+              <a:t>5</a:t>
+            </a:r>
+          </a:p>
+        </p:txBody>
+      </p:sp>
+    </p:spTree>
+  </p:cSld>
+  <p:clrMapOvr>
+    <a:masterClrMapping/>
+  </p:clrMapOvr>
+</p:sld>
+</file>
+
+<file path=ppt/slides/slide50.xml><?xml version="1.0" encoding="utf-8"?>
 <p:sld xmlns:a="http://schemas.openxmlformats.org/drawingml/2006/main" xmlns:p="http://schemas.openxmlformats.org/presentationml/2006/main" xmlns:r="http://schemas.openxmlformats.org/officeDocument/2006/relationships">
   <p:cSld>
     <p:bg>
@@ -24658,7 +24429,7 @@
 </p:sld>
 </file>
 
-<file path=ppt/slides/slide52.xml><?xml version="1.0" encoding="utf-8"?>
+<file path=ppt/slides/slide51.xml><?xml version="1.0" encoding="utf-8"?>
 <p:sld xmlns:a="http://schemas.openxmlformats.org/drawingml/2006/main" xmlns:p="http://schemas.openxmlformats.org/presentationml/2006/main" xmlns:r="http://schemas.openxmlformats.org/officeDocument/2006/relationships">
   <p:cSld>
     <p:bg>
@@ -25013,7 +24784,7 @@
 </p:sld>
 </file>
 
-<file path=ppt/slides/slide53.xml><?xml version="1.0" encoding="utf-8"?>
+<file path=ppt/slides/slide52.xml><?xml version="1.0" encoding="utf-8"?>
 <p:sld xmlns:a="http://schemas.openxmlformats.org/drawingml/2006/main" xmlns:p="http://schemas.openxmlformats.org/presentationml/2006/main" xmlns:r="http://schemas.openxmlformats.org/officeDocument/2006/relationships">
   <p:cSld>
     <p:bg>
@@ -25366,7 +25137,7 @@
 </p:sld>
 </file>
 
-<file path=ppt/slides/slide54.xml><?xml version="1.0" encoding="utf-8"?>
+<file path=ppt/slides/slide53.xml><?xml version="1.0" encoding="utf-8"?>
 <p:sld xmlns:a="http://schemas.openxmlformats.org/drawingml/2006/main" xmlns:p="http://schemas.openxmlformats.org/presentationml/2006/main" xmlns:r="http://schemas.openxmlformats.org/officeDocument/2006/relationships">
   <p:cSld>
     <p:bg>
@@ -25702,7 +25473,7 @@
                           </a:solidFill>
                           <a:latin typeface="Montserrat"/>
                         </a:rPr>
-                        <a:t>Fugir do barulho; fugir da conversa em grupo (medo de errar); as duas juntas. Ir para a biblioteca pode reforçar a saída</a:t>
+                        <a:t>Fugir do barulho; fugir da conversa em grupo (medo de errar); as duas juntas. Ir para a biblioteca pode reforçar (tornar mais provável) a saída</a:t>
                       </a:r>
                     </a:p>
                   </a:txBody>
@@ -25758,7 +25529,7 @@
                           </a:solidFill>
                           <a:latin typeface="Montserrat"/>
                         </a:rPr>
-                        <a:t>Alivia agora, mas pode reforçar a fuga e tirar chances de participar. Só serve como algo temporário, combinado com ela</a:t>
+                        <a:t>Alivia agora, mas pode reforçar a fuga (sair da situação) e tirar chances de participar. Só serve como algo temporário, combinado com ela</a:t>
                       </a:r>
                     </a:p>
                   </a:txBody>
@@ -25915,7 +25686,7 @@
 </p:sld>
 </file>
 
-<file path=ppt/slides/slide55.xml><?xml version="1.0" encoding="utf-8"?>
+<file path=ppt/slides/slide54.xml><?xml version="1.0" encoding="utf-8"?>
 <p:sld xmlns:a="http://schemas.openxmlformats.org/drawingml/2006/main" xmlns:p="http://schemas.openxmlformats.org/presentationml/2006/main" xmlns:r="http://schemas.openxmlformats.org/officeDocument/2006/relationships">
   <p:cSld>
     <p:bg>
@@ -26216,7 +25987,7 @@
 </p:sld>
 </file>
 
-<file path=ppt/slides/slide56.xml><?xml version="1.0" encoding="utf-8"?>
+<file path=ppt/slides/slide55.xml><?xml version="1.0" encoding="utf-8"?>
 <p:sld xmlns:a="http://schemas.openxmlformats.org/drawingml/2006/main" xmlns:p="http://schemas.openxmlformats.org/presentationml/2006/main" xmlns:r="http://schemas.openxmlformats.org/officeDocument/2006/relationships">
   <p:cSld>
     <p:bg>
@@ -26547,6 +26318,553 @@
                 <a:latin typeface="Montserrat"/>
               </a:rPr>
               <a:t>R2b</a:t>
+            </a:r>
+          </a:p>
+        </p:txBody>
+      </p:sp>
+    </p:spTree>
+  </p:cSld>
+  <p:clrMapOvr>
+    <a:masterClrMapping/>
+  </p:clrMapOvr>
+</p:sld>
+</file>
+
+<file path=ppt/slides/slide56.xml><?xml version="1.0" encoding="utf-8"?>
+<p:sld xmlns:a="http://schemas.openxmlformats.org/drawingml/2006/main" xmlns:p="http://schemas.openxmlformats.org/presentationml/2006/main" xmlns:r="http://schemas.openxmlformats.org/officeDocument/2006/relationships">
+  <p:cSld>
+    <p:bg>
+      <p:bgPr>
+        <a:solidFill>
+          <a:srgbClr val="FCFCFB"/>
+        </a:solidFill>
+        <a:effectLst/>
+      </p:bgPr>
+    </p:bg>
+    <p:spTree>
+      <p:nvGrpSpPr>
+        <p:cNvPr id="1" name=""/>
+        <p:cNvGrpSpPr/>
+        <p:nvPr/>
+      </p:nvGrpSpPr>
+      <p:grpSpPr/>
+      <p:sp>
+        <p:nvSpPr>
+          <p:cNvPr id="2" name="Rectangle 1"/>
+          <p:cNvSpPr/>
+          <p:nvPr/>
+        </p:nvSpPr>
+        <p:spPr>
+          <a:xfrm>
+            <a:off x="0" y="0"/>
+            <a:ext cx="177800" cy="6858000"/>
+          </a:xfrm>
+          <a:prstGeom prst="rect">
+            <a:avLst/>
+          </a:prstGeom>
+          <a:solidFill>
+            <a:srgbClr val="0F7C86"/>
+          </a:solidFill>
+          <a:ln>
+            <a:noFill/>
+          </a:ln>
+          <a:effectLst/>
+        </p:spPr>
+        <p:style>
+          <a:lnRef idx="1">
+            <a:schemeClr val="accent1"/>
+          </a:lnRef>
+          <a:fillRef idx="3">
+            <a:schemeClr val="accent1"/>
+          </a:fillRef>
+          <a:effectRef idx="2">
+            <a:schemeClr val="accent1"/>
+          </a:effectRef>
+          <a:fontRef idx="minor">
+            <a:schemeClr val="lt1"/>
+          </a:fontRef>
+        </p:style>
+        <p:txBody>
+          <a:bodyPr rtlCol="0" anchor="ctr"/>
+          <a:lstStyle/>
+          <a:p>
+            <a:pPr algn="ctr"/>
+          </a:p>
+        </p:txBody>
+      </p:sp>
+      <p:sp>
+        <p:nvSpPr>
+          <p:cNvPr id="3" name="TextBox 2"/>
+          <p:cNvSpPr txBox="1"/>
+          <p:nvPr/>
+        </p:nvSpPr>
+        <p:spPr>
+          <a:xfrm>
+            <a:off x="1168400" y="1143893"/>
+            <a:ext cx="10307828" cy="379710"/>
+          </a:xfrm>
+          <a:prstGeom prst="rect">
+            <a:avLst/>
+          </a:prstGeom>
+          <a:noFill/>
+        </p:spPr>
+        <p:txBody>
+          <a:bodyPr wrap="square" lIns="0" rIns="0" tIns="0" bIns="0" anchor="t">
+            <a:noAutofit/>
+          </a:bodyPr>
+          <a:lstStyle/>
+          <a:p>
+            <a:pPr algn="l">
+              <a:lnSpc>
+                <a:spcPct val="94000"/>
+              </a:lnSpc>
+            </a:pPr>
+            <a:r>
+              <a:rPr sz="2600" b="1" i="0">
+                <a:solidFill>
+                  <a:srgbClr val="1B2F4B"/>
+                </a:solidFill>
+                <a:latin typeface="Montserrat"/>
+              </a:rPr>
+              <a:t>Referências: TEA e neurodiversidade</a:t>
+            </a:r>
+          </a:p>
+        </p:txBody>
+      </p:sp>
+      <p:sp>
+        <p:nvSpPr>
+          <p:cNvPr id="4" name="TextBox 3"/>
+          <p:cNvSpPr txBox="1"/>
+          <p:nvPr/>
+        </p:nvSpPr>
+        <p:spPr>
+          <a:xfrm>
+            <a:off x="1168400" y="1637903"/>
+            <a:ext cx="10307828" cy="426641"/>
+          </a:xfrm>
+          <a:prstGeom prst="rect">
+            <a:avLst/>
+          </a:prstGeom>
+          <a:noFill/>
+        </p:spPr>
+        <p:txBody>
+          <a:bodyPr wrap="square" lIns="0" rIns="0" tIns="0" bIns="0" anchor="t">
+            <a:noAutofit/>
+          </a:bodyPr>
+          <a:lstStyle/>
+          <a:p>
+            <a:pPr algn="l">
+              <a:lnSpc>
+                <a:spcPct val="115000"/>
+              </a:lnSpc>
+            </a:pPr>
+            <a:r>
+              <a:rPr sz="1200" b="0" i="0">
+                <a:solidFill>
+                  <a:srgbClr val="2E3A4A"/>
+                </a:solidFill>
+                <a:latin typeface="Montserrat"/>
+              </a:rPr>
+              <a:t>American Psychiatric Association. (2022). </a:t>
+            </a:r>
+            <a:r>
+              <a:rPr sz="1200" b="0" i="1">
+                <a:solidFill>
+                  <a:srgbClr val="2E3A4A"/>
+                </a:solidFill>
+                <a:latin typeface="Montserrat"/>
+              </a:rPr>
+              <a:t>Diagnostic and statistical manual of mental disorders</a:t>
+            </a:r>
+            <a:r>
+              <a:rPr sz="1200" b="0" i="0">
+                <a:solidFill>
+                  <a:srgbClr val="2E3A4A"/>
+                </a:solidFill>
+                <a:latin typeface="Montserrat"/>
+              </a:rPr>
+              <a:t> (5th ed., text rev.; DSM-5-TR). American Psychiatric Publishing.</a:t>
+            </a:r>
+          </a:p>
+        </p:txBody>
+      </p:sp>
+      <p:sp>
+        <p:nvSpPr>
+          <p:cNvPr id="5" name="TextBox 4"/>
+          <p:cNvSpPr txBox="1"/>
+          <p:nvPr/>
+        </p:nvSpPr>
+        <p:spPr>
+          <a:xfrm>
+            <a:off x="1168400" y="2178844"/>
+            <a:ext cx="10307828" cy="426641"/>
+          </a:xfrm>
+          <a:prstGeom prst="rect">
+            <a:avLst/>
+          </a:prstGeom>
+          <a:noFill/>
+        </p:spPr>
+        <p:txBody>
+          <a:bodyPr wrap="square" lIns="0" rIns="0" tIns="0" bIns="0" anchor="t">
+            <a:noAutofit/>
+          </a:bodyPr>
+          <a:lstStyle/>
+          <a:p>
+            <a:pPr algn="l">
+              <a:lnSpc>
+                <a:spcPct val="115000"/>
+              </a:lnSpc>
+            </a:pPr>
+            <a:r>
+              <a:rPr sz="1200" b="0" i="0">
+                <a:solidFill>
+                  <a:srgbClr val="2E3A4A"/>
+                </a:solidFill>
+                <a:latin typeface="Montserrat"/>
+              </a:rPr>
+              <a:t>Bottema-Beutel, K., Kapp, S. K., Lester, J. N., Sasson, N. J., &amp; Hand, B. N. (2021). Avoiding ableist language: Suggestions for autism researchers. </a:t>
+            </a:r>
+            <a:r>
+              <a:rPr sz="1200" b="0" i="1">
+                <a:solidFill>
+                  <a:srgbClr val="2E3A4A"/>
+                </a:solidFill>
+                <a:latin typeface="Montserrat"/>
+              </a:rPr>
+              <a:t>Autism in Adulthood, 3</a:t>
+            </a:r>
+            <a:r>
+              <a:rPr sz="1200" b="0" i="0">
+                <a:solidFill>
+                  <a:srgbClr val="2E3A4A"/>
+                </a:solidFill>
+                <a:latin typeface="Montserrat"/>
+              </a:rPr>
+              <a:t>(1), 18–29. https://doi.org/10.1089/aut.2020.0014</a:t>
+            </a:r>
+          </a:p>
+        </p:txBody>
+      </p:sp>
+      <p:sp>
+        <p:nvSpPr>
+          <p:cNvPr id="6" name="TextBox 5"/>
+          <p:cNvSpPr txBox="1"/>
+          <p:nvPr/>
+        </p:nvSpPr>
+        <p:spPr>
+          <a:xfrm>
+            <a:off x="1168400" y="2719784"/>
+            <a:ext cx="10307828" cy="426641"/>
+          </a:xfrm>
+          <a:prstGeom prst="rect">
+            <a:avLst/>
+          </a:prstGeom>
+          <a:noFill/>
+        </p:spPr>
+        <p:txBody>
+          <a:bodyPr wrap="square" lIns="0" rIns="0" tIns="0" bIns="0" anchor="t">
+            <a:noAutofit/>
+          </a:bodyPr>
+          <a:lstStyle/>
+          <a:p>
+            <a:pPr algn="l">
+              <a:lnSpc>
+                <a:spcPct val="115000"/>
+              </a:lnSpc>
+            </a:pPr>
+            <a:r>
+              <a:rPr sz="1200" b="0" i="0">
+                <a:solidFill>
+                  <a:srgbClr val="2E3A4A"/>
+                </a:solidFill>
+                <a:latin typeface="Montserrat"/>
+              </a:rPr>
+              <a:t>Kapp, S. K., Gillespie-Lynch, K., Sherman, L. E., &amp; Hutman, T. (2013). Deficit, difference, or both? Autism and neurodiversity. </a:t>
+            </a:r>
+            <a:r>
+              <a:rPr sz="1200" b="0" i="1">
+                <a:solidFill>
+                  <a:srgbClr val="2E3A4A"/>
+                </a:solidFill>
+                <a:latin typeface="Montserrat"/>
+              </a:rPr>
+              <a:t>Developmental Psychology, 49</a:t>
+            </a:r>
+            <a:r>
+              <a:rPr sz="1200" b="0" i="0">
+                <a:solidFill>
+                  <a:srgbClr val="2E3A4A"/>
+                </a:solidFill>
+                <a:latin typeface="Montserrat"/>
+              </a:rPr>
+              <a:t>(1), 59–71. https://doi.org/10.1037/a0028353</a:t>
+            </a:r>
+          </a:p>
+        </p:txBody>
+      </p:sp>
+      <p:sp>
+        <p:nvSpPr>
+          <p:cNvPr id="7" name="TextBox 6"/>
+          <p:cNvSpPr txBox="1"/>
+          <p:nvPr/>
+        </p:nvSpPr>
+        <p:spPr>
+          <a:xfrm>
+            <a:off x="1168400" y="3260725"/>
+            <a:ext cx="10307828" cy="426641"/>
+          </a:xfrm>
+          <a:prstGeom prst="rect">
+            <a:avLst/>
+          </a:prstGeom>
+          <a:noFill/>
+        </p:spPr>
+        <p:txBody>
+          <a:bodyPr wrap="square" lIns="0" rIns="0" tIns="0" bIns="0" anchor="t">
+            <a:noAutofit/>
+          </a:bodyPr>
+          <a:lstStyle/>
+          <a:p>
+            <a:pPr algn="l">
+              <a:lnSpc>
+                <a:spcPct val="115000"/>
+              </a:lnSpc>
+            </a:pPr>
+            <a:r>
+              <a:rPr sz="1200" b="0" i="0">
+                <a:solidFill>
+                  <a:srgbClr val="2E3A4A"/>
+                </a:solidFill>
+                <a:latin typeface="Montserrat"/>
+              </a:rPr>
+              <a:t>Lord, C., Brugha, T. S., Charman, T., et al. (2020). Autism spectrum disorder. </a:t>
+            </a:r>
+            <a:r>
+              <a:rPr sz="1200" b="0" i="1">
+                <a:solidFill>
+                  <a:srgbClr val="2E3A4A"/>
+                </a:solidFill>
+                <a:latin typeface="Montserrat"/>
+              </a:rPr>
+              <a:t>Nature Reviews Disease Primers, 6</a:t>
+            </a:r>
+            <a:r>
+              <a:rPr sz="1200" b="0" i="0">
+                <a:solidFill>
+                  <a:srgbClr val="2E3A4A"/>
+                </a:solidFill>
+                <a:latin typeface="Montserrat"/>
+              </a:rPr>
+              <a:t>, 5. https://doi.org/10.1038/s41572-019-0138-4</a:t>
+            </a:r>
+          </a:p>
+        </p:txBody>
+      </p:sp>
+      <p:sp>
+        <p:nvSpPr>
+          <p:cNvPr id="8" name="TextBox 7"/>
+          <p:cNvSpPr txBox="1"/>
+          <p:nvPr/>
+        </p:nvSpPr>
+        <p:spPr>
+          <a:xfrm>
+            <a:off x="1168400" y="3801666"/>
+            <a:ext cx="10307828" cy="426641"/>
+          </a:xfrm>
+          <a:prstGeom prst="rect">
+            <a:avLst/>
+          </a:prstGeom>
+          <a:noFill/>
+        </p:spPr>
+        <p:txBody>
+          <a:bodyPr wrap="square" lIns="0" rIns="0" tIns="0" bIns="0" anchor="t">
+            <a:noAutofit/>
+          </a:bodyPr>
+          <a:lstStyle/>
+          <a:p>
+            <a:pPr algn="l">
+              <a:lnSpc>
+                <a:spcPct val="115000"/>
+              </a:lnSpc>
+            </a:pPr>
+            <a:r>
+              <a:rPr sz="1200" b="0" i="0">
+                <a:solidFill>
+                  <a:srgbClr val="2E3A4A"/>
+                </a:solidFill>
+                <a:latin typeface="Montserrat"/>
+              </a:rPr>
+              <a:t>Lord, C., Charman, T., Havdahl, A., et al. (2022). The Lancet Commission on the future of care and clinical research in autism. </a:t>
+            </a:r>
+            <a:r>
+              <a:rPr sz="1200" b="0" i="1">
+                <a:solidFill>
+                  <a:srgbClr val="2E3A4A"/>
+                </a:solidFill>
+                <a:latin typeface="Montserrat"/>
+              </a:rPr>
+              <a:t>The Lancet, 399</a:t>
+            </a:r>
+            <a:r>
+              <a:rPr sz="1200" b="0" i="0">
+                <a:solidFill>
+                  <a:srgbClr val="2E3A4A"/>
+                </a:solidFill>
+                <a:latin typeface="Montserrat"/>
+              </a:rPr>
+              <a:t>(10321), 271–334. https://doi.org/10.1016/S0140-6736(21)01541-5</a:t>
+            </a:r>
+          </a:p>
+        </p:txBody>
+      </p:sp>
+      <p:sp>
+        <p:nvSpPr>
+          <p:cNvPr id="9" name="TextBox 8"/>
+          <p:cNvSpPr txBox="1"/>
+          <p:nvPr/>
+        </p:nvSpPr>
+        <p:spPr>
+          <a:xfrm>
+            <a:off x="1168400" y="4342606"/>
+            <a:ext cx="10307828" cy="639961"/>
+          </a:xfrm>
+          <a:prstGeom prst="rect">
+            <a:avLst/>
+          </a:prstGeom>
+          <a:noFill/>
+        </p:spPr>
+        <p:txBody>
+          <a:bodyPr wrap="square" lIns="0" rIns="0" tIns="0" bIns="0" anchor="t">
+            <a:noAutofit/>
+          </a:bodyPr>
+          <a:lstStyle/>
+          <a:p>
+            <a:pPr algn="l">
+              <a:lnSpc>
+                <a:spcPct val="115000"/>
+              </a:lnSpc>
+            </a:pPr>
+            <a:r>
+              <a:rPr sz="1200" b="0" i="0">
+                <a:solidFill>
+                  <a:srgbClr val="2E3A4A"/>
+                </a:solidFill>
+                <a:latin typeface="Montserrat"/>
+              </a:rPr>
+              <a:t>Shaw, K. A., Williams, S., Patrick, M. E., et al. (2025). Prevalence and early identification of autism spectrum disorder among children aged 4 and 8 years — ADDM Network, 16 sites, United States, 2022. </a:t>
+            </a:r>
+            <a:r>
+              <a:rPr sz="1200" b="0" i="1">
+                <a:solidFill>
+                  <a:srgbClr val="2E3A4A"/>
+                </a:solidFill>
+                <a:latin typeface="Montserrat"/>
+              </a:rPr>
+              <a:t>MMWR Surveillance Summaries, 74</a:t>
+            </a:r>
+            <a:r>
+              <a:rPr sz="1200" b="0" i="0">
+                <a:solidFill>
+                  <a:srgbClr val="2E3A4A"/>
+                </a:solidFill>
+                <a:latin typeface="Montserrat"/>
+              </a:rPr>
+              <a:t>(SS-2), 1–22. https://doi.org/10.15585/mmwr.ss7402a1</a:t>
+            </a:r>
+          </a:p>
+        </p:txBody>
+      </p:sp>
+      <p:sp>
+        <p:nvSpPr>
+          <p:cNvPr id="10" name="TextBox 9"/>
+          <p:cNvSpPr txBox="1"/>
+          <p:nvPr/>
+        </p:nvSpPr>
+        <p:spPr>
+          <a:xfrm>
+            <a:off x="1168400" y="5096867"/>
+            <a:ext cx="10307828" cy="426641"/>
+          </a:xfrm>
+          <a:prstGeom prst="rect">
+            <a:avLst/>
+          </a:prstGeom>
+          <a:noFill/>
+        </p:spPr>
+        <p:txBody>
+          <a:bodyPr wrap="square" lIns="0" rIns="0" tIns="0" bIns="0" anchor="t">
+            <a:noAutofit/>
+          </a:bodyPr>
+          <a:lstStyle/>
+          <a:p>
+            <a:pPr algn="l">
+              <a:lnSpc>
+                <a:spcPct val="115000"/>
+              </a:lnSpc>
+            </a:pPr>
+            <a:r>
+              <a:rPr sz="1200" b="0" i="0">
+                <a:solidFill>
+                  <a:srgbClr val="2E3A4A"/>
+                </a:solidFill>
+                <a:latin typeface="Montserrat"/>
+              </a:rPr>
+              <a:t>Zeidan, J., Fombonne, E., Scorah, J., et al. (2022). Global prevalence of autism: A systematic review update. </a:t>
+            </a:r>
+            <a:r>
+              <a:rPr sz="1200" b="0" i="1">
+                <a:solidFill>
+                  <a:srgbClr val="2E3A4A"/>
+                </a:solidFill>
+                <a:latin typeface="Montserrat"/>
+              </a:rPr>
+              <a:t>Autism Research, 15</a:t>
+            </a:r>
+            <a:r>
+              <a:rPr sz="1200" b="0" i="0">
+                <a:solidFill>
+                  <a:srgbClr val="2E3A4A"/>
+                </a:solidFill>
+                <a:latin typeface="Montserrat"/>
+              </a:rPr>
+              <a:t>(5), 778–790. https://doi.org/10.1002/aur.2696</a:t>
+            </a:r>
+          </a:p>
+        </p:txBody>
+      </p:sp>
+      <p:sp>
+        <p:nvSpPr>
+          <p:cNvPr id="11" name="TextBox 10"/>
+          <p:cNvSpPr txBox="1"/>
+          <p:nvPr/>
+        </p:nvSpPr>
+        <p:spPr>
+          <a:xfrm>
+            <a:off x="10820400" y="6343650"/>
+            <a:ext cx="784860" cy="184150"/>
+          </a:xfrm>
+          <a:prstGeom prst="rect">
+            <a:avLst/>
+          </a:prstGeom>
+          <a:noFill/>
+        </p:spPr>
+        <p:txBody>
+          <a:bodyPr wrap="square" lIns="0" rIns="0" tIns="0" bIns="0" anchor="t">
+            <a:noAutofit/>
+          </a:bodyPr>
+          <a:lstStyle/>
+          <a:p>
+            <a:pPr algn="r">
+              <a:lnSpc>
+                <a:spcPct val="98000"/>
+              </a:lnSpc>
+            </a:pPr>
+            <a:r>
+              <a:rPr sz="1200" b="0" i="0">
+                <a:solidFill>
+                  <a:srgbClr val="66717F"/>
+                </a:solidFill>
+                <a:latin typeface="Montserrat"/>
+              </a:rPr>
+              <a:t>A1</a:t>
             </a:r>
           </a:p>
         </p:txBody>
@@ -26629,7 +26947,7 @@
         </p:nvSpPr>
         <p:spPr>
           <a:xfrm>
-            <a:off x="1168400" y="1143893"/>
+            <a:off x="1168400" y="1250553"/>
             <a:ext cx="10307828" cy="379710"/>
           </a:xfrm>
           <a:prstGeom prst="rect">
@@ -26655,7 +26973,7 @@
                 </a:solidFill>
                 <a:latin typeface="Montserrat"/>
               </a:rPr>
-              <a:t>Referências: TEA e neurodiversidade</a:t>
+              <a:t>Referências: ABA e análise funcional</a:t>
             </a:r>
           </a:p>
         </p:txBody>
@@ -26668,7 +26986,7 @@
         </p:nvSpPr>
         <p:spPr>
           <a:xfrm>
-            <a:off x="1168400" y="1637903"/>
+            <a:off x="1168400" y="1744563"/>
             <a:ext cx="10307828" cy="426641"/>
           </a:xfrm>
           <a:prstGeom prst="rect">
@@ -26694,7 +27012,7 @@
                 </a:solidFill>
                 <a:latin typeface="Montserrat"/>
               </a:rPr>
-              <a:t>American Psychiatric Association. (2022). </a:t>
+              <a:t>Baer, D. M., Wolf, M. M., &amp; Risley, T. R. (1968). Some current dimensions of applied behavior analysis. </a:t>
             </a:r>
             <a:r>
               <a:rPr sz="1200" b="0" i="1">
@@ -26703,7 +27021,7 @@
                 </a:solidFill>
                 <a:latin typeface="Montserrat"/>
               </a:rPr>
-              <a:t>Diagnostic and statistical manual of mental disorders</a:t>
+              <a:t>Journal of Applied Behavior Analysis, 1</a:t>
             </a:r>
             <a:r>
               <a:rPr sz="1200" b="0" i="0">
@@ -26712,7 +27030,7 @@
                 </a:solidFill>
                 <a:latin typeface="Montserrat"/>
               </a:rPr>
-              <a:t> (5th ed., text rev.; DSM-5-TR). American Psychiatric Publishing.</a:t>
+              <a:t>(1), 91–97. https://doi.org/10.1901/jaba.1968.1-91</a:t>
             </a:r>
           </a:p>
         </p:txBody>
@@ -26725,7 +27043,64 @@
         </p:nvSpPr>
         <p:spPr>
           <a:xfrm>
-            <a:off x="1168400" y="2178844"/>
+            <a:off x="1168400" y="2285504"/>
+            <a:ext cx="10307828" cy="213320"/>
+          </a:xfrm>
+          <a:prstGeom prst="rect">
+            <a:avLst/>
+          </a:prstGeom>
+          <a:noFill/>
+        </p:spPr>
+        <p:txBody>
+          <a:bodyPr wrap="square" lIns="0" rIns="0" tIns="0" bIns="0" anchor="t">
+            <a:noAutofit/>
+          </a:bodyPr>
+          <a:lstStyle/>
+          <a:p>
+            <a:pPr algn="l">
+              <a:lnSpc>
+                <a:spcPct val="115000"/>
+              </a:lnSpc>
+            </a:pPr>
+            <a:r>
+              <a:rPr sz="1200" b="0" i="0">
+                <a:solidFill>
+                  <a:srgbClr val="2E3A4A"/>
+                </a:solidFill>
+                <a:latin typeface="Montserrat"/>
+              </a:rPr>
+              <a:t>Cooper, J. O., Heron, T. E., &amp; Heward, W. L. (2020). </a:t>
+            </a:r>
+            <a:r>
+              <a:rPr sz="1200" b="0" i="1">
+                <a:solidFill>
+                  <a:srgbClr val="2E3A4A"/>
+                </a:solidFill>
+                <a:latin typeface="Montserrat"/>
+              </a:rPr>
+              <a:t>Applied behavior analysis</a:t>
+            </a:r>
+            <a:r>
+              <a:rPr sz="1200" b="0" i="0">
+                <a:solidFill>
+                  <a:srgbClr val="2E3A4A"/>
+                </a:solidFill>
+                <a:latin typeface="Montserrat"/>
+              </a:rPr>
+              <a:t> (3rd ed.). Pearson.</a:t>
+            </a:r>
+          </a:p>
+        </p:txBody>
+      </p:sp>
+      <p:sp>
+        <p:nvSpPr>
+          <p:cNvPr id="6" name="TextBox 5"/>
+          <p:cNvSpPr txBox="1"/>
+          <p:nvPr/>
+        </p:nvSpPr>
+        <p:spPr>
+          <a:xfrm>
+            <a:off x="1168400" y="2613124"/>
             <a:ext cx="10307828" cy="426641"/>
           </a:xfrm>
           <a:prstGeom prst="rect">
@@ -26751,7 +27126,7 @@
                 </a:solidFill>
                 <a:latin typeface="Montserrat"/>
               </a:rPr>
-              <a:t>Bottema-Beutel, K., Kapp, S. K., Lester, J. N., Sasson, N. J., &amp; Hand, B. N. (2021). Avoiding ableist language: Suggestions for autism researchers. </a:t>
+              <a:t>Hanley, G. P. (2012). Functional assessment of problem behavior: Dispelling myths, overcoming implementation obstacles, and developing new lore. </a:t>
             </a:r>
             <a:r>
               <a:rPr sz="1200" b="0" i="1">
@@ -26760,7 +27135,7 @@
                 </a:solidFill>
                 <a:latin typeface="Montserrat"/>
               </a:rPr>
-              <a:t>Autism in Adulthood, 3</a:t>
+              <a:t>Behavior Analysis in Practice, 5</a:t>
             </a:r>
             <a:r>
               <a:rPr sz="1200" b="0" i="0">
@@ -26769,20 +27144,20 @@
                 </a:solidFill>
                 <a:latin typeface="Montserrat"/>
               </a:rPr>
-              <a:t>(1), 18–29. https://doi.org/10.1089/aut.2020.0014</a:t>
-            </a:r>
-          </a:p>
-        </p:txBody>
-      </p:sp>
-      <p:sp>
-        <p:nvSpPr>
-          <p:cNvPr id="6" name="TextBox 5"/>
-          <p:cNvSpPr txBox="1"/>
-          <p:nvPr/>
-        </p:nvSpPr>
-        <p:spPr>
-          <a:xfrm>
-            <a:off x="1168400" y="2719784"/>
+              <a:t>(1), 54–72. https://doi.org/10.1007/BF03391818</a:t>
+            </a:r>
+          </a:p>
+        </p:txBody>
+      </p:sp>
+      <p:sp>
+        <p:nvSpPr>
+          <p:cNvPr id="7" name="TextBox 6"/>
+          <p:cNvSpPr txBox="1"/>
+          <p:nvPr/>
+        </p:nvSpPr>
+        <p:spPr>
+          <a:xfrm>
+            <a:off x="1168400" y="3154065"/>
             <a:ext cx="10307828" cy="426641"/>
           </a:xfrm>
           <a:prstGeom prst="rect">
@@ -26808,7 +27183,7 @@
                 </a:solidFill>
                 <a:latin typeface="Montserrat"/>
               </a:rPr>
-              <a:t>Kapp, S. K., Gillespie-Lynch, K., Sherman, L. E., &amp; Hutman, T. (2013). Deficit, difference, or both? Autism and neurodiversity. </a:t>
+              <a:t>Hanley, G. P., Iwata, B. A., &amp; McCord, B. E. (2003). Functional analysis of problem behavior: A review. </a:t>
             </a:r>
             <a:r>
               <a:rPr sz="1200" b="0" i="1">
@@ -26817,7 +27192,7 @@
                 </a:solidFill>
                 <a:latin typeface="Montserrat"/>
               </a:rPr>
-              <a:t>Developmental Psychology, 49</a:t>
+              <a:t>Journal of Applied Behavior Analysis, 36</a:t>
             </a:r>
             <a:r>
               <a:rPr sz="1200" b="0" i="0">
@@ -26826,20 +27201,77 @@
                 </a:solidFill>
                 <a:latin typeface="Montserrat"/>
               </a:rPr>
-              <a:t>(1), 59–71. https://doi.org/10.1037/a0028353</a:t>
-            </a:r>
-          </a:p>
-        </p:txBody>
-      </p:sp>
-      <p:sp>
-        <p:nvSpPr>
-          <p:cNvPr id="7" name="TextBox 6"/>
-          <p:cNvSpPr txBox="1"/>
-          <p:nvPr/>
-        </p:nvSpPr>
-        <p:spPr>
-          <a:xfrm>
-            <a:off x="1168400" y="3260725"/>
+              <a:t>(2), 147–185. https://doi.org/10.1901/jaba.2003.36-147</a:t>
+            </a:r>
+          </a:p>
+        </p:txBody>
+      </p:sp>
+      <p:sp>
+        <p:nvSpPr>
+          <p:cNvPr id="8" name="TextBox 7"/>
+          <p:cNvSpPr txBox="1"/>
+          <p:nvPr/>
+        </p:nvSpPr>
+        <p:spPr>
+          <a:xfrm>
+            <a:off x="1168400" y="3695005"/>
+            <a:ext cx="10307828" cy="639961"/>
+          </a:xfrm>
+          <a:prstGeom prst="rect">
+            <a:avLst/>
+          </a:prstGeom>
+          <a:noFill/>
+        </p:spPr>
+        <p:txBody>
+          <a:bodyPr wrap="square" lIns="0" rIns="0" tIns="0" bIns="0" anchor="t">
+            <a:noAutofit/>
+          </a:bodyPr>
+          <a:lstStyle/>
+          <a:p>
+            <a:pPr algn="l">
+              <a:lnSpc>
+                <a:spcPct val="115000"/>
+              </a:lnSpc>
+            </a:pPr>
+            <a:r>
+              <a:rPr sz="1200" b="0" i="0">
+                <a:solidFill>
+                  <a:srgbClr val="2E3A4A"/>
+                </a:solidFill>
+                <a:latin typeface="Montserrat"/>
+              </a:rPr>
+              <a:t>Hanley, G. P., Jin, C. S., Vanselow, N. R., &amp; Hanratty, L. A. (2014). Producing meaningful improvements in problem behavior of children with autism via synthesized analyses and treatments. </a:t>
+            </a:r>
+            <a:r>
+              <a:rPr sz="1200" b="0" i="1">
+                <a:solidFill>
+                  <a:srgbClr val="2E3A4A"/>
+                </a:solidFill>
+                <a:latin typeface="Montserrat"/>
+              </a:rPr>
+              <a:t>Journal of Applied Behavior Analysis, 47</a:t>
+            </a:r>
+            <a:r>
+              <a:rPr sz="1200" b="0" i="0">
+                <a:solidFill>
+                  <a:srgbClr val="2E3A4A"/>
+                </a:solidFill>
+                <a:latin typeface="Montserrat"/>
+              </a:rPr>
+              <a:t>(1), 16–36. https://doi.org/10.1002/jaba.106</a:t>
+            </a:r>
+          </a:p>
+        </p:txBody>
+      </p:sp>
+      <p:sp>
+        <p:nvSpPr>
+          <p:cNvPr id="9" name="TextBox 8"/>
+          <p:cNvSpPr txBox="1"/>
+          <p:nvPr/>
+        </p:nvSpPr>
+        <p:spPr>
+          <a:xfrm>
+            <a:off x="1168400" y="4449266"/>
             <a:ext cx="10307828" cy="426641"/>
           </a:xfrm>
           <a:prstGeom prst="rect">
@@ -26865,7 +27297,7 @@
                 </a:solidFill>
                 <a:latin typeface="Montserrat"/>
               </a:rPr>
-              <a:t>Lord, C., Brugha, T. S., Charman, T., et al. (2020). Autism spectrum disorder. </a:t>
+              <a:t>Iwata, B. A., Dorsey, M. F., Slifer, K. J., Bauman, K. E., &amp; Richman, G. S. (1994). Toward a functional analysis of self-injury. </a:t>
             </a:r>
             <a:r>
               <a:rPr sz="1200" b="0" i="1">
@@ -26874,7 +27306,7 @@
                 </a:solidFill>
                 <a:latin typeface="Montserrat"/>
               </a:rPr>
-              <a:t>Nature Reviews Disease Primers, 6</a:t>
+              <a:t>Journal of Applied Behavior Analysis, 27</a:t>
             </a:r>
             <a:r>
               <a:rPr sz="1200" b="0" i="0">
@@ -26883,20 +27315,20 @@
                 </a:solidFill>
                 <a:latin typeface="Montserrat"/>
               </a:rPr>
-              <a:t>, 5. https://doi.org/10.1038/s41572-019-0138-4</a:t>
-            </a:r>
-          </a:p>
-        </p:txBody>
-      </p:sp>
-      <p:sp>
-        <p:nvSpPr>
-          <p:cNvPr id="8" name="TextBox 7"/>
-          <p:cNvSpPr txBox="1"/>
-          <p:nvPr/>
-        </p:nvSpPr>
-        <p:spPr>
-          <a:xfrm>
-            <a:off x="1168400" y="3801666"/>
+              <a:t>(2), 197–209. https://doi.org/10.1901/jaba.1994.27-197 (Original publicado em 1982)</a:t>
+            </a:r>
+          </a:p>
+        </p:txBody>
+      </p:sp>
+      <p:sp>
+        <p:nvSpPr>
+          <p:cNvPr id="10" name="TextBox 9"/>
+          <p:cNvSpPr txBox="1"/>
+          <p:nvPr/>
+        </p:nvSpPr>
+        <p:spPr>
+          <a:xfrm>
+            <a:off x="1168400" y="4990207"/>
             <a:ext cx="10307828" cy="426641"/>
           </a:xfrm>
           <a:prstGeom prst="rect">
@@ -26922,7 +27354,7 @@
                 </a:solidFill>
                 <a:latin typeface="Montserrat"/>
               </a:rPr>
-              <a:t>Lord, C., Charman, T., Havdahl, A., et al. (2022). The Lancet Commission on the future of care and clinical research in autism. </a:t>
+              <a:t>Laraway, S., Snycerski, S., Michael, J., &amp; Poling, A. (2003). Motivating operations and terms to describe them: Some further refinements. </a:t>
             </a:r>
             <a:r>
               <a:rPr sz="1200" b="0" i="1">
@@ -26931,7 +27363,7 @@
                 </a:solidFill>
                 <a:latin typeface="Montserrat"/>
               </a:rPr>
-              <a:t>The Lancet, 399</a:t>
+              <a:t>Journal of Applied Behavior Analysis, 36</a:t>
             </a:r>
             <a:r>
               <a:rPr sz="1200" b="0" i="0">
@@ -26940,121 +27372,7 @@
                 </a:solidFill>
                 <a:latin typeface="Montserrat"/>
               </a:rPr>
-              <a:t>(10321), 271–334. https://doi.org/10.1016/S0140-6736(21)01541-5</a:t>
-            </a:r>
-          </a:p>
-        </p:txBody>
-      </p:sp>
-      <p:sp>
-        <p:nvSpPr>
-          <p:cNvPr id="9" name="TextBox 8"/>
-          <p:cNvSpPr txBox="1"/>
-          <p:nvPr/>
-        </p:nvSpPr>
-        <p:spPr>
-          <a:xfrm>
-            <a:off x="1168400" y="4342606"/>
-            <a:ext cx="10307828" cy="639961"/>
-          </a:xfrm>
-          <a:prstGeom prst="rect">
-            <a:avLst/>
-          </a:prstGeom>
-          <a:noFill/>
-        </p:spPr>
-        <p:txBody>
-          <a:bodyPr wrap="square" lIns="0" rIns="0" tIns="0" bIns="0" anchor="t">
-            <a:noAutofit/>
-          </a:bodyPr>
-          <a:lstStyle/>
-          <a:p>
-            <a:pPr algn="l">
-              <a:lnSpc>
-                <a:spcPct val="115000"/>
-              </a:lnSpc>
-            </a:pPr>
-            <a:r>
-              <a:rPr sz="1200" b="0" i="0">
-                <a:solidFill>
-                  <a:srgbClr val="2E3A4A"/>
-                </a:solidFill>
-                <a:latin typeface="Montserrat"/>
-              </a:rPr>
-              <a:t>Shaw, K. A., Williams, S., Patrick, M. E., et al. (2025). Prevalence and early identification of autism spectrum disorder among children aged 4 and 8 years — ADDM Network, 16 sites, United States, 2022. </a:t>
-            </a:r>
-            <a:r>
-              <a:rPr sz="1200" b="0" i="1">
-                <a:solidFill>
-                  <a:srgbClr val="2E3A4A"/>
-                </a:solidFill>
-                <a:latin typeface="Montserrat"/>
-              </a:rPr>
-              <a:t>MMWR Surveillance Summaries, 74</a:t>
-            </a:r>
-            <a:r>
-              <a:rPr sz="1200" b="0" i="0">
-                <a:solidFill>
-                  <a:srgbClr val="2E3A4A"/>
-                </a:solidFill>
-                <a:latin typeface="Montserrat"/>
-              </a:rPr>
-              <a:t>(SS-2), 1–22. https://doi.org/10.15585/mmwr.ss7402a1</a:t>
-            </a:r>
-          </a:p>
-        </p:txBody>
-      </p:sp>
-      <p:sp>
-        <p:nvSpPr>
-          <p:cNvPr id="10" name="TextBox 9"/>
-          <p:cNvSpPr txBox="1"/>
-          <p:nvPr/>
-        </p:nvSpPr>
-        <p:spPr>
-          <a:xfrm>
-            <a:off x="1168400" y="5096867"/>
-            <a:ext cx="10307828" cy="426641"/>
-          </a:xfrm>
-          <a:prstGeom prst="rect">
-            <a:avLst/>
-          </a:prstGeom>
-          <a:noFill/>
-        </p:spPr>
-        <p:txBody>
-          <a:bodyPr wrap="square" lIns="0" rIns="0" tIns="0" bIns="0" anchor="t">
-            <a:noAutofit/>
-          </a:bodyPr>
-          <a:lstStyle/>
-          <a:p>
-            <a:pPr algn="l">
-              <a:lnSpc>
-                <a:spcPct val="115000"/>
-              </a:lnSpc>
-            </a:pPr>
-            <a:r>
-              <a:rPr sz="1200" b="0" i="0">
-                <a:solidFill>
-                  <a:srgbClr val="2E3A4A"/>
-                </a:solidFill>
-                <a:latin typeface="Montserrat"/>
-              </a:rPr>
-              <a:t>Zeidan, J., Fombonne, E., Scorah, J., et al. (2022). Global prevalence of autism: A systematic review update. </a:t>
-            </a:r>
-            <a:r>
-              <a:rPr sz="1200" b="0" i="1">
-                <a:solidFill>
-                  <a:srgbClr val="2E3A4A"/>
-                </a:solidFill>
-                <a:latin typeface="Montserrat"/>
-              </a:rPr>
-              <a:t>Autism Research, 15</a:t>
-            </a:r>
-            <a:r>
-              <a:rPr sz="1200" b="0" i="0">
-                <a:solidFill>
-                  <a:srgbClr val="2E3A4A"/>
-                </a:solidFill>
-                <a:latin typeface="Montserrat"/>
-              </a:rPr>
-              <a:t>(5), 778–790. https://doi.org/10.1002/aur.2696</a:t>
+              <a:t>(3), 407–414. https://doi.org/10.1901/jaba.2003.36-407</a:t>
             </a:r>
           </a:p>
         </p:txBody>
@@ -27093,7 +27411,7 @@
                 </a:solidFill>
                 <a:latin typeface="Montserrat"/>
               </a:rPr>
-              <a:t>A1</a:t>
+              <a:t>A2</a:t>
             </a:r>
           </a:p>
         </p:txBody>
@@ -27176,7 +27494,7 @@
         </p:nvSpPr>
         <p:spPr>
           <a:xfrm>
-            <a:off x="1168400" y="1250553"/>
+            <a:off x="1168400" y="1357213"/>
             <a:ext cx="10307828" cy="379710"/>
           </a:xfrm>
           <a:prstGeom prst="rect">
@@ -27202,7 +27520,7 @@
                 </a:solidFill>
                 <a:latin typeface="Montserrat"/>
               </a:rPr>
-              <a:t>Referências: ABA e análise funcional</a:t>
+              <a:t>Referências: ABA, TCC e intervenção</a:t>
             </a:r>
           </a:p>
         </p:txBody>
@@ -27215,7 +27533,64 @@
         </p:nvSpPr>
         <p:spPr>
           <a:xfrm>
-            <a:off x="1168400" y="1744563"/>
+            <a:off x="1168400" y="1851223"/>
+            <a:ext cx="10307828" cy="213320"/>
+          </a:xfrm>
+          <a:prstGeom prst="rect">
+            <a:avLst/>
+          </a:prstGeom>
+          <a:noFill/>
+        </p:spPr>
+        <p:txBody>
+          <a:bodyPr wrap="square" lIns="0" rIns="0" tIns="0" bIns="0" anchor="t">
+            <a:noAutofit/>
+          </a:bodyPr>
+          <a:lstStyle/>
+          <a:p>
+            <a:pPr algn="l">
+              <a:lnSpc>
+                <a:spcPct val="115000"/>
+              </a:lnSpc>
+            </a:pPr>
+            <a:r>
+              <a:rPr sz="1200" b="0" i="0">
+                <a:solidFill>
+                  <a:srgbClr val="2E3A4A"/>
+                </a:solidFill>
+                <a:latin typeface="Montserrat"/>
+              </a:rPr>
+              <a:t>Beck, J. S. (2021). </a:t>
+            </a:r>
+            <a:r>
+              <a:rPr sz="1200" b="0" i="1">
+                <a:solidFill>
+                  <a:srgbClr val="2E3A4A"/>
+                </a:solidFill>
+                <a:latin typeface="Montserrat"/>
+              </a:rPr>
+              <a:t>Cognitive behavior therapy: Basics and beyond</a:t>
+            </a:r>
+            <a:r>
+              <a:rPr sz="1200" b="0" i="0">
+                <a:solidFill>
+                  <a:srgbClr val="2E3A4A"/>
+                </a:solidFill>
+                <a:latin typeface="Montserrat"/>
+              </a:rPr>
+              <a:t> (3rd ed.). Guilford Press.</a:t>
+            </a:r>
+          </a:p>
+        </p:txBody>
+      </p:sp>
+      <p:sp>
+        <p:nvSpPr>
+          <p:cNvPr id="5" name="TextBox 4"/>
+          <p:cNvSpPr txBox="1"/>
+          <p:nvPr/>
+        </p:nvSpPr>
+        <p:spPr>
+          <a:xfrm>
+            <a:off x="1168400" y="2178844"/>
             <a:ext cx="10307828" cy="426641"/>
           </a:xfrm>
           <a:prstGeom prst="rect">
@@ -27241,7 +27616,7 @@
                 </a:solidFill>
                 <a:latin typeface="Montserrat"/>
               </a:rPr>
-              <a:t>Baer, D. M., Wolf, M. M., &amp; Risley, T. R. (1968). Some current dimensions of applied behavior analysis. </a:t>
+              <a:t>Carr, E. G., &amp; Durand, V. M. (1985). Reducing behavior problems through functional communication training. </a:t>
             </a:r>
             <a:r>
               <a:rPr sz="1200" b="0" i="1">
@@ -27250,7 +27625,7 @@
                 </a:solidFill>
                 <a:latin typeface="Montserrat"/>
               </a:rPr>
-              <a:t>Journal of Applied Behavior Analysis, 1</a:t>
+              <a:t>Journal of Applied Behavior Analysis, 18</a:t>
             </a:r>
             <a:r>
               <a:rPr sz="1200" b="0" i="0">
@@ -27259,20 +27634,134 @@
                 </a:solidFill>
                 <a:latin typeface="Montserrat"/>
               </a:rPr>
-              <a:t>(1), 91–97. https://doi.org/10.1901/jaba.1968.1-91</a:t>
-            </a:r>
-          </a:p>
-        </p:txBody>
-      </p:sp>
-      <p:sp>
-        <p:nvSpPr>
-          <p:cNvPr id="5" name="TextBox 4"/>
-          <p:cNvSpPr txBox="1"/>
-          <p:nvPr/>
-        </p:nvSpPr>
-        <p:spPr>
-          <a:xfrm>
-            <a:off x="1168400" y="2285504"/>
+              <a:t>(2), 111–126. https://doi.org/10.1901/jaba.1985.18-111</a:t>
+            </a:r>
+          </a:p>
+        </p:txBody>
+      </p:sp>
+      <p:sp>
+        <p:nvSpPr>
+          <p:cNvPr id="6" name="TextBox 5"/>
+          <p:cNvSpPr txBox="1"/>
+          <p:nvPr/>
+        </p:nvSpPr>
+        <p:spPr>
+          <a:xfrm>
+            <a:off x="1168400" y="2719784"/>
+            <a:ext cx="10307828" cy="426641"/>
+          </a:xfrm>
+          <a:prstGeom prst="rect">
+            <a:avLst/>
+          </a:prstGeom>
+          <a:noFill/>
+        </p:spPr>
+        <p:txBody>
+          <a:bodyPr wrap="square" lIns="0" rIns="0" tIns="0" bIns="0" anchor="t">
+            <a:noAutofit/>
+          </a:bodyPr>
+          <a:lstStyle/>
+          <a:p>
+            <a:pPr algn="l">
+              <a:lnSpc>
+                <a:spcPct val="115000"/>
+              </a:lnSpc>
+            </a:pPr>
+            <a:r>
+              <a:rPr sz="1200" b="0" i="0">
+                <a:solidFill>
+                  <a:srgbClr val="2E3A4A"/>
+                </a:solidFill>
+                <a:latin typeface="Montserrat"/>
+              </a:rPr>
+              <a:t>Hayes, S. C., &amp; Hofmann, S. G. (2017). The third wave of cognitive behavioral therapy and the rise of process-based care. </a:t>
+            </a:r>
+            <a:r>
+              <a:rPr sz="1200" b="0" i="1">
+                <a:solidFill>
+                  <a:srgbClr val="2E3A4A"/>
+                </a:solidFill>
+                <a:latin typeface="Montserrat"/>
+              </a:rPr>
+              <a:t>World Psychiatry, 16</a:t>
+            </a:r>
+            <a:r>
+              <a:rPr sz="1200" b="0" i="0">
+                <a:solidFill>
+                  <a:srgbClr val="2E3A4A"/>
+                </a:solidFill>
+                <a:latin typeface="Montserrat"/>
+              </a:rPr>
+              <a:t>(3), 245–246. https://doi.org/10.1002/wps.20442</a:t>
+            </a:r>
+          </a:p>
+        </p:txBody>
+      </p:sp>
+      <p:sp>
+        <p:nvSpPr>
+          <p:cNvPr id="7" name="TextBox 6"/>
+          <p:cNvSpPr txBox="1"/>
+          <p:nvPr/>
+        </p:nvSpPr>
+        <p:spPr>
+          <a:xfrm>
+            <a:off x="1168400" y="3260725"/>
+            <a:ext cx="10307828" cy="639961"/>
+          </a:xfrm>
+          <a:prstGeom prst="rect">
+            <a:avLst/>
+          </a:prstGeom>
+          <a:noFill/>
+        </p:spPr>
+        <p:txBody>
+          <a:bodyPr wrap="square" lIns="0" rIns="0" tIns="0" bIns="0" anchor="t">
+            <a:noAutofit/>
+          </a:bodyPr>
+          <a:lstStyle/>
+          <a:p>
+            <a:pPr algn="l">
+              <a:lnSpc>
+                <a:spcPct val="115000"/>
+              </a:lnSpc>
+            </a:pPr>
+            <a:r>
+              <a:rPr sz="1200" b="0" i="0">
+                <a:solidFill>
+                  <a:srgbClr val="2E3A4A"/>
+                </a:solidFill>
+                <a:latin typeface="Montserrat"/>
+              </a:rPr>
+              <a:t>Hume, K., Steinbrenner, J. R., Odom, S. L., et al. (2021). Evidence-based practices for children, youth, and young adults with autism: Third generation review. </a:t>
+            </a:r>
+            <a:r>
+              <a:rPr sz="1200" b="0" i="1">
+                <a:solidFill>
+                  <a:srgbClr val="2E3A4A"/>
+                </a:solidFill>
+                <a:latin typeface="Montserrat"/>
+              </a:rPr>
+              <a:t>Journal of Autism and Developmental Disorders, 51</a:t>
+            </a:r>
+            <a:r>
+              <a:rPr sz="1200" b="0" i="0">
+                <a:solidFill>
+                  <a:srgbClr val="2E3A4A"/>
+                </a:solidFill>
+                <a:latin typeface="Montserrat"/>
+              </a:rPr>
+              <a:t>(11), 4013–4032. https://doi.org/10.1007/s10803-020-04844-2</a:t>
+            </a:r>
+          </a:p>
+        </p:txBody>
+      </p:sp>
+      <p:sp>
+        <p:nvSpPr>
+          <p:cNvPr id="8" name="TextBox 7"/>
+          <p:cNvSpPr txBox="1"/>
+          <p:nvPr/>
+        </p:nvSpPr>
+        <p:spPr>
+          <a:xfrm>
+            <a:off x="1168400" y="4014986"/>
             <a:ext cx="10307828" cy="213320"/>
           </a:xfrm>
           <a:prstGeom prst="rect">
@@ -27298,7 +27787,7 @@
                 </a:solidFill>
                 <a:latin typeface="Montserrat"/>
               </a:rPr>
-              <a:t>Cooper, J. O., Heron, T. E., &amp; Heward, W. L. (2020). </a:t>
+              <a:t>Skinner, B. F. (1953). </a:t>
             </a:r>
             <a:r>
               <a:rPr sz="1200" b="0" i="1">
@@ -27307,7 +27796,7 @@
                 </a:solidFill>
                 <a:latin typeface="Montserrat"/>
               </a:rPr>
-              <a:t>Applied behavior analysis</a:t>
+              <a:t>Science and human behavior</a:t>
             </a:r>
             <a:r>
               <a:rPr sz="1200" b="0" i="0">
@@ -27316,20 +27805,20 @@
                 </a:solidFill>
                 <a:latin typeface="Montserrat"/>
               </a:rPr>
-              <a:t> (3rd ed.). Pearson.</a:t>
-            </a:r>
-          </a:p>
-        </p:txBody>
-      </p:sp>
-      <p:sp>
-        <p:nvSpPr>
-          <p:cNvPr id="6" name="TextBox 5"/>
-          <p:cNvSpPr txBox="1"/>
-          <p:nvPr/>
-        </p:nvSpPr>
-        <p:spPr>
-          <a:xfrm>
-            <a:off x="1168400" y="2613124"/>
+              <a:t>. Macmillan.</a:t>
+            </a:r>
+          </a:p>
+        </p:txBody>
+      </p:sp>
+      <p:sp>
+        <p:nvSpPr>
+          <p:cNvPr id="9" name="TextBox 8"/>
+          <p:cNvSpPr txBox="1"/>
+          <p:nvPr/>
+        </p:nvSpPr>
+        <p:spPr>
+          <a:xfrm>
+            <a:off x="1168400" y="4342606"/>
             <a:ext cx="10307828" cy="426641"/>
           </a:xfrm>
           <a:prstGeom prst="rect">
@@ -27355,7 +27844,7 @@
                 </a:solidFill>
                 <a:latin typeface="Montserrat"/>
               </a:rPr>
-              <a:t>Hanley, G. P. (2012). Functional assessment of problem behavior: Dispelling myths, overcoming implementation obstacles, and developing new lore. </a:t>
+              <a:t>Tiger, J. H., Hanley, G. P., &amp; Bruzek, J. (2008). Functional communication training: A review and practical guide. </a:t>
             </a:r>
             <a:r>
               <a:rPr sz="1200" b="0" i="1">
@@ -27364,7 +27853,7 @@
                 </a:solidFill>
                 <a:latin typeface="Montserrat"/>
               </a:rPr>
-              <a:t>Behavior Analysis in Practice, 5</a:t>
+              <a:t>Behavior Analysis in Practice, 1</a:t>
             </a:r>
             <a:r>
               <a:rPr sz="1200" b="0" i="0">
@@ -27373,20 +27862,20 @@
                 </a:solidFill>
                 <a:latin typeface="Montserrat"/>
               </a:rPr>
-              <a:t>(1), 54–72. https://doi.org/10.1007/BF03391818</a:t>
-            </a:r>
-          </a:p>
-        </p:txBody>
-      </p:sp>
-      <p:sp>
-        <p:nvSpPr>
-          <p:cNvPr id="7" name="TextBox 6"/>
-          <p:cNvSpPr txBox="1"/>
-          <p:nvPr/>
-        </p:nvSpPr>
-        <p:spPr>
-          <a:xfrm>
-            <a:off x="1168400" y="3154065"/>
+              <a:t>(1), 16–23. https://doi.org/10.1007/BF03391716</a:t>
+            </a:r>
+          </a:p>
+        </p:txBody>
+      </p:sp>
+      <p:sp>
+        <p:nvSpPr>
+          <p:cNvPr id="10" name="TextBox 9"/>
+          <p:cNvSpPr txBox="1"/>
+          <p:nvPr/>
+        </p:nvSpPr>
+        <p:spPr>
+          <a:xfrm>
+            <a:off x="1168400" y="4883547"/>
             <a:ext cx="10307828" cy="426641"/>
           </a:xfrm>
           <a:prstGeom prst="rect">
@@ -27412,7 +27901,7 @@
                 </a:solidFill>
                 <a:latin typeface="Montserrat"/>
               </a:rPr>
-              <a:t>Hanley, G. P., Iwata, B. A., &amp; McCord, B. E. (2003). Functional analysis of problem behavior: A review. </a:t>
+              <a:t>Wood, J. J., Kendall, P. C., Wood, K. S., et al. (2020). Cognitive behavioral treatments for anxiety in children with autism spectrum disorder: A randomized clinical trial. </a:t>
             </a:r>
             <a:r>
               <a:rPr sz="1200" b="0" i="1">
@@ -27421,7 +27910,7 @@
                 </a:solidFill>
                 <a:latin typeface="Montserrat"/>
               </a:rPr>
-              <a:t>Journal of Applied Behavior Analysis, 36</a:t>
+              <a:t>JAMA Psychiatry, 77</a:t>
             </a:r>
             <a:r>
               <a:rPr sz="1200" b="0" i="0">
@@ -27430,178 +27919,7 @@
                 </a:solidFill>
                 <a:latin typeface="Montserrat"/>
               </a:rPr>
-              <a:t>(2), 147–185. https://doi.org/10.1901/jaba.2003.36-147</a:t>
-            </a:r>
-          </a:p>
-        </p:txBody>
-      </p:sp>
-      <p:sp>
-        <p:nvSpPr>
-          <p:cNvPr id="8" name="TextBox 7"/>
-          <p:cNvSpPr txBox="1"/>
-          <p:nvPr/>
-        </p:nvSpPr>
-        <p:spPr>
-          <a:xfrm>
-            <a:off x="1168400" y="3695005"/>
-            <a:ext cx="10307828" cy="639961"/>
-          </a:xfrm>
-          <a:prstGeom prst="rect">
-            <a:avLst/>
-          </a:prstGeom>
-          <a:noFill/>
-        </p:spPr>
-        <p:txBody>
-          <a:bodyPr wrap="square" lIns="0" rIns="0" tIns="0" bIns="0" anchor="t">
-            <a:noAutofit/>
-          </a:bodyPr>
-          <a:lstStyle/>
-          <a:p>
-            <a:pPr algn="l">
-              <a:lnSpc>
-                <a:spcPct val="115000"/>
-              </a:lnSpc>
-            </a:pPr>
-            <a:r>
-              <a:rPr sz="1200" b="0" i="0">
-                <a:solidFill>
-                  <a:srgbClr val="2E3A4A"/>
-                </a:solidFill>
-                <a:latin typeface="Montserrat"/>
-              </a:rPr>
-              <a:t>Hanley, G. P., Jin, C. S., Vanselow, N. R., &amp; Hanratty, L. A. (2014). Producing meaningful improvements in problem behavior of children with autism via synthesized analyses and treatments. </a:t>
-            </a:r>
-            <a:r>
-              <a:rPr sz="1200" b="0" i="1">
-                <a:solidFill>
-                  <a:srgbClr val="2E3A4A"/>
-                </a:solidFill>
-                <a:latin typeface="Montserrat"/>
-              </a:rPr>
-              <a:t>Journal of Applied Behavior Analysis, 47</a:t>
-            </a:r>
-            <a:r>
-              <a:rPr sz="1200" b="0" i="0">
-                <a:solidFill>
-                  <a:srgbClr val="2E3A4A"/>
-                </a:solidFill>
-                <a:latin typeface="Montserrat"/>
-              </a:rPr>
-              <a:t>(1), 16–36. https://doi.org/10.1002/jaba.106</a:t>
-            </a:r>
-          </a:p>
-        </p:txBody>
-      </p:sp>
-      <p:sp>
-        <p:nvSpPr>
-          <p:cNvPr id="9" name="TextBox 8"/>
-          <p:cNvSpPr txBox="1"/>
-          <p:nvPr/>
-        </p:nvSpPr>
-        <p:spPr>
-          <a:xfrm>
-            <a:off x="1168400" y="4449266"/>
-            <a:ext cx="10307828" cy="426641"/>
-          </a:xfrm>
-          <a:prstGeom prst="rect">
-            <a:avLst/>
-          </a:prstGeom>
-          <a:noFill/>
-        </p:spPr>
-        <p:txBody>
-          <a:bodyPr wrap="square" lIns="0" rIns="0" tIns="0" bIns="0" anchor="t">
-            <a:noAutofit/>
-          </a:bodyPr>
-          <a:lstStyle/>
-          <a:p>
-            <a:pPr algn="l">
-              <a:lnSpc>
-                <a:spcPct val="115000"/>
-              </a:lnSpc>
-            </a:pPr>
-            <a:r>
-              <a:rPr sz="1200" b="0" i="0">
-                <a:solidFill>
-                  <a:srgbClr val="2E3A4A"/>
-                </a:solidFill>
-                <a:latin typeface="Montserrat"/>
-              </a:rPr>
-              <a:t>Iwata, B. A., Dorsey, M. F., Slifer, K. J., Bauman, K. E., &amp; Richman, G. S. (1994). Toward a functional analysis of self-injury. </a:t>
-            </a:r>
-            <a:r>
-              <a:rPr sz="1200" b="0" i="1">
-                <a:solidFill>
-                  <a:srgbClr val="2E3A4A"/>
-                </a:solidFill>
-                <a:latin typeface="Montserrat"/>
-              </a:rPr>
-              <a:t>Journal of Applied Behavior Analysis, 27</a:t>
-            </a:r>
-            <a:r>
-              <a:rPr sz="1200" b="0" i="0">
-                <a:solidFill>
-                  <a:srgbClr val="2E3A4A"/>
-                </a:solidFill>
-                <a:latin typeface="Montserrat"/>
-              </a:rPr>
-              <a:t>(2), 197–209. https://doi.org/10.1901/jaba.1994.27-197 (Original publicado em 1982)</a:t>
-            </a:r>
-          </a:p>
-        </p:txBody>
-      </p:sp>
-      <p:sp>
-        <p:nvSpPr>
-          <p:cNvPr id="10" name="TextBox 9"/>
-          <p:cNvSpPr txBox="1"/>
-          <p:nvPr/>
-        </p:nvSpPr>
-        <p:spPr>
-          <a:xfrm>
-            <a:off x="1168400" y="4990207"/>
-            <a:ext cx="10307828" cy="426641"/>
-          </a:xfrm>
-          <a:prstGeom prst="rect">
-            <a:avLst/>
-          </a:prstGeom>
-          <a:noFill/>
-        </p:spPr>
-        <p:txBody>
-          <a:bodyPr wrap="square" lIns="0" rIns="0" tIns="0" bIns="0" anchor="t">
-            <a:noAutofit/>
-          </a:bodyPr>
-          <a:lstStyle/>
-          <a:p>
-            <a:pPr algn="l">
-              <a:lnSpc>
-                <a:spcPct val="115000"/>
-              </a:lnSpc>
-            </a:pPr>
-            <a:r>
-              <a:rPr sz="1200" b="0" i="0">
-                <a:solidFill>
-                  <a:srgbClr val="2E3A4A"/>
-                </a:solidFill>
-                <a:latin typeface="Montserrat"/>
-              </a:rPr>
-              <a:t>Laraway, S., Snycerski, S., Michael, J., &amp; Poling, A. (2003). Motivating operations and terms to describe them: Some further refinements. </a:t>
-            </a:r>
-            <a:r>
-              <a:rPr sz="1200" b="0" i="1">
-                <a:solidFill>
-                  <a:srgbClr val="2E3A4A"/>
-                </a:solidFill>
-                <a:latin typeface="Montserrat"/>
-              </a:rPr>
-              <a:t>Journal of Applied Behavior Analysis, 36</a:t>
-            </a:r>
-            <a:r>
-              <a:rPr sz="1200" b="0" i="0">
-                <a:solidFill>
-                  <a:srgbClr val="2E3A4A"/>
-                </a:solidFill>
-                <a:latin typeface="Montserrat"/>
-              </a:rPr>
-              <a:t>(3), 407–414. https://doi.org/10.1901/jaba.2003.36-407</a:t>
+              <a:t>(5), 474–483. https://doi.org/10.1001/jamapsychiatry.2019.4160</a:t>
             </a:r>
           </a:p>
         </p:txBody>
@@ -27640,7 +27958,7 @@
                 </a:solidFill>
                 <a:latin typeface="Montserrat"/>
               </a:rPr>
-              <a:t>A2</a:t>
+              <a:t>A3</a:t>
             </a:r>
           </a:p>
         </p:txBody>
@@ -27723,7 +28041,7 @@
         </p:nvSpPr>
         <p:spPr>
           <a:xfrm>
-            <a:off x="1168400" y="1357213"/>
+            <a:off x="1168400" y="1955304"/>
             <a:ext cx="10307828" cy="379710"/>
           </a:xfrm>
           <a:prstGeom prst="rect">
@@ -27749,7 +28067,7 @@
                 </a:solidFill>
                 <a:latin typeface="Montserrat"/>
               </a:rPr>
-              <a:t>Referências: ABA, TCC e intervenção</a:t>
+              <a:t>Referências: estratégias naturalistas e evidência</a:t>
             </a:r>
           </a:p>
         </p:txBody>
@@ -27762,8 +28080,8 @@
         </p:nvSpPr>
         <p:spPr>
           <a:xfrm>
-            <a:off x="1168400" y="1851223"/>
-            <a:ext cx="10307828" cy="213320"/>
+            <a:off x="1168400" y="2449314"/>
+            <a:ext cx="10307828" cy="426641"/>
           </a:xfrm>
           <a:prstGeom prst="rect">
             <a:avLst/>
@@ -27788,7 +28106,7 @@
                 </a:solidFill>
                 <a:latin typeface="Montserrat"/>
               </a:rPr>
-              <a:t>Beck, J. S. (2021). </a:t>
+              <a:t>Sandbank, M., Bottema-Beutel, K., Crowley, S., et al. (2020). Project AIM: Autism intervention meta-analysis for studies of young children. </a:t>
             </a:r>
             <a:r>
               <a:rPr sz="1200" b="0" i="1">
@@ -27797,7 +28115,7 @@
                 </a:solidFill>
                 <a:latin typeface="Montserrat"/>
               </a:rPr>
-              <a:t>Cognitive behavior therapy: Basics and beyond</a:t>
+              <a:t>Psychological Bulletin, 146</a:t>
             </a:r>
             <a:r>
               <a:rPr sz="1200" b="0" i="0">
@@ -27806,7 +28124,7 @@
                 </a:solidFill>
                 <a:latin typeface="Montserrat"/>
               </a:rPr>
-              <a:t> (3rd ed.). Guilford Press.</a:t>
+              <a:t>(1), 1–29. https://doi.org/10.1037/bul0000215</a:t>
             </a:r>
           </a:p>
         </p:txBody>
@@ -27819,7 +28137,7 @@
         </p:nvSpPr>
         <p:spPr>
           <a:xfrm>
-            <a:off x="1168400" y="2178844"/>
+            <a:off x="1168400" y="2990255"/>
             <a:ext cx="10307828" cy="426641"/>
           </a:xfrm>
           <a:prstGeom prst="rect">
@@ -27845,7 +28163,7 @@
                 </a:solidFill>
                 <a:latin typeface="Montserrat"/>
               </a:rPr>
-              <a:t>Carr, E. G., &amp; Durand, V. M. (1985). Reducing behavior problems through functional communication training. </a:t>
+              <a:t>Sandbank, M., Bottema-Beutel, K., Crowley LaPoint, S., et al. (2023). Autism intervention meta-analysis of early childhood studies (Project AIM): Updated systematic review and secondary analysis. </a:t>
             </a:r>
             <a:r>
               <a:rPr sz="1200" b="0" i="1">
@@ -27854,7 +28172,7 @@
                 </a:solidFill>
                 <a:latin typeface="Montserrat"/>
               </a:rPr>
-              <a:t>Journal of Applied Behavior Analysis, 18</a:t>
+              <a:t>BMJ, 383</a:t>
             </a:r>
             <a:r>
               <a:rPr sz="1200" b="0" i="0">
@@ -27863,7 +28181,7 @@
                 </a:solidFill>
                 <a:latin typeface="Montserrat"/>
               </a:rPr>
-              <a:t>(2), 111–126. https://doi.org/10.1901/jaba.1985.18-111</a:t>
+              <a:t>, e076733. https://doi.org/10.1136/bmj-2023-076733</a:t>
             </a:r>
           </a:p>
         </p:txBody>
@@ -27876,7 +28194,64 @@
         </p:nvSpPr>
         <p:spPr>
           <a:xfrm>
-            <a:off x="1168400" y="2719784"/>
+            <a:off x="1168400" y="3531195"/>
+            <a:ext cx="10307828" cy="639961"/>
+          </a:xfrm>
+          <a:prstGeom prst="rect">
+            <a:avLst/>
+          </a:prstGeom>
+          <a:noFill/>
+        </p:spPr>
+        <p:txBody>
+          <a:bodyPr wrap="square" lIns="0" rIns="0" tIns="0" bIns="0" anchor="t">
+            <a:noAutofit/>
+          </a:bodyPr>
+          <a:lstStyle/>
+          <a:p>
+            <a:pPr algn="l">
+              <a:lnSpc>
+                <a:spcPct val="115000"/>
+              </a:lnSpc>
+            </a:pPr>
+            <a:r>
+              <a:rPr sz="1200" b="0" i="0">
+                <a:solidFill>
+                  <a:srgbClr val="2E3A4A"/>
+                </a:solidFill>
+                <a:latin typeface="Montserrat"/>
+              </a:rPr>
+              <a:t>Schreibman, L., Dawson, G., Stahmer, A. C., et al. (2015). Naturalistic developmental behavioral interventions: Empirically validated treatments for autism spectrum disorder. </a:t>
+            </a:r>
+            <a:r>
+              <a:rPr sz="1200" b="0" i="1">
+                <a:solidFill>
+                  <a:srgbClr val="2E3A4A"/>
+                </a:solidFill>
+                <a:latin typeface="Montserrat"/>
+              </a:rPr>
+              <a:t>Journal of Autism and Developmental Disorders, 45</a:t>
+            </a:r>
+            <a:r>
+              <a:rPr sz="1200" b="0" i="0">
+                <a:solidFill>
+                  <a:srgbClr val="2E3A4A"/>
+                </a:solidFill>
+                <a:latin typeface="Montserrat"/>
+              </a:rPr>
+              <a:t>(8), 2411–2428. https://doi.org/10.1007/s10803-015-2407-8</a:t>
+            </a:r>
+          </a:p>
+        </p:txBody>
+      </p:sp>
+      <p:sp>
+        <p:nvSpPr>
+          <p:cNvPr id="7" name="TextBox 6"/>
+          <p:cNvSpPr txBox="1"/>
+          <p:nvPr/>
+        </p:nvSpPr>
+        <p:spPr>
+          <a:xfrm>
+            <a:off x="1168400" y="4285456"/>
             <a:ext cx="10307828" cy="426641"/>
           </a:xfrm>
           <a:prstGeom prst="rect">
@@ -27902,7 +28277,7 @@
                 </a:solidFill>
                 <a:latin typeface="Montserrat"/>
               </a:rPr>
-              <a:t>Hayes, S. C., &amp; Hofmann, S. G. (2017). The third wave of cognitive behavioral therapy and the rise of process-based care. </a:t>
+              <a:t>Stokes, T. F., &amp; Baer, D. M. (1977). An implicit technology of generalization. </a:t>
             </a:r>
             <a:r>
               <a:rPr sz="1200" b="0" i="1">
@@ -27911,7 +28286,7 @@
                 </a:solidFill>
                 <a:latin typeface="Montserrat"/>
               </a:rPr>
-              <a:t>World Psychiatry, 16</a:t>
+              <a:t>Journal of Applied Behavior Analysis, 10</a:t>
             </a:r>
             <a:r>
               <a:rPr sz="1200" b="0" i="0">
@@ -27920,64 +28295,7 @@
                 </a:solidFill>
                 <a:latin typeface="Montserrat"/>
               </a:rPr>
-              <a:t>(3), 245–246. https://doi.org/10.1002/wps.20442</a:t>
-            </a:r>
-          </a:p>
-        </p:txBody>
-      </p:sp>
-      <p:sp>
-        <p:nvSpPr>
-          <p:cNvPr id="7" name="TextBox 6"/>
-          <p:cNvSpPr txBox="1"/>
-          <p:nvPr/>
-        </p:nvSpPr>
-        <p:spPr>
-          <a:xfrm>
-            <a:off x="1168400" y="3260725"/>
-            <a:ext cx="10307828" cy="639961"/>
-          </a:xfrm>
-          <a:prstGeom prst="rect">
-            <a:avLst/>
-          </a:prstGeom>
-          <a:noFill/>
-        </p:spPr>
-        <p:txBody>
-          <a:bodyPr wrap="square" lIns="0" rIns="0" tIns="0" bIns="0" anchor="t">
-            <a:noAutofit/>
-          </a:bodyPr>
-          <a:lstStyle/>
-          <a:p>
-            <a:pPr algn="l">
-              <a:lnSpc>
-                <a:spcPct val="115000"/>
-              </a:lnSpc>
-            </a:pPr>
-            <a:r>
-              <a:rPr sz="1200" b="0" i="0">
-                <a:solidFill>
-                  <a:srgbClr val="2E3A4A"/>
-                </a:solidFill>
-                <a:latin typeface="Montserrat"/>
-              </a:rPr>
-              <a:t>Hume, K., Steinbrenner, J. R., Odom, S. L., et al. (2021). Evidence-based practices for children, youth, and young adults with autism: Third generation review. </a:t>
-            </a:r>
-            <a:r>
-              <a:rPr sz="1200" b="0" i="1">
-                <a:solidFill>
-                  <a:srgbClr val="2E3A4A"/>
-                </a:solidFill>
-                <a:latin typeface="Montserrat"/>
-              </a:rPr>
-              <a:t>Journal of Autism and Developmental Disorders, 51</a:t>
-            </a:r>
-            <a:r>
-              <a:rPr sz="1200" b="0" i="0">
-                <a:solidFill>
-                  <a:srgbClr val="2E3A4A"/>
-                </a:solidFill>
-                <a:latin typeface="Montserrat"/>
-              </a:rPr>
-              <a:t>(11), 4013–4032. https://doi.org/10.1007/s10803-020-04844-2</a:t>
+              <a:t>(2), 349–367. https://doi.org/10.1901/jaba.1977.10-349</a:t>
             </a:r>
           </a:p>
         </p:txBody>
@@ -27985,177 +28303,6 @@
       <p:sp>
         <p:nvSpPr>
           <p:cNvPr id="8" name="TextBox 7"/>
-          <p:cNvSpPr txBox="1"/>
-          <p:nvPr/>
-        </p:nvSpPr>
-        <p:spPr>
-          <a:xfrm>
-            <a:off x="1168400" y="4014986"/>
-            <a:ext cx="10307828" cy="213320"/>
-          </a:xfrm>
-          <a:prstGeom prst="rect">
-            <a:avLst/>
-          </a:prstGeom>
-          <a:noFill/>
-        </p:spPr>
-        <p:txBody>
-          <a:bodyPr wrap="square" lIns="0" rIns="0" tIns="0" bIns="0" anchor="t">
-            <a:noAutofit/>
-          </a:bodyPr>
-          <a:lstStyle/>
-          <a:p>
-            <a:pPr algn="l">
-              <a:lnSpc>
-                <a:spcPct val="115000"/>
-              </a:lnSpc>
-            </a:pPr>
-            <a:r>
-              <a:rPr sz="1200" b="0" i="0">
-                <a:solidFill>
-                  <a:srgbClr val="2E3A4A"/>
-                </a:solidFill>
-                <a:latin typeface="Montserrat"/>
-              </a:rPr>
-              <a:t>Skinner, B. F. (1953). </a:t>
-            </a:r>
-            <a:r>
-              <a:rPr sz="1200" b="0" i="1">
-                <a:solidFill>
-                  <a:srgbClr val="2E3A4A"/>
-                </a:solidFill>
-                <a:latin typeface="Montserrat"/>
-              </a:rPr>
-              <a:t>Science and human behavior</a:t>
-            </a:r>
-            <a:r>
-              <a:rPr sz="1200" b="0" i="0">
-                <a:solidFill>
-                  <a:srgbClr val="2E3A4A"/>
-                </a:solidFill>
-                <a:latin typeface="Montserrat"/>
-              </a:rPr>
-              <a:t>. Macmillan.</a:t>
-            </a:r>
-          </a:p>
-        </p:txBody>
-      </p:sp>
-      <p:sp>
-        <p:nvSpPr>
-          <p:cNvPr id="9" name="TextBox 8"/>
-          <p:cNvSpPr txBox="1"/>
-          <p:nvPr/>
-        </p:nvSpPr>
-        <p:spPr>
-          <a:xfrm>
-            <a:off x="1168400" y="4342606"/>
-            <a:ext cx="10307828" cy="426641"/>
-          </a:xfrm>
-          <a:prstGeom prst="rect">
-            <a:avLst/>
-          </a:prstGeom>
-          <a:noFill/>
-        </p:spPr>
-        <p:txBody>
-          <a:bodyPr wrap="square" lIns="0" rIns="0" tIns="0" bIns="0" anchor="t">
-            <a:noAutofit/>
-          </a:bodyPr>
-          <a:lstStyle/>
-          <a:p>
-            <a:pPr algn="l">
-              <a:lnSpc>
-                <a:spcPct val="115000"/>
-              </a:lnSpc>
-            </a:pPr>
-            <a:r>
-              <a:rPr sz="1200" b="0" i="0">
-                <a:solidFill>
-                  <a:srgbClr val="2E3A4A"/>
-                </a:solidFill>
-                <a:latin typeface="Montserrat"/>
-              </a:rPr>
-              <a:t>Tiger, J. H., Hanley, G. P., &amp; Bruzek, J. (2008). Functional communication training: A review and practical guide. </a:t>
-            </a:r>
-            <a:r>
-              <a:rPr sz="1200" b="0" i="1">
-                <a:solidFill>
-                  <a:srgbClr val="2E3A4A"/>
-                </a:solidFill>
-                <a:latin typeface="Montserrat"/>
-              </a:rPr>
-              <a:t>Behavior Analysis in Practice, 1</a:t>
-            </a:r>
-            <a:r>
-              <a:rPr sz="1200" b="0" i="0">
-                <a:solidFill>
-                  <a:srgbClr val="2E3A4A"/>
-                </a:solidFill>
-                <a:latin typeface="Montserrat"/>
-              </a:rPr>
-              <a:t>(1), 16–23. https://doi.org/10.1007/BF03391716</a:t>
-            </a:r>
-          </a:p>
-        </p:txBody>
-      </p:sp>
-      <p:sp>
-        <p:nvSpPr>
-          <p:cNvPr id="10" name="TextBox 9"/>
-          <p:cNvSpPr txBox="1"/>
-          <p:nvPr/>
-        </p:nvSpPr>
-        <p:spPr>
-          <a:xfrm>
-            <a:off x="1168400" y="4883547"/>
-            <a:ext cx="10307828" cy="426641"/>
-          </a:xfrm>
-          <a:prstGeom prst="rect">
-            <a:avLst/>
-          </a:prstGeom>
-          <a:noFill/>
-        </p:spPr>
-        <p:txBody>
-          <a:bodyPr wrap="square" lIns="0" rIns="0" tIns="0" bIns="0" anchor="t">
-            <a:noAutofit/>
-          </a:bodyPr>
-          <a:lstStyle/>
-          <a:p>
-            <a:pPr algn="l">
-              <a:lnSpc>
-                <a:spcPct val="115000"/>
-              </a:lnSpc>
-            </a:pPr>
-            <a:r>
-              <a:rPr sz="1200" b="0" i="0">
-                <a:solidFill>
-                  <a:srgbClr val="2E3A4A"/>
-                </a:solidFill>
-                <a:latin typeface="Montserrat"/>
-              </a:rPr>
-              <a:t>Wood, J. J., Kendall, P. C., Wood, K. S., et al. (2020). Cognitive behavioral treatments for anxiety in children with autism spectrum disorder: A randomized clinical trial. </a:t>
-            </a:r>
-            <a:r>
-              <a:rPr sz="1200" b="0" i="1">
-                <a:solidFill>
-                  <a:srgbClr val="2E3A4A"/>
-                </a:solidFill>
-                <a:latin typeface="Montserrat"/>
-              </a:rPr>
-              <a:t>JAMA Psychiatry, 77</a:t>
-            </a:r>
-            <a:r>
-              <a:rPr sz="1200" b="0" i="0">
-                <a:solidFill>
-                  <a:srgbClr val="2E3A4A"/>
-                </a:solidFill>
-                <a:latin typeface="Montserrat"/>
-              </a:rPr>
-              <a:t>(5), 474–483. https://doi.org/10.1001/jamapsychiatry.2019.4160</a:t>
-            </a:r>
-          </a:p>
-        </p:txBody>
-      </p:sp>
-      <p:sp>
-        <p:nvSpPr>
-          <p:cNvPr id="11" name="TextBox 10"/>
           <p:cNvSpPr txBox="1"/>
           <p:nvPr/>
         </p:nvSpPr>
@@ -28187,7 +28334,7 @@
                 </a:solidFill>
                 <a:latin typeface="Montserrat"/>
               </a:rPr>
-              <a:t>A3</a:t>
+              <a:t>A4</a:t>
             </a:r>
           </a:p>
         </p:txBody>
@@ -28383,382 +28530,6 @@
 </file>
 
 <file path=ppt/slides/slide60.xml><?xml version="1.0" encoding="utf-8"?>
-<p:sld xmlns:a="http://schemas.openxmlformats.org/drawingml/2006/main" xmlns:p="http://schemas.openxmlformats.org/presentationml/2006/main" xmlns:r="http://schemas.openxmlformats.org/officeDocument/2006/relationships">
-  <p:cSld>
-    <p:bg>
-      <p:bgPr>
-        <a:solidFill>
-          <a:srgbClr val="FCFCFB"/>
-        </a:solidFill>
-        <a:effectLst/>
-      </p:bgPr>
-    </p:bg>
-    <p:spTree>
-      <p:nvGrpSpPr>
-        <p:cNvPr id="1" name=""/>
-        <p:cNvGrpSpPr/>
-        <p:nvPr/>
-      </p:nvGrpSpPr>
-      <p:grpSpPr/>
-      <p:sp>
-        <p:nvSpPr>
-          <p:cNvPr id="2" name="Rectangle 1"/>
-          <p:cNvSpPr/>
-          <p:nvPr/>
-        </p:nvSpPr>
-        <p:spPr>
-          <a:xfrm>
-            <a:off x="0" y="0"/>
-            <a:ext cx="177800" cy="6858000"/>
-          </a:xfrm>
-          <a:prstGeom prst="rect">
-            <a:avLst/>
-          </a:prstGeom>
-          <a:solidFill>
-            <a:srgbClr val="0F7C86"/>
-          </a:solidFill>
-          <a:ln>
-            <a:noFill/>
-          </a:ln>
-          <a:effectLst/>
-        </p:spPr>
-        <p:style>
-          <a:lnRef idx="1">
-            <a:schemeClr val="accent1"/>
-          </a:lnRef>
-          <a:fillRef idx="3">
-            <a:schemeClr val="accent1"/>
-          </a:fillRef>
-          <a:effectRef idx="2">
-            <a:schemeClr val="accent1"/>
-          </a:effectRef>
-          <a:fontRef idx="minor">
-            <a:schemeClr val="lt1"/>
-          </a:fontRef>
-        </p:style>
-        <p:txBody>
-          <a:bodyPr rtlCol="0" anchor="ctr"/>
-          <a:lstStyle/>
-          <a:p>
-            <a:pPr algn="ctr"/>
-          </a:p>
-        </p:txBody>
-      </p:sp>
-      <p:sp>
-        <p:nvSpPr>
-          <p:cNvPr id="3" name="TextBox 2"/>
-          <p:cNvSpPr txBox="1"/>
-          <p:nvPr/>
-        </p:nvSpPr>
-        <p:spPr>
-          <a:xfrm>
-            <a:off x="1168400" y="1955304"/>
-            <a:ext cx="10307828" cy="379710"/>
-          </a:xfrm>
-          <a:prstGeom prst="rect">
-            <a:avLst/>
-          </a:prstGeom>
-          <a:noFill/>
-        </p:spPr>
-        <p:txBody>
-          <a:bodyPr wrap="square" lIns="0" rIns="0" tIns="0" bIns="0" anchor="t">
-            <a:noAutofit/>
-          </a:bodyPr>
-          <a:lstStyle/>
-          <a:p>
-            <a:pPr algn="l">
-              <a:lnSpc>
-                <a:spcPct val="94000"/>
-              </a:lnSpc>
-            </a:pPr>
-            <a:r>
-              <a:rPr sz="2600" b="1" i="0">
-                <a:solidFill>
-                  <a:srgbClr val="1B2F4B"/>
-                </a:solidFill>
-                <a:latin typeface="Montserrat"/>
-              </a:rPr>
-              <a:t>Referências: estratégias naturalistas e evidência</a:t>
-            </a:r>
-          </a:p>
-        </p:txBody>
-      </p:sp>
-      <p:sp>
-        <p:nvSpPr>
-          <p:cNvPr id="4" name="TextBox 3"/>
-          <p:cNvSpPr txBox="1"/>
-          <p:nvPr/>
-        </p:nvSpPr>
-        <p:spPr>
-          <a:xfrm>
-            <a:off x="1168400" y="2449314"/>
-            <a:ext cx="10307828" cy="426641"/>
-          </a:xfrm>
-          <a:prstGeom prst="rect">
-            <a:avLst/>
-          </a:prstGeom>
-          <a:noFill/>
-        </p:spPr>
-        <p:txBody>
-          <a:bodyPr wrap="square" lIns="0" rIns="0" tIns="0" bIns="0" anchor="t">
-            <a:noAutofit/>
-          </a:bodyPr>
-          <a:lstStyle/>
-          <a:p>
-            <a:pPr algn="l">
-              <a:lnSpc>
-                <a:spcPct val="115000"/>
-              </a:lnSpc>
-            </a:pPr>
-            <a:r>
-              <a:rPr sz="1200" b="0" i="0">
-                <a:solidFill>
-                  <a:srgbClr val="2E3A4A"/>
-                </a:solidFill>
-                <a:latin typeface="Montserrat"/>
-              </a:rPr>
-              <a:t>Sandbank, M., Bottema-Beutel, K., Crowley, S., et al. (2020). Project AIM: Autism intervention meta-analysis for studies of young children. </a:t>
-            </a:r>
-            <a:r>
-              <a:rPr sz="1200" b="0" i="1">
-                <a:solidFill>
-                  <a:srgbClr val="2E3A4A"/>
-                </a:solidFill>
-                <a:latin typeface="Montserrat"/>
-              </a:rPr>
-              <a:t>Psychological Bulletin, 146</a:t>
-            </a:r>
-            <a:r>
-              <a:rPr sz="1200" b="0" i="0">
-                <a:solidFill>
-                  <a:srgbClr val="2E3A4A"/>
-                </a:solidFill>
-                <a:latin typeface="Montserrat"/>
-              </a:rPr>
-              <a:t>(1), 1–29. https://doi.org/10.1037/bul0000215</a:t>
-            </a:r>
-          </a:p>
-        </p:txBody>
-      </p:sp>
-      <p:sp>
-        <p:nvSpPr>
-          <p:cNvPr id="5" name="TextBox 4"/>
-          <p:cNvSpPr txBox="1"/>
-          <p:nvPr/>
-        </p:nvSpPr>
-        <p:spPr>
-          <a:xfrm>
-            <a:off x="1168400" y="2990255"/>
-            <a:ext cx="10307828" cy="426641"/>
-          </a:xfrm>
-          <a:prstGeom prst="rect">
-            <a:avLst/>
-          </a:prstGeom>
-          <a:noFill/>
-        </p:spPr>
-        <p:txBody>
-          <a:bodyPr wrap="square" lIns="0" rIns="0" tIns="0" bIns="0" anchor="t">
-            <a:noAutofit/>
-          </a:bodyPr>
-          <a:lstStyle/>
-          <a:p>
-            <a:pPr algn="l">
-              <a:lnSpc>
-                <a:spcPct val="115000"/>
-              </a:lnSpc>
-            </a:pPr>
-            <a:r>
-              <a:rPr sz="1200" b="0" i="0">
-                <a:solidFill>
-                  <a:srgbClr val="2E3A4A"/>
-                </a:solidFill>
-                <a:latin typeface="Montserrat"/>
-              </a:rPr>
-              <a:t>Sandbank, M., Bottema-Beutel, K., Crowley LaPoint, S., et al. (2023). Autism intervention meta-analysis of early childhood studies (Project AIM): Updated systematic review and secondary analysis. </a:t>
-            </a:r>
-            <a:r>
-              <a:rPr sz="1200" b="0" i="1">
-                <a:solidFill>
-                  <a:srgbClr val="2E3A4A"/>
-                </a:solidFill>
-                <a:latin typeface="Montserrat"/>
-              </a:rPr>
-              <a:t>BMJ, 383</a:t>
-            </a:r>
-            <a:r>
-              <a:rPr sz="1200" b="0" i="0">
-                <a:solidFill>
-                  <a:srgbClr val="2E3A4A"/>
-                </a:solidFill>
-                <a:latin typeface="Montserrat"/>
-              </a:rPr>
-              <a:t>, e076733. https://doi.org/10.1136/bmj-2023-076733</a:t>
-            </a:r>
-          </a:p>
-        </p:txBody>
-      </p:sp>
-      <p:sp>
-        <p:nvSpPr>
-          <p:cNvPr id="6" name="TextBox 5"/>
-          <p:cNvSpPr txBox="1"/>
-          <p:nvPr/>
-        </p:nvSpPr>
-        <p:spPr>
-          <a:xfrm>
-            <a:off x="1168400" y="3531195"/>
-            <a:ext cx="10307828" cy="639961"/>
-          </a:xfrm>
-          <a:prstGeom prst="rect">
-            <a:avLst/>
-          </a:prstGeom>
-          <a:noFill/>
-        </p:spPr>
-        <p:txBody>
-          <a:bodyPr wrap="square" lIns="0" rIns="0" tIns="0" bIns="0" anchor="t">
-            <a:noAutofit/>
-          </a:bodyPr>
-          <a:lstStyle/>
-          <a:p>
-            <a:pPr algn="l">
-              <a:lnSpc>
-                <a:spcPct val="115000"/>
-              </a:lnSpc>
-            </a:pPr>
-            <a:r>
-              <a:rPr sz="1200" b="0" i="0">
-                <a:solidFill>
-                  <a:srgbClr val="2E3A4A"/>
-                </a:solidFill>
-                <a:latin typeface="Montserrat"/>
-              </a:rPr>
-              <a:t>Schreibman, L., Dawson, G., Stahmer, A. C., et al. (2015). Naturalistic developmental behavioral interventions: Empirically validated treatments for autism spectrum disorder. </a:t>
-            </a:r>
-            <a:r>
-              <a:rPr sz="1200" b="0" i="1">
-                <a:solidFill>
-                  <a:srgbClr val="2E3A4A"/>
-                </a:solidFill>
-                <a:latin typeface="Montserrat"/>
-              </a:rPr>
-              <a:t>Journal of Autism and Developmental Disorders, 45</a:t>
-            </a:r>
-            <a:r>
-              <a:rPr sz="1200" b="0" i="0">
-                <a:solidFill>
-                  <a:srgbClr val="2E3A4A"/>
-                </a:solidFill>
-                <a:latin typeface="Montserrat"/>
-              </a:rPr>
-              <a:t>(8), 2411–2428. https://doi.org/10.1007/s10803-015-2407-8</a:t>
-            </a:r>
-          </a:p>
-        </p:txBody>
-      </p:sp>
-      <p:sp>
-        <p:nvSpPr>
-          <p:cNvPr id="7" name="TextBox 6"/>
-          <p:cNvSpPr txBox="1"/>
-          <p:nvPr/>
-        </p:nvSpPr>
-        <p:spPr>
-          <a:xfrm>
-            <a:off x="1168400" y="4285456"/>
-            <a:ext cx="10307828" cy="426641"/>
-          </a:xfrm>
-          <a:prstGeom prst="rect">
-            <a:avLst/>
-          </a:prstGeom>
-          <a:noFill/>
-        </p:spPr>
-        <p:txBody>
-          <a:bodyPr wrap="square" lIns="0" rIns="0" tIns="0" bIns="0" anchor="t">
-            <a:noAutofit/>
-          </a:bodyPr>
-          <a:lstStyle/>
-          <a:p>
-            <a:pPr algn="l">
-              <a:lnSpc>
-                <a:spcPct val="115000"/>
-              </a:lnSpc>
-            </a:pPr>
-            <a:r>
-              <a:rPr sz="1200" b="0" i="0">
-                <a:solidFill>
-                  <a:srgbClr val="2E3A4A"/>
-                </a:solidFill>
-                <a:latin typeface="Montserrat"/>
-              </a:rPr>
-              <a:t>Stokes, T. F., &amp; Baer, D. M. (1977). An implicit technology of generalization. </a:t>
-            </a:r>
-            <a:r>
-              <a:rPr sz="1200" b="0" i="1">
-                <a:solidFill>
-                  <a:srgbClr val="2E3A4A"/>
-                </a:solidFill>
-                <a:latin typeface="Montserrat"/>
-              </a:rPr>
-              <a:t>Journal of Applied Behavior Analysis, 10</a:t>
-            </a:r>
-            <a:r>
-              <a:rPr sz="1200" b="0" i="0">
-                <a:solidFill>
-                  <a:srgbClr val="2E3A4A"/>
-                </a:solidFill>
-                <a:latin typeface="Montserrat"/>
-              </a:rPr>
-              <a:t>(2), 349–367. https://doi.org/10.1901/jaba.1977.10-349</a:t>
-            </a:r>
-          </a:p>
-        </p:txBody>
-      </p:sp>
-      <p:sp>
-        <p:nvSpPr>
-          <p:cNvPr id="8" name="TextBox 7"/>
-          <p:cNvSpPr txBox="1"/>
-          <p:nvPr/>
-        </p:nvSpPr>
-        <p:spPr>
-          <a:xfrm>
-            <a:off x="10820400" y="6343650"/>
-            <a:ext cx="784860" cy="184150"/>
-          </a:xfrm>
-          <a:prstGeom prst="rect">
-            <a:avLst/>
-          </a:prstGeom>
-          <a:noFill/>
-        </p:spPr>
-        <p:txBody>
-          <a:bodyPr wrap="square" lIns="0" rIns="0" tIns="0" bIns="0" anchor="t">
-            <a:noAutofit/>
-          </a:bodyPr>
-          <a:lstStyle/>
-          <a:p>
-            <a:pPr algn="r">
-              <a:lnSpc>
-                <a:spcPct val="98000"/>
-              </a:lnSpc>
-            </a:pPr>
-            <a:r>
-              <a:rPr sz="1200" b="0" i="0">
-                <a:solidFill>
-                  <a:srgbClr val="66717F"/>
-                </a:solidFill>
-                <a:latin typeface="Montserrat"/>
-              </a:rPr>
-              <a:t>A4</a:t>
-            </a:r>
-          </a:p>
-        </p:txBody>
-      </p:sp>
-    </p:spTree>
-  </p:cSld>
-  <p:clrMapOvr>
-    <a:masterClrMapping/>
-  </p:clrMapOvr>
-</p:sld>
-</file>
-
-<file path=ppt/slides/slide61.xml><?xml version="1.0" encoding="utf-8"?>
 <p:sld xmlns:a="http://schemas.openxmlformats.org/drawingml/2006/main" xmlns:p="http://schemas.openxmlformats.org/presentationml/2006/main" xmlns:r="http://schemas.openxmlformats.org/officeDocument/2006/relationships">
   <p:cSld>
     <p:bg>

--- a/workshop-aba-tea-lacc/apresentacao/Apresentacao_Workshop_ABA_TEA.pptx
+++ b/workshop-aba-tea-lacc/apresentacao/Apresentacao_Workshop_ABA_TEA.pptx
@@ -65,6 +65,7 @@
     <p:sldId id="313" r:id="rId65"/>
     <p:sldId id="314" r:id="rId66"/>
     <p:sldId id="315" r:id="rId67"/>
+    <p:sldId id="316" r:id="rId68"/>
   </p:sldIdLst>
   <p:sldSz cx="12192000" cy="6858000" type="screen4x3"/>
   <p:notesSz cx="6858000" cy="9144000"/>
@@ -1407,13 +1408,13 @@
           <a:lstStyle/>
           <a:p>
             <a:r>
-              <a:t>Formar duplas com quem está ao lado. Projetar o slide 20 logo em seguida. Tempo: 0,5 min (10h13).</a:t>
+              <a:t>Formar duplas com quem está ao lado. Projetar o slide 21 logo em seguida. Tempo: 0,5 min (10h13).</a:t>
             </a:r>
           </a:p>
           <a:p/>
           <a:p>
             <a:r>
-              <a:t>RESPOSTAS: ver slide 21. Desafio: dar um tempo fora da atividade SEM atenção ajuda na situação 1 (o comportamento deixa de produzir atenção), mas piora a 2 (a criança escapa da tarefa). Se o tempo fora tiver conversa ou consolo, também reforça a situação 1. Devolver o tablet 'para acalmar' reduz o choro na hora, mas fortalece o comportamento nas próximas vezes (situação 3). O acerto é justificar pela consequência.</a:t>
+              <a:t>RESPOSTAS: ver slide 22. Desafio: dar um tempo fora da atividade SEM atenção ajuda na situação 1 (o comportamento deixa de produzir atenção), mas piora a 2 (a criança escapa da tarefa). Se o tempo fora tiver conversa ou consolo, também reforça a situação 1. Devolver o tablet 'para acalmar' reduz o choro na hora, mas fortalece o comportamento nas próximas vezes (situação 3). O acerto é justificar pela consequência.</a:t>
             </a:r>
           </a:p>
         </p:txBody>
@@ -2761,7 +2762,7 @@
           <a:lstStyle/>
           <a:p>
             <a:r>
-              <a:t>O vídeo tem som (música e efeitos): conferir caixa de som antes. No artefato, o vídeo está no próprio slide: clique nele para começar (toca com som). No PDF não há vídeo: usar o arquivo Video_Theo_animacao.mp4 (pasta apresentacao) à parte. Exibir uma vez, dentro dos 2 minutos de instruções. Depois do vídeo: "Vocês viram UM episódio. Agora vejam o que a equipe registrou em quatro semanas" e projetar a vinheta. Na plenária, pergunta opcional: "O que mantém o comportamento da terapeuta?" (devolver os trilhos encerra o grito e alivia o adulto). Se o vídeo não estiver disponível ou não funcionar, pular este slide: a atividade funciona só com o texto. Não mostrar respostas agora: as perguntas do vídeo são respondidas pelos grupos e corrigidas na plenária (slide 36a).</a:t>
+              <a:t>O vídeo tem som (música e efeitos): conferir caixa de som antes. No artefato, o vídeo está no próprio slide: clique nele para começar (toca com som). No PDF não há vídeo: usar o arquivo Video_Theo_animacao.mp4 (pasta apresentacao) à parte. Exibir uma vez, dentro dos 2 minutos de instruções. Depois do vídeo: "Vocês viram UM episódio. Agora vejam o que a equipe registrou em quatro semanas" e projetar a vinheta. Na plenária, pergunta opcional: "O que mantém o comportamento da terapeuta?" (devolver os trilhos encerra o grito e alivia o adulto). Se o vídeo não estiver disponível ou não funcionar, pular este slide: a atividade funciona só com o texto. Não mostrar respostas agora: as perguntas do vídeo são respondidas pelos grupos e corrigidas na plenária (slide 43).</a:t>
             </a:r>
           </a:p>
           <a:p/>
@@ -2837,7 +2838,7 @@
           <a:lstStyle/>
           <a:p>
             <a:r>
-              <a:t>Ler em voz alta uma vez (cerca de 1,5 min, com o slide seguinte). Circular entre os grupos. Avisar aos 5 min ("passem para a pergunta do rodízio") e quando faltar 1 min. Os slides 35, 35b e 36 ficam alternados durante os 10 min de trabalho em grupo.</a:t>
+              <a:t>Ler em voz alta uma vez (cerca de 1,5 min, com o slide seguinte). Circular entre os grupos. Avisar aos 5 min ("passem para a pergunta do rodízio") e quando faltar 1 min. Os slides 39, 40 e 41 ficam alternados durante os 10 min de trabalho em grupo.</a:t>
             </a:r>
           </a:p>
           <a:p/>
@@ -3059,7 +3060,7 @@
           <a:lstStyle/>
           <a:p>
             <a:r>
-              <a:t>Alternar com os slides da vinheta. Ao circular: grupos que listam hipóteses sem dados estão reconhecendo categorias; pergunte "que trecho da vinheta sustenta isso?". Para grupos que terminarem antes: slide R2 (dado novo) ou R1 (Lara). A antiga pergunta 5 (como distinguir as hipóteses) foi retirada; as perguntas 5 e 6 de agora são a estratégia e o dilema.</a:t>
+              <a:t>Alternar com os slides da vinheta. Ao circular: grupos que listam hipóteses sem dados estão reconhecendo categorias; pergunte "que trecho da vinheta sustenta isso?". Grupos que terminarem antes podem aprofundar a pergunta 4. Depois das respostas vêm um dado novo sobre o Theo e, se houver tempo, o caso extra da Lara. A antiga pergunta 5 (como distinguir as hipóteses) foi retirada; as perguntas 5 e 6 de agora são a estratégia e o dilema.</a:t>
             </a:r>
           </a:p>
           <a:p/>
@@ -3135,7 +3136,13 @@
           <a:lstStyle/>
           <a:p>
             <a:r>
-              <a:t>Slide de respostas: mostrar depois que a turma responder.</a:t>
+              <a:t>Seguir a ordem: comportamento (1 min, turma) · antes e depois (1 min) · explicações possíveis com dado que ajuda e dado que atrapalha (2 min, dois grupos; destacar o lanche) · o que fazer e o risco de errar a explicação (2 min, grupos da pergunta 5) · dilema dos trilhos (1,5 min, grupos da pergunta 6) · fechamento relendo o aviso (0,5 min). Logo depois deste slide vêm os slides de respostas, na ordem das perguntas: mostrar cada um conforme a pergunta for discutida. Tempo: 8 min (até 11h23).</a:t>
+            </a:r>
+          </a:p>
+          <a:p/>
+          <a:p>
+            <a:r>
+              <a:t>RESPOSTAS 5: estratégia para a explicação 'trilhos' ('primeiro mesa, depois trem'; ensinar a pedir 'mais trem' e a esperar) tem pouco efeito se a explicação real for fugir da mesa; estratégia para 'fugir da mesa' (tarefa curta, tema de trem; ensinar a pedir 'pausa') não resolve se for 'trilhos'; adiar a mesa quando ele grita FORTALECE o comportamento. Errar a explicação pode ensinar o contrário. RESPOSTAS 6: acolher a mãe e argumentar: o interesse não é o problema e pode ser recurso de ensino; tirar os trilhos não ensina a pedir 'mais' ou 'pausa'; pode não resolver se a função for fugir da mesa; reduz bem-estar e engajamento; decidir junto, com plano para casa e supervisão.</a:t>
             </a:r>
           </a:p>
         </p:txBody>
@@ -3415,13 +3422,7 @@
           <a:lstStyle/>
           <a:p>
             <a:r>
-              <a:t>Seguir a ordem: comportamento (1 min, turma) · antes e depois (1 min) · explicações possíveis com dado que ajuda e dado que atrapalha (2 min, dois grupos; destacar o lanche) · o que fazer e o risco de errar a explicação (2 min, grupos da pergunta 5) · dilema dos trilhos (1,5 min, grupos da pergunta 6) · fechamento relendo o aviso (0,5 min). Mostrar os slides de respostas 36a a 36d conforme cada pergunta for discutida. Tempo: 8 min (até 11h23).</a:t>
-            </a:r>
-          </a:p>
-          <a:p/>
-          <a:p>
-            <a:r>
-              <a:t>RESPOSTAS 5: estratégia para a explicação 'trilhos' ('primeiro mesa, depois trem'; ensinar a pedir 'mais trem' e a esperar) tem pouco efeito se a explicação real for fugir da mesa; estratégia para 'fugir da mesa' (tarefa curta, tema de trem; ensinar a pedir 'pausa') não resolve se for 'trilhos'; adiar a mesa quando ele grita FORTALECE o comportamento. Errar a explicação pode ensinar o contrário. RESPOSTAS 6: acolher a mãe e argumentar: o interesse não é o problema e pode ser recurso de ensino; tirar os trilhos não ensina a pedir 'mais' ou 'pausa'; pode não resolver se a função for fugir da mesa; reduz bem-estar e engajamento; decidir junto, com plano para casa e supervisão.</a:t>
+              <a:t>Slide de respostas: mostrar depois que a turma responder.</a:t>
             </a:r>
           </a:p>
         </p:txBody>
@@ -3491,13 +3492,7 @@
           <a:lstStyle/>
           <a:p>
             <a:r>
-              <a:t>Pergunta de checagem antes de avançar: "O que vocês NÃO podem concluir a partir da vinheta?" (objetivo 7). Tempo: 3 min (início da síntese, 11h23).</a:t>
-            </a:r>
-          </a:p>
-          <a:p/>
-          <a:p>
-            <a:r>
-              <a:t>RESPOSTA DA CHECAGEM: não podemos concluir a FUNÇÃO do comportamento. A vinheta só permite levantar hipóteses; concluir exige avaliação, mais dados e supervisão. Também não dá para garantir que uma estratégia vai funcionar antes de testá-la com dados.</a:t>
+              <a:t>Raciocínio esperado: o dado fortalece 'quer os trilhos' (ou as duas juntas) e enfraquece 'foge da mesa'. Mas são 4 sessões, sem controle de outras variáveis: é mais uma pista, não uma conclusão. Próximo passo: avaliação organizada, com supervisão.</a:t>
             </a:r>
           </a:p>
         </p:txBody>
@@ -3567,7 +3562,7 @@
           <a:lstStyle/>
           <a:p>
             <a:r>
-              <a:t>3 minutos. Se não houver perguntas, retomar a pergunta disparadora do início.</a:t>
+              <a:t>Slide de respostas: mostrar depois que a turma responder.</a:t>
             </a:r>
           </a:p>
         </p:txBody>
@@ -3637,7 +3632,7 @@
           <a:lstStyle/>
           <a:p>
             <a:r>
-              <a:t>Baer et al., Hanley (2012), Tiger et al. e Schreibman et al. estão disponíveis em texto completo no PubMed Central. Tempo: 1 min.</a:t>
+              <a:t>Usar só se houver tempo; caso contrário, pular para "Cinco mensagens para levar". Lara tem 14 anos: mostra que o raciocínio vale também para adolescentes e para a escola.</a:t>
             </a:r>
           </a:p>
         </p:txBody>
@@ -3777,7 +3772,13 @@
           <a:lstStyle/>
           <a:p>
             <a:r>
-              <a:t>Não incluir contato ou registro profissional que não tenham sido informados. Encerramento às 11h30.</a:t>
+              <a:t>Vídeo com som (música, conversa de fundo dos colegas, passos e porta): conferir caixa de som. No artefato, clicar no vídeo para começar. No PDF não há vídeo: usar o arquivo Video_Lara_animacao.mp4 (pasta apresentacao) à parte. Depois do vídeo: "Vocês viram UM episódio. Agora vejam o que a escola registrou em dois meses" e mostrar a história.</a:t>
+            </a:r>
+          </a:p>
+          <a:p/>
+          <a:p>
+            <a:r>
+              <a:t>RESPOSTAS DO VÍDEO: Antes = a professora propõe trabalho em grupo; os colegas se juntam e a sala fica barulhenta. O que ela faz = coloca o capuz, abaixa a cabeça, levanta e sai da sala sem avisar. Depois = fica sozinha e tranquila na biblioteca, desenhando (o barulho e o grupo acabam para ela).</a:t>
             </a:r>
           </a:p>
         </p:txBody>
@@ -3847,13 +3848,13 @@
           <a:lstStyle/>
           <a:p>
             <a:r>
-              <a:t>Vídeo com som (música, conversa de fundo dos colegas, passos e porta): conferir caixa de som. No artefato, clicar no vídeo para começar. No PDF não há vídeo: usar o arquivo Video_Lara_animacao.mp4 (pasta apresentacao) à parte. Depois do vídeo: "Vocês viram UM episódio. Agora vejam o que a escola registrou em dois meses" e mostrar a história.</a:t>
+              <a:t>Caso extra: usar só se houver tempo (não entra nos 120 minutos) ou indicar como estudo depois do workshop. Mesma sequência do Theo: vídeo, história, perguntas, respostas. A comparação ABA × TCC com este caso já foi feita no slide 28.</a:t>
             </a:r>
           </a:p>
           <a:p/>
           <a:p>
             <a:r>
-              <a:t>RESPOSTAS DO VÍDEO: Antes = a professora propõe trabalho em grupo; os colegas se juntam e a sala fica barulhenta. O que ela faz = coloca o capuz, abaixa a cabeça, levanta e sai da sala sem avisar. Depois = fica sozinha e tranquila na biblioteca, desenhando (o barulho e o grupo acabam para ela).</a:t>
+              <a:t>RESPOSTAS: 1. Coloca o capuz, abaixa a cabeça e sai da sala sem avisar. 2. Antes: trabalho em grupo, sala barulhenta. Depois: sai e vai para a biblioteca. 3. Fugir do barulho, fugir da interação (medo de errar) ou as duas; ir para a biblioteca pode reforçar a saída. 4. Trabalhar sempre sozinha alivia agora, mas pode reforçar a fuga e tirar chances de participar; só como algo temporário, combinado com ela. No lugar: lugar mais silencioso ou protetor de ouvido (se ela quiser), grupo menor, papel definido, jeito combinado de pedir pausa. O capuz não é alvo.</a:t>
             </a:r>
           </a:p>
         </p:txBody>
@@ -3923,13 +3924,7 @@
           <a:lstStyle/>
           <a:p>
             <a:r>
-              <a:t>Só para grupos que terminarem antes, ou como estudo posterior. Não entra no tempo. A comparação ABA × TCC com este caso já foi feita no slide 26.</a:t>
-            </a:r>
-          </a:p>
-          <a:p/>
-          <a:p>
-            <a:r>
-              <a:t>RESPOSTAS: 1. Coloca o capuz, abaixa a cabeça e sai da sala sem avisar. 2. Antes: trabalho em grupo, sala barulhenta. Depois: sai e vai para a biblioteca. 3. Fugir do barulho, fugir da interação (medo de errar) ou as duas; ir para a biblioteca pode reforçar a saída. 4. Trabalhar sempre sozinha alivia agora, mas pode reforçar a fuga e tirar chances de participar; só como algo temporário, combinado com ela. No lugar: lugar mais silencioso ou protetor de ouvido (se ela quiser), grupo menor, papel definido, jeito combinado de pedir pausa. O capuz não é alvo.</a:t>
+              <a:t>Slide de respostas: mostrar depois que a turma responder.</a:t>
             </a:r>
           </a:p>
         </p:txBody>
@@ -3999,7 +3994,13 @@
           <a:lstStyle/>
           <a:p>
             <a:r>
-              <a:t>Slide de respostas: mostrar depois que a turma responder.</a:t>
+              <a:t>Pergunta de checagem antes de avançar: "O que vocês NÃO podem concluir a partir da vinheta?" (objetivo 7). Tempo: 3 min (início da síntese, 11h23).</a:t>
+            </a:r>
+          </a:p>
+          <a:p/>
+          <a:p>
+            <a:r>
+              <a:t>RESPOSTA DA CHECAGEM: não podemos concluir a FUNÇÃO do comportamento. A vinheta só permite levantar hipóteses; concluir exige avaliação, mais dados e supervisão. Também não dá para garantir que uma estratégia vai funcionar antes de testá-la com dados.</a:t>
             </a:r>
           </a:p>
         </p:txBody>
@@ -4069,7 +4070,7 @@
           <a:lstStyle/>
           <a:p>
             <a:r>
-              <a:t>Raciocínio esperado: o dado fortalece 'quer os trilhos' (ou as duas juntas) e enfraquece 'foge da mesa'. Mas são 4 sessões, sem controle de outras variáveis: é mais uma pista, não uma conclusão. Próximo passo: avaliação organizada, com supervisão.</a:t>
+              <a:t>3 minutos. Se não houver perguntas, retomar a pergunta disparadora do início.</a:t>
             </a:r>
           </a:p>
         </p:txBody>
@@ -4139,7 +4140,7 @@
           <a:lstStyle/>
           <a:p>
             <a:r>
-              <a:t>Slide de respostas: mostrar depois que a turma responder.</a:t>
+              <a:t>Baer et al., Hanley (2012), Tiger et al. e Schreibman et al. estão disponíveis em texto completo no PubMed Central. Tempo: 1 min.</a:t>
             </a:r>
           </a:p>
         </p:txBody>
@@ -4209,7 +4210,7 @@
           <a:lstStyle/>
           <a:p>
             <a:r>
-              <a:t>Lista completa de autores em REFERENCIAS.md.</a:t>
+              <a:t>Não incluir contato ou registro profissional que não tenham sido informados. Encerramento às 11h30.</a:t>
             </a:r>
           </a:p>
         </p:txBody>
@@ -4279,7 +4280,7 @@
           <a:lstStyle/>
           <a:p>
             <a:r>
-              <a:t>Lista completa em REFERENCIAS.md.</a:t>
+              <a:t>Lista completa de autores em REFERENCIAS.md.</a:t>
             </a:r>
           </a:p>
         </p:txBody>
@@ -4489,7 +4490,7 @@
           <a:lstStyle/>
           <a:p>
             <a:r>
-              <a:t>Coletar 4 a 6 respostas oralmente e ANOTÁ-LAS para retomar no slide 22. Respostas esperadas: quer continuar brincando; não quer fazer a tarefa; quer atenção; excesso sensorial; cansaço. Não corrigir agora. Dizer: "Vamos voltar a essas respostas daqui a pouco." Tempo: 4 min (até 9h40).</a:t>
+              <a:t>Coletar 4 a 6 respostas oralmente e ANOTÁ-LAS para retomar no slide 24. Respostas esperadas: quer continuar brincando; não quer fazer a tarefa; quer atenção; excesso sensorial; cansaço. Não corrigir agora. Dizer: "Vamos voltar a essas respostas daqui a pouco." Tempo: 4 min (até 9h40).</a:t>
             </a:r>
           </a:p>
           <a:p/>
@@ -4521,6 +4522,76 @@
 </file>
 
 <file path=ppt/notesSlides/notesSlide60.xml><?xml version="1.0" encoding="utf-8"?>
+<p:notes xmlns:a="http://schemas.openxmlformats.org/drawingml/2006/main" xmlns:p="http://schemas.openxmlformats.org/presentationml/2006/main" xmlns:r="http://schemas.openxmlformats.org/officeDocument/2006/relationships">
+  <p:cSld>
+    <p:spTree>
+      <p:nvGrpSpPr>
+        <p:cNvPr id="1" name=""/>
+        <p:cNvGrpSpPr/>
+        <p:nvPr/>
+      </p:nvGrpSpPr>
+      <p:grpSpPr>
+        <a:xfrm>
+          <a:off x="0" y="0"/>
+          <a:ext cx="0" cy="0"/>
+          <a:chOff x="0" y="0"/>
+          <a:chExt cx="0" cy="0"/>
+        </a:xfrm>
+      </p:grpSpPr>
+      <p:sp>
+        <p:nvSpPr>
+          <p:cNvPr id="2" name="Slide Image Placeholder 1"/>
+          <p:cNvSpPr>
+            <a:spLocks noGrp="1"/>
+          </p:cNvSpPr>
+          <p:nvPr>
+            <p:ph type="sldImg" idx="2"/>
+          </p:nvPr>
+        </p:nvSpPr>
+        <p:spPr/>
+      </p:sp>
+      <p:sp>
+        <p:nvSpPr>
+          <p:cNvPr id="3" name="Notes Placeholder 2"/>
+          <p:cNvSpPr>
+            <a:spLocks noGrp="1"/>
+          </p:cNvSpPr>
+          <p:nvPr>
+            <p:ph type="body" idx="3" sz="quarter"/>
+          </p:nvPr>
+        </p:nvSpPr>
+        <p:spPr/>
+        <p:txBody>
+          <a:bodyPr/>
+          <a:lstStyle/>
+          <a:p>
+            <a:r>
+              <a:t>Lista completa em REFERENCIAS.md.</a:t>
+            </a:r>
+          </a:p>
+        </p:txBody>
+      </p:sp>
+      <p:sp>
+        <p:nvSpPr>
+          <p:cNvPr id="4" name="Slide Number Placeholder 3"/>
+          <p:cNvSpPr>
+            <a:spLocks noGrp="1"/>
+          </p:cNvSpPr>
+          <p:nvPr>
+            <p:ph type="sldNum" idx="5" sz="quarter"/>
+          </p:nvPr>
+        </p:nvSpPr>
+        <p:spPr/>
+      </p:sp>
+    </p:spTree>
+  </p:cSld>
+  <p:clrMapOvr>
+    <a:masterClrMapping/>
+  </p:clrMapOvr>
+</p:notes>
+</file>
+
+<file path=ppt/notesSlides/notesSlide61.xml><?xml version="1.0" encoding="utf-8"?>
 <p:notes xmlns:a="http://schemas.openxmlformats.org/drawingml/2006/main" xmlns:p="http://schemas.openxmlformats.org/presentationml/2006/main" xmlns:r="http://schemas.openxmlformats.org/officeDocument/2006/relationships">
   <p:cSld>
     <p:spTree>
@@ -7841,7 +7912,7 @@
         </p:nvSpPr>
         <p:spPr>
           <a:xfrm>
-            <a:off x="1016000" y="1723430"/>
+            <a:off x="1016000" y="1306215"/>
             <a:ext cx="10464800" cy="247650"/>
           </a:xfrm>
           <a:prstGeom prst="rect">
@@ -7880,7 +7951,7 @@
         </p:nvSpPr>
         <p:spPr>
           <a:xfrm>
-            <a:off x="1016000" y="2148880"/>
+            <a:off x="1016000" y="1731665"/>
             <a:ext cx="10464800" cy="889000"/>
           </a:xfrm>
           <a:prstGeom prst="rect">
@@ -7919,7 +7990,46 @@
         </p:nvSpPr>
         <p:spPr>
           <a:xfrm>
-            <a:off x="1016000" y="3215680"/>
+            <a:off x="1016000" y="2798465"/>
+            <a:ext cx="10464800" cy="247650"/>
+          </a:xfrm>
+          <a:prstGeom prst="rect">
+            <a:avLst/>
+          </a:prstGeom>
+          <a:noFill/>
+        </p:spPr>
+        <p:txBody>
+          <a:bodyPr wrap="square" lIns="0" rIns="0" tIns="0" bIns="0" anchor="t">
+            <a:noAutofit/>
+          </a:bodyPr>
+          <a:lstStyle/>
+          <a:p>
+            <a:pPr algn="l">
+              <a:lnSpc>
+                <a:spcPct val="107000"/>
+              </a:lnSpc>
+            </a:pPr>
+            <a:r>
+              <a:rPr sz="1500" b="0" i="0">
+                <a:solidFill>
+                  <a:srgbClr val="9FD3D8"/>
+                </a:solidFill>
+                <a:latin typeface="Montserrat"/>
+              </a:rPr>
+              <a:t>ABA (Análise do Comportamento Aplicada) e TEA (Transtorno do Espectro Autista)</a:t>
+            </a:r>
+          </a:p>
+        </p:txBody>
+      </p:sp>
+      <p:sp>
+        <p:nvSpPr>
+          <p:cNvPr id="6" name="TextBox 5"/>
+          <p:cNvSpPr txBox="1"/>
+          <p:nvPr/>
+        </p:nvSpPr>
+        <p:spPr>
+          <a:xfrm>
+            <a:off x="1016000" y="3223915"/>
             <a:ext cx="10464800" cy="426641"/>
           </a:xfrm>
           <a:prstGeom prst="rect">
@@ -7952,13 +8062,52 @@
       </p:sp>
       <p:sp>
         <p:nvSpPr>
-          <p:cNvPr id="6" name="TextBox 5"/>
-          <p:cNvSpPr txBox="1"/>
-          <p:nvPr/>
-        </p:nvSpPr>
-        <p:spPr>
-          <a:xfrm>
-            <a:off x="1016000" y="4378920"/>
+          <p:cNvPr id="7" name="TextBox 6"/>
+          <p:cNvSpPr txBox="1"/>
+          <p:nvPr/>
+        </p:nvSpPr>
+        <p:spPr>
+          <a:xfrm>
+            <a:off x="1016000" y="3828355"/>
+            <a:ext cx="10464800" cy="231080"/>
+          </a:xfrm>
+          <a:prstGeom prst="rect">
+            <a:avLst/>
+          </a:prstGeom>
+          <a:noFill/>
+        </p:spPr>
+        <p:txBody>
+          <a:bodyPr wrap="square" lIns="0" rIns="0" tIns="0" bIns="0" anchor="t">
+            <a:noAutofit/>
+          </a:bodyPr>
+          <a:lstStyle/>
+          <a:p>
+            <a:pPr algn="l">
+              <a:lnSpc>
+                <a:spcPct val="107000"/>
+              </a:lnSpc>
+            </a:pPr>
+            <a:r>
+              <a:rPr sz="1400" b="0" i="0">
+                <a:solidFill>
+                  <a:srgbClr val="C9D3DE"/>
+                </a:solidFill>
+                <a:latin typeface="Montserrat"/>
+              </a:rPr>
+              <a:t>(análise funcional: identificar o que mantém um comportamento)</a:t>
+            </a:r>
+          </a:p>
+        </p:txBody>
+      </p:sp>
+      <p:sp>
+        <p:nvSpPr>
+          <p:cNvPr id="8" name="TextBox 7"/>
+          <p:cNvSpPr txBox="1"/>
+          <p:nvPr/>
+        </p:nvSpPr>
+        <p:spPr>
+          <a:xfrm>
+            <a:off x="1016000" y="4796036"/>
             <a:ext cx="10464800" cy="330200"/>
           </a:xfrm>
           <a:prstGeom prst="rect">
@@ -7991,13 +8140,13 @@
       </p:sp>
       <p:sp>
         <p:nvSpPr>
-          <p:cNvPr id="7" name="TextBox 6"/>
-          <p:cNvSpPr txBox="1"/>
-          <p:nvPr/>
-        </p:nvSpPr>
-        <p:spPr>
-          <a:xfrm>
-            <a:off x="1016000" y="4886920"/>
+          <p:cNvPr id="9" name="TextBox 8"/>
+          <p:cNvSpPr txBox="1"/>
+          <p:nvPr/>
+        </p:nvSpPr>
+        <p:spPr>
+          <a:xfrm>
+            <a:off x="1016000" y="5304036"/>
             <a:ext cx="10464800" cy="247650"/>
           </a:xfrm>
           <a:prstGeom prst="rect">
@@ -8106,7 +8255,7 @@
         </p:nvSpPr>
         <p:spPr>
           <a:xfrm>
-            <a:off x="1168400" y="1627584"/>
+            <a:off x="1168400" y="1316534"/>
             <a:ext cx="10307828" cy="963811"/>
           </a:xfrm>
           <a:prstGeom prst="rect">
@@ -8145,7 +8294,7 @@
         </p:nvSpPr>
         <p:spPr>
           <a:xfrm>
-            <a:off x="1168400" y="2921595"/>
+            <a:off x="1168400" y="2610545"/>
             <a:ext cx="4839970" cy="800100"/>
           </a:xfrm>
           <a:prstGeom prst="rect">
@@ -8184,7 +8333,85 @@
         </p:nvSpPr>
         <p:spPr>
           <a:xfrm>
-            <a:off x="1168400" y="3785195"/>
+            <a:off x="1168400" y="3474145"/>
+            <a:ext cx="4839970" cy="906661"/>
+          </a:xfrm>
+          <a:prstGeom prst="rect">
+            <a:avLst/>
+          </a:prstGeom>
+          <a:noFill/>
+        </p:spPr>
+        <p:txBody>
+          <a:bodyPr wrap="square" lIns="0" rIns="0" tIns="0" bIns="0" anchor="t">
+            <a:noAutofit/>
+          </a:bodyPr>
+          <a:lstStyle/>
+          <a:p>
+            <a:pPr algn="l">
+              <a:lnSpc>
+                <a:spcPct val="115000"/>
+              </a:lnSpc>
+            </a:pPr>
+            <a:r>
+              <a:rPr sz="1700" b="0" i="0">
+                <a:solidFill>
+                  <a:srgbClr val="2E3A4A"/>
+                </a:solidFill>
+                <a:latin typeface="Montserrat"/>
+              </a:rPr>
+              <a:t>Estimativa global (mediana, o valor do meio, de 100 por 10.000 em estudos de vários países)</a:t>
+            </a:r>
+          </a:p>
+        </p:txBody>
+      </p:sp>
+      <p:sp>
+        <p:nvSpPr>
+          <p:cNvPr id="6" name="TextBox 5"/>
+          <p:cNvSpPr txBox="1"/>
+          <p:nvPr/>
+        </p:nvSpPr>
+        <p:spPr>
+          <a:xfrm>
+            <a:off x="6477000" y="2610545"/>
+            <a:ext cx="4839970" cy="800100"/>
+          </a:xfrm>
+          <a:prstGeom prst="rect">
+            <a:avLst/>
+          </a:prstGeom>
+          <a:noFill/>
+        </p:spPr>
+        <p:txBody>
+          <a:bodyPr wrap="square" lIns="0" rIns="0" tIns="0" bIns="0" anchor="t">
+            <a:noAutofit/>
+          </a:bodyPr>
+          <a:lstStyle/>
+          <a:p>
+            <a:pPr algn="l">
+              <a:lnSpc>
+                <a:spcPct val="86000"/>
+              </a:lnSpc>
+            </a:pPr>
+            <a:r>
+              <a:rPr sz="6000" b="1" i="0">
+                <a:solidFill>
+                  <a:srgbClr val="0F7C86"/>
+                </a:solidFill>
+                <a:latin typeface="Montserrat"/>
+              </a:rPr>
+              <a:t>1 em 31</a:t>
+            </a:r>
+          </a:p>
+        </p:txBody>
+      </p:sp>
+      <p:sp>
+        <p:nvSpPr>
+          <p:cNvPr id="7" name="TextBox 6"/>
+          <p:cNvSpPr txBox="1"/>
+          <p:nvPr/>
+        </p:nvSpPr>
+        <p:spPr>
+          <a:xfrm>
+            <a:off x="6477000" y="3474145"/>
             <a:ext cx="4839970" cy="604441"/>
           </a:xfrm>
           <a:prstGeom prst="rect">
@@ -8210,21 +8437,21 @@
                 </a:solidFill>
                 <a:latin typeface="Montserrat"/>
               </a:rPr>
-              <a:t>Estimativa global (mediana de 100 por 10.000 em estudos de vários países)</a:t>
-            </a:r>
-          </a:p>
-        </p:txBody>
-      </p:sp>
-      <p:sp>
-        <p:nvSpPr>
-          <p:cNvPr id="6" name="TextBox 5"/>
-          <p:cNvSpPr txBox="1"/>
-          <p:nvPr/>
-        </p:nvSpPr>
-        <p:spPr>
-          <a:xfrm>
-            <a:off x="6477000" y="2921595"/>
-            <a:ext cx="4839970" cy="800100"/>
+              <a:t>Crianças de 8 anos em 16 regiões dos EUA, em 2022</a:t>
+            </a:r>
+          </a:p>
+        </p:txBody>
+      </p:sp>
+      <p:sp>
+        <p:nvSpPr>
+          <p:cNvPr id="8" name="TextBox 7"/>
+          <p:cNvSpPr txBox="1"/>
+          <p:nvPr/>
+        </p:nvSpPr>
+        <p:spPr>
+          <a:xfrm>
+            <a:off x="1168400" y="4711005"/>
+            <a:ext cx="10307828" cy="639961"/>
           </a:xfrm>
           <a:prstGeom prst="rect">
             <a:avLst/>
@@ -8239,95 +8466,17 @@
           <a:p>
             <a:pPr algn="l">
               <a:lnSpc>
-                <a:spcPct val="86000"/>
-              </a:lnSpc>
-            </a:pPr>
-            <a:r>
-              <a:rPr sz="6000" b="1" i="0">
-                <a:solidFill>
-                  <a:srgbClr val="0F7C86"/>
-                </a:solidFill>
-                <a:latin typeface="Montserrat"/>
-              </a:rPr>
-              <a:t>1 em 31</a:t>
-            </a:r>
-          </a:p>
-        </p:txBody>
-      </p:sp>
-      <p:sp>
-        <p:nvSpPr>
-          <p:cNvPr id="7" name="TextBox 6"/>
-          <p:cNvSpPr txBox="1"/>
-          <p:nvPr/>
-        </p:nvSpPr>
-        <p:spPr>
-          <a:xfrm>
-            <a:off x="6477000" y="3785195"/>
-            <a:ext cx="4839970" cy="604441"/>
-          </a:xfrm>
-          <a:prstGeom prst="rect">
-            <a:avLst/>
-          </a:prstGeom>
-          <a:noFill/>
-        </p:spPr>
-        <p:txBody>
-          <a:bodyPr wrap="square" lIns="0" rIns="0" tIns="0" bIns="0" anchor="t">
-            <a:noAutofit/>
-          </a:bodyPr>
-          <a:lstStyle/>
-          <a:p>
-            <a:pPr algn="l">
-              <a:lnSpc>
                 <a:spcPct val="115000"/>
               </a:lnSpc>
             </a:pPr>
             <a:r>
-              <a:rPr sz="1700" b="0" i="0">
+              <a:rPr sz="1800" b="0" i="0">
                 <a:solidFill>
                   <a:srgbClr val="2E3A4A"/>
                 </a:solidFill>
                 <a:latin typeface="Montserrat"/>
               </a:rPr>
-              <a:t>Crianças de 8 anos em 16 regiões dos EUA, em 2022</a:t>
-            </a:r>
-          </a:p>
-        </p:txBody>
-      </p:sp>
-      <p:sp>
-        <p:nvSpPr>
-          <p:cNvPr id="8" name="TextBox 7"/>
-          <p:cNvSpPr txBox="1"/>
-          <p:nvPr/>
-        </p:nvSpPr>
-        <p:spPr>
-          <a:xfrm>
-            <a:off x="1168400" y="4719836"/>
-            <a:ext cx="10307828" cy="319980"/>
-          </a:xfrm>
-          <a:prstGeom prst="rect">
-            <a:avLst/>
-          </a:prstGeom>
-          <a:noFill/>
-        </p:spPr>
-        <p:txBody>
-          <a:bodyPr wrap="square" lIns="0" rIns="0" tIns="0" bIns="0" anchor="t">
-            <a:noAutofit/>
-          </a:bodyPr>
-          <a:lstStyle/>
-          <a:p>
-            <a:pPr algn="l">
-              <a:lnSpc>
-                <a:spcPct val="115000"/>
-              </a:lnSpc>
-            </a:pPr>
-            <a:r>
-              <a:rPr sz="1800" b="0" i="0">
-                <a:solidFill>
-                  <a:srgbClr val="2E3A4A"/>
-                </a:solidFill>
-                <a:latin typeface="Montserrat"/>
-              </a:rPr>
-              <a:t>Parte da variação reflete práticas de identificação e acesso a avaliação.</a:t>
+              <a:t>Prevalência é quantas pessoas têm o diagnóstico. Parte da variação reflete práticas de identificação e acesso a avaliação.</a:t>
             </a:r>
           </a:p>
         </p:txBody>
@@ -8488,7 +8637,7 @@
         </p:nvSpPr>
         <p:spPr>
           <a:xfrm>
-            <a:off x="1168400" y="2115245"/>
+            <a:off x="1168400" y="1734245"/>
             <a:ext cx="10307828" cy="963811"/>
           </a:xfrm>
           <a:prstGeom prst="rect">
@@ -8527,8 +8676,8 @@
         </p:nvSpPr>
         <p:spPr>
           <a:xfrm>
-            <a:off x="1168400" y="3409255"/>
-            <a:ext cx="10307828" cy="1143000"/>
+            <a:off x="1168400" y="3028255"/>
+            <a:ext cx="10307828" cy="1905000"/>
           </a:xfrm>
           <a:prstGeom prst="rect">
             <a:avLst/>
@@ -8554,7 +8703,7 @@
                 </a:solidFill>
                 <a:latin typeface="Montserrat"/>
               </a:rPr>
-              <a:t>O autismo como parte da variação humana</a:t>
+              <a:t>Neurodiversidade (variação natural no funcionamento do cérebro): o autismo como parte da variação humana</a:t>
             </a:r>
           </a:p>
           <a:p>
@@ -8588,7 +8737,7 @@
                 </a:solidFill>
                 <a:latin typeface="Montserrat"/>
               </a:rPr>
-              <a:t>A linguagem importa: “pessoa autista”, “interesses focados”</a:t>
+              <a:t>A linguagem importa: “pessoa autista”, “interesses focados” (interesses intensos e específicos)</a:t>
             </a:r>
           </a:p>
         </p:txBody>
@@ -8853,7 +9002,7 @@
         </p:nvSpPr>
         <p:spPr>
           <a:xfrm>
-            <a:off x="1168400" y="769342"/>
+            <a:off x="1168400" y="612577"/>
             <a:ext cx="10307828" cy="481905"/>
           </a:xfrm>
           <a:prstGeom prst="rect">
@@ -8893,7 +9042,7 @@
           <p:nvPr/>
         </p:nvGraphicFramePr>
         <p:xfrm>
-          <a:off x="1168400" y="1467148"/>
+          <a:off x="1168400" y="1310382"/>
           <a:ext cx="10007600" cy="3105150"/>
         </p:xfrm>
         <a:graphic>
@@ -9254,8 +9403,8 @@
         </p:nvSpPr>
         <p:spPr>
           <a:xfrm>
-            <a:off x="1168400" y="4788198"/>
-            <a:ext cx="10307828" cy="627261"/>
+            <a:off x="1168400" y="4631432"/>
+            <a:ext cx="10307828" cy="940891"/>
           </a:xfrm>
           <a:prstGeom prst="rect">
             <a:avLst/>
@@ -9280,7 +9429,7 @@
                 </a:solidFill>
                 <a:latin typeface="Montserrat"/>
               </a:rPr>
-              <a:t>Características autistas que não causam prejuízo (ex.: interesses intensos, estereotipias sem risco) não são alvo por si só.</a:t>
+              <a:t>Características autistas que não causam prejuízo (ex.: interesses intensos, estereotipias (movimentos ou falas repetitivos) sem risco) não são alvo por si só.</a:t>
             </a:r>
           </a:p>
         </p:txBody>
@@ -9293,7 +9442,7 @@
         </p:nvSpPr>
         <p:spPr>
           <a:xfrm>
-            <a:off x="1168400" y="5631359"/>
+            <a:off x="1168400" y="5788223"/>
             <a:ext cx="10307828" cy="266700"/>
           </a:xfrm>
           <a:prstGeom prst="rect">
@@ -9358,7 +9507,7 @@
                 </a:solidFill>
                 <a:latin typeface="Montserrat"/>
               </a:rPr>
-              <a:t>12b</a:t>
+              <a:t>13</a:t>
             </a:r>
           </a:p>
         </p:txBody>
@@ -10058,7 +10207,7 @@
                 </a:solidFill>
                 <a:latin typeface="Montserrat"/>
               </a:rPr>
-              <a:t>13</a:t>
+              <a:t>14</a:t>
             </a:r>
           </a:p>
         </p:txBody>
@@ -10479,7 +10628,7 @@
                 </a:solidFill>
                 <a:latin typeface="Montserrat"/>
               </a:rPr>
-              <a:t>14</a:t>
+              <a:t>15</a:t>
             </a:r>
           </a:p>
         </p:txBody>
@@ -10939,7 +11088,7 @@
                 </a:solidFill>
                 <a:latin typeface="Montserrat"/>
               </a:rPr>
-              <a:t>15</a:t>
+              <a:t>16</a:t>
             </a:r>
           </a:p>
         </p:txBody>
@@ -11101,7 +11250,7 @@
         <p:spPr>
           <a:xfrm>
             <a:off x="1168400" y="3005832"/>
-            <a:ext cx="4839970" cy="675481"/>
+            <a:ext cx="4839970" cy="1013222"/>
           </a:xfrm>
           <a:prstGeom prst="rect">
             <a:avLst/>
@@ -11126,7 +11275,7 @@
                 </a:solidFill>
                 <a:latin typeface="Montserrat"/>
               </a:rPr>
-              <a:t>Sono, dor, fome, rotina, ambiente sensorial.</a:t>
+              <a:t>Condições do momento: sono, dor, fome, rotina, ambiente sensorial (sons, luzes, cheiros).</a:t>
             </a:r>
           </a:p>
         </p:txBody>
@@ -11321,7 +11470,7 @@
                 </a:solidFill>
                 <a:latin typeface="Montserrat"/>
               </a:rPr>
-              <a:t>16</a:t>
+              <a:t>17</a:t>
             </a:r>
           </a:p>
         </p:txBody>
@@ -11742,7 +11891,7 @@
                 </a:solidFill>
                 <a:latin typeface="Montserrat"/>
               </a:rPr>
-              <a:t>17</a:t>
+              <a:t>18</a:t>
             </a:r>
           </a:p>
         </p:txBody>
@@ -11891,7 +12040,7 @@
                 </a:solidFill>
                 <a:latin typeface="Montserrat"/>
               </a:rPr>
-              <a:t>Acesso a atenção</a:t>
+              <a:t>Acesso a atenção (conseguir atenção de alguém)</a:t>
             </a:r>
           </a:p>
           <a:p>
@@ -11908,7 +12057,7 @@
                 </a:solidFill>
                 <a:latin typeface="Montserrat"/>
               </a:rPr>
-              <a:t>Acesso a itens ou atividades</a:t>
+              <a:t>Acesso a itens ou atividades (conseguir um objeto ou atividade)</a:t>
             </a:r>
           </a:p>
           <a:p>
@@ -11925,7 +12074,7 @@
                 </a:solidFill>
                 <a:latin typeface="Montserrat"/>
               </a:rPr>
-              <a:t>Fuga (sair de algo) ou esquiva (evitar que comece) de demandas (pedidos e tarefas) ou estímulos</a:t>
+              <a:t>Fuga (sair de algo) ou esquiva (evitar que comece) de demandas (pedidos e tarefas) ou estímulos (sons, luzes, situações)</a:t>
             </a:r>
           </a:p>
           <a:p>
@@ -11981,7 +12130,7 @@
                 </a:solidFill>
                 <a:latin typeface="Montserrat"/>
               </a:rPr>
-              <a:t>São hipóteses funcionais (explicações possíveis sobre para que o comportamento serve) a testar, não rótulos. Podem ser múltiplas ou combinadas.</a:t>
+              <a:t>São hipóteses funcionais (explicações possíveis sobre para que o comportamento serve) a testar, não rótulos. Um comportamento pode ter mais de uma função.</a:t>
             </a:r>
           </a:p>
         </p:txBody>
@@ -12059,7 +12208,7 @@
                 </a:solidFill>
                 <a:latin typeface="Montserrat"/>
               </a:rPr>
-              <a:t>18</a:t>
+              <a:t>19</a:t>
             </a:r>
           </a:p>
         </p:txBody>
@@ -12142,7 +12291,7 @@
         </p:nvSpPr>
         <p:spPr>
           <a:xfrm>
-            <a:off x="1168400" y="1159867"/>
+            <a:off x="1168400" y="797917"/>
             <a:ext cx="6592824" cy="481905"/>
           </a:xfrm>
           <a:prstGeom prst="rect">
@@ -12181,7 +12330,7 @@
         </p:nvSpPr>
         <p:spPr>
           <a:xfrm>
-            <a:off x="1168400" y="1895773"/>
+            <a:off x="1168400" y="1533823"/>
             <a:ext cx="6592824" cy="462260"/>
           </a:xfrm>
           <a:prstGeom prst="rect">
@@ -12220,8 +12369,8 @@
         </p:nvSpPr>
         <p:spPr>
           <a:xfrm>
-            <a:off x="1168400" y="2612033"/>
-            <a:ext cx="6592824" cy="2895600"/>
+            <a:off x="1168400" y="2250083"/>
+            <a:ext cx="6592824" cy="3619500"/>
           </a:xfrm>
           <a:prstGeom prst="rect">
             <a:avLst/>
@@ -12298,7 +12447,7 @@
                 </a:solidFill>
                 <a:latin typeface="Montserrat"/>
               </a:rPr>
-              <a:t>7 anos de experiência em neurodivergência</a:t>
+              <a:t>7 anos de experiência em neurodivergência (funcionamentos do cérebro diferentes do típico, como autismo e TDAH)</a:t>
             </a:r>
           </a:p>
           <a:p>
@@ -12696,7 +12845,7 @@
                 </a:solidFill>
                 <a:latin typeface="Montserrat"/>
               </a:rPr>
-              <a:t>19</a:t>
+              <a:t>20</a:t>
             </a:r>
           </a:p>
         </p:txBody>
@@ -12957,7 +13106,7 @@
                 </a:solidFill>
                 <a:latin typeface="Montserrat"/>
               </a:rPr>
-              <a:t>20</a:t>
+              <a:t>21</a:t>
             </a:r>
           </a:p>
         </p:txBody>
@@ -13040,7 +13189,7 @@
         </p:nvSpPr>
         <p:spPr>
           <a:xfrm>
-            <a:off x="1168400" y="1637407"/>
+            <a:off x="1168400" y="1497707"/>
             <a:ext cx="10307828" cy="481905"/>
           </a:xfrm>
           <a:prstGeom prst="rect">
@@ -13080,8 +13229,8 @@
           <p:nvPr/>
         </p:nvGraphicFramePr>
         <p:xfrm>
-          <a:off x="1168400" y="2398712"/>
-          <a:ext cx="10007600" cy="2032000"/>
+          <a:off x="1168400" y="2259012"/>
+          <a:ext cx="10007600" cy="2311400"/>
         </p:xfrm>
         <a:graphic>
           <a:graphicData uri="http://schemas.openxmlformats.org/drawingml/2006/table">
@@ -13177,7 +13326,7 @@
                   </a:tcPr>
                 </a:tc>
               </a:tr>
-              <a:tr h="508000">
+              <a:tr h="787400">
                 <a:tc>
                   <a:txBody>
                     <a:bodyPr wrap="square"/>
@@ -13250,6 +13399,15 @@
                           <a:latin typeface="Montserrat"/>
                         </a:rPr>
                         <a:t>Acesso a atenção</a:t>
+                      </a:r>
+                      <a:r>
+                        <a:rPr sz="1800" b="0" i="0">
+                          <a:solidFill>
+                            <a:srgbClr val="2E3A4A"/>
+                          </a:solidFill>
+                          <a:latin typeface="Montserrat"/>
+                        </a:rPr>
+                        <a:t> (conseguir atenção)</a:t>
                       </a:r>
                     </a:p>
                   </a:txBody>
@@ -13332,7 +13490,16 @@
                           </a:solidFill>
                           <a:latin typeface="Montserrat"/>
                         </a:rPr>
-                        <a:t>Fuga da demanda (sair da tarefa)</a:t>
+                        <a:t>Fuga da demanda</a:t>
+                      </a:r>
+                      <a:r>
+                        <a:rPr sz="1800" b="0" i="0">
+                          <a:solidFill>
+                            <a:srgbClr val="2E3A4A"/>
+                          </a:solidFill>
+                          <a:latin typeface="Montserrat"/>
+                        </a:rPr>
+                        <a:t> (sair da tarefa)</a:t>
                       </a:r>
                     </a:p>
                   </a:txBody>
@@ -13417,6 +13584,15 @@
                         </a:rPr>
                         <a:t>Acesso a item</a:t>
                       </a:r>
+                      <a:r>
+                        <a:rPr sz="1800" b="0" i="0">
+                          <a:solidFill>
+                            <a:srgbClr val="2E3A4A"/>
+                          </a:solidFill>
+                          <a:latin typeface="Montserrat"/>
+                        </a:rPr>
+                        <a:t> (conseguir o tablet)</a:t>
+                      </a:r>
                     </a:p>
                   </a:txBody>
                   <a:tcPr marL="114300" marR="114300" marT="68580" marB="68580" anchor="ctr">
@@ -13438,7 +13614,7 @@
         </p:nvSpPr>
         <p:spPr>
           <a:xfrm>
-            <a:off x="1168400" y="4710112"/>
+            <a:off x="1168400" y="4849812"/>
             <a:ext cx="10307828" cy="319980"/>
           </a:xfrm>
           <a:prstGeom prst="rect">
@@ -13560,7 +13736,7 @@
                 </a:solidFill>
                 <a:latin typeface="Montserrat"/>
               </a:rPr>
-              <a:t>21</a:t>
+              <a:t>22</a:t>
             </a:r>
           </a:p>
         </p:txBody>
@@ -14032,7 +14208,7 @@
                 </a:solidFill>
                 <a:latin typeface="Montserrat"/>
               </a:rPr>
-              <a:t>21b</a:t>
+              <a:t>23</a:t>
             </a:r>
           </a:p>
         </p:txBody>
@@ -14214,7 +14390,7 @@
                 </a:solidFill>
                 <a:latin typeface="Montserrat"/>
               </a:rPr>
-              <a:t>22</a:t>
+              <a:t>24</a:t>
             </a:r>
           </a:p>
         </p:txBody>
@@ -14297,7 +14473,7 @@
         </p:nvSpPr>
         <p:spPr>
           <a:xfrm>
-            <a:off x="1168400" y="864295"/>
+            <a:off x="1168400" y="967581"/>
             <a:ext cx="10307828" cy="963811"/>
           </a:xfrm>
           <a:prstGeom prst="rect">
@@ -14323,7 +14499,7 @@
                 </a:solidFill>
                 <a:latin typeface="Montserrat"/>
               </a:rPr>
-              <a:t>ABA e TCC compartilham compromissos empíricos</a:t>
+              <a:t>ABA e TCC (Terapia Cognitivo-Comportamental) se apoiam em dados</a:t>
             </a:r>
           </a:p>
         </p:txBody>
@@ -14336,8 +14512,47 @@
         </p:nvSpPr>
         <p:spPr>
           <a:xfrm>
-            <a:off x="1168400" y="2158305"/>
-            <a:ext cx="10307828" cy="3048000"/>
+            <a:off x="1168400" y="2261592"/>
+            <a:ext cx="10307828" cy="319980"/>
+          </a:xfrm>
+          <a:prstGeom prst="rect">
+            <a:avLst/>
+          </a:prstGeom>
+          <a:noFill/>
+        </p:spPr>
+        <p:txBody>
+          <a:bodyPr wrap="square" lIns="0" rIns="0" tIns="0" bIns="0" anchor="t">
+            <a:noAutofit/>
+          </a:bodyPr>
+          <a:lstStyle/>
+          <a:p>
+            <a:pPr algn="l">
+              <a:lnSpc>
+                <a:spcPct val="115000"/>
+              </a:lnSpc>
+            </a:pPr>
+            <a:r>
+              <a:rPr sz="1800" b="0" i="0">
+                <a:solidFill>
+                  <a:srgbClr val="2E3A4A"/>
+                </a:solidFill>
+                <a:latin typeface="Montserrat"/>
+              </a:rPr>
+              <a:t>Compromissos empíricos (baseados em dados e observação) em comum:</a:t>
+            </a:r>
+          </a:p>
+        </p:txBody>
+      </p:sp>
+      <p:sp>
+        <p:nvSpPr>
+          <p:cNvPr id="5" name="TextBox 4"/>
+          <p:cNvSpPr txBox="1"/>
+          <p:nvPr/>
+        </p:nvSpPr>
+        <p:spPr>
+          <a:xfrm>
+            <a:off x="1168400" y="2911773"/>
+            <a:ext cx="10307828" cy="2191246"/>
           </a:xfrm>
           <a:prstGeom prst="rect">
             <a:avLst/>
@@ -14352,12 +14567,12 @@
           <a:p>
             <a:pPr algn="l" marL="279400" indent="-279400">
               <a:lnSpc>
-                <a:spcPct val="123000"/>
+                <a:spcPct val="119000"/>
               </a:lnSpc>
               <a:buChar char="•"/>
             </a:pPr>
             <a:r>
-              <a:rPr sz="2000" b="0" i="0">
+              <a:rPr sz="1700" b="0" i="0">
                 <a:solidFill>
                   <a:srgbClr val="2E3A4A"/>
                 </a:solidFill>
@@ -14369,12 +14584,12 @@
           <a:p>
             <a:pPr algn="l" marL="279400" indent="-279400">
               <a:lnSpc>
-                <a:spcPct val="123000"/>
+                <a:spcPct val="119000"/>
               </a:lnSpc>
               <a:buChar char="•"/>
             </a:pPr>
             <a:r>
-              <a:rPr sz="2000" b="0" i="0">
+              <a:rPr sz="1700" b="0" i="0">
                 <a:solidFill>
                   <a:srgbClr val="2E3A4A"/>
                 </a:solidFill>
@@ -14386,48 +14601,48 @@
           <a:p>
             <a:pPr algn="l" marL="279400" indent="-279400">
               <a:lnSpc>
-                <a:spcPct val="123000"/>
+                <a:spcPct val="119000"/>
               </a:lnSpc>
               <a:buChar char="•"/>
             </a:pPr>
             <a:r>
-              <a:rPr sz="2000" b="0" i="0">
+              <a:rPr sz="1700" b="0" i="0">
                 <a:solidFill>
                   <a:srgbClr val="2E3A4A"/>
                 </a:solidFill>
                 <a:latin typeface="Montserrat"/>
               </a:rPr>
-              <a:t>Formulação individualizada do caso</a:t>
+              <a:t>Formulação individualizada do caso (explicação do caso feita para aquela pessoa)</a:t>
             </a:r>
           </a:p>
           <a:p>
             <a:pPr algn="l" marL="279400" indent="-279400">
               <a:lnSpc>
-                <a:spcPct val="123000"/>
+                <a:spcPct val="119000"/>
               </a:lnSpc>
               <a:buChar char="•"/>
             </a:pPr>
             <a:r>
-              <a:rPr sz="2000" b="0" i="0">
+              <a:rPr sz="1700" b="0" i="0">
                 <a:solidFill>
                   <a:srgbClr val="2E3A4A"/>
                 </a:solidFill>
                 <a:latin typeface="Montserrat"/>
               </a:rPr>
-              <a:t>Procedimentos baseados em princípios de aprendizagem, como reforçamento (consequência que aumenta o comportamento), exposição (contato gradual com o que se teme), modelação (aprender observando um modelo) e treino de habilidades</a:t>
-            </a:r>
-          </a:p>
-        </p:txBody>
-      </p:sp>
-      <p:sp>
-        <p:nvSpPr>
-          <p:cNvPr id="5" name="TextBox 4"/>
-          <p:cNvSpPr txBox="1"/>
-          <p:nvPr/>
-        </p:nvSpPr>
-        <p:spPr>
-          <a:xfrm>
-            <a:off x="1168400" y="5536505"/>
+              <a:t>Procedimentos baseados em princípios de aprendizagem, como reforçamento (consequência que aumenta o comportamento), exposição (contato gradual com o que se teme), modelação (aprender observando um modelo) e treino de habilidades (ensino passo a passo, com prática)</a:t>
+            </a:r>
+          </a:p>
+        </p:txBody>
+      </p:sp>
+      <p:sp>
+        <p:nvSpPr>
+          <p:cNvPr id="6" name="TextBox 5"/>
+          <p:cNvSpPr txBox="1"/>
+          <p:nvPr/>
+        </p:nvSpPr>
+        <p:spPr>
+          <a:xfrm>
+            <a:off x="1168400" y="5433219"/>
             <a:ext cx="10307828" cy="266700"/>
           </a:xfrm>
           <a:prstGeom prst="rect">
@@ -14453,14 +14668,14 @@
                 </a:solidFill>
                 <a:latin typeface="Montserrat"/>
               </a:rPr>
-              <a:t>Aproximação não é equivalência.</a:t>
-            </a:r>
-          </a:p>
-        </p:txBody>
-      </p:sp>
-      <p:sp>
-        <p:nvSpPr>
-          <p:cNvPr id="6" name="TextBox 5"/>
+              <a:t>Aproximação não é equivalência (as abordagens não são iguais).</a:t>
+            </a:r>
+          </a:p>
+        </p:txBody>
+      </p:sp>
+      <p:sp>
+        <p:nvSpPr>
+          <p:cNvPr id="7" name="TextBox 6"/>
           <p:cNvSpPr txBox="1"/>
           <p:nvPr/>
         </p:nvSpPr>
@@ -14492,7 +14707,7 @@
                 </a:solidFill>
                 <a:latin typeface="Montserrat"/>
               </a:rPr>
-              <a:t>23</a:t>
+              <a:t>25</a:t>
             </a:r>
           </a:p>
         </p:txBody>
@@ -14575,7 +14790,7 @@
         </p:nvSpPr>
         <p:spPr>
           <a:xfrm>
-            <a:off x="1168400" y="1000820"/>
+            <a:off x="1168400" y="1035745"/>
             <a:ext cx="10307828" cy="963811"/>
           </a:xfrm>
           <a:prstGeom prst="rect">
@@ -14601,7 +14816,7 @@
                 </a:solidFill>
                 <a:latin typeface="Montserrat"/>
               </a:rPr>
-              <a:t>ABA e TCC partem de pressupostos diferentes</a:t>
+              <a:t>ABA e TCC partem de pressupostos (ideias de base) diferentes</a:t>
             </a:r>
           </a:p>
         </p:txBody>
@@ -14615,8 +14830,8 @@
           <p:nvPr/>
         </p:nvGraphicFramePr>
         <p:xfrm>
-          <a:off x="1168400" y="2294830"/>
-          <a:ext cx="10007600" cy="3371850"/>
+          <a:off x="1168400" y="2329755"/>
+          <a:ext cx="10007600" cy="3302000"/>
         </p:xfrm>
         <a:graphic>
           <a:graphicData uri="http://schemas.openxmlformats.org/drawingml/2006/table">
@@ -14629,7 +14844,7 @@
                 <a:gridCol w="3602732"/>
                 <a:gridCol w="3602831"/>
               </a:tblGrid>
-              <a:tr h="476250">
+              <a:tr h="444500">
                 <a:tc>
                   <a:txBody>
                     <a:bodyPr wrap="square"/>
@@ -14659,7 +14874,7 @@
                         </a:lnSpc>
                       </a:pPr>
                       <a:r>
-                        <a:rPr sz="1600" b="1" i="0">
+                        <a:rPr sz="1400" b="1" i="0">
                           <a:solidFill>
                             <a:srgbClr val="FFFFFF"/>
                           </a:solidFill>
@@ -14686,7 +14901,7 @@
                         </a:lnSpc>
                       </a:pPr>
                       <a:r>
-                        <a:rPr sz="1600" b="1" i="0">
+                        <a:rPr sz="1400" b="1" i="0">
                           <a:solidFill>
                             <a:srgbClr val="FFFFFF"/>
                           </a:solidFill>
@@ -14703,7 +14918,7 @@
                   </a:tcPr>
                 </a:tc>
               </a:tr>
-              <a:tr h="723900">
+              <a:tr h="876300">
                 <a:tc>
                   <a:txBody>
                     <a:bodyPr wrap="square"/>
@@ -14715,7 +14930,7 @@
                         </a:lnSpc>
                       </a:pPr>
                       <a:r>
-                        <a:rPr sz="1600" b="1" i="0">
+                        <a:rPr sz="1400" b="1" i="0">
                           <a:solidFill>
                             <a:srgbClr val="2E3A4A"/>
                           </a:solidFill>
@@ -14742,7 +14957,7 @@
                         </a:lnSpc>
                       </a:pPr>
                       <a:r>
-                        <a:rPr sz="1600" b="0" i="0">
+                        <a:rPr sz="1400" b="0" i="0">
                           <a:solidFill>
                             <a:srgbClr val="2E3A4A"/>
                           </a:solidFill>
@@ -14769,13 +14984,13 @@
                         </a:lnSpc>
                       </a:pPr>
                       <a:r>
-                        <a:rPr sz="1600" b="0" i="0">
+                        <a:rPr sz="1400" b="0" i="0">
                           <a:solidFill>
                             <a:srgbClr val="2E3A4A"/>
                           </a:solidFill>
                           <a:latin typeface="Montserrat"/>
                         </a:rPr>
-                        <a:t>Modelo cognitivo</a:t>
+                        <a:t>Modelo cognitivo (pensamentos influenciam emoções e comportamentos)</a:t>
                       </a:r>
                     </a:p>
                   </a:txBody>
@@ -14786,7 +15001,7 @@
                   </a:tcPr>
                 </a:tc>
               </a:tr>
-              <a:tr h="723900">
+              <a:tr h="660400">
                 <a:tc>
                   <a:txBody>
                     <a:bodyPr wrap="square"/>
@@ -14798,7 +15013,7 @@
                         </a:lnSpc>
                       </a:pPr>
                       <a:r>
-                        <a:rPr sz="1600" b="1" i="0">
+                        <a:rPr sz="1400" b="1" i="0">
                           <a:solidFill>
                             <a:srgbClr val="2E3A4A"/>
                           </a:solidFill>
@@ -14825,13 +15040,13 @@
                         </a:lnSpc>
                       </a:pPr>
                       <a:r>
-                        <a:rPr sz="1600" b="0" i="0">
+                        <a:rPr sz="1400" b="0" i="0">
                           <a:solidFill>
                             <a:srgbClr val="2E3A4A"/>
                           </a:solidFill>
                           <a:latin typeface="Montserrat"/>
                         </a:rPr>
-                        <a:t>Comportamentos a explicar</a:t>
+                        <a:t>Comportamentos a explicar (também dependem do ambiente)</a:t>
                       </a:r>
                     </a:p>
                   </a:txBody>
@@ -14852,13 +15067,13 @@
                         </a:lnSpc>
                       </a:pPr>
                       <a:r>
-                        <a:rPr sz="1600" b="0" i="0">
+                        <a:rPr sz="1400" b="0" i="0">
                           <a:solidFill>
                             <a:srgbClr val="2E3A4A"/>
                           </a:solidFill>
                           <a:latin typeface="Montserrat"/>
                         </a:rPr>
-                        <a:t>Mediadores e alvo central</a:t>
+                        <a:t>Mediadores (ligam a situação à reação) e alvo central</a:t>
                       </a:r>
                     </a:p>
                   </a:txBody>
@@ -14869,7 +15084,7 @@
                   </a:tcPr>
                 </a:tc>
               </a:tr>
-              <a:tr h="723900">
+              <a:tr h="660400">
                 <a:tc>
                   <a:txBody>
                     <a:bodyPr wrap="square"/>
@@ -14881,7 +15096,7 @@
                         </a:lnSpc>
                       </a:pPr>
                       <a:r>
-                        <a:rPr sz="1600" b="1" i="0">
+                        <a:rPr sz="1400" b="1" i="0">
                           <a:solidFill>
                             <a:srgbClr val="2E3A4A"/>
                           </a:solidFill>
@@ -14908,7 +15123,7 @@
                         </a:lnSpc>
                       </a:pPr>
                       <a:r>
-                        <a:rPr sz="1600" b="0" i="0">
+                        <a:rPr sz="1400" b="0" i="0">
                           <a:solidFill>
                             <a:srgbClr val="2E3A4A"/>
                           </a:solidFill>
@@ -14935,7 +15150,7 @@
                         </a:lnSpc>
                       </a:pPr>
                       <a:r>
-                        <a:rPr sz="1600" b="0" i="0">
+                        <a:rPr sz="1400" b="0" i="0">
                           <a:solidFill>
                             <a:srgbClr val="2E3A4A"/>
                           </a:solidFill>
@@ -14952,7 +15167,7 @@
                   </a:tcPr>
                 </a:tc>
               </a:tr>
-              <a:tr h="723900">
+              <a:tr h="660400">
                 <a:tc>
                   <a:txBody>
                     <a:bodyPr wrap="square"/>
@@ -14964,7 +15179,7 @@
                         </a:lnSpc>
                       </a:pPr>
                       <a:r>
-                        <a:rPr sz="1600" b="1" i="0">
+                        <a:rPr sz="1400" b="1" i="0">
                           <a:solidFill>
                             <a:srgbClr val="2E3A4A"/>
                           </a:solidFill>
@@ -14991,7 +15206,7 @@
                         </a:lnSpc>
                       </a:pPr>
                       <a:r>
-                        <a:rPr sz="1600" b="0" i="0">
+                        <a:rPr sz="1400" b="0" i="0">
                           <a:solidFill>
                             <a:srgbClr val="2E3A4A"/>
                           </a:solidFill>
@@ -15018,13 +15233,13 @@
                         </a:lnSpc>
                       </a:pPr>
                       <a:r>
-                        <a:rPr sz="1600" b="0" i="0">
+                        <a:rPr sz="1400" b="0" i="0">
                           <a:solidFill>
                             <a:srgbClr val="2E3A4A"/>
                           </a:solidFill>
                           <a:latin typeface="Montserrat"/>
                         </a:rPr>
-                        <a:t>Conceituação cognitiva</a:t>
+                        <a:t>Conceituação cognitiva (mapa das crenças e pensamentos da pessoa)</a:t>
                       </a:r>
                     </a:p>
                   </a:txBody>
@@ -15112,7 +15327,7 @@
                 </a:solidFill>
                 <a:latin typeface="Montserrat"/>
               </a:rPr>
-              <a:t>24</a:t>
+              <a:t>26</a:t>
             </a:r>
           </a:p>
         </p:txBody>
@@ -15195,7 +15410,7 @@
         </p:nvSpPr>
         <p:spPr>
           <a:xfrm>
-            <a:off x="1168400" y="1202333"/>
+            <a:off x="1168400" y="882352"/>
             <a:ext cx="10307828" cy="963811"/>
           </a:xfrm>
           <a:prstGeom prst="rect">
@@ -15234,7 +15449,7 @@
         </p:nvSpPr>
         <p:spPr>
           <a:xfrm>
-            <a:off x="1168400" y="2496344"/>
+            <a:off x="1168400" y="2176363"/>
             <a:ext cx="4839970" cy="639961"/>
           </a:xfrm>
           <a:prstGeom prst="rect">
@@ -15273,8 +15488,8 @@
         </p:nvSpPr>
         <p:spPr>
           <a:xfrm>
-            <a:off x="1168400" y="3225205"/>
-            <a:ext cx="4839970" cy="2239863"/>
+            <a:off x="1168400" y="2905224"/>
+            <a:ext cx="4839970" cy="2879824"/>
           </a:xfrm>
           <a:prstGeom prst="rect">
             <a:avLst/>
@@ -15299,7 +15514,7 @@
                 </a:solidFill>
                 <a:latin typeface="Montserrat"/>
               </a:rPr>
-              <a:t>Têm critério de evidência: FCT (Treino de Comunicação Funcional), intervenções antecedentes (mudanças no que vem antes), reforçamento diferencial (reforçar um comportamento e não outro), intervenção naturalística (ensino em situações do dia a dia), entre outras.</a:t>
+              <a:t>Têm critério de evidência (pesquisas suficientes mostrando eficácia): FCT (Treino de Comunicação Funcional), intervenções antecedentes (mudanças no que vem antes), reforçamento diferencial (reforçar um comportamento e não outro), intervenção naturalística (ensino em situações do dia a dia), entre outras.</a:t>
             </a:r>
           </a:p>
         </p:txBody>
@@ -15312,8 +15527,8 @@
         </p:nvSpPr>
         <p:spPr>
           <a:xfrm>
-            <a:off x="6477000" y="2496344"/>
-            <a:ext cx="4839970" cy="319980"/>
+            <a:off x="6477000" y="2176363"/>
+            <a:ext cx="4839970" cy="639961"/>
           </a:xfrm>
           <a:prstGeom prst="rect">
             <a:avLst/>
@@ -15338,7 +15553,7 @@
                 </a:solidFill>
                 <a:latin typeface="Montserrat"/>
               </a:rPr>
-              <a:t>TCC adaptada para autismo</a:t>
+              <a:t>TCC adaptada (ajustada) para autismo</a:t>
             </a:r>
           </a:p>
         </p:txBody>
@@ -15352,7 +15567,7 @@
         <p:spPr>
           <a:xfrm>
             <a:off x="6477000" y="2905224"/>
-            <a:ext cx="4839970" cy="959941"/>
+            <a:ext cx="4839970" cy="1599902"/>
           </a:xfrm>
           <a:prstGeom prst="rect">
             <a:avLst/>
@@ -15377,7 +15592,7 @@
                 </a:solidFill>
                 <a:latin typeface="Montserrat"/>
               </a:rPr>
-              <a:t>Tem evidência de ensaio clínico para ansiedade em crianças autistas de 7 a 13 anos.</a:t>
+              <a:t>Tem evidência de ensaio clínico (estudo que compara quem recebeu e quem não recebeu o tratamento) para ansiedade em crianças autistas de 7 a 13 anos.</a:t>
             </a:r>
           </a:p>
         </p:txBody>
@@ -15455,7 +15670,7 @@
                 </a:solidFill>
                 <a:latin typeface="Montserrat"/>
               </a:rPr>
-              <a:t>25</a:t>
+              <a:t>27</a:t>
             </a:r>
           </a:p>
         </p:txBody>
@@ -15637,7 +15852,7 @@
                 </a:solidFill>
                 <a:latin typeface="Montserrat"/>
               </a:rPr>
-              <a:t>26</a:t>
+              <a:t>28</a:t>
             </a:r>
           </a:p>
         </p:txBody>
@@ -15720,7 +15935,7 @@
         </p:nvSpPr>
         <p:spPr>
           <a:xfrm>
-            <a:off x="1168400" y="1596628"/>
+            <a:off x="1168400" y="1436588"/>
             <a:ext cx="10307828" cy="963811"/>
           </a:xfrm>
           <a:prstGeom prst="rect">
@@ -15759,7 +15974,7 @@
         </p:nvSpPr>
         <p:spPr>
           <a:xfrm>
-            <a:off x="1168400" y="2814439"/>
+            <a:off x="1168400" y="2654399"/>
             <a:ext cx="4839970" cy="319980"/>
           </a:xfrm>
           <a:prstGeom prst="rect">
@@ -15798,7 +16013,7 @@
         </p:nvSpPr>
         <p:spPr>
           <a:xfrm>
-            <a:off x="1168400" y="3223320"/>
+            <a:off x="1168400" y="3063280"/>
             <a:ext cx="4839970" cy="959941"/>
           </a:xfrm>
           <a:prstGeom prst="rect">
@@ -15837,7 +16052,7 @@
         </p:nvSpPr>
         <p:spPr>
           <a:xfrm>
-            <a:off x="6477000" y="2814439"/>
+            <a:off x="6477000" y="2654399"/>
             <a:ext cx="4839970" cy="319980"/>
           </a:xfrm>
           <a:prstGeom prst="rect">
@@ -15876,8 +16091,8 @@
         </p:nvSpPr>
         <p:spPr>
           <a:xfrm>
-            <a:off x="6477000" y="3223320"/>
-            <a:ext cx="4839970" cy="1279922"/>
+            <a:off x="6477000" y="3063280"/>
+            <a:ext cx="4839970" cy="1599902"/>
           </a:xfrm>
           <a:prstGeom prst="rect">
             <a:avLst/>
@@ -15902,7 +16117,7 @@
                 </a:solidFill>
                 <a:latin typeface="Montserrat"/>
               </a:rPr>
-              <a:t>Que pensamentos e crenças ela tem sobre falar em grupo (“vou falar algo errado”)? Como eles influenciam a ansiedade e a esquiva (evitar a situação)?</a:t>
+              <a:t>Que pensamentos e crenças (ideias sobre si, os outros e o mundo) ela tem sobre falar em grupo (“vou falar algo errado”)? Como eles influenciam a ansiedade e a esquiva (evitar a situação)?</a:t>
             </a:r>
           </a:p>
         </p:txBody>
@@ -15915,7 +16130,7 @@
         </p:nvSpPr>
         <p:spPr>
           <a:xfrm>
-            <a:off x="1168400" y="4757241"/>
+            <a:off x="1168400" y="4917182"/>
             <a:ext cx="10307828" cy="313630"/>
           </a:xfrm>
           <a:prstGeom prst="rect">
@@ -15980,7 +16195,7 @@
                 </a:solidFill>
                 <a:latin typeface="Montserrat"/>
               </a:rPr>
-              <a:t>26b</a:t>
+              <a:t>29</a:t>
             </a:r>
           </a:p>
         </p:txBody>
@@ -16063,7 +16278,7 @@
         </p:nvSpPr>
         <p:spPr>
           <a:xfrm>
-            <a:off x="1168400" y="1594148"/>
+            <a:off x="1168400" y="1446709"/>
             <a:ext cx="10307828" cy="481905"/>
           </a:xfrm>
           <a:prstGeom prst="rect">
@@ -16102,8 +16317,8 @@
         </p:nvSpPr>
         <p:spPr>
           <a:xfrm>
-            <a:off x="1168400" y="2330053"/>
-            <a:ext cx="10307828" cy="2743200"/>
+            <a:off x="1168400" y="2182614"/>
+            <a:ext cx="10307828" cy="3038078"/>
           </a:xfrm>
           <a:prstGeom prst="rect">
             <a:avLst/>
@@ -16118,29 +16333,29 @@
           <a:p>
             <a:pPr algn="l" marL="279400" indent="-279400">
               <a:lnSpc>
-                <a:spcPct val="123000"/>
+                <a:spcPct val="119000"/>
               </a:lnSpc>
               <a:buAutoNum type="arabicPeriod" startAt="1"/>
             </a:pPr>
             <a:r>
-              <a:rPr sz="1800" b="0" i="0">
+              <a:rPr sz="1650" b="0" i="0">
                 <a:solidFill>
                   <a:srgbClr val="2E3A4A"/>
                 </a:solidFill>
                 <a:latin typeface="Montserrat"/>
               </a:rPr>
-              <a:t>Explicar por que o TEA é heterogêneo</a:t>
+              <a:t>Explicar por que o TEA é heterogêneo (aparece de formas muito diferentes)</a:t>
             </a:r>
           </a:p>
           <a:p>
             <a:pPr algn="l" marL="279400" indent="-279400">
               <a:lnSpc>
-                <a:spcPct val="123000"/>
+                <a:spcPct val="119000"/>
               </a:lnSpc>
               <a:buAutoNum type="arabicPeriod" startAt="1"/>
             </a:pPr>
             <a:r>
-              <a:rPr sz="1800" b="1" i="0">
+              <a:rPr sz="1650" b="1" i="0">
                 <a:solidFill>
                   <a:srgbClr val="2E3A4A"/>
                 </a:solidFill>
@@ -16152,12 +16367,12 @@
           <a:p>
             <a:pPr algn="l" marL="279400" indent="-279400">
               <a:lnSpc>
-                <a:spcPct val="123000"/>
+                <a:spcPct val="119000"/>
               </a:lnSpc>
               <a:buAutoNum type="arabicPeriod" startAt="1"/>
             </a:pPr>
             <a:r>
-              <a:rPr sz="1800" b="1" i="0">
+              <a:rPr sz="1650" b="1" i="0">
                 <a:solidFill>
                   <a:srgbClr val="2E3A4A"/>
                 </a:solidFill>
@@ -16169,12 +16384,12 @@
           <a:p>
             <a:pPr algn="l" marL="279400" indent="-279400">
               <a:lnSpc>
-                <a:spcPct val="123000"/>
+                <a:spcPct val="119000"/>
               </a:lnSpc>
               <a:buAutoNum type="arabicPeriod" startAt="1"/>
             </a:pPr>
             <a:r>
-              <a:rPr sz="1800" b="1" i="0">
+              <a:rPr sz="1650" b="1" i="0">
                 <a:solidFill>
                   <a:srgbClr val="2E3A4A"/>
                 </a:solidFill>
@@ -16186,52 +16401,52 @@
           <a:p>
             <a:pPr algn="l" marL="279400" indent="-279400">
               <a:lnSpc>
-                <a:spcPct val="123000"/>
+                <a:spcPct val="119000"/>
               </a:lnSpc>
               <a:buAutoNum type="arabicPeriod" startAt="1"/>
             </a:pPr>
             <a:r>
-              <a:rPr sz="1800" b="0" i="0">
+              <a:rPr sz="1650" b="0" i="0">
                 <a:solidFill>
                   <a:srgbClr val="2E3A4A"/>
                 </a:solidFill>
                 <a:latin typeface="Montserrat"/>
               </a:rPr>
-              <a:t>Reconhecer estratégias baseadas em evidências e ligá-las à função</a:t>
+              <a:t>Reconhecer estratégias baseadas em evidências (com eficácia mostrada em pesquisas) e ligá-las à função</a:t>
             </a:r>
           </a:p>
           <a:p>
             <a:pPr algn="l" marL="279400" indent="-279400">
               <a:lnSpc>
-                <a:spcPct val="123000"/>
+                <a:spcPct val="119000"/>
               </a:lnSpc>
               <a:buAutoNum type="arabicPeriod" startAt="1"/>
             </a:pPr>
             <a:r>
-              <a:rPr sz="1800" b="0" i="0">
+              <a:rPr sz="1650" b="0" i="0">
                 <a:solidFill>
                   <a:srgbClr val="2E3A4A"/>
                 </a:solidFill>
                 <a:latin typeface="Montserrat"/>
               </a:rPr>
-              <a:t>Analisar uma vinheta e justificar decisões</a:t>
+              <a:t>Analisar uma vinheta (caso fictício curto) e justificar decisões</a:t>
             </a:r>
           </a:p>
           <a:p>
             <a:pPr algn="l" marL="279400" indent="-279400">
               <a:lnSpc>
-                <a:spcPct val="123000"/>
+                <a:spcPct val="119000"/>
               </a:lnSpc>
               <a:buAutoNum type="arabicPeriod" startAt="1"/>
             </a:pPr>
             <a:r>
-              <a:rPr sz="1800" b="0" i="0">
+              <a:rPr sz="1650" b="0" i="0">
                 <a:solidFill>
                   <a:srgbClr val="2E3A4A"/>
                 </a:solidFill>
                 <a:latin typeface="Montserrat"/>
               </a:rPr>
-              <a:t>Reconhecer limites de atuação e a importância da supervisão</a:t>
+              <a:t>Reconhecer limites de atuação (o que cada profissional pode fazer) e a importância da supervisão (acompanhamento por profissional mais experiente)</a:t>
             </a:r>
           </a:p>
         </p:txBody>
@@ -16452,7 +16667,7 @@
                 </a:solidFill>
                 <a:latin typeface="Montserrat"/>
               </a:rPr>
-              <a:t>27</a:t>
+              <a:t>30</a:t>
             </a:r>
           </a:p>
         </p:txBody>
@@ -16535,7 +16750,7 @@
         </p:nvSpPr>
         <p:spPr>
           <a:xfrm>
-            <a:off x="1168400" y="1115120"/>
+            <a:off x="1168400" y="991295"/>
             <a:ext cx="10307828" cy="963811"/>
           </a:xfrm>
           <a:prstGeom prst="rect">
@@ -16575,8 +16790,8 @@
           <p:nvPr/>
         </p:nvGraphicFramePr>
         <p:xfrm>
-          <a:off x="1168400" y="2409130"/>
-          <a:ext cx="10007600" cy="3143250"/>
+          <a:off x="1168400" y="2285305"/>
+          <a:ext cx="10007600" cy="3390900"/>
         </p:xfrm>
         <a:graphic>
           <a:graphicData uri="http://schemas.openxmlformats.org/drawingml/2006/table">
@@ -16672,7 +16887,7 @@
                   </a:tcPr>
                 </a:tc>
               </a:tr>
-              <a:tr h="476250">
+              <a:tr h="723900">
                 <a:tc>
                   <a:txBody>
                     <a:bodyPr wrap="square"/>
@@ -16717,7 +16932,7 @@
                           </a:solidFill>
                           <a:latin typeface="Montserrat"/>
                         </a:rPr>
-                        <a:t>Entrevistas, escalas</a:t>
+                        <a:t>Entrevistas, escalas (perguntar a quem convive)</a:t>
                       </a:r>
                     </a:p>
                   </a:txBody>
@@ -16827,7 +17042,7 @@
                           </a:solidFill>
                           <a:latin typeface="Montserrat"/>
                         </a:rPr>
-                        <a:t>Mostra associação, não causa</a:t>
+                        <a:t>Mostra o que acontece junto, não prova a causa</a:t>
                       </a:r>
                     </a:p>
                   </a:txBody>
@@ -16998,7 +17213,7 @@
                 </a:solidFill>
                 <a:latin typeface="Montserrat"/>
               </a:rPr>
-              <a:t>28</a:t>
+              <a:t>31</a:t>
             </a:r>
           </a:p>
         </p:txBody>
@@ -17081,7 +17296,7 @@
         </p:nvSpPr>
         <p:spPr>
           <a:xfrm>
-            <a:off x="1168400" y="1721148"/>
+            <a:off x="1168400" y="1340148"/>
             <a:ext cx="10307828" cy="481905"/>
           </a:xfrm>
           <a:prstGeom prst="rect">
@@ -17120,7 +17335,7 @@
         </p:nvSpPr>
         <p:spPr>
           <a:xfrm>
-            <a:off x="1168400" y="2457053"/>
+            <a:off x="1168400" y="2076053"/>
             <a:ext cx="10307828" cy="711200"/>
           </a:xfrm>
           <a:prstGeom prst="rect">
@@ -17159,8 +17374,8 @@
         </p:nvSpPr>
         <p:spPr>
           <a:xfrm>
-            <a:off x="1168400" y="3422253"/>
-            <a:ext cx="10307828" cy="1524000"/>
+            <a:off x="1168400" y="3041253"/>
+            <a:ext cx="10307828" cy="2286000"/>
           </a:xfrm>
           <a:prstGeom prst="rect">
             <a:avLst/>
@@ -17195,7 +17410,7 @@
                 </a:solidFill>
                 <a:latin typeface="Montserrat"/>
               </a:rPr>
-              <a:t> aviso de transição, apoio visual</a:t>
+              <a:t> aviso de transição (avisar antes de trocar de atividade), apoio visual (imagens, rotina desenhada)</a:t>
             </a:r>
           </a:p>
           <a:p>
@@ -17221,7 +17436,7 @@
                 </a:solidFill>
                 <a:latin typeface="Montserrat"/>
               </a:rPr>
-              <a:t> duração, dificuldade, interesse</a:t>
+              <a:t> tarefa com duração, dificuldade e tema ajustados</a:t>
             </a:r>
           </a:p>
           <a:p>
@@ -17247,7 +17462,7 @@
                 </a:solidFill>
                 <a:latin typeface="Montserrat"/>
               </a:rPr>
-              <a:t> reais</a:t>
+              <a:t> reais (a pessoa decide entre opções)</a:t>
             </a:r>
           </a:p>
           <a:p>
@@ -17273,7 +17488,7 @@
                 </a:solidFill>
                 <a:latin typeface="Montserrat"/>
               </a:rPr>
-              <a:t> a pausas e itens preferidos</a:t>
+              <a:t> a pausas e itens preferidos (objetos e atividades de que a pessoa gosta)</a:t>
             </a:r>
           </a:p>
         </p:txBody>
@@ -17351,7 +17566,7 @@
                 </a:solidFill>
                 <a:latin typeface="Montserrat"/>
               </a:rPr>
-              <a:t>29</a:t>
+              <a:t>32</a:t>
             </a:r>
           </a:p>
         </p:txBody>
@@ -17668,7 +17883,7 @@
                 </a:solidFill>
                 <a:latin typeface="Montserrat"/>
               </a:rPr>
-              <a:t>30</a:t>
+              <a:t>33</a:t>
             </a:r>
           </a:p>
         </p:txBody>
@@ -17751,7 +17966,7 @@
         </p:nvSpPr>
         <p:spPr>
           <a:xfrm>
-            <a:off x="1168400" y="1752005"/>
+            <a:off x="1168400" y="1420614"/>
             <a:ext cx="10307828" cy="963811"/>
           </a:xfrm>
           <a:prstGeom prst="rect">
@@ -17790,8 +18005,8 @@
         </p:nvSpPr>
         <p:spPr>
           <a:xfrm>
-            <a:off x="1168400" y="2969816"/>
-            <a:ext cx="10307828" cy="319980"/>
+            <a:off x="1168400" y="2638425"/>
+            <a:ext cx="10307828" cy="639961"/>
           </a:xfrm>
           <a:prstGeom prst="rect">
             <a:avLst/>
@@ -17816,7 +18031,7 @@
                 </a:solidFill>
                 <a:latin typeface="Montserrat"/>
               </a:rPr>
-              <a:t>Intervenções Naturalísticas Desenvolvimentais Comportamentais (NDBI):</a:t>
+              <a:t>Intervenções Naturalísticas Desenvolvimentais Comportamentais (NDBI, sigla em inglês):</a:t>
             </a:r>
           </a:p>
         </p:txBody>
@@ -17829,8 +18044,8 @@
         </p:nvSpPr>
         <p:spPr>
           <a:xfrm>
-            <a:off x="1168400" y="3543796"/>
-            <a:ext cx="10307828" cy="1371600"/>
+            <a:off x="1168400" y="3532386"/>
+            <a:ext cx="10307828" cy="1714500"/>
           </a:xfrm>
           <a:prstGeom prst="rect">
             <a:avLst/>
@@ -17907,7 +18122,7 @@
                 </a:solidFill>
                 <a:latin typeface="Montserrat"/>
               </a:rPr>
-              <a:t>Integração entre ciência comportamental e ciência do desenvolvimento</a:t>
+              <a:t>Integração entre ciência comportamental e ciência do desenvolvimento (estudo de como a criança se desenvolve)</a:t>
             </a:r>
           </a:p>
         </p:txBody>
@@ -17985,7 +18200,7 @@
                 </a:solidFill>
                 <a:latin typeface="Montserrat"/>
               </a:rPr>
-              <a:t>31</a:t>
+              <a:t>34</a:t>
             </a:r>
           </a:p>
         </p:txBody>
@@ -18289,7 +18504,7 @@
                 </a:solidFill>
                 <a:latin typeface="Montserrat"/>
               </a:rPr>
-              <a:t>32</a:t>
+              <a:t>35</a:t>
             </a:r>
           </a:p>
         </p:txBody>
@@ -18372,7 +18587,7 @@
         </p:nvSpPr>
         <p:spPr>
           <a:xfrm>
-            <a:off x="1168400" y="2070398"/>
+            <a:off x="1168400" y="1898948"/>
             <a:ext cx="10307828" cy="481905"/>
           </a:xfrm>
           <a:prstGeom prst="rect">
@@ -18411,8 +18626,8 @@
         </p:nvSpPr>
         <p:spPr>
           <a:xfrm>
-            <a:off x="1168400" y="2882503"/>
-            <a:ext cx="10307828" cy="1714500"/>
+            <a:off x="1168400" y="2711053"/>
+            <a:ext cx="10307828" cy="2057400"/>
           </a:xfrm>
           <a:prstGeom prst="rect">
             <a:avLst/>
@@ -18455,7 +18670,7 @@
                 </a:solidFill>
                 <a:latin typeface="Montserrat"/>
               </a:rPr>
-              <a:t>Assentimento:</a:t>
+              <a:t>Assentimento</a:t>
             </a:r>
             <a:r>
               <a:rPr sz="1800" b="0" i="0">
@@ -18464,7 +18679,7 @@
                 </a:solidFill>
                 <a:latin typeface="Montserrat"/>
               </a:rPr>
-              <a:t> observar sinais de concordância e de recusa</a:t>
+              <a:t> (concordância da pessoa em participar): observar sinais de concordância e de recusa</a:t>
             </a:r>
           </a:p>
           <a:p>
@@ -18515,7 +18730,7 @@
                 </a:solidFill>
                 <a:latin typeface="Montserrat"/>
               </a:rPr>
-              <a:t>Supervisão e limites de atuação</a:t>
+              <a:t>Supervisão e limites de atuação (o que cada profissional pode fazer)</a:t>
             </a:r>
           </a:p>
         </p:txBody>
@@ -18593,7 +18808,7 @@
                 </a:solidFill>
                 <a:latin typeface="Montserrat"/>
               </a:rPr>
-              <a:t>33</a:t>
+              <a:t>36</a:t>
             </a:r>
           </a:p>
         </p:txBody>
@@ -18929,7 +19144,7 @@
                 </a:solidFill>
                 <a:latin typeface="Montserrat"/>
               </a:rPr>
-              <a:t>34</a:t>
+              <a:t>37</a:t>
             </a:r>
           </a:p>
         </p:txBody>
@@ -19262,7 +19477,7 @@
                 </a:solidFill>
                 <a:latin typeface="Montserrat"/>
               </a:rPr>
-              <a:t>34a</a:t>
+              <a:t>38</a:t>
             </a:r>
           </a:p>
         </p:txBody>
@@ -19393,7 +19608,7 @@
                 </a:solidFill>
                 <a:latin typeface="Montserrat"/>
               </a:rPr>
-              <a:t>Vinheta: Theo</a:t>
+              <a:t>Vinheta (caso fictício): Theo</a:t>
             </a:r>
           </a:p>
         </p:txBody>
@@ -19657,7 +19872,7 @@
                 </a:solidFill>
                 <a:latin typeface="Montserrat"/>
               </a:rPr>
-              <a:t>35</a:t>
+              <a:t>39</a:t>
             </a:r>
           </a:p>
         </p:txBody>
@@ -19740,7 +19955,7 @@
         </p:nvSpPr>
         <p:spPr>
           <a:xfrm>
-            <a:off x="1168400" y="1834257"/>
+            <a:off x="1168400" y="1526877"/>
             <a:ext cx="10307828" cy="481905"/>
           </a:xfrm>
           <a:prstGeom prst="rect">
@@ -19779,7 +19994,46 @@
         </p:nvSpPr>
         <p:spPr>
           <a:xfrm>
-            <a:off x="1168400" y="2646362"/>
+            <a:off x="1168400" y="2338983"/>
+            <a:ext cx="10307828" cy="284460"/>
+          </a:xfrm>
+          <a:prstGeom prst="rect">
+            <a:avLst/>
+          </a:prstGeom>
+          <a:noFill/>
+        </p:spPr>
+        <p:txBody>
+          <a:bodyPr wrap="square" lIns="0" rIns="0" tIns="0" bIns="0" anchor="t">
+            <a:noAutofit/>
+          </a:bodyPr>
+          <a:lstStyle/>
+          <a:p>
+            <a:pPr algn="l">
+              <a:lnSpc>
+                <a:spcPct val="115000"/>
+              </a:lnSpc>
+            </a:pPr>
+            <a:r>
+              <a:rPr sz="1600" b="0" i="1">
+                <a:solidFill>
+                  <a:srgbClr val="66717F"/>
+                </a:solidFill>
+                <a:latin typeface="Montserrat"/>
+              </a:rPr>
+              <a:t>(aplicadores: profissionais que executam a intervenção no dia a dia)</a:t>
+            </a:r>
+          </a:p>
+        </p:txBody>
+      </p:sp>
+      <p:sp>
+        <p:nvSpPr>
+          <p:cNvPr id="5" name="TextBox 4"/>
+          <p:cNvSpPr txBox="1"/>
+          <p:nvPr/>
+        </p:nvSpPr>
+        <p:spPr>
+          <a:xfrm>
+            <a:off x="1168400" y="2953643"/>
             <a:ext cx="4839970" cy="319980"/>
           </a:xfrm>
           <a:prstGeom prst="rect">
@@ -19812,13 +20066,13 @@
       </p:sp>
       <p:sp>
         <p:nvSpPr>
-          <p:cNvPr id="5" name="TextBox 4"/>
-          <p:cNvSpPr txBox="1"/>
-          <p:nvPr/>
-        </p:nvSpPr>
-        <p:spPr>
-          <a:xfrm>
-            <a:off x="1168400" y="3055243"/>
+          <p:cNvPr id="6" name="TextBox 5"/>
+          <p:cNvSpPr txBox="1"/>
+          <p:nvPr/>
+        </p:nvSpPr>
+        <p:spPr>
+          <a:xfrm>
+            <a:off x="1168400" y="3362523"/>
             <a:ext cx="4839970" cy="1422400"/>
           </a:xfrm>
           <a:prstGeom prst="rect">
@@ -19851,13 +20105,13 @@
       </p:sp>
       <p:sp>
         <p:nvSpPr>
-          <p:cNvPr id="6" name="TextBox 5"/>
-          <p:cNvSpPr txBox="1"/>
-          <p:nvPr/>
-        </p:nvSpPr>
-        <p:spPr>
-          <a:xfrm>
-            <a:off x="6477000" y="2646362"/>
+          <p:cNvPr id="7" name="TextBox 6"/>
+          <p:cNvSpPr txBox="1"/>
+          <p:nvPr/>
+        </p:nvSpPr>
+        <p:spPr>
+          <a:xfrm>
+            <a:off x="6477000" y="2953643"/>
             <a:ext cx="4839970" cy="319980"/>
           </a:xfrm>
           <a:prstGeom prst="rect">
@@ -19890,13 +20144,13 @@
       </p:sp>
       <p:sp>
         <p:nvSpPr>
-          <p:cNvPr id="7" name="TextBox 6"/>
-          <p:cNvSpPr txBox="1"/>
-          <p:nvPr/>
-        </p:nvSpPr>
-        <p:spPr>
-          <a:xfrm>
-            <a:off x="6477000" y="3055243"/>
+          <p:cNvPr id="8" name="TextBox 7"/>
+          <p:cNvSpPr txBox="1"/>
+          <p:nvPr/>
+        </p:nvSpPr>
+        <p:spPr>
+          <a:xfrm>
+            <a:off x="6477000" y="3362523"/>
             <a:ext cx="4839970" cy="1778000"/>
           </a:xfrm>
           <a:prstGeom prst="rect">
@@ -19929,7 +20183,7 @@
       </p:sp>
       <p:sp>
         <p:nvSpPr>
-          <p:cNvPr id="8" name="TextBox 7"/>
+          <p:cNvPr id="9" name="TextBox 8"/>
           <p:cNvSpPr txBox="1"/>
           <p:nvPr/>
         </p:nvSpPr>
@@ -20401,7 +20655,7 @@
                 </a:solidFill>
                 <a:latin typeface="Montserrat"/>
               </a:rPr>
-              <a:t>35b</a:t>
+              <a:t>40</a:t>
             </a:r>
           </a:p>
         </p:txBody>
@@ -20814,7 +21068,7 @@
                 </a:solidFill>
                 <a:latin typeface="Montserrat"/>
               </a:rPr>
-              <a:t>36</a:t>
+              <a:t>41</a:t>
             </a:r>
           </a:p>
         </p:txBody>
@@ -20828,6 +21082,289 @@
 </file>
 
 <file path=ppt/slides/slide42.xml><?xml version="1.0" encoding="utf-8"?>
+<p:sld xmlns:a="http://schemas.openxmlformats.org/drawingml/2006/main" xmlns:p="http://schemas.openxmlformats.org/presentationml/2006/main" xmlns:r="http://schemas.openxmlformats.org/officeDocument/2006/relationships">
+  <p:cSld>
+    <p:bg>
+      <p:bgPr>
+        <a:solidFill>
+          <a:srgbClr val="FCFCFB"/>
+        </a:solidFill>
+        <a:effectLst/>
+      </p:bgPr>
+    </p:bg>
+    <p:spTree>
+      <p:nvGrpSpPr>
+        <p:cNvPr id="1" name=""/>
+        <p:cNvGrpSpPr/>
+        <p:nvPr/>
+      </p:nvGrpSpPr>
+      <p:grpSpPr/>
+      <p:sp>
+        <p:nvSpPr>
+          <p:cNvPr id="2" name="Rectangle 1"/>
+          <p:cNvSpPr/>
+          <p:nvPr/>
+        </p:nvSpPr>
+        <p:spPr>
+          <a:xfrm>
+            <a:off x="0" y="0"/>
+            <a:ext cx="177800" cy="6858000"/>
+          </a:xfrm>
+          <a:prstGeom prst="rect">
+            <a:avLst/>
+          </a:prstGeom>
+          <a:solidFill>
+            <a:srgbClr val="0F7C86"/>
+          </a:solidFill>
+          <a:ln>
+            <a:noFill/>
+          </a:ln>
+          <a:effectLst/>
+        </p:spPr>
+        <p:style>
+          <a:lnRef idx="1">
+            <a:schemeClr val="accent1"/>
+          </a:lnRef>
+          <a:fillRef idx="3">
+            <a:schemeClr val="accent1"/>
+          </a:fillRef>
+          <a:effectRef idx="2">
+            <a:schemeClr val="accent1"/>
+          </a:effectRef>
+          <a:fontRef idx="minor">
+            <a:schemeClr val="lt1"/>
+          </a:fontRef>
+        </p:style>
+        <p:txBody>
+          <a:bodyPr rtlCol="0" anchor="ctr"/>
+          <a:lstStyle/>
+          <a:p>
+            <a:pPr algn="ctr"/>
+          </a:p>
+        </p:txBody>
+      </p:sp>
+      <p:sp>
+        <p:nvSpPr>
+          <p:cNvPr id="3" name="TextBox 2"/>
+          <p:cNvSpPr txBox="1"/>
+          <p:nvPr/>
+        </p:nvSpPr>
+        <p:spPr>
+          <a:xfrm>
+            <a:off x="1168400" y="1853704"/>
+            <a:ext cx="10307828" cy="963811"/>
+          </a:xfrm>
+          <a:prstGeom prst="rect">
+            <a:avLst/>
+          </a:prstGeom>
+          <a:noFill/>
+        </p:spPr>
+        <p:txBody>
+          <a:bodyPr wrap="square" lIns="0" rIns="0" tIns="0" bIns="0" anchor="t">
+            <a:noAutofit/>
+          </a:bodyPr>
+          <a:lstStyle/>
+          <a:p>
+            <a:pPr algn="l">
+              <a:lnSpc>
+                <a:spcPct val="94000"/>
+              </a:lnSpc>
+            </a:pPr>
+            <a:r>
+              <a:rPr sz="3300" b="1" i="0">
+                <a:solidFill>
+                  <a:srgbClr val="1B2F4B"/>
+                </a:solidFill>
+                <a:latin typeface="Montserrat"/>
+              </a:rPr>
+              <a:t>Plenária (discussão com toda a turma): do comportamento à decisão</a:t>
+            </a:r>
+          </a:p>
+        </p:txBody>
+      </p:sp>
+      <p:sp>
+        <p:nvSpPr>
+          <p:cNvPr id="4" name="TextBox 3"/>
+          <p:cNvSpPr txBox="1"/>
+          <p:nvPr/>
+        </p:nvSpPr>
+        <p:spPr>
+          <a:xfrm>
+            <a:off x="1168400" y="3147715"/>
+            <a:ext cx="10307828" cy="660400"/>
+          </a:xfrm>
+          <a:prstGeom prst="rect">
+            <a:avLst/>
+          </a:prstGeom>
+          <a:noFill/>
+        </p:spPr>
+        <p:txBody>
+          <a:bodyPr wrap="square" lIns="0" rIns="0" tIns="0" bIns="0" anchor="t">
+            <a:noAutofit/>
+          </a:bodyPr>
+          <a:lstStyle/>
+          <a:p>
+            <a:pPr algn="l">
+              <a:lnSpc>
+                <a:spcPct val="107000"/>
+              </a:lnSpc>
+            </a:pPr>
+            <a:r>
+              <a:rPr sz="2000" b="1" i="0">
+                <a:solidFill>
+                  <a:srgbClr val="0F7C86"/>
+                </a:solidFill>
+                <a:latin typeface="Montserrat"/>
+              </a:rPr>
+              <a:t>Comportamento → Antes e depois → Explicações possíveis → O que fazer → Cuidados éticos</a:t>
+            </a:r>
+          </a:p>
+        </p:txBody>
+      </p:sp>
+      <p:sp>
+        <p:nvSpPr>
+          <p:cNvPr id="5" name="TextBox 4"/>
+          <p:cNvSpPr txBox="1"/>
+          <p:nvPr/>
+        </p:nvSpPr>
+        <p:spPr>
+          <a:xfrm>
+            <a:off x="1168400" y="4138315"/>
+            <a:ext cx="10307828" cy="675481"/>
+          </a:xfrm>
+          <a:prstGeom prst="rect">
+            <a:avLst/>
+          </a:prstGeom>
+          <a:noFill/>
+        </p:spPr>
+        <p:txBody>
+          <a:bodyPr wrap="square" lIns="0" rIns="0" tIns="0" bIns="0" anchor="t">
+            <a:noAutofit/>
+          </a:bodyPr>
+          <a:lstStyle/>
+          <a:p>
+            <a:pPr algn="l">
+              <a:lnSpc>
+                <a:spcPct val="115000"/>
+              </a:lnSpc>
+            </a:pPr>
+            <a:r>
+              <a:rPr sz="1900" b="0" i="0">
+                <a:solidFill>
+                  <a:srgbClr val="2E3A4A"/>
+                </a:solidFill>
+                <a:latin typeface="Montserrat"/>
+              </a:rPr>
+              <a:t>Uma história </a:t>
+            </a:r>
+            <a:r>
+              <a:rPr sz="1900" b="1" i="0">
+                <a:solidFill>
+                  <a:srgbClr val="2E3A4A"/>
+                </a:solidFill>
+                <a:latin typeface="Montserrat"/>
+              </a:rPr>
+              <a:t>não permite concluir a função (para que o comportamento serve)</a:t>
+            </a:r>
+            <a:r>
+              <a:rPr sz="1900" b="0" i="0">
+                <a:solidFill>
+                  <a:srgbClr val="2E3A4A"/>
+                </a:solidFill>
+                <a:latin typeface="Montserrat"/>
+              </a:rPr>
+              <a:t>. Ela permite levantar hipóteses que precisam de avaliação.</a:t>
+            </a:r>
+          </a:p>
+        </p:txBody>
+      </p:sp>
+      <p:sp>
+        <p:nvSpPr>
+          <p:cNvPr id="6" name="TextBox 5"/>
+          <p:cNvSpPr txBox="1"/>
+          <p:nvPr/>
+        </p:nvSpPr>
+        <p:spPr>
+          <a:xfrm>
+            <a:off x="1168400" y="6343650"/>
+            <a:ext cx="9156700" cy="184150"/>
+          </a:xfrm>
+          <a:prstGeom prst="rect">
+            <a:avLst/>
+          </a:prstGeom>
+          <a:noFill/>
+        </p:spPr>
+        <p:txBody>
+          <a:bodyPr wrap="square" lIns="0" rIns="0" tIns="0" bIns="0" anchor="t">
+            <a:noAutofit/>
+          </a:bodyPr>
+          <a:lstStyle/>
+          <a:p>
+            <a:pPr algn="l">
+              <a:lnSpc>
+                <a:spcPct val="98000"/>
+              </a:lnSpc>
+            </a:pPr>
+            <a:r>
+              <a:rPr sz="1200" b="0" i="0">
+                <a:solidFill>
+                  <a:srgbClr val="66717F"/>
+                </a:solidFill>
+                <a:latin typeface="Montserrat"/>
+              </a:rPr>
+              <a:t>Hanley et al. (2014)</a:t>
+            </a:r>
+          </a:p>
+        </p:txBody>
+      </p:sp>
+      <p:sp>
+        <p:nvSpPr>
+          <p:cNvPr id="7" name="TextBox 6"/>
+          <p:cNvSpPr txBox="1"/>
+          <p:nvPr/>
+        </p:nvSpPr>
+        <p:spPr>
+          <a:xfrm>
+            <a:off x="10820400" y="6343650"/>
+            <a:ext cx="784860" cy="184150"/>
+          </a:xfrm>
+          <a:prstGeom prst="rect">
+            <a:avLst/>
+          </a:prstGeom>
+          <a:noFill/>
+        </p:spPr>
+        <p:txBody>
+          <a:bodyPr wrap="square" lIns="0" rIns="0" tIns="0" bIns="0" anchor="t">
+            <a:noAutofit/>
+          </a:bodyPr>
+          <a:lstStyle/>
+          <a:p>
+            <a:pPr algn="r">
+              <a:lnSpc>
+                <a:spcPct val="98000"/>
+              </a:lnSpc>
+            </a:pPr>
+            <a:r>
+              <a:rPr sz="1200" b="0" i="0">
+                <a:solidFill>
+                  <a:srgbClr val="66717F"/>
+                </a:solidFill>
+                <a:latin typeface="Montserrat"/>
+              </a:rPr>
+              <a:t>42</a:t>
+            </a:r>
+          </a:p>
+        </p:txBody>
+      </p:sp>
+    </p:spTree>
+  </p:cSld>
+  <p:clrMapOvr>
+    <a:masterClrMapping/>
+  </p:clrMapOvr>
+</p:sld>
+</file>
+
+<file path=ppt/slides/slide43.xml><?xml version="1.0" encoding="utf-8"?>
 <p:sld xmlns:a="http://schemas.openxmlformats.org/drawingml/2006/main" xmlns:p="http://schemas.openxmlformats.org/presentationml/2006/main" xmlns:r="http://schemas.openxmlformats.org/officeDocument/2006/relationships">
   <p:cSld>
     <p:bg>
@@ -21283,7 +21820,7 @@
                 </a:solidFill>
                 <a:latin typeface="Montserrat"/>
               </a:rPr>
-              <a:t>36a</a:t>
+              <a:t>43</a:t>
             </a:r>
           </a:p>
         </p:txBody>
@@ -21296,7 +21833,7 @@
 </p:sld>
 </file>
 
-<file path=ppt/slides/slide43.xml><?xml version="1.0" encoding="utf-8"?>
+<file path=ppt/slides/slide44.xml><?xml version="1.0" encoding="utf-8"?>
 <p:sld xmlns:a="http://schemas.openxmlformats.org/drawingml/2006/main" xmlns:p="http://schemas.openxmlformats.org/presentationml/2006/main" xmlns:r="http://schemas.openxmlformats.org/officeDocument/2006/relationships">
   <p:cSld>
     <p:bg>
@@ -21912,7 +22449,7 @@
                 </a:solidFill>
                 <a:latin typeface="Montserrat"/>
               </a:rPr>
-              <a:t>36b</a:t>
+              <a:t>44</a:t>
             </a:r>
           </a:p>
         </p:txBody>
@@ -21925,7 +22462,7 @@
 </p:sld>
 </file>
 
-<file path=ppt/slides/slide44.xml><?xml version="1.0" encoding="utf-8"?>
+<file path=ppt/slides/slide45.xml><?xml version="1.0" encoding="utf-8"?>
 <p:sld xmlns:a="http://schemas.openxmlformats.org/drawingml/2006/main" xmlns:p="http://schemas.openxmlformats.org/presentationml/2006/main" xmlns:r="http://schemas.openxmlformats.org/officeDocument/2006/relationships">
   <p:cSld>
     <p:bg>
@@ -22376,7 +22913,7 @@
                 </a:solidFill>
                 <a:latin typeface="Montserrat"/>
               </a:rPr>
-              <a:t>36c</a:t>
+              <a:t>45</a:t>
             </a:r>
           </a:p>
         </p:txBody>
@@ -22389,7 +22926,7 @@
 </p:sld>
 </file>
 
-<file path=ppt/slides/slide45.xml><?xml version="1.0" encoding="utf-8"?>
+<file path=ppt/slides/slide46.xml><?xml version="1.0" encoding="utf-8"?>
 <p:sld xmlns:a="http://schemas.openxmlformats.org/drawingml/2006/main" xmlns:p="http://schemas.openxmlformats.org/presentationml/2006/main" xmlns:r="http://schemas.openxmlformats.org/officeDocument/2006/relationships">
   <p:cSld>
     <p:bg>
@@ -22690,7 +23227,7 @@
                 </a:solidFill>
                 <a:latin typeface="Montserrat"/>
               </a:rPr>
-              <a:t>36d</a:t>
+              <a:t>46</a:t>
             </a:r>
           </a:p>
         </p:txBody>
@@ -22703,7 +23240,833 @@
 </p:sld>
 </file>
 
-<file path=ppt/slides/slide46.xml><?xml version="1.0" encoding="utf-8"?>
+<file path=ppt/slides/slide47.xml><?xml version="1.0" encoding="utf-8"?>
+<p:sld xmlns:a="http://schemas.openxmlformats.org/drawingml/2006/main" xmlns:p="http://schemas.openxmlformats.org/presentationml/2006/main" xmlns:r="http://schemas.openxmlformats.org/officeDocument/2006/relationships">
+  <p:cSld>
+    <p:bg>
+      <p:bgPr>
+        <a:solidFill>
+          <a:srgbClr val="EEF4F5"/>
+        </a:solidFill>
+        <a:effectLst/>
+      </p:bgPr>
+    </p:bg>
+    <p:spTree>
+      <p:nvGrpSpPr>
+        <p:cNvPr id="1" name=""/>
+        <p:cNvGrpSpPr/>
+        <p:nvPr/>
+      </p:nvGrpSpPr>
+      <p:grpSpPr/>
+      <p:sp>
+        <p:nvSpPr>
+          <p:cNvPr id="2" name="Rectangle 1"/>
+          <p:cNvSpPr/>
+          <p:nvPr/>
+        </p:nvSpPr>
+        <p:spPr>
+          <a:xfrm>
+            <a:off x="0" y="0"/>
+            <a:ext cx="177800" cy="6858000"/>
+          </a:xfrm>
+          <a:prstGeom prst="rect">
+            <a:avLst/>
+          </a:prstGeom>
+          <a:solidFill>
+            <a:srgbClr val="0F7C86"/>
+          </a:solidFill>
+          <a:ln>
+            <a:noFill/>
+          </a:ln>
+          <a:effectLst/>
+        </p:spPr>
+        <p:style>
+          <a:lnRef idx="1">
+            <a:schemeClr val="accent1"/>
+          </a:lnRef>
+          <a:fillRef idx="3">
+            <a:schemeClr val="accent1"/>
+          </a:fillRef>
+          <a:effectRef idx="2">
+            <a:schemeClr val="accent1"/>
+          </a:effectRef>
+          <a:fontRef idx="minor">
+            <a:schemeClr val="lt1"/>
+          </a:fontRef>
+        </p:style>
+        <p:txBody>
+          <a:bodyPr rtlCol="0" anchor="ctr"/>
+          <a:lstStyle/>
+          <a:p>
+            <a:pPr algn="ctr"/>
+          </a:p>
+        </p:txBody>
+      </p:sp>
+      <p:sp>
+        <p:nvSpPr>
+          <p:cNvPr id="3" name="TextBox 2"/>
+          <p:cNvSpPr txBox="1"/>
+          <p:nvPr/>
+        </p:nvSpPr>
+        <p:spPr>
+          <a:xfrm>
+            <a:off x="1168400" y="1868587"/>
+            <a:ext cx="10307828" cy="481905"/>
+          </a:xfrm>
+          <a:prstGeom prst="rect">
+            <a:avLst/>
+          </a:prstGeom>
+          <a:noFill/>
+        </p:spPr>
+        <p:txBody>
+          <a:bodyPr wrap="square" lIns="0" rIns="0" tIns="0" bIns="0" anchor="t">
+            <a:noAutofit/>
+          </a:bodyPr>
+          <a:lstStyle/>
+          <a:p>
+            <a:pPr algn="l">
+              <a:lnSpc>
+                <a:spcPct val="94000"/>
+              </a:lnSpc>
+            </a:pPr>
+            <a:r>
+              <a:rPr sz="3300" b="1" i="0">
+                <a:solidFill>
+                  <a:srgbClr val="1B2F4B"/>
+                </a:solidFill>
+                <a:latin typeface="Montserrat"/>
+              </a:rPr>
+              <a:t>Um dado novo sobre o Theo</a:t>
+            </a:r>
+          </a:p>
+        </p:txBody>
+      </p:sp>
+      <p:sp>
+        <p:nvSpPr>
+          <p:cNvPr id="4" name="TextBox 3"/>
+          <p:cNvSpPr txBox="1"/>
+          <p:nvPr/>
+        </p:nvSpPr>
+        <p:spPr>
+          <a:xfrm>
+            <a:off x="1168400" y="2629892"/>
+            <a:ext cx="10307828" cy="1013222"/>
+          </a:xfrm>
+          <a:prstGeom prst="rect">
+            <a:avLst/>
+          </a:prstGeom>
+          <a:noFill/>
+        </p:spPr>
+        <p:txBody>
+          <a:bodyPr wrap="square" lIns="0" rIns="0" tIns="0" bIns="0" anchor="t">
+            <a:noAutofit/>
+          </a:bodyPr>
+          <a:lstStyle/>
+          <a:p>
+            <a:pPr algn="l">
+              <a:lnSpc>
+                <a:spcPct val="115000"/>
+              </a:lnSpc>
+            </a:pPr>
+            <a:r>
+              <a:rPr sz="1900" b="0" i="0">
+                <a:solidFill>
+                  <a:srgbClr val="2E3A4A"/>
+                </a:solidFill>
+                <a:latin typeface="Montserrat"/>
+              </a:rPr>
+              <a:t>Na semana seguinte, em 4 sessões, a terapeuta apresentou a atividade de mesa </a:t>
+            </a:r>
+            <a:r>
+              <a:rPr sz="1900" b="1" i="0">
+                <a:solidFill>
+                  <a:srgbClr val="2E3A4A"/>
+                </a:solidFill>
+                <a:latin typeface="Montserrat"/>
+              </a:rPr>
+              <a:t>sem guardar os trilhos</a:t>
+            </a:r>
+            <a:r>
+              <a:rPr sz="1900" b="0" i="0">
+                <a:solidFill>
+                  <a:srgbClr val="2E3A4A"/>
+                </a:solidFill>
+                <a:latin typeface="Montserrat"/>
+              </a:rPr>
+              <a:t> (eles ficaram ao lado, e Theo poderia voltar a eles ao terminar). Em </a:t>
+            </a:r>
+            <a:r>
+              <a:rPr sz="1900" b="1" i="0">
+                <a:solidFill>
+                  <a:srgbClr val="2E3A4A"/>
+                </a:solidFill>
+                <a:latin typeface="Montserrat"/>
+              </a:rPr>
+              <a:t>3 dessas sessões</a:t>
+            </a:r>
+            <a:r>
+              <a:rPr sz="1900" b="0" i="0">
+                <a:solidFill>
+                  <a:srgbClr val="2E3A4A"/>
+                </a:solidFill>
+                <a:latin typeface="Montserrat"/>
+              </a:rPr>
+              <a:t>, Theo não gritou nem se jogou no chão.</a:t>
+            </a:r>
+          </a:p>
+        </p:txBody>
+      </p:sp>
+      <p:sp>
+        <p:nvSpPr>
+          <p:cNvPr id="5" name="TextBox 4"/>
+          <p:cNvSpPr txBox="1"/>
+          <p:nvPr/>
+        </p:nvSpPr>
+        <p:spPr>
+          <a:xfrm>
+            <a:off x="1168400" y="3922514"/>
+            <a:ext cx="10307828" cy="330200"/>
+          </a:xfrm>
+          <a:prstGeom prst="rect">
+            <a:avLst/>
+          </a:prstGeom>
+          <a:noFill/>
+        </p:spPr>
+        <p:txBody>
+          <a:bodyPr wrap="square" lIns="0" rIns="0" tIns="0" bIns="0" anchor="t">
+            <a:noAutofit/>
+          </a:bodyPr>
+          <a:lstStyle/>
+          <a:p>
+            <a:pPr algn="l">
+              <a:lnSpc>
+                <a:spcPct val="107000"/>
+              </a:lnSpc>
+            </a:pPr>
+            <a:r>
+              <a:rPr sz="2000" b="1" i="0">
+                <a:solidFill>
+                  <a:srgbClr val="0F7C86"/>
+                </a:solidFill>
+                <a:latin typeface="Montserrat"/>
+              </a:rPr>
+              <a:t>Com esse dado, qual explicação fica mais forte? Já dá para ter certeza?</a:t>
+            </a:r>
+          </a:p>
+        </p:txBody>
+      </p:sp>
+      <p:sp>
+        <p:nvSpPr>
+          <p:cNvPr id="6" name="TextBox 5"/>
+          <p:cNvSpPr txBox="1"/>
+          <p:nvPr/>
+        </p:nvSpPr>
+        <p:spPr>
+          <a:xfrm>
+            <a:off x="1168400" y="4532114"/>
+            <a:ext cx="10307828" cy="266700"/>
+          </a:xfrm>
+          <a:prstGeom prst="rect">
+            <a:avLst/>
+          </a:prstGeom>
+          <a:noFill/>
+        </p:spPr>
+        <p:txBody>
+          <a:bodyPr wrap="square" lIns="0" rIns="0" tIns="0" bIns="0" anchor="t">
+            <a:noAutofit/>
+          </a:bodyPr>
+          <a:lstStyle/>
+          <a:p>
+            <a:pPr algn="l">
+              <a:lnSpc>
+                <a:spcPct val="115000"/>
+              </a:lnSpc>
+            </a:pPr>
+            <a:r>
+              <a:rPr sz="1500" b="0" i="1">
+                <a:solidFill>
+                  <a:srgbClr val="66717F"/>
+                </a:solidFill>
+                <a:latin typeface="Montserrat"/>
+              </a:rPr>
+              <a:t>Exemplo fictício</a:t>
+            </a:r>
+          </a:p>
+        </p:txBody>
+      </p:sp>
+      <p:sp>
+        <p:nvSpPr>
+          <p:cNvPr id="7" name="TextBox 6"/>
+          <p:cNvSpPr txBox="1"/>
+          <p:nvPr/>
+        </p:nvSpPr>
+        <p:spPr>
+          <a:xfrm>
+            <a:off x="10820400" y="6343650"/>
+            <a:ext cx="784860" cy="184150"/>
+          </a:xfrm>
+          <a:prstGeom prst="rect">
+            <a:avLst/>
+          </a:prstGeom>
+          <a:noFill/>
+        </p:spPr>
+        <p:txBody>
+          <a:bodyPr wrap="square" lIns="0" rIns="0" tIns="0" bIns="0" anchor="t">
+            <a:noAutofit/>
+          </a:bodyPr>
+          <a:lstStyle/>
+          <a:p>
+            <a:pPr algn="r">
+              <a:lnSpc>
+                <a:spcPct val="98000"/>
+              </a:lnSpc>
+            </a:pPr>
+            <a:r>
+              <a:rPr sz="1200" b="0" i="0">
+                <a:solidFill>
+                  <a:srgbClr val="66717F"/>
+                </a:solidFill>
+                <a:latin typeface="Montserrat"/>
+              </a:rPr>
+              <a:t>47</a:t>
+            </a:r>
+          </a:p>
+        </p:txBody>
+      </p:sp>
+    </p:spTree>
+  </p:cSld>
+  <p:clrMapOvr>
+    <a:masterClrMapping/>
+  </p:clrMapOvr>
+</p:sld>
+</file>
+
+<file path=ppt/slides/slide48.xml><?xml version="1.0" encoding="utf-8"?>
+<p:sld xmlns:a="http://schemas.openxmlformats.org/drawingml/2006/main" xmlns:p="http://schemas.openxmlformats.org/presentationml/2006/main" xmlns:r="http://schemas.openxmlformats.org/officeDocument/2006/relationships">
+  <p:cSld>
+    <p:bg>
+      <p:bgPr>
+        <a:solidFill>
+          <a:srgbClr val="FFFFFF"/>
+        </a:solidFill>
+        <a:effectLst/>
+      </p:bgPr>
+    </p:bg>
+    <p:spTree>
+      <p:nvGrpSpPr>
+        <p:cNvPr id="1" name=""/>
+        <p:cNvGrpSpPr/>
+        <p:nvPr/>
+      </p:nvGrpSpPr>
+      <p:grpSpPr/>
+      <p:sp>
+        <p:nvSpPr>
+          <p:cNvPr id="2" name="Rectangle 1"/>
+          <p:cNvSpPr/>
+          <p:nvPr/>
+        </p:nvSpPr>
+        <p:spPr>
+          <a:xfrm>
+            <a:off x="0" y="0"/>
+            <a:ext cx="177800" cy="6858000"/>
+          </a:xfrm>
+          <a:prstGeom prst="rect">
+            <a:avLst/>
+          </a:prstGeom>
+          <a:solidFill>
+            <a:srgbClr val="0F7C86"/>
+          </a:solidFill>
+          <a:ln>
+            <a:noFill/>
+          </a:ln>
+          <a:effectLst/>
+        </p:spPr>
+        <p:style>
+          <a:lnRef idx="1">
+            <a:schemeClr val="accent1"/>
+          </a:lnRef>
+          <a:fillRef idx="3">
+            <a:schemeClr val="accent1"/>
+          </a:fillRef>
+          <a:effectRef idx="2">
+            <a:schemeClr val="accent1"/>
+          </a:effectRef>
+          <a:fontRef idx="minor">
+            <a:schemeClr val="lt1"/>
+          </a:fontRef>
+        </p:style>
+        <p:txBody>
+          <a:bodyPr rtlCol="0" anchor="ctr"/>
+          <a:lstStyle/>
+          <a:p>
+            <a:pPr algn="ctr"/>
+          </a:p>
+        </p:txBody>
+      </p:sp>
+      <p:sp>
+        <p:nvSpPr>
+          <p:cNvPr id="3" name="TextBox 2"/>
+          <p:cNvSpPr txBox="1"/>
+          <p:nvPr/>
+        </p:nvSpPr>
+        <p:spPr>
+          <a:xfrm>
+            <a:off x="1168400" y="1680766"/>
+            <a:ext cx="10307828" cy="481905"/>
+          </a:xfrm>
+          <a:prstGeom prst="rect">
+            <a:avLst/>
+          </a:prstGeom>
+          <a:noFill/>
+        </p:spPr>
+        <p:txBody>
+          <a:bodyPr wrap="square" lIns="0" rIns="0" tIns="0" bIns="0" anchor="t">
+            <a:noAutofit/>
+          </a:bodyPr>
+          <a:lstStyle/>
+          <a:p>
+            <a:pPr algn="l">
+              <a:lnSpc>
+                <a:spcPct val="94000"/>
+              </a:lnSpc>
+            </a:pPr>
+            <a:r>
+              <a:rPr sz="3300" b="1" i="0">
+                <a:solidFill>
+                  <a:srgbClr val="1B2F4B"/>
+                </a:solidFill>
+                <a:latin typeface="Montserrat"/>
+              </a:rPr>
+              <a:t>Respostas: o dado novo</a:t>
+            </a:r>
+          </a:p>
+        </p:txBody>
+      </p:sp>
+      <p:sp>
+        <p:nvSpPr>
+          <p:cNvPr id="4" name="TextBox 3"/>
+          <p:cNvSpPr txBox="1"/>
+          <p:nvPr/>
+        </p:nvSpPr>
+        <p:spPr>
+          <a:xfrm>
+            <a:off x="1168400" y="2416671"/>
+            <a:ext cx="4839970" cy="319980"/>
+          </a:xfrm>
+          <a:prstGeom prst="rect">
+            <a:avLst/>
+          </a:prstGeom>
+          <a:noFill/>
+        </p:spPr>
+        <p:txBody>
+          <a:bodyPr wrap="square" lIns="0" rIns="0" tIns="0" bIns="0" anchor="t">
+            <a:noAutofit/>
+          </a:bodyPr>
+          <a:lstStyle/>
+          <a:p>
+            <a:pPr algn="l">
+              <a:lnSpc>
+                <a:spcPct val="98000"/>
+              </a:lnSpc>
+            </a:pPr>
+            <a:r>
+              <a:rPr sz="2100" b="1" i="0">
+                <a:solidFill>
+                  <a:srgbClr val="0F7C86"/>
+                </a:solidFill>
+                <a:latin typeface="Montserrat"/>
+              </a:rPr>
+              <a:t>O que muda</a:t>
+            </a:r>
+          </a:p>
+        </p:txBody>
+      </p:sp>
+      <p:sp>
+        <p:nvSpPr>
+          <p:cNvPr id="5" name="TextBox 4"/>
+          <p:cNvSpPr txBox="1"/>
+          <p:nvPr/>
+        </p:nvSpPr>
+        <p:spPr>
+          <a:xfrm>
+            <a:off x="1168400" y="2825552"/>
+            <a:ext cx="4839970" cy="1279922"/>
+          </a:xfrm>
+          <a:prstGeom prst="rect">
+            <a:avLst/>
+          </a:prstGeom>
+          <a:noFill/>
+        </p:spPr>
+        <p:txBody>
+          <a:bodyPr wrap="square" lIns="0" rIns="0" tIns="0" bIns="0" anchor="t">
+            <a:noAutofit/>
+          </a:bodyPr>
+          <a:lstStyle/>
+          <a:p>
+            <a:pPr algn="l">
+              <a:lnSpc>
+                <a:spcPct val="115000"/>
+              </a:lnSpc>
+            </a:pPr>
+            <a:r>
+              <a:rPr sz="1800" b="0" i="0">
+                <a:solidFill>
+                  <a:srgbClr val="2E3A4A"/>
+                </a:solidFill>
+                <a:latin typeface="Montserrat"/>
+              </a:rPr>
+              <a:t>Fica mais forte a explicação “quer os trilhos” (ou as duas juntas): sem guardar os trilhos, quase não houve episódio. “Foge da mesa” fica mais fraca.</a:t>
+            </a:r>
+          </a:p>
+        </p:txBody>
+      </p:sp>
+      <p:sp>
+        <p:nvSpPr>
+          <p:cNvPr id="6" name="TextBox 5"/>
+          <p:cNvSpPr txBox="1"/>
+          <p:nvPr/>
+        </p:nvSpPr>
+        <p:spPr>
+          <a:xfrm>
+            <a:off x="6477000" y="2416671"/>
+            <a:ext cx="4839970" cy="319980"/>
+          </a:xfrm>
+          <a:prstGeom prst="rect">
+            <a:avLst/>
+          </a:prstGeom>
+          <a:noFill/>
+        </p:spPr>
+        <p:txBody>
+          <a:bodyPr wrap="square" lIns="0" rIns="0" tIns="0" bIns="0" anchor="t">
+            <a:noAutofit/>
+          </a:bodyPr>
+          <a:lstStyle/>
+          <a:p>
+            <a:pPr algn="l">
+              <a:lnSpc>
+                <a:spcPct val="98000"/>
+              </a:lnSpc>
+            </a:pPr>
+            <a:r>
+              <a:rPr sz="2100" b="1" i="0">
+                <a:solidFill>
+                  <a:srgbClr val="0F7C86"/>
+                </a:solidFill>
+                <a:latin typeface="Montserrat"/>
+              </a:rPr>
+              <a:t>O que não muda</a:t>
+            </a:r>
+          </a:p>
+        </p:txBody>
+      </p:sp>
+      <p:sp>
+        <p:nvSpPr>
+          <p:cNvPr id="7" name="TextBox 6"/>
+          <p:cNvSpPr txBox="1"/>
+          <p:nvPr/>
+        </p:nvSpPr>
+        <p:spPr>
+          <a:xfrm>
+            <a:off x="6477000" y="2825552"/>
+            <a:ext cx="4839970" cy="959941"/>
+          </a:xfrm>
+          <a:prstGeom prst="rect">
+            <a:avLst/>
+          </a:prstGeom>
+          <a:noFill/>
+        </p:spPr>
+        <p:txBody>
+          <a:bodyPr wrap="square" lIns="0" rIns="0" tIns="0" bIns="0" anchor="t">
+            <a:noAutofit/>
+          </a:bodyPr>
+          <a:lstStyle/>
+          <a:p>
+            <a:pPr algn="l">
+              <a:lnSpc>
+                <a:spcPct val="115000"/>
+              </a:lnSpc>
+            </a:pPr>
+            <a:r>
+              <a:rPr sz="1800" b="0" i="0">
+                <a:solidFill>
+                  <a:srgbClr val="2E3A4A"/>
+                </a:solidFill>
+                <a:latin typeface="Montserrat"/>
+              </a:rPr>
+              <a:t>Ainda não dá para ter certeza: são só 4 sessões, sem controle de sono, terapeuta ou tipo de tarefa.</a:t>
+            </a:r>
+          </a:p>
+        </p:txBody>
+      </p:sp>
+      <p:sp>
+        <p:nvSpPr>
+          <p:cNvPr id="8" name="TextBox 7"/>
+          <p:cNvSpPr txBox="1"/>
+          <p:nvPr/>
+        </p:nvSpPr>
+        <p:spPr>
+          <a:xfrm>
+            <a:off x="1168400" y="4359473"/>
+            <a:ext cx="10307828" cy="627261"/>
+          </a:xfrm>
+          <a:prstGeom prst="rect">
+            <a:avLst/>
+          </a:prstGeom>
+          <a:noFill/>
+        </p:spPr>
+        <p:txBody>
+          <a:bodyPr wrap="square" lIns="0" rIns="0" tIns="0" bIns="0" anchor="t">
+            <a:noAutofit/>
+          </a:bodyPr>
+          <a:lstStyle/>
+          <a:p>
+            <a:pPr algn="l">
+              <a:lnSpc>
+                <a:spcPct val="107000"/>
+              </a:lnSpc>
+            </a:pPr>
+            <a:r>
+              <a:rPr sz="1900" b="1" i="0">
+                <a:solidFill>
+                  <a:srgbClr val="0F7C86"/>
+                </a:solidFill>
+                <a:latin typeface="Montserrat"/>
+              </a:rPr>
+              <a:t>É mais uma pista. O próximo passo é uma avaliação organizada, com supervisão.</a:t>
+            </a:r>
+          </a:p>
+        </p:txBody>
+      </p:sp>
+      <p:sp>
+        <p:nvSpPr>
+          <p:cNvPr id="9" name="TextBox 8"/>
+          <p:cNvSpPr txBox="1"/>
+          <p:nvPr/>
+        </p:nvSpPr>
+        <p:spPr>
+          <a:xfrm>
+            <a:off x="10820400" y="6343650"/>
+            <a:ext cx="784860" cy="184150"/>
+          </a:xfrm>
+          <a:prstGeom prst="rect">
+            <a:avLst/>
+          </a:prstGeom>
+          <a:noFill/>
+        </p:spPr>
+        <p:txBody>
+          <a:bodyPr wrap="square" lIns="0" rIns="0" tIns="0" bIns="0" anchor="t">
+            <a:noAutofit/>
+          </a:bodyPr>
+          <a:lstStyle/>
+          <a:p>
+            <a:pPr algn="r">
+              <a:lnSpc>
+                <a:spcPct val="98000"/>
+              </a:lnSpc>
+            </a:pPr>
+            <a:r>
+              <a:rPr sz="1200" b="0" i="0">
+                <a:solidFill>
+                  <a:srgbClr val="66717F"/>
+                </a:solidFill>
+                <a:latin typeface="Montserrat"/>
+              </a:rPr>
+              <a:t>48</a:t>
+            </a:r>
+          </a:p>
+        </p:txBody>
+      </p:sp>
+    </p:spTree>
+  </p:cSld>
+  <p:clrMapOvr>
+    <a:masterClrMapping/>
+  </p:clrMapOvr>
+</p:sld>
+</file>
+
+<file path=ppt/slides/slide49.xml><?xml version="1.0" encoding="utf-8"?>
+<p:sld xmlns:a="http://schemas.openxmlformats.org/drawingml/2006/main" xmlns:p="http://schemas.openxmlformats.org/presentationml/2006/main" xmlns:r="http://schemas.openxmlformats.org/officeDocument/2006/relationships">
+  <p:cSld>
+    <p:bg>
+      <p:bgPr>
+        <a:solidFill>
+          <a:srgbClr val="1B2F4B"/>
+        </a:solidFill>
+        <a:effectLst/>
+      </p:bgPr>
+    </p:bg>
+    <p:spTree>
+      <p:nvGrpSpPr>
+        <p:cNvPr id="1" name=""/>
+        <p:cNvGrpSpPr/>
+        <p:nvPr/>
+      </p:nvGrpSpPr>
+      <p:grpSpPr/>
+      <p:sp>
+        <p:nvSpPr>
+          <p:cNvPr id="2" name="TextBox 1"/>
+          <p:cNvSpPr txBox="1"/>
+          <p:nvPr/>
+        </p:nvSpPr>
+        <p:spPr>
+          <a:xfrm>
+            <a:off x="5002808" y="2419052"/>
+            <a:ext cx="2251874" cy="355600"/>
+          </a:xfrm>
+          <a:prstGeom prst="rect">
+            <a:avLst/>
+          </a:prstGeom>
+          <a:noFill/>
+        </p:spPr>
+        <p:txBody>
+          <a:bodyPr wrap="square" lIns="0" rIns="0" tIns="0" bIns="0" anchor="t">
+            <a:noAutofit/>
+          </a:bodyPr>
+          <a:lstStyle/>
+          <a:p>
+            <a:pPr algn="ctr">
+              <a:lnSpc>
+                <a:spcPct val="115000"/>
+              </a:lnSpc>
+            </a:pPr>
+            <a:r>
+              <a:rPr sz="2000" b="0" i="0">
+                <a:solidFill>
+                  <a:srgbClr val="D8E1EA"/>
+                </a:solidFill>
+                <a:latin typeface="Montserrat"/>
+              </a:rPr>
+              <a:t>Se houver tempo</a:t>
+            </a:r>
+          </a:p>
+        </p:txBody>
+      </p:sp>
+      <p:sp>
+        <p:nvSpPr>
+          <p:cNvPr id="3" name="TextBox 2"/>
+          <p:cNvSpPr txBox="1"/>
+          <p:nvPr/>
+        </p:nvSpPr>
+        <p:spPr>
+          <a:xfrm>
+            <a:off x="3146623" y="3054052"/>
+            <a:ext cx="6075614" cy="803275"/>
+          </a:xfrm>
+          <a:prstGeom prst="rect">
+            <a:avLst/>
+          </a:prstGeom>
+          <a:noFill/>
+        </p:spPr>
+        <p:txBody>
+          <a:bodyPr wrap="square" lIns="0" rIns="0" tIns="0" bIns="0" anchor="t">
+            <a:noAutofit/>
+          </a:bodyPr>
+          <a:lstStyle/>
+          <a:p>
+            <a:pPr algn="ctr">
+              <a:lnSpc>
+                <a:spcPct val="94000"/>
+              </a:lnSpc>
+            </a:pPr>
+            <a:r>
+              <a:rPr sz="5500" b="1" i="0">
+                <a:solidFill>
+                  <a:srgbClr val="FFFFFF"/>
+                </a:solidFill>
+                <a:latin typeface="Montserrat"/>
+              </a:rPr>
+              <a:t>Caso extra: Lara</a:t>
+            </a:r>
+          </a:p>
+        </p:txBody>
+      </p:sp>
+      <p:sp>
+        <p:nvSpPr>
+          <p:cNvPr id="4" name="TextBox 3"/>
+          <p:cNvSpPr txBox="1"/>
+          <p:nvPr/>
+        </p:nvSpPr>
+        <p:spPr>
+          <a:xfrm>
+            <a:off x="1944688" y="4136727"/>
+            <a:ext cx="8551704" cy="302220"/>
+          </a:xfrm>
+          <a:prstGeom prst="rect">
+            <a:avLst/>
+          </a:prstGeom>
+          <a:noFill/>
+        </p:spPr>
+        <p:txBody>
+          <a:bodyPr wrap="square" lIns="0" rIns="0" tIns="0" bIns="0" anchor="t">
+            <a:noAutofit/>
+          </a:bodyPr>
+          <a:lstStyle/>
+          <a:p>
+            <a:pPr algn="ctr">
+              <a:lnSpc>
+                <a:spcPct val="115000"/>
+              </a:lnSpc>
+            </a:pPr>
+            <a:r>
+              <a:rPr sz="1700" b="0" i="1">
+                <a:solidFill>
+                  <a:srgbClr val="9FD3D8"/>
+                </a:solidFill>
+                <a:latin typeface="Montserrat"/>
+              </a:rPr>
+              <a:t>O mesmo raciocínio com outra história: vídeo, história, perguntas e respostas.</a:t>
+            </a:r>
+          </a:p>
+        </p:txBody>
+      </p:sp>
+      <p:sp>
+        <p:nvSpPr>
+          <p:cNvPr id="5" name="TextBox 4"/>
+          <p:cNvSpPr txBox="1"/>
+          <p:nvPr/>
+        </p:nvSpPr>
+        <p:spPr>
+          <a:xfrm>
+            <a:off x="10820400" y="6343650"/>
+            <a:ext cx="784860" cy="184150"/>
+          </a:xfrm>
+          <a:prstGeom prst="rect">
+            <a:avLst/>
+          </a:prstGeom>
+          <a:noFill/>
+        </p:spPr>
+        <p:txBody>
+          <a:bodyPr wrap="square" lIns="0" rIns="0" tIns="0" bIns="0" anchor="t">
+            <a:noAutofit/>
+          </a:bodyPr>
+          <a:lstStyle/>
+          <a:p>
+            <a:pPr algn="r">
+              <a:lnSpc>
+                <a:spcPct val="98000"/>
+              </a:lnSpc>
+            </a:pPr>
+            <a:r>
+              <a:rPr sz="1200" b="0" i="0">
+                <a:solidFill>
+                  <a:srgbClr val="B8C4D2"/>
+                </a:solidFill>
+                <a:latin typeface="Montserrat"/>
+              </a:rPr>
+              <a:t>49</a:t>
+            </a:r>
+          </a:p>
+        </p:txBody>
+      </p:sp>
+    </p:spTree>
+  </p:cSld>
+  <p:clrMapOvr>
+    <a:masterClrMapping/>
+  </p:clrMapOvr>
+</p:sld>
+</file>
+
+<file path=ppt/slides/slide5.xml><?xml version="1.0" encoding="utf-8"?>
 <p:sld xmlns:a="http://schemas.openxmlformats.org/drawingml/2006/main" xmlns:p="http://schemas.openxmlformats.org/presentationml/2006/main" xmlns:r="http://schemas.openxmlformats.org/officeDocument/2006/relationships">
   <p:cSld>
     <p:bg>
@@ -22773,7 +24136,7 @@
         </p:nvSpPr>
         <p:spPr>
           <a:xfrm>
-            <a:off x="1168400" y="2094607"/>
+            <a:off x="1168400" y="2165648"/>
             <a:ext cx="10307828" cy="481905"/>
           </a:xfrm>
           <a:prstGeom prst="rect">
@@ -22799,7 +24162,7 @@
                 </a:solidFill>
                 <a:latin typeface="Montserrat"/>
               </a:rPr>
-              <a:t>Plenária: do comportamento à decisão</a:t>
+              <a:t>Combinados</a:t>
             </a:r>
           </a:p>
         </p:txBody>
@@ -22812,33 +24175,85 @@
         </p:nvSpPr>
         <p:spPr>
           <a:xfrm>
-            <a:off x="1168400" y="2906712"/>
-            <a:ext cx="10307828" cy="660400"/>
-          </a:xfrm>
-          <a:prstGeom prst="rect">
-            <a:avLst/>
-          </a:prstGeom>
-          <a:noFill/>
-        </p:spPr>
-        <p:txBody>
-          <a:bodyPr wrap="square" lIns="0" rIns="0" tIns="0" bIns="0" anchor="t">
-            <a:noAutofit/>
-          </a:bodyPr>
-          <a:lstStyle/>
-          <a:p>
-            <a:pPr algn="l">
-              <a:lnSpc>
-                <a:spcPct val="107000"/>
-              </a:lnSpc>
-            </a:pPr>
-            <a:r>
-              <a:rPr sz="2000" b="1" i="0">
-                <a:solidFill>
-                  <a:srgbClr val="0F7C86"/>
-                </a:solidFill>
-                <a:latin typeface="Montserrat"/>
-              </a:rPr>
-              <a:t>Comportamento → Antes e depois → Explicações possíveis → O que fazer → Cuidados éticos</a:t>
+            <a:off x="1168400" y="2977753"/>
+            <a:ext cx="10307828" cy="1524000"/>
+          </a:xfrm>
+          <a:prstGeom prst="rect">
+            <a:avLst/>
+          </a:prstGeom>
+          <a:noFill/>
+        </p:spPr>
+        <p:txBody>
+          <a:bodyPr wrap="square" lIns="0" rIns="0" tIns="0" bIns="0" anchor="t">
+            <a:noAutofit/>
+          </a:bodyPr>
+          <a:lstStyle/>
+          <a:p>
+            <a:pPr algn="l" marL="279400" indent="-279400">
+              <a:lnSpc>
+                <a:spcPct val="123000"/>
+              </a:lnSpc>
+              <a:buChar char="•"/>
+            </a:pPr>
+            <a:r>
+              <a:rPr sz="2000" b="0" i="0">
+                <a:solidFill>
+                  <a:srgbClr val="2E3A4A"/>
+                </a:solidFill>
+                <a:latin typeface="Montserrat"/>
+              </a:rPr>
+              <a:t>Perguntas são bem-vindas a qualquer momento</a:t>
+            </a:r>
+          </a:p>
+          <a:p>
+            <a:pPr algn="l" marL="279400" indent="-279400">
+              <a:lnSpc>
+                <a:spcPct val="123000"/>
+              </a:lnSpc>
+              <a:buChar char="•"/>
+            </a:pPr>
+            <a:r>
+              <a:rPr sz="2000" b="0" i="0">
+                <a:solidFill>
+                  <a:srgbClr val="2E3A4A"/>
+                </a:solidFill>
+                <a:latin typeface="Montserrat"/>
+              </a:rPr>
+              <a:t>Todos os casos são fictícios</a:t>
+            </a:r>
+          </a:p>
+          <a:p>
+            <a:pPr algn="l" marL="279400" indent="-279400">
+              <a:lnSpc>
+                <a:spcPct val="123000"/>
+              </a:lnSpc>
+              <a:buChar char="•"/>
+            </a:pPr>
+            <a:r>
+              <a:rPr sz="2000" b="0" i="0">
+                <a:solidFill>
+                  <a:srgbClr val="2E3A4A"/>
+                </a:solidFill>
+                <a:latin typeface="Montserrat"/>
+              </a:rPr>
+              <a:t>Não vamos discutir casos reais</a:t>
+            </a:r>
+          </a:p>
+          <a:p>
+            <a:pPr algn="l" marL="279400" indent="-279400">
+              <a:lnSpc>
+                <a:spcPct val="123000"/>
+              </a:lnSpc>
+              <a:buChar char="•"/>
+            </a:pPr>
+            <a:r>
+              <a:rPr sz="2000" b="0" i="0">
+                <a:solidFill>
+                  <a:srgbClr val="2E3A4A"/>
+                </a:solidFill>
+                <a:latin typeface="Montserrat"/>
+              </a:rPr>
+              <a:t>Vamos usar “pessoa autista”, respeitando preferências individuais</a:t>
             </a:r>
           </a:p>
         </p:txBody>
@@ -22846,63 +24261,6 @@
       <p:sp>
         <p:nvSpPr>
           <p:cNvPr id="5" name="TextBox 4"/>
-          <p:cNvSpPr txBox="1"/>
-          <p:nvPr/>
-        </p:nvSpPr>
-        <p:spPr>
-          <a:xfrm>
-            <a:off x="1168400" y="3897312"/>
-            <a:ext cx="10307828" cy="675481"/>
-          </a:xfrm>
-          <a:prstGeom prst="rect">
-            <a:avLst/>
-          </a:prstGeom>
-          <a:noFill/>
-        </p:spPr>
-        <p:txBody>
-          <a:bodyPr wrap="square" lIns="0" rIns="0" tIns="0" bIns="0" anchor="t">
-            <a:noAutofit/>
-          </a:bodyPr>
-          <a:lstStyle/>
-          <a:p>
-            <a:pPr algn="l">
-              <a:lnSpc>
-                <a:spcPct val="115000"/>
-              </a:lnSpc>
-            </a:pPr>
-            <a:r>
-              <a:rPr sz="1900" b="0" i="0">
-                <a:solidFill>
-                  <a:srgbClr val="2E3A4A"/>
-                </a:solidFill>
-                <a:latin typeface="Montserrat"/>
-              </a:rPr>
-              <a:t>Uma história </a:t>
-            </a:r>
-            <a:r>
-              <a:rPr sz="1900" b="1" i="0">
-                <a:solidFill>
-                  <a:srgbClr val="2E3A4A"/>
-                </a:solidFill>
-                <a:latin typeface="Montserrat"/>
-              </a:rPr>
-              <a:t>não permite concluir a função (para que o comportamento serve)</a:t>
-            </a:r>
-            <a:r>
-              <a:rPr sz="1900" b="0" i="0">
-                <a:solidFill>
-                  <a:srgbClr val="2E3A4A"/>
-                </a:solidFill>
-                <a:latin typeface="Montserrat"/>
-              </a:rPr>
-              <a:t>. Ela permite levantar hipóteses que precisam de avaliação.</a:t>
-            </a:r>
-          </a:p>
-        </p:txBody>
-      </p:sp>
-      <p:sp>
-        <p:nvSpPr>
-          <p:cNvPr id="6" name="TextBox 5"/>
           <p:cNvSpPr txBox="1"/>
           <p:nvPr/>
         </p:nvSpPr>
@@ -22934,14 +24292,14 @@
                 </a:solidFill>
                 <a:latin typeface="Montserrat"/>
               </a:rPr>
-              <a:t>Hanley et al. (2014)</a:t>
-            </a:r>
-          </a:p>
-        </p:txBody>
-      </p:sp>
-      <p:sp>
-        <p:nvSpPr>
-          <p:cNvPr id="7" name="TextBox 6"/>
+              <a:t>Bottema-Beutel et al. (2021)</a:t>
+            </a:r>
+          </a:p>
+        </p:txBody>
+      </p:sp>
+      <p:sp>
+        <p:nvSpPr>
+          <p:cNvPr id="6" name="TextBox 5"/>
           <p:cNvSpPr txBox="1"/>
           <p:nvPr/>
         </p:nvSpPr>
@@ -22973,7 +24331,7 @@
                 </a:solidFill>
                 <a:latin typeface="Montserrat"/>
               </a:rPr>
-              <a:t>37</a:t>
+              <a:t>5</a:t>
             </a:r>
           </a:p>
         </p:txBody>
@@ -22986,7 +24344,1281 @@
 </p:sld>
 </file>
 
-<file path=ppt/slides/slide47.xml><?xml version="1.0" encoding="utf-8"?>
+<file path=ppt/slides/slide50.xml><?xml version="1.0" encoding="utf-8"?>
+<p:sld xmlns:a="http://schemas.openxmlformats.org/drawingml/2006/main" xmlns:p="http://schemas.openxmlformats.org/presentationml/2006/main" xmlns:r="http://schemas.openxmlformats.org/officeDocument/2006/relationships">
+  <p:cSld>
+    <p:bg>
+      <p:bgPr>
+        <a:solidFill>
+          <a:srgbClr val="EEF4F5"/>
+        </a:solidFill>
+        <a:effectLst/>
+      </p:bgPr>
+    </p:bg>
+    <p:spTree>
+      <p:nvGrpSpPr>
+        <p:cNvPr id="1" name=""/>
+        <p:cNvGrpSpPr/>
+        <p:nvPr/>
+      </p:nvGrpSpPr>
+      <p:grpSpPr/>
+      <p:sp>
+        <p:nvSpPr>
+          <p:cNvPr id="2" name="Rectangle 1"/>
+          <p:cNvSpPr/>
+          <p:nvPr/>
+        </p:nvSpPr>
+        <p:spPr>
+          <a:xfrm>
+            <a:off x="0" y="0"/>
+            <a:ext cx="177800" cy="6858000"/>
+          </a:xfrm>
+          <a:prstGeom prst="rect">
+            <a:avLst/>
+          </a:prstGeom>
+          <a:solidFill>
+            <a:srgbClr val="0F7C86"/>
+          </a:solidFill>
+          <a:ln>
+            <a:noFill/>
+          </a:ln>
+          <a:effectLst/>
+        </p:spPr>
+        <p:style>
+          <a:lnRef idx="1">
+            <a:schemeClr val="accent1"/>
+          </a:lnRef>
+          <a:fillRef idx="3">
+            <a:schemeClr val="accent1"/>
+          </a:fillRef>
+          <a:effectRef idx="2">
+            <a:schemeClr val="accent1"/>
+          </a:effectRef>
+          <a:fontRef idx="minor">
+            <a:schemeClr val="lt1"/>
+          </a:fontRef>
+        </p:style>
+        <p:txBody>
+          <a:bodyPr rtlCol="0" anchor="ctr"/>
+          <a:lstStyle/>
+          <a:p>
+            <a:pPr algn="ctr"/>
+          </a:p>
+        </p:txBody>
+      </p:sp>
+      <p:sp>
+        <p:nvSpPr>
+          <p:cNvPr id="3" name="TextBox 2"/>
+          <p:cNvSpPr txBox="1"/>
+          <p:nvPr/>
+        </p:nvSpPr>
+        <p:spPr>
+          <a:xfrm>
+            <a:off x="1168400" y="1093192"/>
+            <a:ext cx="10569448" cy="452735"/>
+          </a:xfrm>
+          <a:prstGeom prst="rect">
+            <a:avLst/>
+          </a:prstGeom>
+          <a:noFill/>
+        </p:spPr>
+        <p:txBody>
+          <a:bodyPr wrap="square" lIns="0" rIns="0" tIns="0" bIns="0" anchor="t">
+            <a:noAutofit/>
+          </a:bodyPr>
+          <a:lstStyle/>
+          <a:p>
+            <a:pPr algn="l">
+              <a:lnSpc>
+                <a:spcPct val="94000"/>
+              </a:lnSpc>
+            </a:pPr>
+            <a:r>
+              <a:rPr sz="3100" b="1" i="0">
+                <a:solidFill>
+                  <a:srgbClr val="1B2F4B"/>
+                </a:solidFill>
+                <a:latin typeface="Montserrat"/>
+              </a:rPr>
+              <a:t>Caso extra: vídeo da Lara</a:t>
+            </a:r>
+          </a:p>
+        </p:txBody>
+      </p:sp>
+      <p:sp>
+        <p:nvSpPr>
+          <p:cNvPr id="4" name="TextBox 3"/>
+          <p:cNvSpPr txBox="1"/>
+          <p:nvPr/>
+        </p:nvSpPr>
+        <p:spPr>
+          <a:xfrm>
+            <a:off x="1168400" y="2731492"/>
+            <a:ext cx="4133596" cy="302220"/>
+          </a:xfrm>
+          <a:prstGeom prst="rect">
+            <a:avLst/>
+          </a:prstGeom>
+          <a:noFill/>
+        </p:spPr>
+        <p:txBody>
+          <a:bodyPr wrap="square" lIns="0" rIns="0" tIns="0" bIns="0" anchor="t">
+            <a:noAutofit/>
+          </a:bodyPr>
+          <a:lstStyle/>
+          <a:p>
+            <a:pPr algn="l">
+              <a:lnSpc>
+                <a:spcPct val="115000"/>
+              </a:lnSpc>
+            </a:pPr>
+            <a:r>
+              <a:rPr sz="1700" b="0" i="0">
+                <a:solidFill>
+                  <a:srgbClr val="2E3A4A"/>
+                </a:solidFill>
+                <a:latin typeface="Montserrat"/>
+              </a:rPr>
+              <a:t>Enquanto assistem, observem:</a:t>
+            </a:r>
+          </a:p>
+        </p:txBody>
+      </p:sp>
+      <p:sp>
+        <p:nvSpPr>
+          <p:cNvPr id="5" name="TextBox 4"/>
+          <p:cNvSpPr txBox="1"/>
+          <p:nvPr/>
+        </p:nvSpPr>
+        <p:spPr>
+          <a:xfrm>
+            <a:off x="1168400" y="3186112"/>
+            <a:ext cx="4133596" cy="971550"/>
+          </a:xfrm>
+          <a:prstGeom prst="rect">
+            <a:avLst/>
+          </a:prstGeom>
+          <a:noFill/>
+        </p:spPr>
+        <p:txBody>
+          <a:bodyPr wrap="square" lIns="0" rIns="0" tIns="0" bIns="0" anchor="t">
+            <a:noAutofit/>
+          </a:bodyPr>
+          <a:lstStyle/>
+          <a:p>
+            <a:pPr algn="l" marL="279400" indent="-279400">
+              <a:lnSpc>
+                <a:spcPct val="123000"/>
+              </a:lnSpc>
+              <a:buAutoNum type="arabicPeriod" startAt="1"/>
+            </a:pPr>
+            <a:r>
+              <a:rPr sz="1700" b="0" i="0">
+                <a:solidFill>
+                  <a:srgbClr val="2E3A4A"/>
+                </a:solidFill>
+                <a:latin typeface="Montserrat"/>
+              </a:rPr>
+              <a:t>O que acontece logo antes?</a:t>
+            </a:r>
+          </a:p>
+          <a:p>
+            <a:pPr algn="l" marL="279400" indent="-279400">
+              <a:lnSpc>
+                <a:spcPct val="123000"/>
+              </a:lnSpc>
+              <a:buAutoNum type="arabicPeriod" startAt="1"/>
+            </a:pPr>
+            <a:r>
+              <a:rPr sz="1700" b="0" i="0">
+                <a:solidFill>
+                  <a:srgbClr val="2E3A4A"/>
+                </a:solidFill>
+                <a:latin typeface="Montserrat"/>
+              </a:rPr>
+              <a:t>O que a Lara faz?</a:t>
+            </a:r>
+          </a:p>
+          <a:p>
+            <a:pPr algn="l" marL="279400" indent="-279400">
+              <a:lnSpc>
+                <a:spcPct val="123000"/>
+              </a:lnSpc>
+              <a:buAutoNum type="arabicPeriod" startAt="1"/>
+            </a:pPr>
+            <a:r>
+              <a:rPr sz="1700" b="0" i="0">
+                <a:solidFill>
+                  <a:srgbClr val="2E3A4A"/>
+                </a:solidFill>
+                <a:latin typeface="Montserrat"/>
+              </a:rPr>
+              <a:t>O que acontece logo depois?</a:t>
+            </a:r>
+          </a:p>
+        </p:txBody>
+      </p:sp>
+      <p:pic>
+        <p:nvPicPr>
+          <p:cNvPr id="6" name="Animação: Lara desenha na sala; a professora propõe trabalho em grupo; os colegas conversam alto; Lara coloca o capuz, abaixa a cabeça e sai da sala; depois desenha na biblioteca">
+            <a:hlinkClick r:id="" action="ppaction://media"/>
+          </p:cNvPr>
+          <p:cNvPicPr>
+            <a:picLocks noChangeAspect="1"/>
+          </p:cNvPicPr>
+          <p:nvPr>
+            <a:videoFile r:link="rId3"/>
+            <p:extLst>
+              <p:ext uri="{DAA4B4D4-6D71-4841-9C94-3DE7FCFB9230}">
+                <p14:media xmlns:p14="http://schemas.microsoft.com/office/powerpoint/2010/main" r:embed="rId2"/>
+              </p:ext>
+            </p:extLst>
+          </p:nvPr>
+        </p:nvPicPr>
+        <p:blipFill>
+          <a:blip r:embed="rId4"/>
+          <a:stretch>
+            <a:fillRect/>
+          </a:stretch>
+        </p:blipFill>
+        <p:spPr>
+          <a:xfrm>
+            <a:off x="5537200" y="1774527"/>
+            <a:ext cx="5892800" cy="3314700"/>
+          </a:xfrm>
+          <a:prstGeom prst="rect">
+            <a:avLst/>
+          </a:prstGeom>
+        </p:spPr>
+      </p:pic>
+      <p:sp>
+        <p:nvSpPr>
+          <p:cNvPr id="7" name="TextBox 6"/>
+          <p:cNvSpPr txBox="1"/>
+          <p:nvPr/>
+        </p:nvSpPr>
+        <p:spPr>
+          <a:xfrm>
+            <a:off x="1168400" y="5343227"/>
+            <a:ext cx="10569448" cy="231080"/>
+          </a:xfrm>
+          <a:prstGeom prst="rect">
+            <a:avLst/>
+          </a:prstGeom>
+          <a:noFill/>
+        </p:spPr>
+        <p:txBody>
+          <a:bodyPr wrap="square" lIns="0" rIns="0" tIns="0" bIns="0" anchor="t">
+            <a:noAutofit/>
+          </a:bodyPr>
+          <a:lstStyle/>
+          <a:p>
+            <a:pPr algn="l">
+              <a:lnSpc>
+                <a:spcPct val="115000"/>
+              </a:lnSpc>
+            </a:pPr>
+            <a:r>
+              <a:rPr sz="1300" b="0" i="1">
+                <a:solidFill>
+                  <a:srgbClr val="66717F"/>
+                </a:solidFill>
+                <a:latin typeface="Montserrat"/>
+              </a:rPr>
+              <a:t>Animação, exemplo fictício. Não representa uma pessoa real. O vídeo mostra um episódio; o padrão está na história a seguir.</a:t>
+            </a:r>
+          </a:p>
+        </p:txBody>
+      </p:sp>
+      <p:sp>
+        <p:nvSpPr>
+          <p:cNvPr id="8" name="TextBox 7"/>
+          <p:cNvSpPr txBox="1"/>
+          <p:nvPr/>
+        </p:nvSpPr>
+        <p:spPr>
+          <a:xfrm>
+            <a:off x="10820400" y="6343650"/>
+            <a:ext cx="784860" cy="184150"/>
+          </a:xfrm>
+          <a:prstGeom prst="rect">
+            <a:avLst/>
+          </a:prstGeom>
+          <a:noFill/>
+        </p:spPr>
+        <p:txBody>
+          <a:bodyPr wrap="square" lIns="0" rIns="0" tIns="0" bIns="0" anchor="t">
+            <a:noAutofit/>
+          </a:bodyPr>
+          <a:lstStyle/>
+          <a:p>
+            <a:pPr algn="r">
+              <a:lnSpc>
+                <a:spcPct val="98000"/>
+              </a:lnSpc>
+            </a:pPr>
+            <a:r>
+              <a:rPr sz="1200" b="0" i="0">
+                <a:solidFill>
+                  <a:srgbClr val="66717F"/>
+                </a:solidFill>
+                <a:latin typeface="Montserrat"/>
+              </a:rPr>
+              <a:t>50</a:t>
+            </a:r>
+          </a:p>
+        </p:txBody>
+      </p:sp>
+    </p:spTree>
+  </p:cSld>
+  <p:clrMapOvr>
+    <a:masterClrMapping/>
+  </p:clrMapOvr>
+  <p:timing>
+    <p:tnLst>
+      <p:par>
+        <p:cTn id="1" dur="indefinite" restart="never" nodeType="tmRoot">
+          <p:childTnLst>
+            <p:video>
+              <p:cMediaNode vol="80000">
+                <p:cTn id="2" fill="hold" display="0">
+                  <p:stCondLst>
+                    <p:cond delay="indefinite"/>
+                  </p:stCondLst>
+                </p:cTn>
+                <p:tgtEl>
+                  <p:spTgt spid="6"/>
+                </p:tgtEl>
+              </p:cMediaNode>
+            </p:video>
+          </p:childTnLst>
+        </p:cTn>
+      </p:par>
+    </p:tnLst>
+  </p:timing>
+</p:sld>
+</file>
+
+<file path=ppt/slides/slide51.xml><?xml version="1.0" encoding="utf-8"?>
+<p:sld xmlns:a="http://schemas.openxmlformats.org/drawingml/2006/main" xmlns:p="http://schemas.openxmlformats.org/presentationml/2006/main" xmlns:r="http://schemas.openxmlformats.org/officeDocument/2006/relationships">
+  <p:cSld>
+    <p:bg>
+      <p:bgPr>
+        <a:solidFill>
+          <a:srgbClr val="EEF4F5"/>
+        </a:solidFill>
+        <a:effectLst/>
+      </p:bgPr>
+    </p:bg>
+    <p:spTree>
+      <p:nvGrpSpPr>
+        <p:cNvPr id="1" name=""/>
+        <p:cNvGrpSpPr/>
+        <p:nvPr/>
+      </p:nvGrpSpPr>
+      <p:grpSpPr/>
+      <p:sp>
+        <p:nvSpPr>
+          <p:cNvPr id="2" name="Rectangle 1"/>
+          <p:cNvSpPr/>
+          <p:nvPr/>
+        </p:nvSpPr>
+        <p:spPr>
+          <a:xfrm>
+            <a:off x="0" y="0"/>
+            <a:ext cx="177800" cy="6858000"/>
+          </a:xfrm>
+          <a:prstGeom prst="rect">
+            <a:avLst/>
+          </a:prstGeom>
+          <a:solidFill>
+            <a:srgbClr val="0F7C86"/>
+          </a:solidFill>
+          <a:ln>
+            <a:noFill/>
+          </a:ln>
+          <a:effectLst/>
+        </p:spPr>
+        <p:style>
+          <a:lnRef idx="1">
+            <a:schemeClr val="accent1"/>
+          </a:lnRef>
+          <a:fillRef idx="3">
+            <a:schemeClr val="accent1"/>
+          </a:fillRef>
+          <a:effectRef idx="2">
+            <a:schemeClr val="accent1"/>
+          </a:effectRef>
+          <a:fontRef idx="minor">
+            <a:schemeClr val="lt1"/>
+          </a:fontRef>
+        </p:style>
+        <p:txBody>
+          <a:bodyPr rtlCol="0" anchor="ctr"/>
+          <a:lstStyle/>
+          <a:p>
+            <a:pPr algn="ctr"/>
+          </a:p>
+        </p:txBody>
+      </p:sp>
+      <p:sp>
+        <p:nvSpPr>
+          <p:cNvPr id="3" name="TextBox 2"/>
+          <p:cNvSpPr txBox="1"/>
+          <p:nvPr/>
+        </p:nvSpPr>
+        <p:spPr>
+          <a:xfrm>
+            <a:off x="1168400" y="1401167"/>
+            <a:ext cx="10307828" cy="394295"/>
+          </a:xfrm>
+          <a:prstGeom prst="rect">
+            <a:avLst/>
+          </a:prstGeom>
+          <a:noFill/>
+        </p:spPr>
+        <p:txBody>
+          <a:bodyPr wrap="square" lIns="0" rIns="0" tIns="0" bIns="0" anchor="t">
+            <a:noAutofit/>
+          </a:bodyPr>
+          <a:lstStyle/>
+          <a:p>
+            <a:pPr algn="l">
+              <a:lnSpc>
+                <a:spcPct val="94000"/>
+              </a:lnSpc>
+            </a:pPr>
+            <a:r>
+              <a:rPr sz="2700" b="1" i="0">
+                <a:solidFill>
+                  <a:srgbClr val="1B2F4B"/>
+                </a:solidFill>
+                <a:latin typeface="Montserrat"/>
+              </a:rPr>
+              <a:t>Caso extra: a história da Lara</a:t>
+            </a:r>
+          </a:p>
+        </p:txBody>
+      </p:sp>
+      <p:sp>
+        <p:nvSpPr>
+          <p:cNvPr id="4" name="TextBox 3"/>
+          <p:cNvSpPr txBox="1"/>
+          <p:nvPr/>
+        </p:nvSpPr>
+        <p:spPr>
+          <a:xfrm>
+            <a:off x="1168400" y="1960562"/>
+            <a:ext cx="10307828" cy="1333500"/>
+          </a:xfrm>
+          <a:prstGeom prst="rect">
+            <a:avLst/>
+          </a:prstGeom>
+          <a:noFill/>
+        </p:spPr>
+        <p:txBody>
+          <a:bodyPr wrap="square" lIns="0" rIns="0" tIns="0" bIns="0" anchor="t">
+            <a:noAutofit/>
+          </a:bodyPr>
+          <a:lstStyle/>
+          <a:p>
+            <a:pPr algn="l">
+              <a:lnSpc>
+                <a:spcPct val="115000"/>
+              </a:lnSpc>
+            </a:pPr>
+            <a:r>
+              <a:rPr sz="1500" b="0" i="0">
+                <a:solidFill>
+                  <a:srgbClr val="2E3A4A"/>
+                </a:solidFill>
+                <a:latin typeface="Montserrat"/>
+              </a:rPr>
+              <a:t>Lara tem 14 anos, é autista e fala com fluência. Gosta de desenho e de astronomia. Nos últimos dois meses, quando a professora propõe </a:t>
+            </a:r>
+            <a:r>
+              <a:rPr sz="1500" b="1" i="0">
+                <a:solidFill>
+                  <a:srgbClr val="2E3A4A"/>
+                </a:solidFill>
+                <a:latin typeface="Montserrat"/>
+              </a:rPr>
+              <a:t>trabalho em grupo</a:t>
+            </a:r>
+            <a:r>
+              <a:rPr sz="1500" b="0" i="0">
+                <a:solidFill>
+                  <a:srgbClr val="2E3A4A"/>
+                </a:solidFill>
+                <a:latin typeface="Montserrat"/>
+              </a:rPr>
+              <a:t> numa sala barulhenta, Lara </a:t>
+            </a:r>
+            <a:r>
+              <a:rPr sz="1500" b="1" i="0">
+                <a:solidFill>
+                  <a:srgbClr val="2E3A4A"/>
+                </a:solidFill>
+                <a:latin typeface="Montserrat"/>
+              </a:rPr>
+              <a:t>coloca o capuz, abaixa a cabeça e, às vezes, sai da sala sem avisar</a:t>
+            </a:r>
+            <a:r>
+              <a:rPr sz="1500" b="0" i="0">
+                <a:solidFill>
+                  <a:srgbClr val="2E3A4A"/>
+                </a:solidFill>
+                <a:latin typeface="Montserrat"/>
+              </a:rPr>
+              <a:t>. Quando sai, é levada à coordenação e passa o resto da aula na biblioteca. Nas atividades individuais, participa e tira boas notas. Ela disse à psicóloga da escola: “o barulho é demais” e “sempre falo alguma coisa errada nos grupos”.</a:t>
+            </a:r>
+          </a:p>
+        </p:txBody>
+      </p:sp>
+      <p:sp>
+        <p:nvSpPr>
+          <p:cNvPr id="5" name="TextBox 4"/>
+          <p:cNvSpPr txBox="1"/>
+          <p:nvPr/>
+        </p:nvSpPr>
+        <p:spPr>
+          <a:xfrm>
+            <a:off x="1168400" y="3459162"/>
+            <a:ext cx="10307828" cy="1428750"/>
+          </a:xfrm>
+          <a:prstGeom prst="rect">
+            <a:avLst/>
+          </a:prstGeom>
+          <a:noFill/>
+        </p:spPr>
+        <p:txBody>
+          <a:bodyPr wrap="square" lIns="0" rIns="0" tIns="0" bIns="0" anchor="t">
+            <a:noAutofit/>
+          </a:bodyPr>
+          <a:lstStyle/>
+          <a:p>
+            <a:pPr algn="l" marL="279400" indent="-279400">
+              <a:lnSpc>
+                <a:spcPct val="123000"/>
+              </a:lnSpc>
+              <a:buAutoNum type="arabicPeriod" startAt="1"/>
+            </a:pPr>
+            <a:r>
+              <a:rPr sz="1500" b="0" i="0">
+                <a:solidFill>
+                  <a:srgbClr val="2E3A4A"/>
+                </a:solidFill>
+                <a:latin typeface="Montserrat"/>
+              </a:rPr>
+              <a:t>O que a Lara faz? Descrevam só o que dá para ver e ouvir.</a:t>
+            </a:r>
+          </a:p>
+          <a:p>
+            <a:pPr algn="l" marL="279400" indent="-279400">
+              <a:lnSpc>
+                <a:spcPct val="123000"/>
+              </a:lnSpc>
+              <a:buAutoNum type="arabicPeriod" startAt="1"/>
+            </a:pPr>
+            <a:r>
+              <a:rPr sz="1500" b="0" i="0">
+                <a:solidFill>
+                  <a:srgbClr val="2E3A4A"/>
+                </a:solidFill>
+                <a:latin typeface="Montserrat"/>
+              </a:rPr>
+              <a:t>O que acontece logo antes? E logo depois?</a:t>
+            </a:r>
+          </a:p>
+          <a:p>
+            <a:pPr algn="l" marL="279400" indent="-279400">
+              <a:lnSpc>
+                <a:spcPct val="123000"/>
+              </a:lnSpc>
+              <a:buAutoNum type="arabicPeriod" startAt="1"/>
+            </a:pPr>
+            <a:r>
+              <a:rPr sz="1500" b="0" i="0">
+                <a:solidFill>
+                  <a:srgbClr val="2E3A4A"/>
+                </a:solidFill>
+                <a:latin typeface="Montserrat"/>
+              </a:rPr>
+              <a:t>Por que isso pode estar acontecendo? Deem duas explicações possíveis.</a:t>
+            </a:r>
+          </a:p>
+          <a:p>
+            <a:pPr algn="l" marL="279400" indent="-279400">
+              <a:lnSpc>
+                <a:spcPct val="123000"/>
+              </a:lnSpc>
+              <a:buAutoNum type="arabicPeriod" startAt="1"/>
+            </a:pPr>
+            <a:r>
+              <a:rPr sz="1500" b="0" i="0">
+                <a:solidFill>
+                  <a:srgbClr val="2E3A4A"/>
+                </a:solidFill>
+                <a:latin typeface="Montserrat"/>
+              </a:rPr>
+              <a:t>A escola quer que a Lara faça todos os trabalhos sozinha, na biblioteca. Isso ajuda ou atrapalha?</a:t>
+            </a:r>
+          </a:p>
+          <a:p>
+            <a:pPr algn="l" marL="279400" indent="-279400">
+              <a:lnSpc>
+                <a:spcPct val="123000"/>
+              </a:lnSpc>
+              <a:buAutoNum type="arabicPeriod" startAt="1"/>
+            </a:pPr>
+            <a:r>
+              <a:rPr sz="1500" b="0" i="0">
+                <a:solidFill>
+                  <a:srgbClr val="2E3A4A"/>
+                </a:solidFill>
+                <a:latin typeface="Montserrat"/>
+              </a:rPr>
+              <a:t>O que vocês proporiam no lugar?</a:t>
+            </a:r>
+          </a:p>
+        </p:txBody>
+      </p:sp>
+      <p:sp>
+        <p:nvSpPr>
+          <p:cNvPr id="6" name="TextBox 5"/>
+          <p:cNvSpPr txBox="1"/>
+          <p:nvPr/>
+        </p:nvSpPr>
+        <p:spPr>
+          <a:xfrm>
+            <a:off x="1168400" y="5053012"/>
+            <a:ext cx="10307828" cy="213320"/>
+          </a:xfrm>
+          <a:prstGeom prst="rect">
+            <a:avLst/>
+          </a:prstGeom>
+          <a:noFill/>
+        </p:spPr>
+        <p:txBody>
+          <a:bodyPr wrap="square" lIns="0" rIns="0" tIns="0" bIns="0" anchor="t">
+            <a:noAutofit/>
+          </a:bodyPr>
+          <a:lstStyle/>
+          <a:p>
+            <a:pPr algn="l">
+              <a:lnSpc>
+                <a:spcPct val="115000"/>
+              </a:lnSpc>
+            </a:pPr>
+            <a:r>
+              <a:rPr sz="1200" b="0" i="1">
+                <a:solidFill>
+                  <a:srgbClr val="66717F"/>
+                </a:solidFill>
+                <a:latin typeface="Montserrat"/>
+              </a:rPr>
+              <a:t>Exemplo fictício</a:t>
+            </a:r>
+          </a:p>
+        </p:txBody>
+      </p:sp>
+      <p:sp>
+        <p:nvSpPr>
+          <p:cNvPr id="7" name="TextBox 6"/>
+          <p:cNvSpPr txBox="1"/>
+          <p:nvPr/>
+        </p:nvSpPr>
+        <p:spPr>
+          <a:xfrm>
+            <a:off x="10820400" y="6343650"/>
+            <a:ext cx="784860" cy="184150"/>
+          </a:xfrm>
+          <a:prstGeom prst="rect">
+            <a:avLst/>
+          </a:prstGeom>
+          <a:noFill/>
+        </p:spPr>
+        <p:txBody>
+          <a:bodyPr wrap="square" lIns="0" rIns="0" tIns="0" bIns="0" anchor="t">
+            <a:noAutofit/>
+          </a:bodyPr>
+          <a:lstStyle/>
+          <a:p>
+            <a:pPr algn="r">
+              <a:lnSpc>
+                <a:spcPct val="98000"/>
+              </a:lnSpc>
+            </a:pPr>
+            <a:r>
+              <a:rPr sz="1200" b="0" i="0">
+                <a:solidFill>
+                  <a:srgbClr val="66717F"/>
+                </a:solidFill>
+                <a:latin typeface="Montserrat"/>
+              </a:rPr>
+              <a:t>51</a:t>
+            </a:r>
+          </a:p>
+        </p:txBody>
+      </p:sp>
+    </p:spTree>
+  </p:cSld>
+  <p:clrMapOvr>
+    <a:masterClrMapping/>
+  </p:clrMapOvr>
+</p:sld>
+</file>
+
+<file path=ppt/slides/slide52.xml><?xml version="1.0" encoding="utf-8"?>
+<p:sld xmlns:a="http://schemas.openxmlformats.org/drawingml/2006/main" xmlns:p="http://schemas.openxmlformats.org/presentationml/2006/main" xmlns:r="http://schemas.openxmlformats.org/officeDocument/2006/relationships">
+  <p:cSld>
+    <p:bg>
+      <p:bgPr>
+        <a:solidFill>
+          <a:srgbClr val="FFFFFF"/>
+        </a:solidFill>
+        <a:effectLst/>
+      </p:bgPr>
+    </p:bg>
+    <p:spTree>
+      <p:nvGrpSpPr>
+        <p:cNvPr id="1" name=""/>
+        <p:cNvGrpSpPr/>
+        <p:nvPr/>
+      </p:nvGrpSpPr>
+      <p:grpSpPr/>
+      <p:sp>
+        <p:nvSpPr>
+          <p:cNvPr id="2" name="Rectangle 1"/>
+          <p:cNvSpPr/>
+          <p:nvPr/>
+        </p:nvSpPr>
+        <p:spPr>
+          <a:xfrm>
+            <a:off x="0" y="0"/>
+            <a:ext cx="177800" cy="6858000"/>
+          </a:xfrm>
+          <a:prstGeom prst="rect">
+            <a:avLst/>
+          </a:prstGeom>
+          <a:solidFill>
+            <a:srgbClr val="0F7C86"/>
+          </a:solidFill>
+          <a:ln>
+            <a:noFill/>
+          </a:ln>
+          <a:effectLst/>
+        </p:spPr>
+        <p:style>
+          <a:lnRef idx="1">
+            <a:schemeClr val="accent1"/>
+          </a:lnRef>
+          <a:fillRef idx="3">
+            <a:schemeClr val="accent1"/>
+          </a:fillRef>
+          <a:effectRef idx="2">
+            <a:schemeClr val="accent1"/>
+          </a:effectRef>
+          <a:fontRef idx="minor">
+            <a:schemeClr val="lt1"/>
+          </a:fontRef>
+        </p:style>
+        <p:txBody>
+          <a:bodyPr rtlCol="0" anchor="ctr"/>
+          <a:lstStyle/>
+          <a:p>
+            <a:pPr algn="ctr"/>
+          </a:p>
+        </p:txBody>
+      </p:sp>
+      <p:sp>
+        <p:nvSpPr>
+          <p:cNvPr id="3" name="TextBox 2"/>
+          <p:cNvSpPr txBox="1"/>
+          <p:nvPr/>
+        </p:nvSpPr>
+        <p:spPr>
+          <a:xfrm>
+            <a:off x="1168400" y="980777"/>
+            <a:ext cx="10307828" cy="481905"/>
+          </a:xfrm>
+          <a:prstGeom prst="rect">
+            <a:avLst/>
+          </a:prstGeom>
+          <a:noFill/>
+        </p:spPr>
+        <p:txBody>
+          <a:bodyPr wrap="square" lIns="0" rIns="0" tIns="0" bIns="0" anchor="t">
+            <a:noAutofit/>
+          </a:bodyPr>
+          <a:lstStyle/>
+          <a:p>
+            <a:pPr algn="l">
+              <a:lnSpc>
+                <a:spcPct val="94000"/>
+              </a:lnSpc>
+            </a:pPr>
+            <a:r>
+              <a:rPr sz="3300" b="1" i="0">
+                <a:solidFill>
+                  <a:srgbClr val="1B2F4B"/>
+                </a:solidFill>
+                <a:latin typeface="Montserrat"/>
+              </a:rPr>
+              <a:t>Respostas: a história da Lara</a:t>
+            </a:r>
+          </a:p>
+        </p:txBody>
+      </p:sp>
+      <p:graphicFrame>
+        <p:nvGraphicFramePr>
+          <p:cNvPr id="4" name="Table 3"/>
+          <p:cNvGraphicFramePr>
+            <a:graphicFrameLocks noGrp="1"/>
+          </p:cNvGraphicFramePr>
+          <p:nvPr/>
+        </p:nvGraphicFramePr>
+        <p:xfrm>
+          <a:off x="1168400" y="1653183"/>
+          <a:ext cx="10007600" cy="3594100"/>
+        </p:xfrm>
+        <a:graphic>
+          <a:graphicData uri="http://schemas.openxmlformats.org/drawingml/2006/table">
+            <a:tbl>
+              <a:tblPr firstRow="0" bandRow="0">
+                <a:tableStyleId>{2D5ABB26-0587-4C30-8999-92F81FD0307C}</a:tableStyleId>
+              </a:tblPr>
+              <a:tblGrid>
+                <a:gridCol w="3002260"/>
+                <a:gridCol w="7005340"/>
+              </a:tblGrid>
+              <a:tr h="450850">
+                <a:tc>
+                  <a:txBody>
+                    <a:bodyPr wrap="square"/>
+                    <a:lstStyle/>
+                    <a:p>
+                      <a:pPr>
+                        <a:lnSpc>
+                          <a:spcPct val="100000"/>
+                        </a:lnSpc>
+                      </a:pPr>
+                      <a:r>
+                        <a:rPr sz="1450" b="1" i="0">
+                          <a:solidFill>
+                            <a:srgbClr val="FFFFFF"/>
+                          </a:solidFill>
+                          <a:latin typeface="Montserrat"/>
+                        </a:rPr>
+                        <a:t>Pergunta</a:t>
+                      </a:r>
+                    </a:p>
+                  </a:txBody>
+                  <a:tcPr marL="114300" marR="114300" marT="68580" marB="68580" anchor="ctr">
+                    <a:solidFill>
+                      <a:srgbClr val="1B2F4B"/>
+                    </a:solidFill>
+                  </a:tcPr>
+                </a:tc>
+                <a:tc>
+                  <a:txBody>
+                    <a:bodyPr wrap="square"/>
+                    <a:lstStyle/>
+                    <a:p>
+                      <a:pPr>
+                        <a:lnSpc>
+                          <a:spcPct val="100000"/>
+                        </a:lnSpc>
+                      </a:pPr>
+                      <a:r>
+                        <a:rPr sz="1450" b="1" i="0">
+                          <a:solidFill>
+                            <a:srgbClr val="FFFFFF"/>
+                          </a:solidFill>
+                          <a:latin typeface="Montserrat"/>
+                        </a:rPr>
+                        <a:t>Resposta</a:t>
+                      </a:r>
+                    </a:p>
+                  </a:txBody>
+                  <a:tcPr marL="114300" marR="114300" marT="68580" marB="68580" anchor="ctr">
+                    <a:solidFill>
+                      <a:srgbClr val="1B2F4B"/>
+                    </a:solidFill>
+                  </a:tcPr>
+                </a:tc>
+              </a:tr>
+              <a:tr h="450850">
+                <a:tc>
+                  <a:txBody>
+                    <a:bodyPr wrap="square"/>
+                    <a:lstStyle/>
+                    <a:p>
+                      <a:pPr>
+                        <a:lnSpc>
+                          <a:spcPct val="100000"/>
+                        </a:lnSpc>
+                      </a:pPr>
+                      <a:r>
+                        <a:rPr sz="1450" b="0" i="0">
+                          <a:solidFill>
+                            <a:srgbClr val="2E3A4A"/>
+                          </a:solidFill>
+                          <a:latin typeface="Montserrat"/>
+                        </a:rPr>
+                        <a:t>1. O que ela faz</a:t>
+                      </a:r>
+                    </a:p>
+                  </a:txBody>
+                  <a:tcPr marL="114300" marR="114300" marT="68580" marB="68580" anchor="ctr">
+                    <a:solidFill>
+                      <a:srgbClr val="FFFFFF"/>
+                    </a:solidFill>
+                  </a:tcPr>
+                </a:tc>
+                <a:tc>
+                  <a:txBody>
+                    <a:bodyPr wrap="square"/>
+                    <a:lstStyle/>
+                    <a:p>
+                      <a:pPr>
+                        <a:lnSpc>
+                          <a:spcPct val="100000"/>
+                        </a:lnSpc>
+                      </a:pPr>
+                      <a:r>
+                        <a:rPr sz="1450" b="0" i="0">
+                          <a:solidFill>
+                            <a:srgbClr val="2E3A4A"/>
+                          </a:solidFill>
+                          <a:latin typeface="Montserrat"/>
+                        </a:rPr>
+                        <a:t>Coloca o capuz, abaixa a cabeça e sai da sala sem avisar</a:t>
+                      </a:r>
+                    </a:p>
+                  </a:txBody>
+                  <a:tcPr marL="114300" marR="114300" marT="68580" marB="68580" anchor="ctr">
+                    <a:solidFill>
+                      <a:srgbClr val="FFFFFF"/>
+                    </a:solidFill>
+                  </a:tcPr>
+                </a:tc>
+              </a:tr>
+              <a:tr h="673100">
+                <a:tc>
+                  <a:txBody>
+                    <a:bodyPr wrap="square"/>
+                    <a:lstStyle/>
+                    <a:p>
+                      <a:pPr>
+                        <a:lnSpc>
+                          <a:spcPct val="100000"/>
+                        </a:lnSpc>
+                      </a:pPr>
+                      <a:r>
+                        <a:rPr sz="1450" b="0" i="0">
+                          <a:solidFill>
+                            <a:srgbClr val="2E3A4A"/>
+                          </a:solidFill>
+                          <a:latin typeface="Montserrat"/>
+                        </a:rPr>
+                        <a:t>2. Antes e depois</a:t>
+                      </a:r>
+                    </a:p>
+                  </a:txBody>
+                  <a:tcPr marL="114300" marR="114300" marT="68580" marB="68580" anchor="ctr">
+                    <a:solidFill>
+                      <a:srgbClr val="F1F4F6"/>
+                    </a:solidFill>
+                  </a:tcPr>
+                </a:tc>
+                <a:tc>
+                  <a:txBody>
+                    <a:bodyPr wrap="square"/>
+                    <a:lstStyle/>
+                    <a:p>
+                      <a:pPr>
+                        <a:lnSpc>
+                          <a:spcPct val="100000"/>
+                        </a:lnSpc>
+                      </a:pPr>
+                      <a:r>
+                        <a:rPr sz="1450" b="0" i="0">
+                          <a:solidFill>
+                            <a:srgbClr val="2E3A4A"/>
+                          </a:solidFill>
+                          <a:latin typeface="Montserrat"/>
+                        </a:rPr>
+                        <a:t>Antes: trabalho em grupo numa sala barulhenta. Depois: sai do grupo e vai para a biblioteca</a:t>
+                      </a:r>
+                    </a:p>
+                  </a:txBody>
+                  <a:tcPr marL="114300" marR="114300" marT="68580" marB="68580" anchor="ctr">
+                    <a:solidFill>
+                      <a:srgbClr val="F1F4F6"/>
+                    </a:solidFill>
+                  </a:tcPr>
+                </a:tc>
+              </a:tr>
+              <a:tr h="673100">
+                <a:tc>
+                  <a:txBody>
+                    <a:bodyPr wrap="square"/>
+                    <a:lstStyle/>
+                    <a:p>
+                      <a:pPr>
+                        <a:lnSpc>
+                          <a:spcPct val="100000"/>
+                        </a:lnSpc>
+                      </a:pPr>
+                      <a:r>
+                        <a:rPr sz="1450" b="0" i="0">
+                          <a:solidFill>
+                            <a:srgbClr val="2E3A4A"/>
+                          </a:solidFill>
+                          <a:latin typeface="Montserrat"/>
+                        </a:rPr>
+                        <a:t>3. Explicações possíveis</a:t>
+                      </a:r>
+                    </a:p>
+                  </a:txBody>
+                  <a:tcPr marL="114300" marR="114300" marT="68580" marB="68580" anchor="ctr">
+                    <a:solidFill>
+                      <a:srgbClr val="FFFFFF"/>
+                    </a:solidFill>
+                  </a:tcPr>
+                </a:tc>
+                <a:tc>
+                  <a:txBody>
+                    <a:bodyPr wrap="square"/>
+                    <a:lstStyle/>
+                    <a:p>
+                      <a:pPr>
+                        <a:lnSpc>
+                          <a:spcPct val="100000"/>
+                        </a:lnSpc>
+                      </a:pPr>
+                      <a:r>
+                        <a:rPr sz="1450" b="0" i="0">
+                          <a:solidFill>
+                            <a:srgbClr val="2E3A4A"/>
+                          </a:solidFill>
+                          <a:latin typeface="Montserrat"/>
+                        </a:rPr>
+                        <a:t>Fugir do barulho; fugir da conversa em grupo (medo de errar); as duas juntas. Ir para a biblioteca pode reforçar (tornar mais provável) a saída</a:t>
+                      </a:r>
+                    </a:p>
+                  </a:txBody>
+                  <a:tcPr marL="114300" marR="114300" marT="68580" marB="68580" anchor="ctr">
+                    <a:solidFill>
+                      <a:srgbClr val="FFFFFF"/>
+                    </a:solidFill>
+                  </a:tcPr>
+                </a:tc>
+              </a:tr>
+              <a:tr h="673100">
+                <a:tc>
+                  <a:txBody>
+                    <a:bodyPr wrap="square"/>
+                    <a:lstStyle/>
+                    <a:p>
+                      <a:pPr>
+                        <a:lnSpc>
+                          <a:spcPct val="100000"/>
+                        </a:lnSpc>
+                      </a:pPr>
+                      <a:r>
+                        <a:rPr sz="1450" b="0" i="0">
+                          <a:solidFill>
+                            <a:srgbClr val="2E3A4A"/>
+                          </a:solidFill>
+                          <a:latin typeface="Montserrat"/>
+                        </a:rPr>
+                        <a:t>4. Sozinha na biblioteca: ajuda ou atrapalha?</a:t>
+                      </a:r>
+                    </a:p>
+                  </a:txBody>
+                  <a:tcPr marL="114300" marR="114300" marT="68580" marB="68580" anchor="ctr">
+                    <a:solidFill>
+                      <a:srgbClr val="F1F4F6"/>
+                    </a:solidFill>
+                  </a:tcPr>
+                </a:tc>
+                <a:tc>
+                  <a:txBody>
+                    <a:bodyPr wrap="square"/>
+                    <a:lstStyle/>
+                    <a:p>
+                      <a:pPr>
+                        <a:lnSpc>
+                          <a:spcPct val="100000"/>
+                        </a:lnSpc>
+                      </a:pPr>
+                      <a:r>
+                        <a:rPr sz="1450" b="0" i="0">
+                          <a:solidFill>
+                            <a:srgbClr val="2E3A4A"/>
+                          </a:solidFill>
+                          <a:latin typeface="Montserrat"/>
+                        </a:rPr>
+                        <a:t>Alivia agora, mas pode reforçar a fuga (sair da situação) e tirar chances de participar. Só serve como algo temporário, combinado com ela</a:t>
+                      </a:r>
+                    </a:p>
+                  </a:txBody>
+                  <a:tcPr marL="114300" marR="114300" marT="68580" marB="68580" anchor="ctr">
+                    <a:solidFill>
+                      <a:srgbClr val="F1F4F6"/>
+                    </a:solidFill>
+                  </a:tcPr>
+                </a:tc>
+              </a:tr>
+              <a:tr h="673100">
+                <a:tc>
+                  <a:txBody>
+                    <a:bodyPr wrap="square"/>
+                    <a:lstStyle/>
+                    <a:p>
+                      <a:pPr>
+                        <a:lnSpc>
+                          <a:spcPct val="100000"/>
+                        </a:lnSpc>
+                      </a:pPr>
+                      <a:r>
+                        <a:rPr sz="1450" b="0" i="0">
+                          <a:solidFill>
+                            <a:srgbClr val="2E3A4A"/>
+                          </a:solidFill>
+                          <a:latin typeface="Montserrat"/>
+                        </a:rPr>
+                        <a:t>5. O que propor no lugar</a:t>
+                      </a:r>
+                    </a:p>
+                  </a:txBody>
+                  <a:tcPr marL="114300" marR="114300" marT="68580" marB="68580" anchor="ctr">
+                    <a:solidFill>
+                      <a:srgbClr val="FFFFFF"/>
+                    </a:solidFill>
+                  </a:tcPr>
+                </a:tc>
+                <a:tc>
+                  <a:txBody>
+                    <a:bodyPr wrap="square"/>
+                    <a:lstStyle/>
+                    <a:p>
+                      <a:pPr>
+                        <a:lnSpc>
+                          <a:spcPct val="100000"/>
+                        </a:lnSpc>
+                      </a:pPr>
+                      <a:r>
+                        <a:rPr sz="1450" b="0" i="0">
+                          <a:solidFill>
+                            <a:srgbClr val="2E3A4A"/>
+                          </a:solidFill>
+                          <a:latin typeface="Montserrat"/>
+                        </a:rPr>
+                        <a:t>Lugar mais silencioso ou protetor de ouvido (se ela quiser), grupo menor, um papel definido no grupo e um jeito combinado de pedir pausa</a:t>
+                      </a:r>
+                    </a:p>
+                  </a:txBody>
+                  <a:tcPr marL="114300" marR="114300" marT="68580" marB="68580" anchor="ctr">
+                    <a:solidFill>
+                      <a:srgbClr val="FFFFFF"/>
+                    </a:solidFill>
+                  </a:tcPr>
+                </a:tc>
+              </a:tr>
+            </a:tbl>
+          </a:graphicData>
+        </a:graphic>
+      </p:graphicFrame>
+      <p:sp>
+        <p:nvSpPr>
+          <p:cNvPr id="5" name="TextBox 4"/>
+          <p:cNvSpPr txBox="1"/>
+          <p:nvPr/>
+        </p:nvSpPr>
+        <p:spPr>
+          <a:xfrm>
+            <a:off x="1168400" y="5437783"/>
+            <a:ext cx="10307828" cy="248841"/>
+          </a:xfrm>
+          <a:prstGeom prst="rect">
+            <a:avLst/>
+          </a:prstGeom>
+          <a:noFill/>
+        </p:spPr>
+        <p:txBody>
+          <a:bodyPr wrap="square" lIns="0" rIns="0" tIns="0" bIns="0" anchor="t">
+            <a:noAutofit/>
+          </a:bodyPr>
+          <a:lstStyle/>
+          <a:p>
+            <a:pPr algn="l">
+              <a:lnSpc>
+                <a:spcPct val="115000"/>
+              </a:lnSpc>
+            </a:pPr>
+            <a:r>
+              <a:rPr sz="1400" b="0" i="1">
+                <a:solidFill>
+                  <a:srgbClr val="66717F"/>
+                </a:solidFill>
+                <a:latin typeface="Montserrat"/>
+              </a:rPr>
+              <a:t>O capuz, em si, não é problema a eliminar. Decidir junto com a Lara.</a:t>
+            </a:r>
+          </a:p>
+        </p:txBody>
+      </p:sp>
+      <p:sp>
+        <p:nvSpPr>
+          <p:cNvPr id="6" name="TextBox 5"/>
+          <p:cNvSpPr txBox="1"/>
+          <p:nvPr/>
+        </p:nvSpPr>
+        <p:spPr>
+          <a:xfrm>
+            <a:off x="10820400" y="6343650"/>
+            <a:ext cx="784860" cy="184150"/>
+          </a:xfrm>
+          <a:prstGeom prst="rect">
+            <a:avLst/>
+          </a:prstGeom>
+          <a:noFill/>
+        </p:spPr>
+        <p:txBody>
+          <a:bodyPr wrap="square" lIns="0" rIns="0" tIns="0" bIns="0" anchor="t">
+            <a:noAutofit/>
+          </a:bodyPr>
+          <a:lstStyle/>
+          <a:p>
+            <a:pPr algn="r">
+              <a:lnSpc>
+                <a:spcPct val="98000"/>
+              </a:lnSpc>
+            </a:pPr>
+            <a:r>
+              <a:rPr sz="1200" b="0" i="0">
+                <a:solidFill>
+                  <a:srgbClr val="66717F"/>
+                </a:solidFill>
+                <a:latin typeface="Montserrat"/>
+              </a:rPr>
+              <a:t>52</a:t>
+            </a:r>
+          </a:p>
+        </p:txBody>
+      </p:sp>
+    </p:spTree>
+  </p:cSld>
+  <p:clrMapOvr>
+    <a:masterClrMapping/>
+  </p:clrMapOvr>
+</p:sld>
+</file>
+
+<file path=ppt/slides/slide53.xml><?xml version="1.0" encoding="utf-8"?>
 <p:sld xmlns:a="http://schemas.openxmlformats.org/drawingml/2006/main" xmlns:p="http://schemas.openxmlformats.org/presentationml/2006/main" xmlns:r="http://schemas.openxmlformats.org/officeDocument/2006/relationships">
   <p:cSld>
     <p:bg>
@@ -23056,7 +25688,7 @@
         </p:nvSpPr>
         <p:spPr>
           <a:xfrm>
-            <a:off x="1168400" y="1867198"/>
+            <a:off x="1168400" y="1505248"/>
             <a:ext cx="10307828" cy="481905"/>
           </a:xfrm>
           <a:prstGeom prst="rect">
@@ -23095,8 +25727,8 @@
         </p:nvSpPr>
         <p:spPr>
           <a:xfrm>
-            <a:off x="1168400" y="2628503"/>
-            <a:ext cx="10307828" cy="2171700"/>
+            <a:off x="1168400" y="2266553"/>
+            <a:ext cx="10307828" cy="2895600"/>
           </a:xfrm>
           <a:prstGeom prst="rect">
             <a:avLst/>
@@ -23122,7 +25754,7 @@
                 </a:solidFill>
                 <a:latin typeface="Montserrat"/>
               </a:rPr>
-              <a:t>TEA é heterogêneo: </a:t>
+              <a:t>TEA é heterogêneo (diferente de pessoa para pessoa): </a:t>
             </a:r>
             <a:r>
               <a:rPr sz="1900" b="1" i="0">
@@ -23208,7 +25840,7 @@
                 </a:solidFill>
                 <a:latin typeface="Montserrat"/>
               </a:rPr>
-              <a:t>evidência, individualização, ética e supervisão</a:t>
+              <a:t>evidência, individualização (plano feito para cada pessoa), ética e supervisão</a:t>
             </a:r>
           </a:p>
         </p:txBody>
@@ -23247,7 +25879,7 @@
                 </a:solidFill>
                 <a:latin typeface="Montserrat"/>
               </a:rPr>
-              <a:t>38</a:t>
+              <a:t>53</a:t>
             </a:r>
           </a:p>
         </p:txBody>
@@ -23260,7 +25892,7 @@
 </p:sld>
 </file>
 
-<file path=ppt/slides/slide48.xml><?xml version="1.0" encoding="utf-8"?>
+<file path=ppt/slides/slide54.xml><?xml version="1.0" encoding="utf-8"?>
 <p:sld xmlns:a="http://schemas.openxmlformats.org/drawingml/2006/main" xmlns:p="http://schemas.openxmlformats.org/presentationml/2006/main" xmlns:r="http://schemas.openxmlformats.org/officeDocument/2006/relationships">
   <p:cSld>
     <p:bg>
@@ -23351,7 +25983,7 @@
                 </a:solidFill>
                 <a:latin typeface="Montserrat"/>
               </a:rPr>
-              <a:t>39</a:t>
+              <a:t>54</a:t>
             </a:r>
           </a:p>
         </p:txBody>
@@ -23364,7 +25996,7 @@
 </p:sld>
 </file>
 
-<file path=ppt/slides/slide49.xml><?xml version="1.0" encoding="utf-8"?>
+<file path=ppt/slides/slide55.xml><?xml version="1.0" encoding="utf-8"?>
 <p:sld xmlns:a="http://schemas.openxmlformats.org/drawingml/2006/main" xmlns:p="http://schemas.openxmlformats.org/presentationml/2006/main" xmlns:r="http://schemas.openxmlformats.org/officeDocument/2006/relationships">
   <p:cSld>
     <p:bg>
@@ -23434,7 +26066,7 @@
         </p:nvSpPr>
         <p:spPr>
           <a:xfrm>
-            <a:off x="1168400" y="1305223"/>
+            <a:off x="1168400" y="1070273"/>
             <a:ext cx="10307828" cy="481905"/>
           </a:xfrm>
           <a:prstGeom prst="rect">
@@ -23474,8 +26106,8 @@
           <p:nvPr/>
         </p:nvGraphicFramePr>
         <p:xfrm>
-          <a:off x="1168400" y="2117328"/>
-          <a:ext cx="10007600" cy="3244850"/>
+          <a:off x="1168400" y="1882378"/>
+          <a:ext cx="10007600" cy="3714750"/>
         </p:xfrm>
         <a:graphic>
           <a:graphicData uri="http://schemas.openxmlformats.org/drawingml/2006/table">
@@ -23767,7 +26399,7 @@
                   </a:tcPr>
                 </a:tc>
               </a:tr>
-              <a:tr h="463550">
+              <a:tr h="698500">
                 <a:tc>
                   <a:txBody>
                     <a:bodyPr wrap="square"/>
@@ -23812,7 +26444,7 @@
                           </a:solidFill>
                           <a:latin typeface="Montserrat"/>
                         </a:rPr>
-                        <a:t>Qualidade da evidência em intervenção precoce</a:t>
+                        <a:t>Qualidade da evidência em intervenção precoce (na primeira infância)</a:t>
                       </a:r>
                     </a:p>
                   </a:txBody>
@@ -23823,7 +26455,7 @@
                   </a:tcPr>
                 </a:tc>
               </a:tr>
-              <a:tr h="463550">
+              <a:tr h="698500">
                 <a:tc>
                   <a:txBody>
                     <a:bodyPr wrap="square"/>
@@ -23868,7 +26500,7 @@
                           </a:solidFill>
                           <a:latin typeface="Montserrat"/>
                         </a:rPr>
-                        <a:t>Assentimento</a:t>
+                        <a:t>Assentimento (concordância da pessoa em participar)</a:t>
                       </a:r>
                     </a:p>
                   </a:txBody>
@@ -23956,7 +26588,7 @@
                 </a:solidFill>
                 <a:latin typeface="Montserrat"/>
               </a:rPr>
-              <a:t>40</a:t>
+              <a:t>55</a:t>
             </a:r>
           </a:p>
         </p:txBody>
@@ -23969,285 +26601,7 @@
 </p:sld>
 </file>
 
-<file path=ppt/slides/slide5.xml><?xml version="1.0" encoding="utf-8"?>
-<p:sld xmlns:a="http://schemas.openxmlformats.org/drawingml/2006/main" xmlns:p="http://schemas.openxmlformats.org/presentationml/2006/main" xmlns:r="http://schemas.openxmlformats.org/officeDocument/2006/relationships">
-  <p:cSld>
-    <p:bg>
-      <p:bgPr>
-        <a:solidFill>
-          <a:srgbClr val="FCFCFB"/>
-        </a:solidFill>
-        <a:effectLst/>
-      </p:bgPr>
-    </p:bg>
-    <p:spTree>
-      <p:nvGrpSpPr>
-        <p:cNvPr id="1" name=""/>
-        <p:cNvGrpSpPr/>
-        <p:nvPr/>
-      </p:nvGrpSpPr>
-      <p:grpSpPr/>
-      <p:sp>
-        <p:nvSpPr>
-          <p:cNvPr id="2" name="Rectangle 1"/>
-          <p:cNvSpPr/>
-          <p:nvPr/>
-        </p:nvSpPr>
-        <p:spPr>
-          <a:xfrm>
-            <a:off x="0" y="0"/>
-            <a:ext cx="177800" cy="6858000"/>
-          </a:xfrm>
-          <a:prstGeom prst="rect">
-            <a:avLst/>
-          </a:prstGeom>
-          <a:solidFill>
-            <a:srgbClr val="0F7C86"/>
-          </a:solidFill>
-          <a:ln>
-            <a:noFill/>
-          </a:ln>
-          <a:effectLst/>
-        </p:spPr>
-        <p:style>
-          <a:lnRef idx="1">
-            <a:schemeClr val="accent1"/>
-          </a:lnRef>
-          <a:fillRef idx="3">
-            <a:schemeClr val="accent1"/>
-          </a:fillRef>
-          <a:effectRef idx="2">
-            <a:schemeClr val="accent1"/>
-          </a:effectRef>
-          <a:fontRef idx="minor">
-            <a:schemeClr val="lt1"/>
-          </a:fontRef>
-        </p:style>
-        <p:txBody>
-          <a:bodyPr rtlCol="0" anchor="ctr"/>
-          <a:lstStyle/>
-          <a:p>
-            <a:pPr algn="ctr"/>
-          </a:p>
-        </p:txBody>
-      </p:sp>
-      <p:sp>
-        <p:nvSpPr>
-          <p:cNvPr id="3" name="TextBox 2"/>
-          <p:cNvSpPr txBox="1"/>
-          <p:nvPr/>
-        </p:nvSpPr>
-        <p:spPr>
-          <a:xfrm>
-            <a:off x="1168400" y="2165648"/>
-            <a:ext cx="10307828" cy="481905"/>
-          </a:xfrm>
-          <a:prstGeom prst="rect">
-            <a:avLst/>
-          </a:prstGeom>
-          <a:noFill/>
-        </p:spPr>
-        <p:txBody>
-          <a:bodyPr wrap="square" lIns="0" rIns="0" tIns="0" bIns="0" anchor="t">
-            <a:noAutofit/>
-          </a:bodyPr>
-          <a:lstStyle/>
-          <a:p>
-            <a:pPr algn="l">
-              <a:lnSpc>
-                <a:spcPct val="94000"/>
-              </a:lnSpc>
-            </a:pPr>
-            <a:r>
-              <a:rPr sz="3300" b="1" i="0">
-                <a:solidFill>
-                  <a:srgbClr val="1B2F4B"/>
-                </a:solidFill>
-                <a:latin typeface="Montserrat"/>
-              </a:rPr>
-              <a:t>Combinados</a:t>
-            </a:r>
-          </a:p>
-        </p:txBody>
-      </p:sp>
-      <p:sp>
-        <p:nvSpPr>
-          <p:cNvPr id="4" name="TextBox 3"/>
-          <p:cNvSpPr txBox="1"/>
-          <p:nvPr/>
-        </p:nvSpPr>
-        <p:spPr>
-          <a:xfrm>
-            <a:off x="1168400" y="2977753"/>
-            <a:ext cx="10307828" cy="1524000"/>
-          </a:xfrm>
-          <a:prstGeom prst="rect">
-            <a:avLst/>
-          </a:prstGeom>
-          <a:noFill/>
-        </p:spPr>
-        <p:txBody>
-          <a:bodyPr wrap="square" lIns="0" rIns="0" tIns="0" bIns="0" anchor="t">
-            <a:noAutofit/>
-          </a:bodyPr>
-          <a:lstStyle/>
-          <a:p>
-            <a:pPr algn="l" marL="279400" indent="-279400">
-              <a:lnSpc>
-                <a:spcPct val="123000"/>
-              </a:lnSpc>
-              <a:buChar char="•"/>
-            </a:pPr>
-            <a:r>
-              <a:rPr sz="2000" b="0" i="0">
-                <a:solidFill>
-                  <a:srgbClr val="2E3A4A"/>
-                </a:solidFill>
-                <a:latin typeface="Montserrat"/>
-              </a:rPr>
-              <a:t>Perguntas são bem-vindas a qualquer momento</a:t>
-            </a:r>
-          </a:p>
-          <a:p>
-            <a:pPr algn="l" marL="279400" indent="-279400">
-              <a:lnSpc>
-                <a:spcPct val="123000"/>
-              </a:lnSpc>
-              <a:buChar char="•"/>
-            </a:pPr>
-            <a:r>
-              <a:rPr sz="2000" b="0" i="0">
-                <a:solidFill>
-                  <a:srgbClr val="2E3A4A"/>
-                </a:solidFill>
-                <a:latin typeface="Montserrat"/>
-              </a:rPr>
-              <a:t>Todos os casos são fictícios</a:t>
-            </a:r>
-          </a:p>
-          <a:p>
-            <a:pPr algn="l" marL="279400" indent="-279400">
-              <a:lnSpc>
-                <a:spcPct val="123000"/>
-              </a:lnSpc>
-              <a:buChar char="•"/>
-            </a:pPr>
-            <a:r>
-              <a:rPr sz="2000" b="0" i="0">
-                <a:solidFill>
-                  <a:srgbClr val="2E3A4A"/>
-                </a:solidFill>
-                <a:latin typeface="Montserrat"/>
-              </a:rPr>
-              <a:t>Não vamos discutir casos reais</a:t>
-            </a:r>
-          </a:p>
-          <a:p>
-            <a:pPr algn="l" marL="279400" indent="-279400">
-              <a:lnSpc>
-                <a:spcPct val="123000"/>
-              </a:lnSpc>
-              <a:buChar char="•"/>
-            </a:pPr>
-            <a:r>
-              <a:rPr sz="2000" b="0" i="0">
-                <a:solidFill>
-                  <a:srgbClr val="2E3A4A"/>
-                </a:solidFill>
-                <a:latin typeface="Montserrat"/>
-              </a:rPr>
-              <a:t>Vamos usar “pessoa autista”, respeitando preferências individuais</a:t>
-            </a:r>
-          </a:p>
-        </p:txBody>
-      </p:sp>
-      <p:sp>
-        <p:nvSpPr>
-          <p:cNvPr id="5" name="TextBox 4"/>
-          <p:cNvSpPr txBox="1"/>
-          <p:nvPr/>
-        </p:nvSpPr>
-        <p:spPr>
-          <a:xfrm>
-            <a:off x="1168400" y="6343650"/>
-            <a:ext cx="9156700" cy="184150"/>
-          </a:xfrm>
-          <a:prstGeom prst="rect">
-            <a:avLst/>
-          </a:prstGeom>
-          <a:noFill/>
-        </p:spPr>
-        <p:txBody>
-          <a:bodyPr wrap="square" lIns="0" rIns="0" tIns="0" bIns="0" anchor="t">
-            <a:noAutofit/>
-          </a:bodyPr>
-          <a:lstStyle/>
-          <a:p>
-            <a:pPr algn="l">
-              <a:lnSpc>
-                <a:spcPct val="98000"/>
-              </a:lnSpc>
-            </a:pPr>
-            <a:r>
-              <a:rPr sz="1200" b="0" i="0">
-                <a:solidFill>
-                  <a:srgbClr val="66717F"/>
-                </a:solidFill>
-                <a:latin typeface="Montserrat"/>
-              </a:rPr>
-              <a:t>Bottema-Beutel et al. (2021)</a:t>
-            </a:r>
-          </a:p>
-        </p:txBody>
-      </p:sp>
-      <p:sp>
-        <p:nvSpPr>
-          <p:cNvPr id="6" name="TextBox 5"/>
-          <p:cNvSpPr txBox="1"/>
-          <p:nvPr/>
-        </p:nvSpPr>
-        <p:spPr>
-          <a:xfrm>
-            <a:off x="10820400" y="6343650"/>
-            <a:ext cx="784860" cy="184150"/>
-          </a:xfrm>
-          <a:prstGeom prst="rect">
-            <a:avLst/>
-          </a:prstGeom>
-          <a:noFill/>
-        </p:spPr>
-        <p:txBody>
-          <a:bodyPr wrap="square" lIns="0" rIns="0" tIns="0" bIns="0" anchor="t">
-            <a:noAutofit/>
-          </a:bodyPr>
-          <a:lstStyle/>
-          <a:p>
-            <a:pPr algn="r">
-              <a:lnSpc>
-                <a:spcPct val="98000"/>
-              </a:lnSpc>
-            </a:pPr>
-            <a:r>
-              <a:rPr sz="1200" b="0" i="0">
-                <a:solidFill>
-                  <a:srgbClr val="66717F"/>
-                </a:solidFill>
-                <a:latin typeface="Montserrat"/>
-              </a:rPr>
-              <a:t>5</a:t>
-            </a:r>
-          </a:p>
-        </p:txBody>
-      </p:sp>
-    </p:spTree>
-  </p:cSld>
-  <p:clrMapOvr>
-    <a:masterClrMapping/>
-  </p:clrMapOvr>
-</p:sld>
-</file>
-
-<file path=ppt/slides/slide50.xml><?xml version="1.0" encoding="utf-8"?>
+<file path=ppt/slides/slide56.xml><?xml version="1.0" encoding="utf-8"?>
 <p:sld xmlns:a="http://schemas.openxmlformats.org/drawingml/2006/main" xmlns:p="http://schemas.openxmlformats.org/presentationml/2006/main" xmlns:r="http://schemas.openxmlformats.org/officeDocument/2006/relationships">
   <p:cSld>
     <p:bg>
@@ -24416,2455 +26770,7 @@
                 </a:solidFill>
                 <a:latin typeface="Montserrat"/>
               </a:rPr>
-              <a:t>41</a:t>
-            </a:r>
-          </a:p>
-        </p:txBody>
-      </p:sp>
-    </p:spTree>
-  </p:cSld>
-  <p:clrMapOvr>
-    <a:masterClrMapping/>
-  </p:clrMapOvr>
-</p:sld>
-</file>
-
-<file path=ppt/slides/slide51.xml><?xml version="1.0" encoding="utf-8"?>
-<p:sld xmlns:a="http://schemas.openxmlformats.org/drawingml/2006/main" xmlns:p="http://schemas.openxmlformats.org/presentationml/2006/main" xmlns:r="http://schemas.openxmlformats.org/officeDocument/2006/relationships">
-  <p:cSld>
-    <p:bg>
-      <p:bgPr>
-        <a:solidFill>
-          <a:srgbClr val="EEF4F5"/>
-        </a:solidFill>
-        <a:effectLst/>
-      </p:bgPr>
-    </p:bg>
-    <p:spTree>
-      <p:nvGrpSpPr>
-        <p:cNvPr id="1" name=""/>
-        <p:cNvGrpSpPr/>
-        <p:nvPr/>
-      </p:nvGrpSpPr>
-      <p:grpSpPr/>
-      <p:sp>
-        <p:nvSpPr>
-          <p:cNvPr id="2" name="Rectangle 1"/>
-          <p:cNvSpPr/>
-          <p:nvPr/>
-        </p:nvSpPr>
-        <p:spPr>
-          <a:xfrm>
-            <a:off x="0" y="0"/>
-            <a:ext cx="177800" cy="6858000"/>
-          </a:xfrm>
-          <a:prstGeom prst="rect">
-            <a:avLst/>
-          </a:prstGeom>
-          <a:solidFill>
-            <a:srgbClr val="0F7C86"/>
-          </a:solidFill>
-          <a:ln>
-            <a:noFill/>
-          </a:ln>
-          <a:effectLst/>
-        </p:spPr>
-        <p:style>
-          <a:lnRef idx="1">
-            <a:schemeClr val="accent1"/>
-          </a:lnRef>
-          <a:fillRef idx="3">
-            <a:schemeClr val="accent1"/>
-          </a:fillRef>
-          <a:effectRef idx="2">
-            <a:schemeClr val="accent1"/>
-          </a:effectRef>
-          <a:fontRef idx="minor">
-            <a:schemeClr val="lt1"/>
-          </a:fontRef>
-        </p:style>
-        <p:txBody>
-          <a:bodyPr rtlCol="0" anchor="ctr"/>
-          <a:lstStyle/>
-          <a:p>
-            <a:pPr algn="ctr"/>
-          </a:p>
-        </p:txBody>
-      </p:sp>
-      <p:sp>
-        <p:nvSpPr>
-          <p:cNvPr id="3" name="TextBox 2"/>
-          <p:cNvSpPr txBox="1"/>
-          <p:nvPr/>
-        </p:nvSpPr>
-        <p:spPr>
-          <a:xfrm>
-            <a:off x="1168400" y="1093192"/>
-            <a:ext cx="10569448" cy="452735"/>
-          </a:xfrm>
-          <a:prstGeom prst="rect">
-            <a:avLst/>
-          </a:prstGeom>
-          <a:noFill/>
-        </p:spPr>
-        <p:txBody>
-          <a:bodyPr wrap="square" lIns="0" rIns="0" tIns="0" bIns="0" anchor="t">
-            <a:noAutofit/>
-          </a:bodyPr>
-          <a:lstStyle/>
-          <a:p>
-            <a:pPr algn="l">
-              <a:lnSpc>
-                <a:spcPct val="94000"/>
-              </a:lnSpc>
-            </a:pPr>
-            <a:r>
-              <a:rPr sz="3100" b="1" i="0">
-                <a:solidFill>
-                  <a:srgbClr val="1B2F4B"/>
-                </a:solidFill>
-                <a:latin typeface="Montserrat"/>
-              </a:rPr>
-              <a:t>Vídeo: Lara, uma aula</a:t>
-            </a:r>
-          </a:p>
-        </p:txBody>
-      </p:sp>
-      <p:sp>
-        <p:nvSpPr>
-          <p:cNvPr id="4" name="TextBox 3"/>
-          <p:cNvSpPr txBox="1"/>
-          <p:nvPr/>
-        </p:nvSpPr>
-        <p:spPr>
-          <a:xfrm>
-            <a:off x="1168400" y="2731492"/>
-            <a:ext cx="4133596" cy="302220"/>
-          </a:xfrm>
-          <a:prstGeom prst="rect">
-            <a:avLst/>
-          </a:prstGeom>
-          <a:noFill/>
-        </p:spPr>
-        <p:txBody>
-          <a:bodyPr wrap="square" lIns="0" rIns="0" tIns="0" bIns="0" anchor="t">
-            <a:noAutofit/>
-          </a:bodyPr>
-          <a:lstStyle/>
-          <a:p>
-            <a:pPr algn="l">
-              <a:lnSpc>
-                <a:spcPct val="115000"/>
-              </a:lnSpc>
-            </a:pPr>
-            <a:r>
-              <a:rPr sz="1700" b="0" i="0">
-                <a:solidFill>
-                  <a:srgbClr val="2E3A4A"/>
-                </a:solidFill>
-                <a:latin typeface="Montserrat"/>
-              </a:rPr>
-              <a:t>Enquanto assistem, observem:</a:t>
-            </a:r>
-          </a:p>
-        </p:txBody>
-      </p:sp>
-      <p:sp>
-        <p:nvSpPr>
-          <p:cNvPr id="5" name="TextBox 4"/>
-          <p:cNvSpPr txBox="1"/>
-          <p:nvPr/>
-        </p:nvSpPr>
-        <p:spPr>
-          <a:xfrm>
-            <a:off x="1168400" y="3186112"/>
-            <a:ext cx="4133596" cy="971550"/>
-          </a:xfrm>
-          <a:prstGeom prst="rect">
-            <a:avLst/>
-          </a:prstGeom>
-          <a:noFill/>
-        </p:spPr>
-        <p:txBody>
-          <a:bodyPr wrap="square" lIns="0" rIns="0" tIns="0" bIns="0" anchor="t">
-            <a:noAutofit/>
-          </a:bodyPr>
-          <a:lstStyle/>
-          <a:p>
-            <a:pPr algn="l" marL="279400" indent="-279400">
-              <a:lnSpc>
-                <a:spcPct val="123000"/>
-              </a:lnSpc>
-              <a:buAutoNum type="arabicPeriod" startAt="1"/>
-            </a:pPr>
-            <a:r>
-              <a:rPr sz="1700" b="0" i="0">
-                <a:solidFill>
-                  <a:srgbClr val="2E3A4A"/>
-                </a:solidFill>
-                <a:latin typeface="Montserrat"/>
-              </a:rPr>
-              <a:t>O que acontece logo antes?</a:t>
-            </a:r>
-          </a:p>
-          <a:p>
-            <a:pPr algn="l" marL="279400" indent="-279400">
-              <a:lnSpc>
-                <a:spcPct val="123000"/>
-              </a:lnSpc>
-              <a:buAutoNum type="arabicPeriod" startAt="1"/>
-            </a:pPr>
-            <a:r>
-              <a:rPr sz="1700" b="0" i="0">
-                <a:solidFill>
-                  <a:srgbClr val="2E3A4A"/>
-                </a:solidFill>
-                <a:latin typeface="Montserrat"/>
-              </a:rPr>
-              <a:t>O que a Lara faz?</a:t>
-            </a:r>
-          </a:p>
-          <a:p>
-            <a:pPr algn="l" marL="279400" indent="-279400">
-              <a:lnSpc>
-                <a:spcPct val="123000"/>
-              </a:lnSpc>
-              <a:buAutoNum type="arabicPeriod" startAt="1"/>
-            </a:pPr>
-            <a:r>
-              <a:rPr sz="1700" b="0" i="0">
-                <a:solidFill>
-                  <a:srgbClr val="2E3A4A"/>
-                </a:solidFill>
-                <a:latin typeface="Montserrat"/>
-              </a:rPr>
-              <a:t>O que acontece logo depois?</a:t>
-            </a:r>
-          </a:p>
-        </p:txBody>
-      </p:sp>
-      <p:pic>
-        <p:nvPicPr>
-          <p:cNvPr id="6" name="Animação: Lara desenha na sala; a professora propõe trabalho em grupo; os colegas conversam alto; Lara coloca o capuz, abaixa a cabeça e sai da sala; depois desenha na biblioteca">
-            <a:hlinkClick r:id="" action="ppaction://media"/>
-          </p:cNvPr>
-          <p:cNvPicPr>
-            <a:picLocks noChangeAspect="1"/>
-          </p:cNvPicPr>
-          <p:nvPr>
-            <a:videoFile r:link="rId3"/>
-            <p:extLst>
-              <p:ext uri="{DAA4B4D4-6D71-4841-9C94-3DE7FCFB9230}">
-                <p14:media xmlns:p14="http://schemas.microsoft.com/office/powerpoint/2010/main" r:embed="rId2"/>
-              </p:ext>
-            </p:extLst>
-          </p:nvPr>
-        </p:nvPicPr>
-        <p:blipFill>
-          <a:blip r:embed="rId4"/>
-          <a:stretch>
-            <a:fillRect/>
-          </a:stretch>
-        </p:blipFill>
-        <p:spPr>
-          <a:xfrm>
-            <a:off x="5537200" y="1774527"/>
-            <a:ext cx="5892800" cy="3314700"/>
-          </a:xfrm>
-          <a:prstGeom prst="rect">
-            <a:avLst/>
-          </a:prstGeom>
-        </p:spPr>
-      </p:pic>
-      <p:sp>
-        <p:nvSpPr>
-          <p:cNvPr id="7" name="TextBox 6"/>
-          <p:cNvSpPr txBox="1"/>
-          <p:nvPr/>
-        </p:nvSpPr>
-        <p:spPr>
-          <a:xfrm>
-            <a:off x="1168400" y="5343227"/>
-            <a:ext cx="10569448" cy="231080"/>
-          </a:xfrm>
-          <a:prstGeom prst="rect">
-            <a:avLst/>
-          </a:prstGeom>
-          <a:noFill/>
-        </p:spPr>
-        <p:txBody>
-          <a:bodyPr wrap="square" lIns="0" rIns="0" tIns="0" bIns="0" anchor="t">
-            <a:noAutofit/>
-          </a:bodyPr>
-          <a:lstStyle/>
-          <a:p>
-            <a:pPr algn="l">
-              <a:lnSpc>
-                <a:spcPct val="115000"/>
-              </a:lnSpc>
-            </a:pPr>
-            <a:r>
-              <a:rPr sz="1300" b="0" i="1">
-                <a:solidFill>
-                  <a:srgbClr val="66717F"/>
-                </a:solidFill>
-                <a:latin typeface="Montserrat"/>
-              </a:rPr>
-              <a:t>Animação, exemplo fictício. Não representa uma pessoa real. O vídeo mostra um episódio; o padrão está na história a seguir.</a:t>
-            </a:r>
-          </a:p>
-        </p:txBody>
-      </p:sp>
-      <p:sp>
-        <p:nvSpPr>
-          <p:cNvPr id="8" name="TextBox 7"/>
-          <p:cNvSpPr txBox="1"/>
-          <p:nvPr/>
-        </p:nvSpPr>
-        <p:spPr>
-          <a:xfrm>
-            <a:off x="10820400" y="6343650"/>
-            <a:ext cx="784860" cy="184150"/>
-          </a:xfrm>
-          <a:prstGeom prst="rect">
-            <a:avLst/>
-          </a:prstGeom>
-          <a:noFill/>
-        </p:spPr>
-        <p:txBody>
-          <a:bodyPr wrap="square" lIns="0" rIns="0" tIns="0" bIns="0" anchor="t">
-            <a:noAutofit/>
-          </a:bodyPr>
-          <a:lstStyle/>
-          <a:p>
-            <a:pPr algn="r">
-              <a:lnSpc>
-                <a:spcPct val="98000"/>
-              </a:lnSpc>
-            </a:pPr>
-            <a:r>
-              <a:rPr sz="1200" b="0" i="0">
-                <a:solidFill>
-                  <a:srgbClr val="66717F"/>
-                </a:solidFill>
-                <a:latin typeface="Montserrat"/>
-              </a:rPr>
-              <a:t>R1a</a:t>
-            </a:r>
-          </a:p>
-        </p:txBody>
-      </p:sp>
-    </p:spTree>
-  </p:cSld>
-  <p:clrMapOvr>
-    <a:masterClrMapping/>
-  </p:clrMapOvr>
-  <p:timing>
-    <p:tnLst>
-      <p:par>
-        <p:cTn id="1" dur="indefinite" restart="never" nodeType="tmRoot">
-          <p:childTnLst>
-            <p:video>
-              <p:cMediaNode vol="80000">
-                <p:cTn id="2" fill="hold" display="0">
-                  <p:stCondLst>
-                    <p:cond delay="indefinite"/>
-                  </p:stCondLst>
-                </p:cTn>
-                <p:tgtEl>
-                  <p:spTgt spid="6"/>
-                </p:tgtEl>
-              </p:cMediaNode>
-            </p:video>
-          </p:childTnLst>
-        </p:cTn>
-      </p:par>
-    </p:tnLst>
-  </p:timing>
-</p:sld>
-</file>
-
-<file path=ppt/slides/slide52.xml><?xml version="1.0" encoding="utf-8"?>
-<p:sld xmlns:a="http://schemas.openxmlformats.org/drawingml/2006/main" xmlns:p="http://schemas.openxmlformats.org/presentationml/2006/main" xmlns:r="http://schemas.openxmlformats.org/officeDocument/2006/relationships">
-  <p:cSld>
-    <p:bg>
-      <p:bgPr>
-        <a:solidFill>
-          <a:srgbClr val="EEF4F5"/>
-        </a:solidFill>
-        <a:effectLst/>
-      </p:bgPr>
-    </p:bg>
-    <p:spTree>
-      <p:nvGrpSpPr>
-        <p:cNvPr id="1" name=""/>
-        <p:cNvGrpSpPr/>
-        <p:nvPr/>
-      </p:nvGrpSpPr>
-      <p:grpSpPr/>
-      <p:sp>
-        <p:nvSpPr>
-          <p:cNvPr id="2" name="Rectangle 1"/>
-          <p:cNvSpPr/>
-          <p:nvPr/>
-        </p:nvSpPr>
-        <p:spPr>
-          <a:xfrm>
-            <a:off x="0" y="0"/>
-            <a:ext cx="177800" cy="6858000"/>
-          </a:xfrm>
-          <a:prstGeom prst="rect">
-            <a:avLst/>
-          </a:prstGeom>
-          <a:solidFill>
-            <a:srgbClr val="0F7C86"/>
-          </a:solidFill>
-          <a:ln>
-            <a:noFill/>
-          </a:ln>
-          <a:effectLst/>
-        </p:spPr>
-        <p:style>
-          <a:lnRef idx="1">
-            <a:schemeClr val="accent1"/>
-          </a:lnRef>
-          <a:fillRef idx="3">
-            <a:schemeClr val="accent1"/>
-          </a:fillRef>
-          <a:effectRef idx="2">
-            <a:schemeClr val="accent1"/>
-          </a:effectRef>
-          <a:fontRef idx="minor">
-            <a:schemeClr val="lt1"/>
-          </a:fontRef>
-        </p:style>
-        <p:txBody>
-          <a:bodyPr rtlCol="0" anchor="ctr"/>
-          <a:lstStyle/>
-          <a:p>
-            <a:pPr algn="ctr"/>
-          </a:p>
-        </p:txBody>
-      </p:sp>
-      <p:sp>
-        <p:nvSpPr>
-          <p:cNvPr id="3" name="TextBox 2"/>
-          <p:cNvSpPr txBox="1"/>
-          <p:nvPr/>
-        </p:nvSpPr>
-        <p:spPr>
-          <a:xfrm>
-            <a:off x="1168400" y="1401167"/>
-            <a:ext cx="10307828" cy="394295"/>
-          </a:xfrm>
-          <a:prstGeom prst="rect">
-            <a:avLst/>
-          </a:prstGeom>
-          <a:noFill/>
-        </p:spPr>
-        <p:txBody>
-          <a:bodyPr wrap="square" lIns="0" rIns="0" tIns="0" bIns="0" anchor="t">
-            <a:noAutofit/>
-          </a:bodyPr>
-          <a:lstStyle/>
-          <a:p>
-            <a:pPr algn="l">
-              <a:lnSpc>
-                <a:spcPct val="94000"/>
-              </a:lnSpc>
-            </a:pPr>
-            <a:r>
-              <a:rPr sz="2700" b="1" i="0">
-                <a:solidFill>
-                  <a:srgbClr val="1B2F4B"/>
-                </a:solidFill>
-                <a:latin typeface="Montserrat"/>
-              </a:rPr>
-              <a:t>Reserva: a história da Lara</a:t>
-            </a:r>
-          </a:p>
-        </p:txBody>
-      </p:sp>
-      <p:sp>
-        <p:nvSpPr>
-          <p:cNvPr id="4" name="TextBox 3"/>
-          <p:cNvSpPr txBox="1"/>
-          <p:nvPr/>
-        </p:nvSpPr>
-        <p:spPr>
-          <a:xfrm>
-            <a:off x="1168400" y="1960562"/>
-            <a:ext cx="10307828" cy="1333500"/>
-          </a:xfrm>
-          <a:prstGeom prst="rect">
-            <a:avLst/>
-          </a:prstGeom>
-          <a:noFill/>
-        </p:spPr>
-        <p:txBody>
-          <a:bodyPr wrap="square" lIns="0" rIns="0" tIns="0" bIns="0" anchor="t">
-            <a:noAutofit/>
-          </a:bodyPr>
-          <a:lstStyle/>
-          <a:p>
-            <a:pPr algn="l">
-              <a:lnSpc>
-                <a:spcPct val="115000"/>
-              </a:lnSpc>
-            </a:pPr>
-            <a:r>
-              <a:rPr sz="1500" b="0" i="0">
-                <a:solidFill>
-                  <a:srgbClr val="2E3A4A"/>
-                </a:solidFill>
-                <a:latin typeface="Montserrat"/>
-              </a:rPr>
-              <a:t>Lara tem 14 anos, é autista e fala com fluência. Gosta de desenho e de astronomia. Nos últimos dois meses, quando a professora propõe </a:t>
-            </a:r>
-            <a:r>
-              <a:rPr sz="1500" b="1" i="0">
-                <a:solidFill>
-                  <a:srgbClr val="2E3A4A"/>
-                </a:solidFill>
-                <a:latin typeface="Montserrat"/>
-              </a:rPr>
-              <a:t>trabalho em grupo</a:t>
-            </a:r>
-            <a:r>
-              <a:rPr sz="1500" b="0" i="0">
-                <a:solidFill>
-                  <a:srgbClr val="2E3A4A"/>
-                </a:solidFill>
-                <a:latin typeface="Montserrat"/>
-              </a:rPr>
-              <a:t> numa sala barulhenta, Lara </a:t>
-            </a:r>
-            <a:r>
-              <a:rPr sz="1500" b="1" i="0">
-                <a:solidFill>
-                  <a:srgbClr val="2E3A4A"/>
-                </a:solidFill>
-                <a:latin typeface="Montserrat"/>
-              </a:rPr>
-              <a:t>coloca o capuz, abaixa a cabeça e, às vezes, sai da sala sem avisar</a:t>
-            </a:r>
-            <a:r>
-              <a:rPr sz="1500" b="0" i="0">
-                <a:solidFill>
-                  <a:srgbClr val="2E3A4A"/>
-                </a:solidFill>
-                <a:latin typeface="Montserrat"/>
-              </a:rPr>
-              <a:t>. Quando sai, é levada à coordenação e passa o resto da aula na biblioteca. Nas atividades individuais, participa e tira boas notas. Ela disse à psicóloga da escola: “o barulho é demais” e “sempre falo alguma coisa errada nos grupos”.</a:t>
-            </a:r>
-          </a:p>
-        </p:txBody>
-      </p:sp>
-      <p:sp>
-        <p:nvSpPr>
-          <p:cNvPr id="5" name="TextBox 4"/>
-          <p:cNvSpPr txBox="1"/>
-          <p:nvPr/>
-        </p:nvSpPr>
-        <p:spPr>
-          <a:xfrm>
-            <a:off x="1168400" y="3459162"/>
-            <a:ext cx="10307828" cy="1428750"/>
-          </a:xfrm>
-          <a:prstGeom prst="rect">
-            <a:avLst/>
-          </a:prstGeom>
-          <a:noFill/>
-        </p:spPr>
-        <p:txBody>
-          <a:bodyPr wrap="square" lIns="0" rIns="0" tIns="0" bIns="0" anchor="t">
-            <a:noAutofit/>
-          </a:bodyPr>
-          <a:lstStyle/>
-          <a:p>
-            <a:pPr algn="l" marL="279400" indent="-279400">
-              <a:lnSpc>
-                <a:spcPct val="123000"/>
-              </a:lnSpc>
-              <a:buAutoNum type="arabicPeriod" startAt="1"/>
-            </a:pPr>
-            <a:r>
-              <a:rPr sz="1500" b="0" i="0">
-                <a:solidFill>
-                  <a:srgbClr val="2E3A4A"/>
-                </a:solidFill>
-                <a:latin typeface="Montserrat"/>
-              </a:rPr>
-              <a:t>O que a Lara faz? Descrevam só o que dá para ver e ouvir.</a:t>
-            </a:r>
-          </a:p>
-          <a:p>
-            <a:pPr algn="l" marL="279400" indent="-279400">
-              <a:lnSpc>
-                <a:spcPct val="123000"/>
-              </a:lnSpc>
-              <a:buAutoNum type="arabicPeriod" startAt="1"/>
-            </a:pPr>
-            <a:r>
-              <a:rPr sz="1500" b="0" i="0">
-                <a:solidFill>
-                  <a:srgbClr val="2E3A4A"/>
-                </a:solidFill>
-                <a:latin typeface="Montserrat"/>
-              </a:rPr>
-              <a:t>O que acontece logo antes? E logo depois?</a:t>
-            </a:r>
-          </a:p>
-          <a:p>
-            <a:pPr algn="l" marL="279400" indent="-279400">
-              <a:lnSpc>
-                <a:spcPct val="123000"/>
-              </a:lnSpc>
-              <a:buAutoNum type="arabicPeriod" startAt="1"/>
-            </a:pPr>
-            <a:r>
-              <a:rPr sz="1500" b="0" i="0">
-                <a:solidFill>
-                  <a:srgbClr val="2E3A4A"/>
-                </a:solidFill>
-                <a:latin typeface="Montserrat"/>
-              </a:rPr>
-              <a:t>Por que isso pode estar acontecendo? Deem duas explicações possíveis.</a:t>
-            </a:r>
-          </a:p>
-          <a:p>
-            <a:pPr algn="l" marL="279400" indent="-279400">
-              <a:lnSpc>
-                <a:spcPct val="123000"/>
-              </a:lnSpc>
-              <a:buAutoNum type="arabicPeriod" startAt="1"/>
-            </a:pPr>
-            <a:r>
-              <a:rPr sz="1500" b="0" i="0">
-                <a:solidFill>
-                  <a:srgbClr val="2E3A4A"/>
-                </a:solidFill>
-                <a:latin typeface="Montserrat"/>
-              </a:rPr>
-              <a:t>A escola quer que a Lara faça todos os trabalhos sozinha, na biblioteca. Isso ajuda ou atrapalha? O que vocês proporiam no lugar?</a:t>
-            </a:r>
-          </a:p>
-        </p:txBody>
-      </p:sp>
-      <p:sp>
-        <p:nvSpPr>
-          <p:cNvPr id="6" name="TextBox 5"/>
-          <p:cNvSpPr txBox="1"/>
-          <p:nvPr/>
-        </p:nvSpPr>
-        <p:spPr>
-          <a:xfrm>
-            <a:off x="1168400" y="5053012"/>
-            <a:ext cx="10307828" cy="213320"/>
-          </a:xfrm>
-          <a:prstGeom prst="rect">
-            <a:avLst/>
-          </a:prstGeom>
-          <a:noFill/>
-        </p:spPr>
-        <p:txBody>
-          <a:bodyPr wrap="square" lIns="0" rIns="0" tIns="0" bIns="0" anchor="t">
-            <a:noAutofit/>
-          </a:bodyPr>
-          <a:lstStyle/>
-          <a:p>
-            <a:pPr algn="l">
-              <a:lnSpc>
-                <a:spcPct val="115000"/>
-              </a:lnSpc>
-            </a:pPr>
-            <a:r>
-              <a:rPr sz="1200" b="0" i="1">
-                <a:solidFill>
-                  <a:srgbClr val="66717F"/>
-                </a:solidFill>
-                <a:latin typeface="Montserrat"/>
-              </a:rPr>
-              <a:t>Exemplo fictício</a:t>
-            </a:r>
-          </a:p>
-        </p:txBody>
-      </p:sp>
-      <p:sp>
-        <p:nvSpPr>
-          <p:cNvPr id="7" name="TextBox 6"/>
-          <p:cNvSpPr txBox="1"/>
-          <p:nvPr/>
-        </p:nvSpPr>
-        <p:spPr>
-          <a:xfrm>
-            <a:off x="10820400" y="6343650"/>
-            <a:ext cx="784860" cy="184150"/>
-          </a:xfrm>
-          <a:prstGeom prst="rect">
-            <a:avLst/>
-          </a:prstGeom>
-          <a:noFill/>
-        </p:spPr>
-        <p:txBody>
-          <a:bodyPr wrap="square" lIns="0" rIns="0" tIns="0" bIns="0" anchor="t">
-            <a:noAutofit/>
-          </a:bodyPr>
-          <a:lstStyle/>
-          <a:p>
-            <a:pPr algn="r">
-              <a:lnSpc>
-                <a:spcPct val="98000"/>
-              </a:lnSpc>
-            </a:pPr>
-            <a:r>
-              <a:rPr sz="1200" b="0" i="0">
-                <a:solidFill>
-                  <a:srgbClr val="66717F"/>
-                </a:solidFill>
-                <a:latin typeface="Montserrat"/>
-              </a:rPr>
-              <a:t>R1</a:t>
-            </a:r>
-          </a:p>
-        </p:txBody>
-      </p:sp>
-    </p:spTree>
-  </p:cSld>
-  <p:clrMapOvr>
-    <a:masterClrMapping/>
-  </p:clrMapOvr>
-</p:sld>
-</file>
-
-<file path=ppt/slides/slide53.xml><?xml version="1.0" encoding="utf-8"?>
-<p:sld xmlns:a="http://schemas.openxmlformats.org/drawingml/2006/main" xmlns:p="http://schemas.openxmlformats.org/presentationml/2006/main" xmlns:r="http://schemas.openxmlformats.org/officeDocument/2006/relationships">
-  <p:cSld>
-    <p:bg>
-      <p:bgPr>
-        <a:solidFill>
-          <a:srgbClr val="FFFFFF"/>
-        </a:solidFill>
-        <a:effectLst/>
-      </p:bgPr>
-    </p:bg>
-    <p:spTree>
-      <p:nvGrpSpPr>
-        <p:cNvPr id="1" name=""/>
-        <p:cNvGrpSpPr/>
-        <p:nvPr/>
-      </p:nvGrpSpPr>
-      <p:grpSpPr/>
-      <p:sp>
-        <p:nvSpPr>
-          <p:cNvPr id="2" name="Rectangle 1"/>
-          <p:cNvSpPr/>
-          <p:nvPr/>
-        </p:nvSpPr>
-        <p:spPr>
-          <a:xfrm>
-            <a:off x="0" y="0"/>
-            <a:ext cx="177800" cy="6858000"/>
-          </a:xfrm>
-          <a:prstGeom prst="rect">
-            <a:avLst/>
-          </a:prstGeom>
-          <a:solidFill>
-            <a:srgbClr val="0F7C86"/>
-          </a:solidFill>
-          <a:ln>
-            <a:noFill/>
-          </a:ln>
-          <a:effectLst/>
-        </p:spPr>
-        <p:style>
-          <a:lnRef idx="1">
-            <a:schemeClr val="accent1"/>
-          </a:lnRef>
-          <a:fillRef idx="3">
-            <a:schemeClr val="accent1"/>
-          </a:fillRef>
-          <a:effectRef idx="2">
-            <a:schemeClr val="accent1"/>
-          </a:effectRef>
-          <a:fontRef idx="minor">
-            <a:schemeClr val="lt1"/>
-          </a:fontRef>
-        </p:style>
-        <p:txBody>
-          <a:bodyPr rtlCol="0" anchor="ctr"/>
-          <a:lstStyle/>
-          <a:p>
-            <a:pPr algn="ctr"/>
-          </a:p>
-        </p:txBody>
-      </p:sp>
-      <p:sp>
-        <p:nvSpPr>
-          <p:cNvPr id="3" name="TextBox 2"/>
-          <p:cNvSpPr txBox="1"/>
-          <p:nvPr/>
-        </p:nvSpPr>
-        <p:spPr>
-          <a:xfrm>
-            <a:off x="1168400" y="980777"/>
-            <a:ext cx="10307828" cy="481905"/>
-          </a:xfrm>
-          <a:prstGeom prst="rect">
-            <a:avLst/>
-          </a:prstGeom>
-          <a:noFill/>
-        </p:spPr>
-        <p:txBody>
-          <a:bodyPr wrap="square" lIns="0" rIns="0" tIns="0" bIns="0" anchor="t">
-            <a:noAutofit/>
-          </a:bodyPr>
-          <a:lstStyle/>
-          <a:p>
-            <a:pPr algn="l">
-              <a:lnSpc>
-                <a:spcPct val="94000"/>
-              </a:lnSpc>
-            </a:pPr>
-            <a:r>
-              <a:rPr sz="3300" b="1" i="0">
-                <a:solidFill>
-                  <a:srgbClr val="1B2F4B"/>
-                </a:solidFill>
-                <a:latin typeface="Montserrat"/>
-              </a:rPr>
-              <a:t>Respostas: a história da Lara</a:t>
-            </a:r>
-          </a:p>
-        </p:txBody>
-      </p:sp>
-      <p:graphicFrame>
-        <p:nvGraphicFramePr>
-          <p:cNvPr id="4" name="Table 3"/>
-          <p:cNvGraphicFramePr>
-            <a:graphicFrameLocks noGrp="1"/>
-          </p:cNvGraphicFramePr>
-          <p:nvPr/>
-        </p:nvGraphicFramePr>
-        <p:xfrm>
-          <a:off x="1168400" y="1653183"/>
-          <a:ext cx="10007600" cy="3594100"/>
-        </p:xfrm>
-        <a:graphic>
-          <a:graphicData uri="http://schemas.openxmlformats.org/drawingml/2006/table">
-            <a:tbl>
-              <a:tblPr firstRow="0" bandRow="0">
-                <a:tableStyleId>{2D5ABB26-0587-4C30-8999-92F81FD0307C}</a:tableStyleId>
-              </a:tblPr>
-              <a:tblGrid>
-                <a:gridCol w="3002260"/>
-                <a:gridCol w="7005340"/>
-              </a:tblGrid>
-              <a:tr h="450850">
-                <a:tc>
-                  <a:txBody>
-                    <a:bodyPr wrap="square"/>
-                    <a:lstStyle/>
-                    <a:p>
-                      <a:pPr>
-                        <a:lnSpc>
-                          <a:spcPct val="100000"/>
-                        </a:lnSpc>
-                      </a:pPr>
-                      <a:r>
-                        <a:rPr sz="1450" b="1" i="0">
-                          <a:solidFill>
-                            <a:srgbClr val="FFFFFF"/>
-                          </a:solidFill>
-                          <a:latin typeface="Montserrat"/>
-                        </a:rPr>
-                        <a:t>Pergunta</a:t>
-                      </a:r>
-                    </a:p>
-                  </a:txBody>
-                  <a:tcPr marL="114300" marR="114300" marT="68580" marB="68580" anchor="ctr">
-                    <a:solidFill>
-                      <a:srgbClr val="1B2F4B"/>
-                    </a:solidFill>
-                  </a:tcPr>
-                </a:tc>
-                <a:tc>
-                  <a:txBody>
-                    <a:bodyPr wrap="square"/>
-                    <a:lstStyle/>
-                    <a:p>
-                      <a:pPr>
-                        <a:lnSpc>
-                          <a:spcPct val="100000"/>
-                        </a:lnSpc>
-                      </a:pPr>
-                      <a:r>
-                        <a:rPr sz="1450" b="1" i="0">
-                          <a:solidFill>
-                            <a:srgbClr val="FFFFFF"/>
-                          </a:solidFill>
-                          <a:latin typeface="Montserrat"/>
-                        </a:rPr>
-                        <a:t>Resposta</a:t>
-                      </a:r>
-                    </a:p>
-                  </a:txBody>
-                  <a:tcPr marL="114300" marR="114300" marT="68580" marB="68580" anchor="ctr">
-                    <a:solidFill>
-                      <a:srgbClr val="1B2F4B"/>
-                    </a:solidFill>
-                  </a:tcPr>
-                </a:tc>
-              </a:tr>
-              <a:tr h="450850">
-                <a:tc>
-                  <a:txBody>
-                    <a:bodyPr wrap="square"/>
-                    <a:lstStyle/>
-                    <a:p>
-                      <a:pPr>
-                        <a:lnSpc>
-                          <a:spcPct val="100000"/>
-                        </a:lnSpc>
-                      </a:pPr>
-                      <a:r>
-                        <a:rPr sz="1450" b="0" i="0">
-                          <a:solidFill>
-                            <a:srgbClr val="2E3A4A"/>
-                          </a:solidFill>
-                          <a:latin typeface="Montserrat"/>
-                        </a:rPr>
-                        <a:t>1. O que ela faz</a:t>
-                      </a:r>
-                    </a:p>
-                  </a:txBody>
-                  <a:tcPr marL="114300" marR="114300" marT="68580" marB="68580" anchor="ctr">
-                    <a:solidFill>
-                      <a:srgbClr val="FFFFFF"/>
-                    </a:solidFill>
-                  </a:tcPr>
-                </a:tc>
-                <a:tc>
-                  <a:txBody>
-                    <a:bodyPr wrap="square"/>
-                    <a:lstStyle/>
-                    <a:p>
-                      <a:pPr>
-                        <a:lnSpc>
-                          <a:spcPct val="100000"/>
-                        </a:lnSpc>
-                      </a:pPr>
-                      <a:r>
-                        <a:rPr sz="1450" b="0" i="0">
-                          <a:solidFill>
-                            <a:srgbClr val="2E3A4A"/>
-                          </a:solidFill>
-                          <a:latin typeface="Montserrat"/>
-                        </a:rPr>
-                        <a:t>Coloca o capuz, abaixa a cabeça e sai da sala sem avisar</a:t>
-                      </a:r>
-                    </a:p>
-                  </a:txBody>
-                  <a:tcPr marL="114300" marR="114300" marT="68580" marB="68580" anchor="ctr">
-                    <a:solidFill>
-                      <a:srgbClr val="FFFFFF"/>
-                    </a:solidFill>
-                  </a:tcPr>
-                </a:tc>
-              </a:tr>
-              <a:tr h="673100">
-                <a:tc>
-                  <a:txBody>
-                    <a:bodyPr wrap="square"/>
-                    <a:lstStyle/>
-                    <a:p>
-                      <a:pPr>
-                        <a:lnSpc>
-                          <a:spcPct val="100000"/>
-                        </a:lnSpc>
-                      </a:pPr>
-                      <a:r>
-                        <a:rPr sz="1450" b="0" i="0">
-                          <a:solidFill>
-                            <a:srgbClr val="2E3A4A"/>
-                          </a:solidFill>
-                          <a:latin typeface="Montserrat"/>
-                        </a:rPr>
-                        <a:t>2. Antes e depois</a:t>
-                      </a:r>
-                    </a:p>
-                  </a:txBody>
-                  <a:tcPr marL="114300" marR="114300" marT="68580" marB="68580" anchor="ctr">
-                    <a:solidFill>
-                      <a:srgbClr val="F1F4F6"/>
-                    </a:solidFill>
-                  </a:tcPr>
-                </a:tc>
-                <a:tc>
-                  <a:txBody>
-                    <a:bodyPr wrap="square"/>
-                    <a:lstStyle/>
-                    <a:p>
-                      <a:pPr>
-                        <a:lnSpc>
-                          <a:spcPct val="100000"/>
-                        </a:lnSpc>
-                      </a:pPr>
-                      <a:r>
-                        <a:rPr sz="1450" b="0" i="0">
-                          <a:solidFill>
-                            <a:srgbClr val="2E3A4A"/>
-                          </a:solidFill>
-                          <a:latin typeface="Montserrat"/>
-                        </a:rPr>
-                        <a:t>Antes: trabalho em grupo numa sala barulhenta. Depois: sai do grupo e vai para a biblioteca</a:t>
-                      </a:r>
-                    </a:p>
-                  </a:txBody>
-                  <a:tcPr marL="114300" marR="114300" marT="68580" marB="68580" anchor="ctr">
-                    <a:solidFill>
-                      <a:srgbClr val="F1F4F6"/>
-                    </a:solidFill>
-                  </a:tcPr>
-                </a:tc>
-              </a:tr>
-              <a:tr h="673100">
-                <a:tc>
-                  <a:txBody>
-                    <a:bodyPr wrap="square"/>
-                    <a:lstStyle/>
-                    <a:p>
-                      <a:pPr>
-                        <a:lnSpc>
-                          <a:spcPct val="100000"/>
-                        </a:lnSpc>
-                      </a:pPr>
-                      <a:r>
-                        <a:rPr sz="1450" b="0" i="0">
-                          <a:solidFill>
-                            <a:srgbClr val="2E3A4A"/>
-                          </a:solidFill>
-                          <a:latin typeface="Montserrat"/>
-                        </a:rPr>
-                        <a:t>3. Explicações possíveis</a:t>
-                      </a:r>
-                    </a:p>
-                  </a:txBody>
-                  <a:tcPr marL="114300" marR="114300" marT="68580" marB="68580" anchor="ctr">
-                    <a:solidFill>
-                      <a:srgbClr val="FFFFFF"/>
-                    </a:solidFill>
-                  </a:tcPr>
-                </a:tc>
-                <a:tc>
-                  <a:txBody>
-                    <a:bodyPr wrap="square"/>
-                    <a:lstStyle/>
-                    <a:p>
-                      <a:pPr>
-                        <a:lnSpc>
-                          <a:spcPct val="100000"/>
-                        </a:lnSpc>
-                      </a:pPr>
-                      <a:r>
-                        <a:rPr sz="1450" b="0" i="0">
-                          <a:solidFill>
-                            <a:srgbClr val="2E3A4A"/>
-                          </a:solidFill>
-                          <a:latin typeface="Montserrat"/>
-                        </a:rPr>
-                        <a:t>Fugir do barulho; fugir da conversa em grupo (medo de errar); as duas juntas. Ir para a biblioteca pode reforçar (tornar mais provável) a saída</a:t>
-                      </a:r>
-                    </a:p>
-                  </a:txBody>
-                  <a:tcPr marL="114300" marR="114300" marT="68580" marB="68580" anchor="ctr">
-                    <a:solidFill>
-                      <a:srgbClr val="FFFFFF"/>
-                    </a:solidFill>
-                  </a:tcPr>
-                </a:tc>
-              </a:tr>
-              <a:tr h="673100">
-                <a:tc>
-                  <a:txBody>
-                    <a:bodyPr wrap="square"/>
-                    <a:lstStyle/>
-                    <a:p>
-                      <a:pPr>
-                        <a:lnSpc>
-                          <a:spcPct val="100000"/>
-                        </a:lnSpc>
-                      </a:pPr>
-                      <a:r>
-                        <a:rPr sz="1450" b="0" i="0">
-                          <a:solidFill>
-                            <a:srgbClr val="2E3A4A"/>
-                          </a:solidFill>
-                          <a:latin typeface="Montserrat"/>
-                        </a:rPr>
-                        <a:t>4. Sempre sozinha na biblioteca?</a:t>
-                      </a:r>
-                    </a:p>
-                  </a:txBody>
-                  <a:tcPr marL="114300" marR="114300" marT="68580" marB="68580" anchor="ctr">
-                    <a:solidFill>
-                      <a:srgbClr val="F1F4F6"/>
-                    </a:solidFill>
-                  </a:tcPr>
-                </a:tc>
-                <a:tc>
-                  <a:txBody>
-                    <a:bodyPr wrap="square"/>
-                    <a:lstStyle/>
-                    <a:p>
-                      <a:pPr>
-                        <a:lnSpc>
-                          <a:spcPct val="100000"/>
-                        </a:lnSpc>
-                      </a:pPr>
-                      <a:r>
-                        <a:rPr sz="1450" b="0" i="0">
-                          <a:solidFill>
-                            <a:srgbClr val="2E3A4A"/>
-                          </a:solidFill>
-                          <a:latin typeface="Montserrat"/>
-                        </a:rPr>
-                        <a:t>Alivia agora, mas pode reforçar a fuga (sair da situação) e tirar chances de participar. Só serve como algo temporário, combinado com ela</a:t>
-                      </a:r>
-                    </a:p>
-                  </a:txBody>
-                  <a:tcPr marL="114300" marR="114300" marT="68580" marB="68580" anchor="ctr">
-                    <a:solidFill>
-                      <a:srgbClr val="F1F4F6"/>
-                    </a:solidFill>
-                  </a:tcPr>
-                </a:tc>
-              </a:tr>
-              <a:tr h="673100">
-                <a:tc>
-                  <a:txBody>
-                    <a:bodyPr wrap="square"/>
-                    <a:lstStyle/>
-                    <a:p>
-                      <a:pPr>
-                        <a:lnSpc>
-                          <a:spcPct val="100000"/>
-                        </a:lnSpc>
-                      </a:pPr>
-                      <a:r>
-                        <a:rPr sz="1450" b="0" i="0">
-                          <a:solidFill>
-                            <a:srgbClr val="2E3A4A"/>
-                          </a:solidFill>
-                          <a:latin typeface="Montserrat"/>
-                        </a:rPr>
-                        <a:t>5. O que propor no lugar</a:t>
-                      </a:r>
-                    </a:p>
-                  </a:txBody>
-                  <a:tcPr marL="114300" marR="114300" marT="68580" marB="68580" anchor="ctr">
-                    <a:solidFill>
-                      <a:srgbClr val="FFFFFF"/>
-                    </a:solidFill>
-                  </a:tcPr>
-                </a:tc>
-                <a:tc>
-                  <a:txBody>
-                    <a:bodyPr wrap="square"/>
-                    <a:lstStyle/>
-                    <a:p>
-                      <a:pPr>
-                        <a:lnSpc>
-                          <a:spcPct val="100000"/>
-                        </a:lnSpc>
-                      </a:pPr>
-                      <a:r>
-                        <a:rPr sz="1450" b="0" i="0">
-                          <a:solidFill>
-                            <a:srgbClr val="2E3A4A"/>
-                          </a:solidFill>
-                          <a:latin typeface="Montserrat"/>
-                        </a:rPr>
-                        <a:t>Lugar mais silencioso ou protetor de ouvido (se ela quiser), grupo menor, um papel definido no grupo e um jeito combinado de pedir pausa</a:t>
-                      </a:r>
-                    </a:p>
-                  </a:txBody>
-                  <a:tcPr marL="114300" marR="114300" marT="68580" marB="68580" anchor="ctr">
-                    <a:solidFill>
-                      <a:srgbClr val="FFFFFF"/>
-                    </a:solidFill>
-                  </a:tcPr>
-                </a:tc>
-              </a:tr>
-            </a:tbl>
-          </a:graphicData>
-        </a:graphic>
-      </p:graphicFrame>
-      <p:sp>
-        <p:nvSpPr>
-          <p:cNvPr id="5" name="TextBox 4"/>
-          <p:cNvSpPr txBox="1"/>
-          <p:nvPr/>
-        </p:nvSpPr>
-        <p:spPr>
-          <a:xfrm>
-            <a:off x="1168400" y="5437783"/>
-            <a:ext cx="10307828" cy="248841"/>
-          </a:xfrm>
-          <a:prstGeom prst="rect">
-            <a:avLst/>
-          </a:prstGeom>
-          <a:noFill/>
-        </p:spPr>
-        <p:txBody>
-          <a:bodyPr wrap="square" lIns="0" rIns="0" tIns="0" bIns="0" anchor="t">
-            <a:noAutofit/>
-          </a:bodyPr>
-          <a:lstStyle/>
-          <a:p>
-            <a:pPr algn="l">
-              <a:lnSpc>
-                <a:spcPct val="115000"/>
-              </a:lnSpc>
-            </a:pPr>
-            <a:r>
-              <a:rPr sz="1400" b="0" i="1">
-                <a:solidFill>
-                  <a:srgbClr val="66717F"/>
-                </a:solidFill>
-                <a:latin typeface="Montserrat"/>
-              </a:rPr>
-              <a:t>O capuz, em si, não é problema a eliminar. Decidir junto com a Lara.</a:t>
-            </a:r>
-          </a:p>
-        </p:txBody>
-      </p:sp>
-      <p:sp>
-        <p:nvSpPr>
-          <p:cNvPr id="6" name="TextBox 5"/>
-          <p:cNvSpPr txBox="1"/>
-          <p:nvPr/>
-        </p:nvSpPr>
-        <p:spPr>
-          <a:xfrm>
-            <a:off x="10820400" y="6343650"/>
-            <a:ext cx="784860" cy="184150"/>
-          </a:xfrm>
-          <a:prstGeom prst="rect">
-            <a:avLst/>
-          </a:prstGeom>
-          <a:noFill/>
-        </p:spPr>
-        <p:txBody>
-          <a:bodyPr wrap="square" lIns="0" rIns="0" tIns="0" bIns="0" anchor="t">
-            <a:noAutofit/>
-          </a:bodyPr>
-          <a:lstStyle/>
-          <a:p>
-            <a:pPr algn="r">
-              <a:lnSpc>
-                <a:spcPct val="98000"/>
-              </a:lnSpc>
-            </a:pPr>
-            <a:r>
-              <a:rPr sz="1200" b="0" i="0">
-                <a:solidFill>
-                  <a:srgbClr val="66717F"/>
-                </a:solidFill>
-                <a:latin typeface="Montserrat"/>
-              </a:rPr>
-              <a:t>R1b</a:t>
-            </a:r>
-          </a:p>
-        </p:txBody>
-      </p:sp>
-    </p:spTree>
-  </p:cSld>
-  <p:clrMapOvr>
-    <a:masterClrMapping/>
-  </p:clrMapOvr>
-</p:sld>
-</file>
-
-<file path=ppt/slides/slide54.xml><?xml version="1.0" encoding="utf-8"?>
-<p:sld xmlns:a="http://schemas.openxmlformats.org/drawingml/2006/main" xmlns:p="http://schemas.openxmlformats.org/presentationml/2006/main" xmlns:r="http://schemas.openxmlformats.org/officeDocument/2006/relationships">
-  <p:cSld>
-    <p:bg>
-      <p:bgPr>
-        <a:solidFill>
-          <a:srgbClr val="EEF4F5"/>
-        </a:solidFill>
-        <a:effectLst/>
-      </p:bgPr>
-    </p:bg>
-    <p:spTree>
-      <p:nvGrpSpPr>
-        <p:cNvPr id="1" name=""/>
-        <p:cNvGrpSpPr/>
-        <p:nvPr/>
-      </p:nvGrpSpPr>
-      <p:grpSpPr/>
-      <p:sp>
-        <p:nvSpPr>
-          <p:cNvPr id="2" name="Rectangle 1"/>
-          <p:cNvSpPr/>
-          <p:nvPr/>
-        </p:nvSpPr>
-        <p:spPr>
-          <a:xfrm>
-            <a:off x="0" y="0"/>
-            <a:ext cx="177800" cy="6858000"/>
-          </a:xfrm>
-          <a:prstGeom prst="rect">
-            <a:avLst/>
-          </a:prstGeom>
-          <a:solidFill>
-            <a:srgbClr val="0F7C86"/>
-          </a:solidFill>
-          <a:ln>
-            <a:noFill/>
-          </a:ln>
-          <a:effectLst/>
-        </p:spPr>
-        <p:style>
-          <a:lnRef idx="1">
-            <a:schemeClr val="accent1"/>
-          </a:lnRef>
-          <a:fillRef idx="3">
-            <a:schemeClr val="accent1"/>
-          </a:fillRef>
-          <a:effectRef idx="2">
-            <a:schemeClr val="accent1"/>
-          </a:effectRef>
-          <a:fontRef idx="minor">
-            <a:schemeClr val="lt1"/>
-          </a:fontRef>
-        </p:style>
-        <p:txBody>
-          <a:bodyPr rtlCol="0" anchor="ctr"/>
-          <a:lstStyle/>
-          <a:p>
-            <a:pPr algn="ctr"/>
-          </a:p>
-        </p:txBody>
-      </p:sp>
-      <p:sp>
-        <p:nvSpPr>
-          <p:cNvPr id="3" name="TextBox 2"/>
-          <p:cNvSpPr txBox="1"/>
-          <p:nvPr/>
-        </p:nvSpPr>
-        <p:spPr>
-          <a:xfrm>
-            <a:off x="1168400" y="1868587"/>
-            <a:ext cx="10307828" cy="481905"/>
-          </a:xfrm>
-          <a:prstGeom prst="rect">
-            <a:avLst/>
-          </a:prstGeom>
-          <a:noFill/>
-        </p:spPr>
-        <p:txBody>
-          <a:bodyPr wrap="square" lIns="0" rIns="0" tIns="0" bIns="0" anchor="t">
-            <a:noAutofit/>
-          </a:bodyPr>
-          <a:lstStyle/>
-          <a:p>
-            <a:pPr algn="l">
-              <a:lnSpc>
-                <a:spcPct val="94000"/>
-              </a:lnSpc>
-            </a:pPr>
-            <a:r>
-              <a:rPr sz="3300" b="1" i="0">
-                <a:solidFill>
-                  <a:srgbClr val="1B2F4B"/>
-                </a:solidFill>
-                <a:latin typeface="Montserrat"/>
-              </a:rPr>
-              <a:t>Reserva: um dado novo sobre Theo</a:t>
-            </a:r>
-          </a:p>
-        </p:txBody>
-      </p:sp>
-      <p:sp>
-        <p:nvSpPr>
-          <p:cNvPr id="4" name="TextBox 3"/>
-          <p:cNvSpPr txBox="1"/>
-          <p:nvPr/>
-        </p:nvSpPr>
-        <p:spPr>
-          <a:xfrm>
-            <a:off x="1168400" y="2629892"/>
-            <a:ext cx="10307828" cy="1013222"/>
-          </a:xfrm>
-          <a:prstGeom prst="rect">
-            <a:avLst/>
-          </a:prstGeom>
-          <a:noFill/>
-        </p:spPr>
-        <p:txBody>
-          <a:bodyPr wrap="square" lIns="0" rIns="0" tIns="0" bIns="0" anchor="t">
-            <a:noAutofit/>
-          </a:bodyPr>
-          <a:lstStyle/>
-          <a:p>
-            <a:pPr algn="l">
-              <a:lnSpc>
-                <a:spcPct val="115000"/>
-              </a:lnSpc>
-            </a:pPr>
-            <a:r>
-              <a:rPr sz="1900" b="0" i="0">
-                <a:solidFill>
-                  <a:srgbClr val="2E3A4A"/>
-                </a:solidFill>
-                <a:latin typeface="Montserrat"/>
-              </a:rPr>
-              <a:t>Na semana seguinte, em 4 sessões, a terapeuta apresentou a atividade de mesa </a:t>
-            </a:r>
-            <a:r>
-              <a:rPr sz="1900" b="1" i="0">
-                <a:solidFill>
-                  <a:srgbClr val="2E3A4A"/>
-                </a:solidFill>
-                <a:latin typeface="Montserrat"/>
-              </a:rPr>
-              <a:t>sem guardar os trilhos</a:t>
-            </a:r>
-            <a:r>
-              <a:rPr sz="1900" b="0" i="0">
-                <a:solidFill>
-                  <a:srgbClr val="2E3A4A"/>
-                </a:solidFill>
-                <a:latin typeface="Montserrat"/>
-              </a:rPr>
-              <a:t> (eles ficaram ao lado, e Theo poderia voltar a eles ao terminar). Em </a:t>
-            </a:r>
-            <a:r>
-              <a:rPr sz="1900" b="1" i="0">
-                <a:solidFill>
-                  <a:srgbClr val="2E3A4A"/>
-                </a:solidFill>
-                <a:latin typeface="Montserrat"/>
-              </a:rPr>
-              <a:t>3 dessas sessões</a:t>
-            </a:r>
-            <a:r>
-              <a:rPr sz="1900" b="0" i="0">
-                <a:solidFill>
-                  <a:srgbClr val="2E3A4A"/>
-                </a:solidFill>
-                <a:latin typeface="Montserrat"/>
-              </a:rPr>
-              <a:t>, Theo não gritou nem se jogou no chão.</a:t>
-            </a:r>
-          </a:p>
-        </p:txBody>
-      </p:sp>
-      <p:sp>
-        <p:nvSpPr>
-          <p:cNvPr id="5" name="TextBox 4"/>
-          <p:cNvSpPr txBox="1"/>
-          <p:nvPr/>
-        </p:nvSpPr>
-        <p:spPr>
-          <a:xfrm>
-            <a:off x="1168400" y="3922514"/>
-            <a:ext cx="10307828" cy="330200"/>
-          </a:xfrm>
-          <a:prstGeom prst="rect">
-            <a:avLst/>
-          </a:prstGeom>
-          <a:noFill/>
-        </p:spPr>
-        <p:txBody>
-          <a:bodyPr wrap="square" lIns="0" rIns="0" tIns="0" bIns="0" anchor="t">
-            <a:noAutofit/>
-          </a:bodyPr>
-          <a:lstStyle/>
-          <a:p>
-            <a:pPr algn="l">
-              <a:lnSpc>
-                <a:spcPct val="107000"/>
-              </a:lnSpc>
-            </a:pPr>
-            <a:r>
-              <a:rPr sz="2000" b="1" i="0">
-                <a:solidFill>
-                  <a:srgbClr val="0F7C86"/>
-                </a:solidFill>
-                <a:latin typeface="Montserrat"/>
-              </a:rPr>
-              <a:t>Com esse dado, qual explicação fica mais forte? Já dá para ter certeza?</a:t>
-            </a:r>
-          </a:p>
-        </p:txBody>
-      </p:sp>
-      <p:sp>
-        <p:nvSpPr>
-          <p:cNvPr id="6" name="TextBox 5"/>
-          <p:cNvSpPr txBox="1"/>
-          <p:nvPr/>
-        </p:nvSpPr>
-        <p:spPr>
-          <a:xfrm>
-            <a:off x="1168400" y="4532114"/>
-            <a:ext cx="10307828" cy="266700"/>
-          </a:xfrm>
-          <a:prstGeom prst="rect">
-            <a:avLst/>
-          </a:prstGeom>
-          <a:noFill/>
-        </p:spPr>
-        <p:txBody>
-          <a:bodyPr wrap="square" lIns="0" rIns="0" tIns="0" bIns="0" anchor="t">
-            <a:noAutofit/>
-          </a:bodyPr>
-          <a:lstStyle/>
-          <a:p>
-            <a:pPr algn="l">
-              <a:lnSpc>
-                <a:spcPct val="115000"/>
-              </a:lnSpc>
-            </a:pPr>
-            <a:r>
-              <a:rPr sz="1500" b="0" i="1">
-                <a:solidFill>
-                  <a:srgbClr val="66717F"/>
-                </a:solidFill>
-                <a:latin typeface="Montserrat"/>
-              </a:rPr>
-              <a:t>Exemplo fictício</a:t>
-            </a:r>
-          </a:p>
-        </p:txBody>
-      </p:sp>
-      <p:sp>
-        <p:nvSpPr>
-          <p:cNvPr id="7" name="TextBox 6"/>
-          <p:cNvSpPr txBox="1"/>
-          <p:nvPr/>
-        </p:nvSpPr>
-        <p:spPr>
-          <a:xfrm>
-            <a:off x="10820400" y="6343650"/>
-            <a:ext cx="784860" cy="184150"/>
-          </a:xfrm>
-          <a:prstGeom prst="rect">
-            <a:avLst/>
-          </a:prstGeom>
-          <a:noFill/>
-        </p:spPr>
-        <p:txBody>
-          <a:bodyPr wrap="square" lIns="0" rIns="0" tIns="0" bIns="0" anchor="t">
-            <a:noAutofit/>
-          </a:bodyPr>
-          <a:lstStyle/>
-          <a:p>
-            <a:pPr algn="r">
-              <a:lnSpc>
-                <a:spcPct val="98000"/>
-              </a:lnSpc>
-            </a:pPr>
-            <a:r>
-              <a:rPr sz="1200" b="0" i="0">
-                <a:solidFill>
-                  <a:srgbClr val="66717F"/>
-                </a:solidFill>
-                <a:latin typeface="Montserrat"/>
-              </a:rPr>
-              <a:t>R2</a:t>
-            </a:r>
-          </a:p>
-        </p:txBody>
-      </p:sp>
-    </p:spTree>
-  </p:cSld>
-  <p:clrMapOvr>
-    <a:masterClrMapping/>
-  </p:clrMapOvr>
-</p:sld>
-</file>
-
-<file path=ppt/slides/slide55.xml><?xml version="1.0" encoding="utf-8"?>
-<p:sld xmlns:a="http://schemas.openxmlformats.org/drawingml/2006/main" xmlns:p="http://schemas.openxmlformats.org/presentationml/2006/main" xmlns:r="http://schemas.openxmlformats.org/officeDocument/2006/relationships">
-  <p:cSld>
-    <p:bg>
-      <p:bgPr>
-        <a:solidFill>
-          <a:srgbClr val="FFFFFF"/>
-        </a:solidFill>
-        <a:effectLst/>
-      </p:bgPr>
-    </p:bg>
-    <p:spTree>
-      <p:nvGrpSpPr>
-        <p:cNvPr id="1" name=""/>
-        <p:cNvGrpSpPr/>
-        <p:nvPr/>
-      </p:nvGrpSpPr>
-      <p:grpSpPr/>
-      <p:sp>
-        <p:nvSpPr>
-          <p:cNvPr id="2" name="Rectangle 1"/>
-          <p:cNvSpPr/>
-          <p:nvPr/>
-        </p:nvSpPr>
-        <p:spPr>
-          <a:xfrm>
-            <a:off x="0" y="0"/>
-            <a:ext cx="177800" cy="6858000"/>
-          </a:xfrm>
-          <a:prstGeom prst="rect">
-            <a:avLst/>
-          </a:prstGeom>
-          <a:solidFill>
-            <a:srgbClr val="0F7C86"/>
-          </a:solidFill>
-          <a:ln>
-            <a:noFill/>
-          </a:ln>
-          <a:effectLst/>
-        </p:spPr>
-        <p:style>
-          <a:lnRef idx="1">
-            <a:schemeClr val="accent1"/>
-          </a:lnRef>
-          <a:fillRef idx="3">
-            <a:schemeClr val="accent1"/>
-          </a:fillRef>
-          <a:effectRef idx="2">
-            <a:schemeClr val="accent1"/>
-          </a:effectRef>
-          <a:fontRef idx="minor">
-            <a:schemeClr val="lt1"/>
-          </a:fontRef>
-        </p:style>
-        <p:txBody>
-          <a:bodyPr rtlCol="0" anchor="ctr"/>
-          <a:lstStyle/>
-          <a:p>
-            <a:pPr algn="ctr"/>
-          </a:p>
-        </p:txBody>
-      </p:sp>
-      <p:sp>
-        <p:nvSpPr>
-          <p:cNvPr id="3" name="TextBox 2"/>
-          <p:cNvSpPr txBox="1"/>
-          <p:nvPr/>
-        </p:nvSpPr>
-        <p:spPr>
-          <a:xfrm>
-            <a:off x="1168400" y="1680766"/>
-            <a:ext cx="10307828" cy="481905"/>
-          </a:xfrm>
-          <a:prstGeom prst="rect">
-            <a:avLst/>
-          </a:prstGeom>
-          <a:noFill/>
-        </p:spPr>
-        <p:txBody>
-          <a:bodyPr wrap="square" lIns="0" rIns="0" tIns="0" bIns="0" anchor="t">
-            <a:noAutofit/>
-          </a:bodyPr>
-          <a:lstStyle/>
-          <a:p>
-            <a:pPr algn="l">
-              <a:lnSpc>
-                <a:spcPct val="94000"/>
-              </a:lnSpc>
-            </a:pPr>
-            <a:r>
-              <a:rPr sz="3300" b="1" i="0">
-                <a:solidFill>
-                  <a:srgbClr val="1B2F4B"/>
-                </a:solidFill>
-                <a:latin typeface="Montserrat"/>
-              </a:rPr>
-              <a:t>Respostas: o dado novo</a:t>
-            </a:r>
-          </a:p>
-        </p:txBody>
-      </p:sp>
-      <p:sp>
-        <p:nvSpPr>
-          <p:cNvPr id="4" name="TextBox 3"/>
-          <p:cNvSpPr txBox="1"/>
-          <p:nvPr/>
-        </p:nvSpPr>
-        <p:spPr>
-          <a:xfrm>
-            <a:off x="1168400" y="2416671"/>
-            <a:ext cx="4839970" cy="319980"/>
-          </a:xfrm>
-          <a:prstGeom prst="rect">
-            <a:avLst/>
-          </a:prstGeom>
-          <a:noFill/>
-        </p:spPr>
-        <p:txBody>
-          <a:bodyPr wrap="square" lIns="0" rIns="0" tIns="0" bIns="0" anchor="t">
-            <a:noAutofit/>
-          </a:bodyPr>
-          <a:lstStyle/>
-          <a:p>
-            <a:pPr algn="l">
-              <a:lnSpc>
-                <a:spcPct val="98000"/>
-              </a:lnSpc>
-            </a:pPr>
-            <a:r>
-              <a:rPr sz="2100" b="1" i="0">
-                <a:solidFill>
-                  <a:srgbClr val="0F7C86"/>
-                </a:solidFill>
-                <a:latin typeface="Montserrat"/>
-              </a:rPr>
-              <a:t>O que muda</a:t>
-            </a:r>
-          </a:p>
-        </p:txBody>
-      </p:sp>
-      <p:sp>
-        <p:nvSpPr>
-          <p:cNvPr id="5" name="TextBox 4"/>
-          <p:cNvSpPr txBox="1"/>
-          <p:nvPr/>
-        </p:nvSpPr>
-        <p:spPr>
-          <a:xfrm>
-            <a:off x="1168400" y="2825552"/>
-            <a:ext cx="4839970" cy="1279922"/>
-          </a:xfrm>
-          <a:prstGeom prst="rect">
-            <a:avLst/>
-          </a:prstGeom>
-          <a:noFill/>
-        </p:spPr>
-        <p:txBody>
-          <a:bodyPr wrap="square" lIns="0" rIns="0" tIns="0" bIns="0" anchor="t">
-            <a:noAutofit/>
-          </a:bodyPr>
-          <a:lstStyle/>
-          <a:p>
-            <a:pPr algn="l">
-              <a:lnSpc>
-                <a:spcPct val="115000"/>
-              </a:lnSpc>
-            </a:pPr>
-            <a:r>
-              <a:rPr sz="1800" b="0" i="0">
-                <a:solidFill>
-                  <a:srgbClr val="2E3A4A"/>
-                </a:solidFill>
-                <a:latin typeface="Montserrat"/>
-              </a:rPr>
-              <a:t>Fica mais forte a explicação “quer os trilhos” (ou as duas juntas): sem guardar os trilhos, quase não houve episódio. “Foge da mesa” fica mais fraca.</a:t>
-            </a:r>
-          </a:p>
-        </p:txBody>
-      </p:sp>
-      <p:sp>
-        <p:nvSpPr>
-          <p:cNvPr id="6" name="TextBox 5"/>
-          <p:cNvSpPr txBox="1"/>
-          <p:nvPr/>
-        </p:nvSpPr>
-        <p:spPr>
-          <a:xfrm>
-            <a:off x="6477000" y="2416671"/>
-            <a:ext cx="4839970" cy="319980"/>
-          </a:xfrm>
-          <a:prstGeom prst="rect">
-            <a:avLst/>
-          </a:prstGeom>
-          <a:noFill/>
-        </p:spPr>
-        <p:txBody>
-          <a:bodyPr wrap="square" lIns="0" rIns="0" tIns="0" bIns="0" anchor="t">
-            <a:noAutofit/>
-          </a:bodyPr>
-          <a:lstStyle/>
-          <a:p>
-            <a:pPr algn="l">
-              <a:lnSpc>
-                <a:spcPct val="98000"/>
-              </a:lnSpc>
-            </a:pPr>
-            <a:r>
-              <a:rPr sz="2100" b="1" i="0">
-                <a:solidFill>
-                  <a:srgbClr val="0F7C86"/>
-                </a:solidFill>
-                <a:latin typeface="Montserrat"/>
-              </a:rPr>
-              <a:t>O que não muda</a:t>
-            </a:r>
-          </a:p>
-        </p:txBody>
-      </p:sp>
-      <p:sp>
-        <p:nvSpPr>
-          <p:cNvPr id="7" name="TextBox 6"/>
-          <p:cNvSpPr txBox="1"/>
-          <p:nvPr/>
-        </p:nvSpPr>
-        <p:spPr>
-          <a:xfrm>
-            <a:off x="6477000" y="2825552"/>
-            <a:ext cx="4839970" cy="959941"/>
-          </a:xfrm>
-          <a:prstGeom prst="rect">
-            <a:avLst/>
-          </a:prstGeom>
-          <a:noFill/>
-        </p:spPr>
-        <p:txBody>
-          <a:bodyPr wrap="square" lIns="0" rIns="0" tIns="0" bIns="0" anchor="t">
-            <a:noAutofit/>
-          </a:bodyPr>
-          <a:lstStyle/>
-          <a:p>
-            <a:pPr algn="l">
-              <a:lnSpc>
-                <a:spcPct val="115000"/>
-              </a:lnSpc>
-            </a:pPr>
-            <a:r>
-              <a:rPr sz="1800" b="0" i="0">
-                <a:solidFill>
-                  <a:srgbClr val="2E3A4A"/>
-                </a:solidFill>
-                <a:latin typeface="Montserrat"/>
-              </a:rPr>
-              <a:t>Ainda não dá para ter certeza: são só 4 sessões, sem controle de sono, terapeuta ou tipo de tarefa.</a:t>
-            </a:r>
-          </a:p>
-        </p:txBody>
-      </p:sp>
-      <p:sp>
-        <p:nvSpPr>
-          <p:cNvPr id="8" name="TextBox 7"/>
-          <p:cNvSpPr txBox="1"/>
-          <p:nvPr/>
-        </p:nvSpPr>
-        <p:spPr>
-          <a:xfrm>
-            <a:off x="1168400" y="4359473"/>
-            <a:ext cx="10307828" cy="627261"/>
-          </a:xfrm>
-          <a:prstGeom prst="rect">
-            <a:avLst/>
-          </a:prstGeom>
-          <a:noFill/>
-        </p:spPr>
-        <p:txBody>
-          <a:bodyPr wrap="square" lIns="0" rIns="0" tIns="0" bIns="0" anchor="t">
-            <a:noAutofit/>
-          </a:bodyPr>
-          <a:lstStyle/>
-          <a:p>
-            <a:pPr algn="l">
-              <a:lnSpc>
-                <a:spcPct val="107000"/>
-              </a:lnSpc>
-            </a:pPr>
-            <a:r>
-              <a:rPr sz="1900" b="1" i="0">
-                <a:solidFill>
-                  <a:srgbClr val="0F7C86"/>
-                </a:solidFill>
-                <a:latin typeface="Montserrat"/>
-              </a:rPr>
-              <a:t>É mais uma pista. O próximo passo é uma avaliação organizada, com supervisão.</a:t>
-            </a:r>
-          </a:p>
-        </p:txBody>
-      </p:sp>
-      <p:sp>
-        <p:nvSpPr>
-          <p:cNvPr id="9" name="TextBox 8"/>
-          <p:cNvSpPr txBox="1"/>
-          <p:nvPr/>
-        </p:nvSpPr>
-        <p:spPr>
-          <a:xfrm>
-            <a:off x="10820400" y="6343650"/>
-            <a:ext cx="784860" cy="184150"/>
-          </a:xfrm>
-          <a:prstGeom prst="rect">
-            <a:avLst/>
-          </a:prstGeom>
-          <a:noFill/>
-        </p:spPr>
-        <p:txBody>
-          <a:bodyPr wrap="square" lIns="0" rIns="0" tIns="0" bIns="0" anchor="t">
-            <a:noAutofit/>
-          </a:bodyPr>
-          <a:lstStyle/>
-          <a:p>
-            <a:pPr algn="r">
-              <a:lnSpc>
-                <a:spcPct val="98000"/>
-              </a:lnSpc>
-            </a:pPr>
-            <a:r>
-              <a:rPr sz="1200" b="0" i="0">
-                <a:solidFill>
-                  <a:srgbClr val="66717F"/>
-                </a:solidFill>
-                <a:latin typeface="Montserrat"/>
-              </a:rPr>
-              <a:t>R2b</a:t>
-            </a:r>
-          </a:p>
-        </p:txBody>
-      </p:sp>
-    </p:spTree>
-  </p:cSld>
-  <p:clrMapOvr>
-    <a:masterClrMapping/>
-  </p:clrMapOvr>
-</p:sld>
-</file>
-
-<file path=ppt/slides/slide56.xml><?xml version="1.0" encoding="utf-8"?>
-<p:sld xmlns:a="http://schemas.openxmlformats.org/drawingml/2006/main" xmlns:p="http://schemas.openxmlformats.org/presentationml/2006/main" xmlns:r="http://schemas.openxmlformats.org/officeDocument/2006/relationships">
-  <p:cSld>
-    <p:bg>
-      <p:bgPr>
-        <a:solidFill>
-          <a:srgbClr val="FCFCFB"/>
-        </a:solidFill>
-        <a:effectLst/>
-      </p:bgPr>
-    </p:bg>
-    <p:spTree>
-      <p:nvGrpSpPr>
-        <p:cNvPr id="1" name=""/>
-        <p:cNvGrpSpPr/>
-        <p:nvPr/>
-      </p:nvGrpSpPr>
-      <p:grpSpPr/>
-      <p:sp>
-        <p:nvSpPr>
-          <p:cNvPr id="2" name="Rectangle 1"/>
-          <p:cNvSpPr/>
-          <p:nvPr/>
-        </p:nvSpPr>
-        <p:spPr>
-          <a:xfrm>
-            <a:off x="0" y="0"/>
-            <a:ext cx="177800" cy="6858000"/>
-          </a:xfrm>
-          <a:prstGeom prst="rect">
-            <a:avLst/>
-          </a:prstGeom>
-          <a:solidFill>
-            <a:srgbClr val="0F7C86"/>
-          </a:solidFill>
-          <a:ln>
-            <a:noFill/>
-          </a:ln>
-          <a:effectLst/>
-        </p:spPr>
-        <p:style>
-          <a:lnRef idx="1">
-            <a:schemeClr val="accent1"/>
-          </a:lnRef>
-          <a:fillRef idx="3">
-            <a:schemeClr val="accent1"/>
-          </a:fillRef>
-          <a:effectRef idx="2">
-            <a:schemeClr val="accent1"/>
-          </a:effectRef>
-          <a:fontRef idx="minor">
-            <a:schemeClr val="lt1"/>
-          </a:fontRef>
-        </p:style>
-        <p:txBody>
-          <a:bodyPr rtlCol="0" anchor="ctr"/>
-          <a:lstStyle/>
-          <a:p>
-            <a:pPr algn="ctr"/>
-          </a:p>
-        </p:txBody>
-      </p:sp>
-      <p:sp>
-        <p:nvSpPr>
-          <p:cNvPr id="3" name="TextBox 2"/>
-          <p:cNvSpPr txBox="1"/>
-          <p:nvPr/>
-        </p:nvSpPr>
-        <p:spPr>
-          <a:xfrm>
-            <a:off x="1168400" y="1143893"/>
-            <a:ext cx="10307828" cy="379710"/>
-          </a:xfrm>
-          <a:prstGeom prst="rect">
-            <a:avLst/>
-          </a:prstGeom>
-          <a:noFill/>
-        </p:spPr>
-        <p:txBody>
-          <a:bodyPr wrap="square" lIns="0" rIns="0" tIns="0" bIns="0" anchor="t">
-            <a:noAutofit/>
-          </a:bodyPr>
-          <a:lstStyle/>
-          <a:p>
-            <a:pPr algn="l">
-              <a:lnSpc>
-                <a:spcPct val="94000"/>
-              </a:lnSpc>
-            </a:pPr>
-            <a:r>
-              <a:rPr sz="2600" b="1" i="0">
-                <a:solidFill>
-                  <a:srgbClr val="1B2F4B"/>
-                </a:solidFill>
-                <a:latin typeface="Montserrat"/>
-              </a:rPr>
-              <a:t>Referências: TEA e neurodiversidade</a:t>
-            </a:r>
-          </a:p>
-        </p:txBody>
-      </p:sp>
-      <p:sp>
-        <p:nvSpPr>
-          <p:cNvPr id="4" name="TextBox 3"/>
-          <p:cNvSpPr txBox="1"/>
-          <p:nvPr/>
-        </p:nvSpPr>
-        <p:spPr>
-          <a:xfrm>
-            <a:off x="1168400" y="1637903"/>
-            <a:ext cx="10307828" cy="426641"/>
-          </a:xfrm>
-          <a:prstGeom prst="rect">
-            <a:avLst/>
-          </a:prstGeom>
-          <a:noFill/>
-        </p:spPr>
-        <p:txBody>
-          <a:bodyPr wrap="square" lIns="0" rIns="0" tIns="0" bIns="0" anchor="t">
-            <a:noAutofit/>
-          </a:bodyPr>
-          <a:lstStyle/>
-          <a:p>
-            <a:pPr algn="l">
-              <a:lnSpc>
-                <a:spcPct val="115000"/>
-              </a:lnSpc>
-            </a:pPr>
-            <a:r>
-              <a:rPr sz="1200" b="0" i="0">
-                <a:solidFill>
-                  <a:srgbClr val="2E3A4A"/>
-                </a:solidFill>
-                <a:latin typeface="Montserrat"/>
-              </a:rPr>
-              <a:t>American Psychiatric Association. (2022). </a:t>
-            </a:r>
-            <a:r>
-              <a:rPr sz="1200" b="0" i="1">
-                <a:solidFill>
-                  <a:srgbClr val="2E3A4A"/>
-                </a:solidFill>
-                <a:latin typeface="Montserrat"/>
-              </a:rPr>
-              <a:t>Diagnostic and statistical manual of mental disorders</a:t>
-            </a:r>
-            <a:r>
-              <a:rPr sz="1200" b="0" i="0">
-                <a:solidFill>
-                  <a:srgbClr val="2E3A4A"/>
-                </a:solidFill>
-                <a:latin typeface="Montserrat"/>
-              </a:rPr>
-              <a:t> (5th ed., text rev.; DSM-5-TR). American Psychiatric Publishing.</a:t>
-            </a:r>
-          </a:p>
-        </p:txBody>
-      </p:sp>
-      <p:sp>
-        <p:nvSpPr>
-          <p:cNvPr id="5" name="TextBox 4"/>
-          <p:cNvSpPr txBox="1"/>
-          <p:nvPr/>
-        </p:nvSpPr>
-        <p:spPr>
-          <a:xfrm>
-            <a:off x="1168400" y="2178844"/>
-            <a:ext cx="10307828" cy="426641"/>
-          </a:xfrm>
-          <a:prstGeom prst="rect">
-            <a:avLst/>
-          </a:prstGeom>
-          <a:noFill/>
-        </p:spPr>
-        <p:txBody>
-          <a:bodyPr wrap="square" lIns="0" rIns="0" tIns="0" bIns="0" anchor="t">
-            <a:noAutofit/>
-          </a:bodyPr>
-          <a:lstStyle/>
-          <a:p>
-            <a:pPr algn="l">
-              <a:lnSpc>
-                <a:spcPct val="115000"/>
-              </a:lnSpc>
-            </a:pPr>
-            <a:r>
-              <a:rPr sz="1200" b="0" i="0">
-                <a:solidFill>
-                  <a:srgbClr val="2E3A4A"/>
-                </a:solidFill>
-                <a:latin typeface="Montserrat"/>
-              </a:rPr>
-              <a:t>Bottema-Beutel, K., Kapp, S. K., Lester, J. N., Sasson, N. J., &amp; Hand, B. N. (2021). Avoiding ableist language: Suggestions for autism researchers. </a:t>
-            </a:r>
-            <a:r>
-              <a:rPr sz="1200" b="0" i="1">
-                <a:solidFill>
-                  <a:srgbClr val="2E3A4A"/>
-                </a:solidFill>
-                <a:latin typeface="Montserrat"/>
-              </a:rPr>
-              <a:t>Autism in Adulthood, 3</a:t>
-            </a:r>
-            <a:r>
-              <a:rPr sz="1200" b="0" i="0">
-                <a:solidFill>
-                  <a:srgbClr val="2E3A4A"/>
-                </a:solidFill>
-                <a:latin typeface="Montserrat"/>
-              </a:rPr>
-              <a:t>(1), 18–29. https://doi.org/10.1089/aut.2020.0014</a:t>
-            </a:r>
-          </a:p>
-        </p:txBody>
-      </p:sp>
-      <p:sp>
-        <p:nvSpPr>
-          <p:cNvPr id="6" name="TextBox 5"/>
-          <p:cNvSpPr txBox="1"/>
-          <p:nvPr/>
-        </p:nvSpPr>
-        <p:spPr>
-          <a:xfrm>
-            <a:off x="1168400" y="2719784"/>
-            <a:ext cx="10307828" cy="426641"/>
-          </a:xfrm>
-          <a:prstGeom prst="rect">
-            <a:avLst/>
-          </a:prstGeom>
-          <a:noFill/>
-        </p:spPr>
-        <p:txBody>
-          <a:bodyPr wrap="square" lIns="0" rIns="0" tIns="0" bIns="0" anchor="t">
-            <a:noAutofit/>
-          </a:bodyPr>
-          <a:lstStyle/>
-          <a:p>
-            <a:pPr algn="l">
-              <a:lnSpc>
-                <a:spcPct val="115000"/>
-              </a:lnSpc>
-            </a:pPr>
-            <a:r>
-              <a:rPr sz="1200" b="0" i="0">
-                <a:solidFill>
-                  <a:srgbClr val="2E3A4A"/>
-                </a:solidFill>
-                <a:latin typeface="Montserrat"/>
-              </a:rPr>
-              <a:t>Kapp, S. K., Gillespie-Lynch, K., Sherman, L. E., &amp; Hutman, T. (2013). Deficit, difference, or both? Autism and neurodiversity. </a:t>
-            </a:r>
-            <a:r>
-              <a:rPr sz="1200" b="0" i="1">
-                <a:solidFill>
-                  <a:srgbClr val="2E3A4A"/>
-                </a:solidFill>
-                <a:latin typeface="Montserrat"/>
-              </a:rPr>
-              <a:t>Developmental Psychology, 49</a:t>
-            </a:r>
-            <a:r>
-              <a:rPr sz="1200" b="0" i="0">
-                <a:solidFill>
-                  <a:srgbClr val="2E3A4A"/>
-                </a:solidFill>
-                <a:latin typeface="Montserrat"/>
-              </a:rPr>
-              <a:t>(1), 59–71. https://doi.org/10.1037/a0028353</a:t>
-            </a:r>
-          </a:p>
-        </p:txBody>
-      </p:sp>
-      <p:sp>
-        <p:nvSpPr>
-          <p:cNvPr id="7" name="TextBox 6"/>
-          <p:cNvSpPr txBox="1"/>
-          <p:nvPr/>
-        </p:nvSpPr>
-        <p:spPr>
-          <a:xfrm>
-            <a:off x="1168400" y="3260725"/>
-            <a:ext cx="10307828" cy="426641"/>
-          </a:xfrm>
-          <a:prstGeom prst="rect">
-            <a:avLst/>
-          </a:prstGeom>
-          <a:noFill/>
-        </p:spPr>
-        <p:txBody>
-          <a:bodyPr wrap="square" lIns="0" rIns="0" tIns="0" bIns="0" anchor="t">
-            <a:noAutofit/>
-          </a:bodyPr>
-          <a:lstStyle/>
-          <a:p>
-            <a:pPr algn="l">
-              <a:lnSpc>
-                <a:spcPct val="115000"/>
-              </a:lnSpc>
-            </a:pPr>
-            <a:r>
-              <a:rPr sz="1200" b="0" i="0">
-                <a:solidFill>
-                  <a:srgbClr val="2E3A4A"/>
-                </a:solidFill>
-                <a:latin typeface="Montserrat"/>
-              </a:rPr>
-              <a:t>Lord, C., Brugha, T. S., Charman, T., et al. (2020). Autism spectrum disorder. </a:t>
-            </a:r>
-            <a:r>
-              <a:rPr sz="1200" b="0" i="1">
-                <a:solidFill>
-                  <a:srgbClr val="2E3A4A"/>
-                </a:solidFill>
-                <a:latin typeface="Montserrat"/>
-              </a:rPr>
-              <a:t>Nature Reviews Disease Primers, 6</a:t>
-            </a:r>
-            <a:r>
-              <a:rPr sz="1200" b="0" i="0">
-                <a:solidFill>
-                  <a:srgbClr val="2E3A4A"/>
-                </a:solidFill>
-                <a:latin typeface="Montserrat"/>
-              </a:rPr>
-              <a:t>, 5. https://doi.org/10.1038/s41572-019-0138-4</a:t>
-            </a:r>
-          </a:p>
-        </p:txBody>
-      </p:sp>
-      <p:sp>
-        <p:nvSpPr>
-          <p:cNvPr id="8" name="TextBox 7"/>
-          <p:cNvSpPr txBox="1"/>
-          <p:nvPr/>
-        </p:nvSpPr>
-        <p:spPr>
-          <a:xfrm>
-            <a:off x="1168400" y="3801666"/>
-            <a:ext cx="10307828" cy="426641"/>
-          </a:xfrm>
-          <a:prstGeom prst="rect">
-            <a:avLst/>
-          </a:prstGeom>
-          <a:noFill/>
-        </p:spPr>
-        <p:txBody>
-          <a:bodyPr wrap="square" lIns="0" rIns="0" tIns="0" bIns="0" anchor="t">
-            <a:noAutofit/>
-          </a:bodyPr>
-          <a:lstStyle/>
-          <a:p>
-            <a:pPr algn="l">
-              <a:lnSpc>
-                <a:spcPct val="115000"/>
-              </a:lnSpc>
-            </a:pPr>
-            <a:r>
-              <a:rPr sz="1200" b="0" i="0">
-                <a:solidFill>
-                  <a:srgbClr val="2E3A4A"/>
-                </a:solidFill>
-                <a:latin typeface="Montserrat"/>
-              </a:rPr>
-              <a:t>Lord, C., Charman, T., Havdahl, A., et al. (2022). The Lancet Commission on the future of care and clinical research in autism. </a:t>
-            </a:r>
-            <a:r>
-              <a:rPr sz="1200" b="0" i="1">
-                <a:solidFill>
-                  <a:srgbClr val="2E3A4A"/>
-                </a:solidFill>
-                <a:latin typeface="Montserrat"/>
-              </a:rPr>
-              <a:t>The Lancet, 399</a:t>
-            </a:r>
-            <a:r>
-              <a:rPr sz="1200" b="0" i="0">
-                <a:solidFill>
-                  <a:srgbClr val="2E3A4A"/>
-                </a:solidFill>
-                <a:latin typeface="Montserrat"/>
-              </a:rPr>
-              <a:t>(10321), 271–334. https://doi.org/10.1016/S0140-6736(21)01541-5</a:t>
-            </a:r>
-          </a:p>
-        </p:txBody>
-      </p:sp>
-      <p:sp>
-        <p:nvSpPr>
-          <p:cNvPr id="9" name="TextBox 8"/>
-          <p:cNvSpPr txBox="1"/>
-          <p:nvPr/>
-        </p:nvSpPr>
-        <p:spPr>
-          <a:xfrm>
-            <a:off x="1168400" y="4342606"/>
-            <a:ext cx="10307828" cy="639961"/>
-          </a:xfrm>
-          <a:prstGeom prst="rect">
-            <a:avLst/>
-          </a:prstGeom>
-          <a:noFill/>
-        </p:spPr>
-        <p:txBody>
-          <a:bodyPr wrap="square" lIns="0" rIns="0" tIns="0" bIns="0" anchor="t">
-            <a:noAutofit/>
-          </a:bodyPr>
-          <a:lstStyle/>
-          <a:p>
-            <a:pPr algn="l">
-              <a:lnSpc>
-                <a:spcPct val="115000"/>
-              </a:lnSpc>
-            </a:pPr>
-            <a:r>
-              <a:rPr sz="1200" b="0" i="0">
-                <a:solidFill>
-                  <a:srgbClr val="2E3A4A"/>
-                </a:solidFill>
-                <a:latin typeface="Montserrat"/>
-              </a:rPr>
-              <a:t>Shaw, K. A., Williams, S., Patrick, M. E., et al. (2025). Prevalence and early identification of autism spectrum disorder among children aged 4 and 8 years — ADDM Network, 16 sites, United States, 2022. </a:t>
-            </a:r>
-            <a:r>
-              <a:rPr sz="1200" b="0" i="1">
-                <a:solidFill>
-                  <a:srgbClr val="2E3A4A"/>
-                </a:solidFill>
-                <a:latin typeface="Montserrat"/>
-              </a:rPr>
-              <a:t>MMWR Surveillance Summaries, 74</a:t>
-            </a:r>
-            <a:r>
-              <a:rPr sz="1200" b="0" i="0">
-                <a:solidFill>
-                  <a:srgbClr val="2E3A4A"/>
-                </a:solidFill>
-                <a:latin typeface="Montserrat"/>
-              </a:rPr>
-              <a:t>(SS-2), 1–22. https://doi.org/10.15585/mmwr.ss7402a1</a:t>
-            </a:r>
-          </a:p>
-        </p:txBody>
-      </p:sp>
-      <p:sp>
-        <p:nvSpPr>
-          <p:cNvPr id="10" name="TextBox 9"/>
-          <p:cNvSpPr txBox="1"/>
-          <p:nvPr/>
-        </p:nvSpPr>
-        <p:spPr>
-          <a:xfrm>
-            <a:off x="1168400" y="5096867"/>
-            <a:ext cx="10307828" cy="426641"/>
-          </a:xfrm>
-          <a:prstGeom prst="rect">
-            <a:avLst/>
-          </a:prstGeom>
-          <a:noFill/>
-        </p:spPr>
-        <p:txBody>
-          <a:bodyPr wrap="square" lIns="0" rIns="0" tIns="0" bIns="0" anchor="t">
-            <a:noAutofit/>
-          </a:bodyPr>
-          <a:lstStyle/>
-          <a:p>
-            <a:pPr algn="l">
-              <a:lnSpc>
-                <a:spcPct val="115000"/>
-              </a:lnSpc>
-            </a:pPr>
-            <a:r>
-              <a:rPr sz="1200" b="0" i="0">
-                <a:solidFill>
-                  <a:srgbClr val="2E3A4A"/>
-                </a:solidFill>
-                <a:latin typeface="Montserrat"/>
-              </a:rPr>
-              <a:t>Zeidan, J., Fombonne, E., Scorah, J., et al. (2022). Global prevalence of autism: A systematic review update. </a:t>
-            </a:r>
-            <a:r>
-              <a:rPr sz="1200" b="0" i="1">
-                <a:solidFill>
-                  <a:srgbClr val="2E3A4A"/>
-                </a:solidFill>
-                <a:latin typeface="Montserrat"/>
-              </a:rPr>
-              <a:t>Autism Research, 15</a:t>
-            </a:r>
-            <a:r>
-              <a:rPr sz="1200" b="0" i="0">
-                <a:solidFill>
-                  <a:srgbClr val="2E3A4A"/>
-                </a:solidFill>
-                <a:latin typeface="Montserrat"/>
-              </a:rPr>
-              <a:t>(5), 778–790. https://doi.org/10.1002/aur.2696</a:t>
-            </a:r>
-          </a:p>
-        </p:txBody>
-      </p:sp>
-      <p:sp>
-        <p:nvSpPr>
-          <p:cNvPr id="11" name="TextBox 10"/>
-          <p:cNvSpPr txBox="1"/>
-          <p:nvPr/>
-        </p:nvSpPr>
-        <p:spPr>
-          <a:xfrm>
-            <a:off x="10820400" y="6343650"/>
-            <a:ext cx="784860" cy="184150"/>
-          </a:xfrm>
-          <a:prstGeom prst="rect">
-            <a:avLst/>
-          </a:prstGeom>
-          <a:noFill/>
-        </p:spPr>
-        <p:txBody>
-          <a:bodyPr wrap="square" lIns="0" rIns="0" tIns="0" bIns="0" anchor="t">
-            <a:noAutofit/>
-          </a:bodyPr>
-          <a:lstStyle/>
-          <a:p>
-            <a:pPr algn="r">
-              <a:lnSpc>
-                <a:spcPct val="98000"/>
-              </a:lnSpc>
-            </a:pPr>
-            <a:r>
-              <a:rPr sz="1200" b="0" i="0">
-                <a:solidFill>
-                  <a:srgbClr val="66717F"/>
-                </a:solidFill>
-                <a:latin typeface="Montserrat"/>
-              </a:rPr>
-              <a:t>A1</a:t>
+              <a:t>56</a:t>
             </a:r>
           </a:p>
         </p:txBody>
@@ -26947,7 +26853,7 @@
         </p:nvSpPr>
         <p:spPr>
           <a:xfrm>
-            <a:off x="1168400" y="1250553"/>
+            <a:off x="1168400" y="1143893"/>
             <a:ext cx="10307828" cy="379710"/>
           </a:xfrm>
           <a:prstGeom prst="rect">
@@ -26973,7 +26879,7 @@
                 </a:solidFill>
                 <a:latin typeface="Montserrat"/>
               </a:rPr>
-              <a:t>Referências: ABA e análise funcional</a:t>
+              <a:t>Referências: TEA e neurodiversidade</a:t>
             </a:r>
           </a:p>
         </p:txBody>
@@ -26986,7 +26892,7 @@
         </p:nvSpPr>
         <p:spPr>
           <a:xfrm>
-            <a:off x="1168400" y="1744563"/>
+            <a:off x="1168400" y="1637903"/>
             <a:ext cx="10307828" cy="426641"/>
           </a:xfrm>
           <a:prstGeom prst="rect">
@@ -27012,7 +26918,7 @@
                 </a:solidFill>
                 <a:latin typeface="Montserrat"/>
               </a:rPr>
-              <a:t>Baer, D. M., Wolf, M. M., &amp; Risley, T. R. (1968). Some current dimensions of applied behavior analysis. </a:t>
+              <a:t>American Psychiatric Association. (2022). </a:t>
             </a:r>
             <a:r>
               <a:rPr sz="1200" b="0" i="1">
@@ -27021,7 +26927,7 @@
                 </a:solidFill>
                 <a:latin typeface="Montserrat"/>
               </a:rPr>
-              <a:t>Journal of Applied Behavior Analysis, 1</a:t>
+              <a:t>Diagnostic and statistical manual of mental disorders</a:t>
             </a:r>
             <a:r>
               <a:rPr sz="1200" b="0" i="0">
@@ -27030,7 +26936,7 @@
                 </a:solidFill>
                 <a:latin typeface="Montserrat"/>
               </a:rPr>
-              <a:t>(1), 91–97. https://doi.org/10.1901/jaba.1968.1-91</a:t>
+              <a:t> (5th ed., text rev.; DSM-5-TR). American Psychiatric Publishing.</a:t>
             </a:r>
           </a:p>
         </p:txBody>
@@ -27043,8 +26949,8 @@
         </p:nvSpPr>
         <p:spPr>
           <a:xfrm>
-            <a:off x="1168400" y="2285504"/>
-            <a:ext cx="10307828" cy="213320"/>
+            <a:off x="1168400" y="2178844"/>
+            <a:ext cx="10307828" cy="426641"/>
           </a:xfrm>
           <a:prstGeom prst="rect">
             <a:avLst/>
@@ -27069,7 +26975,7 @@
                 </a:solidFill>
                 <a:latin typeface="Montserrat"/>
               </a:rPr>
-              <a:t>Cooper, J. O., Heron, T. E., &amp; Heward, W. L. (2020). </a:t>
+              <a:t>Bottema-Beutel, K., Kapp, S. K., Lester, J. N., Sasson, N. J., &amp; Hand, B. N. (2021). Avoiding ableist language: Suggestions for autism researchers. </a:t>
             </a:r>
             <a:r>
               <a:rPr sz="1200" b="0" i="1">
@@ -27078,7 +26984,7 @@
                 </a:solidFill>
                 <a:latin typeface="Montserrat"/>
               </a:rPr>
-              <a:t>Applied behavior analysis</a:t>
+              <a:t>Autism in Adulthood, 3</a:t>
             </a:r>
             <a:r>
               <a:rPr sz="1200" b="0" i="0">
@@ -27087,7 +26993,7 @@
                 </a:solidFill>
                 <a:latin typeface="Montserrat"/>
               </a:rPr>
-              <a:t> (3rd ed.). Pearson.</a:t>
+              <a:t>(1), 18–29. https://doi.org/10.1089/aut.2020.0014</a:t>
             </a:r>
           </a:p>
         </p:txBody>
@@ -27100,7 +27006,7 @@
         </p:nvSpPr>
         <p:spPr>
           <a:xfrm>
-            <a:off x="1168400" y="2613124"/>
+            <a:off x="1168400" y="2719784"/>
             <a:ext cx="10307828" cy="426641"/>
           </a:xfrm>
           <a:prstGeom prst="rect">
@@ -27126,7 +27032,7 @@
                 </a:solidFill>
                 <a:latin typeface="Montserrat"/>
               </a:rPr>
-              <a:t>Hanley, G. P. (2012). Functional assessment of problem behavior: Dispelling myths, overcoming implementation obstacles, and developing new lore. </a:t>
+              <a:t>Kapp, S. K., Gillespie-Lynch, K., Sherman, L. E., &amp; Hutman, T. (2013). Deficit, difference, or both? Autism and neurodiversity. </a:t>
             </a:r>
             <a:r>
               <a:rPr sz="1200" b="0" i="1">
@@ -27135,7 +27041,7 @@
                 </a:solidFill>
                 <a:latin typeface="Montserrat"/>
               </a:rPr>
-              <a:t>Behavior Analysis in Practice, 5</a:t>
+              <a:t>Developmental Psychology, 49</a:t>
             </a:r>
             <a:r>
               <a:rPr sz="1200" b="0" i="0">
@@ -27144,7 +27050,7 @@
                 </a:solidFill>
                 <a:latin typeface="Montserrat"/>
               </a:rPr>
-              <a:t>(1), 54–72. https://doi.org/10.1007/BF03391818</a:t>
+              <a:t>(1), 59–71. https://doi.org/10.1037/a0028353</a:t>
             </a:r>
           </a:p>
         </p:txBody>
@@ -27157,7 +27063,7 @@
         </p:nvSpPr>
         <p:spPr>
           <a:xfrm>
-            <a:off x="1168400" y="3154065"/>
+            <a:off x="1168400" y="3260725"/>
             <a:ext cx="10307828" cy="426641"/>
           </a:xfrm>
           <a:prstGeom prst="rect">
@@ -27183,7 +27089,7 @@
                 </a:solidFill>
                 <a:latin typeface="Montserrat"/>
               </a:rPr>
-              <a:t>Hanley, G. P., Iwata, B. A., &amp; McCord, B. E. (2003). Functional analysis of problem behavior: A review. </a:t>
+              <a:t>Lord, C., Brugha, T. S., Charman, T., et al. (2020). Autism spectrum disorder. </a:t>
             </a:r>
             <a:r>
               <a:rPr sz="1200" b="0" i="1">
@@ -27192,7 +27098,7 @@
                 </a:solidFill>
                 <a:latin typeface="Montserrat"/>
               </a:rPr>
-              <a:t>Journal of Applied Behavior Analysis, 36</a:t>
+              <a:t>Nature Reviews Disease Primers, 6</a:t>
             </a:r>
             <a:r>
               <a:rPr sz="1200" b="0" i="0">
@@ -27201,7 +27107,7 @@
                 </a:solidFill>
                 <a:latin typeface="Montserrat"/>
               </a:rPr>
-              <a:t>(2), 147–185. https://doi.org/10.1901/jaba.2003.36-147</a:t>
+              <a:t>, 5. https://doi.org/10.1038/s41572-019-0138-4</a:t>
             </a:r>
           </a:p>
         </p:txBody>
@@ -27214,7 +27120,64 @@
         </p:nvSpPr>
         <p:spPr>
           <a:xfrm>
-            <a:off x="1168400" y="3695005"/>
+            <a:off x="1168400" y="3801666"/>
+            <a:ext cx="10307828" cy="426641"/>
+          </a:xfrm>
+          <a:prstGeom prst="rect">
+            <a:avLst/>
+          </a:prstGeom>
+          <a:noFill/>
+        </p:spPr>
+        <p:txBody>
+          <a:bodyPr wrap="square" lIns="0" rIns="0" tIns="0" bIns="0" anchor="t">
+            <a:noAutofit/>
+          </a:bodyPr>
+          <a:lstStyle/>
+          <a:p>
+            <a:pPr algn="l">
+              <a:lnSpc>
+                <a:spcPct val="115000"/>
+              </a:lnSpc>
+            </a:pPr>
+            <a:r>
+              <a:rPr sz="1200" b="0" i="0">
+                <a:solidFill>
+                  <a:srgbClr val="2E3A4A"/>
+                </a:solidFill>
+                <a:latin typeface="Montserrat"/>
+              </a:rPr>
+              <a:t>Lord, C., Charman, T., Havdahl, A., et al. (2022). The Lancet Commission on the future of care and clinical research in autism. </a:t>
+            </a:r>
+            <a:r>
+              <a:rPr sz="1200" b="0" i="1">
+                <a:solidFill>
+                  <a:srgbClr val="2E3A4A"/>
+                </a:solidFill>
+                <a:latin typeface="Montserrat"/>
+              </a:rPr>
+              <a:t>The Lancet, 399</a:t>
+            </a:r>
+            <a:r>
+              <a:rPr sz="1200" b="0" i="0">
+                <a:solidFill>
+                  <a:srgbClr val="2E3A4A"/>
+                </a:solidFill>
+                <a:latin typeface="Montserrat"/>
+              </a:rPr>
+              <a:t>(10321), 271–334. https://doi.org/10.1016/S0140-6736(21)01541-5</a:t>
+            </a:r>
+          </a:p>
+        </p:txBody>
+      </p:sp>
+      <p:sp>
+        <p:nvSpPr>
+          <p:cNvPr id="9" name="TextBox 8"/>
+          <p:cNvSpPr txBox="1"/>
+          <p:nvPr/>
+        </p:nvSpPr>
+        <p:spPr>
+          <a:xfrm>
+            <a:off x="1168400" y="4342606"/>
             <a:ext cx="10307828" cy="639961"/>
           </a:xfrm>
           <a:prstGeom prst="rect">
@@ -27240,7 +27203,7 @@
                 </a:solidFill>
                 <a:latin typeface="Montserrat"/>
               </a:rPr>
-              <a:t>Hanley, G. P., Jin, C. S., Vanselow, N. R., &amp; Hanratty, L. A. (2014). Producing meaningful improvements in problem behavior of children with autism via synthesized analyses and treatments. </a:t>
+              <a:t>Shaw, K. A., Williams, S., Patrick, M. E., et al. (2025). Prevalence and early identification of autism spectrum disorder among children aged 4 and 8 years — ADDM Network, 16 sites, United States, 2022. </a:t>
             </a:r>
             <a:r>
               <a:rPr sz="1200" b="0" i="1">
@@ -27249,7 +27212,7 @@
                 </a:solidFill>
                 <a:latin typeface="Montserrat"/>
               </a:rPr>
-              <a:t>Journal of Applied Behavior Analysis, 47</a:t>
+              <a:t>MMWR Surveillance Summaries, 74</a:t>
             </a:r>
             <a:r>
               <a:rPr sz="1200" b="0" i="0">
@@ -27258,20 +27221,20 @@
                 </a:solidFill>
                 <a:latin typeface="Montserrat"/>
               </a:rPr>
-              <a:t>(1), 16–36. https://doi.org/10.1002/jaba.106</a:t>
-            </a:r>
-          </a:p>
-        </p:txBody>
-      </p:sp>
-      <p:sp>
-        <p:nvSpPr>
-          <p:cNvPr id="9" name="TextBox 8"/>
-          <p:cNvSpPr txBox="1"/>
-          <p:nvPr/>
-        </p:nvSpPr>
-        <p:spPr>
-          <a:xfrm>
-            <a:off x="1168400" y="4449266"/>
+              <a:t>(SS-2), 1–22. https://doi.org/10.15585/mmwr.ss7402a1</a:t>
+            </a:r>
+          </a:p>
+        </p:txBody>
+      </p:sp>
+      <p:sp>
+        <p:nvSpPr>
+          <p:cNvPr id="10" name="TextBox 9"/>
+          <p:cNvSpPr txBox="1"/>
+          <p:nvPr/>
+        </p:nvSpPr>
+        <p:spPr>
+          <a:xfrm>
+            <a:off x="1168400" y="5096867"/>
             <a:ext cx="10307828" cy="426641"/>
           </a:xfrm>
           <a:prstGeom prst="rect">
@@ -27297,7 +27260,7 @@
                 </a:solidFill>
                 <a:latin typeface="Montserrat"/>
               </a:rPr>
-              <a:t>Iwata, B. A., Dorsey, M. F., Slifer, K. J., Bauman, K. E., &amp; Richman, G. S. (1994). Toward a functional analysis of self-injury. </a:t>
+              <a:t>Zeidan, J., Fombonne, E., Scorah, J., et al. (2022). Global prevalence of autism: A systematic review update. </a:t>
             </a:r>
             <a:r>
               <a:rPr sz="1200" b="0" i="1">
@@ -27306,7 +27269,7 @@
                 </a:solidFill>
                 <a:latin typeface="Montserrat"/>
               </a:rPr>
-              <a:t>Journal of Applied Behavior Analysis, 27</a:t>
+              <a:t>Autism Research, 15</a:t>
             </a:r>
             <a:r>
               <a:rPr sz="1200" b="0" i="0">
@@ -27315,64 +27278,7 @@
                 </a:solidFill>
                 <a:latin typeface="Montserrat"/>
               </a:rPr>
-              <a:t>(2), 197–209. https://doi.org/10.1901/jaba.1994.27-197 (Original publicado em 1982)</a:t>
-            </a:r>
-          </a:p>
-        </p:txBody>
-      </p:sp>
-      <p:sp>
-        <p:nvSpPr>
-          <p:cNvPr id="10" name="TextBox 9"/>
-          <p:cNvSpPr txBox="1"/>
-          <p:nvPr/>
-        </p:nvSpPr>
-        <p:spPr>
-          <a:xfrm>
-            <a:off x="1168400" y="4990207"/>
-            <a:ext cx="10307828" cy="426641"/>
-          </a:xfrm>
-          <a:prstGeom prst="rect">
-            <a:avLst/>
-          </a:prstGeom>
-          <a:noFill/>
-        </p:spPr>
-        <p:txBody>
-          <a:bodyPr wrap="square" lIns="0" rIns="0" tIns="0" bIns="0" anchor="t">
-            <a:noAutofit/>
-          </a:bodyPr>
-          <a:lstStyle/>
-          <a:p>
-            <a:pPr algn="l">
-              <a:lnSpc>
-                <a:spcPct val="115000"/>
-              </a:lnSpc>
-            </a:pPr>
-            <a:r>
-              <a:rPr sz="1200" b="0" i="0">
-                <a:solidFill>
-                  <a:srgbClr val="2E3A4A"/>
-                </a:solidFill>
-                <a:latin typeface="Montserrat"/>
-              </a:rPr>
-              <a:t>Laraway, S., Snycerski, S., Michael, J., &amp; Poling, A. (2003). Motivating operations and terms to describe them: Some further refinements. </a:t>
-            </a:r>
-            <a:r>
-              <a:rPr sz="1200" b="0" i="1">
-                <a:solidFill>
-                  <a:srgbClr val="2E3A4A"/>
-                </a:solidFill>
-                <a:latin typeface="Montserrat"/>
-              </a:rPr>
-              <a:t>Journal of Applied Behavior Analysis, 36</a:t>
-            </a:r>
-            <a:r>
-              <a:rPr sz="1200" b="0" i="0">
-                <a:solidFill>
-                  <a:srgbClr val="2E3A4A"/>
-                </a:solidFill>
-                <a:latin typeface="Montserrat"/>
-              </a:rPr>
-              <a:t>(3), 407–414. https://doi.org/10.1901/jaba.2003.36-407</a:t>
+              <a:t>(5), 778–790. https://doi.org/10.1002/aur.2696</a:t>
             </a:r>
           </a:p>
         </p:txBody>
@@ -27411,7 +27317,7 @@
                 </a:solidFill>
                 <a:latin typeface="Montserrat"/>
               </a:rPr>
-              <a:t>A2</a:t>
+              <a:t>57</a:t>
             </a:r>
           </a:p>
         </p:txBody>
@@ -27494,7 +27400,7 @@
         </p:nvSpPr>
         <p:spPr>
           <a:xfrm>
-            <a:off x="1168400" y="1357213"/>
+            <a:off x="1168400" y="1250553"/>
             <a:ext cx="10307828" cy="379710"/>
           </a:xfrm>
           <a:prstGeom prst="rect">
@@ -27520,7 +27426,7 @@
                 </a:solidFill>
                 <a:latin typeface="Montserrat"/>
               </a:rPr>
-              <a:t>Referências: ABA, TCC e intervenção</a:t>
+              <a:t>Referências: ABA e análise funcional</a:t>
             </a:r>
           </a:p>
         </p:txBody>
@@ -27533,7 +27439,64 @@
         </p:nvSpPr>
         <p:spPr>
           <a:xfrm>
-            <a:off x="1168400" y="1851223"/>
+            <a:off x="1168400" y="1744563"/>
+            <a:ext cx="10307828" cy="426641"/>
+          </a:xfrm>
+          <a:prstGeom prst="rect">
+            <a:avLst/>
+          </a:prstGeom>
+          <a:noFill/>
+        </p:spPr>
+        <p:txBody>
+          <a:bodyPr wrap="square" lIns="0" rIns="0" tIns="0" bIns="0" anchor="t">
+            <a:noAutofit/>
+          </a:bodyPr>
+          <a:lstStyle/>
+          <a:p>
+            <a:pPr algn="l">
+              <a:lnSpc>
+                <a:spcPct val="115000"/>
+              </a:lnSpc>
+            </a:pPr>
+            <a:r>
+              <a:rPr sz="1200" b="0" i="0">
+                <a:solidFill>
+                  <a:srgbClr val="2E3A4A"/>
+                </a:solidFill>
+                <a:latin typeface="Montserrat"/>
+              </a:rPr>
+              <a:t>Baer, D. M., Wolf, M. M., &amp; Risley, T. R. (1968). Some current dimensions of applied behavior analysis. </a:t>
+            </a:r>
+            <a:r>
+              <a:rPr sz="1200" b="0" i="1">
+                <a:solidFill>
+                  <a:srgbClr val="2E3A4A"/>
+                </a:solidFill>
+                <a:latin typeface="Montserrat"/>
+              </a:rPr>
+              <a:t>Journal of Applied Behavior Analysis, 1</a:t>
+            </a:r>
+            <a:r>
+              <a:rPr sz="1200" b="0" i="0">
+                <a:solidFill>
+                  <a:srgbClr val="2E3A4A"/>
+                </a:solidFill>
+                <a:latin typeface="Montserrat"/>
+              </a:rPr>
+              <a:t>(1), 91–97. https://doi.org/10.1901/jaba.1968.1-91</a:t>
+            </a:r>
+          </a:p>
+        </p:txBody>
+      </p:sp>
+      <p:sp>
+        <p:nvSpPr>
+          <p:cNvPr id="5" name="TextBox 4"/>
+          <p:cNvSpPr txBox="1"/>
+          <p:nvPr/>
+        </p:nvSpPr>
+        <p:spPr>
+          <a:xfrm>
+            <a:off x="1168400" y="2285504"/>
             <a:ext cx="10307828" cy="213320"/>
           </a:xfrm>
           <a:prstGeom prst="rect">
@@ -27559,7 +27522,7 @@
                 </a:solidFill>
                 <a:latin typeface="Montserrat"/>
               </a:rPr>
-              <a:t>Beck, J. S. (2021). </a:t>
+              <a:t>Cooper, J. O., Heron, T. E., &amp; Heward, W. L. (2020). </a:t>
             </a:r>
             <a:r>
               <a:rPr sz="1200" b="0" i="1">
@@ -27568,7 +27531,7 @@
                 </a:solidFill>
                 <a:latin typeface="Montserrat"/>
               </a:rPr>
-              <a:t>Cognitive behavior therapy: Basics and beyond</a:t>
+              <a:t>Applied behavior analysis</a:t>
             </a:r>
             <a:r>
               <a:rPr sz="1200" b="0" i="0">
@@ -27577,20 +27540,20 @@
                 </a:solidFill>
                 <a:latin typeface="Montserrat"/>
               </a:rPr>
-              <a:t> (3rd ed.). Guilford Press.</a:t>
-            </a:r>
-          </a:p>
-        </p:txBody>
-      </p:sp>
-      <p:sp>
-        <p:nvSpPr>
-          <p:cNvPr id="5" name="TextBox 4"/>
-          <p:cNvSpPr txBox="1"/>
-          <p:nvPr/>
-        </p:nvSpPr>
-        <p:spPr>
-          <a:xfrm>
-            <a:off x="1168400" y="2178844"/>
+              <a:t> (3rd ed.). Pearson.</a:t>
+            </a:r>
+          </a:p>
+        </p:txBody>
+      </p:sp>
+      <p:sp>
+        <p:nvSpPr>
+          <p:cNvPr id="6" name="TextBox 5"/>
+          <p:cNvSpPr txBox="1"/>
+          <p:nvPr/>
+        </p:nvSpPr>
+        <p:spPr>
+          <a:xfrm>
+            <a:off x="1168400" y="2613124"/>
             <a:ext cx="10307828" cy="426641"/>
           </a:xfrm>
           <a:prstGeom prst="rect">
@@ -27616,7 +27579,7 @@
                 </a:solidFill>
                 <a:latin typeface="Montserrat"/>
               </a:rPr>
-              <a:t>Carr, E. G., &amp; Durand, V. M. (1985). Reducing behavior problems through functional communication training. </a:t>
+              <a:t>Hanley, G. P. (2012). Functional assessment of problem behavior: Dispelling myths, overcoming implementation obstacles, and developing new lore. </a:t>
             </a:r>
             <a:r>
               <a:rPr sz="1200" b="0" i="1">
@@ -27625,7 +27588,7 @@
                 </a:solidFill>
                 <a:latin typeface="Montserrat"/>
               </a:rPr>
-              <a:t>Journal of Applied Behavior Analysis, 18</a:t>
+              <a:t>Behavior Analysis in Practice, 5</a:t>
             </a:r>
             <a:r>
               <a:rPr sz="1200" b="0" i="0">
@@ -27634,20 +27597,20 @@
                 </a:solidFill>
                 <a:latin typeface="Montserrat"/>
               </a:rPr>
-              <a:t>(2), 111–126. https://doi.org/10.1901/jaba.1985.18-111</a:t>
-            </a:r>
-          </a:p>
-        </p:txBody>
-      </p:sp>
-      <p:sp>
-        <p:nvSpPr>
-          <p:cNvPr id="6" name="TextBox 5"/>
-          <p:cNvSpPr txBox="1"/>
-          <p:nvPr/>
-        </p:nvSpPr>
-        <p:spPr>
-          <a:xfrm>
-            <a:off x="1168400" y="2719784"/>
+              <a:t>(1), 54–72. https://doi.org/10.1007/BF03391818</a:t>
+            </a:r>
+          </a:p>
+        </p:txBody>
+      </p:sp>
+      <p:sp>
+        <p:nvSpPr>
+          <p:cNvPr id="7" name="TextBox 6"/>
+          <p:cNvSpPr txBox="1"/>
+          <p:nvPr/>
+        </p:nvSpPr>
+        <p:spPr>
+          <a:xfrm>
+            <a:off x="1168400" y="3154065"/>
             <a:ext cx="10307828" cy="426641"/>
           </a:xfrm>
           <a:prstGeom prst="rect">
@@ -27673,7 +27636,7 @@
                 </a:solidFill>
                 <a:latin typeface="Montserrat"/>
               </a:rPr>
-              <a:t>Hayes, S. C., &amp; Hofmann, S. G. (2017). The third wave of cognitive behavioral therapy and the rise of process-based care. </a:t>
+              <a:t>Hanley, G. P., Iwata, B. A., &amp; McCord, B. E. (2003). Functional analysis of problem behavior: A review. </a:t>
             </a:r>
             <a:r>
               <a:rPr sz="1200" b="0" i="1">
@@ -27682,7 +27645,7 @@
                 </a:solidFill>
                 <a:latin typeface="Montserrat"/>
               </a:rPr>
-              <a:t>World Psychiatry, 16</a:t>
+              <a:t>Journal of Applied Behavior Analysis, 36</a:t>
             </a:r>
             <a:r>
               <a:rPr sz="1200" b="0" i="0">
@@ -27691,20 +27654,20 @@
                 </a:solidFill>
                 <a:latin typeface="Montserrat"/>
               </a:rPr>
-              <a:t>(3), 245–246. https://doi.org/10.1002/wps.20442</a:t>
-            </a:r>
-          </a:p>
-        </p:txBody>
-      </p:sp>
-      <p:sp>
-        <p:nvSpPr>
-          <p:cNvPr id="7" name="TextBox 6"/>
-          <p:cNvSpPr txBox="1"/>
-          <p:nvPr/>
-        </p:nvSpPr>
-        <p:spPr>
-          <a:xfrm>
-            <a:off x="1168400" y="3260725"/>
+              <a:t>(2), 147–185. https://doi.org/10.1901/jaba.2003.36-147</a:t>
+            </a:r>
+          </a:p>
+        </p:txBody>
+      </p:sp>
+      <p:sp>
+        <p:nvSpPr>
+          <p:cNvPr id="8" name="TextBox 7"/>
+          <p:cNvSpPr txBox="1"/>
+          <p:nvPr/>
+        </p:nvSpPr>
+        <p:spPr>
+          <a:xfrm>
+            <a:off x="1168400" y="3695005"/>
             <a:ext cx="10307828" cy="639961"/>
           </a:xfrm>
           <a:prstGeom prst="rect">
@@ -27730,7 +27693,7 @@
                 </a:solidFill>
                 <a:latin typeface="Montserrat"/>
               </a:rPr>
-              <a:t>Hume, K., Steinbrenner, J. R., Odom, S. L., et al. (2021). Evidence-based practices for children, youth, and young adults with autism: Third generation review. </a:t>
+              <a:t>Hanley, G. P., Jin, C. S., Vanselow, N. R., &amp; Hanratty, L. A. (2014). Producing meaningful improvements in problem behavior of children with autism via synthesized analyses and treatments. </a:t>
             </a:r>
             <a:r>
               <a:rPr sz="1200" b="0" i="1">
@@ -27739,7 +27702,7 @@
                 </a:solidFill>
                 <a:latin typeface="Montserrat"/>
               </a:rPr>
-              <a:t>Journal of Autism and Developmental Disorders, 51</a:t>
+              <a:t>Journal of Applied Behavior Analysis, 47</a:t>
             </a:r>
             <a:r>
               <a:rPr sz="1200" b="0" i="0">
@@ -27748,21 +27711,21 @@
                 </a:solidFill>
                 <a:latin typeface="Montserrat"/>
               </a:rPr>
-              <a:t>(11), 4013–4032. https://doi.org/10.1007/s10803-020-04844-2</a:t>
-            </a:r>
-          </a:p>
-        </p:txBody>
-      </p:sp>
-      <p:sp>
-        <p:nvSpPr>
-          <p:cNvPr id="8" name="TextBox 7"/>
-          <p:cNvSpPr txBox="1"/>
-          <p:nvPr/>
-        </p:nvSpPr>
-        <p:spPr>
-          <a:xfrm>
-            <a:off x="1168400" y="4014986"/>
-            <a:ext cx="10307828" cy="213320"/>
+              <a:t>(1), 16–36. https://doi.org/10.1002/jaba.106</a:t>
+            </a:r>
+          </a:p>
+        </p:txBody>
+      </p:sp>
+      <p:sp>
+        <p:nvSpPr>
+          <p:cNvPr id="9" name="TextBox 8"/>
+          <p:cNvSpPr txBox="1"/>
+          <p:nvPr/>
+        </p:nvSpPr>
+        <p:spPr>
+          <a:xfrm>
+            <a:off x="1168400" y="4449266"/>
+            <a:ext cx="10307828" cy="426641"/>
           </a:xfrm>
           <a:prstGeom prst="rect">
             <a:avLst/>
@@ -27787,7 +27750,7 @@
                 </a:solidFill>
                 <a:latin typeface="Montserrat"/>
               </a:rPr>
-              <a:t>Skinner, B. F. (1953). </a:t>
+              <a:t>Iwata, B. A., Dorsey, M. F., Slifer, K. J., Bauman, K. E., &amp; Richman, G. S. (1994). Toward a functional analysis of self-injury. </a:t>
             </a:r>
             <a:r>
               <a:rPr sz="1200" b="0" i="1">
@@ -27796,7 +27759,7 @@
                 </a:solidFill>
                 <a:latin typeface="Montserrat"/>
               </a:rPr>
-              <a:t>Science and human behavior</a:t>
+              <a:t>Journal of Applied Behavior Analysis, 27</a:t>
             </a:r>
             <a:r>
               <a:rPr sz="1200" b="0" i="0">
@@ -27805,20 +27768,20 @@
                 </a:solidFill>
                 <a:latin typeface="Montserrat"/>
               </a:rPr>
-              <a:t>. Macmillan.</a:t>
-            </a:r>
-          </a:p>
-        </p:txBody>
-      </p:sp>
-      <p:sp>
-        <p:nvSpPr>
-          <p:cNvPr id="9" name="TextBox 8"/>
-          <p:cNvSpPr txBox="1"/>
-          <p:nvPr/>
-        </p:nvSpPr>
-        <p:spPr>
-          <a:xfrm>
-            <a:off x="1168400" y="4342606"/>
+              <a:t>(2), 197–209. https://doi.org/10.1901/jaba.1994.27-197 (Original publicado em 1982)</a:t>
+            </a:r>
+          </a:p>
+        </p:txBody>
+      </p:sp>
+      <p:sp>
+        <p:nvSpPr>
+          <p:cNvPr id="10" name="TextBox 9"/>
+          <p:cNvSpPr txBox="1"/>
+          <p:nvPr/>
+        </p:nvSpPr>
+        <p:spPr>
+          <a:xfrm>
+            <a:off x="1168400" y="4990207"/>
             <a:ext cx="10307828" cy="426641"/>
           </a:xfrm>
           <a:prstGeom prst="rect">
@@ -27844,7 +27807,7 @@
                 </a:solidFill>
                 <a:latin typeface="Montserrat"/>
               </a:rPr>
-              <a:t>Tiger, J. H., Hanley, G. P., &amp; Bruzek, J. (2008). Functional communication training: A review and practical guide. </a:t>
+              <a:t>Laraway, S., Snycerski, S., Michael, J., &amp; Poling, A. (2003). Motivating operations and terms to describe them: Some further refinements. </a:t>
             </a:r>
             <a:r>
               <a:rPr sz="1200" b="0" i="1">
@@ -27853,7 +27816,7 @@
                 </a:solidFill>
                 <a:latin typeface="Montserrat"/>
               </a:rPr>
-              <a:t>Behavior Analysis in Practice, 1</a:t>
+              <a:t>Journal of Applied Behavior Analysis, 36</a:t>
             </a:r>
             <a:r>
               <a:rPr sz="1200" b="0" i="0">
@@ -27862,64 +27825,7 @@
                 </a:solidFill>
                 <a:latin typeface="Montserrat"/>
               </a:rPr>
-              <a:t>(1), 16–23. https://doi.org/10.1007/BF03391716</a:t>
-            </a:r>
-          </a:p>
-        </p:txBody>
-      </p:sp>
-      <p:sp>
-        <p:nvSpPr>
-          <p:cNvPr id="10" name="TextBox 9"/>
-          <p:cNvSpPr txBox="1"/>
-          <p:nvPr/>
-        </p:nvSpPr>
-        <p:spPr>
-          <a:xfrm>
-            <a:off x="1168400" y="4883547"/>
-            <a:ext cx="10307828" cy="426641"/>
-          </a:xfrm>
-          <a:prstGeom prst="rect">
-            <a:avLst/>
-          </a:prstGeom>
-          <a:noFill/>
-        </p:spPr>
-        <p:txBody>
-          <a:bodyPr wrap="square" lIns="0" rIns="0" tIns="0" bIns="0" anchor="t">
-            <a:noAutofit/>
-          </a:bodyPr>
-          <a:lstStyle/>
-          <a:p>
-            <a:pPr algn="l">
-              <a:lnSpc>
-                <a:spcPct val="115000"/>
-              </a:lnSpc>
-            </a:pPr>
-            <a:r>
-              <a:rPr sz="1200" b="0" i="0">
-                <a:solidFill>
-                  <a:srgbClr val="2E3A4A"/>
-                </a:solidFill>
-                <a:latin typeface="Montserrat"/>
-              </a:rPr>
-              <a:t>Wood, J. J., Kendall, P. C., Wood, K. S., et al. (2020). Cognitive behavioral treatments for anxiety in children with autism spectrum disorder: A randomized clinical trial. </a:t>
-            </a:r>
-            <a:r>
-              <a:rPr sz="1200" b="0" i="1">
-                <a:solidFill>
-                  <a:srgbClr val="2E3A4A"/>
-                </a:solidFill>
-                <a:latin typeface="Montserrat"/>
-              </a:rPr>
-              <a:t>JAMA Psychiatry, 77</a:t>
-            </a:r>
-            <a:r>
-              <a:rPr sz="1200" b="0" i="0">
-                <a:solidFill>
-                  <a:srgbClr val="2E3A4A"/>
-                </a:solidFill>
-                <a:latin typeface="Montserrat"/>
-              </a:rPr>
-              <a:t>(5), 474–483. https://doi.org/10.1001/jamapsychiatry.2019.4160</a:t>
+              <a:t>(3), 407–414. https://doi.org/10.1901/jaba.2003.36-407</a:t>
             </a:r>
           </a:p>
         </p:txBody>
@@ -27958,7 +27864,7 @@
                 </a:solidFill>
                 <a:latin typeface="Montserrat"/>
               </a:rPr>
-              <a:t>A3</a:t>
+              <a:t>58</a:t>
             </a:r>
           </a:p>
         </p:txBody>
@@ -28041,7 +27947,7 @@
         </p:nvSpPr>
         <p:spPr>
           <a:xfrm>
-            <a:off x="1168400" y="1955304"/>
+            <a:off x="1168400" y="1357213"/>
             <a:ext cx="10307828" cy="379710"/>
           </a:xfrm>
           <a:prstGeom prst="rect">
@@ -28067,7 +27973,7 @@
                 </a:solidFill>
                 <a:latin typeface="Montserrat"/>
               </a:rPr>
-              <a:t>Referências: estratégias naturalistas e evidência</a:t>
+              <a:t>Referências: ABA, TCC e intervenção</a:t>
             </a:r>
           </a:p>
         </p:txBody>
@@ -28080,7 +27986,64 @@
         </p:nvSpPr>
         <p:spPr>
           <a:xfrm>
-            <a:off x="1168400" y="2449314"/>
+            <a:off x="1168400" y="1851223"/>
+            <a:ext cx="10307828" cy="213320"/>
+          </a:xfrm>
+          <a:prstGeom prst="rect">
+            <a:avLst/>
+          </a:prstGeom>
+          <a:noFill/>
+        </p:spPr>
+        <p:txBody>
+          <a:bodyPr wrap="square" lIns="0" rIns="0" tIns="0" bIns="0" anchor="t">
+            <a:noAutofit/>
+          </a:bodyPr>
+          <a:lstStyle/>
+          <a:p>
+            <a:pPr algn="l">
+              <a:lnSpc>
+                <a:spcPct val="115000"/>
+              </a:lnSpc>
+            </a:pPr>
+            <a:r>
+              <a:rPr sz="1200" b="0" i="0">
+                <a:solidFill>
+                  <a:srgbClr val="2E3A4A"/>
+                </a:solidFill>
+                <a:latin typeface="Montserrat"/>
+              </a:rPr>
+              <a:t>Beck, J. S. (2021). </a:t>
+            </a:r>
+            <a:r>
+              <a:rPr sz="1200" b="0" i="1">
+                <a:solidFill>
+                  <a:srgbClr val="2E3A4A"/>
+                </a:solidFill>
+                <a:latin typeface="Montserrat"/>
+              </a:rPr>
+              <a:t>Cognitive behavior therapy: Basics and beyond</a:t>
+            </a:r>
+            <a:r>
+              <a:rPr sz="1200" b="0" i="0">
+                <a:solidFill>
+                  <a:srgbClr val="2E3A4A"/>
+                </a:solidFill>
+                <a:latin typeface="Montserrat"/>
+              </a:rPr>
+              <a:t> (3rd ed.). Guilford Press.</a:t>
+            </a:r>
+          </a:p>
+        </p:txBody>
+      </p:sp>
+      <p:sp>
+        <p:nvSpPr>
+          <p:cNvPr id="5" name="TextBox 4"/>
+          <p:cNvSpPr txBox="1"/>
+          <p:nvPr/>
+        </p:nvSpPr>
+        <p:spPr>
+          <a:xfrm>
+            <a:off x="1168400" y="2178844"/>
             <a:ext cx="10307828" cy="426641"/>
           </a:xfrm>
           <a:prstGeom prst="rect">
@@ -28106,7 +28069,7 @@
                 </a:solidFill>
                 <a:latin typeface="Montserrat"/>
               </a:rPr>
-              <a:t>Sandbank, M., Bottema-Beutel, K., Crowley, S., et al. (2020). Project AIM: Autism intervention meta-analysis for studies of young children. </a:t>
+              <a:t>Carr, E. G., &amp; Durand, V. M. (1985). Reducing behavior problems through functional communication training. </a:t>
             </a:r>
             <a:r>
               <a:rPr sz="1200" b="0" i="1">
@@ -28115,7 +28078,7 @@
                 </a:solidFill>
                 <a:latin typeface="Montserrat"/>
               </a:rPr>
-              <a:t>Psychological Bulletin, 146</a:t>
+              <a:t>Journal of Applied Behavior Analysis, 18</a:t>
             </a:r>
             <a:r>
               <a:rPr sz="1200" b="0" i="0">
@@ -28124,20 +28087,20 @@
                 </a:solidFill>
                 <a:latin typeface="Montserrat"/>
               </a:rPr>
-              <a:t>(1), 1–29. https://doi.org/10.1037/bul0000215</a:t>
-            </a:r>
-          </a:p>
-        </p:txBody>
-      </p:sp>
-      <p:sp>
-        <p:nvSpPr>
-          <p:cNvPr id="5" name="TextBox 4"/>
-          <p:cNvSpPr txBox="1"/>
-          <p:nvPr/>
-        </p:nvSpPr>
-        <p:spPr>
-          <a:xfrm>
-            <a:off x="1168400" y="2990255"/>
+              <a:t>(2), 111–126. https://doi.org/10.1901/jaba.1985.18-111</a:t>
+            </a:r>
+          </a:p>
+        </p:txBody>
+      </p:sp>
+      <p:sp>
+        <p:nvSpPr>
+          <p:cNvPr id="6" name="TextBox 5"/>
+          <p:cNvSpPr txBox="1"/>
+          <p:nvPr/>
+        </p:nvSpPr>
+        <p:spPr>
+          <a:xfrm>
+            <a:off x="1168400" y="2719784"/>
             <a:ext cx="10307828" cy="426641"/>
           </a:xfrm>
           <a:prstGeom prst="rect">
@@ -28163,7 +28126,7 @@
                 </a:solidFill>
                 <a:latin typeface="Montserrat"/>
               </a:rPr>
-              <a:t>Sandbank, M., Bottema-Beutel, K., Crowley LaPoint, S., et al. (2023). Autism intervention meta-analysis of early childhood studies (Project AIM): Updated systematic review and secondary analysis. </a:t>
+              <a:t>Hayes, S. C., &amp; Hofmann, S. G. (2017). The third wave of cognitive behavioral therapy and the rise of process-based care. </a:t>
             </a:r>
             <a:r>
               <a:rPr sz="1200" b="0" i="1">
@@ -28172,7 +28135,7 @@
                 </a:solidFill>
                 <a:latin typeface="Montserrat"/>
               </a:rPr>
-              <a:t>BMJ, 383</a:t>
+              <a:t>World Psychiatry, 16</a:t>
             </a:r>
             <a:r>
               <a:rPr sz="1200" b="0" i="0">
@@ -28181,20 +28144,20 @@
                 </a:solidFill>
                 <a:latin typeface="Montserrat"/>
               </a:rPr>
-              <a:t>, e076733. https://doi.org/10.1136/bmj-2023-076733</a:t>
-            </a:r>
-          </a:p>
-        </p:txBody>
-      </p:sp>
-      <p:sp>
-        <p:nvSpPr>
-          <p:cNvPr id="6" name="TextBox 5"/>
-          <p:cNvSpPr txBox="1"/>
-          <p:nvPr/>
-        </p:nvSpPr>
-        <p:spPr>
-          <a:xfrm>
-            <a:off x="1168400" y="3531195"/>
+              <a:t>(3), 245–246. https://doi.org/10.1002/wps.20442</a:t>
+            </a:r>
+          </a:p>
+        </p:txBody>
+      </p:sp>
+      <p:sp>
+        <p:nvSpPr>
+          <p:cNvPr id="7" name="TextBox 6"/>
+          <p:cNvSpPr txBox="1"/>
+          <p:nvPr/>
+        </p:nvSpPr>
+        <p:spPr>
+          <a:xfrm>
+            <a:off x="1168400" y="3260725"/>
             <a:ext cx="10307828" cy="639961"/>
           </a:xfrm>
           <a:prstGeom prst="rect">
@@ -28220,7 +28183,7 @@
                 </a:solidFill>
                 <a:latin typeface="Montserrat"/>
               </a:rPr>
-              <a:t>Schreibman, L., Dawson, G., Stahmer, A. C., et al. (2015). Naturalistic developmental behavioral interventions: Empirically validated treatments for autism spectrum disorder. </a:t>
+              <a:t>Hume, K., Steinbrenner, J. R., Odom, S. L., et al. (2021). Evidence-based practices for children, youth, and young adults with autism: Third generation review. </a:t>
             </a:r>
             <a:r>
               <a:rPr sz="1200" b="0" i="1">
@@ -28229,7 +28192,7 @@
                 </a:solidFill>
                 <a:latin typeface="Montserrat"/>
               </a:rPr>
-              <a:t>Journal of Autism and Developmental Disorders, 45</a:t>
+              <a:t>Journal of Autism and Developmental Disorders, 51</a:t>
             </a:r>
             <a:r>
               <a:rPr sz="1200" b="0" i="0">
@@ -28238,20 +28201,77 @@
                 </a:solidFill>
                 <a:latin typeface="Montserrat"/>
               </a:rPr>
-              <a:t>(8), 2411–2428. https://doi.org/10.1007/s10803-015-2407-8</a:t>
-            </a:r>
-          </a:p>
-        </p:txBody>
-      </p:sp>
-      <p:sp>
-        <p:nvSpPr>
-          <p:cNvPr id="7" name="TextBox 6"/>
-          <p:cNvSpPr txBox="1"/>
-          <p:nvPr/>
-        </p:nvSpPr>
-        <p:spPr>
-          <a:xfrm>
-            <a:off x="1168400" y="4285456"/>
+              <a:t>(11), 4013–4032. https://doi.org/10.1007/s10803-020-04844-2</a:t>
+            </a:r>
+          </a:p>
+        </p:txBody>
+      </p:sp>
+      <p:sp>
+        <p:nvSpPr>
+          <p:cNvPr id="8" name="TextBox 7"/>
+          <p:cNvSpPr txBox="1"/>
+          <p:nvPr/>
+        </p:nvSpPr>
+        <p:spPr>
+          <a:xfrm>
+            <a:off x="1168400" y="4014986"/>
+            <a:ext cx="10307828" cy="213320"/>
+          </a:xfrm>
+          <a:prstGeom prst="rect">
+            <a:avLst/>
+          </a:prstGeom>
+          <a:noFill/>
+        </p:spPr>
+        <p:txBody>
+          <a:bodyPr wrap="square" lIns="0" rIns="0" tIns="0" bIns="0" anchor="t">
+            <a:noAutofit/>
+          </a:bodyPr>
+          <a:lstStyle/>
+          <a:p>
+            <a:pPr algn="l">
+              <a:lnSpc>
+                <a:spcPct val="115000"/>
+              </a:lnSpc>
+            </a:pPr>
+            <a:r>
+              <a:rPr sz="1200" b="0" i="0">
+                <a:solidFill>
+                  <a:srgbClr val="2E3A4A"/>
+                </a:solidFill>
+                <a:latin typeface="Montserrat"/>
+              </a:rPr>
+              <a:t>Skinner, B. F. (1953). </a:t>
+            </a:r>
+            <a:r>
+              <a:rPr sz="1200" b="0" i="1">
+                <a:solidFill>
+                  <a:srgbClr val="2E3A4A"/>
+                </a:solidFill>
+                <a:latin typeface="Montserrat"/>
+              </a:rPr>
+              <a:t>Science and human behavior</a:t>
+            </a:r>
+            <a:r>
+              <a:rPr sz="1200" b="0" i="0">
+                <a:solidFill>
+                  <a:srgbClr val="2E3A4A"/>
+                </a:solidFill>
+                <a:latin typeface="Montserrat"/>
+              </a:rPr>
+              <a:t>. Macmillan.</a:t>
+            </a:r>
+          </a:p>
+        </p:txBody>
+      </p:sp>
+      <p:sp>
+        <p:nvSpPr>
+          <p:cNvPr id="9" name="TextBox 8"/>
+          <p:cNvSpPr txBox="1"/>
+          <p:nvPr/>
+        </p:nvSpPr>
+        <p:spPr>
+          <a:xfrm>
+            <a:off x="1168400" y="4342606"/>
             <a:ext cx="10307828" cy="426641"/>
           </a:xfrm>
           <a:prstGeom prst="rect">
@@ -28277,7 +28297,7 @@
                 </a:solidFill>
                 <a:latin typeface="Montserrat"/>
               </a:rPr>
-              <a:t>Stokes, T. F., &amp; Baer, D. M. (1977). An implicit technology of generalization. </a:t>
+              <a:t>Tiger, J. H., Hanley, G. P., &amp; Bruzek, J. (2008). Functional communication training: A review and practical guide. </a:t>
             </a:r>
             <a:r>
               <a:rPr sz="1200" b="0" i="1">
@@ -28286,7 +28306,7 @@
                 </a:solidFill>
                 <a:latin typeface="Montserrat"/>
               </a:rPr>
-              <a:t>Journal of Applied Behavior Analysis, 10</a:t>
+              <a:t>Behavior Analysis in Practice, 1</a:t>
             </a:r>
             <a:r>
               <a:rPr sz="1200" b="0" i="0">
@@ -28295,14 +28315,71 @@
                 </a:solidFill>
                 <a:latin typeface="Montserrat"/>
               </a:rPr>
-              <a:t>(2), 349–367. https://doi.org/10.1901/jaba.1977.10-349</a:t>
-            </a:r>
-          </a:p>
-        </p:txBody>
-      </p:sp>
-      <p:sp>
-        <p:nvSpPr>
-          <p:cNvPr id="8" name="TextBox 7"/>
+              <a:t>(1), 16–23. https://doi.org/10.1007/BF03391716</a:t>
+            </a:r>
+          </a:p>
+        </p:txBody>
+      </p:sp>
+      <p:sp>
+        <p:nvSpPr>
+          <p:cNvPr id="10" name="TextBox 9"/>
+          <p:cNvSpPr txBox="1"/>
+          <p:nvPr/>
+        </p:nvSpPr>
+        <p:spPr>
+          <a:xfrm>
+            <a:off x="1168400" y="4883547"/>
+            <a:ext cx="10307828" cy="426641"/>
+          </a:xfrm>
+          <a:prstGeom prst="rect">
+            <a:avLst/>
+          </a:prstGeom>
+          <a:noFill/>
+        </p:spPr>
+        <p:txBody>
+          <a:bodyPr wrap="square" lIns="0" rIns="0" tIns="0" bIns="0" anchor="t">
+            <a:noAutofit/>
+          </a:bodyPr>
+          <a:lstStyle/>
+          <a:p>
+            <a:pPr algn="l">
+              <a:lnSpc>
+                <a:spcPct val="115000"/>
+              </a:lnSpc>
+            </a:pPr>
+            <a:r>
+              <a:rPr sz="1200" b="0" i="0">
+                <a:solidFill>
+                  <a:srgbClr val="2E3A4A"/>
+                </a:solidFill>
+                <a:latin typeface="Montserrat"/>
+              </a:rPr>
+              <a:t>Wood, J. J., Kendall, P. C., Wood, K. S., et al. (2020). Cognitive behavioral treatments for anxiety in children with autism spectrum disorder: A randomized clinical trial. </a:t>
+            </a:r>
+            <a:r>
+              <a:rPr sz="1200" b="0" i="1">
+                <a:solidFill>
+                  <a:srgbClr val="2E3A4A"/>
+                </a:solidFill>
+                <a:latin typeface="Montserrat"/>
+              </a:rPr>
+              <a:t>JAMA Psychiatry, 77</a:t>
+            </a:r>
+            <a:r>
+              <a:rPr sz="1200" b="0" i="0">
+                <a:solidFill>
+                  <a:srgbClr val="2E3A4A"/>
+                </a:solidFill>
+                <a:latin typeface="Montserrat"/>
+              </a:rPr>
+              <a:t>(5), 474–483. https://doi.org/10.1001/jamapsychiatry.2019.4160</a:t>
+            </a:r>
+          </a:p>
+        </p:txBody>
+      </p:sp>
+      <p:sp>
+        <p:nvSpPr>
+          <p:cNvPr id="11" name="TextBox 10"/>
           <p:cNvSpPr txBox="1"/>
           <p:nvPr/>
         </p:nvSpPr>
@@ -28334,7 +28411,7 @@
                 </a:solidFill>
                 <a:latin typeface="Montserrat"/>
               </a:rPr>
-              <a:t>A4</a:t>
+              <a:t>59</a:t>
             </a:r>
           </a:p>
         </p:txBody>
@@ -28599,6 +28676,382 @@
         </p:nvSpPr>
         <p:spPr>
           <a:xfrm>
+            <a:off x="1168400" y="1955304"/>
+            <a:ext cx="10307828" cy="379710"/>
+          </a:xfrm>
+          <a:prstGeom prst="rect">
+            <a:avLst/>
+          </a:prstGeom>
+          <a:noFill/>
+        </p:spPr>
+        <p:txBody>
+          <a:bodyPr wrap="square" lIns="0" rIns="0" tIns="0" bIns="0" anchor="t">
+            <a:noAutofit/>
+          </a:bodyPr>
+          <a:lstStyle/>
+          <a:p>
+            <a:pPr algn="l">
+              <a:lnSpc>
+                <a:spcPct val="94000"/>
+              </a:lnSpc>
+            </a:pPr>
+            <a:r>
+              <a:rPr sz="2600" b="1" i="0">
+                <a:solidFill>
+                  <a:srgbClr val="1B2F4B"/>
+                </a:solidFill>
+                <a:latin typeface="Montserrat"/>
+              </a:rPr>
+              <a:t>Referências: estratégias naturalistas e evidência</a:t>
+            </a:r>
+          </a:p>
+        </p:txBody>
+      </p:sp>
+      <p:sp>
+        <p:nvSpPr>
+          <p:cNvPr id="4" name="TextBox 3"/>
+          <p:cNvSpPr txBox="1"/>
+          <p:nvPr/>
+        </p:nvSpPr>
+        <p:spPr>
+          <a:xfrm>
+            <a:off x="1168400" y="2449314"/>
+            <a:ext cx="10307828" cy="426641"/>
+          </a:xfrm>
+          <a:prstGeom prst="rect">
+            <a:avLst/>
+          </a:prstGeom>
+          <a:noFill/>
+        </p:spPr>
+        <p:txBody>
+          <a:bodyPr wrap="square" lIns="0" rIns="0" tIns="0" bIns="0" anchor="t">
+            <a:noAutofit/>
+          </a:bodyPr>
+          <a:lstStyle/>
+          <a:p>
+            <a:pPr algn="l">
+              <a:lnSpc>
+                <a:spcPct val="115000"/>
+              </a:lnSpc>
+            </a:pPr>
+            <a:r>
+              <a:rPr sz="1200" b="0" i="0">
+                <a:solidFill>
+                  <a:srgbClr val="2E3A4A"/>
+                </a:solidFill>
+                <a:latin typeface="Montserrat"/>
+              </a:rPr>
+              <a:t>Sandbank, M., Bottema-Beutel, K., Crowley, S., et al. (2020). Project AIM: Autism intervention meta-analysis for studies of young children. </a:t>
+            </a:r>
+            <a:r>
+              <a:rPr sz="1200" b="0" i="1">
+                <a:solidFill>
+                  <a:srgbClr val="2E3A4A"/>
+                </a:solidFill>
+                <a:latin typeface="Montserrat"/>
+              </a:rPr>
+              <a:t>Psychological Bulletin, 146</a:t>
+            </a:r>
+            <a:r>
+              <a:rPr sz="1200" b="0" i="0">
+                <a:solidFill>
+                  <a:srgbClr val="2E3A4A"/>
+                </a:solidFill>
+                <a:latin typeface="Montserrat"/>
+              </a:rPr>
+              <a:t>(1), 1–29. https://doi.org/10.1037/bul0000215</a:t>
+            </a:r>
+          </a:p>
+        </p:txBody>
+      </p:sp>
+      <p:sp>
+        <p:nvSpPr>
+          <p:cNvPr id="5" name="TextBox 4"/>
+          <p:cNvSpPr txBox="1"/>
+          <p:nvPr/>
+        </p:nvSpPr>
+        <p:spPr>
+          <a:xfrm>
+            <a:off x="1168400" y="2990255"/>
+            <a:ext cx="10307828" cy="426641"/>
+          </a:xfrm>
+          <a:prstGeom prst="rect">
+            <a:avLst/>
+          </a:prstGeom>
+          <a:noFill/>
+        </p:spPr>
+        <p:txBody>
+          <a:bodyPr wrap="square" lIns="0" rIns="0" tIns="0" bIns="0" anchor="t">
+            <a:noAutofit/>
+          </a:bodyPr>
+          <a:lstStyle/>
+          <a:p>
+            <a:pPr algn="l">
+              <a:lnSpc>
+                <a:spcPct val="115000"/>
+              </a:lnSpc>
+            </a:pPr>
+            <a:r>
+              <a:rPr sz="1200" b="0" i="0">
+                <a:solidFill>
+                  <a:srgbClr val="2E3A4A"/>
+                </a:solidFill>
+                <a:latin typeface="Montserrat"/>
+              </a:rPr>
+              <a:t>Sandbank, M., Bottema-Beutel, K., Crowley LaPoint, S., et al. (2023). Autism intervention meta-analysis of early childhood studies (Project AIM): Updated systematic review and secondary analysis. </a:t>
+            </a:r>
+            <a:r>
+              <a:rPr sz="1200" b="0" i="1">
+                <a:solidFill>
+                  <a:srgbClr val="2E3A4A"/>
+                </a:solidFill>
+                <a:latin typeface="Montserrat"/>
+              </a:rPr>
+              <a:t>BMJ, 383</a:t>
+            </a:r>
+            <a:r>
+              <a:rPr sz="1200" b="0" i="0">
+                <a:solidFill>
+                  <a:srgbClr val="2E3A4A"/>
+                </a:solidFill>
+                <a:latin typeface="Montserrat"/>
+              </a:rPr>
+              <a:t>, e076733. https://doi.org/10.1136/bmj-2023-076733</a:t>
+            </a:r>
+          </a:p>
+        </p:txBody>
+      </p:sp>
+      <p:sp>
+        <p:nvSpPr>
+          <p:cNvPr id="6" name="TextBox 5"/>
+          <p:cNvSpPr txBox="1"/>
+          <p:nvPr/>
+        </p:nvSpPr>
+        <p:spPr>
+          <a:xfrm>
+            <a:off x="1168400" y="3531195"/>
+            <a:ext cx="10307828" cy="639961"/>
+          </a:xfrm>
+          <a:prstGeom prst="rect">
+            <a:avLst/>
+          </a:prstGeom>
+          <a:noFill/>
+        </p:spPr>
+        <p:txBody>
+          <a:bodyPr wrap="square" lIns="0" rIns="0" tIns="0" bIns="0" anchor="t">
+            <a:noAutofit/>
+          </a:bodyPr>
+          <a:lstStyle/>
+          <a:p>
+            <a:pPr algn="l">
+              <a:lnSpc>
+                <a:spcPct val="115000"/>
+              </a:lnSpc>
+            </a:pPr>
+            <a:r>
+              <a:rPr sz="1200" b="0" i="0">
+                <a:solidFill>
+                  <a:srgbClr val="2E3A4A"/>
+                </a:solidFill>
+                <a:latin typeface="Montserrat"/>
+              </a:rPr>
+              <a:t>Schreibman, L., Dawson, G., Stahmer, A. C., et al. (2015). Naturalistic developmental behavioral interventions: Empirically validated treatments for autism spectrum disorder. </a:t>
+            </a:r>
+            <a:r>
+              <a:rPr sz="1200" b="0" i="1">
+                <a:solidFill>
+                  <a:srgbClr val="2E3A4A"/>
+                </a:solidFill>
+                <a:latin typeface="Montserrat"/>
+              </a:rPr>
+              <a:t>Journal of Autism and Developmental Disorders, 45</a:t>
+            </a:r>
+            <a:r>
+              <a:rPr sz="1200" b="0" i="0">
+                <a:solidFill>
+                  <a:srgbClr val="2E3A4A"/>
+                </a:solidFill>
+                <a:latin typeface="Montserrat"/>
+              </a:rPr>
+              <a:t>(8), 2411–2428. https://doi.org/10.1007/s10803-015-2407-8</a:t>
+            </a:r>
+          </a:p>
+        </p:txBody>
+      </p:sp>
+      <p:sp>
+        <p:nvSpPr>
+          <p:cNvPr id="7" name="TextBox 6"/>
+          <p:cNvSpPr txBox="1"/>
+          <p:nvPr/>
+        </p:nvSpPr>
+        <p:spPr>
+          <a:xfrm>
+            <a:off x="1168400" y="4285456"/>
+            <a:ext cx="10307828" cy="426641"/>
+          </a:xfrm>
+          <a:prstGeom prst="rect">
+            <a:avLst/>
+          </a:prstGeom>
+          <a:noFill/>
+        </p:spPr>
+        <p:txBody>
+          <a:bodyPr wrap="square" lIns="0" rIns="0" tIns="0" bIns="0" anchor="t">
+            <a:noAutofit/>
+          </a:bodyPr>
+          <a:lstStyle/>
+          <a:p>
+            <a:pPr algn="l">
+              <a:lnSpc>
+                <a:spcPct val="115000"/>
+              </a:lnSpc>
+            </a:pPr>
+            <a:r>
+              <a:rPr sz="1200" b="0" i="0">
+                <a:solidFill>
+                  <a:srgbClr val="2E3A4A"/>
+                </a:solidFill>
+                <a:latin typeface="Montserrat"/>
+              </a:rPr>
+              <a:t>Stokes, T. F., &amp; Baer, D. M. (1977). An implicit technology of generalization. </a:t>
+            </a:r>
+            <a:r>
+              <a:rPr sz="1200" b="0" i="1">
+                <a:solidFill>
+                  <a:srgbClr val="2E3A4A"/>
+                </a:solidFill>
+                <a:latin typeface="Montserrat"/>
+              </a:rPr>
+              <a:t>Journal of Applied Behavior Analysis, 10</a:t>
+            </a:r>
+            <a:r>
+              <a:rPr sz="1200" b="0" i="0">
+                <a:solidFill>
+                  <a:srgbClr val="2E3A4A"/>
+                </a:solidFill>
+                <a:latin typeface="Montserrat"/>
+              </a:rPr>
+              <a:t>(2), 349–367. https://doi.org/10.1901/jaba.1977.10-349</a:t>
+            </a:r>
+          </a:p>
+        </p:txBody>
+      </p:sp>
+      <p:sp>
+        <p:nvSpPr>
+          <p:cNvPr id="8" name="TextBox 7"/>
+          <p:cNvSpPr txBox="1"/>
+          <p:nvPr/>
+        </p:nvSpPr>
+        <p:spPr>
+          <a:xfrm>
+            <a:off x="10820400" y="6343650"/>
+            <a:ext cx="784860" cy="184150"/>
+          </a:xfrm>
+          <a:prstGeom prst="rect">
+            <a:avLst/>
+          </a:prstGeom>
+          <a:noFill/>
+        </p:spPr>
+        <p:txBody>
+          <a:bodyPr wrap="square" lIns="0" rIns="0" tIns="0" bIns="0" anchor="t">
+            <a:noAutofit/>
+          </a:bodyPr>
+          <a:lstStyle/>
+          <a:p>
+            <a:pPr algn="r">
+              <a:lnSpc>
+                <a:spcPct val="98000"/>
+              </a:lnSpc>
+            </a:pPr>
+            <a:r>
+              <a:rPr sz="1200" b="0" i="0">
+                <a:solidFill>
+                  <a:srgbClr val="66717F"/>
+                </a:solidFill>
+                <a:latin typeface="Montserrat"/>
+              </a:rPr>
+              <a:t>60</a:t>
+            </a:r>
+          </a:p>
+        </p:txBody>
+      </p:sp>
+    </p:spTree>
+  </p:cSld>
+  <p:clrMapOvr>
+    <a:masterClrMapping/>
+  </p:clrMapOvr>
+</p:sld>
+</file>
+
+<file path=ppt/slides/slide61.xml><?xml version="1.0" encoding="utf-8"?>
+<p:sld xmlns:a="http://schemas.openxmlformats.org/drawingml/2006/main" xmlns:p="http://schemas.openxmlformats.org/presentationml/2006/main" xmlns:r="http://schemas.openxmlformats.org/officeDocument/2006/relationships">
+  <p:cSld>
+    <p:bg>
+      <p:bgPr>
+        <a:solidFill>
+          <a:srgbClr val="FCFCFB"/>
+        </a:solidFill>
+        <a:effectLst/>
+      </p:bgPr>
+    </p:bg>
+    <p:spTree>
+      <p:nvGrpSpPr>
+        <p:cNvPr id="1" name=""/>
+        <p:cNvGrpSpPr/>
+        <p:nvPr/>
+      </p:nvGrpSpPr>
+      <p:grpSpPr/>
+      <p:sp>
+        <p:nvSpPr>
+          <p:cNvPr id="2" name="Rectangle 1"/>
+          <p:cNvSpPr/>
+          <p:nvPr/>
+        </p:nvSpPr>
+        <p:spPr>
+          <a:xfrm>
+            <a:off x="0" y="0"/>
+            <a:ext cx="177800" cy="6858000"/>
+          </a:xfrm>
+          <a:prstGeom prst="rect">
+            <a:avLst/>
+          </a:prstGeom>
+          <a:solidFill>
+            <a:srgbClr val="0F7C86"/>
+          </a:solidFill>
+          <a:ln>
+            <a:noFill/>
+          </a:ln>
+          <a:effectLst/>
+        </p:spPr>
+        <p:style>
+          <a:lnRef idx="1">
+            <a:schemeClr val="accent1"/>
+          </a:lnRef>
+          <a:fillRef idx="3">
+            <a:schemeClr val="accent1"/>
+          </a:fillRef>
+          <a:effectRef idx="2">
+            <a:schemeClr val="accent1"/>
+          </a:effectRef>
+          <a:fontRef idx="minor">
+            <a:schemeClr val="lt1"/>
+          </a:fontRef>
+        </p:style>
+        <p:txBody>
+          <a:bodyPr rtlCol="0" anchor="ctr"/>
+          <a:lstStyle/>
+          <a:p>
+            <a:pPr algn="ctr"/>
+          </a:p>
+        </p:txBody>
+      </p:sp>
+      <p:sp>
+        <p:nvSpPr>
+          <p:cNvPr id="3" name="TextBox 2"/>
+          <p:cNvSpPr txBox="1"/>
+          <p:nvPr/>
+        </p:nvSpPr>
+        <p:spPr>
+          <a:xfrm>
             <a:off x="1168400" y="1684834"/>
             <a:ext cx="10307828" cy="379710"/>
           </a:xfrm>
@@ -28949,7 +29402,7 @@
                 </a:solidFill>
                 <a:latin typeface="Montserrat"/>
               </a:rPr>
-              <a:t>A5</a:t>
+              <a:t>61</a:t>
             </a:r>
           </a:p>
         </p:txBody>
@@ -29032,7 +29485,7 @@
         </p:nvSpPr>
         <p:spPr>
           <a:xfrm>
-            <a:off x="1168400" y="1490563"/>
+            <a:off x="1168400" y="1161752"/>
             <a:ext cx="10307828" cy="963811"/>
           </a:xfrm>
           <a:prstGeom prst="rect">
@@ -29058,7 +29511,7 @@
                 </a:solidFill>
                 <a:latin typeface="Montserrat"/>
               </a:rPr>
-              <a:t>O diagnóstico de TEA se apoia em dois domínios</a:t>
+              <a:t>O diagnóstico de TEA se apoia em dois domínios (áreas)</a:t>
             </a:r>
           </a:p>
         </p:txBody>
@@ -29071,7 +29524,7 @@
         </p:nvSpPr>
         <p:spPr>
           <a:xfrm>
-            <a:off x="1168400" y="2784574"/>
+            <a:off x="1168400" y="2455763"/>
             <a:ext cx="4839970" cy="319980"/>
           </a:xfrm>
           <a:prstGeom prst="rect">
@@ -29110,7 +29563,7 @@
         </p:nvSpPr>
         <p:spPr>
           <a:xfrm>
-            <a:off x="1168400" y="3193455"/>
+            <a:off x="1168400" y="2864644"/>
             <a:ext cx="4839970" cy="675481"/>
           </a:xfrm>
           <a:prstGeom prst="rect">
@@ -29149,7 +29602,7 @@
         </p:nvSpPr>
         <p:spPr>
           <a:xfrm>
-            <a:off x="6477000" y="2784574"/>
+            <a:off x="6477000" y="2455763"/>
             <a:ext cx="4839970" cy="319980"/>
           </a:xfrm>
           <a:prstGeom prst="rect">
@@ -29188,8 +29641,8 @@
         </p:nvSpPr>
         <p:spPr>
           <a:xfrm>
-            <a:off x="6477000" y="3193455"/>
-            <a:ext cx="4839970" cy="1013222"/>
+            <a:off x="6477000" y="2864644"/>
+            <a:ext cx="4839970" cy="1350962"/>
           </a:xfrm>
           <a:prstGeom prst="rect">
             <a:avLst/>
@@ -29214,7 +29667,7 @@
                 </a:solidFill>
                 <a:latin typeface="Montserrat"/>
               </a:rPr>
-              <a:t>De comportamento, interesses ou atividades, incluindo respostas sensoriais.</a:t>
+              <a:t>De comportamento, interesses ou atividades, incluindo respostas sensoriais (reações a sons, luzes, texturas).</a:t>
             </a:r>
           </a:p>
         </p:txBody>
@@ -29227,8 +29680,8 @@
         </p:nvSpPr>
         <p:spPr>
           <a:xfrm>
-            <a:off x="1168400" y="4536877"/>
-            <a:ext cx="10307828" cy="639961"/>
+            <a:off x="1168400" y="4545806"/>
+            <a:ext cx="10307828" cy="959941"/>
           </a:xfrm>
           <a:prstGeom prst="rect">
             <a:avLst/>
@@ -29253,7 +29706,7 @@
                 </a:solidFill>
                 <a:latin typeface="Montserrat"/>
               </a:rPr>
-              <a:t>Os sinais aparecem no início do desenvolvimento e têm impacto significativo no funcionamento.</a:t>
+              <a:t>Os sinais aparecem no início do desenvolvimento e têm impacto significativo no funcionamento (DSM-5-TR: manual de diagnóstico da Associação Americana de Psiquiatria).</a:t>
             </a:r>
           </a:p>
         </p:txBody>
@@ -29414,7 +29867,7 @@
         </p:nvSpPr>
         <p:spPr>
           <a:xfrm>
-            <a:off x="1168400" y="1285577"/>
+            <a:off x="1168400" y="1134467"/>
             <a:ext cx="10307828" cy="481905"/>
           </a:xfrm>
           <a:prstGeom prst="rect">
@@ -29453,8 +29906,8 @@
         </p:nvSpPr>
         <p:spPr>
           <a:xfrm>
-            <a:off x="1168400" y="2021483"/>
-            <a:ext cx="10307828" cy="604441"/>
+            <a:off x="1168400" y="1870373"/>
+            <a:ext cx="10307828" cy="906661"/>
           </a:xfrm>
           <a:prstGeom prst="rect">
             <a:avLst/>
@@ -29488,7 +29941,7 @@
                 </a:solidFill>
                 <a:latin typeface="Montserrat"/>
               </a:rPr>
-              <a:t> com ou sem deficiência intelectual, com ou sem comprometimento de linguagem, condições associadas.</a:t>
+              <a:t> informações que se somam ao diagnóstico: com ou sem deficiência intelectual, com ou sem comprometimento de linguagem, condições associadas (ex.: epilepsia).</a:t>
             </a:r>
           </a:p>
         </p:txBody>
@@ -29502,7 +29955,7 @@
           <p:nvPr/>
         </p:nvGraphicFramePr>
         <p:xfrm>
-          <a:off x="1168400" y="2879923"/>
+          <a:off x="1168400" y="3031034"/>
           <a:ext cx="10007600" cy="1981200"/>
         </p:xfrm>
         <a:graphic>
@@ -29751,7 +30204,7 @@
         </p:nvSpPr>
         <p:spPr>
           <a:xfrm>
-            <a:off x="1168400" y="5115123"/>
+            <a:off x="1168400" y="5266234"/>
             <a:ext cx="10307828" cy="266700"/>
           </a:xfrm>
           <a:prstGeom prst="rect">
@@ -30003,7 +30456,7 @@
                 </a:solidFill>
                 <a:latin typeface="Montserrat"/>
               </a:rPr>
-              <a:t>Duas pessoas autistas podem ser muito diferentes em linguagem, capacidade intelectual, necessidade de apoio, condições coocorrentes, interesses e contexto familiar.</a:t>
+              <a:t>Duas pessoas autistas podem ser muito diferentes em linguagem, capacidade intelectual, necessidade de apoio, condições coocorrentes (outros diagnósticos ao mesmo tempo, como TDAH ou ansiedade), interesses e contexto familiar.</a:t>
             </a:r>
           </a:p>
         </p:txBody>

--- a/workshop-aba-tea-lacc/apresentacao/Apresentacao_Workshop_ABA_TEA.pptx
+++ b/workshop-aba-tea-lacc/apresentacao/Apresentacao_Workshop_ABA_TEA.pptx
@@ -4706,7 +4706,7 @@
           <a:lstStyle/>
           <a:p>
             <a:r>
-              <a:t>O manual usa o termo "déficits"; o slide usa "diferenças" por coerência com a linguagem do workshop. Ao falar, mencionar que o texto diagnóstico usa "déficits". No domínio B, citar as quatro formas (movimentos, fala ou uso de objetos estereotipados; insistência na mesmice; interesses restritos e intensos; hiper ou hiporreatividade sensorial), das quais pelo menos duas são necessárias. Conferir a redação na edição em uso. Tempo: 3 min (início do Bloco 1, 9h40).</a:t>
+              <a:t>O manual usa o termo "déficits"; o slide usa "diferenças" por coerência com a linguagem do workshop. Ao falar, mencionar que o texto diagnóstico usa "déficits". No domínio B, citar as quatro formas (movimentos, fala ou uso de objetos estereotipados; insistência na mesmice; interesses restritos e intensos; hiper ou hiporreatividade sensorial), das quais pelo menos duas são necessárias. Se perguntarem "só duas áreas?": sim. No DSM-IV havia a tríade (interação social, comunicação, comportamentos repetitivos); o DSM-5 juntou interação social e comunicação em um domínio, e o atraso de linguagem passou a ser especificador. Os outros critérios (C, D e E) são: sinais no início do desenvolvimento, prejuízo significativo e não ser melhor explicado por deficiência intelectual. Conferir a redação na edição em uso. Tempo: 3 min (início do Bloco 1, 9h40).</a:t>
             </a:r>
           </a:p>
         </p:txBody>
@@ -4776,7 +4776,7 @@
           <a:lstStyle/>
           <a:p>
             <a:r>
-              <a:t>Os níveis descrevem necessidade de apoio, não "grau de autismo" nem valor da pessoa. O nível pode variar entre domínios e ao longo do tempo. Conferir a nomenclatura exata da tradução em uso. Tempo: 2 min.</a:t>
+              <a:t>Usamos "níveis de suporte" porque descrevem o suporte necessário, não "grau de autismo" nem valor da pessoa; o nome oficial no DSM-5-TR é "níveis de gravidade" (citado no slide para não parecer erro). O nível pode variar entre domínios e ao longo do tempo. Conferir a nomenclatura exata da tradução em uso. Tempo: 2 min.</a:t>
             </a:r>
           </a:p>
         </p:txBody>
@@ -29485,7 +29485,7 @@
         </p:nvSpPr>
         <p:spPr>
           <a:xfrm>
-            <a:off x="1168400" y="1161752"/>
+            <a:off x="1168400" y="977602"/>
             <a:ext cx="10307828" cy="963811"/>
           </a:xfrm>
           <a:prstGeom prst="rect">
@@ -29524,7 +29524,7 @@
         </p:nvSpPr>
         <p:spPr>
           <a:xfrm>
-            <a:off x="1168400" y="2455763"/>
+            <a:off x="1168400" y="2195413"/>
             <a:ext cx="4839970" cy="319980"/>
           </a:xfrm>
           <a:prstGeom prst="rect">
@@ -29563,7 +29563,7 @@
         </p:nvSpPr>
         <p:spPr>
           <a:xfrm>
-            <a:off x="1168400" y="2864644"/>
+            <a:off x="1168400" y="2604294"/>
             <a:ext cx="4839970" cy="675481"/>
           </a:xfrm>
           <a:prstGeom prst="rect">
@@ -29602,7 +29602,7 @@
         </p:nvSpPr>
         <p:spPr>
           <a:xfrm>
-            <a:off x="6477000" y="2455763"/>
+            <a:off x="6477000" y="2195413"/>
             <a:ext cx="4839970" cy="319980"/>
           </a:xfrm>
           <a:prstGeom prst="rect">
@@ -29641,7 +29641,7 @@
         </p:nvSpPr>
         <p:spPr>
           <a:xfrm>
-            <a:off x="6477000" y="2864644"/>
+            <a:off x="6477000" y="2604294"/>
             <a:ext cx="4839970" cy="1350962"/>
           </a:xfrm>
           <a:prstGeom prst="rect">
@@ -29680,7 +29680,7 @@
         </p:nvSpPr>
         <p:spPr>
           <a:xfrm>
-            <a:off x="1168400" y="4545806"/>
+            <a:off x="1168400" y="4209256"/>
             <a:ext cx="10307828" cy="959941"/>
           </a:xfrm>
           <a:prstGeom prst="rect">
@@ -29714,6 +29714,45 @@
       <p:sp>
         <p:nvSpPr>
           <p:cNvPr id="9" name="TextBox 8"/>
+          <p:cNvSpPr txBox="1"/>
+          <p:nvPr/>
+        </p:nvSpPr>
+        <p:spPr>
+          <a:xfrm>
+            <a:off x="1168400" y="5423198"/>
+            <a:ext cx="10307828" cy="266700"/>
+          </a:xfrm>
+          <a:prstGeom prst="rect">
+            <a:avLst/>
+          </a:prstGeom>
+          <a:noFill/>
+        </p:spPr>
+        <p:txBody>
+          <a:bodyPr wrap="square" lIns="0" rIns="0" tIns="0" bIns="0" anchor="t">
+            <a:noAutofit/>
+          </a:bodyPr>
+          <a:lstStyle/>
+          <a:p>
+            <a:pPr algn="l">
+              <a:lnSpc>
+                <a:spcPct val="115000"/>
+              </a:lnSpc>
+            </a:pPr>
+            <a:r>
+              <a:rPr sz="1500" b="0" i="1">
+                <a:solidFill>
+                  <a:srgbClr val="66717F"/>
+                </a:solidFill>
+                <a:latin typeface="Montserrat"/>
+              </a:rPr>
+              <a:t>No DSM-IV eram três áreas. Desde o DSM-5, comunicação e interação social formam um único domínio.</a:t>
+            </a:r>
+          </a:p>
+        </p:txBody>
+      </p:sp>
+      <p:sp>
+        <p:nvSpPr>
+          <p:cNvPr id="10" name="TextBox 9"/>
           <p:cNvSpPr txBox="1"/>
           <p:nvPr/>
         </p:nvSpPr>
@@ -29752,7 +29791,7 @@
       </p:sp>
       <p:sp>
         <p:nvSpPr>
-          <p:cNvPr id="10" name="TextBox 9"/>
+          <p:cNvPr id="11" name="TextBox 10"/>
           <p:cNvSpPr txBox="1"/>
           <p:nvPr/>
         </p:nvSpPr>
@@ -29867,7 +29906,7 @@
         </p:nvSpPr>
         <p:spPr>
           <a:xfrm>
-            <a:off x="1168400" y="1134467"/>
+            <a:off x="1168400" y="1001117"/>
             <a:ext cx="10307828" cy="481905"/>
           </a:xfrm>
           <a:prstGeom prst="rect">
@@ -29893,7 +29932,7 @@
                 </a:solidFill>
                 <a:latin typeface="Montserrat"/>
               </a:rPr>
-              <a:t>Especificadores e níveis de gravidade</a:t>
+              <a:t>Especificadores e níveis de suporte</a:t>
             </a:r>
           </a:p>
         </p:txBody>
@@ -29906,7 +29945,7 @@
         </p:nvSpPr>
         <p:spPr>
           <a:xfrm>
-            <a:off x="1168400" y="1870373"/>
+            <a:off x="1168400" y="1737023"/>
             <a:ext cx="10307828" cy="906661"/>
           </a:xfrm>
           <a:prstGeom prst="rect">
@@ -29955,7 +29994,7 @@
           <p:nvPr/>
         </p:nvGraphicFramePr>
         <p:xfrm>
-          <a:off x="1168400" y="3031034"/>
+          <a:off x="1168400" y="2897684"/>
           <a:ext cx="10007600" cy="1981200"/>
         </p:xfrm>
         <a:graphic>
@@ -30013,7 +30052,7 @@
                           </a:solidFill>
                           <a:latin typeface="Montserrat"/>
                         </a:rPr>
-                        <a:t>Necessidade de apoio</a:t>
+                        <a:t>Suporte necessário</a:t>
                       </a:r>
                     </a:p>
                   </a:txBody>
@@ -30069,7 +30108,7 @@
                           </a:solidFill>
                           <a:latin typeface="Montserrat"/>
                         </a:rPr>
-                        <a:t>Exige apoio</a:t>
+                        <a:t>Exige suporte</a:t>
                       </a:r>
                     </a:p>
                   </a:txBody>
@@ -30125,7 +30164,7 @@
                           </a:solidFill>
                           <a:latin typeface="Montserrat"/>
                         </a:rPr>
-                        <a:t>Exige apoio substancial</a:t>
+                        <a:t>Exige suporte substancial</a:t>
                       </a:r>
                     </a:p>
                   </a:txBody>
@@ -30181,7 +30220,7 @@
                           </a:solidFill>
                           <a:latin typeface="Montserrat"/>
                         </a:rPr>
-                        <a:t>Exige apoio muito substancial</a:t>
+                        <a:t>Exige suporte muito substancial</a:t>
                       </a:r>
                     </a:p>
                   </a:txBody>
@@ -30204,8 +30243,8 @@
         </p:nvSpPr>
         <p:spPr>
           <a:xfrm>
-            <a:off x="1168400" y="5266234"/>
-            <a:ext cx="10307828" cy="266700"/>
+            <a:off x="1168400" y="5132884"/>
+            <a:ext cx="10307828" cy="533400"/>
           </a:xfrm>
           <a:prstGeom prst="rect">
             <a:avLst/>
@@ -30230,7 +30269,7 @@
                 </a:solidFill>
                 <a:latin typeface="Montserrat"/>
               </a:rPr>
-              <a:t>Os níveis são definidos para cada domínio e descrevem necessidade de apoio, não “grau de autismo”.</a:t>
+              <a:t>Os níveis são definidos para cada domínio e descrevem o suporte necessário, não um “grau de autismo”. No texto do DSM-5-TR, o nome oficial é “níveis de gravidade”.</a:t>
             </a:r>
           </a:p>
         </p:txBody>

--- a/workshop-aba-tea-lacc/apresentacao/Apresentacao_Workshop_ABA_TEA.pptx
+++ b/workshop-aba-tea-lacc/apresentacao/Apresentacao_Workshop_ABA_TEA.pptx
@@ -1268,7 +1268,7 @@
           <a:lstStyle/>
           <a:p>
             <a:r>
-              <a:t>A revisão de Hanley et al. (2003) mostra como essas categorias foram estudadas em centenas de análises funcionais. Hanley et al. (2014) ilustram funções sintetizadas (mais de uma consequência ao mesmo tempo). Tempo: 3 min.</a:t>
+              <a:t>A revisão de Hanley et al. (2003) mostra como essas categorias foram estudadas em centenas de análises funcionais. Hanley et al. (2014) ilustram funções sintetizadas (mais de uma consequência ao mesmo tempo). Se perguntarem pela função "sensorial": é o item 4. Na literatura atual se prefere "reforçamento automático", porque nem sempre é estimulação sensorial: pode ser alívio de dor ou desconforto (reforçamento automático negativo). O que define é que a consequência não depende de outra pessoa. Tempo: 3 min.</a:t>
             </a:r>
           </a:p>
         </p:txBody>
@@ -11974,7 +11974,7 @@
         </p:nvSpPr>
         <p:spPr>
           <a:xfrm>
-            <a:off x="1168400" y="1149152"/>
+            <a:off x="1168400" y="1132284"/>
             <a:ext cx="10307828" cy="481905"/>
           </a:xfrm>
           <a:prstGeom prst="rect">
@@ -12013,8 +12013,8 @@
         </p:nvSpPr>
         <p:spPr>
           <a:xfrm>
-            <a:off x="1168400" y="1961257"/>
-            <a:ext cx="10307828" cy="2286000"/>
+            <a:off x="1168400" y="1944390"/>
+            <a:ext cx="10307828" cy="2319734"/>
           </a:xfrm>
           <a:prstGeom prst="rect">
             <a:avLst/>
@@ -12029,12 +12029,12 @@
           <a:p>
             <a:pPr algn="l" marL="279400" indent="-279400">
               <a:lnSpc>
-                <a:spcPct val="123000"/>
+                <a:spcPct val="119000"/>
               </a:lnSpc>
               <a:buAutoNum type="arabicPeriod" startAt="1"/>
             </a:pPr>
             <a:r>
-              <a:rPr sz="2000" b="0" i="0">
+              <a:rPr sz="1800" b="0" i="0">
                 <a:solidFill>
                   <a:srgbClr val="2E3A4A"/>
                 </a:solidFill>
@@ -12046,12 +12046,12 @@
           <a:p>
             <a:pPr algn="l" marL="279400" indent="-279400">
               <a:lnSpc>
-                <a:spcPct val="123000"/>
+                <a:spcPct val="119000"/>
               </a:lnSpc>
               <a:buAutoNum type="arabicPeriod" startAt="1"/>
             </a:pPr>
             <a:r>
-              <a:rPr sz="2000" b="0" i="0">
+              <a:rPr sz="1800" b="0" i="0">
                 <a:solidFill>
                   <a:srgbClr val="2E3A4A"/>
                 </a:solidFill>
@@ -12063,12 +12063,12 @@
           <a:p>
             <a:pPr algn="l" marL="279400" indent="-279400">
               <a:lnSpc>
-                <a:spcPct val="123000"/>
+                <a:spcPct val="119000"/>
               </a:lnSpc>
               <a:buAutoNum type="arabicPeriod" startAt="1"/>
             </a:pPr>
             <a:r>
-              <a:rPr sz="2000" b="0" i="0">
+              <a:rPr sz="1800" b="0" i="0">
                 <a:solidFill>
                   <a:srgbClr val="2E3A4A"/>
                 </a:solidFill>
@@ -12080,18 +12080,18 @@
           <a:p>
             <a:pPr algn="l" marL="279400" indent="-279400">
               <a:lnSpc>
-                <a:spcPct val="123000"/>
+                <a:spcPct val="119000"/>
               </a:lnSpc>
               <a:buAutoNum type="arabicPeriod" startAt="1"/>
             </a:pPr>
             <a:r>
-              <a:rPr sz="2000" b="0" i="0">
+              <a:rPr sz="1800" b="0" i="0">
                 <a:solidFill>
                   <a:srgbClr val="2E3A4A"/>
                 </a:solidFill>
                 <a:latin typeface="Montserrat"/>
               </a:rPr>
-              <a:t>Reforçamento automático: o próprio comportamento produz a consequência</a:t>
+              <a:t>Reforçamento automático (a função que muitos chamam de “sensorial”): o próprio comportamento produz a consequência, como uma sensação agradável ou o alívio de um desconforto</a:t>
             </a:r>
           </a:p>
         </p:txBody>
@@ -12104,7 +12104,7 @@
         </p:nvSpPr>
         <p:spPr>
           <a:xfrm>
-            <a:off x="1168400" y="4577457"/>
+            <a:off x="1168400" y="4594324"/>
             <a:ext cx="10307828" cy="940891"/>
           </a:xfrm>
           <a:prstGeom prst="rect">

--- a/workshop-aba-tea-lacc/apresentacao/Apresentacao_Workshop_ABA_TEA.pptx
+++ b/workshop-aba-tea-lacc/apresentacao/Apresentacao_Workshop_ABA_TEA.pptx
@@ -3282,7 +3282,7 @@
           <a:lstStyle/>
           <a:p>
             <a:r>
-              <a:t>Slide de respostas: mostrar depois que a turma responder.</a:t>
+              <a:t>Slide de respostas: mostrar depois que a turma responder. Ler linha por linha: explicação, o que a favor, o que contra. Destacar que o lanche é o dado que mais ajuda a decidir.</a:t>
             </a:r>
           </a:p>
         </p:txBody>
@@ -3352,7 +3352,7 @@
           <a:lstStyle/>
           <a:p>
             <a:r>
-              <a:t>Slide de respostas: mostrar depois que a turma responder.</a:t>
+              <a:t>Slide de respostas: mostrar depois que a turma responder. Pedir que um grupo que escolheu "trilhos" e um que escolheu "mesa" digam o que fariam; usar a terceira coluna para mostrar o risco de errar.</a:t>
             </a:r>
           </a:p>
         </p:txBody>
@@ -3492,7 +3492,7 @@
           <a:lstStyle/>
           <a:p>
             <a:r>
-              <a:t>Raciocínio esperado: o dado fortalece 'quer os trilhos' (ou as duas juntas) e enfraquece 'foge da mesa'. Mas são 4 sessões, sem controle de outras variáveis: é mais uma pista, não uma conclusão. Próximo passo: avaliação organizada, com supervisão.</a:t>
+              <a:t>Raciocínio esperado: o dado fortalece 'quer os trilhos' (ou as duas juntas) e enfraquece 'escapar da mesa'. Mas são 4 sessões, sem controle de outras variáveis: é mais uma pista, não uma conclusão. Próximo passo: avaliação organizada, com supervisão.</a:t>
             </a:r>
           </a:p>
         </p:txBody>
@@ -21903,8 +21903,8 @@
         </p:nvSpPr>
         <p:spPr>
           <a:xfrm>
-            <a:off x="1168400" y="1241227"/>
-            <a:ext cx="10307828" cy="423466"/>
+            <a:off x="1168400" y="932755"/>
+            <a:ext cx="10307828" cy="394295"/>
           </a:xfrm>
           <a:prstGeom prst="rect">
             <a:avLst/>
@@ -21923,28 +21923,67 @@
               </a:lnSpc>
             </a:pPr>
             <a:r>
-              <a:rPr sz="2900" b="1" i="0">
+              <a:rPr sz="2700" b="1" i="0">
                 <a:solidFill>
                   <a:srgbClr val="1B2F4B"/>
                 </a:solidFill>
                 <a:latin typeface="Montserrat"/>
               </a:rPr>
-              <a:t>Respostas 4: explicações possíveis</a:t>
+              <a:t>Respostas 4: por que o Theo faz isso?</a:t>
+            </a:r>
+          </a:p>
+        </p:txBody>
+      </p:sp>
+      <p:sp>
+        <p:nvSpPr>
+          <p:cNvPr id="4" name="TextBox 3"/>
+          <p:cNvSpPr txBox="1"/>
+          <p:nvPr/>
+        </p:nvSpPr>
+        <p:spPr>
+          <a:xfrm>
+            <a:off x="1168400" y="1492151"/>
+            <a:ext cx="10307828" cy="266700"/>
+          </a:xfrm>
+          <a:prstGeom prst="rect">
+            <a:avLst/>
+          </a:prstGeom>
+          <a:noFill/>
+        </p:spPr>
+        <p:txBody>
+          <a:bodyPr wrap="square" lIns="0" rIns="0" tIns="0" bIns="0" anchor="t">
+            <a:noAutofit/>
+          </a:bodyPr>
+          <a:lstStyle/>
+          <a:p>
+            <a:pPr algn="l">
+              <a:lnSpc>
+                <a:spcPct val="115000"/>
+              </a:lnSpc>
+            </a:pPr>
+            <a:r>
+              <a:rPr sz="1500" b="0" i="0">
+                <a:solidFill>
+                  <a:srgbClr val="66717F"/>
+                </a:solidFill>
+                <a:latin typeface="Montserrat"/>
+              </a:rPr>
+              <a:t>Quatro explicações possíveis, cada uma com o que a história mostra a favor e contra.</a:t>
             </a:r>
           </a:p>
         </p:txBody>
       </p:sp>
       <p:graphicFrame>
         <p:nvGraphicFramePr>
-          <p:cNvPr id="4" name="Table 3"/>
+          <p:cNvPr id="5" name="Table 4"/>
           <p:cNvGraphicFramePr>
             <a:graphicFrameLocks noGrp="1"/>
           </p:cNvGraphicFramePr>
           <p:nvPr/>
         </p:nvGraphicFramePr>
         <p:xfrm>
-          <a:off x="1168400" y="1855192"/>
-          <a:ext cx="10007600" cy="2819400"/>
+          <a:off x="1168400" y="1923951"/>
+          <a:ext cx="10007600" cy="3117453"/>
         </p:xfrm>
         <a:graphic>
           <a:graphicData uri="http://schemas.openxmlformats.org/drawingml/2006/table">
@@ -21953,11 +21992,11 @@
                 <a:tableStyleId>{2D5ABB26-0587-4C30-8999-92F81FD0307C}</a:tableStyleId>
               </a:tblPr>
               <a:tblGrid>
-                <a:gridCol w="2201664"/>
+                <a:gridCol w="2401788"/>
                 <a:gridCol w="4203105"/>
-                <a:gridCol w="3602831"/>
+                <a:gridCol w="3402707"/>
               </a:tblGrid>
-              <a:tr h="438150">
+              <a:tr h="400645">
                 <a:tc>
                   <a:txBody>
                     <a:bodyPr wrap="square"/>
@@ -21969,7 +22008,7 @@
                         </a:lnSpc>
                       </a:pPr>
                       <a:r>
-                        <a:rPr sz="1350" b="1" i="0">
+                        <a:rPr sz="1300" b="1" i="0">
                           <a:solidFill>
                             <a:srgbClr val="FFFFFF"/>
                           </a:solidFill>
@@ -21996,13 +22035,672 @@
                         </a:lnSpc>
                       </a:pPr>
                       <a:r>
+                        <a:rPr sz="1300" b="1" i="0">
+                          <a:solidFill>
+                            <a:srgbClr val="FFFFFF"/>
+                          </a:solidFill>
+                          <a:latin typeface="Montserrat"/>
+                        </a:rPr>
+                        <a:t>A favor (o que reforça a ideia)</a:t>
+                      </a:r>
+                    </a:p>
+                  </a:txBody>
+                  <a:tcPr marL="114300" marR="114300" marT="68580" marB="68580" anchor="ctr">
+                    <a:solidFill>
+                      <a:srgbClr val="1B2F4B"/>
+                    </a:solidFill>
+                  </a:tcPr>
+                </a:tc>
+                <a:tc>
+                  <a:txBody>
+                    <a:bodyPr wrap="square"/>
+                    <a:lstStyle/>
+                    <a:p>
+                      <a:pPr>
+                        <a:lnSpc>
+                          <a:spcPct val="100000"/>
+                        </a:lnSpc>
+                      </a:pPr>
+                      <a:r>
+                        <a:rPr sz="1300" b="1" i="0">
+                          <a:solidFill>
+                            <a:srgbClr val="FFFFFF"/>
+                          </a:solidFill>
+                          <a:latin typeface="Montserrat"/>
+                        </a:rPr>
+                        <a:t>Contra (o que enfraquece a ideia)</a:t>
+                      </a:r>
+                    </a:p>
+                  </a:txBody>
+                  <a:tcPr marL="114300" marR="114300" marT="68580" marB="68580" anchor="ctr">
+                    <a:solidFill>
+                      <a:srgbClr val="1B2F4B"/>
+                    </a:solidFill>
+                  </a:tcPr>
+                </a:tc>
+              </a:tr>
+              <a:tr h="846336">
+                <a:tc>
+                  <a:txBody>
+                    <a:bodyPr wrap="square"/>
+                    <a:lstStyle/>
+                    <a:p>
+                      <a:pPr>
+                        <a:lnSpc>
+                          <a:spcPct val="100000"/>
+                        </a:lnSpc>
+                      </a:pPr>
+                      <a:r>
+                        <a:rPr sz="1300" b="1" i="0">
+                          <a:solidFill>
+                            <a:srgbClr val="2E3A4A"/>
+                          </a:solidFill>
+                          <a:latin typeface="Montserrat"/>
+                        </a:rPr>
+                        <a:t>Ele quer continuar com os trilhos</a:t>
+                      </a:r>
+                    </a:p>
+                  </a:txBody>
+                  <a:tcPr marL="114300" marR="114300" marT="68580" marB="68580" anchor="ctr">
+                    <a:solidFill>
+                      <a:srgbClr val="FFFFFF"/>
+                    </a:solidFill>
+                  </a:tcPr>
+                </a:tc>
+                <a:tc>
+                  <a:txBody>
+                    <a:bodyPr wrap="square"/>
+                    <a:lstStyle/>
+                    <a:p>
+                      <a:pPr>
+                        <a:lnSpc>
+                          <a:spcPct val="100000"/>
+                        </a:lnSpc>
+                      </a:pPr>
+                      <a:r>
+                        <a:rPr sz="1300" b="0" i="0">
+                          <a:solidFill>
+                            <a:srgbClr val="2E3A4A"/>
+                          </a:solidFill>
+                          <a:latin typeface="Montserrat"/>
+                        </a:rPr>
+                        <a:t>O grito acontece quando os trilhos são guardados. Às vezes os trilhos voltam depois do grito. Em casa, acontece quando desligam a TV.</a:t>
+                      </a:r>
+                    </a:p>
+                  </a:txBody>
+                  <a:tcPr marL="114300" marR="114300" marT="68580" marB="68580" anchor="ctr">
+                    <a:solidFill>
+                      <a:srgbClr val="FFFFFF"/>
+                    </a:solidFill>
+                  </a:tcPr>
+                </a:tc>
+                <a:tc>
+                  <a:txBody>
+                    <a:bodyPr wrap="square"/>
+                    <a:lstStyle/>
+                    <a:p>
+                      <a:pPr>
+                        <a:lnSpc>
+                          <a:spcPct val="100000"/>
+                        </a:lnSpc>
+                      </a:pPr>
+                      <a:r>
+                        <a:rPr sz="1300" b="0" i="0">
+                          <a:solidFill>
+                            <a:srgbClr val="2E3A4A"/>
+                          </a:solidFill>
+                          <a:latin typeface="Montserrat"/>
+                        </a:rPr>
+                        <a:t>No dia do lanche, os trilhos também foram guardados, e ele </a:t>
+                      </a:r>
+                      <a:r>
+                        <a:rPr sz="1300" b="1" i="0">
+                          <a:solidFill>
+                            <a:srgbClr val="2E3A4A"/>
+                          </a:solidFill>
+                          <a:latin typeface="Montserrat"/>
+                        </a:rPr>
+                        <a:t>não</a:t>
+                      </a:r>
+                      <a:r>
+                        <a:rPr sz="1300" b="0" i="0">
+                          <a:solidFill>
+                            <a:srgbClr val="2E3A4A"/>
+                          </a:solidFill>
+                          <a:latin typeface="Montserrat"/>
+                        </a:rPr>
+                        <a:t> gritou.</a:t>
+                      </a:r>
+                    </a:p>
+                  </a:txBody>
+                  <a:tcPr marL="114300" marR="114300" marT="68580" marB="68580" anchor="ctr">
+                    <a:solidFill>
+                      <a:srgbClr val="FFFFFF"/>
+                    </a:solidFill>
+                  </a:tcPr>
+                </a:tc>
+              </a:tr>
+              <a:tr h="846336">
+                <a:tc>
+                  <a:txBody>
+                    <a:bodyPr wrap="square"/>
+                    <a:lstStyle/>
+                    <a:p>
+                      <a:pPr>
+                        <a:lnSpc>
+                          <a:spcPct val="100000"/>
+                        </a:lnSpc>
+                      </a:pPr>
+                      <a:r>
+                        <a:rPr sz="1300" b="1" i="0">
+                          <a:solidFill>
+                            <a:srgbClr val="2E3A4A"/>
+                          </a:solidFill>
+                          <a:latin typeface="Montserrat"/>
+                        </a:rPr>
+                        <a:t>Ele quer escapar da atividade de mesa</a:t>
+                      </a:r>
+                    </a:p>
+                  </a:txBody>
+                  <a:tcPr marL="114300" marR="114300" marT="68580" marB="68580" anchor="ctr">
+                    <a:solidFill>
+                      <a:srgbClr val="F1F4F6"/>
+                    </a:solidFill>
+                  </a:tcPr>
+                </a:tc>
+                <a:tc>
+                  <a:txBody>
+                    <a:bodyPr wrap="square"/>
+                    <a:lstStyle/>
+                    <a:p>
+                      <a:pPr>
+                        <a:lnSpc>
+                          <a:spcPct val="100000"/>
+                        </a:lnSpc>
+                      </a:pPr>
+                      <a:r>
+                        <a:rPr sz="1300" b="0" i="0">
+                          <a:solidFill>
+                            <a:srgbClr val="2E3A4A"/>
+                          </a:solidFill>
+                          <a:latin typeface="Montserrat"/>
+                        </a:rPr>
+                        <a:t>Quando o próximo é o lanche (algo de que ele gosta), não há grito. Às vezes a mesa é adiada depois do grito.</a:t>
+                      </a:r>
+                    </a:p>
+                  </a:txBody>
+                  <a:tcPr marL="114300" marR="114300" marT="68580" marB="68580" anchor="ctr">
+                    <a:solidFill>
+                      <a:srgbClr val="F1F4F6"/>
+                    </a:solidFill>
+                  </a:tcPr>
+                </a:tc>
+                <a:tc>
+                  <a:txBody>
+                    <a:bodyPr wrap="square"/>
+                    <a:lstStyle/>
+                    <a:p>
+                      <a:pPr>
+                        <a:lnSpc>
+                          <a:spcPct val="100000"/>
+                        </a:lnSpc>
+                      </a:pPr>
+                      <a:r>
+                        <a:rPr sz="1300" b="0" i="0">
+                          <a:solidFill>
+                            <a:srgbClr val="2E3A4A"/>
+                          </a:solidFill>
+                          <a:latin typeface="Montserrat"/>
+                        </a:rPr>
+                        <a:t>Em casa, o que vem depois é o banho, não uma tarefa de mesa.</a:t>
+                      </a:r>
+                    </a:p>
+                  </a:txBody>
+                  <a:tcPr marL="114300" marR="114300" marT="68580" marB="68580" anchor="ctr">
+                    <a:solidFill>
+                      <a:srgbClr val="F1F4F6"/>
+                    </a:solidFill>
+                  </a:tcPr>
+                </a:tc>
+              </a:tr>
+              <a:tr h="623491">
+                <a:tc>
+                  <a:txBody>
+                    <a:bodyPr wrap="square"/>
+                    <a:lstStyle/>
+                    <a:p>
+                      <a:pPr>
+                        <a:lnSpc>
+                          <a:spcPct val="100000"/>
+                        </a:lnSpc>
+                      </a:pPr>
+                      <a:r>
+                        <a:rPr sz="1300" b="1" i="0">
+                          <a:solidFill>
+                            <a:srgbClr val="2E3A4A"/>
+                          </a:solidFill>
+                          <a:latin typeface="Montserrat"/>
+                        </a:rPr>
+                        <a:t>As duas coisas juntas</a:t>
+                      </a:r>
+                    </a:p>
+                  </a:txBody>
+                  <a:tcPr marL="114300" marR="114300" marT="68580" marB="68580" anchor="ctr">
+                    <a:solidFill>
+                      <a:srgbClr val="FFFFFF"/>
+                    </a:solidFill>
+                  </a:tcPr>
+                </a:tc>
+                <a:tc>
+                  <a:txBody>
+                    <a:bodyPr wrap="square"/>
+                    <a:lstStyle/>
+                    <a:p>
+                      <a:pPr>
+                        <a:lnSpc>
+                          <a:spcPct val="100000"/>
+                        </a:lnSpc>
+                      </a:pPr>
+                      <a:r>
+                        <a:rPr sz="1300" b="0" i="0">
+                          <a:solidFill>
+                            <a:srgbClr val="2E3A4A"/>
+                          </a:solidFill>
+                          <a:latin typeface="Montserrat"/>
+                        </a:rPr>
+                        <a:t>Perder os trilhos e ir para a mesa acontecem no mesmo momento.</a:t>
+                      </a:r>
+                    </a:p>
+                  </a:txBody>
+                  <a:tcPr marL="114300" marR="114300" marT="68580" marB="68580" anchor="ctr">
+                    <a:solidFill>
+                      <a:srgbClr val="FFFFFF"/>
+                    </a:solidFill>
+                  </a:tcPr>
+                </a:tc>
+                <a:tc>
+                  <a:txBody>
+                    <a:bodyPr wrap="square"/>
+                    <a:lstStyle/>
+                    <a:p>
+                      <a:pPr>
+                        <a:lnSpc>
+                          <a:spcPct val="100000"/>
+                        </a:lnSpc>
+                      </a:pPr>
+                      <a:r>
+                        <a:rPr sz="1300" b="0" i="0">
+                          <a:solidFill>
+                            <a:srgbClr val="2E3A4A"/>
+                          </a:solidFill>
+                          <a:latin typeface="Montserrat"/>
+                        </a:rPr>
+                        <a:t>Só uma avaliação consegue separar as duas.</a:t>
+                      </a:r>
+                    </a:p>
+                  </a:txBody>
+                  <a:tcPr marL="114300" marR="114300" marT="68580" marB="68580" anchor="ctr">
+                    <a:solidFill>
+                      <a:srgbClr val="FFFFFF"/>
+                    </a:solidFill>
+                  </a:tcPr>
+                </a:tc>
+              </a:tr>
+              <a:tr h="400645">
+                <a:tc>
+                  <a:txBody>
+                    <a:bodyPr wrap="square"/>
+                    <a:lstStyle/>
+                    <a:p>
+                      <a:pPr>
+                        <a:lnSpc>
+                          <a:spcPct val="100000"/>
+                        </a:lnSpc>
+                      </a:pPr>
+                      <a:r>
+                        <a:rPr sz="1300" b="1" i="0">
+                          <a:solidFill>
+                            <a:srgbClr val="2E3A4A"/>
+                          </a:solidFill>
+                          <a:latin typeface="Montserrat"/>
+                        </a:rPr>
+                        <a:t>Ele quer atenção</a:t>
+                      </a:r>
+                    </a:p>
+                  </a:txBody>
+                  <a:tcPr marL="114300" marR="114300" marT="68580" marB="68580" anchor="ctr">
+                    <a:solidFill>
+                      <a:srgbClr val="F1F4F6"/>
+                    </a:solidFill>
+                  </a:tcPr>
+                </a:tc>
+                <a:tc>
+                  <a:txBody>
+                    <a:bodyPr wrap="square"/>
+                    <a:lstStyle/>
+                    <a:p>
+                      <a:pPr>
+                        <a:lnSpc>
+                          <a:spcPct val="100000"/>
+                        </a:lnSpc>
+                      </a:pPr>
+                      <a:r>
+                        <a:rPr sz="1300" b="0" i="0">
+                          <a:solidFill>
+                            <a:srgbClr val="2E3A4A"/>
+                          </a:solidFill>
+                          <a:latin typeface="Montserrat"/>
+                        </a:rPr>
+                        <a:t>Talvez receba atenção enquanto grita.</a:t>
+                      </a:r>
+                    </a:p>
+                  </a:txBody>
+                  <a:tcPr marL="114300" marR="114300" marT="68580" marB="68580" anchor="ctr">
+                    <a:solidFill>
+                      <a:srgbClr val="F1F4F6"/>
+                    </a:solidFill>
+                  </a:tcPr>
+                </a:tc>
+                <a:tc>
+                  <a:txBody>
+                    <a:bodyPr wrap="square"/>
+                    <a:lstStyle/>
+                    <a:p>
+                      <a:pPr>
+                        <a:lnSpc>
+                          <a:spcPct val="100000"/>
+                        </a:lnSpc>
+                      </a:pPr>
+                      <a:r>
+                        <a:rPr sz="1300" b="0" i="0">
+                          <a:solidFill>
+                            <a:srgbClr val="2E3A4A"/>
+                          </a:solidFill>
+                          <a:latin typeface="Montserrat"/>
+                        </a:rPr>
+                        <a:t>Nada na história mostra isso.</a:t>
+                      </a:r>
+                    </a:p>
+                  </a:txBody>
+                  <a:tcPr marL="114300" marR="114300" marT="68580" marB="68580" anchor="ctr">
+                    <a:solidFill>
+                      <a:srgbClr val="F1F4F6"/>
+                    </a:solidFill>
+                  </a:tcPr>
+                </a:tc>
+              </a:tr>
+            </a:tbl>
+          </a:graphicData>
+        </a:graphic>
+      </p:graphicFrame>
+      <p:sp>
+        <p:nvSpPr>
+          <p:cNvPr id="6" name="TextBox 5"/>
+          <p:cNvSpPr txBox="1"/>
+          <p:nvPr/>
+        </p:nvSpPr>
+        <p:spPr>
+          <a:xfrm>
+            <a:off x="1168400" y="5206504"/>
+            <a:ext cx="10307828" cy="528241"/>
+          </a:xfrm>
+          <a:prstGeom prst="rect">
+            <a:avLst/>
+          </a:prstGeom>
+          <a:noFill/>
+        </p:spPr>
+        <p:txBody>
+          <a:bodyPr wrap="square" lIns="0" rIns="0" tIns="0" bIns="0" anchor="t">
+            <a:noAutofit/>
+          </a:bodyPr>
+          <a:lstStyle/>
+          <a:p>
+            <a:pPr algn="l">
+              <a:lnSpc>
+                <a:spcPct val="107000"/>
+              </a:lnSpc>
+            </a:pPr>
+            <a:r>
+              <a:rPr sz="1600" b="1" i="0">
+                <a:solidFill>
+                  <a:srgbClr val="0F7C86"/>
+                </a:solidFill>
+                <a:latin typeface="Montserrat"/>
+              </a:rPr>
+              <a:t>A pista mais forte é o lanche: os trilhos foram guardados e ele não gritou. Isso torna mais provável “escapar da mesa” (ou as duas juntas). Ainda são hipóteses.</a:t>
+            </a:r>
+          </a:p>
+        </p:txBody>
+      </p:sp>
+      <p:sp>
+        <p:nvSpPr>
+          <p:cNvPr id="7" name="TextBox 6"/>
+          <p:cNvSpPr txBox="1"/>
+          <p:nvPr/>
+        </p:nvSpPr>
+        <p:spPr>
+          <a:xfrm>
+            <a:off x="10820400" y="6343650"/>
+            <a:ext cx="784860" cy="184150"/>
+          </a:xfrm>
+          <a:prstGeom prst="rect">
+            <a:avLst/>
+          </a:prstGeom>
+          <a:noFill/>
+        </p:spPr>
+        <p:txBody>
+          <a:bodyPr wrap="square" lIns="0" rIns="0" tIns="0" bIns="0" anchor="t">
+            <a:noAutofit/>
+          </a:bodyPr>
+          <a:lstStyle/>
+          <a:p>
+            <a:pPr algn="r">
+              <a:lnSpc>
+                <a:spcPct val="98000"/>
+              </a:lnSpc>
+            </a:pPr>
+            <a:r>
+              <a:rPr sz="1200" b="0" i="0">
+                <a:solidFill>
+                  <a:srgbClr val="66717F"/>
+                </a:solidFill>
+                <a:latin typeface="Montserrat"/>
+              </a:rPr>
+              <a:t>44</a:t>
+            </a:r>
+          </a:p>
+        </p:txBody>
+      </p:sp>
+    </p:spTree>
+  </p:cSld>
+  <p:clrMapOvr>
+    <a:masterClrMapping/>
+  </p:clrMapOvr>
+</p:sld>
+</file>
+
+<file path=ppt/slides/slide45.xml><?xml version="1.0" encoding="utf-8"?>
+<p:sld xmlns:a="http://schemas.openxmlformats.org/drawingml/2006/main" xmlns:p="http://schemas.openxmlformats.org/presentationml/2006/main" xmlns:r="http://schemas.openxmlformats.org/officeDocument/2006/relationships">
+  <p:cSld>
+    <p:bg>
+      <p:bgPr>
+        <a:solidFill>
+          <a:srgbClr val="FFFFFF"/>
+        </a:solidFill>
+        <a:effectLst/>
+      </p:bgPr>
+    </p:bg>
+    <p:spTree>
+      <p:nvGrpSpPr>
+        <p:cNvPr id="1" name=""/>
+        <p:cNvGrpSpPr/>
+        <p:nvPr/>
+      </p:nvGrpSpPr>
+      <p:grpSpPr/>
+      <p:sp>
+        <p:nvSpPr>
+          <p:cNvPr id="2" name="Rectangle 1"/>
+          <p:cNvSpPr/>
+          <p:nvPr/>
+        </p:nvSpPr>
+        <p:spPr>
+          <a:xfrm>
+            <a:off x="0" y="0"/>
+            <a:ext cx="177800" cy="6858000"/>
+          </a:xfrm>
+          <a:prstGeom prst="rect">
+            <a:avLst/>
+          </a:prstGeom>
+          <a:solidFill>
+            <a:srgbClr val="0F7C86"/>
+          </a:solidFill>
+          <a:ln>
+            <a:noFill/>
+          </a:ln>
+          <a:effectLst/>
+        </p:spPr>
+        <p:style>
+          <a:lnRef idx="1">
+            <a:schemeClr val="accent1"/>
+          </a:lnRef>
+          <a:fillRef idx="3">
+            <a:schemeClr val="accent1"/>
+          </a:fillRef>
+          <a:effectRef idx="2">
+            <a:schemeClr val="accent1"/>
+          </a:effectRef>
+          <a:fontRef idx="minor">
+            <a:schemeClr val="lt1"/>
+          </a:fontRef>
+        </p:style>
+        <p:txBody>
+          <a:bodyPr rtlCol="0" anchor="ctr"/>
+          <a:lstStyle/>
+          <a:p>
+            <a:pPr algn="ctr"/>
+          </a:p>
+        </p:txBody>
+      </p:sp>
+      <p:sp>
+        <p:nvSpPr>
+          <p:cNvPr id="3" name="TextBox 2"/>
+          <p:cNvSpPr txBox="1"/>
+          <p:nvPr/>
+        </p:nvSpPr>
+        <p:spPr>
+          <a:xfrm>
+            <a:off x="1168400" y="984250"/>
+            <a:ext cx="10307828" cy="788591"/>
+          </a:xfrm>
+          <a:prstGeom prst="rect">
+            <a:avLst/>
+          </a:prstGeom>
+          <a:noFill/>
+        </p:spPr>
+        <p:txBody>
+          <a:bodyPr wrap="square" lIns="0" rIns="0" tIns="0" bIns="0" anchor="t">
+            <a:noAutofit/>
+          </a:bodyPr>
+          <a:lstStyle/>
+          <a:p>
+            <a:pPr algn="l">
+              <a:lnSpc>
+                <a:spcPct val="94000"/>
+              </a:lnSpc>
+            </a:pPr>
+            <a:r>
+              <a:rPr sz="2700" b="1" i="0">
+                <a:solidFill>
+                  <a:srgbClr val="1B2F4B"/>
+                </a:solidFill>
+                <a:latin typeface="Montserrat"/>
+              </a:rPr>
+              <a:t>Respostas 5: o que fazer, e se a explicação estiver errada?</a:t>
+            </a:r>
+          </a:p>
+        </p:txBody>
+      </p:sp>
+      <p:sp>
+        <p:nvSpPr>
+          <p:cNvPr id="4" name="TextBox 3"/>
+          <p:cNvSpPr txBox="1"/>
+          <p:nvPr/>
+        </p:nvSpPr>
+        <p:spPr>
+          <a:xfrm>
+            <a:off x="1168400" y="1937941"/>
+            <a:ext cx="10307828" cy="266700"/>
+          </a:xfrm>
+          <a:prstGeom prst="rect">
+            <a:avLst/>
+          </a:prstGeom>
+          <a:noFill/>
+        </p:spPr>
+        <p:txBody>
+          <a:bodyPr wrap="square" lIns="0" rIns="0" tIns="0" bIns="0" anchor="t">
+            <a:noAutofit/>
+          </a:bodyPr>
+          <a:lstStyle/>
+          <a:p>
+            <a:pPr algn="l">
+              <a:lnSpc>
+                <a:spcPct val="115000"/>
+              </a:lnSpc>
+            </a:pPr>
+            <a:r>
+              <a:rPr sz="1500" b="0" i="0">
+                <a:solidFill>
+                  <a:srgbClr val="66717F"/>
+                </a:solidFill>
+                <a:latin typeface="Montserrat"/>
+              </a:rPr>
+              <a:t>Cada estratégia combina com uma explicação. Se a explicação estiver errada, a estratégia falha.</a:t>
+            </a:r>
+          </a:p>
+        </p:txBody>
+      </p:sp>
+      <p:graphicFrame>
+        <p:nvGraphicFramePr>
+          <p:cNvPr id="5" name="Table 4"/>
+          <p:cNvGraphicFramePr>
+            <a:graphicFrameLocks noGrp="1"/>
+          </p:cNvGraphicFramePr>
+          <p:nvPr/>
+        </p:nvGraphicFramePr>
+        <p:xfrm>
+          <a:off x="1168400" y="2369741"/>
+          <a:ext cx="10007599" cy="1921668"/>
+        </p:xfrm>
+        <a:graphic>
+          <a:graphicData uri="http://schemas.openxmlformats.org/drawingml/2006/table">
+            <a:tbl>
+              <a:tblPr firstRow="0" bandRow="0">
+                <a:tableStyleId>{2D5ABB26-0587-4C30-8999-92F81FD0307C}</a:tableStyleId>
+              </a:tblPr>
+              <a:tblGrid>
+                <a:gridCol w="2401788"/>
+                <a:gridCol w="4002980"/>
+                <a:gridCol w="3602831"/>
+              </a:tblGrid>
+              <a:tr h="409178">
+                <a:tc>
+                  <a:txBody>
+                    <a:bodyPr wrap="square"/>
+                    <a:lstStyle/>
+                    <a:p>
+                      <a:pPr>
+                        <a:lnSpc>
+                          <a:spcPct val="100000"/>
+                        </a:lnSpc>
+                      </a:pPr>
+                      <a:r>
                         <a:rPr sz="1350" b="1" i="0">
                           <a:solidFill>
                             <a:srgbClr val="FFFFFF"/>
                           </a:solidFill>
                           <a:latin typeface="Montserrat"/>
                         </a:rPr>
-                        <a:t>Dado que ajuda</a:t>
+                        <a:t>Se achamos que ele…</a:t>
                       </a:r>
                     </a:p>
                   </a:txBody>
@@ -22029,7 +22727,34 @@
                           </a:solidFill>
                           <a:latin typeface="Montserrat"/>
                         </a:rPr>
-                        <a:t>Dado que atrapalha</a:t>
+                        <a:t>Podemos…</a:t>
+                      </a:r>
+                    </a:p>
+                  </a:txBody>
+                  <a:tcPr marL="114300" marR="114300" marT="68580" marB="68580" anchor="ctr">
+                    <a:solidFill>
+                      <a:srgbClr val="1B2F4B"/>
+                    </a:solidFill>
+                  </a:tcPr>
+                </a:tc>
+                <a:tc>
+                  <a:txBody>
+                    <a:bodyPr wrap="square"/>
+                    <a:lstStyle/>
+                    <a:p>
+                      <a:pPr>
+                        <a:lnSpc>
+                          <a:spcPct val="100000"/>
+                        </a:lnSpc>
+                      </a:pPr>
+                      <a:r>
+                        <a:rPr sz="1350" b="1" i="0">
+                          <a:solidFill>
+                            <a:srgbClr val="FFFFFF"/>
+                          </a:solidFill>
+                          <a:latin typeface="Montserrat"/>
+                        </a:rPr>
+                        <a:t>Mas, se a explicação estiver errada…</a:t>
                       </a:r>
                     </a:p>
                   </a:txBody>
@@ -22040,7 +22765,7 @@
                   </a:tcPr>
                 </a:tc>
               </a:tr>
-              <a:tr h="647700">
+              <a:tr h="871934">
                 <a:tc>
                   <a:txBody>
                     <a:bodyPr wrap="square"/>
@@ -22058,7 +22783,7 @@
                           </a:solidFill>
                           <a:latin typeface="Montserrat"/>
                         </a:rPr>
-                        <a:t>Quer os trilhos</a:t>
+                        <a:t>quer os trilhos</a:t>
                       </a:r>
                     </a:p>
                   </a:txBody>
@@ -22085,7 +22810,7 @@
                           </a:solidFill>
                           <a:latin typeface="Montserrat"/>
                         </a:rPr>
-                        <a:t>Acontece quando os trilhos são guardados; às vezes eles voltam; em casa, ao desligar a TV</a:t>
+                        <a:t>Combinar “primeiro mesa, depois trem” e devolver os trilhos ao terminar. Ensinar a pedir “mais trem” e a esperar.</a:t>
                       </a:r>
                     </a:p>
                   </a:txBody>
@@ -22112,7 +22837,7 @@
                           </a:solidFill>
                           <a:latin typeface="Montserrat"/>
                         </a:rPr>
-                        <a:t>No lanche os trilhos também foram guardados, e não houve episódio</a:t>
+                        <a:t>Se na verdade ele quer escapar da mesa, quase nada muda: a mesa continua difícil e o grito continua.</a:t>
                       </a:r>
                     </a:p>
                   </a:txBody>
@@ -22123,7 +22848,7 @@
                   </a:tcPr>
                 </a:tc>
               </a:tr>
-              <a:tr h="647700">
+              <a:tr h="640556">
                 <a:tc>
                   <a:txBody>
                     <a:bodyPr wrap="square"/>
@@ -22141,7 +22866,7 @@
                           </a:solidFill>
                           <a:latin typeface="Montserrat"/>
                         </a:rPr>
-                        <a:t>Foge da mesa</a:t>
+                        <a:t>quer escapar da mesa</a:t>
                       </a:r>
                     </a:p>
                   </a:txBody>
@@ -22168,7 +22893,7 @@
                           </a:solidFill>
                           <a:latin typeface="Montserrat"/>
                         </a:rPr>
-                        <a:t>Não acontece quando o próximo é o lanche; às vezes a mesa é adiada</a:t>
+                        <a:t>Deixar a tarefa mais curta e mais fácil, com tema de trens. Ensinar a pedir “pausa”.</a:t>
                       </a:r>
                     </a:p>
                   </a:txBody>
@@ -22195,173 +22920,7 @@
                           </a:solidFill>
                           <a:latin typeface="Montserrat"/>
                         </a:rPr>
-                        <a:t>Em casa, o antecedente (o que vem antes) é o banho</a:t>
-                      </a:r>
-                    </a:p>
-                  </a:txBody>
-                  <a:tcPr marL="114300" marR="114300" marT="68580" marB="68580" anchor="ctr">
-                    <a:solidFill>
-                      <a:srgbClr val="F1F4F6"/>
-                    </a:solidFill>
-                  </a:tcPr>
-                </a:tc>
-              </a:tr>
-              <a:tr h="647700">
-                <a:tc>
-                  <a:txBody>
-                    <a:bodyPr wrap="square"/>
-                    <a:lstStyle/>
-                    <a:p>
-                      <a:pPr>
-                        <a:lnSpc>
-                          <a:spcPct val="100000"/>
-                        </a:lnSpc>
-                      </a:pPr>
-                      <a:r>
-                        <a:rPr sz="1350" b="1" i="0">
-                          <a:solidFill>
-                            <a:srgbClr val="2E3A4A"/>
-                          </a:solidFill>
-                          <a:latin typeface="Montserrat"/>
-                        </a:rPr>
-                        <a:t>As duas juntas</a:t>
-                      </a:r>
-                    </a:p>
-                  </a:txBody>
-                  <a:tcPr marL="114300" marR="114300" marT="68580" marB="68580" anchor="ctr">
-                    <a:solidFill>
-                      <a:srgbClr val="FFFFFF"/>
-                    </a:solidFill>
-                  </a:tcPr>
-                </a:tc>
-                <a:tc>
-                  <a:txBody>
-                    <a:bodyPr wrap="square"/>
-                    <a:lstStyle/>
-                    <a:p>
-                      <a:pPr>
-                        <a:lnSpc>
-                          <a:spcPct val="100000"/>
-                        </a:lnSpc>
-                      </a:pPr>
-                      <a:r>
-                        <a:rPr sz="1350" b="0" i="0">
-                          <a:solidFill>
-                            <a:srgbClr val="2E3A4A"/>
-                          </a:solidFill>
-                          <a:latin typeface="Montserrat"/>
-                        </a:rPr>
-                        <a:t>Os dois antecedentes acontecem ao mesmo tempo</a:t>
-                      </a:r>
-                    </a:p>
-                  </a:txBody>
-                  <a:tcPr marL="114300" marR="114300" marT="68580" marB="68580" anchor="ctr">
-                    <a:solidFill>
-                      <a:srgbClr val="FFFFFF"/>
-                    </a:solidFill>
-                  </a:tcPr>
-                </a:tc>
-                <a:tc>
-                  <a:txBody>
-                    <a:bodyPr wrap="square"/>
-                    <a:lstStyle/>
-                    <a:p>
-                      <a:pPr>
-                        <a:lnSpc>
-                          <a:spcPct val="100000"/>
-                        </a:lnSpc>
-                      </a:pPr>
-                      <a:r>
-                        <a:rPr sz="1350" b="0" i="0">
-                          <a:solidFill>
-                            <a:srgbClr val="2E3A4A"/>
-                          </a:solidFill>
-                          <a:latin typeface="Montserrat"/>
-                        </a:rPr>
-                        <a:t>Precisa de avaliação</a:t>
-                      </a:r>
-                    </a:p>
-                  </a:txBody>
-                  <a:tcPr marL="114300" marR="114300" marT="68580" marB="68580" anchor="ctr">
-                    <a:solidFill>
-                      <a:srgbClr val="FFFFFF"/>
-                    </a:solidFill>
-                  </a:tcPr>
-                </a:tc>
-              </a:tr>
-              <a:tr h="438150">
-                <a:tc>
-                  <a:txBody>
-                    <a:bodyPr wrap="square"/>
-                    <a:lstStyle/>
-                    <a:p>
-                      <a:pPr>
-                        <a:lnSpc>
-                          <a:spcPct val="100000"/>
-                        </a:lnSpc>
-                      </a:pPr>
-                      <a:r>
-                        <a:rPr sz="1350" b="1" i="0">
-                          <a:solidFill>
-                            <a:srgbClr val="2E3A4A"/>
-                          </a:solidFill>
-                          <a:latin typeface="Montserrat"/>
-                        </a:rPr>
-                        <a:t>Quer atenção</a:t>
-                      </a:r>
-                    </a:p>
-                  </a:txBody>
-                  <a:tcPr marL="114300" marR="114300" marT="68580" marB="68580" anchor="ctr">
-                    <a:solidFill>
-                      <a:srgbClr val="F1F4F6"/>
-                    </a:solidFill>
-                  </a:tcPr>
-                </a:tc>
-                <a:tc>
-                  <a:txBody>
-                    <a:bodyPr wrap="square"/>
-                    <a:lstStyle/>
-                    <a:p>
-                      <a:pPr>
-                        <a:lnSpc>
-                          <a:spcPct val="100000"/>
-                        </a:lnSpc>
-                      </a:pPr>
-                      <a:r>
-                        <a:rPr sz="1350" b="0" i="0">
-                          <a:solidFill>
-                            <a:srgbClr val="2E3A4A"/>
-                          </a:solidFill>
-                          <a:latin typeface="Montserrat"/>
-                        </a:rPr>
-                        <a:t>Possível atenção durante o episódio</a:t>
-                      </a:r>
-                    </a:p>
-                  </a:txBody>
-                  <a:tcPr marL="114300" marR="114300" marT="68580" marB="68580" anchor="ctr">
-                    <a:solidFill>
-                      <a:srgbClr val="F1F4F6"/>
-                    </a:solidFill>
-                  </a:tcPr>
-                </a:tc>
-                <a:tc>
-                  <a:txBody>
-                    <a:bodyPr wrap="square"/>
-                    <a:lstStyle/>
-                    <a:p>
-                      <a:pPr>
-                        <a:lnSpc>
-                          <a:spcPct val="100000"/>
-                        </a:lnSpc>
-                      </a:pPr>
-                      <a:r>
-                        <a:rPr sz="1350" b="0" i="0">
-                          <a:solidFill>
-                            <a:srgbClr val="2E3A4A"/>
-                          </a:solidFill>
-                          <a:latin typeface="Montserrat"/>
-                        </a:rPr>
-                        <a:t>Nenhum dado mostra isso</a:t>
+                        <a:t>Se na verdade ele quer os trilhos, o grito na hora de guardá-los continua.</a:t>
                       </a:r>
                     </a:p>
                   </a:txBody>
@@ -22378,14 +22937,14 @@
       </p:graphicFrame>
       <p:sp>
         <p:nvSpPr>
-          <p:cNvPr id="5" name="TextBox 4"/>
-          <p:cNvSpPr txBox="1"/>
-          <p:nvPr/>
-        </p:nvSpPr>
-        <p:spPr>
-          <a:xfrm>
-            <a:off x="1168400" y="4865092"/>
-            <a:ext cx="10307828" cy="561181"/>
+          <p:cNvPr id="6" name="TextBox 5"/>
+          <p:cNvSpPr txBox="1"/>
+          <p:nvPr/>
+        </p:nvSpPr>
+        <p:spPr>
+          <a:xfrm>
+            <a:off x="1168400" y="4456509"/>
+            <a:ext cx="10307828" cy="533400"/>
           </a:xfrm>
           <a:prstGeom prst="rect">
             <a:avLst/>
@@ -22400,488 +22959,72 @@
           <a:p>
             <a:pPr algn="l">
               <a:lnSpc>
+                <a:spcPct val="115000"/>
+              </a:lnSpc>
+            </a:pPr>
+            <a:r>
+              <a:rPr sz="1500" b="1" i="0">
+                <a:solidFill>
+                  <a:srgbClr val="2E3A4A"/>
+                </a:solidFill>
+                <a:latin typeface="Montserrat"/>
+              </a:rPr>
+              <a:t>Cuidado:</a:t>
+            </a:r>
+            <a:r>
+              <a:rPr sz="1500" b="0" i="0">
+                <a:solidFill>
+                  <a:srgbClr val="2E3A4A"/>
+                </a:solidFill>
+                <a:latin typeface="Montserrat"/>
+              </a:rPr>
+              <a:t> adiar a mesa sempre que ele grita, “para acalmar”, ensina que gritar faz a mesa sumir. O grito tende a aumentar.</a:t>
+            </a:r>
+          </a:p>
+        </p:txBody>
+      </p:sp>
+      <p:sp>
+        <p:nvSpPr>
+          <p:cNvPr id="7" name="TextBox 6"/>
+          <p:cNvSpPr txBox="1"/>
+          <p:nvPr/>
+        </p:nvSpPr>
+        <p:spPr>
+          <a:xfrm>
+            <a:off x="1168400" y="5155009"/>
+            <a:ext cx="10307828" cy="528241"/>
+          </a:xfrm>
+          <a:prstGeom prst="rect">
+            <a:avLst/>
+          </a:prstGeom>
+          <a:noFill/>
+        </p:spPr>
+        <p:txBody>
+          <a:bodyPr wrap="square" lIns="0" rIns="0" tIns="0" bIns="0" anchor="t">
+            <a:noAutofit/>
+          </a:bodyPr>
+          <a:lstStyle/>
+          <a:p>
+            <a:pPr algn="l">
+              <a:lnSpc>
                 <a:spcPct val="107000"/>
               </a:lnSpc>
             </a:pPr>
             <a:r>
-              <a:rPr sz="1700" b="1" i="0">
+              <a:rPr sz="1600" b="1" i="0">
                 <a:solidFill>
                   <a:srgbClr val="0F7C86"/>
                 </a:solidFill>
                 <a:latin typeface="Montserrat"/>
               </a:rPr>
-              <a:t>O lanche é a pista: enfraquece “quer os trilhos” e fortalece “foge da mesa” (ou as duas juntas).</a:t>
-            </a:r>
-          </a:p>
-        </p:txBody>
-      </p:sp>
-      <p:sp>
-        <p:nvSpPr>
-          <p:cNvPr id="6" name="TextBox 5"/>
-          <p:cNvSpPr txBox="1"/>
-          <p:nvPr/>
-        </p:nvSpPr>
-        <p:spPr>
-          <a:xfrm>
-            <a:off x="10820400" y="6343650"/>
-            <a:ext cx="784860" cy="184150"/>
-          </a:xfrm>
-          <a:prstGeom prst="rect">
-            <a:avLst/>
-          </a:prstGeom>
-          <a:noFill/>
-        </p:spPr>
-        <p:txBody>
-          <a:bodyPr wrap="square" lIns="0" rIns="0" tIns="0" bIns="0" anchor="t">
-            <a:noAutofit/>
-          </a:bodyPr>
-          <a:lstStyle/>
-          <a:p>
-            <a:pPr algn="r">
-              <a:lnSpc>
-                <a:spcPct val="98000"/>
-              </a:lnSpc>
-            </a:pPr>
-            <a:r>
-              <a:rPr sz="1200" b="0" i="0">
-                <a:solidFill>
-                  <a:srgbClr val="66717F"/>
-                </a:solidFill>
-                <a:latin typeface="Montserrat"/>
-              </a:rPr>
-              <a:t>44</a:t>
-            </a:r>
-          </a:p>
-        </p:txBody>
-      </p:sp>
-    </p:spTree>
-  </p:cSld>
-  <p:clrMapOvr>
-    <a:masterClrMapping/>
-  </p:clrMapOvr>
-</p:sld>
-</file>
-
-<file path=ppt/slides/slide45.xml><?xml version="1.0" encoding="utf-8"?>
-<p:sld xmlns:a="http://schemas.openxmlformats.org/drawingml/2006/main" xmlns:p="http://schemas.openxmlformats.org/presentationml/2006/main" xmlns:r="http://schemas.openxmlformats.org/officeDocument/2006/relationships">
-  <p:cSld>
-    <p:bg>
-      <p:bgPr>
-        <a:solidFill>
-          <a:srgbClr val="FFFFFF"/>
-        </a:solidFill>
-        <a:effectLst/>
-      </p:bgPr>
-    </p:bg>
-    <p:spTree>
-      <p:nvGrpSpPr>
-        <p:cNvPr id="1" name=""/>
-        <p:cNvGrpSpPr/>
-        <p:nvPr/>
-      </p:nvGrpSpPr>
-      <p:grpSpPr/>
-      <p:sp>
-        <p:nvSpPr>
-          <p:cNvPr id="2" name="Rectangle 1"/>
-          <p:cNvSpPr/>
-          <p:nvPr/>
-        </p:nvSpPr>
-        <p:spPr>
-          <a:xfrm>
-            <a:off x="0" y="0"/>
-            <a:ext cx="177800" cy="6858000"/>
-          </a:xfrm>
-          <a:prstGeom prst="rect">
-            <a:avLst/>
-          </a:prstGeom>
-          <a:solidFill>
-            <a:srgbClr val="0F7C86"/>
-          </a:solidFill>
-          <a:ln>
-            <a:noFill/>
-          </a:ln>
-          <a:effectLst/>
-        </p:spPr>
-        <p:style>
-          <a:lnRef idx="1">
-            <a:schemeClr val="accent1"/>
-          </a:lnRef>
-          <a:fillRef idx="3">
-            <a:schemeClr val="accent1"/>
-          </a:fillRef>
-          <a:effectRef idx="2">
-            <a:schemeClr val="accent1"/>
-          </a:effectRef>
-          <a:fontRef idx="minor">
-            <a:schemeClr val="lt1"/>
-          </a:fontRef>
-        </p:style>
-        <p:txBody>
-          <a:bodyPr rtlCol="0" anchor="ctr"/>
-          <a:lstStyle/>
-          <a:p>
-            <a:pPr algn="ctr"/>
-          </a:p>
-        </p:txBody>
-      </p:sp>
-      <p:sp>
-        <p:nvSpPr>
-          <p:cNvPr id="3" name="TextBox 2"/>
-          <p:cNvSpPr txBox="1"/>
-          <p:nvPr/>
-        </p:nvSpPr>
-        <p:spPr>
-          <a:xfrm>
-            <a:off x="1168400" y="1343720"/>
-            <a:ext cx="10307828" cy="817761"/>
-          </a:xfrm>
-          <a:prstGeom prst="rect">
-            <a:avLst/>
-          </a:prstGeom>
-          <a:noFill/>
-        </p:spPr>
-        <p:txBody>
-          <a:bodyPr wrap="square" lIns="0" rIns="0" tIns="0" bIns="0" anchor="t">
-            <a:noAutofit/>
-          </a:bodyPr>
-          <a:lstStyle/>
-          <a:p>
-            <a:pPr algn="l">
-              <a:lnSpc>
-                <a:spcPct val="94000"/>
-              </a:lnSpc>
-            </a:pPr>
-            <a:r>
-              <a:rPr sz="2800" b="1" i="0">
-                <a:solidFill>
-                  <a:srgbClr val="1B2F4B"/>
-                </a:solidFill>
-                <a:latin typeface="Montserrat"/>
-              </a:rPr>
-              <a:t>Respostas 5: o que fazer, e se a explicação estiver errada?</a:t>
-            </a:r>
-          </a:p>
-        </p:txBody>
-      </p:sp>
-      <p:graphicFrame>
-        <p:nvGraphicFramePr>
-          <p:cNvPr id="4" name="Table 3"/>
-          <p:cNvGraphicFramePr>
-            <a:graphicFrameLocks noGrp="1"/>
-          </p:cNvGraphicFramePr>
-          <p:nvPr/>
-        </p:nvGraphicFramePr>
-        <p:xfrm>
-          <a:off x="1168400" y="2415480"/>
-          <a:ext cx="10007600" cy="2324100"/>
-        </p:xfrm>
-        <a:graphic>
-          <a:graphicData uri="http://schemas.openxmlformats.org/drawingml/2006/table">
-            <a:tbl>
-              <a:tblPr firstRow="0" bandRow="0">
-                <a:tableStyleId>{2D5ABB26-0587-4C30-8999-92F81FD0307C}</a:tableStyleId>
-              </a:tblPr>
-              <a:tblGrid>
-                <a:gridCol w="5203924"/>
-                <a:gridCol w="4803676"/>
-              </a:tblGrid>
-              <a:tr h="463550">
-                <a:tc>
-                  <a:txBody>
-                    <a:bodyPr wrap="square"/>
-                    <a:lstStyle/>
-                    <a:p>
-                      <a:pPr>
-                        <a:lnSpc>
-                          <a:spcPct val="100000"/>
-                        </a:lnSpc>
-                      </a:pPr>
-                      <a:r>
-                        <a:rPr sz="1500" b="1" i="0">
-                          <a:solidFill>
-                            <a:srgbClr val="FFFFFF"/>
-                          </a:solidFill>
-                          <a:latin typeface="Montserrat"/>
-                        </a:rPr>
-                        <a:t>Se a explicação for…, podemos…</a:t>
-                      </a:r>
-                    </a:p>
-                  </a:txBody>
-                  <a:tcPr marL="114300" marR="114300" marT="68580" marB="68580" anchor="ctr">
-                    <a:solidFill>
-                      <a:srgbClr val="1B2F4B"/>
-                    </a:solidFill>
-                  </a:tcPr>
-                </a:tc>
-                <a:tc>
-                  <a:txBody>
-                    <a:bodyPr wrap="square"/>
-                    <a:lstStyle/>
-                    <a:p>
-                      <a:pPr>
-                        <a:lnSpc>
-                          <a:spcPct val="100000"/>
-                        </a:lnSpc>
-                      </a:pPr>
-                      <a:r>
-                        <a:rPr sz="1500" b="1" i="0">
-                          <a:solidFill>
-                            <a:srgbClr val="FFFFFF"/>
-                          </a:solidFill>
-                          <a:latin typeface="Montserrat"/>
-                        </a:rPr>
-                        <a:t>Se a explicação estiver errada…</a:t>
-                      </a:r>
-                    </a:p>
-                  </a:txBody>
-                  <a:tcPr marL="114300" marR="114300" marT="68580" marB="68580" anchor="ctr">
-                    <a:solidFill>
-                      <a:srgbClr val="1B2F4B"/>
-                    </a:solidFill>
-                  </a:tcPr>
-                </a:tc>
-              </a:tr>
-              <a:tr h="698500">
-                <a:tc>
-                  <a:txBody>
-                    <a:bodyPr wrap="square"/>
-                    <a:lstStyle/>
-                    <a:p>
-                      <a:pPr>
-                        <a:lnSpc>
-                          <a:spcPct val="100000"/>
-                        </a:lnSpc>
-                      </a:pPr>
-                      <a:r>
-                        <a:rPr sz="1500" b="1" i="0">
-                          <a:solidFill>
-                            <a:srgbClr val="2E3A4A"/>
-                          </a:solidFill>
-                          <a:latin typeface="Montserrat"/>
-                        </a:rPr>
-                        <a:t>Quer os trilhos:</a:t>
-                      </a:r>
-                      <a:r>
-                        <a:rPr sz="1500" b="0" i="0">
-                          <a:solidFill>
-                            <a:srgbClr val="2E3A4A"/>
-                          </a:solidFill>
-                          <a:latin typeface="Montserrat"/>
-                        </a:rPr>
-                        <a:t> “primeiro mesa, depois trem”; ensinar a pedir “mais trem” e a esperar</a:t>
-                      </a:r>
-                    </a:p>
-                  </a:txBody>
-                  <a:tcPr marL="114300" marR="114300" marT="68580" marB="68580" anchor="ctr">
-                    <a:solidFill>
-                      <a:srgbClr val="FFFFFF"/>
-                    </a:solidFill>
-                  </a:tcPr>
-                </a:tc>
-                <a:tc>
-                  <a:txBody>
-                    <a:bodyPr wrap="square"/>
-                    <a:lstStyle/>
-                    <a:p>
-                      <a:pPr>
-                        <a:lnSpc>
-                          <a:spcPct val="100000"/>
-                        </a:lnSpc>
-                      </a:pPr>
-                      <a:r>
-                        <a:rPr sz="1500" b="0" i="0">
-                          <a:solidFill>
-                            <a:srgbClr val="2E3A4A"/>
-                          </a:solidFill>
-                          <a:latin typeface="Montserrat"/>
-                        </a:rPr>
-                        <a:t>Se na verdade ele foge da mesa: pouco efeito, a mesa continua difícil</a:t>
-                      </a:r>
-                    </a:p>
-                  </a:txBody>
-                  <a:tcPr marL="114300" marR="114300" marT="68580" marB="68580" anchor="ctr">
-                    <a:solidFill>
-                      <a:srgbClr val="FFFFFF"/>
-                    </a:solidFill>
-                  </a:tcPr>
-                </a:tc>
-              </a:tr>
-              <a:tr h="698500">
-                <a:tc>
-                  <a:txBody>
-                    <a:bodyPr wrap="square"/>
-                    <a:lstStyle/>
-                    <a:p>
-                      <a:pPr>
-                        <a:lnSpc>
-                          <a:spcPct val="100000"/>
-                        </a:lnSpc>
-                      </a:pPr>
-                      <a:r>
-                        <a:rPr sz="1500" b="1" i="0">
-                          <a:solidFill>
-                            <a:srgbClr val="2E3A4A"/>
-                          </a:solidFill>
-                          <a:latin typeface="Montserrat"/>
-                        </a:rPr>
-                        <a:t>Foge da mesa:</a:t>
-                      </a:r>
-                      <a:r>
-                        <a:rPr sz="1500" b="0" i="0">
-                          <a:solidFill>
-                            <a:srgbClr val="2E3A4A"/>
-                          </a:solidFill>
-                          <a:latin typeface="Montserrat"/>
-                        </a:rPr>
-                        <a:t> tarefa mais curta, com tema de trens; ensinar a pedir “pausa”</a:t>
-                      </a:r>
-                    </a:p>
-                  </a:txBody>
-                  <a:tcPr marL="114300" marR="114300" marT="68580" marB="68580" anchor="ctr">
-                    <a:solidFill>
-                      <a:srgbClr val="F1F4F6"/>
-                    </a:solidFill>
-                  </a:tcPr>
-                </a:tc>
-                <a:tc>
-                  <a:txBody>
-                    <a:bodyPr wrap="square"/>
-                    <a:lstStyle/>
-                    <a:p>
-                      <a:pPr>
-                        <a:lnSpc>
-                          <a:spcPct val="100000"/>
-                        </a:lnSpc>
-                      </a:pPr>
-                      <a:r>
-                        <a:rPr sz="1500" b="0" i="0">
-                          <a:solidFill>
-                            <a:srgbClr val="2E3A4A"/>
-                          </a:solidFill>
-                          <a:latin typeface="Montserrat"/>
-                        </a:rPr>
-                        <a:t>Se na verdade ele quer os trilhos: o comportamento na hora de guardar continua</a:t>
-                      </a:r>
-                    </a:p>
-                  </a:txBody>
-                  <a:tcPr marL="114300" marR="114300" marT="68580" marB="68580" anchor="ctr">
-                    <a:solidFill>
-                      <a:srgbClr val="F1F4F6"/>
-                    </a:solidFill>
-                  </a:tcPr>
-                </a:tc>
-              </a:tr>
-              <a:tr h="463550">
-                <a:tc>
-                  <a:txBody>
-                    <a:bodyPr wrap="square"/>
-                    <a:lstStyle/>
-                    <a:p>
-                      <a:pPr>
-                        <a:lnSpc>
-                          <a:spcPct val="100000"/>
-                        </a:lnSpc>
-                      </a:pPr>
-                      <a:r>
-                        <a:rPr sz="1500" b="0" i="0">
-                          <a:solidFill>
-                            <a:srgbClr val="2E3A4A"/>
-                          </a:solidFill>
-                          <a:latin typeface="Montserrat"/>
-                        </a:rPr>
-                        <a:t>Adiar a mesa quando ele grita, “para acalmar”</a:t>
-                      </a:r>
-                    </a:p>
-                  </a:txBody>
-                  <a:tcPr marL="114300" marR="114300" marT="68580" marB="68580" anchor="ctr">
-                    <a:solidFill>
-                      <a:srgbClr val="FFFFFF"/>
-                    </a:solidFill>
-                  </a:tcPr>
-                </a:tc>
-                <a:tc>
-                  <a:txBody>
-                    <a:bodyPr wrap="square"/>
-                    <a:lstStyle/>
-                    <a:p>
-                      <a:pPr>
-                        <a:lnSpc>
-                          <a:spcPct val="100000"/>
-                        </a:lnSpc>
-                      </a:pPr>
-                      <a:r>
-                        <a:rPr sz="1500" b="1" i="0">
-                          <a:solidFill>
-                            <a:srgbClr val="2E3A4A"/>
-                          </a:solidFill>
-                          <a:latin typeface="Montserrat"/>
-                        </a:rPr>
-                        <a:t>Piora:</a:t>
-                      </a:r>
-                      <a:r>
-                        <a:rPr sz="1500" b="0" i="0">
-                          <a:solidFill>
-                            <a:srgbClr val="2E3A4A"/>
-                          </a:solidFill>
-                          <a:latin typeface="Montserrat"/>
-                        </a:rPr>
-                        <a:t> ele aprende que gritar funciona</a:t>
-                      </a:r>
-                    </a:p>
-                  </a:txBody>
-                  <a:tcPr marL="114300" marR="114300" marT="68580" marB="68580" anchor="ctr">
-                    <a:solidFill>
-                      <a:srgbClr val="FFFFFF"/>
-                    </a:solidFill>
-                  </a:tcPr>
-                </a:tc>
-              </a:tr>
-            </a:tbl>
-          </a:graphicData>
-        </a:graphic>
-      </p:graphicFrame>
-      <p:sp>
-        <p:nvSpPr>
-          <p:cNvPr id="5" name="TextBox 4"/>
-          <p:cNvSpPr txBox="1"/>
-          <p:nvPr/>
-        </p:nvSpPr>
-        <p:spPr>
-          <a:xfrm>
-            <a:off x="1168400" y="4993580"/>
-            <a:ext cx="10307828" cy="330200"/>
-          </a:xfrm>
-          <a:prstGeom prst="rect">
-            <a:avLst/>
-          </a:prstGeom>
-          <a:noFill/>
-        </p:spPr>
-        <p:txBody>
-          <a:bodyPr wrap="square" lIns="0" rIns="0" tIns="0" bIns="0" anchor="t">
-            <a:noAutofit/>
-          </a:bodyPr>
-          <a:lstStyle/>
-          <a:p>
-            <a:pPr algn="l">
-              <a:lnSpc>
-                <a:spcPct val="107000"/>
-              </a:lnSpc>
-            </a:pPr>
-            <a:r>
-              <a:rPr sz="2000" b="1" i="0">
-                <a:solidFill>
-                  <a:srgbClr val="0F7C86"/>
-                </a:solidFill>
-                <a:latin typeface="Montserrat"/>
-              </a:rPr>
-              <a:t>Errar a explicação pode ensinar o contrário do que queremos.</a:t>
-            </a:r>
-          </a:p>
-        </p:txBody>
-      </p:sp>
-      <p:sp>
-        <p:nvSpPr>
-          <p:cNvPr id="6" name="TextBox 5"/>
+              <a:t>Escolher a explicação errada pode não ajudar e até piorar. Por isso, avaliar vem antes de intervir.</a:t>
+            </a:r>
+          </a:p>
+        </p:txBody>
+      </p:sp>
+      <p:sp>
+        <p:nvSpPr>
+          <p:cNvPr id="8" name="TextBox 7"/>
           <p:cNvSpPr txBox="1"/>
           <p:nvPr/>
         </p:nvSpPr>
@@ -23123,7 +23266,7 @@
                 </a:solidFill>
                 <a:latin typeface="Montserrat"/>
               </a:rPr>
-              <a:t> se a função for fugir da mesa, o comportamento continua</a:t>
+              <a:t> se ele quer escapar da mesa, o grito continua mesmo sem os trilhos</a:t>
             </a:r>
           </a:p>
           <a:p>
@@ -23715,7 +23858,7 @@
                 </a:solidFill>
                 <a:latin typeface="Montserrat"/>
               </a:rPr>
-              <a:t>Fica mais forte a explicação “quer os trilhos” (ou as duas juntas): sem guardar os trilhos, quase não houve episódio. “Foge da mesa” fica mais fraca.</a:t>
+              <a:t>Fica mais forte a explicação “quer os trilhos” (ou as duas juntas): sem guardar os trilhos, quase não houve episódio. “Escapar da mesa” fica mais fraca.</a:t>
             </a:r>
           </a:p>
         </p:txBody>

--- a/workshop-aba-tea-lacc/apresentacao/Apresentacao_Workshop_ABA_TEA.pptx
+++ b/workshop-aba-tea-lacc/apresentacao/Apresentacao_Workshop_ABA_TEA.pptx
@@ -4706,7 +4706,7 @@
           <a:lstStyle/>
           <a:p>
             <a:r>
-              <a:t>O manual usa o termo "déficits"; o slide usa "diferenças" por coerência com a linguagem do workshop. Ao falar, mencionar que o texto diagnóstico usa "déficits". No domínio B, citar as quatro formas (movimentos, fala ou uso de objetos estereotipados; insistência na mesmice; interesses restritos e intensos; hiper ou hiporreatividade sensorial), das quais pelo menos duas são necessárias. Se perguntarem "só duas áreas?": sim. No DSM-IV havia a tríade (interação social, comunicação, comportamentos repetitivos); o DSM-5 juntou interação social e comunicação em um domínio, e o atraso de linguagem passou a ser especificador. Os outros critérios (C, D e E) são: sinais no início do desenvolvimento, prejuízo significativo e não ser melhor explicado por deficiência intelectual. Conferir a redação na edição em uso. Tempo: 3 min (início do Bloco 1, 9h40).</a:t>
+              <a:t>O manual usa o termo "déficits"; o slide usa "diferenças" por coerência com a linguagem do workshop. Ao falar, mencionar que o texto diagnóstico usa "déficits". No domínio B, citar as quatro formas (movimentos, fala ou uso de objetos estereotipados; insistência na mesmice; interesses restritos e intensos; hiper ou hiporreatividade sensorial), das quais pelo menos duas são necessárias. Se perguntarem "só duas áreas?": os sinais centrais ficam em dois domínios, mas o diagnóstico exige os cinco critérios (A a E). No DSM-IV havia a tríade (interação social, comunicação, comportamentos repetitivos); o DSM-5 juntou interação social e comunicação em um domínio, e o atraso de linguagem passou a ser especificador. Os outros critérios (C, D e E) são: sinais no início do desenvolvimento, prejuízo significativo e não ser melhor explicado por deficiência intelectual. Conferir a redação na edição em uso. Tempo: 3 min (início do Bloco 1, 9h40).</a:t>
             </a:r>
           </a:p>
         </p:txBody>
@@ -29628,8 +29628,8 @@
         </p:nvSpPr>
         <p:spPr>
           <a:xfrm>
-            <a:off x="1168400" y="977602"/>
-            <a:ext cx="10307828" cy="963811"/>
+            <a:off x="1168400" y="1516757"/>
+            <a:ext cx="10307828" cy="817761"/>
           </a:xfrm>
           <a:prstGeom prst="rect">
             <a:avLst/>
@@ -29648,13 +29648,13 @@
               </a:lnSpc>
             </a:pPr>
             <a:r>
-              <a:rPr sz="3300" b="1" i="0">
+              <a:rPr sz="2800" b="1" i="0">
                 <a:solidFill>
                   <a:srgbClr val="1B2F4B"/>
                 </a:solidFill>
                 <a:latin typeface="Montserrat"/>
               </a:rPr>
-              <a:t>O diagnóstico de TEA se apoia em dois domínios (áreas)</a:t>
+              <a:t>Diagnóstico de TEA: dois domínios de sinais e mais três critérios</a:t>
             </a:r>
           </a:p>
         </p:txBody>
@@ -29667,8 +29667,8 @@
         </p:nvSpPr>
         <p:spPr>
           <a:xfrm>
-            <a:off x="1168400" y="2195413"/>
-            <a:ext cx="4839970" cy="319980"/>
+            <a:off x="1168400" y="2512318"/>
+            <a:ext cx="4918456" cy="274241"/>
           </a:xfrm>
           <a:prstGeom prst="rect">
             <a:avLst/>
@@ -29687,13 +29687,13 @@
               </a:lnSpc>
             </a:pPr>
             <a:r>
-              <a:rPr sz="2100" b="1" i="0">
+              <a:rPr sz="1800" b="1" i="0">
                 <a:solidFill>
                   <a:srgbClr val="0F7C86"/>
                 </a:solidFill>
                 <a:latin typeface="Montserrat"/>
               </a:rPr>
-              <a:t>Comunicação e interação social</a:t>
+              <a:t>A. Comunicação e interação social</a:t>
             </a:r>
           </a:p>
         </p:txBody>
@@ -29706,8 +29706,8 @@
         </p:nvSpPr>
         <p:spPr>
           <a:xfrm>
-            <a:off x="1168400" y="2604294"/>
-            <a:ext cx="4839970" cy="675481"/>
+            <a:off x="1168400" y="2850059"/>
+            <a:ext cx="4918456" cy="995362"/>
           </a:xfrm>
           <a:prstGeom prst="rect">
             <a:avLst/>
@@ -29726,13 +29726,31 @@
               </a:lnSpc>
             </a:pPr>
             <a:r>
-              <a:rPr sz="1900" b="0" i="0">
+              <a:rPr sz="1400" b="0" i="0">
                 <a:solidFill>
                   <a:srgbClr val="2E3A4A"/>
                 </a:solidFill>
                 <a:latin typeface="Montserrat"/>
               </a:rPr>
-              <a:t>Diferenças persistentes, em vários contextos.</a:t>
+              <a:t>Diferenças persistentes, em vários contextos. Precisa das </a:t>
+            </a:r>
+            <a:r>
+              <a:rPr sz="1400" b="1" i="0">
+                <a:solidFill>
+                  <a:srgbClr val="2E3A4A"/>
+                </a:solidFill>
+                <a:latin typeface="Montserrat"/>
+              </a:rPr>
+              <a:t>três</a:t>
+            </a:r>
+            <a:r>
+              <a:rPr sz="1400" b="0" i="0">
+                <a:solidFill>
+                  <a:srgbClr val="2E3A4A"/>
+                </a:solidFill>
+                <a:latin typeface="Montserrat"/>
+              </a:rPr>
+              <a:t>: reciprocidade socioemocional (troca com o outro), comunicação não verbal (olhar, gestos, expressões) e criar e manter relacionamentos.</a:t>
             </a:r>
           </a:p>
         </p:txBody>
@@ -29745,8 +29763,8 @@
         </p:nvSpPr>
         <p:spPr>
           <a:xfrm>
-            <a:off x="6477000" y="2195413"/>
-            <a:ext cx="4839970" cy="319980"/>
+            <a:off x="6400800" y="2512318"/>
+            <a:ext cx="4918456" cy="274241"/>
           </a:xfrm>
           <a:prstGeom prst="rect">
             <a:avLst/>
@@ -29765,13 +29783,13 @@
               </a:lnSpc>
             </a:pPr>
             <a:r>
-              <a:rPr sz="2100" b="1" i="0">
+              <a:rPr sz="1800" b="1" i="0">
                 <a:solidFill>
                   <a:srgbClr val="0F7C86"/>
                 </a:solidFill>
                 <a:latin typeface="Montserrat"/>
               </a:rPr>
-              <a:t>Padrões restritos e repetitivos</a:t>
+              <a:t>B. Padrões restritos e repetitivos</a:t>
             </a:r>
           </a:p>
         </p:txBody>
@@ -29784,8 +29802,8 @@
         </p:nvSpPr>
         <p:spPr>
           <a:xfrm>
-            <a:off x="6477000" y="2604294"/>
-            <a:ext cx="4839970" cy="1350962"/>
+            <a:off x="6400800" y="2850059"/>
+            <a:ext cx="4918456" cy="995362"/>
           </a:xfrm>
           <a:prstGeom prst="rect">
             <a:avLst/>
@@ -29804,13 +29822,31 @@
               </a:lnSpc>
             </a:pPr>
             <a:r>
-              <a:rPr sz="1900" b="0" i="0">
+              <a:rPr sz="1400" b="0" i="0">
                 <a:solidFill>
                   <a:srgbClr val="2E3A4A"/>
                 </a:solidFill>
                 <a:latin typeface="Montserrat"/>
               </a:rPr>
-              <a:t>De comportamento, interesses ou atividades, incluindo respostas sensoriais (reações a sons, luzes, texturas).</a:t>
+              <a:t>Precisa de </a:t>
+            </a:r>
+            <a:r>
+              <a:rPr sz="1400" b="1" i="0">
+                <a:solidFill>
+                  <a:srgbClr val="2E3A4A"/>
+                </a:solidFill>
+                <a:latin typeface="Montserrat"/>
+              </a:rPr>
+              <a:t>pelo menos duas</a:t>
+            </a:r>
+            <a:r>
+              <a:rPr sz="1400" b="0" i="0">
+                <a:solidFill>
+                  <a:srgbClr val="2E3A4A"/>
+                </a:solidFill>
+                <a:latin typeface="Montserrat"/>
+              </a:rPr>
+              <a:t> de quatro: movimentos ou fala repetitivos; insistência na mesmice (rotinas rígidas); interesses restritos e intensos; respostas sensoriais (reações a sons, luzes, texturas).</a:t>
             </a:r>
           </a:p>
         </p:txBody>
@@ -29823,8 +29859,8 @@
         </p:nvSpPr>
         <p:spPr>
           <a:xfrm>
-            <a:off x="1168400" y="4209256"/>
-            <a:ext cx="10307828" cy="959941"/>
+            <a:off x="1168400" y="4023221"/>
+            <a:ext cx="10307828" cy="497681"/>
           </a:xfrm>
           <a:prstGeom prst="rect">
             <a:avLst/>
@@ -29843,13 +29879,22 @@
               </a:lnSpc>
             </a:pPr>
             <a:r>
-              <a:rPr sz="1800" b="0" i="0">
+              <a:rPr sz="1400" b="1" i="0">
                 <a:solidFill>
                   <a:srgbClr val="2E3A4A"/>
                 </a:solidFill>
                 <a:latin typeface="Montserrat"/>
               </a:rPr>
-              <a:t>Os sinais aparecem no início do desenvolvimento e têm impacto significativo no funcionamento (DSM-5-TR: manual de diagnóstico da Associação Americana de Psiquiatria).</a:t>
+              <a:t>Além disso:</a:t>
+            </a:r>
+            <a:r>
+              <a:rPr sz="1400" b="0" i="0">
+                <a:solidFill>
+                  <a:srgbClr val="2E3A4A"/>
+                </a:solidFill>
+                <a:latin typeface="Montserrat"/>
+              </a:rPr>
+              <a:t> C. os sinais aparecem no início do desenvolvimento; D. causam prejuízo significativo no dia a dia; E. não são melhor explicados por deficiência intelectual ou atraso global do desenvolvimento.</a:t>
             </a:r>
           </a:p>
         </p:txBody>
@@ -29862,8 +29907,8 @@
         </p:nvSpPr>
         <p:spPr>
           <a:xfrm>
-            <a:off x="1168400" y="5423198"/>
-            <a:ext cx="10307828" cy="266700"/>
+            <a:off x="1168400" y="4698702"/>
+            <a:ext cx="10307828" cy="426641"/>
           </a:xfrm>
           <a:prstGeom prst="rect">
             <a:avLst/>
@@ -29882,13 +29927,13 @@
               </a:lnSpc>
             </a:pPr>
             <a:r>
-              <a:rPr sz="1500" b="0" i="1">
+              <a:rPr sz="1200" b="0" i="1">
                 <a:solidFill>
                   <a:srgbClr val="66717F"/>
                 </a:solidFill>
                 <a:latin typeface="Montserrat"/>
               </a:rPr>
-              <a:t>No DSM-IV eram três áreas. Desde o DSM-5, comunicação e interação social formam um único domínio.</a:t>
+              <a:t>DSM-5-TR: manual de diagnóstico da Associação Americana de Psiquiatria. No DSM-IV eram três áreas; desde o DSM-5, comunicação e interação social formam um único domínio.</a:t>
             </a:r>
           </a:p>
         </p:txBody>
